--- a/output_ppt.pptx
+++ b/output_ppt.pptx
@@ -19184,7 +19184,7 @@
       </p:sp>
       <p:pic>
         <p:nvPicPr>
-          <p:cNvPr id="3170" name="Picture 3169" descr="temp_id_photo.jpg"/>
+          <p:cNvPr id="3170" name="Picture 3169" descr="image.jpg"/>
           <p:cNvPicPr>
             <a:picLocks noChangeAspect="1"/>
           </p:cNvPicPr>

--- a/output_ppt.pptx
+++ b/output_ppt.pptx
@@ -19184,7 +19184,7 @@
       </p:sp>
       <p:pic>
         <p:nvPicPr>
-          <p:cNvPr id="3170" name="Picture 3169" descr="image.jpg"/>
+          <p:cNvPr id="3170" name="Picture 3169" descr="id_photo.jpg"/>
           <p:cNvPicPr>
             <a:picLocks noChangeAspect="1"/>
           </p:cNvPicPr>
@@ -23645,6 +23645,30 @@
           </a:p>
         </p:txBody>
       </p:sp>
+      <p:pic>
+        <p:nvPicPr>
+          <p:cNvPr id="3" name="Picture 2" descr="psa_name_result.png"/>
+          <p:cNvPicPr>
+            <a:picLocks noChangeAspect="1"/>
+          </p:cNvPicPr>
+          <p:nvPr/>
+        </p:nvPicPr>
+        <p:blipFill>
+          <a:blip r:embed="rId2"/>
+          <a:stretch>
+            <a:fillRect/>
+          </a:stretch>
+        </p:blipFill>
+        <p:spPr>
+          <a:xfrm>
+            <a:off x="0" y="1145683"/>
+            <a:ext cx="9144000" cy="4566633"/>
+          </a:xfrm>
+          <a:prstGeom prst="rect">
+            <a:avLst/>
+          </a:prstGeom>
+        </p:spPr>
+      </p:pic>
     </p:spTree>
     <p:extLst>
       <p:ext uri="{BB962C8B-B14F-4D97-AF65-F5344CB8AC3E}">

--- a/output_ppt.pptx
+++ b/output_ppt.pptx
@@ -23724,6 +23724,198 @@
           </a:p>
         </p:txBody>
       </p:sp>
+      <p:pic>
+        <p:nvPicPr>
+          <p:cNvPr id="3" name="Picture 2" descr="default_image.jpg"/>
+          <p:cNvPicPr>
+            <a:picLocks noChangeAspect="1"/>
+          </p:cNvPicPr>
+          <p:nvPr/>
+        </p:nvPicPr>
+        <p:blipFill>
+          <a:blip r:embed="rId2"/>
+          <a:stretch>
+            <a:fillRect/>
+          </a:stretch>
+        </p:blipFill>
+        <p:spPr>
+          <a:xfrm>
+            <a:off x="-20052" y="0"/>
+            <a:ext cx="2296026" cy="3429000"/>
+          </a:xfrm>
+          <a:prstGeom prst="rect">
+            <a:avLst/>
+          </a:prstGeom>
+        </p:spPr>
+      </p:pic>
+      <p:pic>
+        <p:nvPicPr>
+          <p:cNvPr id="4" name="Picture 3" descr="default_image.jpg"/>
+          <p:cNvPicPr>
+            <a:picLocks noChangeAspect="1"/>
+          </p:cNvPicPr>
+          <p:nvPr/>
+        </p:nvPicPr>
+        <p:blipFill>
+          <a:blip r:embed="rId2"/>
+          <a:stretch>
+            <a:fillRect/>
+          </a:stretch>
+        </p:blipFill>
+        <p:spPr>
+          <a:xfrm>
+            <a:off x="2275973" y="0"/>
+            <a:ext cx="2296026" cy="3429000"/>
+          </a:xfrm>
+          <a:prstGeom prst="rect">
+            <a:avLst/>
+          </a:prstGeom>
+        </p:spPr>
+      </p:pic>
+      <p:pic>
+        <p:nvPicPr>
+          <p:cNvPr id="5" name="Picture 4" descr="default_image.jpg"/>
+          <p:cNvPicPr>
+            <a:picLocks noChangeAspect="1"/>
+          </p:cNvPicPr>
+          <p:nvPr/>
+        </p:nvPicPr>
+        <p:blipFill>
+          <a:blip r:embed="rId2"/>
+          <a:stretch>
+            <a:fillRect/>
+          </a:stretch>
+        </p:blipFill>
+        <p:spPr>
+          <a:xfrm>
+            <a:off x="4572000" y="0"/>
+            <a:ext cx="2296026" cy="3429000"/>
+          </a:xfrm>
+          <a:prstGeom prst="rect">
+            <a:avLst/>
+          </a:prstGeom>
+        </p:spPr>
+      </p:pic>
+      <p:pic>
+        <p:nvPicPr>
+          <p:cNvPr id="6" name="Picture 5" descr="id_photo.jpg"/>
+          <p:cNvPicPr>
+            <a:picLocks noChangeAspect="1"/>
+          </p:cNvPicPr>
+          <p:nvPr/>
+        </p:nvPicPr>
+        <p:blipFill>
+          <a:blip r:embed="rId3"/>
+          <a:stretch>
+            <a:fillRect/>
+          </a:stretch>
+        </p:blipFill>
+        <p:spPr>
+          <a:xfrm>
+            <a:off x="6868026" y="0"/>
+            <a:ext cx="2296026" cy="3429000"/>
+          </a:xfrm>
+          <a:prstGeom prst="rect">
+            <a:avLst/>
+          </a:prstGeom>
+        </p:spPr>
+      </p:pic>
+      <p:pic>
+        <p:nvPicPr>
+          <p:cNvPr id="7" name="Picture 6" descr="default_image.jpg"/>
+          <p:cNvPicPr>
+            <a:picLocks noChangeAspect="1"/>
+          </p:cNvPicPr>
+          <p:nvPr/>
+        </p:nvPicPr>
+        <p:blipFill>
+          <a:blip r:embed="rId2"/>
+          <a:stretch>
+            <a:fillRect/>
+          </a:stretch>
+        </p:blipFill>
+        <p:spPr>
+          <a:xfrm>
+            <a:off x="-20052" y="3429000"/>
+            <a:ext cx="2296026" cy="3429000"/>
+          </a:xfrm>
+          <a:prstGeom prst="rect">
+            <a:avLst/>
+          </a:prstGeom>
+        </p:spPr>
+      </p:pic>
+      <p:pic>
+        <p:nvPicPr>
+          <p:cNvPr id="8" name="Picture 7" descr="default_image.jpg"/>
+          <p:cNvPicPr>
+            <a:picLocks noChangeAspect="1"/>
+          </p:cNvPicPr>
+          <p:nvPr/>
+        </p:nvPicPr>
+        <p:blipFill>
+          <a:blip r:embed="rId2"/>
+          <a:stretch>
+            <a:fillRect/>
+          </a:stretch>
+        </p:blipFill>
+        <p:spPr>
+          <a:xfrm>
+            <a:off x="2275973" y="3429000"/>
+            <a:ext cx="2296026" cy="3429000"/>
+          </a:xfrm>
+          <a:prstGeom prst="rect">
+            <a:avLst/>
+          </a:prstGeom>
+        </p:spPr>
+      </p:pic>
+      <p:pic>
+        <p:nvPicPr>
+          <p:cNvPr id="9" name="Picture 8" descr="default_image.jpg"/>
+          <p:cNvPicPr>
+            <a:picLocks noChangeAspect="1"/>
+          </p:cNvPicPr>
+          <p:nvPr/>
+        </p:nvPicPr>
+        <p:blipFill>
+          <a:blip r:embed="rId2"/>
+          <a:stretch>
+            <a:fillRect/>
+          </a:stretch>
+        </p:blipFill>
+        <p:spPr>
+          <a:xfrm>
+            <a:off x="4572000" y="3429000"/>
+            <a:ext cx="2296026" cy="3429000"/>
+          </a:xfrm>
+          <a:prstGeom prst="rect">
+            <a:avLst/>
+          </a:prstGeom>
+        </p:spPr>
+      </p:pic>
+      <p:pic>
+        <p:nvPicPr>
+          <p:cNvPr id="10" name="Picture 9" descr="default_image.jpg"/>
+          <p:cNvPicPr>
+            <a:picLocks noChangeAspect="1"/>
+          </p:cNvPicPr>
+          <p:nvPr/>
+        </p:nvPicPr>
+        <p:blipFill>
+          <a:blip r:embed="rId2"/>
+          <a:stretch>
+            <a:fillRect/>
+          </a:stretch>
+        </p:blipFill>
+        <p:spPr>
+          <a:xfrm>
+            <a:off x="6868026" y="3429000"/>
+            <a:ext cx="2296026" cy="3429000"/>
+          </a:xfrm>
+          <a:prstGeom prst="rect">
+            <a:avLst/>
+          </a:prstGeom>
+        </p:spPr>
+      </p:pic>
     </p:spTree>
     <p:extLst>
       <p:ext uri="{BB962C8B-B14F-4D97-AF65-F5344CB8AC3E}">
@@ -23754,6 +23946,126 @@
           <a:chExt cx="0" cy="0"/>
         </a:xfrm>
       </p:grpSpPr>
+      <p:pic>
+        <p:nvPicPr>
+          <p:cNvPr id="2" name="Picture 1" descr="oral_default_image.jpg"/>
+          <p:cNvPicPr>
+            <a:picLocks noChangeAspect="1"/>
+          </p:cNvPicPr>
+          <p:nvPr/>
+        </p:nvPicPr>
+        <p:blipFill>
+          <a:blip r:embed="rId2"/>
+          <a:stretch>
+            <a:fillRect/>
+          </a:stretch>
+        </p:blipFill>
+        <p:spPr>
+          <a:xfrm>
+            <a:off x="1564849" y="914400"/>
+            <a:ext cx="3007150" cy="2011680"/>
+          </a:xfrm>
+          <a:prstGeom prst="rect">
+            <a:avLst/>
+          </a:prstGeom>
+        </p:spPr>
+      </p:pic>
+      <p:pic>
+        <p:nvPicPr>
+          <p:cNvPr id="3" name="Picture 2" descr="oral_default_image.jpg"/>
+          <p:cNvPicPr>
+            <a:picLocks noChangeAspect="1"/>
+          </p:cNvPicPr>
+          <p:nvPr/>
+        </p:nvPicPr>
+        <p:blipFill>
+          <a:blip r:embed="rId2"/>
+          <a:stretch>
+            <a:fillRect/>
+          </a:stretch>
+        </p:blipFill>
+        <p:spPr>
+          <a:xfrm>
+            <a:off x="4572000" y="914400"/>
+            <a:ext cx="3007150" cy="2011680"/>
+          </a:xfrm>
+          <a:prstGeom prst="rect">
+            <a:avLst/>
+          </a:prstGeom>
+        </p:spPr>
+      </p:pic>
+      <p:pic>
+        <p:nvPicPr>
+          <p:cNvPr id="4" name="Picture 3" descr="oral_default_image.jpg"/>
+          <p:cNvPicPr>
+            <a:picLocks noChangeAspect="1"/>
+          </p:cNvPicPr>
+          <p:nvPr/>
+        </p:nvPicPr>
+        <p:blipFill>
+          <a:blip r:embed="rId2"/>
+          <a:stretch>
+            <a:fillRect/>
+          </a:stretch>
+        </p:blipFill>
+        <p:spPr>
+          <a:xfrm>
+            <a:off x="61274" y="2926080"/>
+            <a:ext cx="3007150" cy="2011680"/>
+          </a:xfrm>
+          <a:prstGeom prst="rect">
+            <a:avLst/>
+          </a:prstGeom>
+        </p:spPr>
+      </p:pic>
+      <p:pic>
+        <p:nvPicPr>
+          <p:cNvPr id="5" name="Picture 4" descr="oralPhoto_4.jpg"/>
+          <p:cNvPicPr>
+            <a:picLocks noChangeAspect="1"/>
+          </p:cNvPicPr>
+          <p:nvPr/>
+        </p:nvPicPr>
+        <p:blipFill>
+          <a:blip r:embed="rId3"/>
+          <a:stretch>
+            <a:fillRect/>
+          </a:stretch>
+        </p:blipFill>
+        <p:spPr>
+          <a:xfrm>
+            <a:off x="3068424" y="2926080"/>
+            <a:ext cx="3007150" cy="2011680"/>
+          </a:xfrm>
+          <a:prstGeom prst="rect">
+            <a:avLst/>
+          </a:prstGeom>
+        </p:spPr>
+      </p:pic>
+      <p:pic>
+        <p:nvPicPr>
+          <p:cNvPr id="6" name="Picture 5" descr="oral_default_image.jpg"/>
+          <p:cNvPicPr>
+            <a:picLocks noChangeAspect="1"/>
+          </p:cNvPicPr>
+          <p:nvPr/>
+        </p:nvPicPr>
+        <p:blipFill>
+          <a:blip r:embed="rId2"/>
+          <a:stretch>
+            <a:fillRect/>
+          </a:stretch>
+        </p:blipFill>
+        <p:spPr>
+          <a:xfrm>
+            <a:off x="6075575" y="2926080"/>
+            <a:ext cx="3007150" cy="2011680"/>
+          </a:xfrm>
+          <a:prstGeom prst="rect">
+            <a:avLst/>
+          </a:prstGeom>
+        </p:spPr>
+      </p:pic>
     </p:spTree>
     <p:extLst>
       <p:ext uri="{BB962C8B-B14F-4D97-AF65-F5344CB8AC3E}">

--- a/output_ppt.pptx
+++ b/output_ppt.pptx
@@ -23822,14 +23822,14 @@
       </p:pic>
       <p:pic>
         <p:nvPicPr>
-          <p:cNvPr id="7" name="Picture 6" descr="default_image.jpg"/>
+          <p:cNvPr id="7" name="Picture 6" descr="photo_5.jpg"/>
           <p:cNvPicPr>
             <a:picLocks noChangeAspect="1"/>
           </p:cNvPicPr>
           <p:nvPr/>
         </p:nvPicPr>
         <p:blipFill>
-          <a:blip r:embed="rId2"/>
+          <a:blip r:embed="rId4"/>
           <a:stretch>
             <a:fillRect/>
           </a:stretch>

--- a/output_ppt.pptx
+++ b/output_ppt.pptx
@@ -12,13 +12,17 @@
     <p:sldId id="310" r:id="rId6"/>
     <p:sldId id="311" r:id="rId7"/>
     <p:sldId id="312" r:id="rId8"/>
-    <p:sldId id="313" r:id="rId9"/>
-    <p:sldId id="289" r:id="rId10"/>
-    <p:sldId id="294" r:id="rId11"/>
-    <p:sldId id="283" r:id="rId12"/>
-    <p:sldId id="284" r:id="rId13"/>
-    <p:sldId id="285" r:id="rId14"/>
-    <p:sldId id="286" r:id="rId15"/>
+    <p:sldId id="314" r:id="rId9"/>
+    <p:sldId id="315" r:id="rId10"/>
+    <p:sldId id="316" r:id="rId11"/>
+    <p:sldId id="317" r:id="rId12"/>
+    <p:sldId id="313" r:id="rId13"/>
+    <p:sldId id="289" r:id="rId14"/>
+    <p:sldId id="294" r:id="rId15"/>
+    <p:sldId id="283" r:id="rId16"/>
+    <p:sldId id="284" r:id="rId17"/>
+    <p:sldId id="285" r:id="rId18"/>
+    <p:sldId id="286" r:id="rId19"/>
   </p:sldIdLst>
   <p:sldSz cx="9144000" cy="6858000" type="screen4x3"/>
   <p:notesSz cx="6858000" cy="9144000"/>
@@ -495,7 +499,7 @@
           <a:p>
             <a:fld id="{B00729D7-BDA7-41E1-AD79-DC61E6DD2EC2}" type="datetimeFigureOut">
               <a:rPr lang="ko-KR" altLang="en-US" smtClean="0"/>
-              <a:t>2025-02-10</a:t>
+              <a:t>2025-02-17</a:t>
             </a:fld>
             <a:endParaRPr lang="ko-KR" altLang="en-US"/>
           </a:p>
@@ -665,7 +669,7 @@
           <a:p>
             <a:fld id="{B00729D7-BDA7-41E1-AD79-DC61E6DD2EC2}" type="datetimeFigureOut">
               <a:rPr lang="ko-KR" altLang="en-US" smtClean="0"/>
-              <a:t>2025-02-10</a:t>
+              <a:t>2025-02-17</a:t>
             </a:fld>
             <a:endParaRPr lang="ko-KR" altLang="en-US"/>
           </a:p>
@@ -845,7 +849,7 @@
           <a:p>
             <a:fld id="{B00729D7-BDA7-41E1-AD79-DC61E6DD2EC2}" type="datetimeFigureOut">
               <a:rPr lang="ko-KR" altLang="en-US" smtClean="0"/>
-              <a:t>2025-02-10</a:t>
+              <a:t>2025-02-17</a:t>
             </a:fld>
             <a:endParaRPr lang="ko-KR" altLang="en-US"/>
           </a:p>
@@ -1521,7 +1525,7 @@
           <a:p>
             <a:fld id="{B00729D7-BDA7-41E1-AD79-DC61E6DD2EC2}" type="datetimeFigureOut">
               <a:rPr lang="ko-KR" altLang="en-US" smtClean="0"/>
-              <a:t>2025-02-10</a:t>
+              <a:t>2025-02-17</a:t>
             </a:fld>
             <a:endParaRPr lang="ko-KR" altLang="en-US"/>
           </a:p>
@@ -1765,7 +1769,7 @@
           <a:p>
             <a:fld id="{B00729D7-BDA7-41E1-AD79-DC61E6DD2EC2}" type="datetimeFigureOut">
               <a:rPr lang="ko-KR" altLang="en-US" smtClean="0"/>
-              <a:t>2025-02-10</a:t>
+              <a:t>2025-02-17</a:t>
             </a:fld>
             <a:endParaRPr lang="ko-KR" altLang="en-US"/>
           </a:p>
@@ -1997,7 +2001,7 @@
           <a:p>
             <a:fld id="{B00729D7-BDA7-41E1-AD79-DC61E6DD2EC2}" type="datetimeFigureOut">
               <a:rPr lang="ko-KR" altLang="en-US" smtClean="0"/>
-              <a:t>2025-02-10</a:t>
+              <a:t>2025-02-17</a:t>
             </a:fld>
             <a:endParaRPr lang="ko-KR" altLang="en-US"/>
           </a:p>
@@ -2364,7 +2368,7 @@
           <a:p>
             <a:fld id="{B00729D7-BDA7-41E1-AD79-DC61E6DD2EC2}" type="datetimeFigureOut">
               <a:rPr lang="ko-KR" altLang="en-US" smtClean="0"/>
-              <a:t>2025-02-10</a:t>
+              <a:t>2025-02-17</a:t>
             </a:fld>
             <a:endParaRPr lang="ko-KR" altLang="en-US"/>
           </a:p>
@@ -2482,7 +2486,7 @@
           <a:p>
             <a:fld id="{B00729D7-BDA7-41E1-AD79-DC61E6DD2EC2}" type="datetimeFigureOut">
               <a:rPr lang="ko-KR" altLang="en-US" smtClean="0"/>
-              <a:t>2025-02-10</a:t>
+              <a:t>2025-02-17</a:t>
             </a:fld>
             <a:endParaRPr lang="ko-KR" altLang="en-US"/>
           </a:p>
@@ -2577,7 +2581,7 @@
           <a:p>
             <a:fld id="{B00729D7-BDA7-41E1-AD79-DC61E6DD2EC2}" type="datetimeFigureOut">
               <a:rPr lang="ko-KR" altLang="en-US" smtClean="0"/>
-              <a:t>2025-02-10</a:t>
+              <a:t>2025-02-17</a:t>
             </a:fld>
             <a:endParaRPr lang="ko-KR" altLang="en-US"/>
           </a:p>
@@ -2854,7 +2858,7 @@
           <a:p>
             <a:fld id="{B00729D7-BDA7-41E1-AD79-DC61E6DD2EC2}" type="datetimeFigureOut">
               <a:rPr lang="ko-KR" altLang="en-US" smtClean="0"/>
-              <a:t>2025-02-10</a:t>
+              <a:t>2025-02-17</a:t>
             </a:fld>
             <a:endParaRPr lang="ko-KR" altLang="en-US"/>
           </a:p>
@@ -3067,7 +3071,7 @@
           <a:p>
             <a:fld id="{B00729D7-BDA7-41E1-AD79-DC61E6DD2EC2}" type="datetimeFigureOut">
               <a:rPr lang="ko-KR" altLang="en-US" smtClean="0"/>
-              <a:t>2025-02-10</a:t>
+              <a:t>2025-02-17</a:t>
             </a:fld>
             <a:endParaRPr lang="ko-KR" altLang="en-US"/>
           </a:p>
@@ -19648,6 +19652,2563 @@
           <a:chExt cx="0" cy="0"/>
         </a:xfrm>
       </p:grpSpPr>
+    </p:spTree>
+    <p:extLst>
+      <p:ext uri="{BB962C8B-B14F-4D97-AF65-F5344CB8AC3E}">
+        <p14:creationId xmlns:p14="http://schemas.microsoft.com/office/powerpoint/2010/main" val="2939465190"/>
+      </p:ext>
+    </p:extLst>
+  </p:cSld>
+  <p:clrMapOvr>
+    <a:masterClrMapping/>
+  </p:clrMapOvr>
+</p:sld>
+</file>
+
+<file path=ppt/slides/slide11.xml><?xml version="1.0" encoding="utf-8"?>
+<p:sld xmlns:a="http://schemas.openxmlformats.org/drawingml/2006/main" xmlns:r="http://schemas.openxmlformats.org/officeDocument/2006/relationships" xmlns:p="http://schemas.openxmlformats.org/presentationml/2006/main">
+  <p:cSld>
+    <p:spTree>
+      <p:nvGrpSpPr>
+        <p:cNvPr id="1" name=""/>
+        <p:cNvGrpSpPr/>
+        <p:nvPr/>
+      </p:nvGrpSpPr>
+      <p:grpSpPr>
+        <a:xfrm>
+          <a:off x="0" y="0"/>
+          <a:ext cx="0" cy="0"/>
+          <a:chOff x="0" y="0"/>
+          <a:chExt cx="0" cy="0"/>
+        </a:xfrm>
+      </p:grpSpPr>
+    </p:spTree>
+    <p:extLst>
+      <p:ext uri="{BB962C8B-B14F-4D97-AF65-F5344CB8AC3E}">
+        <p14:creationId xmlns:p14="http://schemas.microsoft.com/office/powerpoint/2010/main" val="1750125100"/>
+      </p:ext>
+    </p:extLst>
+  </p:cSld>
+  <p:clrMapOvr>
+    <a:masterClrMapping/>
+  </p:clrMapOvr>
+</p:sld>
+</file>
+
+<file path=ppt/slides/slide12.xml><?xml version="1.0" encoding="utf-8"?>
+<p:sld xmlns:a="http://schemas.openxmlformats.org/drawingml/2006/main" xmlns:r="http://schemas.openxmlformats.org/officeDocument/2006/relationships" xmlns:p="http://schemas.openxmlformats.org/presentationml/2006/main">
+  <p:cSld>
+    <p:spTree>
+      <p:nvGrpSpPr>
+        <p:cNvPr id="1" name=""/>
+        <p:cNvGrpSpPr/>
+        <p:nvPr/>
+      </p:nvGrpSpPr>
+      <p:grpSpPr>
+        <a:xfrm>
+          <a:off x="0" y="0"/>
+          <a:ext cx="0" cy="0"/>
+          <a:chOff x="0" y="0"/>
+          <a:chExt cx="0" cy="0"/>
+        </a:xfrm>
+      </p:grpSpPr>
+    </p:spTree>
+    <p:extLst>
+      <p:ext uri="{BB962C8B-B14F-4D97-AF65-F5344CB8AC3E}">
+        <p14:creationId xmlns:p14="http://schemas.microsoft.com/office/powerpoint/2010/main" val="3238872301"/>
+      </p:ext>
+    </p:extLst>
+  </p:cSld>
+  <p:clrMapOvr>
+    <a:masterClrMapping/>
+  </p:clrMapOvr>
+</p:sld>
+</file>
+
+<file path=ppt/slides/slide13.xml><?xml version="1.0" encoding="utf-8"?>
+<p:sld xmlns:a="http://schemas.openxmlformats.org/drawingml/2006/main" xmlns:r="http://schemas.openxmlformats.org/officeDocument/2006/relationships" xmlns:p="http://schemas.openxmlformats.org/presentationml/2006/main">
+  <p:cSld>
+    <p:spTree>
+      <p:nvGrpSpPr>
+        <p:cNvPr id="1" name=""/>
+        <p:cNvGrpSpPr/>
+        <p:nvPr/>
+      </p:nvGrpSpPr>
+      <p:grpSpPr>
+        <a:xfrm>
+          <a:off x="0" y="0"/>
+          <a:ext cx="0" cy="0"/>
+          <a:chOff x="0" y="0"/>
+          <a:chExt cx="0" cy="0"/>
+        </a:xfrm>
+      </p:grpSpPr>
+      <p:graphicFrame>
+        <p:nvGraphicFramePr>
+          <p:cNvPr id="161" name="표"/>
+          <p:cNvGraphicFramePr/>
+          <p:nvPr/>
+        </p:nvGraphicFramePr>
+        <p:xfrm>
+          <a:off x="55037" y="901375"/>
+          <a:ext cx="9033929" cy="5146256"/>
+        </p:xfrm>
+        <a:graphic>
+          <a:graphicData uri="http://schemas.openxmlformats.org/drawingml/2006/table">
+            <a:tbl>
+              <a:tblPr/>
+              <a:tblGrid>
+                <a:gridCol w="1475442">
+                  <a:extLst>
+                    <a:ext uri="{9D8B030D-6E8A-4147-A177-3AD203B41FA5}">
+                      <a16:colId xmlns:a16="http://schemas.microsoft.com/office/drawing/2014/main" val="20000"/>
+                    </a:ext>
+                  </a:extLst>
+                </a:gridCol>
+                <a:gridCol w="4279718">
+                  <a:extLst>
+                    <a:ext uri="{9D8B030D-6E8A-4147-A177-3AD203B41FA5}">
+                      <a16:colId xmlns:a16="http://schemas.microsoft.com/office/drawing/2014/main" val="20001"/>
+                    </a:ext>
+                  </a:extLst>
+                </a:gridCol>
+                <a:gridCol w="3278769">
+                  <a:extLst>
+                    <a:ext uri="{9D8B030D-6E8A-4147-A177-3AD203B41FA5}">
+                      <a16:colId xmlns:a16="http://schemas.microsoft.com/office/drawing/2014/main" val="20002"/>
+                    </a:ext>
+                  </a:extLst>
+                </a:gridCol>
+              </a:tblGrid>
+              <a:tr h="237581">
+                <a:tc>
+                  <a:txBody>
+                    <a:bodyPr/>
+                    <a:lstStyle/>
+                    <a:p>
+                      <a:pPr defTabSz="914400">
+                        <a:tabLst>
+                          <a:tab pos="342900" algn="l"/>
+                        </a:tabLst>
+                        <a:defRPr>
+                          <a:latin typeface="Avenir Next Regular"/>
+                          <a:ea typeface="Avenir Next Regular"/>
+                          <a:cs typeface="Avenir Next Regular"/>
+                          <a:sym typeface="Avenir Next Regular"/>
+                        </a:defRPr>
+                      </a:pPr>
+                      <a:endParaRPr sz="300"/>
+                    </a:p>
+                  </a:txBody>
+                  <a:tcPr marL="19050" marR="19050" marT="19050" marB="19050" horzOverflow="overflow">
+                    <a:lnL w="3175">
+                      <a:solidFill>
+                        <a:srgbClr val="000000"/>
+                      </a:solidFill>
+                      <a:miter lim="400000"/>
+                    </a:lnL>
+                    <a:lnR w="3175">
+                      <a:solidFill>
+                        <a:srgbClr val="000000"/>
+                      </a:solidFill>
+                      <a:miter lim="400000"/>
+                    </a:lnR>
+                    <a:lnT w="3175">
+                      <a:solidFill>
+                        <a:srgbClr val="000000"/>
+                      </a:solidFill>
+                      <a:miter lim="400000"/>
+                    </a:lnT>
+                    <a:lnB w="12700">
+                      <a:miter lim="400000"/>
+                    </a:lnB>
+                    <a:solidFill>
+                      <a:srgbClr val="BEC0BF"/>
+                    </a:solidFill>
+                  </a:tcPr>
+                </a:tc>
+                <a:tc>
+                  <a:txBody>
+                    <a:bodyPr/>
+                    <a:lstStyle/>
+                    <a:p>
+                      <a:pPr algn="l" defTabSz="95250">
+                        <a:tabLst>
+                          <a:tab pos="342900" algn="l"/>
+                        </a:tabLst>
+                      </a:pPr>
+                      <a:r>
+                        <a:rPr sz="800" b="1"/>
+                        <a:t>Photo</a:t>
+                      </a:r>
+                    </a:p>
+                  </a:txBody>
+                  <a:tcPr marL="19050" marR="19050" marT="19050" marB="19050" horzOverflow="overflow">
+                    <a:lnL w="3175">
+                      <a:solidFill>
+                        <a:srgbClr val="000000"/>
+                      </a:solidFill>
+                      <a:miter lim="400000"/>
+                    </a:lnL>
+                    <a:lnR w="0">
+                      <a:miter lim="400000"/>
+                    </a:lnR>
+                    <a:lnT w="3175">
+                      <a:solidFill>
+                        <a:srgbClr val="000000"/>
+                      </a:solidFill>
+                      <a:miter lim="400000"/>
+                    </a:lnT>
+                    <a:lnB w="3175">
+                      <a:solidFill>
+                        <a:srgbClr val="D5D5D5"/>
+                      </a:solidFill>
+                      <a:miter lim="400000"/>
+                    </a:lnB>
+                    <a:solidFill>
+                      <a:srgbClr val="BEC0BF"/>
+                    </a:solidFill>
+                  </a:tcPr>
+                </a:tc>
+                <a:tc>
+                  <a:txBody>
+                    <a:bodyPr/>
+                    <a:lstStyle/>
+                    <a:p>
+                      <a:pPr algn="l" defTabSz="95250">
+                        <a:tabLst>
+                          <a:tab pos="342900" algn="l"/>
+                        </a:tabLst>
+                      </a:pPr>
+                      <a:r>
+                        <a:rPr sz="800" b="1"/>
+                        <a:t>Thermal infrared camera</a:t>
+                      </a:r>
+                    </a:p>
+                  </a:txBody>
+                  <a:tcPr marL="19050" marR="19050" marT="19050" marB="19050" horzOverflow="overflow">
+                    <a:lnL w="0">
+                      <a:miter lim="400000"/>
+                    </a:lnL>
+                    <a:lnR w="0">
+                      <a:miter lim="400000"/>
+                    </a:lnR>
+                    <a:lnT w="0">
+                      <a:miter lim="400000"/>
+                    </a:lnT>
+                    <a:lnB w="0">
+                      <a:miter lim="400000"/>
+                    </a:lnB>
+                    <a:solidFill>
+                      <a:srgbClr val="BEC0BF"/>
+                    </a:solidFill>
+                  </a:tcPr>
+                </a:tc>
+                <a:extLst>
+                  <a:ext uri="{0D108BD9-81ED-4DB2-BD59-A6C34878D82A}">
+                    <a16:rowId xmlns:a16="http://schemas.microsoft.com/office/drawing/2014/main" val="10000"/>
+                  </a:ext>
+                </a:extLst>
+              </a:tr>
+              <a:tr h="224291">
+                <a:tc rowSpan="8">
+                  <a:txBody>
+                    <a:bodyPr/>
+                    <a:lstStyle/>
+                    <a:p>
+                      <a:pPr algn="l" defTabSz="95250">
+                        <a:tabLst>
+                          <a:tab pos="342900" algn="l"/>
+                        </a:tabLst>
+                        <a:defRPr sz="2300" b="1">
+                          <a:latin typeface="Gill Sans"/>
+                          <a:ea typeface="Gill Sans"/>
+                          <a:cs typeface="Gill Sans"/>
+                          <a:sym typeface="Gill Sans"/>
+                        </a:defRPr>
+                      </a:pPr>
+                      <a:r>
+                        <a:rPr sz="900" baseline="0" dirty="0">
+                          <a:solidFill>
+                            <a:schemeClr val="tx1">
+                              <a:lumMod val="50000"/>
+                            </a:schemeClr>
+                          </a:solidFill>
+                        </a:rPr>
+                        <a:t>   </a:t>
+                      </a:r>
+                      <a:r>
+                        <a:rPr sz="800" baseline="0" dirty="0">
+                          <a:solidFill>
+                            <a:schemeClr val="tx1">
+                              <a:lumMod val="50000"/>
+                            </a:schemeClr>
+                          </a:solidFill>
+                        </a:rPr>
+                        <a:t>Standing</a:t>
+                      </a:r>
+                    </a:p>
+                  </a:txBody>
+                  <a:tcPr marL="19050" marR="19050" marT="19050" marB="19050" horzOverflow="overflow">
+                    <a:lnL w="3175">
+                      <a:solidFill>
+                        <a:srgbClr val="000000"/>
+                      </a:solidFill>
+                      <a:miter lim="400000"/>
+                    </a:lnL>
+                    <a:lnR w="3175">
+                      <a:solidFill>
+                        <a:srgbClr val="D5D5D5"/>
+                      </a:solidFill>
+                      <a:miter lim="400000"/>
+                    </a:lnR>
+                    <a:lnT w="12700">
+                      <a:miter lim="400000"/>
+                    </a:lnT>
+                    <a:lnB w="12700">
+                      <a:miter lim="400000"/>
+                    </a:lnB>
+                    <a:solidFill>
+                      <a:schemeClr val="bg1"/>
+                    </a:solidFill>
+                  </a:tcPr>
+                </a:tc>
+                <a:tc gridSpan="2">
+                  <a:txBody>
+                    <a:bodyPr/>
+                    <a:lstStyle/>
+                    <a:p>
+                      <a:pPr algn="l" defTabSz="95250">
+                        <a:tabLst>
+                          <a:tab pos="342900" algn="l"/>
+                        </a:tabLst>
+                      </a:pPr>
+                      <a:r>
+                        <a:rPr sz="800" b="1" i="1" baseline="0">
+                          <a:solidFill>
+                            <a:schemeClr val="tx1">
+                              <a:lumMod val="50000"/>
+                            </a:schemeClr>
+                          </a:solidFill>
+                        </a:rPr>
+                        <a:t>Mirror view.</a:t>
+                      </a:r>
+                    </a:p>
+                  </a:txBody>
+                  <a:tcPr marL="19050" marR="19050" marT="19050" marB="19050" horzOverflow="overflow">
+                    <a:lnL w="3175">
+                      <a:solidFill>
+                        <a:srgbClr val="D5D5D5"/>
+                      </a:solidFill>
+                      <a:miter lim="400000"/>
+                    </a:lnL>
+                    <a:lnR w="3175">
+                      <a:solidFill>
+                        <a:srgbClr val="000000"/>
+                      </a:solidFill>
+                      <a:miter lim="400000"/>
+                    </a:lnR>
+                    <a:lnT w="3175">
+                      <a:solidFill>
+                        <a:srgbClr val="D5D5D5"/>
+                      </a:solidFill>
+                      <a:miter lim="400000"/>
+                    </a:lnT>
+                    <a:lnB w="3175">
+                      <a:solidFill>
+                        <a:srgbClr val="D5D5D5"/>
+                      </a:solidFill>
+                      <a:miter lim="400000"/>
+                    </a:lnB>
+                    <a:solidFill>
+                      <a:schemeClr val="bg1"/>
+                    </a:solidFill>
+                  </a:tcPr>
+                </a:tc>
+                <a:tc hMerge="1">
+                  <a:txBody>
+                    <a:bodyPr/>
+                    <a:lstStyle/>
+                    <a:p>
+                      <a:endParaRPr lang="ko-KR"/>
+                    </a:p>
+                  </a:txBody>
+                  <a:tcPr/>
+                </a:tc>
+                <a:extLst>
+                  <a:ext uri="{0D108BD9-81ED-4DB2-BD59-A6C34878D82A}">
+                    <a16:rowId xmlns:a16="http://schemas.microsoft.com/office/drawing/2014/main" val="10001"/>
+                  </a:ext>
+                </a:extLst>
+              </a:tr>
+              <a:tr h="278130">
+                <a:tc vMerge="1">
+                  <a:txBody>
+                    <a:bodyPr/>
+                    <a:lstStyle/>
+                    <a:p>
+                      <a:endParaRPr lang="ko-KR"/>
+                    </a:p>
+                  </a:txBody>
+                  <a:tcPr/>
+                </a:tc>
+                <a:tc>
+                  <a:txBody>
+                    <a:bodyPr/>
+                    <a:lstStyle/>
+                    <a:p>
+                      <a:pPr algn="l" defTabSz="95250">
+                        <a:tabLst>
+                          <a:tab pos="342900" algn="l"/>
+                        </a:tabLst>
+                      </a:pPr>
+                      <a:r>
+                        <a:rPr sz="800" baseline="0" dirty="0">
+                          <a:solidFill>
+                            <a:schemeClr val="tx1">
+                              <a:lumMod val="50000"/>
+                            </a:schemeClr>
+                          </a:solidFill>
+                        </a:rPr>
+                        <a:t>1.Natural Leg 2.Natural foot 3.Natural one foot stance 
+4.Positional foot 5.positional one foot stance</a:t>
+                      </a:r>
+                    </a:p>
+                  </a:txBody>
+                  <a:tcPr marL="19050" marR="19050" marT="19050" marB="19050" horzOverflow="overflow">
+                    <a:lnL w="3175">
+                      <a:solidFill>
+                        <a:srgbClr val="000000"/>
+                      </a:solidFill>
+                      <a:miter lim="400000"/>
+                    </a:lnL>
+                    <a:lnR w="3175">
+                      <a:solidFill>
+                        <a:srgbClr val="000000"/>
+                      </a:solidFill>
+                      <a:miter lim="400000"/>
+                    </a:lnR>
+                    <a:lnT w="3175">
+                      <a:solidFill>
+                        <a:srgbClr val="D5D5D5"/>
+                      </a:solidFill>
+                      <a:miter lim="400000"/>
+                    </a:lnT>
+                    <a:lnB w="12700">
+                      <a:miter lim="400000"/>
+                    </a:lnB>
+                    <a:solidFill>
+                      <a:schemeClr val="bg1"/>
+                    </a:solidFill>
+                  </a:tcPr>
+                </a:tc>
+                <a:tc>
+                  <a:txBody>
+                    <a:bodyPr/>
+                    <a:lstStyle/>
+                    <a:p>
+                      <a:pPr defTabSz="914400">
+                        <a:tabLst>
+                          <a:tab pos="342900" algn="l"/>
+                        </a:tabLst>
+                        <a:defRPr sz="2200">
+                          <a:latin typeface="Avenir Next Regular"/>
+                          <a:ea typeface="Avenir Next Regular"/>
+                          <a:cs typeface="Avenir Next Regular"/>
+                          <a:sym typeface="Avenir Next Regular"/>
+                        </a:defRPr>
+                      </a:pPr>
+                      <a:endParaRPr sz="800" baseline="0">
+                        <a:solidFill>
+                          <a:schemeClr val="tx1">
+                            <a:lumMod val="50000"/>
+                          </a:schemeClr>
+                        </a:solidFill>
+                      </a:endParaRPr>
+                    </a:p>
+                  </a:txBody>
+                  <a:tcPr marL="19050" marR="19050" marT="19050" marB="19050" horzOverflow="overflow">
+                    <a:lnL w="3175">
+                      <a:solidFill>
+                        <a:srgbClr val="000000"/>
+                      </a:solidFill>
+                      <a:miter lim="400000"/>
+                    </a:lnL>
+                    <a:lnR w="3175">
+                      <a:solidFill>
+                        <a:srgbClr val="000000"/>
+                      </a:solidFill>
+                      <a:miter lim="400000"/>
+                    </a:lnR>
+                    <a:lnT w="12700">
+                      <a:miter lim="400000"/>
+                    </a:lnT>
+                    <a:lnB w="12700">
+                      <a:miter lim="400000"/>
+                    </a:lnB>
+                    <a:solidFill>
+                      <a:schemeClr val="bg1"/>
+                    </a:solidFill>
+                  </a:tcPr>
+                </a:tc>
+                <a:extLst>
+                  <a:ext uri="{0D108BD9-81ED-4DB2-BD59-A6C34878D82A}">
+                    <a16:rowId xmlns:a16="http://schemas.microsoft.com/office/drawing/2014/main" val="10002"/>
+                  </a:ext>
+                </a:extLst>
+              </a:tr>
+              <a:tr h="233123">
+                <a:tc vMerge="1">
+                  <a:txBody>
+                    <a:bodyPr/>
+                    <a:lstStyle/>
+                    <a:p>
+                      <a:endParaRPr lang="ko-KR"/>
+                    </a:p>
+                  </a:txBody>
+                  <a:tcPr/>
+                </a:tc>
+                <a:tc gridSpan="2">
+                  <a:txBody>
+                    <a:bodyPr/>
+                    <a:lstStyle/>
+                    <a:p>
+                      <a:pPr algn="l" defTabSz="95250">
+                        <a:tabLst>
+                          <a:tab pos="342900" algn="l"/>
+                        </a:tabLst>
+                      </a:pPr>
+                      <a:r>
+                        <a:rPr sz="800" b="1" i="1" baseline="0" dirty="0">
+                          <a:solidFill>
+                            <a:schemeClr val="tx1">
+                              <a:lumMod val="50000"/>
+                            </a:schemeClr>
+                          </a:solidFill>
+                        </a:rPr>
+                        <a:t>Posterior view.</a:t>
+                      </a:r>
+                    </a:p>
+                  </a:txBody>
+                  <a:tcPr marL="19050" marR="19050" marT="19050" marB="19050" horzOverflow="overflow">
+                    <a:lnL w="3175">
+                      <a:solidFill>
+                        <a:srgbClr val="000000"/>
+                      </a:solidFill>
+                      <a:miter lim="400000"/>
+                    </a:lnL>
+                    <a:lnR w="3175">
+                      <a:solidFill>
+                        <a:srgbClr val="000000"/>
+                      </a:solidFill>
+                      <a:miter lim="400000"/>
+                    </a:lnR>
+                    <a:lnT w="12700">
+                      <a:miter lim="400000"/>
+                    </a:lnT>
+                    <a:lnB w="12700">
+                      <a:miter lim="400000"/>
+                    </a:lnB>
+                    <a:solidFill>
+                      <a:schemeClr val="bg1"/>
+                    </a:solidFill>
+                  </a:tcPr>
+                </a:tc>
+                <a:tc hMerge="1">
+                  <a:txBody>
+                    <a:bodyPr/>
+                    <a:lstStyle/>
+                    <a:p>
+                      <a:endParaRPr lang="ko-KR"/>
+                    </a:p>
+                  </a:txBody>
+                  <a:tcPr/>
+                </a:tc>
+                <a:extLst>
+                  <a:ext uri="{0D108BD9-81ED-4DB2-BD59-A6C34878D82A}">
+                    <a16:rowId xmlns:a16="http://schemas.microsoft.com/office/drawing/2014/main" val="10003"/>
+                  </a:ext>
+                </a:extLst>
+              </a:tr>
+              <a:tr h="278130">
+                <a:tc vMerge="1">
+                  <a:txBody>
+                    <a:bodyPr/>
+                    <a:lstStyle/>
+                    <a:p>
+                      <a:endParaRPr lang="ko-KR"/>
+                    </a:p>
+                  </a:txBody>
+                  <a:tcPr/>
+                </a:tc>
+                <a:tc>
+                  <a:txBody>
+                    <a:bodyPr/>
+                    <a:lstStyle/>
+                    <a:p>
+                      <a:pPr algn="l" defTabSz="95250">
+                        <a:tabLst>
+                          <a:tab pos="342900" algn="l"/>
+                        </a:tabLst>
+                      </a:pPr>
+                      <a:r>
+                        <a:rPr sz="800" baseline="0" dirty="0">
+                          <a:solidFill>
+                            <a:schemeClr val="tx1">
+                              <a:lumMod val="50000"/>
+                            </a:schemeClr>
+                          </a:solidFill>
+                        </a:rPr>
+                        <a:t>1.Open &amp; Bite 2.Upper body flexion(Holding ankle &amp; Knee) 
+3.Nuchal rotation 4,Head side bending</a:t>
+                      </a:r>
+                    </a:p>
+                  </a:txBody>
+                  <a:tcPr marL="19050" marR="19050" marT="19050" marB="19050" horzOverflow="overflow">
+                    <a:lnL w="3175">
+                      <a:solidFill>
+                        <a:srgbClr val="000000"/>
+                      </a:solidFill>
+                      <a:miter lim="400000"/>
+                    </a:lnL>
+                    <a:lnR w="3175">
+                      <a:solidFill>
+                        <a:srgbClr val="000000"/>
+                      </a:solidFill>
+                      <a:miter lim="400000"/>
+                    </a:lnR>
+                    <a:lnT w="12700">
+                      <a:miter lim="400000"/>
+                    </a:lnT>
+                    <a:lnB w="12700">
+                      <a:miter lim="400000"/>
+                    </a:lnB>
+                    <a:solidFill>
+                      <a:schemeClr val="bg1"/>
+                    </a:solidFill>
+                  </a:tcPr>
+                </a:tc>
+                <a:tc>
+                  <a:txBody>
+                    <a:bodyPr/>
+                    <a:lstStyle/>
+                    <a:p>
+                      <a:pPr algn="l" defTabSz="95250">
+                        <a:tabLst>
+                          <a:tab pos="342900" algn="l"/>
+                        </a:tabLst>
+                      </a:pPr>
+                      <a:r>
+                        <a:rPr sz="800" baseline="0">
+                          <a:solidFill>
+                            <a:schemeClr val="tx1">
+                              <a:lumMod val="50000"/>
+                            </a:schemeClr>
+                          </a:solidFill>
+                        </a:rPr>
+                        <a:t>1.Open </a:t>
+                      </a:r>
+                    </a:p>
+                  </a:txBody>
+                  <a:tcPr marL="19050" marR="19050" marT="19050" marB="19050" horzOverflow="overflow">
+                    <a:lnL w="3175">
+                      <a:solidFill>
+                        <a:srgbClr val="000000"/>
+                      </a:solidFill>
+                      <a:miter lim="400000"/>
+                    </a:lnL>
+                    <a:lnR w="3175">
+                      <a:solidFill>
+                        <a:srgbClr val="000000"/>
+                      </a:solidFill>
+                      <a:miter lim="400000"/>
+                    </a:lnR>
+                    <a:lnT w="12700">
+                      <a:miter lim="400000"/>
+                    </a:lnT>
+                    <a:lnB w="12700">
+                      <a:miter lim="400000"/>
+                    </a:lnB>
+                    <a:solidFill>
+                      <a:schemeClr val="bg1"/>
+                    </a:solidFill>
+                  </a:tcPr>
+                </a:tc>
+                <a:extLst>
+                  <a:ext uri="{0D108BD9-81ED-4DB2-BD59-A6C34878D82A}">
+                    <a16:rowId xmlns:a16="http://schemas.microsoft.com/office/drawing/2014/main" val="10004"/>
+                  </a:ext>
+                </a:extLst>
+              </a:tr>
+              <a:tr h="232156">
+                <a:tc vMerge="1">
+                  <a:txBody>
+                    <a:bodyPr/>
+                    <a:lstStyle/>
+                    <a:p>
+                      <a:endParaRPr lang="ko-KR"/>
+                    </a:p>
+                  </a:txBody>
+                  <a:tcPr/>
+                </a:tc>
+                <a:tc gridSpan="2">
+                  <a:txBody>
+                    <a:bodyPr/>
+                    <a:lstStyle/>
+                    <a:p>
+                      <a:pPr algn="l" defTabSz="95250">
+                        <a:tabLst>
+                          <a:tab pos="342900" algn="l"/>
+                        </a:tabLst>
+                      </a:pPr>
+                      <a:r>
+                        <a:rPr sz="800" b="1" i="1" baseline="0" dirty="0">
+                          <a:solidFill>
+                            <a:schemeClr val="tx1">
+                              <a:lumMod val="50000"/>
+                            </a:schemeClr>
+                          </a:solidFill>
+                        </a:rPr>
+                        <a:t>Anterior view.</a:t>
+                      </a:r>
+                    </a:p>
+                  </a:txBody>
+                  <a:tcPr marL="19050" marR="19050" marT="19050" marB="19050" horzOverflow="overflow">
+                    <a:lnL w="3175">
+                      <a:solidFill>
+                        <a:srgbClr val="000000"/>
+                      </a:solidFill>
+                      <a:miter lim="400000"/>
+                    </a:lnL>
+                    <a:lnR w="3175">
+                      <a:solidFill>
+                        <a:srgbClr val="000000"/>
+                      </a:solidFill>
+                      <a:miter lim="400000"/>
+                    </a:lnR>
+                    <a:lnT w="12700">
+                      <a:miter lim="400000"/>
+                    </a:lnT>
+                    <a:lnB w="3175">
+                      <a:solidFill>
+                        <a:schemeClr val="accent2">
+                          <a:hueOff val="-85258"/>
+                          <a:satOff val="14347"/>
+                          <a:lumOff val="22373"/>
+                        </a:schemeClr>
+                      </a:solidFill>
+                      <a:miter lim="400000"/>
+                    </a:lnB>
+                    <a:solidFill>
+                      <a:schemeClr val="bg1"/>
+                    </a:solidFill>
+                  </a:tcPr>
+                </a:tc>
+                <a:tc hMerge="1">
+                  <a:txBody>
+                    <a:bodyPr/>
+                    <a:lstStyle/>
+                    <a:p>
+                      <a:endParaRPr lang="ko-KR"/>
+                    </a:p>
+                  </a:txBody>
+                  <a:tcPr/>
+                </a:tc>
+                <a:extLst>
+                  <a:ext uri="{0D108BD9-81ED-4DB2-BD59-A6C34878D82A}">
+                    <a16:rowId xmlns:a16="http://schemas.microsoft.com/office/drawing/2014/main" val="10005"/>
+                  </a:ext>
+                </a:extLst>
+              </a:tr>
+              <a:tr h="181268">
+                <a:tc vMerge="1">
+                  <a:txBody>
+                    <a:bodyPr/>
+                    <a:lstStyle/>
+                    <a:p>
+                      <a:endParaRPr lang="ko-KR"/>
+                    </a:p>
+                  </a:txBody>
+                  <a:tcPr/>
+                </a:tc>
+                <a:tc>
+                  <a:txBody>
+                    <a:bodyPr/>
+                    <a:lstStyle/>
+                    <a:p>
+                      <a:pPr algn="l" defTabSz="95250">
+                        <a:tabLst>
+                          <a:tab pos="342900" algn="l"/>
+                        </a:tabLst>
+                        <a:defRPr sz="2100"/>
+                      </a:pPr>
+                      <a:r>
+                        <a:rPr sz="800" baseline="0" dirty="0">
+                          <a:solidFill>
+                            <a:schemeClr val="tx1">
+                              <a:lumMod val="50000"/>
+                            </a:schemeClr>
+                          </a:solidFill>
+                        </a:rPr>
+                        <a:t>1.Open &amp; Bite  </a:t>
+                      </a:r>
+                      <a:r>
+                        <a:rPr sz="800" baseline="0" dirty="0">
+                          <a:solidFill>
+                            <a:schemeClr val="accent1">
+                              <a:lumMod val="75000"/>
+                            </a:schemeClr>
+                          </a:solidFill>
+                        </a:rPr>
+                        <a:t>2.Crossing eye &amp; biting video</a:t>
+                      </a:r>
+                    </a:p>
+                  </a:txBody>
+                  <a:tcPr marL="19050" marR="19050" marT="19050" marB="19050" horzOverflow="overflow">
+                    <a:lnL w="3175">
+                      <a:solidFill>
+                        <a:schemeClr val="accent2">
+                          <a:hueOff val="-85258"/>
+                          <a:satOff val="14347"/>
+                          <a:lumOff val="22373"/>
+                        </a:schemeClr>
+                      </a:solidFill>
+                      <a:miter lim="400000"/>
+                    </a:lnL>
+                    <a:lnR w="3175">
+                      <a:solidFill>
+                        <a:schemeClr val="accent2">
+                          <a:hueOff val="-85258"/>
+                          <a:satOff val="14347"/>
+                          <a:lumOff val="22373"/>
+                        </a:schemeClr>
+                      </a:solidFill>
+                      <a:miter lim="400000"/>
+                    </a:lnR>
+                    <a:lnT w="3175">
+                      <a:solidFill>
+                        <a:schemeClr val="accent2">
+                          <a:hueOff val="-85258"/>
+                          <a:satOff val="14347"/>
+                          <a:lumOff val="22373"/>
+                        </a:schemeClr>
+                      </a:solidFill>
+                      <a:miter lim="400000"/>
+                    </a:lnT>
+                    <a:lnB w="3175">
+                      <a:solidFill>
+                        <a:schemeClr val="accent2">
+                          <a:hueOff val="-85258"/>
+                          <a:satOff val="14347"/>
+                          <a:lumOff val="22373"/>
+                        </a:schemeClr>
+                      </a:solidFill>
+                      <a:miter lim="400000"/>
+                    </a:lnB>
+                    <a:solidFill>
+                      <a:schemeClr val="bg1"/>
+                    </a:solidFill>
+                  </a:tcPr>
+                </a:tc>
+                <a:tc>
+                  <a:txBody>
+                    <a:bodyPr/>
+                    <a:lstStyle/>
+                    <a:p>
+                      <a:pPr algn="l" defTabSz="95250">
+                        <a:tabLst>
+                          <a:tab pos="342900" algn="l"/>
+                        </a:tabLst>
+                      </a:pPr>
+                      <a:r>
+                        <a:rPr sz="800" baseline="0">
+                          <a:solidFill>
+                            <a:schemeClr val="tx1">
+                              <a:lumMod val="50000"/>
+                            </a:schemeClr>
+                          </a:solidFill>
+                        </a:rPr>
+                        <a:t>1.Open</a:t>
+                      </a:r>
+                    </a:p>
+                  </a:txBody>
+                  <a:tcPr marL="19050" marR="19050" marT="19050" marB="19050" horzOverflow="overflow">
+                    <a:lnL w="3175">
+                      <a:solidFill>
+                        <a:schemeClr val="accent2">
+                          <a:hueOff val="-85258"/>
+                          <a:satOff val="14347"/>
+                          <a:lumOff val="22373"/>
+                        </a:schemeClr>
+                      </a:solidFill>
+                      <a:miter lim="400000"/>
+                    </a:lnL>
+                    <a:lnR w="3175">
+                      <a:solidFill>
+                        <a:srgbClr val="000000"/>
+                      </a:solidFill>
+                      <a:miter lim="400000"/>
+                    </a:lnR>
+                    <a:lnT w="12700">
+                      <a:miter lim="400000"/>
+                    </a:lnT>
+                    <a:lnB w="12700">
+                      <a:miter lim="400000"/>
+                    </a:lnB>
+                    <a:solidFill>
+                      <a:schemeClr val="bg1"/>
+                    </a:solidFill>
+                  </a:tcPr>
+                </a:tc>
+                <a:extLst>
+                  <a:ext uri="{0D108BD9-81ED-4DB2-BD59-A6C34878D82A}">
+                    <a16:rowId xmlns:a16="http://schemas.microsoft.com/office/drawing/2014/main" val="10006"/>
+                  </a:ext>
+                </a:extLst>
+              </a:tr>
+              <a:tr h="223750">
+                <a:tc vMerge="1">
+                  <a:txBody>
+                    <a:bodyPr/>
+                    <a:lstStyle/>
+                    <a:p>
+                      <a:endParaRPr lang="ko-KR"/>
+                    </a:p>
+                  </a:txBody>
+                  <a:tcPr/>
+                </a:tc>
+                <a:tc gridSpan="2">
+                  <a:txBody>
+                    <a:bodyPr/>
+                    <a:lstStyle/>
+                    <a:p>
+                      <a:pPr algn="l" defTabSz="95250">
+                        <a:tabLst>
+                          <a:tab pos="342900" algn="l"/>
+                        </a:tabLst>
+                      </a:pPr>
+                      <a:r>
+                        <a:rPr sz="800" b="1" i="1" baseline="0" dirty="0">
+                          <a:solidFill>
+                            <a:schemeClr val="tx1">
+                              <a:lumMod val="50000"/>
+                            </a:schemeClr>
+                          </a:solidFill>
+                        </a:rPr>
+                        <a:t>Lateral view.</a:t>
+                      </a:r>
+                    </a:p>
+                  </a:txBody>
+                  <a:tcPr marL="19050" marR="19050" marT="19050" marB="19050" horzOverflow="overflow">
+                    <a:lnL w="3175">
+                      <a:solidFill>
+                        <a:srgbClr val="000000"/>
+                      </a:solidFill>
+                      <a:miter lim="400000"/>
+                    </a:lnL>
+                    <a:lnR w="3175">
+                      <a:solidFill>
+                        <a:srgbClr val="000000"/>
+                      </a:solidFill>
+                      <a:miter lim="400000"/>
+                    </a:lnR>
+                    <a:lnT w="3175">
+                      <a:solidFill>
+                        <a:schemeClr val="accent2">
+                          <a:hueOff val="-85258"/>
+                          <a:satOff val="14347"/>
+                          <a:lumOff val="22373"/>
+                        </a:schemeClr>
+                      </a:solidFill>
+                      <a:miter lim="400000"/>
+                    </a:lnT>
+                    <a:lnB w="12700">
+                      <a:miter lim="400000"/>
+                    </a:lnB>
+                    <a:solidFill>
+                      <a:schemeClr val="bg1"/>
+                    </a:solidFill>
+                  </a:tcPr>
+                </a:tc>
+                <a:tc hMerge="1">
+                  <a:txBody>
+                    <a:bodyPr/>
+                    <a:lstStyle/>
+                    <a:p>
+                      <a:endParaRPr lang="ko-KR"/>
+                    </a:p>
+                  </a:txBody>
+                  <a:tcPr/>
+                </a:tc>
+                <a:extLst>
+                  <a:ext uri="{0D108BD9-81ED-4DB2-BD59-A6C34878D82A}">
+                    <a16:rowId xmlns:a16="http://schemas.microsoft.com/office/drawing/2014/main" val="10007"/>
+                  </a:ext>
+                </a:extLst>
+              </a:tr>
+              <a:tr h="249605">
+                <a:tc vMerge="1">
+                  <a:txBody>
+                    <a:bodyPr/>
+                    <a:lstStyle/>
+                    <a:p>
+                      <a:endParaRPr lang="ko-KR"/>
+                    </a:p>
+                  </a:txBody>
+                  <a:tcPr/>
+                </a:tc>
+                <a:tc>
+                  <a:txBody>
+                    <a:bodyPr/>
+                    <a:lstStyle/>
+                    <a:p>
+                      <a:pPr algn="l" defTabSz="95250">
+                        <a:tabLst>
+                          <a:tab pos="342900" algn="l"/>
+                        </a:tabLst>
+                        <a:defRPr sz="2100"/>
+                      </a:pPr>
+                      <a:r>
+                        <a:rPr sz="800" baseline="0" dirty="0">
+                          <a:solidFill>
+                            <a:schemeClr val="tx1">
+                              <a:lumMod val="50000"/>
+                            </a:schemeClr>
+                          </a:solidFill>
+                        </a:rPr>
+                        <a:t>1.Open &amp; Bite 2.Upper body flexion(Holding ankle &amp; Knee</a:t>
+                      </a:r>
+                      <a:r>
+                        <a:rPr sz="800" baseline="0" dirty="0">
+                          <a:solidFill>
+                            <a:schemeClr val="accent1">
+                              <a:lumMod val="75000"/>
+                            </a:schemeClr>
+                          </a:solidFill>
+                        </a:rPr>
+                        <a:t>) 3.Crossing eye &amp; biting video</a:t>
+                      </a:r>
+                    </a:p>
+                  </a:txBody>
+                  <a:tcPr marL="19050" marR="19050" marT="19050" marB="19050" horzOverflow="overflow">
+                    <a:lnL w="3175">
+                      <a:solidFill>
+                        <a:srgbClr val="000000"/>
+                      </a:solidFill>
+                      <a:miter lim="400000"/>
+                    </a:lnL>
+                    <a:lnR w="3175">
+                      <a:solidFill>
+                        <a:srgbClr val="000000"/>
+                      </a:solidFill>
+                      <a:miter lim="400000"/>
+                    </a:lnR>
+                    <a:lnT w="12700">
+                      <a:miter lim="400000"/>
+                    </a:lnT>
+                    <a:lnB w="12700">
+                      <a:miter lim="400000"/>
+                    </a:lnB>
+                    <a:solidFill>
+                      <a:schemeClr val="bg1"/>
+                    </a:solidFill>
+                  </a:tcPr>
+                </a:tc>
+                <a:tc>
+                  <a:txBody>
+                    <a:bodyPr/>
+                    <a:lstStyle/>
+                    <a:p>
+                      <a:pPr algn="l" defTabSz="95250">
+                        <a:tabLst>
+                          <a:tab pos="342900" algn="l"/>
+                        </a:tabLst>
+                      </a:pPr>
+                      <a:r>
+                        <a:rPr sz="800" baseline="0">
+                          <a:solidFill>
+                            <a:schemeClr val="tx1">
+                              <a:lumMod val="50000"/>
+                            </a:schemeClr>
+                          </a:solidFill>
+                        </a:rPr>
+                        <a:t>1.Open</a:t>
+                      </a:r>
+                    </a:p>
+                  </a:txBody>
+                  <a:tcPr marL="19050" marR="19050" marT="19050" marB="19050" horzOverflow="overflow">
+                    <a:lnL w="3175">
+                      <a:solidFill>
+                        <a:srgbClr val="000000"/>
+                      </a:solidFill>
+                      <a:miter lim="400000"/>
+                    </a:lnL>
+                    <a:lnR w="3175">
+                      <a:solidFill>
+                        <a:srgbClr val="000000"/>
+                      </a:solidFill>
+                      <a:miter lim="400000"/>
+                    </a:lnR>
+                    <a:lnT w="12700">
+                      <a:miter lim="400000"/>
+                    </a:lnT>
+                    <a:lnB w="12700">
+                      <a:miter lim="400000"/>
+                    </a:lnB>
+                    <a:solidFill>
+                      <a:schemeClr val="bg1"/>
+                    </a:solidFill>
+                  </a:tcPr>
+                </a:tc>
+                <a:extLst>
+                  <a:ext uri="{0D108BD9-81ED-4DB2-BD59-A6C34878D82A}">
+                    <a16:rowId xmlns:a16="http://schemas.microsoft.com/office/drawing/2014/main" val="10008"/>
+                  </a:ext>
+                </a:extLst>
+              </a:tr>
+              <a:tr h="215279">
+                <a:tc rowSpan="4">
+                  <a:txBody>
+                    <a:bodyPr/>
+                    <a:lstStyle/>
+                    <a:p>
+                      <a:pPr algn="l" defTabSz="95250">
+                        <a:tabLst>
+                          <a:tab pos="342900" algn="l"/>
+                        </a:tabLst>
+                      </a:pPr>
+                      <a:r>
+                        <a:rPr sz="800" b="1" baseline="0">
+                          <a:solidFill>
+                            <a:schemeClr val="tx1">
+                              <a:lumMod val="50000"/>
+                            </a:schemeClr>
+                          </a:solidFill>
+                          <a:latin typeface="Gill Sans"/>
+                          <a:ea typeface="Gill Sans"/>
+                          <a:cs typeface="Gill Sans"/>
+                          <a:sym typeface="Gill Sans"/>
+                        </a:rPr>
+                        <a:t>     Foam mat  
+       view</a:t>
+                      </a:r>
+                    </a:p>
+                  </a:txBody>
+                  <a:tcPr marL="19050" marR="19050" marT="19050" marB="19050" horzOverflow="overflow">
+                    <a:lnL w="3175">
+                      <a:solidFill>
+                        <a:srgbClr val="000000"/>
+                      </a:solidFill>
+                      <a:miter lim="400000"/>
+                    </a:lnL>
+                    <a:lnR w="3175">
+                      <a:solidFill>
+                        <a:srgbClr val="000000"/>
+                      </a:solidFill>
+                      <a:miter lim="400000"/>
+                    </a:lnR>
+                    <a:lnT w="12700">
+                      <a:miter lim="400000"/>
+                    </a:lnT>
+                    <a:lnB w="12700">
+                      <a:miter lim="400000"/>
+                    </a:lnB>
+                    <a:solidFill>
+                      <a:schemeClr val="bg1"/>
+                    </a:solidFill>
+                  </a:tcPr>
+                </a:tc>
+                <a:tc gridSpan="2">
+                  <a:txBody>
+                    <a:bodyPr/>
+                    <a:lstStyle/>
+                    <a:p>
+                      <a:pPr algn="l" defTabSz="95250">
+                        <a:tabLst>
+                          <a:tab pos="342900" algn="l"/>
+                        </a:tabLst>
+                      </a:pPr>
+                      <a:r>
+                        <a:rPr sz="800" b="1" i="1" baseline="0" dirty="0">
+                          <a:solidFill>
+                            <a:schemeClr val="tx1">
+                              <a:lumMod val="50000"/>
+                            </a:schemeClr>
+                          </a:solidFill>
+                        </a:rPr>
+                        <a:t>Posterior view.</a:t>
+                      </a:r>
+                    </a:p>
+                  </a:txBody>
+                  <a:tcPr marL="19050" marR="19050" marT="19050" marB="19050" horzOverflow="overflow">
+                    <a:lnL w="3175">
+                      <a:solidFill>
+                        <a:srgbClr val="000000"/>
+                      </a:solidFill>
+                      <a:miter lim="400000"/>
+                    </a:lnL>
+                    <a:lnR w="3175">
+                      <a:solidFill>
+                        <a:srgbClr val="000000"/>
+                      </a:solidFill>
+                      <a:miter lim="400000"/>
+                    </a:lnR>
+                    <a:lnT w="12700">
+                      <a:miter lim="400000"/>
+                    </a:lnT>
+                    <a:lnB w="12700">
+                      <a:miter lim="400000"/>
+                    </a:lnB>
+                    <a:solidFill>
+                      <a:schemeClr val="bg1"/>
+                    </a:solidFill>
+                  </a:tcPr>
+                </a:tc>
+                <a:tc hMerge="1">
+                  <a:txBody>
+                    <a:bodyPr/>
+                    <a:lstStyle/>
+                    <a:p>
+                      <a:endParaRPr lang="ko-KR"/>
+                    </a:p>
+                  </a:txBody>
+                  <a:tcPr/>
+                </a:tc>
+                <a:extLst>
+                  <a:ext uri="{0D108BD9-81ED-4DB2-BD59-A6C34878D82A}">
+                    <a16:rowId xmlns:a16="http://schemas.microsoft.com/office/drawing/2014/main" val="10009"/>
+                  </a:ext>
+                </a:extLst>
+              </a:tr>
+              <a:tr h="278130">
+                <a:tc vMerge="1">
+                  <a:txBody>
+                    <a:bodyPr/>
+                    <a:lstStyle/>
+                    <a:p>
+                      <a:endParaRPr lang="ko-KR"/>
+                    </a:p>
+                  </a:txBody>
+                  <a:tcPr/>
+                </a:tc>
+                <a:tc>
+                  <a:txBody>
+                    <a:bodyPr/>
+                    <a:lstStyle/>
+                    <a:p>
+                      <a:pPr algn="l" defTabSz="95250">
+                        <a:tabLst>
+                          <a:tab pos="342900" algn="l"/>
+                        </a:tabLst>
+                      </a:pPr>
+                      <a:r>
+                        <a:rPr sz="800" baseline="0" dirty="0">
+                          <a:solidFill>
+                            <a:schemeClr val="tx1">
+                              <a:lumMod val="50000"/>
+                            </a:schemeClr>
+                          </a:solidFill>
+                        </a:rPr>
+                        <a:t>1.Open &amp; Bite 2.Upper body flexion(Holding ankle &amp; Knee)</a:t>
+                      </a:r>
+                    </a:p>
+                  </a:txBody>
+                  <a:tcPr marL="19050" marR="19050" marT="19050" marB="19050" horzOverflow="overflow">
+                    <a:lnL w="3175">
+                      <a:solidFill>
+                        <a:srgbClr val="000000"/>
+                      </a:solidFill>
+                      <a:miter lim="400000"/>
+                    </a:lnL>
+                    <a:lnR w="3175">
+                      <a:solidFill>
+                        <a:srgbClr val="000000"/>
+                      </a:solidFill>
+                      <a:miter lim="400000"/>
+                    </a:lnR>
+                    <a:lnT w="12700">
+                      <a:miter lim="400000"/>
+                    </a:lnT>
+                    <a:lnB w="12700">
+                      <a:miter lim="400000"/>
+                    </a:lnB>
+                    <a:solidFill>
+                      <a:schemeClr val="bg1"/>
+                    </a:solidFill>
+                  </a:tcPr>
+                </a:tc>
+                <a:tc>
+                  <a:txBody>
+                    <a:bodyPr/>
+                    <a:lstStyle/>
+                    <a:p>
+                      <a:pPr algn="l" defTabSz="95250">
+                        <a:tabLst>
+                          <a:tab pos="342900" algn="l"/>
+                        </a:tabLst>
+                      </a:pPr>
+                      <a:r>
+                        <a:rPr sz="800" baseline="0">
+                          <a:solidFill>
+                            <a:schemeClr val="tx1">
+                              <a:lumMod val="50000"/>
+                            </a:schemeClr>
+                          </a:solidFill>
+                        </a:rPr>
+                        <a:t>1.Open 
+2.Body side  bend bending</a:t>
+                      </a:r>
+                    </a:p>
+                  </a:txBody>
+                  <a:tcPr marL="19050" marR="19050" marT="19050" marB="19050" horzOverflow="overflow">
+                    <a:lnL w="3175">
+                      <a:solidFill>
+                        <a:srgbClr val="000000"/>
+                      </a:solidFill>
+                      <a:miter lim="400000"/>
+                    </a:lnL>
+                    <a:lnR w="3175">
+                      <a:solidFill>
+                        <a:srgbClr val="000000"/>
+                      </a:solidFill>
+                      <a:miter lim="400000"/>
+                    </a:lnR>
+                    <a:lnT w="12700">
+                      <a:miter lim="400000"/>
+                    </a:lnT>
+                    <a:lnB w="12700">
+                      <a:miter lim="400000"/>
+                    </a:lnB>
+                    <a:solidFill>
+                      <a:schemeClr val="bg1"/>
+                    </a:solidFill>
+                  </a:tcPr>
+                </a:tc>
+                <a:extLst>
+                  <a:ext uri="{0D108BD9-81ED-4DB2-BD59-A6C34878D82A}">
+                    <a16:rowId xmlns:a16="http://schemas.microsoft.com/office/drawing/2014/main" val="10010"/>
+                  </a:ext>
+                </a:extLst>
+              </a:tr>
+              <a:tr h="194039">
+                <a:tc vMerge="1">
+                  <a:txBody>
+                    <a:bodyPr/>
+                    <a:lstStyle/>
+                    <a:p>
+                      <a:endParaRPr lang="ko-KR"/>
+                    </a:p>
+                  </a:txBody>
+                  <a:tcPr/>
+                </a:tc>
+                <a:tc gridSpan="2">
+                  <a:txBody>
+                    <a:bodyPr/>
+                    <a:lstStyle/>
+                    <a:p>
+                      <a:pPr algn="l" defTabSz="95250">
+                        <a:tabLst>
+                          <a:tab pos="342900" algn="l"/>
+                        </a:tabLst>
+                      </a:pPr>
+                      <a:r>
+                        <a:rPr sz="800" b="1" i="1" baseline="0" dirty="0">
+                          <a:solidFill>
+                            <a:schemeClr val="tx1">
+                              <a:lumMod val="50000"/>
+                            </a:schemeClr>
+                          </a:solidFill>
+                        </a:rPr>
+                        <a:t>Anterior view.</a:t>
+                      </a:r>
+                    </a:p>
+                  </a:txBody>
+                  <a:tcPr marL="19050" marR="19050" marT="19050" marB="19050" horzOverflow="overflow">
+                    <a:lnL w="3175">
+                      <a:solidFill>
+                        <a:srgbClr val="000000"/>
+                      </a:solidFill>
+                      <a:miter lim="400000"/>
+                    </a:lnL>
+                    <a:lnR w="3175">
+                      <a:solidFill>
+                        <a:srgbClr val="000000"/>
+                      </a:solidFill>
+                      <a:miter lim="400000"/>
+                    </a:lnR>
+                    <a:lnT w="12700">
+                      <a:miter lim="400000"/>
+                    </a:lnT>
+                    <a:lnB w="12700">
+                      <a:miter lim="400000"/>
+                    </a:lnB>
+                    <a:solidFill>
+                      <a:schemeClr val="bg1"/>
+                    </a:solidFill>
+                  </a:tcPr>
+                </a:tc>
+                <a:tc hMerge="1">
+                  <a:txBody>
+                    <a:bodyPr/>
+                    <a:lstStyle/>
+                    <a:p>
+                      <a:endParaRPr lang="ko-KR"/>
+                    </a:p>
+                  </a:txBody>
+                  <a:tcPr/>
+                </a:tc>
+                <a:extLst>
+                  <a:ext uri="{0D108BD9-81ED-4DB2-BD59-A6C34878D82A}">
+                    <a16:rowId xmlns:a16="http://schemas.microsoft.com/office/drawing/2014/main" val="10011"/>
+                  </a:ext>
+                </a:extLst>
+              </a:tr>
+              <a:tr h="214545">
+                <a:tc vMerge="1">
+                  <a:txBody>
+                    <a:bodyPr/>
+                    <a:lstStyle/>
+                    <a:p>
+                      <a:endParaRPr lang="ko-KR"/>
+                    </a:p>
+                  </a:txBody>
+                  <a:tcPr/>
+                </a:tc>
+                <a:tc>
+                  <a:txBody>
+                    <a:bodyPr/>
+                    <a:lstStyle/>
+                    <a:p>
+                      <a:pPr algn="l" defTabSz="95250">
+                        <a:tabLst>
+                          <a:tab pos="342900" algn="l"/>
+                        </a:tabLst>
+                      </a:pPr>
+                      <a:r>
+                        <a:rPr sz="800" baseline="0" dirty="0">
+                          <a:solidFill>
+                            <a:schemeClr val="tx1">
+                              <a:lumMod val="50000"/>
+                            </a:schemeClr>
+                          </a:solidFill>
+                        </a:rPr>
+                        <a:t>1.Open &amp; Bite</a:t>
+                      </a:r>
+                    </a:p>
+                  </a:txBody>
+                  <a:tcPr marL="19050" marR="19050" marT="19050" marB="19050" horzOverflow="overflow">
+                    <a:lnL w="3175">
+                      <a:solidFill>
+                        <a:srgbClr val="000000"/>
+                      </a:solidFill>
+                      <a:miter lim="400000"/>
+                    </a:lnL>
+                    <a:lnR w="3175">
+                      <a:solidFill>
+                        <a:srgbClr val="000000"/>
+                      </a:solidFill>
+                      <a:miter lim="400000"/>
+                    </a:lnR>
+                    <a:lnT w="12700">
+                      <a:miter lim="400000"/>
+                    </a:lnT>
+                    <a:lnB w="12700">
+                      <a:miter lim="400000"/>
+                    </a:lnB>
+                    <a:solidFill>
+                      <a:schemeClr val="bg1"/>
+                    </a:solidFill>
+                  </a:tcPr>
+                </a:tc>
+                <a:tc>
+                  <a:txBody>
+                    <a:bodyPr/>
+                    <a:lstStyle/>
+                    <a:p>
+                      <a:pPr algn="l" defTabSz="95250">
+                        <a:tabLst>
+                          <a:tab pos="342900" algn="l"/>
+                        </a:tabLst>
+                      </a:pPr>
+                      <a:r>
+                        <a:rPr sz="800" baseline="0">
+                          <a:solidFill>
+                            <a:schemeClr val="tx1">
+                              <a:lumMod val="50000"/>
+                            </a:schemeClr>
+                          </a:solidFill>
+                        </a:rPr>
+                        <a:t>1.Open</a:t>
+                      </a:r>
+                    </a:p>
+                  </a:txBody>
+                  <a:tcPr marL="19050" marR="19050" marT="19050" marB="19050" horzOverflow="overflow">
+                    <a:lnL w="3175">
+                      <a:solidFill>
+                        <a:srgbClr val="000000"/>
+                      </a:solidFill>
+                      <a:miter lim="400000"/>
+                    </a:lnL>
+                    <a:lnR w="3175">
+                      <a:solidFill>
+                        <a:srgbClr val="000000"/>
+                      </a:solidFill>
+                      <a:miter lim="400000"/>
+                    </a:lnR>
+                    <a:lnT w="12700">
+                      <a:miter lim="400000"/>
+                    </a:lnT>
+                    <a:lnB w="12700">
+                      <a:miter lim="400000"/>
+                    </a:lnB>
+                    <a:solidFill>
+                      <a:schemeClr val="bg1"/>
+                    </a:solidFill>
+                  </a:tcPr>
+                </a:tc>
+                <a:extLst>
+                  <a:ext uri="{0D108BD9-81ED-4DB2-BD59-A6C34878D82A}">
+                    <a16:rowId xmlns:a16="http://schemas.microsoft.com/office/drawing/2014/main" val="10012"/>
+                  </a:ext>
+                </a:extLst>
+              </a:tr>
+              <a:tr h="196596">
+                <a:tc rowSpan="6">
+                  <a:txBody>
+                    <a:bodyPr/>
+                    <a:lstStyle/>
+                    <a:p>
+                      <a:pPr algn="l" defTabSz="95250">
+                        <a:tabLst>
+                          <a:tab pos="342900" algn="l"/>
+                        </a:tabLst>
+                      </a:pPr>
+                      <a:r>
+                        <a:rPr sz="800" b="1" baseline="0">
+                          <a:solidFill>
+                            <a:schemeClr val="tx1">
+                              <a:lumMod val="50000"/>
+                            </a:schemeClr>
+                          </a:solidFill>
+                          <a:latin typeface="Gill Sans"/>
+                          <a:ea typeface="Gill Sans"/>
+                          <a:cs typeface="Gill Sans"/>
+                          <a:sym typeface="Gill Sans"/>
+                        </a:rPr>
+                        <a:t>    Seating</a:t>
+                      </a:r>
+                    </a:p>
+                  </a:txBody>
+                  <a:tcPr marL="19050" marR="19050" marT="19050" marB="19050" horzOverflow="overflow">
+                    <a:lnL w="3175">
+                      <a:solidFill>
+                        <a:srgbClr val="000000"/>
+                      </a:solidFill>
+                      <a:miter lim="400000"/>
+                    </a:lnL>
+                    <a:lnR w="3175">
+                      <a:solidFill>
+                        <a:srgbClr val="000000"/>
+                      </a:solidFill>
+                      <a:miter lim="400000"/>
+                    </a:lnR>
+                    <a:lnT w="12700">
+                      <a:miter lim="400000"/>
+                    </a:lnT>
+                    <a:lnB w="12700">
+                      <a:miter lim="400000"/>
+                    </a:lnB>
+                    <a:solidFill>
+                      <a:schemeClr val="bg1"/>
+                    </a:solidFill>
+                  </a:tcPr>
+                </a:tc>
+                <a:tc gridSpan="2">
+                  <a:txBody>
+                    <a:bodyPr/>
+                    <a:lstStyle/>
+                    <a:p>
+                      <a:pPr algn="l" defTabSz="95250">
+                        <a:tabLst>
+                          <a:tab pos="342900" algn="l"/>
+                        </a:tabLst>
+                      </a:pPr>
+                      <a:r>
+                        <a:rPr sz="800" b="1" i="1" baseline="0" dirty="0">
+                          <a:solidFill>
+                            <a:schemeClr val="tx1">
+                              <a:lumMod val="50000"/>
+                            </a:schemeClr>
+                          </a:solidFill>
+                        </a:rPr>
+                        <a:t>Posterior view.</a:t>
+                      </a:r>
+                    </a:p>
+                  </a:txBody>
+                  <a:tcPr marL="19050" marR="19050" marT="19050" marB="19050" horzOverflow="overflow">
+                    <a:lnL w="3175">
+                      <a:solidFill>
+                        <a:srgbClr val="000000"/>
+                      </a:solidFill>
+                      <a:miter lim="400000"/>
+                    </a:lnL>
+                    <a:lnR w="3175">
+                      <a:solidFill>
+                        <a:srgbClr val="000000"/>
+                      </a:solidFill>
+                      <a:miter lim="400000"/>
+                    </a:lnR>
+                    <a:lnT w="12700">
+                      <a:miter lim="400000"/>
+                    </a:lnT>
+                    <a:lnB w="12700">
+                      <a:miter lim="400000"/>
+                    </a:lnB>
+                    <a:solidFill>
+                      <a:schemeClr val="bg1"/>
+                    </a:solidFill>
+                  </a:tcPr>
+                </a:tc>
+                <a:tc hMerge="1">
+                  <a:txBody>
+                    <a:bodyPr/>
+                    <a:lstStyle/>
+                    <a:p>
+                      <a:endParaRPr lang="ko-KR"/>
+                    </a:p>
+                  </a:txBody>
+                  <a:tcPr/>
+                </a:tc>
+                <a:extLst>
+                  <a:ext uri="{0D108BD9-81ED-4DB2-BD59-A6C34878D82A}">
+                    <a16:rowId xmlns:a16="http://schemas.microsoft.com/office/drawing/2014/main" val="10013"/>
+                  </a:ext>
+                </a:extLst>
+              </a:tr>
+              <a:tr h="198128">
+                <a:tc vMerge="1">
+                  <a:txBody>
+                    <a:bodyPr/>
+                    <a:lstStyle/>
+                    <a:p>
+                      <a:endParaRPr lang="ko-KR"/>
+                    </a:p>
+                  </a:txBody>
+                  <a:tcPr/>
+                </a:tc>
+                <a:tc>
+                  <a:txBody>
+                    <a:bodyPr/>
+                    <a:lstStyle/>
+                    <a:p>
+                      <a:pPr algn="l" defTabSz="95250">
+                        <a:tabLst>
+                          <a:tab pos="342900" algn="l"/>
+                        </a:tabLst>
+                      </a:pPr>
+                      <a:r>
+                        <a:rPr sz="800" baseline="0">
+                          <a:solidFill>
+                            <a:schemeClr val="tx1">
+                              <a:lumMod val="50000"/>
+                            </a:schemeClr>
+                          </a:solidFill>
+                        </a:rPr>
+                        <a:t>1.Open &amp; Bite 2.Upper body flexion(Holding ankle)</a:t>
+                      </a:r>
+                    </a:p>
+                  </a:txBody>
+                  <a:tcPr marL="19050" marR="19050" marT="19050" marB="19050" horzOverflow="overflow">
+                    <a:lnL w="3175">
+                      <a:solidFill>
+                        <a:srgbClr val="000000"/>
+                      </a:solidFill>
+                      <a:miter lim="400000"/>
+                    </a:lnL>
+                    <a:lnR w="3175">
+                      <a:solidFill>
+                        <a:srgbClr val="000000"/>
+                      </a:solidFill>
+                      <a:miter lim="400000"/>
+                    </a:lnR>
+                    <a:lnT w="12700">
+                      <a:miter lim="400000"/>
+                    </a:lnT>
+                    <a:lnB w="12700">
+                      <a:miter lim="400000"/>
+                    </a:lnB>
+                    <a:solidFill>
+                      <a:schemeClr val="bg1"/>
+                    </a:solidFill>
+                  </a:tcPr>
+                </a:tc>
+                <a:tc>
+                  <a:txBody>
+                    <a:bodyPr/>
+                    <a:lstStyle/>
+                    <a:p>
+                      <a:pPr algn="l" defTabSz="95250">
+                        <a:tabLst>
+                          <a:tab pos="342900" algn="l"/>
+                        </a:tabLst>
+                      </a:pPr>
+                      <a:r>
+                        <a:rPr sz="800" baseline="0" dirty="0">
+                          <a:solidFill>
+                            <a:schemeClr val="tx1">
+                              <a:lumMod val="50000"/>
+                            </a:schemeClr>
+                          </a:solidFill>
+                        </a:rPr>
+                        <a:t>1.Open</a:t>
+                      </a:r>
+                    </a:p>
+                  </a:txBody>
+                  <a:tcPr marL="19050" marR="19050" marT="19050" marB="19050" horzOverflow="overflow">
+                    <a:lnL w="3175">
+                      <a:solidFill>
+                        <a:srgbClr val="000000"/>
+                      </a:solidFill>
+                      <a:miter lim="400000"/>
+                    </a:lnL>
+                    <a:lnR w="3175">
+                      <a:solidFill>
+                        <a:srgbClr val="000000"/>
+                      </a:solidFill>
+                      <a:miter lim="400000"/>
+                    </a:lnR>
+                    <a:lnT w="12700">
+                      <a:miter lim="400000"/>
+                    </a:lnT>
+                    <a:lnB w="12700">
+                      <a:miter lim="400000"/>
+                    </a:lnB>
+                    <a:solidFill>
+                      <a:schemeClr val="bg1"/>
+                    </a:solidFill>
+                  </a:tcPr>
+                </a:tc>
+                <a:extLst>
+                  <a:ext uri="{0D108BD9-81ED-4DB2-BD59-A6C34878D82A}">
+                    <a16:rowId xmlns:a16="http://schemas.microsoft.com/office/drawing/2014/main" val="10014"/>
+                  </a:ext>
+                </a:extLst>
+              </a:tr>
+              <a:tr h="209810">
+                <a:tc vMerge="1">
+                  <a:txBody>
+                    <a:bodyPr/>
+                    <a:lstStyle/>
+                    <a:p>
+                      <a:endParaRPr lang="ko-KR"/>
+                    </a:p>
+                  </a:txBody>
+                  <a:tcPr/>
+                </a:tc>
+                <a:tc gridSpan="2">
+                  <a:txBody>
+                    <a:bodyPr/>
+                    <a:lstStyle/>
+                    <a:p>
+                      <a:pPr algn="l" defTabSz="95250">
+                        <a:tabLst>
+                          <a:tab pos="342900" algn="l"/>
+                        </a:tabLst>
+                      </a:pPr>
+                      <a:r>
+                        <a:rPr sz="800" b="1" i="1" baseline="0" dirty="0">
+                          <a:solidFill>
+                            <a:schemeClr val="tx1">
+                              <a:lumMod val="50000"/>
+                            </a:schemeClr>
+                          </a:solidFill>
+                        </a:rPr>
+                        <a:t>Anterior view.</a:t>
+                      </a:r>
+                    </a:p>
+                  </a:txBody>
+                  <a:tcPr marL="19050" marR="19050" marT="19050" marB="19050" horzOverflow="overflow">
+                    <a:lnL w="3175">
+                      <a:solidFill>
+                        <a:srgbClr val="000000"/>
+                      </a:solidFill>
+                      <a:miter lim="400000"/>
+                    </a:lnL>
+                    <a:lnR w="3175">
+                      <a:solidFill>
+                        <a:srgbClr val="000000"/>
+                      </a:solidFill>
+                      <a:miter lim="400000"/>
+                    </a:lnR>
+                    <a:lnT w="12700">
+                      <a:miter lim="400000"/>
+                    </a:lnT>
+                    <a:lnB w="12700">
+                      <a:miter lim="400000"/>
+                    </a:lnB>
+                    <a:solidFill>
+                      <a:schemeClr val="bg1"/>
+                    </a:solidFill>
+                  </a:tcPr>
+                </a:tc>
+                <a:tc hMerge="1">
+                  <a:txBody>
+                    <a:bodyPr/>
+                    <a:lstStyle/>
+                    <a:p>
+                      <a:endParaRPr lang="ko-KR"/>
+                    </a:p>
+                  </a:txBody>
+                  <a:tcPr/>
+                </a:tc>
+                <a:extLst>
+                  <a:ext uri="{0D108BD9-81ED-4DB2-BD59-A6C34878D82A}">
+                    <a16:rowId xmlns:a16="http://schemas.microsoft.com/office/drawing/2014/main" val="10015"/>
+                  </a:ext>
+                </a:extLst>
+              </a:tr>
+              <a:tr h="194727">
+                <a:tc vMerge="1">
+                  <a:txBody>
+                    <a:bodyPr/>
+                    <a:lstStyle/>
+                    <a:p>
+                      <a:endParaRPr lang="ko-KR"/>
+                    </a:p>
+                  </a:txBody>
+                  <a:tcPr/>
+                </a:tc>
+                <a:tc>
+                  <a:txBody>
+                    <a:bodyPr/>
+                    <a:lstStyle/>
+                    <a:p>
+                      <a:pPr algn="l" defTabSz="95250">
+                        <a:tabLst>
+                          <a:tab pos="342900" algn="l"/>
+                        </a:tabLst>
+                      </a:pPr>
+                      <a:r>
+                        <a:rPr sz="800" baseline="0">
+                          <a:solidFill>
+                            <a:schemeClr val="tx1">
+                              <a:lumMod val="50000"/>
+                            </a:schemeClr>
+                          </a:solidFill>
+                        </a:rPr>
+                        <a:t>1.Open &amp; Bite</a:t>
+                      </a:r>
+                    </a:p>
+                  </a:txBody>
+                  <a:tcPr marL="19050" marR="19050" marT="19050" marB="19050" horzOverflow="overflow">
+                    <a:lnL w="3175">
+                      <a:solidFill>
+                        <a:srgbClr val="000000"/>
+                      </a:solidFill>
+                      <a:miter lim="400000"/>
+                    </a:lnL>
+                    <a:lnR w="3175">
+                      <a:solidFill>
+                        <a:srgbClr val="000000"/>
+                      </a:solidFill>
+                      <a:miter lim="400000"/>
+                    </a:lnR>
+                    <a:lnT w="12700">
+                      <a:miter lim="400000"/>
+                    </a:lnT>
+                    <a:lnB w="12700">
+                      <a:miter lim="400000"/>
+                    </a:lnB>
+                    <a:solidFill>
+                      <a:schemeClr val="bg1"/>
+                    </a:solidFill>
+                  </a:tcPr>
+                </a:tc>
+                <a:tc>
+                  <a:txBody>
+                    <a:bodyPr/>
+                    <a:lstStyle/>
+                    <a:p>
+                      <a:pPr algn="l" defTabSz="95250">
+                        <a:tabLst>
+                          <a:tab pos="342900" algn="l"/>
+                        </a:tabLst>
+                      </a:pPr>
+                      <a:r>
+                        <a:rPr sz="800" baseline="0" dirty="0">
+                          <a:solidFill>
+                            <a:schemeClr val="tx1">
+                              <a:lumMod val="50000"/>
+                            </a:schemeClr>
+                          </a:solidFill>
+                        </a:rPr>
+                        <a:t>1.Open</a:t>
+                      </a:r>
+                    </a:p>
+                  </a:txBody>
+                  <a:tcPr marL="19050" marR="19050" marT="19050" marB="19050" horzOverflow="overflow">
+                    <a:lnL w="3175">
+                      <a:solidFill>
+                        <a:srgbClr val="000000"/>
+                      </a:solidFill>
+                      <a:miter lim="400000"/>
+                    </a:lnL>
+                    <a:lnR w="3175">
+                      <a:solidFill>
+                        <a:srgbClr val="000000"/>
+                      </a:solidFill>
+                      <a:miter lim="400000"/>
+                    </a:lnR>
+                    <a:lnT w="12700">
+                      <a:miter lim="400000"/>
+                    </a:lnT>
+                    <a:lnB w="12700">
+                      <a:miter lim="400000"/>
+                    </a:lnB>
+                    <a:solidFill>
+                      <a:schemeClr val="bg1"/>
+                    </a:solidFill>
+                  </a:tcPr>
+                </a:tc>
+                <a:extLst>
+                  <a:ext uri="{0D108BD9-81ED-4DB2-BD59-A6C34878D82A}">
+                    <a16:rowId xmlns:a16="http://schemas.microsoft.com/office/drawing/2014/main" val="10016"/>
+                  </a:ext>
+                </a:extLst>
+              </a:tr>
+              <a:tr h="212808">
+                <a:tc vMerge="1">
+                  <a:txBody>
+                    <a:bodyPr/>
+                    <a:lstStyle/>
+                    <a:p>
+                      <a:endParaRPr lang="ko-KR"/>
+                    </a:p>
+                  </a:txBody>
+                  <a:tcPr/>
+                </a:tc>
+                <a:tc gridSpan="2">
+                  <a:txBody>
+                    <a:bodyPr/>
+                    <a:lstStyle/>
+                    <a:p>
+                      <a:pPr algn="l" defTabSz="95250">
+                        <a:tabLst>
+                          <a:tab pos="342900" algn="l"/>
+                        </a:tabLst>
+                      </a:pPr>
+                      <a:r>
+                        <a:rPr sz="800" b="1" i="1" baseline="0" dirty="0">
+                          <a:solidFill>
+                            <a:schemeClr val="tx1">
+                              <a:lumMod val="50000"/>
+                            </a:schemeClr>
+                          </a:solidFill>
+                        </a:rPr>
+                        <a:t>Vertical view.</a:t>
+                      </a:r>
+                    </a:p>
+                  </a:txBody>
+                  <a:tcPr marL="19050" marR="19050" marT="19050" marB="19050" horzOverflow="overflow">
+                    <a:lnL w="3175">
+                      <a:solidFill>
+                        <a:srgbClr val="000000"/>
+                      </a:solidFill>
+                      <a:miter lim="400000"/>
+                    </a:lnL>
+                    <a:lnR w="3175">
+                      <a:solidFill>
+                        <a:srgbClr val="000000"/>
+                      </a:solidFill>
+                      <a:miter lim="400000"/>
+                    </a:lnR>
+                    <a:lnT w="12700">
+                      <a:miter lim="400000"/>
+                    </a:lnT>
+                    <a:lnB w="12700">
+                      <a:miter lim="400000"/>
+                    </a:lnB>
+                    <a:solidFill>
+                      <a:schemeClr val="bg1"/>
+                    </a:solidFill>
+                  </a:tcPr>
+                </a:tc>
+                <a:tc hMerge="1">
+                  <a:txBody>
+                    <a:bodyPr/>
+                    <a:lstStyle/>
+                    <a:p>
+                      <a:endParaRPr lang="ko-KR"/>
+                    </a:p>
+                  </a:txBody>
+                  <a:tcPr/>
+                </a:tc>
+                <a:extLst>
+                  <a:ext uri="{0D108BD9-81ED-4DB2-BD59-A6C34878D82A}">
+                    <a16:rowId xmlns:a16="http://schemas.microsoft.com/office/drawing/2014/main" val="10017"/>
+                  </a:ext>
+                </a:extLst>
+              </a:tr>
+              <a:tr h="180364">
+                <a:tc vMerge="1">
+                  <a:txBody>
+                    <a:bodyPr/>
+                    <a:lstStyle/>
+                    <a:p>
+                      <a:endParaRPr lang="ko-KR"/>
+                    </a:p>
+                  </a:txBody>
+                  <a:tcPr/>
+                </a:tc>
+                <a:tc>
+                  <a:txBody>
+                    <a:bodyPr/>
+                    <a:lstStyle/>
+                    <a:p>
+                      <a:pPr algn="l" defTabSz="95250">
+                        <a:tabLst>
+                          <a:tab pos="342900" algn="l"/>
+                        </a:tabLst>
+                      </a:pPr>
+                      <a:r>
+                        <a:rPr sz="800" baseline="0">
+                          <a:solidFill>
+                            <a:schemeClr val="tx1">
+                              <a:lumMod val="50000"/>
+                            </a:schemeClr>
+                          </a:solidFill>
+                        </a:rPr>
+                        <a:t>1.Scapular girdle rotation</a:t>
+                      </a:r>
+                    </a:p>
+                  </a:txBody>
+                  <a:tcPr marL="19050" marR="19050" marT="19050" marB="19050" horzOverflow="overflow">
+                    <a:lnL w="3175">
+                      <a:solidFill>
+                        <a:srgbClr val="000000"/>
+                      </a:solidFill>
+                      <a:miter lim="400000"/>
+                    </a:lnL>
+                    <a:lnR w="3175">
+                      <a:solidFill>
+                        <a:srgbClr val="000000"/>
+                      </a:solidFill>
+                      <a:miter lim="400000"/>
+                    </a:lnR>
+                    <a:lnT w="12700">
+                      <a:miter lim="400000"/>
+                    </a:lnT>
+                    <a:lnB w="12700">
+                      <a:miter lim="400000"/>
+                    </a:lnB>
+                    <a:solidFill>
+                      <a:schemeClr val="bg1"/>
+                    </a:solidFill>
+                  </a:tcPr>
+                </a:tc>
+                <a:tc>
+                  <a:txBody>
+                    <a:bodyPr/>
+                    <a:lstStyle/>
+                    <a:p>
+                      <a:pPr defTabSz="914400">
+                        <a:tabLst>
+                          <a:tab pos="342900" algn="l"/>
+                        </a:tabLst>
+                        <a:defRPr sz="2200">
+                          <a:latin typeface="Avenir Next Regular"/>
+                          <a:ea typeface="Avenir Next Regular"/>
+                          <a:cs typeface="Avenir Next Regular"/>
+                          <a:sym typeface="Avenir Next Regular"/>
+                        </a:defRPr>
+                      </a:pPr>
+                      <a:endParaRPr sz="800" baseline="0">
+                        <a:solidFill>
+                          <a:schemeClr val="tx1">
+                            <a:lumMod val="50000"/>
+                          </a:schemeClr>
+                        </a:solidFill>
+                      </a:endParaRPr>
+                    </a:p>
+                  </a:txBody>
+                  <a:tcPr marL="19050" marR="19050" marT="19050" marB="19050" horzOverflow="overflow">
+                    <a:lnL w="3175">
+                      <a:solidFill>
+                        <a:srgbClr val="000000"/>
+                      </a:solidFill>
+                      <a:miter lim="400000"/>
+                    </a:lnL>
+                    <a:lnR w="3175">
+                      <a:solidFill>
+                        <a:srgbClr val="000000"/>
+                      </a:solidFill>
+                      <a:miter lim="400000"/>
+                    </a:lnR>
+                    <a:lnT w="12700">
+                      <a:miter lim="400000"/>
+                    </a:lnT>
+                    <a:lnB w="12700">
+                      <a:miter lim="400000"/>
+                    </a:lnB>
+                    <a:solidFill>
+                      <a:schemeClr val="bg1"/>
+                    </a:solidFill>
+                  </a:tcPr>
+                </a:tc>
+                <a:extLst>
+                  <a:ext uri="{0D108BD9-81ED-4DB2-BD59-A6C34878D82A}">
+                    <a16:rowId xmlns:a16="http://schemas.microsoft.com/office/drawing/2014/main" val="10018"/>
+                  </a:ext>
+                </a:extLst>
+              </a:tr>
+              <a:tr h="237261">
+                <a:tc rowSpan="4">
+                  <a:txBody>
+                    <a:bodyPr/>
+                    <a:lstStyle/>
+                    <a:p>
+                      <a:pPr algn="l" defTabSz="95250">
+                        <a:tabLst>
+                          <a:tab pos="342900" algn="l"/>
+                        </a:tabLst>
+                      </a:pPr>
+                      <a:r>
+                        <a:rPr sz="800" b="1" baseline="0">
+                          <a:solidFill>
+                            <a:schemeClr val="tx1">
+                              <a:lumMod val="50000"/>
+                            </a:schemeClr>
+                          </a:solidFill>
+                          <a:latin typeface="Gill Sans"/>
+                          <a:ea typeface="Gill Sans"/>
+                          <a:cs typeface="Gill Sans"/>
+                          <a:sym typeface="Gill Sans"/>
+                        </a:rPr>
+                        <a:t>    On bed</a:t>
+                      </a:r>
+                    </a:p>
+                  </a:txBody>
+                  <a:tcPr marL="19050" marR="19050" marT="19050" marB="19050" horzOverflow="overflow">
+                    <a:lnL w="3175">
+                      <a:solidFill>
+                        <a:srgbClr val="000000"/>
+                      </a:solidFill>
+                      <a:miter lim="400000"/>
+                    </a:lnL>
+                    <a:lnR w="3175">
+                      <a:solidFill>
+                        <a:srgbClr val="000000"/>
+                      </a:solidFill>
+                      <a:miter lim="400000"/>
+                    </a:lnR>
+                    <a:lnT w="12700">
+                      <a:miter lim="400000"/>
+                    </a:lnT>
+                    <a:lnB w="3175">
+                      <a:solidFill>
+                        <a:srgbClr val="000000"/>
+                      </a:solidFill>
+                      <a:miter lim="400000"/>
+                    </a:lnB>
+                    <a:solidFill>
+                      <a:schemeClr val="bg1"/>
+                    </a:solidFill>
+                  </a:tcPr>
+                </a:tc>
+                <a:tc gridSpan="2">
+                  <a:txBody>
+                    <a:bodyPr/>
+                    <a:lstStyle/>
+                    <a:p>
+                      <a:pPr algn="l" defTabSz="95250">
+                        <a:tabLst>
+                          <a:tab pos="342900" algn="l"/>
+                        </a:tabLst>
+                      </a:pPr>
+                      <a:r>
+                        <a:rPr sz="800" b="1" i="1" baseline="0" dirty="0">
+                          <a:solidFill>
+                            <a:schemeClr val="tx1">
+                              <a:lumMod val="50000"/>
+                            </a:schemeClr>
+                          </a:solidFill>
+                        </a:rPr>
+                        <a:t>Posterior view.</a:t>
+                      </a:r>
+                    </a:p>
+                  </a:txBody>
+                  <a:tcPr marL="19050" marR="19050" marT="19050" marB="19050" horzOverflow="overflow">
+                    <a:lnL w="3175">
+                      <a:solidFill>
+                        <a:srgbClr val="000000"/>
+                      </a:solidFill>
+                      <a:miter lim="400000"/>
+                    </a:lnL>
+                    <a:lnR w="3175">
+                      <a:solidFill>
+                        <a:srgbClr val="000000"/>
+                      </a:solidFill>
+                      <a:miter lim="400000"/>
+                    </a:lnR>
+                    <a:lnT w="12700">
+                      <a:miter lim="400000"/>
+                    </a:lnT>
+                    <a:lnB w="12700">
+                      <a:miter lim="400000"/>
+                    </a:lnB>
+                    <a:solidFill>
+                      <a:schemeClr val="bg1"/>
+                    </a:solidFill>
+                  </a:tcPr>
+                </a:tc>
+                <a:tc hMerge="1">
+                  <a:txBody>
+                    <a:bodyPr/>
+                    <a:lstStyle/>
+                    <a:p>
+                      <a:endParaRPr lang="ko-KR"/>
+                    </a:p>
+                  </a:txBody>
+                  <a:tcPr/>
+                </a:tc>
+                <a:extLst>
+                  <a:ext uri="{0D108BD9-81ED-4DB2-BD59-A6C34878D82A}">
+                    <a16:rowId xmlns:a16="http://schemas.microsoft.com/office/drawing/2014/main" val="10019"/>
+                  </a:ext>
+                </a:extLst>
+              </a:tr>
+              <a:tr h="216867">
+                <a:tc vMerge="1">
+                  <a:txBody>
+                    <a:bodyPr/>
+                    <a:lstStyle/>
+                    <a:p>
+                      <a:endParaRPr lang="ko-KR"/>
+                    </a:p>
+                  </a:txBody>
+                  <a:tcPr/>
+                </a:tc>
+                <a:tc>
+                  <a:txBody>
+                    <a:bodyPr/>
+                    <a:lstStyle/>
+                    <a:p>
+                      <a:pPr algn="l" defTabSz="95250">
+                        <a:tabLst>
+                          <a:tab pos="342900" algn="l"/>
+                        </a:tabLst>
+                      </a:pPr>
+                      <a:r>
+                        <a:rPr sz="800" baseline="0">
+                          <a:solidFill>
+                            <a:schemeClr val="tx1">
+                              <a:lumMod val="50000"/>
+                            </a:schemeClr>
+                          </a:solidFill>
+                        </a:rPr>
+                        <a:t>1.Full body 2.Leg length 3.Leg ad &amp; abduction</a:t>
+                      </a:r>
+                    </a:p>
+                  </a:txBody>
+                  <a:tcPr marL="19050" marR="19050" marT="19050" marB="19050" horzOverflow="overflow">
+                    <a:lnL w="3175">
+                      <a:solidFill>
+                        <a:srgbClr val="000000"/>
+                      </a:solidFill>
+                      <a:miter lim="400000"/>
+                    </a:lnL>
+                    <a:lnR w="3175">
+                      <a:solidFill>
+                        <a:srgbClr val="000000"/>
+                      </a:solidFill>
+                      <a:miter lim="400000"/>
+                    </a:lnR>
+                    <a:lnT w="12700">
+                      <a:miter lim="400000"/>
+                    </a:lnT>
+                    <a:lnB w="12700">
+                      <a:miter lim="400000"/>
+                    </a:lnB>
+                    <a:solidFill>
+                      <a:schemeClr val="bg1"/>
+                    </a:solidFill>
+                  </a:tcPr>
+                </a:tc>
+                <a:tc>
+                  <a:txBody>
+                    <a:bodyPr/>
+                    <a:lstStyle/>
+                    <a:p>
+                      <a:pPr defTabSz="914400">
+                        <a:tabLst>
+                          <a:tab pos="342900" algn="l"/>
+                        </a:tabLst>
+                        <a:defRPr sz="2200">
+                          <a:latin typeface="Avenir Next Regular"/>
+                          <a:ea typeface="Avenir Next Regular"/>
+                          <a:cs typeface="Avenir Next Regular"/>
+                          <a:sym typeface="Avenir Next Regular"/>
+                        </a:defRPr>
+                      </a:pPr>
+                      <a:endParaRPr sz="800" baseline="0" dirty="0">
+                        <a:solidFill>
+                          <a:schemeClr val="tx1">
+                            <a:lumMod val="50000"/>
+                          </a:schemeClr>
+                        </a:solidFill>
+                      </a:endParaRPr>
+                    </a:p>
+                  </a:txBody>
+                  <a:tcPr marL="19050" marR="19050" marT="19050" marB="19050" horzOverflow="overflow">
+                    <a:lnL w="3175">
+                      <a:solidFill>
+                        <a:srgbClr val="000000"/>
+                      </a:solidFill>
+                      <a:miter lim="400000"/>
+                    </a:lnL>
+                    <a:lnR w="3175">
+                      <a:solidFill>
+                        <a:srgbClr val="000000"/>
+                      </a:solidFill>
+                      <a:miter lim="400000"/>
+                    </a:lnR>
+                    <a:lnT w="12700">
+                      <a:miter lim="400000"/>
+                    </a:lnT>
+                    <a:lnB w="12700">
+                      <a:miter lim="400000"/>
+                    </a:lnB>
+                    <a:solidFill>
+                      <a:schemeClr val="bg1"/>
+                    </a:solidFill>
+                  </a:tcPr>
+                </a:tc>
+                <a:extLst>
+                  <a:ext uri="{0D108BD9-81ED-4DB2-BD59-A6C34878D82A}">
+                    <a16:rowId xmlns:a16="http://schemas.microsoft.com/office/drawing/2014/main" val="10020"/>
+                  </a:ext>
+                </a:extLst>
+              </a:tr>
+              <a:tr h="229616">
+                <a:tc vMerge="1">
+                  <a:txBody>
+                    <a:bodyPr/>
+                    <a:lstStyle/>
+                    <a:p>
+                      <a:endParaRPr lang="ko-KR"/>
+                    </a:p>
+                  </a:txBody>
+                  <a:tcPr/>
+                </a:tc>
+                <a:tc gridSpan="2">
+                  <a:txBody>
+                    <a:bodyPr/>
+                    <a:lstStyle/>
+                    <a:p>
+                      <a:pPr algn="l" defTabSz="95250">
+                        <a:tabLst>
+                          <a:tab pos="342900" algn="l"/>
+                        </a:tabLst>
+                      </a:pPr>
+                      <a:r>
+                        <a:rPr sz="800" b="1" i="1" baseline="0" dirty="0">
+                          <a:solidFill>
+                            <a:schemeClr val="tx1">
+                              <a:lumMod val="50000"/>
+                            </a:schemeClr>
+                          </a:solidFill>
+                        </a:rPr>
+                        <a:t>Anterior view.</a:t>
+                      </a:r>
+                    </a:p>
+                  </a:txBody>
+                  <a:tcPr marL="19050" marR="19050" marT="19050" marB="19050" horzOverflow="overflow">
+                    <a:lnL w="3175">
+                      <a:solidFill>
+                        <a:srgbClr val="000000"/>
+                      </a:solidFill>
+                      <a:miter lim="400000"/>
+                    </a:lnL>
+                    <a:lnR w="3175">
+                      <a:solidFill>
+                        <a:srgbClr val="000000"/>
+                      </a:solidFill>
+                      <a:miter lim="400000"/>
+                    </a:lnR>
+                    <a:lnT w="12700">
+                      <a:miter lim="400000"/>
+                    </a:lnT>
+                    <a:lnB w="12700">
+                      <a:miter lim="400000"/>
+                    </a:lnB>
+                    <a:solidFill>
+                      <a:schemeClr val="bg1"/>
+                    </a:solidFill>
+                  </a:tcPr>
+                </a:tc>
+                <a:tc hMerge="1">
+                  <a:txBody>
+                    <a:bodyPr/>
+                    <a:lstStyle/>
+                    <a:p>
+                      <a:endParaRPr lang="ko-KR"/>
+                    </a:p>
+                  </a:txBody>
+                  <a:tcPr/>
+                </a:tc>
+                <a:extLst>
+                  <a:ext uri="{0D108BD9-81ED-4DB2-BD59-A6C34878D82A}">
+                    <a16:rowId xmlns:a16="http://schemas.microsoft.com/office/drawing/2014/main" val="10021"/>
+                  </a:ext>
+                </a:extLst>
+              </a:tr>
+              <a:tr h="218622">
+                <a:tc vMerge="1">
+                  <a:txBody>
+                    <a:bodyPr/>
+                    <a:lstStyle/>
+                    <a:p>
+                      <a:endParaRPr lang="ko-KR"/>
+                    </a:p>
+                  </a:txBody>
+                  <a:tcPr/>
+                </a:tc>
+                <a:tc>
+                  <a:txBody>
+                    <a:bodyPr/>
+                    <a:lstStyle/>
+                    <a:p>
+                      <a:pPr algn="l" defTabSz="95250">
+                        <a:tabLst>
+                          <a:tab pos="342900" algn="l"/>
+                        </a:tabLst>
+                      </a:pPr>
+                      <a:r>
+                        <a:rPr sz="800" baseline="0">
+                          <a:solidFill>
+                            <a:schemeClr val="tx1">
+                              <a:lumMod val="50000"/>
+                            </a:schemeClr>
+                          </a:solidFill>
+                        </a:rPr>
+                        <a:t>1.Full body 2.Planta extension 3..Pelvic flare</a:t>
+                      </a:r>
+                    </a:p>
+                  </a:txBody>
+                  <a:tcPr marL="19050" marR="19050" marT="19050" marB="19050" horzOverflow="overflow">
+                    <a:lnL w="3175">
+                      <a:solidFill>
+                        <a:srgbClr val="000000"/>
+                      </a:solidFill>
+                      <a:miter lim="400000"/>
+                    </a:lnL>
+                    <a:lnR w="3175">
+                      <a:solidFill>
+                        <a:srgbClr val="000000"/>
+                      </a:solidFill>
+                      <a:miter lim="400000"/>
+                    </a:lnR>
+                    <a:lnT w="12700">
+                      <a:miter lim="400000"/>
+                    </a:lnT>
+                    <a:lnB w="3175">
+                      <a:solidFill>
+                        <a:srgbClr val="000000"/>
+                      </a:solidFill>
+                      <a:miter lim="400000"/>
+                    </a:lnB>
+                    <a:solidFill>
+                      <a:schemeClr val="bg1"/>
+                    </a:solidFill>
+                  </a:tcPr>
+                </a:tc>
+                <a:tc>
+                  <a:txBody>
+                    <a:bodyPr/>
+                    <a:lstStyle/>
+                    <a:p>
+                      <a:pPr defTabSz="914400">
+                        <a:tabLst>
+                          <a:tab pos="342900" algn="l"/>
+                        </a:tabLst>
+                        <a:defRPr sz="2200">
+                          <a:latin typeface="Avenir Next Regular"/>
+                          <a:ea typeface="Avenir Next Regular"/>
+                          <a:cs typeface="Avenir Next Regular"/>
+                          <a:sym typeface="Avenir Next Regular"/>
+                        </a:defRPr>
+                      </a:pPr>
+                      <a:endParaRPr sz="800" baseline="0" dirty="0">
+                        <a:solidFill>
+                          <a:schemeClr val="tx1">
+                            <a:lumMod val="50000"/>
+                          </a:schemeClr>
+                        </a:solidFill>
+                      </a:endParaRPr>
+                    </a:p>
+                  </a:txBody>
+                  <a:tcPr marL="19050" marR="19050" marT="19050" marB="19050" horzOverflow="overflow">
+                    <a:lnL w="3175">
+                      <a:solidFill>
+                        <a:srgbClr val="000000"/>
+                      </a:solidFill>
+                      <a:miter lim="400000"/>
+                    </a:lnL>
+                    <a:lnR w="3175">
+                      <a:solidFill>
+                        <a:srgbClr val="000000"/>
+                      </a:solidFill>
+                      <a:miter lim="400000"/>
+                    </a:lnR>
+                    <a:lnT w="12700">
+                      <a:miter lim="400000"/>
+                    </a:lnT>
+                    <a:lnB w="3175">
+                      <a:solidFill>
+                        <a:srgbClr val="000000"/>
+                      </a:solidFill>
+                      <a:miter lim="400000"/>
+                    </a:lnB>
+                    <a:solidFill>
+                      <a:schemeClr val="bg1"/>
+                    </a:solidFill>
+                  </a:tcPr>
+                </a:tc>
+                <a:extLst>
+                  <a:ext uri="{0D108BD9-81ED-4DB2-BD59-A6C34878D82A}">
+                    <a16:rowId xmlns:a16="http://schemas.microsoft.com/office/drawing/2014/main" val="10022"/>
+                  </a:ext>
+                </a:extLst>
+              </a:tr>
+            </a:tbl>
+          </a:graphicData>
+        </a:graphic>
+      </p:graphicFrame>
+    </p:spTree>
+  </p:cSld>
+  <p:clrMapOvr>
+    <a:masterClrMapping/>
+  </p:clrMapOvr>
+  <p:transition spd="med"/>
+</p:sld>
+</file>
+
+<file path=ppt/slides/slide14.xml><?xml version="1.0" encoding="utf-8"?>
+<p:sld xmlns:a="http://schemas.openxmlformats.org/drawingml/2006/main" xmlns:r="http://schemas.openxmlformats.org/officeDocument/2006/relationships" xmlns:p="http://schemas.openxmlformats.org/presentationml/2006/main">
+  <p:cSld>
+    <p:spTree>
+      <p:nvGrpSpPr>
+        <p:cNvPr id="1" name=""/>
+        <p:cNvGrpSpPr/>
+        <p:nvPr/>
+      </p:nvGrpSpPr>
+      <p:grpSpPr>
+        <a:xfrm>
+          <a:off x="0" y="0"/>
+          <a:ext cx="0" cy="0"/>
+          <a:chOff x="0" y="0"/>
+          <a:chExt cx="0" cy="0"/>
+        </a:xfrm>
+      </p:grpSpPr>
       <p:sp>
         <p:nvSpPr>
           <p:cNvPr id="151" name="텍스트"/>
@@ -19667,7 +22228,7 @@
           </a:ln>
           <a:extLst>
             <a:ext uri="{C572A759-6A51-4108-AA02-DFA0A04FC94B}">
-              <ma14:wrappingTextBoxFlag xmlns="" xmlns:m="http://schemas.openxmlformats.org/officeDocument/2006/math" xmlns:a14="http://schemas.microsoft.com/office/drawing/2010/main" xmlns:ma14="http://schemas.microsoft.com/office/mac/drawingml/2011/main" val="1"/>
+              <ma14:wrappingTextBoxFlag xmlns:ma14="http://schemas.microsoft.com/office/mac/drawingml/2011/main" xmlns:a14="http://schemas.microsoft.com/office/drawing/2010/main" xmlns:m="http://schemas.openxmlformats.org/officeDocument/2006/math" xmlns="" val="1"/>
             </a:ext>
           </a:extLst>
         </p:spPr>
@@ -20415,7 +22976,7 @@
 </p:sld>
 </file>
 
-<file path=ppt/slides/slide11.xml><?xml version="1.0" encoding="utf-8"?>
+<file path=ppt/slides/slide15.xml><?xml version="1.0" encoding="utf-8"?>
 <p:sld xmlns:a="http://schemas.openxmlformats.org/drawingml/2006/main" xmlns:r="http://schemas.openxmlformats.org/officeDocument/2006/relationships" xmlns:p="http://schemas.openxmlformats.org/presentationml/2006/main">
   <p:cSld>
     <p:spTree>
@@ -20451,7 +23012,7 @@
           </a:ln>
           <a:extLst>
             <a:ext uri="{C572A759-6A51-4108-AA02-DFA0A04FC94B}">
-              <ma14:wrappingTextBoxFlag xmlns:ma14="http://schemas.microsoft.com/office/mac/drawingml/2011/main" xmlns:a14="http://schemas.microsoft.com/office/drawing/2010/main" xmlns:m="http://schemas.openxmlformats.org/officeDocument/2006/math" xmlns="" val="1"/>
+              <ma14:wrappingTextBoxFlag xmlns="" xmlns:m="http://schemas.openxmlformats.org/officeDocument/2006/math" xmlns:a14="http://schemas.microsoft.com/office/drawing/2010/main" xmlns:ma14="http://schemas.microsoft.com/office/mac/drawingml/2011/main" val="1"/>
             </a:ext>
           </a:extLst>
         </p:spPr>
@@ -20501,7 +23062,7 @@
           </a:ln>
           <a:extLst>
             <a:ext uri="{C572A759-6A51-4108-AA02-DFA0A04FC94B}">
-              <ma14:wrappingTextBoxFlag xmlns:ma14="http://schemas.microsoft.com/office/mac/drawingml/2011/main" xmlns:a14="http://schemas.microsoft.com/office/drawing/2010/main" xmlns:m="http://schemas.openxmlformats.org/officeDocument/2006/math" xmlns="" val="1"/>
+              <ma14:wrappingTextBoxFlag xmlns="" xmlns:m="http://schemas.openxmlformats.org/officeDocument/2006/math" xmlns:a14="http://schemas.microsoft.com/office/drawing/2010/main" xmlns:ma14="http://schemas.microsoft.com/office/mac/drawingml/2011/main" val="1"/>
             </a:ext>
           </a:extLst>
         </p:spPr>
@@ -20571,7 +23132,7 @@
           </a:ln>
           <a:extLst>
             <a:ext uri="{C572A759-6A51-4108-AA02-DFA0A04FC94B}">
-              <ma14:wrappingTextBoxFlag xmlns:ma14="http://schemas.microsoft.com/office/mac/drawingml/2011/main" xmlns:a14="http://schemas.microsoft.com/office/drawing/2010/main" xmlns:m="http://schemas.openxmlformats.org/officeDocument/2006/math" xmlns="" val="1"/>
+              <ma14:wrappingTextBoxFlag xmlns="" xmlns:m="http://schemas.openxmlformats.org/officeDocument/2006/math" xmlns:a14="http://schemas.microsoft.com/office/drawing/2010/main" xmlns:ma14="http://schemas.microsoft.com/office/mac/drawingml/2011/main" val="1"/>
             </a:ext>
           </a:extLst>
         </p:spPr>
@@ -20641,7 +23202,7 @@
           </a:ln>
           <a:extLst>
             <a:ext uri="{C572A759-6A51-4108-AA02-DFA0A04FC94B}">
-              <ma14:wrappingTextBoxFlag xmlns:ma14="http://schemas.microsoft.com/office/mac/drawingml/2011/main" xmlns:a14="http://schemas.microsoft.com/office/drawing/2010/main" xmlns:m="http://schemas.openxmlformats.org/officeDocument/2006/math" xmlns="" val="1"/>
+              <ma14:wrappingTextBoxFlag xmlns="" xmlns:m="http://schemas.openxmlformats.org/officeDocument/2006/math" xmlns:a14="http://schemas.microsoft.com/office/drawing/2010/main" xmlns:ma14="http://schemas.microsoft.com/office/mac/drawingml/2011/main" val="1"/>
             </a:ext>
           </a:extLst>
         </p:spPr>
@@ -20781,7 +23342,7 @@
 </p:sld>
 </file>
 
-<file path=ppt/slides/slide12.xml><?xml version="1.0" encoding="utf-8"?>
+<file path=ppt/slides/slide16.xml><?xml version="1.0" encoding="utf-8"?>
 <p:sld xmlns:a="http://schemas.openxmlformats.org/drawingml/2006/main" xmlns:r="http://schemas.openxmlformats.org/officeDocument/2006/relationships" xmlns:p="http://schemas.openxmlformats.org/presentationml/2006/main">
   <p:cSld>
     <p:spTree>
@@ -21176,7 +23737,7 @@
           </a:ln>
           <a:extLst>
             <a:ext uri="{C572A759-6A51-4108-AA02-DFA0A04FC94B}">
-              <ma14:wrappingTextBoxFlag xmlns:ma14="http://schemas.microsoft.com/office/mac/drawingml/2011/main" xmlns:p14="http://schemas.microsoft.com/office/powerpoint/2010/main" xmlns:a14="http://schemas.microsoft.com/office/drawing/2010/main" xmlns:m="http://schemas.openxmlformats.org/officeDocument/2006/math" xmlns="" val="1"/>
+              <ma14:wrappingTextBoxFlag xmlns="" xmlns:m="http://schemas.openxmlformats.org/officeDocument/2006/math" xmlns:a14="http://schemas.microsoft.com/office/drawing/2010/main" xmlns:p14="http://schemas.microsoft.com/office/powerpoint/2010/main" xmlns:ma14="http://schemas.microsoft.com/office/mac/drawingml/2011/main" val="1"/>
             </a:ext>
           </a:extLst>
         </p:spPr>
@@ -21344,7 +23905,7 @@
           </a:ln>
           <a:extLst>
             <a:ext uri="{C572A759-6A51-4108-AA02-DFA0A04FC94B}">
-              <ma14:wrappingTextBoxFlag xmlns:ma14="http://schemas.microsoft.com/office/mac/drawingml/2011/main" xmlns:p14="http://schemas.microsoft.com/office/powerpoint/2010/main" xmlns:a14="http://schemas.microsoft.com/office/drawing/2010/main" xmlns:m="http://schemas.openxmlformats.org/officeDocument/2006/math" xmlns="" val="1"/>
+              <ma14:wrappingTextBoxFlag xmlns="" xmlns:m="http://schemas.openxmlformats.org/officeDocument/2006/math" xmlns:a14="http://schemas.microsoft.com/office/drawing/2010/main" xmlns:p14="http://schemas.microsoft.com/office/powerpoint/2010/main" xmlns:ma14="http://schemas.microsoft.com/office/mac/drawingml/2011/main" val="1"/>
             </a:ext>
           </a:extLst>
         </p:spPr>
@@ -21855,7 +24416,7 @@
           </a:ln>
           <a:extLst>
             <a:ext uri="{C572A759-6A51-4108-AA02-DFA0A04FC94B}">
-              <ma14:wrappingTextBoxFlag xmlns:ma14="http://schemas.microsoft.com/office/mac/drawingml/2011/main" xmlns:p14="http://schemas.microsoft.com/office/powerpoint/2010/main" xmlns:a14="http://schemas.microsoft.com/office/drawing/2010/main" xmlns:m="http://schemas.openxmlformats.org/officeDocument/2006/math" xmlns="" val="1"/>
+              <ma14:wrappingTextBoxFlag xmlns="" xmlns:m="http://schemas.openxmlformats.org/officeDocument/2006/math" xmlns:a14="http://schemas.microsoft.com/office/drawing/2010/main" xmlns:p14="http://schemas.microsoft.com/office/powerpoint/2010/main" xmlns:ma14="http://schemas.microsoft.com/office/mac/drawingml/2011/main" val="1"/>
             </a:ext>
           </a:extLst>
         </p:spPr>
@@ -22190,14 +24751,14 @@
     <mc:Choice Requires="p14">
       <p:transition spd="med"/>
     </mc:Choice>
-    <mc:Fallback xmlns:a14="http://schemas.microsoft.com/office/drawing/2010/main" xmlns:m="http://schemas.openxmlformats.org/officeDocument/2006/math" xmlns="">
+    <mc:Fallback xmlns="" xmlns:m="http://schemas.openxmlformats.org/officeDocument/2006/math" xmlns:a14="http://schemas.microsoft.com/office/drawing/2010/main">
       <p:transition spd="slow"/>
     </mc:Fallback>
   </mc:AlternateContent>
 </p:sld>
 </file>
 
-<file path=ppt/slides/slide13.xml><?xml version="1.0" encoding="utf-8"?>
+<file path=ppt/slides/slide17.xml><?xml version="1.0" encoding="utf-8"?>
 <p:sld xmlns:a="http://schemas.openxmlformats.org/drawingml/2006/main" xmlns:r="http://schemas.openxmlformats.org/officeDocument/2006/relationships" xmlns:p="http://schemas.openxmlformats.org/presentationml/2006/main">
   <p:cSld>
     <p:spTree>
@@ -22233,7 +24794,7 @@
           </a:ln>
           <a:extLst>
             <a:ext uri="{C572A759-6A51-4108-AA02-DFA0A04FC94B}">
-              <ma14:wrappingTextBoxFlag xmlns:ma14="http://schemas.microsoft.com/office/mac/drawingml/2011/main" xmlns:a14="http://schemas.microsoft.com/office/drawing/2010/main" xmlns:m="http://schemas.openxmlformats.org/officeDocument/2006/math" xmlns="" val="1"/>
+              <ma14:wrappingTextBoxFlag xmlns="" xmlns:m="http://schemas.openxmlformats.org/officeDocument/2006/math" xmlns:a14="http://schemas.microsoft.com/office/drawing/2010/main" xmlns:ma14="http://schemas.microsoft.com/office/mac/drawingml/2011/main" val="1"/>
             </a:ext>
           </a:extLst>
         </p:spPr>
@@ -22359,7 +24920,7 @@
           </a:ln>
           <a:extLst>
             <a:ext uri="{C572A759-6A51-4108-AA02-DFA0A04FC94B}">
-              <ma14:wrappingTextBoxFlag xmlns:ma14="http://schemas.microsoft.com/office/mac/drawingml/2011/main" xmlns:a14="http://schemas.microsoft.com/office/drawing/2010/main" xmlns:m="http://schemas.openxmlformats.org/officeDocument/2006/math" xmlns="" val="1"/>
+              <ma14:wrappingTextBoxFlag xmlns="" xmlns:m="http://schemas.openxmlformats.org/officeDocument/2006/math" xmlns:a14="http://schemas.microsoft.com/office/drawing/2010/main" xmlns:ma14="http://schemas.microsoft.com/office/mac/drawingml/2011/main" val="1"/>
             </a:ext>
           </a:extLst>
         </p:spPr>
@@ -25755,7 +28316,7 @@
           </a:ln>
           <a:extLst>
             <a:ext uri="{C572A759-6A51-4108-AA02-DFA0A04FC94B}">
-              <ma14:wrappingTextBoxFlag xmlns:ma14="http://schemas.microsoft.com/office/mac/drawingml/2011/main" xmlns:a14="http://schemas.microsoft.com/office/drawing/2010/main" xmlns:m="http://schemas.openxmlformats.org/officeDocument/2006/math" xmlns="" val="1"/>
+              <ma14:wrappingTextBoxFlag xmlns="" xmlns:m="http://schemas.openxmlformats.org/officeDocument/2006/math" xmlns:a14="http://schemas.microsoft.com/office/drawing/2010/main" xmlns:ma14="http://schemas.microsoft.com/office/mac/drawingml/2011/main" val="1"/>
             </a:ext>
           </a:extLst>
         </p:spPr>
@@ -25852,7 +28413,7 @@
 </p:sld>
 </file>
 
-<file path=ppt/slides/slide14.xml><?xml version="1.0" encoding="utf-8"?>
+<file path=ppt/slides/slide18.xml><?xml version="1.0" encoding="utf-8"?>
 <p:sld xmlns:a="http://schemas.openxmlformats.org/drawingml/2006/main" xmlns:r="http://schemas.openxmlformats.org/officeDocument/2006/relationships" xmlns:p="http://schemas.openxmlformats.org/presentationml/2006/main">
   <p:cSld>
     <p:spTree>
@@ -25888,7 +28449,7 @@
           </a:ln>
           <a:extLst>
             <a:ext uri="{C572A759-6A51-4108-AA02-DFA0A04FC94B}">
-              <ma14:wrappingTextBoxFlag xmlns:ma14="http://schemas.microsoft.com/office/mac/drawingml/2011/main" xmlns:a14="http://schemas.microsoft.com/office/drawing/2010/main" xmlns:m="http://schemas.openxmlformats.org/officeDocument/2006/math" xmlns="" val="1"/>
+              <ma14:wrappingTextBoxFlag xmlns="" xmlns:m="http://schemas.openxmlformats.org/officeDocument/2006/math" xmlns:a14="http://schemas.microsoft.com/office/drawing/2010/main" xmlns:ma14="http://schemas.microsoft.com/office/mac/drawingml/2011/main" val="1"/>
             </a:ext>
           </a:extLst>
         </p:spPr>
@@ -26014,7 +28575,7 @@
           </a:ln>
           <a:extLst>
             <a:ext uri="{C572A759-6A51-4108-AA02-DFA0A04FC94B}">
-              <ma14:wrappingTextBoxFlag xmlns:ma14="http://schemas.microsoft.com/office/mac/drawingml/2011/main" xmlns:a14="http://schemas.microsoft.com/office/drawing/2010/main" xmlns:m="http://schemas.openxmlformats.org/officeDocument/2006/math" xmlns="" val="1"/>
+              <ma14:wrappingTextBoxFlag xmlns="" xmlns:m="http://schemas.openxmlformats.org/officeDocument/2006/math" xmlns:a14="http://schemas.microsoft.com/office/drawing/2010/main" xmlns:ma14="http://schemas.microsoft.com/office/mac/drawingml/2011/main" val="1"/>
             </a:ext>
           </a:extLst>
         </p:spPr>
@@ -26484,7 +29045,7 @@
           </a:ln>
           <a:extLst>
             <a:ext uri="{C572A759-6A51-4108-AA02-DFA0A04FC94B}">
-              <ma14:wrappingTextBoxFlag xmlns:ma14="http://schemas.microsoft.com/office/mac/drawingml/2011/main" xmlns:a14="http://schemas.microsoft.com/office/drawing/2010/main" xmlns:m="http://schemas.openxmlformats.org/officeDocument/2006/math" xmlns="" val="1"/>
+              <ma14:wrappingTextBoxFlag xmlns="" xmlns:m="http://schemas.openxmlformats.org/officeDocument/2006/math" xmlns:a14="http://schemas.microsoft.com/office/drawing/2010/main" xmlns:ma14="http://schemas.microsoft.com/office/mac/drawingml/2011/main" val="1"/>
             </a:ext>
           </a:extLst>
         </p:spPr>
@@ -26639,8 +29200,8 @@
         </p:blipFill>
         <p:spPr>
           <a:xfrm>
-            <a:off x="0" y="1145683"/>
-            <a:ext cx="9144000" cy="4566633"/>
+            <a:off x="311348" y="0"/>
+            <a:ext cx="8521302" cy="6858000"/>
           </a:xfrm>
           <a:prstGeom prst="rect">
             <a:avLst/>
@@ -27236,10 +29797,106 @@
           <a:chExt cx="0" cy="0"/>
         </a:xfrm>
       </p:grpSpPr>
+      <p:pic>
+        <p:nvPicPr>
+          <p:cNvPr id="2" name="Picture 1" descr="posturePhoto_1.jpg"/>
+          <p:cNvPicPr>
+            <a:picLocks noChangeAspect="1"/>
+          </p:cNvPicPr>
+          <p:nvPr/>
+        </p:nvPicPr>
+        <p:blipFill>
+          <a:blip r:embed="rId2"/>
+          <a:stretch>
+            <a:fillRect/>
+          </a:stretch>
+        </p:blipFill>
+        <p:spPr>
+          <a:xfrm>
+            <a:off x="453502" y="2057400"/>
+            <a:ext cx="2059248" cy="2743200"/>
+          </a:xfrm>
+          <a:prstGeom prst="rect">
+            <a:avLst/>
+          </a:prstGeom>
+        </p:spPr>
+      </p:pic>
+      <p:pic>
+        <p:nvPicPr>
+          <p:cNvPr id="3" name="Picture 2" descr="posture_default.jpg"/>
+          <p:cNvPicPr>
+            <a:picLocks noChangeAspect="1"/>
+          </p:cNvPicPr>
+          <p:nvPr/>
+        </p:nvPicPr>
+        <p:blipFill>
+          <a:blip r:embed="rId3"/>
+          <a:stretch>
+            <a:fillRect/>
+          </a:stretch>
+        </p:blipFill>
+        <p:spPr>
+          <a:xfrm>
+            <a:off x="2512751" y="2057400"/>
+            <a:ext cx="2059248" cy="2743200"/>
+          </a:xfrm>
+          <a:prstGeom prst="rect">
+            <a:avLst/>
+          </a:prstGeom>
+        </p:spPr>
+      </p:pic>
+      <p:pic>
+        <p:nvPicPr>
+          <p:cNvPr id="4" name="Picture 3" descr="posture_default.jpg"/>
+          <p:cNvPicPr>
+            <a:picLocks noChangeAspect="1"/>
+          </p:cNvPicPr>
+          <p:nvPr/>
+        </p:nvPicPr>
+        <p:blipFill>
+          <a:blip r:embed="rId3"/>
+          <a:stretch>
+            <a:fillRect/>
+          </a:stretch>
+        </p:blipFill>
+        <p:spPr>
+          <a:xfrm>
+            <a:off x="4572000" y="2057400"/>
+            <a:ext cx="2059248" cy="2743200"/>
+          </a:xfrm>
+          <a:prstGeom prst="rect">
+            <a:avLst/>
+          </a:prstGeom>
+        </p:spPr>
+      </p:pic>
+      <p:pic>
+        <p:nvPicPr>
+          <p:cNvPr id="5" name="Picture 4" descr="posture_default.jpg"/>
+          <p:cNvPicPr>
+            <a:picLocks noChangeAspect="1"/>
+          </p:cNvPicPr>
+          <p:nvPr/>
+        </p:nvPicPr>
+        <p:blipFill>
+          <a:blip r:embed="rId3"/>
+          <a:stretch>
+            <a:fillRect/>
+          </a:stretch>
+        </p:blipFill>
+        <p:spPr>
+          <a:xfrm>
+            <a:off x="6631248" y="2057400"/>
+            <a:ext cx="2059248" cy="2743200"/>
+          </a:xfrm>
+          <a:prstGeom prst="rect">
+            <a:avLst/>
+          </a:prstGeom>
+        </p:spPr>
+      </p:pic>
     </p:spTree>
     <p:extLst>
       <p:ext uri="{BB962C8B-B14F-4D97-AF65-F5344CB8AC3E}">
-        <p14:creationId xmlns:p14="http://schemas.microsoft.com/office/powerpoint/2010/main" val="3238872301"/>
+        <p14:creationId xmlns:p14="http://schemas.microsoft.com/office/powerpoint/2010/main" val="31630151"/>
       </p:ext>
     </p:extLst>
   </p:cSld>
@@ -27266,2453 +29923,16 @@
           <a:chExt cx="0" cy="0"/>
         </a:xfrm>
       </p:grpSpPr>
-      <p:graphicFrame>
-        <p:nvGraphicFramePr>
-          <p:cNvPr id="161" name="표"/>
-          <p:cNvGraphicFramePr/>
-          <p:nvPr/>
-        </p:nvGraphicFramePr>
-        <p:xfrm>
-          <a:off x="55037" y="901375"/>
-          <a:ext cx="9033929" cy="5146256"/>
-        </p:xfrm>
-        <a:graphic>
-          <a:graphicData uri="http://schemas.openxmlformats.org/drawingml/2006/table">
-            <a:tbl>
-              <a:tblPr/>
-              <a:tblGrid>
-                <a:gridCol w="1475442">
-                  <a:extLst>
-                    <a:ext uri="{9D8B030D-6E8A-4147-A177-3AD203B41FA5}">
-                      <a16:colId xmlns:a16="http://schemas.microsoft.com/office/drawing/2014/main" val="20000"/>
-                    </a:ext>
-                  </a:extLst>
-                </a:gridCol>
-                <a:gridCol w="4279718">
-                  <a:extLst>
-                    <a:ext uri="{9D8B030D-6E8A-4147-A177-3AD203B41FA5}">
-                      <a16:colId xmlns:a16="http://schemas.microsoft.com/office/drawing/2014/main" val="20001"/>
-                    </a:ext>
-                  </a:extLst>
-                </a:gridCol>
-                <a:gridCol w="3278769">
-                  <a:extLst>
-                    <a:ext uri="{9D8B030D-6E8A-4147-A177-3AD203B41FA5}">
-                      <a16:colId xmlns:a16="http://schemas.microsoft.com/office/drawing/2014/main" val="20002"/>
-                    </a:ext>
-                  </a:extLst>
-                </a:gridCol>
-              </a:tblGrid>
-              <a:tr h="237581">
-                <a:tc>
-                  <a:txBody>
-                    <a:bodyPr/>
-                    <a:lstStyle/>
-                    <a:p>
-                      <a:pPr defTabSz="914400">
-                        <a:tabLst>
-                          <a:tab pos="342900" algn="l"/>
-                        </a:tabLst>
-                        <a:defRPr>
-                          <a:latin typeface="Avenir Next Regular"/>
-                          <a:ea typeface="Avenir Next Regular"/>
-                          <a:cs typeface="Avenir Next Regular"/>
-                          <a:sym typeface="Avenir Next Regular"/>
-                        </a:defRPr>
-                      </a:pPr>
-                      <a:endParaRPr sz="300"/>
-                    </a:p>
-                  </a:txBody>
-                  <a:tcPr marL="19050" marR="19050" marT="19050" marB="19050" horzOverflow="overflow">
-                    <a:lnL w="3175">
-                      <a:solidFill>
-                        <a:srgbClr val="000000"/>
-                      </a:solidFill>
-                      <a:miter lim="400000"/>
-                    </a:lnL>
-                    <a:lnR w="3175">
-                      <a:solidFill>
-                        <a:srgbClr val="000000"/>
-                      </a:solidFill>
-                      <a:miter lim="400000"/>
-                    </a:lnR>
-                    <a:lnT w="3175">
-                      <a:solidFill>
-                        <a:srgbClr val="000000"/>
-                      </a:solidFill>
-                      <a:miter lim="400000"/>
-                    </a:lnT>
-                    <a:lnB w="12700">
-                      <a:miter lim="400000"/>
-                    </a:lnB>
-                    <a:solidFill>
-                      <a:srgbClr val="BEC0BF"/>
-                    </a:solidFill>
-                  </a:tcPr>
-                </a:tc>
-                <a:tc>
-                  <a:txBody>
-                    <a:bodyPr/>
-                    <a:lstStyle/>
-                    <a:p>
-                      <a:pPr algn="l" defTabSz="95250">
-                        <a:tabLst>
-                          <a:tab pos="342900" algn="l"/>
-                        </a:tabLst>
-                      </a:pPr>
-                      <a:r>
-                        <a:rPr sz="800" b="1"/>
-                        <a:t>Photo</a:t>
-                      </a:r>
-                    </a:p>
-                  </a:txBody>
-                  <a:tcPr marL="19050" marR="19050" marT="19050" marB="19050" horzOverflow="overflow">
-                    <a:lnL w="3175">
-                      <a:solidFill>
-                        <a:srgbClr val="000000"/>
-                      </a:solidFill>
-                      <a:miter lim="400000"/>
-                    </a:lnL>
-                    <a:lnR w="0">
-                      <a:miter lim="400000"/>
-                    </a:lnR>
-                    <a:lnT w="3175">
-                      <a:solidFill>
-                        <a:srgbClr val="000000"/>
-                      </a:solidFill>
-                      <a:miter lim="400000"/>
-                    </a:lnT>
-                    <a:lnB w="3175">
-                      <a:solidFill>
-                        <a:srgbClr val="D5D5D5"/>
-                      </a:solidFill>
-                      <a:miter lim="400000"/>
-                    </a:lnB>
-                    <a:solidFill>
-                      <a:srgbClr val="BEC0BF"/>
-                    </a:solidFill>
-                  </a:tcPr>
-                </a:tc>
-                <a:tc>
-                  <a:txBody>
-                    <a:bodyPr/>
-                    <a:lstStyle/>
-                    <a:p>
-                      <a:pPr algn="l" defTabSz="95250">
-                        <a:tabLst>
-                          <a:tab pos="342900" algn="l"/>
-                        </a:tabLst>
-                      </a:pPr>
-                      <a:r>
-                        <a:rPr sz="800" b="1"/>
-                        <a:t>Thermal infrared camera</a:t>
-                      </a:r>
-                    </a:p>
-                  </a:txBody>
-                  <a:tcPr marL="19050" marR="19050" marT="19050" marB="19050" horzOverflow="overflow">
-                    <a:lnL w="0">
-                      <a:miter lim="400000"/>
-                    </a:lnL>
-                    <a:lnR w="0">
-                      <a:miter lim="400000"/>
-                    </a:lnR>
-                    <a:lnT w="0">
-                      <a:miter lim="400000"/>
-                    </a:lnT>
-                    <a:lnB w="0">
-                      <a:miter lim="400000"/>
-                    </a:lnB>
-                    <a:solidFill>
-                      <a:srgbClr val="BEC0BF"/>
-                    </a:solidFill>
-                  </a:tcPr>
-                </a:tc>
-                <a:extLst>
-                  <a:ext uri="{0D108BD9-81ED-4DB2-BD59-A6C34878D82A}">
-                    <a16:rowId xmlns:a16="http://schemas.microsoft.com/office/drawing/2014/main" val="10000"/>
-                  </a:ext>
-                </a:extLst>
-              </a:tr>
-              <a:tr h="224291">
-                <a:tc rowSpan="8">
-                  <a:txBody>
-                    <a:bodyPr/>
-                    <a:lstStyle/>
-                    <a:p>
-                      <a:pPr algn="l" defTabSz="95250">
-                        <a:tabLst>
-                          <a:tab pos="342900" algn="l"/>
-                        </a:tabLst>
-                        <a:defRPr sz="2300" b="1">
-                          <a:latin typeface="Gill Sans"/>
-                          <a:ea typeface="Gill Sans"/>
-                          <a:cs typeface="Gill Sans"/>
-                          <a:sym typeface="Gill Sans"/>
-                        </a:defRPr>
-                      </a:pPr>
-                      <a:r>
-                        <a:rPr sz="900" baseline="0" dirty="0">
-                          <a:solidFill>
-                            <a:schemeClr val="tx1">
-                              <a:lumMod val="50000"/>
-                            </a:schemeClr>
-                          </a:solidFill>
-                        </a:rPr>
-                        <a:t>   </a:t>
-                      </a:r>
-                      <a:r>
-                        <a:rPr sz="800" baseline="0" dirty="0">
-                          <a:solidFill>
-                            <a:schemeClr val="tx1">
-                              <a:lumMod val="50000"/>
-                            </a:schemeClr>
-                          </a:solidFill>
-                        </a:rPr>
-                        <a:t>Standing</a:t>
-                      </a:r>
-                    </a:p>
-                  </a:txBody>
-                  <a:tcPr marL="19050" marR="19050" marT="19050" marB="19050" horzOverflow="overflow">
-                    <a:lnL w="3175">
-                      <a:solidFill>
-                        <a:srgbClr val="000000"/>
-                      </a:solidFill>
-                      <a:miter lim="400000"/>
-                    </a:lnL>
-                    <a:lnR w="3175">
-                      <a:solidFill>
-                        <a:srgbClr val="D5D5D5"/>
-                      </a:solidFill>
-                      <a:miter lim="400000"/>
-                    </a:lnR>
-                    <a:lnT w="12700">
-                      <a:miter lim="400000"/>
-                    </a:lnT>
-                    <a:lnB w="12700">
-                      <a:miter lim="400000"/>
-                    </a:lnB>
-                    <a:solidFill>
-                      <a:schemeClr val="bg1"/>
-                    </a:solidFill>
-                  </a:tcPr>
-                </a:tc>
-                <a:tc gridSpan="2">
-                  <a:txBody>
-                    <a:bodyPr/>
-                    <a:lstStyle/>
-                    <a:p>
-                      <a:pPr algn="l" defTabSz="95250">
-                        <a:tabLst>
-                          <a:tab pos="342900" algn="l"/>
-                        </a:tabLst>
-                      </a:pPr>
-                      <a:r>
-                        <a:rPr sz="800" b="1" i="1" baseline="0">
-                          <a:solidFill>
-                            <a:schemeClr val="tx1">
-                              <a:lumMod val="50000"/>
-                            </a:schemeClr>
-                          </a:solidFill>
-                        </a:rPr>
-                        <a:t>Mirror view.</a:t>
-                      </a:r>
-                    </a:p>
-                  </a:txBody>
-                  <a:tcPr marL="19050" marR="19050" marT="19050" marB="19050" horzOverflow="overflow">
-                    <a:lnL w="3175">
-                      <a:solidFill>
-                        <a:srgbClr val="D5D5D5"/>
-                      </a:solidFill>
-                      <a:miter lim="400000"/>
-                    </a:lnL>
-                    <a:lnR w="3175">
-                      <a:solidFill>
-                        <a:srgbClr val="000000"/>
-                      </a:solidFill>
-                      <a:miter lim="400000"/>
-                    </a:lnR>
-                    <a:lnT w="3175">
-                      <a:solidFill>
-                        <a:srgbClr val="D5D5D5"/>
-                      </a:solidFill>
-                      <a:miter lim="400000"/>
-                    </a:lnT>
-                    <a:lnB w="3175">
-                      <a:solidFill>
-                        <a:srgbClr val="D5D5D5"/>
-                      </a:solidFill>
-                      <a:miter lim="400000"/>
-                    </a:lnB>
-                    <a:solidFill>
-                      <a:schemeClr val="bg1"/>
-                    </a:solidFill>
-                  </a:tcPr>
-                </a:tc>
-                <a:tc hMerge="1">
-                  <a:txBody>
-                    <a:bodyPr/>
-                    <a:lstStyle/>
-                    <a:p>
-                      <a:endParaRPr lang="ko-KR"/>
-                    </a:p>
-                  </a:txBody>
-                  <a:tcPr/>
-                </a:tc>
-                <a:extLst>
-                  <a:ext uri="{0D108BD9-81ED-4DB2-BD59-A6C34878D82A}">
-                    <a16:rowId xmlns:a16="http://schemas.microsoft.com/office/drawing/2014/main" val="10001"/>
-                  </a:ext>
-                </a:extLst>
-              </a:tr>
-              <a:tr h="278130">
-                <a:tc vMerge="1">
-                  <a:txBody>
-                    <a:bodyPr/>
-                    <a:lstStyle/>
-                    <a:p>
-                      <a:endParaRPr lang="ko-KR"/>
-                    </a:p>
-                  </a:txBody>
-                  <a:tcPr/>
-                </a:tc>
-                <a:tc>
-                  <a:txBody>
-                    <a:bodyPr/>
-                    <a:lstStyle/>
-                    <a:p>
-                      <a:pPr algn="l" defTabSz="95250">
-                        <a:tabLst>
-                          <a:tab pos="342900" algn="l"/>
-                        </a:tabLst>
-                      </a:pPr>
-                      <a:r>
-                        <a:rPr sz="800" baseline="0" dirty="0">
-                          <a:solidFill>
-                            <a:schemeClr val="tx1">
-                              <a:lumMod val="50000"/>
-                            </a:schemeClr>
-                          </a:solidFill>
-                        </a:rPr>
-                        <a:t>1.Natural Leg 2.Natural foot 3.Natural one foot stance 
-4.Positional foot 5.positional one foot stance</a:t>
-                      </a:r>
-                    </a:p>
-                  </a:txBody>
-                  <a:tcPr marL="19050" marR="19050" marT="19050" marB="19050" horzOverflow="overflow">
-                    <a:lnL w="3175">
-                      <a:solidFill>
-                        <a:srgbClr val="000000"/>
-                      </a:solidFill>
-                      <a:miter lim="400000"/>
-                    </a:lnL>
-                    <a:lnR w="3175">
-                      <a:solidFill>
-                        <a:srgbClr val="000000"/>
-                      </a:solidFill>
-                      <a:miter lim="400000"/>
-                    </a:lnR>
-                    <a:lnT w="3175">
-                      <a:solidFill>
-                        <a:srgbClr val="D5D5D5"/>
-                      </a:solidFill>
-                      <a:miter lim="400000"/>
-                    </a:lnT>
-                    <a:lnB w="12700">
-                      <a:miter lim="400000"/>
-                    </a:lnB>
-                    <a:solidFill>
-                      <a:schemeClr val="bg1"/>
-                    </a:solidFill>
-                  </a:tcPr>
-                </a:tc>
-                <a:tc>
-                  <a:txBody>
-                    <a:bodyPr/>
-                    <a:lstStyle/>
-                    <a:p>
-                      <a:pPr defTabSz="914400">
-                        <a:tabLst>
-                          <a:tab pos="342900" algn="l"/>
-                        </a:tabLst>
-                        <a:defRPr sz="2200">
-                          <a:latin typeface="Avenir Next Regular"/>
-                          <a:ea typeface="Avenir Next Regular"/>
-                          <a:cs typeface="Avenir Next Regular"/>
-                          <a:sym typeface="Avenir Next Regular"/>
-                        </a:defRPr>
-                      </a:pPr>
-                      <a:endParaRPr sz="800" baseline="0">
-                        <a:solidFill>
-                          <a:schemeClr val="tx1">
-                            <a:lumMod val="50000"/>
-                          </a:schemeClr>
-                        </a:solidFill>
-                      </a:endParaRPr>
-                    </a:p>
-                  </a:txBody>
-                  <a:tcPr marL="19050" marR="19050" marT="19050" marB="19050" horzOverflow="overflow">
-                    <a:lnL w="3175">
-                      <a:solidFill>
-                        <a:srgbClr val="000000"/>
-                      </a:solidFill>
-                      <a:miter lim="400000"/>
-                    </a:lnL>
-                    <a:lnR w="3175">
-                      <a:solidFill>
-                        <a:srgbClr val="000000"/>
-                      </a:solidFill>
-                      <a:miter lim="400000"/>
-                    </a:lnR>
-                    <a:lnT w="12700">
-                      <a:miter lim="400000"/>
-                    </a:lnT>
-                    <a:lnB w="12700">
-                      <a:miter lim="400000"/>
-                    </a:lnB>
-                    <a:solidFill>
-                      <a:schemeClr val="bg1"/>
-                    </a:solidFill>
-                  </a:tcPr>
-                </a:tc>
-                <a:extLst>
-                  <a:ext uri="{0D108BD9-81ED-4DB2-BD59-A6C34878D82A}">
-                    <a16:rowId xmlns:a16="http://schemas.microsoft.com/office/drawing/2014/main" val="10002"/>
-                  </a:ext>
-                </a:extLst>
-              </a:tr>
-              <a:tr h="233123">
-                <a:tc vMerge="1">
-                  <a:txBody>
-                    <a:bodyPr/>
-                    <a:lstStyle/>
-                    <a:p>
-                      <a:endParaRPr lang="ko-KR"/>
-                    </a:p>
-                  </a:txBody>
-                  <a:tcPr/>
-                </a:tc>
-                <a:tc gridSpan="2">
-                  <a:txBody>
-                    <a:bodyPr/>
-                    <a:lstStyle/>
-                    <a:p>
-                      <a:pPr algn="l" defTabSz="95250">
-                        <a:tabLst>
-                          <a:tab pos="342900" algn="l"/>
-                        </a:tabLst>
-                      </a:pPr>
-                      <a:r>
-                        <a:rPr sz="800" b="1" i="1" baseline="0" dirty="0">
-                          <a:solidFill>
-                            <a:schemeClr val="tx1">
-                              <a:lumMod val="50000"/>
-                            </a:schemeClr>
-                          </a:solidFill>
-                        </a:rPr>
-                        <a:t>Posterior view.</a:t>
-                      </a:r>
-                    </a:p>
-                  </a:txBody>
-                  <a:tcPr marL="19050" marR="19050" marT="19050" marB="19050" horzOverflow="overflow">
-                    <a:lnL w="3175">
-                      <a:solidFill>
-                        <a:srgbClr val="000000"/>
-                      </a:solidFill>
-                      <a:miter lim="400000"/>
-                    </a:lnL>
-                    <a:lnR w="3175">
-                      <a:solidFill>
-                        <a:srgbClr val="000000"/>
-                      </a:solidFill>
-                      <a:miter lim="400000"/>
-                    </a:lnR>
-                    <a:lnT w="12700">
-                      <a:miter lim="400000"/>
-                    </a:lnT>
-                    <a:lnB w="12700">
-                      <a:miter lim="400000"/>
-                    </a:lnB>
-                    <a:solidFill>
-                      <a:schemeClr val="bg1"/>
-                    </a:solidFill>
-                  </a:tcPr>
-                </a:tc>
-                <a:tc hMerge="1">
-                  <a:txBody>
-                    <a:bodyPr/>
-                    <a:lstStyle/>
-                    <a:p>
-                      <a:endParaRPr lang="ko-KR"/>
-                    </a:p>
-                  </a:txBody>
-                  <a:tcPr/>
-                </a:tc>
-                <a:extLst>
-                  <a:ext uri="{0D108BD9-81ED-4DB2-BD59-A6C34878D82A}">
-                    <a16:rowId xmlns:a16="http://schemas.microsoft.com/office/drawing/2014/main" val="10003"/>
-                  </a:ext>
-                </a:extLst>
-              </a:tr>
-              <a:tr h="278130">
-                <a:tc vMerge="1">
-                  <a:txBody>
-                    <a:bodyPr/>
-                    <a:lstStyle/>
-                    <a:p>
-                      <a:endParaRPr lang="ko-KR"/>
-                    </a:p>
-                  </a:txBody>
-                  <a:tcPr/>
-                </a:tc>
-                <a:tc>
-                  <a:txBody>
-                    <a:bodyPr/>
-                    <a:lstStyle/>
-                    <a:p>
-                      <a:pPr algn="l" defTabSz="95250">
-                        <a:tabLst>
-                          <a:tab pos="342900" algn="l"/>
-                        </a:tabLst>
-                      </a:pPr>
-                      <a:r>
-                        <a:rPr sz="800" baseline="0" dirty="0">
-                          <a:solidFill>
-                            <a:schemeClr val="tx1">
-                              <a:lumMod val="50000"/>
-                            </a:schemeClr>
-                          </a:solidFill>
-                        </a:rPr>
-                        <a:t>1.Open &amp; Bite 2.Upper body flexion(Holding ankle &amp; Knee) 
-3.Nuchal rotation 4,Head side bending</a:t>
-                      </a:r>
-                    </a:p>
-                  </a:txBody>
-                  <a:tcPr marL="19050" marR="19050" marT="19050" marB="19050" horzOverflow="overflow">
-                    <a:lnL w="3175">
-                      <a:solidFill>
-                        <a:srgbClr val="000000"/>
-                      </a:solidFill>
-                      <a:miter lim="400000"/>
-                    </a:lnL>
-                    <a:lnR w="3175">
-                      <a:solidFill>
-                        <a:srgbClr val="000000"/>
-                      </a:solidFill>
-                      <a:miter lim="400000"/>
-                    </a:lnR>
-                    <a:lnT w="12700">
-                      <a:miter lim="400000"/>
-                    </a:lnT>
-                    <a:lnB w="12700">
-                      <a:miter lim="400000"/>
-                    </a:lnB>
-                    <a:solidFill>
-                      <a:schemeClr val="bg1"/>
-                    </a:solidFill>
-                  </a:tcPr>
-                </a:tc>
-                <a:tc>
-                  <a:txBody>
-                    <a:bodyPr/>
-                    <a:lstStyle/>
-                    <a:p>
-                      <a:pPr algn="l" defTabSz="95250">
-                        <a:tabLst>
-                          <a:tab pos="342900" algn="l"/>
-                        </a:tabLst>
-                      </a:pPr>
-                      <a:r>
-                        <a:rPr sz="800" baseline="0">
-                          <a:solidFill>
-                            <a:schemeClr val="tx1">
-                              <a:lumMod val="50000"/>
-                            </a:schemeClr>
-                          </a:solidFill>
-                        </a:rPr>
-                        <a:t>1.Open </a:t>
-                      </a:r>
-                    </a:p>
-                  </a:txBody>
-                  <a:tcPr marL="19050" marR="19050" marT="19050" marB="19050" horzOverflow="overflow">
-                    <a:lnL w="3175">
-                      <a:solidFill>
-                        <a:srgbClr val="000000"/>
-                      </a:solidFill>
-                      <a:miter lim="400000"/>
-                    </a:lnL>
-                    <a:lnR w="3175">
-                      <a:solidFill>
-                        <a:srgbClr val="000000"/>
-                      </a:solidFill>
-                      <a:miter lim="400000"/>
-                    </a:lnR>
-                    <a:lnT w="12700">
-                      <a:miter lim="400000"/>
-                    </a:lnT>
-                    <a:lnB w="12700">
-                      <a:miter lim="400000"/>
-                    </a:lnB>
-                    <a:solidFill>
-                      <a:schemeClr val="bg1"/>
-                    </a:solidFill>
-                  </a:tcPr>
-                </a:tc>
-                <a:extLst>
-                  <a:ext uri="{0D108BD9-81ED-4DB2-BD59-A6C34878D82A}">
-                    <a16:rowId xmlns:a16="http://schemas.microsoft.com/office/drawing/2014/main" val="10004"/>
-                  </a:ext>
-                </a:extLst>
-              </a:tr>
-              <a:tr h="232156">
-                <a:tc vMerge="1">
-                  <a:txBody>
-                    <a:bodyPr/>
-                    <a:lstStyle/>
-                    <a:p>
-                      <a:endParaRPr lang="ko-KR"/>
-                    </a:p>
-                  </a:txBody>
-                  <a:tcPr/>
-                </a:tc>
-                <a:tc gridSpan="2">
-                  <a:txBody>
-                    <a:bodyPr/>
-                    <a:lstStyle/>
-                    <a:p>
-                      <a:pPr algn="l" defTabSz="95250">
-                        <a:tabLst>
-                          <a:tab pos="342900" algn="l"/>
-                        </a:tabLst>
-                      </a:pPr>
-                      <a:r>
-                        <a:rPr sz="800" b="1" i="1" baseline="0" dirty="0">
-                          <a:solidFill>
-                            <a:schemeClr val="tx1">
-                              <a:lumMod val="50000"/>
-                            </a:schemeClr>
-                          </a:solidFill>
-                        </a:rPr>
-                        <a:t>Anterior view.</a:t>
-                      </a:r>
-                    </a:p>
-                  </a:txBody>
-                  <a:tcPr marL="19050" marR="19050" marT="19050" marB="19050" horzOverflow="overflow">
-                    <a:lnL w="3175">
-                      <a:solidFill>
-                        <a:srgbClr val="000000"/>
-                      </a:solidFill>
-                      <a:miter lim="400000"/>
-                    </a:lnL>
-                    <a:lnR w="3175">
-                      <a:solidFill>
-                        <a:srgbClr val="000000"/>
-                      </a:solidFill>
-                      <a:miter lim="400000"/>
-                    </a:lnR>
-                    <a:lnT w="12700">
-                      <a:miter lim="400000"/>
-                    </a:lnT>
-                    <a:lnB w="3175">
-                      <a:solidFill>
-                        <a:schemeClr val="accent2">
-                          <a:hueOff val="-85258"/>
-                          <a:satOff val="14347"/>
-                          <a:lumOff val="22373"/>
-                        </a:schemeClr>
-                      </a:solidFill>
-                      <a:miter lim="400000"/>
-                    </a:lnB>
-                    <a:solidFill>
-                      <a:schemeClr val="bg1"/>
-                    </a:solidFill>
-                  </a:tcPr>
-                </a:tc>
-                <a:tc hMerge="1">
-                  <a:txBody>
-                    <a:bodyPr/>
-                    <a:lstStyle/>
-                    <a:p>
-                      <a:endParaRPr lang="ko-KR"/>
-                    </a:p>
-                  </a:txBody>
-                  <a:tcPr/>
-                </a:tc>
-                <a:extLst>
-                  <a:ext uri="{0D108BD9-81ED-4DB2-BD59-A6C34878D82A}">
-                    <a16:rowId xmlns:a16="http://schemas.microsoft.com/office/drawing/2014/main" val="10005"/>
-                  </a:ext>
-                </a:extLst>
-              </a:tr>
-              <a:tr h="181268">
-                <a:tc vMerge="1">
-                  <a:txBody>
-                    <a:bodyPr/>
-                    <a:lstStyle/>
-                    <a:p>
-                      <a:endParaRPr lang="ko-KR"/>
-                    </a:p>
-                  </a:txBody>
-                  <a:tcPr/>
-                </a:tc>
-                <a:tc>
-                  <a:txBody>
-                    <a:bodyPr/>
-                    <a:lstStyle/>
-                    <a:p>
-                      <a:pPr algn="l" defTabSz="95250">
-                        <a:tabLst>
-                          <a:tab pos="342900" algn="l"/>
-                        </a:tabLst>
-                        <a:defRPr sz="2100"/>
-                      </a:pPr>
-                      <a:r>
-                        <a:rPr sz="800" baseline="0" dirty="0">
-                          <a:solidFill>
-                            <a:schemeClr val="tx1">
-                              <a:lumMod val="50000"/>
-                            </a:schemeClr>
-                          </a:solidFill>
-                        </a:rPr>
-                        <a:t>1.Open &amp; Bite  </a:t>
-                      </a:r>
-                      <a:r>
-                        <a:rPr sz="800" baseline="0" dirty="0">
-                          <a:solidFill>
-                            <a:schemeClr val="accent1">
-                              <a:lumMod val="75000"/>
-                            </a:schemeClr>
-                          </a:solidFill>
-                        </a:rPr>
-                        <a:t>2.Crossing eye &amp; biting video</a:t>
-                      </a:r>
-                    </a:p>
-                  </a:txBody>
-                  <a:tcPr marL="19050" marR="19050" marT="19050" marB="19050" horzOverflow="overflow">
-                    <a:lnL w="3175">
-                      <a:solidFill>
-                        <a:schemeClr val="accent2">
-                          <a:hueOff val="-85258"/>
-                          <a:satOff val="14347"/>
-                          <a:lumOff val="22373"/>
-                        </a:schemeClr>
-                      </a:solidFill>
-                      <a:miter lim="400000"/>
-                    </a:lnL>
-                    <a:lnR w="3175">
-                      <a:solidFill>
-                        <a:schemeClr val="accent2">
-                          <a:hueOff val="-85258"/>
-                          <a:satOff val="14347"/>
-                          <a:lumOff val="22373"/>
-                        </a:schemeClr>
-                      </a:solidFill>
-                      <a:miter lim="400000"/>
-                    </a:lnR>
-                    <a:lnT w="3175">
-                      <a:solidFill>
-                        <a:schemeClr val="accent2">
-                          <a:hueOff val="-85258"/>
-                          <a:satOff val="14347"/>
-                          <a:lumOff val="22373"/>
-                        </a:schemeClr>
-                      </a:solidFill>
-                      <a:miter lim="400000"/>
-                    </a:lnT>
-                    <a:lnB w="3175">
-                      <a:solidFill>
-                        <a:schemeClr val="accent2">
-                          <a:hueOff val="-85258"/>
-                          <a:satOff val="14347"/>
-                          <a:lumOff val="22373"/>
-                        </a:schemeClr>
-                      </a:solidFill>
-                      <a:miter lim="400000"/>
-                    </a:lnB>
-                    <a:solidFill>
-                      <a:schemeClr val="bg1"/>
-                    </a:solidFill>
-                  </a:tcPr>
-                </a:tc>
-                <a:tc>
-                  <a:txBody>
-                    <a:bodyPr/>
-                    <a:lstStyle/>
-                    <a:p>
-                      <a:pPr algn="l" defTabSz="95250">
-                        <a:tabLst>
-                          <a:tab pos="342900" algn="l"/>
-                        </a:tabLst>
-                      </a:pPr>
-                      <a:r>
-                        <a:rPr sz="800" baseline="0">
-                          <a:solidFill>
-                            <a:schemeClr val="tx1">
-                              <a:lumMod val="50000"/>
-                            </a:schemeClr>
-                          </a:solidFill>
-                        </a:rPr>
-                        <a:t>1.Open</a:t>
-                      </a:r>
-                    </a:p>
-                  </a:txBody>
-                  <a:tcPr marL="19050" marR="19050" marT="19050" marB="19050" horzOverflow="overflow">
-                    <a:lnL w="3175">
-                      <a:solidFill>
-                        <a:schemeClr val="accent2">
-                          <a:hueOff val="-85258"/>
-                          <a:satOff val="14347"/>
-                          <a:lumOff val="22373"/>
-                        </a:schemeClr>
-                      </a:solidFill>
-                      <a:miter lim="400000"/>
-                    </a:lnL>
-                    <a:lnR w="3175">
-                      <a:solidFill>
-                        <a:srgbClr val="000000"/>
-                      </a:solidFill>
-                      <a:miter lim="400000"/>
-                    </a:lnR>
-                    <a:lnT w="12700">
-                      <a:miter lim="400000"/>
-                    </a:lnT>
-                    <a:lnB w="12700">
-                      <a:miter lim="400000"/>
-                    </a:lnB>
-                    <a:solidFill>
-                      <a:schemeClr val="bg1"/>
-                    </a:solidFill>
-                  </a:tcPr>
-                </a:tc>
-                <a:extLst>
-                  <a:ext uri="{0D108BD9-81ED-4DB2-BD59-A6C34878D82A}">
-                    <a16:rowId xmlns:a16="http://schemas.microsoft.com/office/drawing/2014/main" val="10006"/>
-                  </a:ext>
-                </a:extLst>
-              </a:tr>
-              <a:tr h="223750">
-                <a:tc vMerge="1">
-                  <a:txBody>
-                    <a:bodyPr/>
-                    <a:lstStyle/>
-                    <a:p>
-                      <a:endParaRPr lang="ko-KR"/>
-                    </a:p>
-                  </a:txBody>
-                  <a:tcPr/>
-                </a:tc>
-                <a:tc gridSpan="2">
-                  <a:txBody>
-                    <a:bodyPr/>
-                    <a:lstStyle/>
-                    <a:p>
-                      <a:pPr algn="l" defTabSz="95250">
-                        <a:tabLst>
-                          <a:tab pos="342900" algn="l"/>
-                        </a:tabLst>
-                      </a:pPr>
-                      <a:r>
-                        <a:rPr sz="800" b="1" i="1" baseline="0" dirty="0">
-                          <a:solidFill>
-                            <a:schemeClr val="tx1">
-                              <a:lumMod val="50000"/>
-                            </a:schemeClr>
-                          </a:solidFill>
-                        </a:rPr>
-                        <a:t>Lateral view.</a:t>
-                      </a:r>
-                    </a:p>
-                  </a:txBody>
-                  <a:tcPr marL="19050" marR="19050" marT="19050" marB="19050" horzOverflow="overflow">
-                    <a:lnL w="3175">
-                      <a:solidFill>
-                        <a:srgbClr val="000000"/>
-                      </a:solidFill>
-                      <a:miter lim="400000"/>
-                    </a:lnL>
-                    <a:lnR w="3175">
-                      <a:solidFill>
-                        <a:srgbClr val="000000"/>
-                      </a:solidFill>
-                      <a:miter lim="400000"/>
-                    </a:lnR>
-                    <a:lnT w="3175">
-                      <a:solidFill>
-                        <a:schemeClr val="accent2">
-                          <a:hueOff val="-85258"/>
-                          <a:satOff val="14347"/>
-                          <a:lumOff val="22373"/>
-                        </a:schemeClr>
-                      </a:solidFill>
-                      <a:miter lim="400000"/>
-                    </a:lnT>
-                    <a:lnB w="12700">
-                      <a:miter lim="400000"/>
-                    </a:lnB>
-                    <a:solidFill>
-                      <a:schemeClr val="bg1"/>
-                    </a:solidFill>
-                  </a:tcPr>
-                </a:tc>
-                <a:tc hMerge="1">
-                  <a:txBody>
-                    <a:bodyPr/>
-                    <a:lstStyle/>
-                    <a:p>
-                      <a:endParaRPr lang="ko-KR"/>
-                    </a:p>
-                  </a:txBody>
-                  <a:tcPr/>
-                </a:tc>
-                <a:extLst>
-                  <a:ext uri="{0D108BD9-81ED-4DB2-BD59-A6C34878D82A}">
-                    <a16:rowId xmlns:a16="http://schemas.microsoft.com/office/drawing/2014/main" val="10007"/>
-                  </a:ext>
-                </a:extLst>
-              </a:tr>
-              <a:tr h="249605">
-                <a:tc vMerge="1">
-                  <a:txBody>
-                    <a:bodyPr/>
-                    <a:lstStyle/>
-                    <a:p>
-                      <a:endParaRPr lang="ko-KR"/>
-                    </a:p>
-                  </a:txBody>
-                  <a:tcPr/>
-                </a:tc>
-                <a:tc>
-                  <a:txBody>
-                    <a:bodyPr/>
-                    <a:lstStyle/>
-                    <a:p>
-                      <a:pPr algn="l" defTabSz="95250">
-                        <a:tabLst>
-                          <a:tab pos="342900" algn="l"/>
-                        </a:tabLst>
-                        <a:defRPr sz="2100"/>
-                      </a:pPr>
-                      <a:r>
-                        <a:rPr sz="800" baseline="0" dirty="0">
-                          <a:solidFill>
-                            <a:schemeClr val="tx1">
-                              <a:lumMod val="50000"/>
-                            </a:schemeClr>
-                          </a:solidFill>
-                        </a:rPr>
-                        <a:t>1.Open &amp; Bite 2.Upper body flexion(Holding ankle &amp; Knee</a:t>
-                      </a:r>
-                      <a:r>
-                        <a:rPr sz="800" baseline="0" dirty="0">
-                          <a:solidFill>
-                            <a:schemeClr val="accent1">
-                              <a:lumMod val="75000"/>
-                            </a:schemeClr>
-                          </a:solidFill>
-                        </a:rPr>
-                        <a:t>) 3.Crossing eye &amp; biting video</a:t>
-                      </a:r>
-                    </a:p>
-                  </a:txBody>
-                  <a:tcPr marL="19050" marR="19050" marT="19050" marB="19050" horzOverflow="overflow">
-                    <a:lnL w="3175">
-                      <a:solidFill>
-                        <a:srgbClr val="000000"/>
-                      </a:solidFill>
-                      <a:miter lim="400000"/>
-                    </a:lnL>
-                    <a:lnR w="3175">
-                      <a:solidFill>
-                        <a:srgbClr val="000000"/>
-                      </a:solidFill>
-                      <a:miter lim="400000"/>
-                    </a:lnR>
-                    <a:lnT w="12700">
-                      <a:miter lim="400000"/>
-                    </a:lnT>
-                    <a:lnB w="12700">
-                      <a:miter lim="400000"/>
-                    </a:lnB>
-                    <a:solidFill>
-                      <a:schemeClr val="bg1"/>
-                    </a:solidFill>
-                  </a:tcPr>
-                </a:tc>
-                <a:tc>
-                  <a:txBody>
-                    <a:bodyPr/>
-                    <a:lstStyle/>
-                    <a:p>
-                      <a:pPr algn="l" defTabSz="95250">
-                        <a:tabLst>
-                          <a:tab pos="342900" algn="l"/>
-                        </a:tabLst>
-                      </a:pPr>
-                      <a:r>
-                        <a:rPr sz="800" baseline="0">
-                          <a:solidFill>
-                            <a:schemeClr val="tx1">
-                              <a:lumMod val="50000"/>
-                            </a:schemeClr>
-                          </a:solidFill>
-                        </a:rPr>
-                        <a:t>1.Open</a:t>
-                      </a:r>
-                    </a:p>
-                  </a:txBody>
-                  <a:tcPr marL="19050" marR="19050" marT="19050" marB="19050" horzOverflow="overflow">
-                    <a:lnL w="3175">
-                      <a:solidFill>
-                        <a:srgbClr val="000000"/>
-                      </a:solidFill>
-                      <a:miter lim="400000"/>
-                    </a:lnL>
-                    <a:lnR w="3175">
-                      <a:solidFill>
-                        <a:srgbClr val="000000"/>
-                      </a:solidFill>
-                      <a:miter lim="400000"/>
-                    </a:lnR>
-                    <a:lnT w="12700">
-                      <a:miter lim="400000"/>
-                    </a:lnT>
-                    <a:lnB w="12700">
-                      <a:miter lim="400000"/>
-                    </a:lnB>
-                    <a:solidFill>
-                      <a:schemeClr val="bg1"/>
-                    </a:solidFill>
-                  </a:tcPr>
-                </a:tc>
-                <a:extLst>
-                  <a:ext uri="{0D108BD9-81ED-4DB2-BD59-A6C34878D82A}">
-                    <a16:rowId xmlns:a16="http://schemas.microsoft.com/office/drawing/2014/main" val="10008"/>
-                  </a:ext>
-                </a:extLst>
-              </a:tr>
-              <a:tr h="215279">
-                <a:tc rowSpan="4">
-                  <a:txBody>
-                    <a:bodyPr/>
-                    <a:lstStyle/>
-                    <a:p>
-                      <a:pPr algn="l" defTabSz="95250">
-                        <a:tabLst>
-                          <a:tab pos="342900" algn="l"/>
-                        </a:tabLst>
-                      </a:pPr>
-                      <a:r>
-                        <a:rPr sz="800" b="1" baseline="0">
-                          <a:solidFill>
-                            <a:schemeClr val="tx1">
-                              <a:lumMod val="50000"/>
-                            </a:schemeClr>
-                          </a:solidFill>
-                          <a:latin typeface="Gill Sans"/>
-                          <a:ea typeface="Gill Sans"/>
-                          <a:cs typeface="Gill Sans"/>
-                          <a:sym typeface="Gill Sans"/>
-                        </a:rPr>
-                        <a:t>     Foam mat  
-       view</a:t>
-                      </a:r>
-                    </a:p>
-                  </a:txBody>
-                  <a:tcPr marL="19050" marR="19050" marT="19050" marB="19050" horzOverflow="overflow">
-                    <a:lnL w="3175">
-                      <a:solidFill>
-                        <a:srgbClr val="000000"/>
-                      </a:solidFill>
-                      <a:miter lim="400000"/>
-                    </a:lnL>
-                    <a:lnR w="3175">
-                      <a:solidFill>
-                        <a:srgbClr val="000000"/>
-                      </a:solidFill>
-                      <a:miter lim="400000"/>
-                    </a:lnR>
-                    <a:lnT w="12700">
-                      <a:miter lim="400000"/>
-                    </a:lnT>
-                    <a:lnB w="12700">
-                      <a:miter lim="400000"/>
-                    </a:lnB>
-                    <a:solidFill>
-                      <a:schemeClr val="bg1"/>
-                    </a:solidFill>
-                  </a:tcPr>
-                </a:tc>
-                <a:tc gridSpan="2">
-                  <a:txBody>
-                    <a:bodyPr/>
-                    <a:lstStyle/>
-                    <a:p>
-                      <a:pPr algn="l" defTabSz="95250">
-                        <a:tabLst>
-                          <a:tab pos="342900" algn="l"/>
-                        </a:tabLst>
-                      </a:pPr>
-                      <a:r>
-                        <a:rPr sz="800" b="1" i="1" baseline="0" dirty="0">
-                          <a:solidFill>
-                            <a:schemeClr val="tx1">
-                              <a:lumMod val="50000"/>
-                            </a:schemeClr>
-                          </a:solidFill>
-                        </a:rPr>
-                        <a:t>Posterior view.</a:t>
-                      </a:r>
-                    </a:p>
-                  </a:txBody>
-                  <a:tcPr marL="19050" marR="19050" marT="19050" marB="19050" horzOverflow="overflow">
-                    <a:lnL w="3175">
-                      <a:solidFill>
-                        <a:srgbClr val="000000"/>
-                      </a:solidFill>
-                      <a:miter lim="400000"/>
-                    </a:lnL>
-                    <a:lnR w="3175">
-                      <a:solidFill>
-                        <a:srgbClr val="000000"/>
-                      </a:solidFill>
-                      <a:miter lim="400000"/>
-                    </a:lnR>
-                    <a:lnT w="12700">
-                      <a:miter lim="400000"/>
-                    </a:lnT>
-                    <a:lnB w="12700">
-                      <a:miter lim="400000"/>
-                    </a:lnB>
-                    <a:solidFill>
-                      <a:schemeClr val="bg1"/>
-                    </a:solidFill>
-                  </a:tcPr>
-                </a:tc>
-                <a:tc hMerge="1">
-                  <a:txBody>
-                    <a:bodyPr/>
-                    <a:lstStyle/>
-                    <a:p>
-                      <a:endParaRPr lang="ko-KR"/>
-                    </a:p>
-                  </a:txBody>
-                  <a:tcPr/>
-                </a:tc>
-                <a:extLst>
-                  <a:ext uri="{0D108BD9-81ED-4DB2-BD59-A6C34878D82A}">
-                    <a16:rowId xmlns:a16="http://schemas.microsoft.com/office/drawing/2014/main" val="10009"/>
-                  </a:ext>
-                </a:extLst>
-              </a:tr>
-              <a:tr h="278130">
-                <a:tc vMerge="1">
-                  <a:txBody>
-                    <a:bodyPr/>
-                    <a:lstStyle/>
-                    <a:p>
-                      <a:endParaRPr lang="ko-KR"/>
-                    </a:p>
-                  </a:txBody>
-                  <a:tcPr/>
-                </a:tc>
-                <a:tc>
-                  <a:txBody>
-                    <a:bodyPr/>
-                    <a:lstStyle/>
-                    <a:p>
-                      <a:pPr algn="l" defTabSz="95250">
-                        <a:tabLst>
-                          <a:tab pos="342900" algn="l"/>
-                        </a:tabLst>
-                      </a:pPr>
-                      <a:r>
-                        <a:rPr sz="800" baseline="0" dirty="0">
-                          <a:solidFill>
-                            <a:schemeClr val="tx1">
-                              <a:lumMod val="50000"/>
-                            </a:schemeClr>
-                          </a:solidFill>
-                        </a:rPr>
-                        <a:t>1.Open &amp; Bite 2.Upper body flexion(Holding ankle &amp; Knee)</a:t>
-                      </a:r>
-                    </a:p>
-                  </a:txBody>
-                  <a:tcPr marL="19050" marR="19050" marT="19050" marB="19050" horzOverflow="overflow">
-                    <a:lnL w="3175">
-                      <a:solidFill>
-                        <a:srgbClr val="000000"/>
-                      </a:solidFill>
-                      <a:miter lim="400000"/>
-                    </a:lnL>
-                    <a:lnR w="3175">
-                      <a:solidFill>
-                        <a:srgbClr val="000000"/>
-                      </a:solidFill>
-                      <a:miter lim="400000"/>
-                    </a:lnR>
-                    <a:lnT w="12700">
-                      <a:miter lim="400000"/>
-                    </a:lnT>
-                    <a:lnB w="12700">
-                      <a:miter lim="400000"/>
-                    </a:lnB>
-                    <a:solidFill>
-                      <a:schemeClr val="bg1"/>
-                    </a:solidFill>
-                  </a:tcPr>
-                </a:tc>
-                <a:tc>
-                  <a:txBody>
-                    <a:bodyPr/>
-                    <a:lstStyle/>
-                    <a:p>
-                      <a:pPr algn="l" defTabSz="95250">
-                        <a:tabLst>
-                          <a:tab pos="342900" algn="l"/>
-                        </a:tabLst>
-                      </a:pPr>
-                      <a:r>
-                        <a:rPr sz="800" baseline="0">
-                          <a:solidFill>
-                            <a:schemeClr val="tx1">
-                              <a:lumMod val="50000"/>
-                            </a:schemeClr>
-                          </a:solidFill>
-                        </a:rPr>
-                        <a:t>1.Open 
-2.Body side  bend bending</a:t>
-                      </a:r>
-                    </a:p>
-                  </a:txBody>
-                  <a:tcPr marL="19050" marR="19050" marT="19050" marB="19050" horzOverflow="overflow">
-                    <a:lnL w="3175">
-                      <a:solidFill>
-                        <a:srgbClr val="000000"/>
-                      </a:solidFill>
-                      <a:miter lim="400000"/>
-                    </a:lnL>
-                    <a:lnR w="3175">
-                      <a:solidFill>
-                        <a:srgbClr val="000000"/>
-                      </a:solidFill>
-                      <a:miter lim="400000"/>
-                    </a:lnR>
-                    <a:lnT w="12700">
-                      <a:miter lim="400000"/>
-                    </a:lnT>
-                    <a:lnB w="12700">
-                      <a:miter lim="400000"/>
-                    </a:lnB>
-                    <a:solidFill>
-                      <a:schemeClr val="bg1"/>
-                    </a:solidFill>
-                  </a:tcPr>
-                </a:tc>
-                <a:extLst>
-                  <a:ext uri="{0D108BD9-81ED-4DB2-BD59-A6C34878D82A}">
-                    <a16:rowId xmlns:a16="http://schemas.microsoft.com/office/drawing/2014/main" val="10010"/>
-                  </a:ext>
-                </a:extLst>
-              </a:tr>
-              <a:tr h="194039">
-                <a:tc vMerge="1">
-                  <a:txBody>
-                    <a:bodyPr/>
-                    <a:lstStyle/>
-                    <a:p>
-                      <a:endParaRPr lang="ko-KR"/>
-                    </a:p>
-                  </a:txBody>
-                  <a:tcPr/>
-                </a:tc>
-                <a:tc gridSpan="2">
-                  <a:txBody>
-                    <a:bodyPr/>
-                    <a:lstStyle/>
-                    <a:p>
-                      <a:pPr algn="l" defTabSz="95250">
-                        <a:tabLst>
-                          <a:tab pos="342900" algn="l"/>
-                        </a:tabLst>
-                      </a:pPr>
-                      <a:r>
-                        <a:rPr sz="800" b="1" i="1" baseline="0" dirty="0">
-                          <a:solidFill>
-                            <a:schemeClr val="tx1">
-                              <a:lumMod val="50000"/>
-                            </a:schemeClr>
-                          </a:solidFill>
-                        </a:rPr>
-                        <a:t>Anterior view.</a:t>
-                      </a:r>
-                    </a:p>
-                  </a:txBody>
-                  <a:tcPr marL="19050" marR="19050" marT="19050" marB="19050" horzOverflow="overflow">
-                    <a:lnL w="3175">
-                      <a:solidFill>
-                        <a:srgbClr val="000000"/>
-                      </a:solidFill>
-                      <a:miter lim="400000"/>
-                    </a:lnL>
-                    <a:lnR w="3175">
-                      <a:solidFill>
-                        <a:srgbClr val="000000"/>
-                      </a:solidFill>
-                      <a:miter lim="400000"/>
-                    </a:lnR>
-                    <a:lnT w="12700">
-                      <a:miter lim="400000"/>
-                    </a:lnT>
-                    <a:lnB w="12700">
-                      <a:miter lim="400000"/>
-                    </a:lnB>
-                    <a:solidFill>
-                      <a:schemeClr val="bg1"/>
-                    </a:solidFill>
-                  </a:tcPr>
-                </a:tc>
-                <a:tc hMerge="1">
-                  <a:txBody>
-                    <a:bodyPr/>
-                    <a:lstStyle/>
-                    <a:p>
-                      <a:endParaRPr lang="ko-KR"/>
-                    </a:p>
-                  </a:txBody>
-                  <a:tcPr/>
-                </a:tc>
-                <a:extLst>
-                  <a:ext uri="{0D108BD9-81ED-4DB2-BD59-A6C34878D82A}">
-                    <a16:rowId xmlns:a16="http://schemas.microsoft.com/office/drawing/2014/main" val="10011"/>
-                  </a:ext>
-                </a:extLst>
-              </a:tr>
-              <a:tr h="214545">
-                <a:tc vMerge="1">
-                  <a:txBody>
-                    <a:bodyPr/>
-                    <a:lstStyle/>
-                    <a:p>
-                      <a:endParaRPr lang="ko-KR"/>
-                    </a:p>
-                  </a:txBody>
-                  <a:tcPr/>
-                </a:tc>
-                <a:tc>
-                  <a:txBody>
-                    <a:bodyPr/>
-                    <a:lstStyle/>
-                    <a:p>
-                      <a:pPr algn="l" defTabSz="95250">
-                        <a:tabLst>
-                          <a:tab pos="342900" algn="l"/>
-                        </a:tabLst>
-                      </a:pPr>
-                      <a:r>
-                        <a:rPr sz="800" baseline="0" dirty="0">
-                          <a:solidFill>
-                            <a:schemeClr val="tx1">
-                              <a:lumMod val="50000"/>
-                            </a:schemeClr>
-                          </a:solidFill>
-                        </a:rPr>
-                        <a:t>1.Open &amp; Bite</a:t>
-                      </a:r>
-                    </a:p>
-                  </a:txBody>
-                  <a:tcPr marL="19050" marR="19050" marT="19050" marB="19050" horzOverflow="overflow">
-                    <a:lnL w="3175">
-                      <a:solidFill>
-                        <a:srgbClr val="000000"/>
-                      </a:solidFill>
-                      <a:miter lim="400000"/>
-                    </a:lnL>
-                    <a:lnR w="3175">
-                      <a:solidFill>
-                        <a:srgbClr val="000000"/>
-                      </a:solidFill>
-                      <a:miter lim="400000"/>
-                    </a:lnR>
-                    <a:lnT w="12700">
-                      <a:miter lim="400000"/>
-                    </a:lnT>
-                    <a:lnB w="12700">
-                      <a:miter lim="400000"/>
-                    </a:lnB>
-                    <a:solidFill>
-                      <a:schemeClr val="bg1"/>
-                    </a:solidFill>
-                  </a:tcPr>
-                </a:tc>
-                <a:tc>
-                  <a:txBody>
-                    <a:bodyPr/>
-                    <a:lstStyle/>
-                    <a:p>
-                      <a:pPr algn="l" defTabSz="95250">
-                        <a:tabLst>
-                          <a:tab pos="342900" algn="l"/>
-                        </a:tabLst>
-                      </a:pPr>
-                      <a:r>
-                        <a:rPr sz="800" baseline="0">
-                          <a:solidFill>
-                            <a:schemeClr val="tx1">
-                              <a:lumMod val="50000"/>
-                            </a:schemeClr>
-                          </a:solidFill>
-                        </a:rPr>
-                        <a:t>1.Open</a:t>
-                      </a:r>
-                    </a:p>
-                  </a:txBody>
-                  <a:tcPr marL="19050" marR="19050" marT="19050" marB="19050" horzOverflow="overflow">
-                    <a:lnL w="3175">
-                      <a:solidFill>
-                        <a:srgbClr val="000000"/>
-                      </a:solidFill>
-                      <a:miter lim="400000"/>
-                    </a:lnL>
-                    <a:lnR w="3175">
-                      <a:solidFill>
-                        <a:srgbClr val="000000"/>
-                      </a:solidFill>
-                      <a:miter lim="400000"/>
-                    </a:lnR>
-                    <a:lnT w="12700">
-                      <a:miter lim="400000"/>
-                    </a:lnT>
-                    <a:lnB w="12700">
-                      <a:miter lim="400000"/>
-                    </a:lnB>
-                    <a:solidFill>
-                      <a:schemeClr val="bg1"/>
-                    </a:solidFill>
-                  </a:tcPr>
-                </a:tc>
-                <a:extLst>
-                  <a:ext uri="{0D108BD9-81ED-4DB2-BD59-A6C34878D82A}">
-                    <a16:rowId xmlns:a16="http://schemas.microsoft.com/office/drawing/2014/main" val="10012"/>
-                  </a:ext>
-                </a:extLst>
-              </a:tr>
-              <a:tr h="196596">
-                <a:tc rowSpan="6">
-                  <a:txBody>
-                    <a:bodyPr/>
-                    <a:lstStyle/>
-                    <a:p>
-                      <a:pPr algn="l" defTabSz="95250">
-                        <a:tabLst>
-                          <a:tab pos="342900" algn="l"/>
-                        </a:tabLst>
-                      </a:pPr>
-                      <a:r>
-                        <a:rPr sz="800" b="1" baseline="0">
-                          <a:solidFill>
-                            <a:schemeClr val="tx1">
-                              <a:lumMod val="50000"/>
-                            </a:schemeClr>
-                          </a:solidFill>
-                          <a:latin typeface="Gill Sans"/>
-                          <a:ea typeface="Gill Sans"/>
-                          <a:cs typeface="Gill Sans"/>
-                          <a:sym typeface="Gill Sans"/>
-                        </a:rPr>
-                        <a:t>    Seating</a:t>
-                      </a:r>
-                    </a:p>
-                  </a:txBody>
-                  <a:tcPr marL="19050" marR="19050" marT="19050" marB="19050" horzOverflow="overflow">
-                    <a:lnL w="3175">
-                      <a:solidFill>
-                        <a:srgbClr val="000000"/>
-                      </a:solidFill>
-                      <a:miter lim="400000"/>
-                    </a:lnL>
-                    <a:lnR w="3175">
-                      <a:solidFill>
-                        <a:srgbClr val="000000"/>
-                      </a:solidFill>
-                      <a:miter lim="400000"/>
-                    </a:lnR>
-                    <a:lnT w="12700">
-                      <a:miter lim="400000"/>
-                    </a:lnT>
-                    <a:lnB w="12700">
-                      <a:miter lim="400000"/>
-                    </a:lnB>
-                    <a:solidFill>
-                      <a:schemeClr val="bg1"/>
-                    </a:solidFill>
-                  </a:tcPr>
-                </a:tc>
-                <a:tc gridSpan="2">
-                  <a:txBody>
-                    <a:bodyPr/>
-                    <a:lstStyle/>
-                    <a:p>
-                      <a:pPr algn="l" defTabSz="95250">
-                        <a:tabLst>
-                          <a:tab pos="342900" algn="l"/>
-                        </a:tabLst>
-                      </a:pPr>
-                      <a:r>
-                        <a:rPr sz="800" b="1" i="1" baseline="0" dirty="0">
-                          <a:solidFill>
-                            <a:schemeClr val="tx1">
-                              <a:lumMod val="50000"/>
-                            </a:schemeClr>
-                          </a:solidFill>
-                        </a:rPr>
-                        <a:t>Posterior view.</a:t>
-                      </a:r>
-                    </a:p>
-                  </a:txBody>
-                  <a:tcPr marL="19050" marR="19050" marT="19050" marB="19050" horzOverflow="overflow">
-                    <a:lnL w="3175">
-                      <a:solidFill>
-                        <a:srgbClr val="000000"/>
-                      </a:solidFill>
-                      <a:miter lim="400000"/>
-                    </a:lnL>
-                    <a:lnR w="3175">
-                      <a:solidFill>
-                        <a:srgbClr val="000000"/>
-                      </a:solidFill>
-                      <a:miter lim="400000"/>
-                    </a:lnR>
-                    <a:lnT w="12700">
-                      <a:miter lim="400000"/>
-                    </a:lnT>
-                    <a:lnB w="12700">
-                      <a:miter lim="400000"/>
-                    </a:lnB>
-                    <a:solidFill>
-                      <a:schemeClr val="bg1"/>
-                    </a:solidFill>
-                  </a:tcPr>
-                </a:tc>
-                <a:tc hMerge="1">
-                  <a:txBody>
-                    <a:bodyPr/>
-                    <a:lstStyle/>
-                    <a:p>
-                      <a:endParaRPr lang="ko-KR"/>
-                    </a:p>
-                  </a:txBody>
-                  <a:tcPr/>
-                </a:tc>
-                <a:extLst>
-                  <a:ext uri="{0D108BD9-81ED-4DB2-BD59-A6C34878D82A}">
-                    <a16:rowId xmlns:a16="http://schemas.microsoft.com/office/drawing/2014/main" val="10013"/>
-                  </a:ext>
-                </a:extLst>
-              </a:tr>
-              <a:tr h="198128">
-                <a:tc vMerge="1">
-                  <a:txBody>
-                    <a:bodyPr/>
-                    <a:lstStyle/>
-                    <a:p>
-                      <a:endParaRPr lang="ko-KR"/>
-                    </a:p>
-                  </a:txBody>
-                  <a:tcPr/>
-                </a:tc>
-                <a:tc>
-                  <a:txBody>
-                    <a:bodyPr/>
-                    <a:lstStyle/>
-                    <a:p>
-                      <a:pPr algn="l" defTabSz="95250">
-                        <a:tabLst>
-                          <a:tab pos="342900" algn="l"/>
-                        </a:tabLst>
-                      </a:pPr>
-                      <a:r>
-                        <a:rPr sz="800" baseline="0">
-                          <a:solidFill>
-                            <a:schemeClr val="tx1">
-                              <a:lumMod val="50000"/>
-                            </a:schemeClr>
-                          </a:solidFill>
-                        </a:rPr>
-                        <a:t>1.Open &amp; Bite 2.Upper body flexion(Holding ankle)</a:t>
-                      </a:r>
-                    </a:p>
-                  </a:txBody>
-                  <a:tcPr marL="19050" marR="19050" marT="19050" marB="19050" horzOverflow="overflow">
-                    <a:lnL w="3175">
-                      <a:solidFill>
-                        <a:srgbClr val="000000"/>
-                      </a:solidFill>
-                      <a:miter lim="400000"/>
-                    </a:lnL>
-                    <a:lnR w="3175">
-                      <a:solidFill>
-                        <a:srgbClr val="000000"/>
-                      </a:solidFill>
-                      <a:miter lim="400000"/>
-                    </a:lnR>
-                    <a:lnT w="12700">
-                      <a:miter lim="400000"/>
-                    </a:lnT>
-                    <a:lnB w="12700">
-                      <a:miter lim="400000"/>
-                    </a:lnB>
-                    <a:solidFill>
-                      <a:schemeClr val="bg1"/>
-                    </a:solidFill>
-                  </a:tcPr>
-                </a:tc>
-                <a:tc>
-                  <a:txBody>
-                    <a:bodyPr/>
-                    <a:lstStyle/>
-                    <a:p>
-                      <a:pPr algn="l" defTabSz="95250">
-                        <a:tabLst>
-                          <a:tab pos="342900" algn="l"/>
-                        </a:tabLst>
-                      </a:pPr>
-                      <a:r>
-                        <a:rPr sz="800" baseline="0" dirty="0">
-                          <a:solidFill>
-                            <a:schemeClr val="tx1">
-                              <a:lumMod val="50000"/>
-                            </a:schemeClr>
-                          </a:solidFill>
-                        </a:rPr>
-                        <a:t>1.Open</a:t>
-                      </a:r>
-                    </a:p>
-                  </a:txBody>
-                  <a:tcPr marL="19050" marR="19050" marT="19050" marB="19050" horzOverflow="overflow">
-                    <a:lnL w="3175">
-                      <a:solidFill>
-                        <a:srgbClr val="000000"/>
-                      </a:solidFill>
-                      <a:miter lim="400000"/>
-                    </a:lnL>
-                    <a:lnR w="3175">
-                      <a:solidFill>
-                        <a:srgbClr val="000000"/>
-                      </a:solidFill>
-                      <a:miter lim="400000"/>
-                    </a:lnR>
-                    <a:lnT w="12700">
-                      <a:miter lim="400000"/>
-                    </a:lnT>
-                    <a:lnB w="12700">
-                      <a:miter lim="400000"/>
-                    </a:lnB>
-                    <a:solidFill>
-                      <a:schemeClr val="bg1"/>
-                    </a:solidFill>
-                  </a:tcPr>
-                </a:tc>
-                <a:extLst>
-                  <a:ext uri="{0D108BD9-81ED-4DB2-BD59-A6C34878D82A}">
-                    <a16:rowId xmlns:a16="http://schemas.microsoft.com/office/drawing/2014/main" val="10014"/>
-                  </a:ext>
-                </a:extLst>
-              </a:tr>
-              <a:tr h="209810">
-                <a:tc vMerge="1">
-                  <a:txBody>
-                    <a:bodyPr/>
-                    <a:lstStyle/>
-                    <a:p>
-                      <a:endParaRPr lang="ko-KR"/>
-                    </a:p>
-                  </a:txBody>
-                  <a:tcPr/>
-                </a:tc>
-                <a:tc gridSpan="2">
-                  <a:txBody>
-                    <a:bodyPr/>
-                    <a:lstStyle/>
-                    <a:p>
-                      <a:pPr algn="l" defTabSz="95250">
-                        <a:tabLst>
-                          <a:tab pos="342900" algn="l"/>
-                        </a:tabLst>
-                      </a:pPr>
-                      <a:r>
-                        <a:rPr sz="800" b="1" i="1" baseline="0" dirty="0">
-                          <a:solidFill>
-                            <a:schemeClr val="tx1">
-                              <a:lumMod val="50000"/>
-                            </a:schemeClr>
-                          </a:solidFill>
-                        </a:rPr>
-                        <a:t>Anterior view.</a:t>
-                      </a:r>
-                    </a:p>
-                  </a:txBody>
-                  <a:tcPr marL="19050" marR="19050" marT="19050" marB="19050" horzOverflow="overflow">
-                    <a:lnL w="3175">
-                      <a:solidFill>
-                        <a:srgbClr val="000000"/>
-                      </a:solidFill>
-                      <a:miter lim="400000"/>
-                    </a:lnL>
-                    <a:lnR w="3175">
-                      <a:solidFill>
-                        <a:srgbClr val="000000"/>
-                      </a:solidFill>
-                      <a:miter lim="400000"/>
-                    </a:lnR>
-                    <a:lnT w="12700">
-                      <a:miter lim="400000"/>
-                    </a:lnT>
-                    <a:lnB w="12700">
-                      <a:miter lim="400000"/>
-                    </a:lnB>
-                    <a:solidFill>
-                      <a:schemeClr val="bg1"/>
-                    </a:solidFill>
-                  </a:tcPr>
-                </a:tc>
-                <a:tc hMerge="1">
-                  <a:txBody>
-                    <a:bodyPr/>
-                    <a:lstStyle/>
-                    <a:p>
-                      <a:endParaRPr lang="ko-KR"/>
-                    </a:p>
-                  </a:txBody>
-                  <a:tcPr/>
-                </a:tc>
-                <a:extLst>
-                  <a:ext uri="{0D108BD9-81ED-4DB2-BD59-A6C34878D82A}">
-                    <a16:rowId xmlns:a16="http://schemas.microsoft.com/office/drawing/2014/main" val="10015"/>
-                  </a:ext>
-                </a:extLst>
-              </a:tr>
-              <a:tr h="194727">
-                <a:tc vMerge="1">
-                  <a:txBody>
-                    <a:bodyPr/>
-                    <a:lstStyle/>
-                    <a:p>
-                      <a:endParaRPr lang="ko-KR"/>
-                    </a:p>
-                  </a:txBody>
-                  <a:tcPr/>
-                </a:tc>
-                <a:tc>
-                  <a:txBody>
-                    <a:bodyPr/>
-                    <a:lstStyle/>
-                    <a:p>
-                      <a:pPr algn="l" defTabSz="95250">
-                        <a:tabLst>
-                          <a:tab pos="342900" algn="l"/>
-                        </a:tabLst>
-                      </a:pPr>
-                      <a:r>
-                        <a:rPr sz="800" baseline="0">
-                          <a:solidFill>
-                            <a:schemeClr val="tx1">
-                              <a:lumMod val="50000"/>
-                            </a:schemeClr>
-                          </a:solidFill>
-                        </a:rPr>
-                        <a:t>1.Open &amp; Bite</a:t>
-                      </a:r>
-                    </a:p>
-                  </a:txBody>
-                  <a:tcPr marL="19050" marR="19050" marT="19050" marB="19050" horzOverflow="overflow">
-                    <a:lnL w="3175">
-                      <a:solidFill>
-                        <a:srgbClr val="000000"/>
-                      </a:solidFill>
-                      <a:miter lim="400000"/>
-                    </a:lnL>
-                    <a:lnR w="3175">
-                      <a:solidFill>
-                        <a:srgbClr val="000000"/>
-                      </a:solidFill>
-                      <a:miter lim="400000"/>
-                    </a:lnR>
-                    <a:lnT w="12700">
-                      <a:miter lim="400000"/>
-                    </a:lnT>
-                    <a:lnB w="12700">
-                      <a:miter lim="400000"/>
-                    </a:lnB>
-                    <a:solidFill>
-                      <a:schemeClr val="bg1"/>
-                    </a:solidFill>
-                  </a:tcPr>
-                </a:tc>
-                <a:tc>
-                  <a:txBody>
-                    <a:bodyPr/>
-                    <a:lstStyle/>
-                    <a:p>
-                      <a:pPr algn="l" defTabSz="95250">
-                        <a:tabLst>
-                          <a:tab pos="342900" algn="l"/>
-                        </a:tabLst>
-                      </a:pPr>
-                      <a:r>
-                        <a:rPr sz="800" baseline="0" dirty="0">
-                          <a:solidFill>
-                            <a:schemeClr val="tx1">
-                              <a:lumMod val="50000"/>
-                            </a:schemeClr>
-                          </a:solidFill>
-                        </a:rPr>
-                        <a:t>1.Open</a:t>
-                      </a:r>
-                    </a:p>
-                  </a:txBody>
-                  <a:tcPr marL="19050" marR="19050" marT="19050" marB="19050" horzOverflow="overflow">
-                    <a:lnL w="3175">
-                      <a:solidFill>
-                        <a:srgbClr val="000000"/>
-                      </a:solidFill>
-                      <a:miter lim="400000"/>
-                    </a:lnL>
-                    <a:lnR w="3175">
-                      <a:solidFill>
-                        <a:srgbClr val="000000"/>
-                      </a:solidFill>
-                      <a:miter lim="400000"/>
-                    </a:lnR>
-                    <a:lnT w="12700">
-                      <a:miter lim="400000"/>
-                    </a:lnT>
-                    <a:lnB w="12700">
-                      <a:miter lim="400000"/>
-                    </a:lnB>
-                    <a:solidFill>
-                      <a:schemeClr val="bg1"/>
-                    </a:solidFill>
-                  </a:tcPr>
-                </a:tc>
-                <a:extLst>
-                  <a:ext uri="{0D108BD9-81ED-4DB2-BD59-A6C34878D82A}">
-                    <a16:rowId xmlns:a16="http://schemas.microsoft.com/office/drawing/2014/main" val="10016"/>
-                  </a:ext>
-                </a:extLst>
-              </a:tr>
-              <a:tr h="212808">
-                <a:tc vMerge="1">
-                  <a:txBody>
-                    <a:bodyPr/>
-                    <a:lstStyle/>
-                    <a:p>
-                      <a:endParaRPr lang="ko-KR"/>
-                    </a:p>
-                  </a:txBody>
-                  <a:tcPr/>
-                </a:tc>
-                <a:tc gridSpan="2">
-                  <a:txBody>
-                    <a:bodyPr/>
-                    <a:lstStyle/>
-                    <a:p>
-                      <a:pPr algn="l" defTabSz="95250">
-                        <a:tabLst>
-                          <a:tab pos="342900" algn="l"/>
-                        </a:tabLst>
-                      </a:pPr>
-                      <a:r>
-                        <a:rPr sz="800" b="1" i="1" baseline="0" dirty="0">
-                          <a:solidFill>
-                            <a:schemeClr val="tx1">
-                              <a:lumMod val="50000"/>
-                            </a:schemeClr>
-                          </a:solidFill>
-                        </a:rPr>
-                        <a:t>Vertical view.</a:t>
-                      </a:r>
-                    </a:p>
-                  </a:txBody>
-                  <a:tcPr marL="19050" marR="19050" marT="19050" marB="19050" horzOverflow="overflow">
-                    <a:lnL w="3175">
-                      <a:solidFill>
-                        <a:srgbClr val="000000"/>
-                      </a:solidFill>
-                      <a:miter lim="400000"/>
-                    </a:lnL>
-                    <a:lnR w="3175">
-                      <a:solidFill>
-                        <a:srgbClr val="000000"/>
-                      </a:solidFill>
-                      <a:miter lim="400000"/>
-                    </a:lnR>
-                    <a:lnT w="12700">
-                      <a:miter lim="400000"/>
-                    </a:lnT>
-                    <a:lnB w="12700">
-                      <a:miter lim="400000"/>
-                    </a:lnB>
-                    <a:solidFill>
-                      <a:schemeClr val="bg1"/>
-                    </a:solidFill>
-                  </a:tcPr>
-                </a:tc>
-                <a:tc hMerge="1">
-                  <a:txBody>
-                    <a:bodyPr/>
-                    <a:lstStyle/>
-                    <a:p>
-                      <a:endParaRPr lang="ko-KR"/>
-                    </a:p>
-                  </a:txBody>
-                  <a:tcPr/>
-                </a:tc>
-                <a:extLst>
-                  <a:ext uri="{0D108BD9-81ED-4DB2-BD59-A6C34878D82A}">
-                    <a16:rowId xmlns:a16="http://schemas.microsoft.com/office/drawing/2014/main" val="10017"/>
-                  </a:ext>
-                </a:extLst>
-              </a:tr>
-              <a:tr h="180364">
-                <a:tc vMerge="1">
-                  <a:txBody>
-                    <a:bodyPr/>
-                    <a:lstStyle/>
-                    <a:p>
-                      <a:endParaRPr lang="ko-KR"/>
-                    </a:p>
-                  </a:txBody>
-                  <a:tcPr/>
-                </a:tc>
-                <a:tc>
-                  <a:txBody>
-                    <a:bodyPr/>
-                    <a:lstStyle/>
-                    <a:p>
-                      <a:pPr algn="l" defTabSz="95250">
-                        <a:tabLst>
-                          <a:tab pos="342900" algn="l"/>
-                        </a:tabLst>
-                      </a:pPr>
-                      <a:r>
-                        <a:rPr sz="800" baseline="0">
-                          <a:solidFill>
-                            <a:schemeClr val="tx1">
-                              <a:lumMod val="50000"/>
-                            </a:schemeClr>
-                          </a:solidFill>
-                        </a:rPr>
-                        <a:t>1.Scapular girdle rotation</a:t>
-                      </a:r>
-                    </a:p>
-                  </a:txBody>
-                  <a:tcPr marL="19050" marR="19050" marT="19050" marB="19050" horzOverflow="overflow">
-                    <a:lnL w="3175">
-                      <a:solidFill>
-                        <a:srgbClr val="000000"/>
-                      </a:solidFill>
-                      <a:miter lim="400000"/>
-                    </a:lnL>
-                    <a:lnR w="3175">
-                      <a:solidFill>
-                        <a:srgbClr val="000000"/>
-                      </a:solidFill>
-                      <a:miter lim="400000"/>
-                    </a:lnR>
-                    <a:lnT w="12700">
-                      <a:miter lim="400000"/>
-                    </a:lnT>
-                    <a:lnB w="12700">
-                      <a:miter lim="400000"/>
-                    </a:lnB>
-                    <a:solidFill>
-                      <a:schemeClr val="bg1"/>
-                    </a:solidFill>
-                  </a:tcPr>
-                </a:tc>
-                <a:tc>
-                  <a:txBody>
-                    <a:bodyPr/>
-                    <a:lstStyle/>
-                    <a:p>
-                      <a:pPr defTabSz="914400">
-                        <a:tabLst>
-                          <a:tab pos="342900" algn="l"/>
-                        </a:tabLst>
-                        <a:defRPr sz="2200">
-                          <a:latin typeface="Avenir Next Regular"/>
-                          <a:ea typeface="Avenir Next Regular"/>
-                          <a:cs typeface="Avenir Next Regular"/>
-                          <a:sym typeface="Avenir Next Regular"/>
-                        </a:defRPr>
-                      </a:pPr>
-                      <a:endParaRPr sz="800" baseline="0">
-                        <a:solidFill>
-                          <a:schemeClr val="tx1">
-                            <a:lumMod val="50000"/>
-                          </a:schemeClr>
-                        </a:solidFill>
-                      </a:endParaRPr>
-                    </a:p>
-                  </a:txBody>
-                  <a:tcPr marL="19050" marR="19050" marT="19050" marB="19050" horzOverflow="overflow">
-                    <a:lnL w="3175">
-                      <a:solidFill>
-                        <a:srgbClr val="000000"/>
-                      </a:solidFill>
-                      <a:miter lim="400000"/>
-                    </a:lnL>
-                    <a:lnR w="3175">
-                      <a:solidFill>
-                        <a:srgbClr val="000000"/>
-                      </a:solidFill>
-                      <a:miter lim="400000"/>
-                    </a:lnR>
-                    <a:lnT w="12700">
-                      <a:miter lim="400000"/>
-                    </a:lnT>
-                    <a:lnB w="12700">
-                      <a:miter lim="400000"/>
-                    </a:lnB>
-                    <a:solidFill>
-                      <a:schemeClr val="bg1"/>
-                    </a:solidFill>
-                  </a:tcPr>
-                </a:tc>
-                <a:extLst>
-                  <a:ext uri="{0D108BD9-81ED-4DB2-BD59-A6C34878D82A}">
-                    <a16:rowId xmlns:a16="http://schemas.microsoft.com/office/drawing/2014/main" val="10018"/>
-                  </a:ext>
-                </a:extLst>
-              </a:tr>
-              <a:tr h="237261">
-                <a:tc rowSpan="4">
-                  <a:txBody>
-                    <a:bodyPr/>
-                    <a:lstStyle/>
-                    <a:p>
-                      <a:pPr algn="l" defTabSz="95250">
-                        <a:tabLst>
-                          <a:tab pos="342900" algn="l"/>
-                        </a:tabLst>
-                      </a:pPr>
-                      <a:r>
-                        <a:rPr sz="800" b="1" baseline="0">
-                          <a:solidFill>
-                            <a:schemeClr val="tx1">
-                              <a:lumMod val="50000"/>
-                            </a:schemeClr>
-                          </a:solidFill>
-                          <a:latin typeface="Gill Sans"/>
-                          <a:ea typeface="Gill Sans"/>
-                          <a:cs typeface="Gill Sans"/>
-                          <a:sym typeface="Gill Sans"/>
-                        </a:rPr>
-                        <a:t>    On bed</a:t>
-                      </a:r>
-                    </a:p>
-                  </a:txBody>
-                  <a:tcPr marL="19050" marR="19050" marT="19050" marB="19050" horzOverflow="overflow">
-                    <a:lnL w="3175">
-                      <a:solidFill>
-                        <a:srgbClr val="000000"/>
-                      </a:solidFill>
-                      <a:miter lim="400000"/>
-                    </a:lnL>
-                    <a:lnR w="3175">
-                      <a:solidFill>
-                        <a:srgbClr val="000000"/>
-                      </a:solidFill>
-                      <a:miter lim="400000"/>
-                    </a:lnR>
-                    <a:lnT w="12700">
-                      <a:miter lim="400000"/>
-                    </a:lnT>
-                    <a:lnB w="3175">
-                      <a:solidFill>
-                        <a:srgbClr val="000000"/>
-                      </a:solidFill>
-                      <a:miter lim="400000"/>
-                    </a:lnB>
-                    <a:solidFill>
-                      <a:schemeClr val="bg1"/>
-                    </a:solidFill>
-                  </a:tcPr>
-                </a:tc>
-                <a:tc gridSpan="2">
-                  <a:txBody>
-                    <a:bodyPr/>
-                    <a:lstStyle/>
-                    <a:p>
-                      <a:pPr algn="l" defTabSz="95250">
-                        <a:tabLst>
-                          <a:tab pos="342900" algn="l"/>
-                        </a:tabLst>
-                      </a:pPr>
-                      <a:r>
-                        <a:rPr sz="800" b="1" i="1" baseline="0" dirty="0">
-                          <a:solidFill>
-                            <a:schemeClr val="tx1">
-                              <a:lumMod val="50000"/>
-                            </a:schemeClr>
-                          </a:solidFill>
-                        </a:rPr>
-                        <a:t>Posterior view.</a:t>
-                      </a:r>
-                    </a:p>
-                  </a:txBody>
-                  <a:tcPr marL="19050" marR="19050" marT="19050" marB="19050" horzOverflow="overflow">
-                    <a:lnL w="3175">
-                      <a:solidFill>
-                        <a:srgbClr val="000000"/>
-                      </a:solidFill>
-                      <a:miter lim="400000"/>
-                    </a:lnL>
-                    <a:lnR w="3175">
-                      <a:solidFill>
-                        <a:srgbClr val="000000"/>
-                      </a:solidFill>
-                      <a:miter lim="400000"/>
-                    </a:lnR>
-                    <a:lnT w="12700">
-                      <a:miter lim="400000"/>
-                    </a:lnT>
-                    <a:lnB w="12700">
-                      <a:miter lim="400000"/>
-                    </a:lnB>
-                    <a:solidFill>
-                      <a:schemeClr val="bg1"/>
-                    </a:solidFill>
-                  </a:tcPr>
-                </a:tc>
-                <a:tc hMerge="1">
-                  <a:txBody>
-                    <a:bodyPr/>
-                    <a:lstStyle/>
-                    <a:p>
-                      <a:endParaRPr lang="ko-KR"/>
-                    </a:p>
-                  </a:txBody>
-                  <a:tcPr/>
-                </a:tc>
-                <a:extLst>
-                  <a:ext uri="{0D108BD9-81ED-4DB2-BD59-A6C34878D82A}">
-                    <a16:rowId xmlns:a16="http://schemas.microsoft.com/office/drawing/2014/main" val="10019"/>
-                  </a:ext>
-                </a:extLst>
-              </a:tr>
-              <a:tr h="216867">
-                <a:tc vMerge="1">
-                  <a:txBody>
-                    <a:bodyPr/>
-                    <a:lstStyle/>
-                    <a:p>
-                      <a:endParaRPr lang="ko-KR"/>
-                    </a:p>
-                  </a:txBody>
-                  <a:tcPr/>
-                </a:tc>
-                <a:tc>
-                  <a:txBody>
-                    <a:bodyPr/>
-                    <a:lstStyle/>
-                    <a:p>
-                      <a:pPr algn="l" defTabSz="95250">
-                        <a:tabLst>
-                          <a:tab pos="342900" algn="l"/>
-                        </a:tabLst>
-                      </a:pPr>
-                      <a:r>
-                        <a:rPr sz="800" baseline="0">
-                          <a:solidFill>
-                            <a:schemeClr val="tx1">
-                              <a:lumMod val="50000"/>
-                            </a:schemeClr>
-                          </a:solidFill>
-                        </a:rPr>
-                        <a:t>1.Full body 2.Leg length 3.Leg ad &amp; abduction</a:t>
-                      </a:r>
-                    </a:p>
-                  </a:txBody>
-                  <a:tcPr marL="19050" marR="19050" marT="19050" marB="19050" horzOverflow="overflow">
-                    <a:lnL w="3175">
-                      <a:solidFill>
-                        <a:srgbClr val="000000"/>
-                      </a:solidFill>
-                      <a:miter lim="400000"/>
-                    </a:lnL>
-                    <a:lnR w="3175">
-                      <a:solidFill>
-                        <a:srgbClr val="000000"/>
-                      </a:solidFill>
-                      <a:miter lim="400000"/>
-                    </a:lnR>
-                    <a:lnT w="12700">
-                      <a:miter lim="400000"/>
-                    </a:lnT>
-                    <a:lnB w="12700">
-                      <a:miter lim="400000"/>
-                    </a:lnB>
-                    <a:solidFill>
-                      <a:schemeClr val="bg1"/>
-                    </a:solidFill>
-                  </a:tcPr>
-                </a:tc>
-                <a:tc>
-                  <a:txBody>
-                    <a:bodyPr/>
-                    <a:lstStyle/>
-                    <a:p>
-                      <a:pPr defTabSz="914400">
-                        <a:tabLst>
-                          <a:tab pos="342900" algn="l"/>
-                        </a:tabLst>
-                        <a:defRPr sz="2200">
-                          <a:latin typeface="Avenir Next Regular"/>
-                          <a:ea typeface="Avenir Next Regular"/>
-                          <a:cs typeface="Avenir Next Regular"/>
-                          <a:sym typeface="Avenir Next Regular"/>
-                        </a:defRPr>
-                      </a:pPr>
-                      <a:endParaRPr sz="800" baseline="0" dirty="0">
-                        <a:solidFill>
-                          <a:schemeClr val="tx1">
-                            <a:lumMod val="50000"/>
-                          </a:schemeClr>
-                        </a:solidFill>
-                      </a:endParaRPr>
-                    </a:p>
-                  </a:txBody>
-                  <a:tcPr marL="19050" marR="19050" marT="19050" marB="19050" horzOverflow="overflow">
-                    <a:lnL w="3175">
-                      <a:solidFill>
-                        <a:srgbClr val="000000"/>
-                      </a:solidFill>
-                      <a:miter lim="400000"/>
-                    </a:lnL>
-                    <a:lnR w="3175">
-                      <a:solidFill>
-                        <a:srgbClr val="000000"/>
-                      </a:solidFill>
-                      <a:miter lim="400000"/>
-                    </a:lnR>
-                    <a:lnT w="12700">
-                      <a:miter lim="400000"/>
-                    </a:lnT>
-                    <a:lnB w="12700">
-                      <a:miter lim="400000"/>
-                    </a:lnB>
-                    <a:solidFill>
-                      <a:schemeClr val="bg1"/>
-                    </a:solidFill>
-                  </a:tcPr>
-                </a:tc>
-                <a:extLst>
-                  <a:ext uri="{0D108BD9-81ED-4DB2-BD59-A6C34878D82A}">
-                    <a16:rowId xmlns:a16="http://schemas.microsoft.com/office/drawing/2014/main" val="10020"/>
-                  </a:ext>
-                </a:extLst>
-              </a:tr>
-              <a:tr h="229616">
-                <a:tc vMerge="1">
-                  <a:txBody>
-                    <a:bodyPr/>
-                    <a:lstStyle/>
-                    <a:p>
-                      <a:endParaRPr lang="ko-KR"/>
-                    </a:p>
-                  </a:txBody>
-                  <a:tcPr/>
-                </a:tc>
-                <a:tc gridSpan="2">
-                  <a:txBody>
-                    <a:bodyPr/>
-                    <a:lstStyle/>
-                    <a:p>
-                      <a:pPr algn="l" defTabSz="95250">
-                        <a:tabLst>
-                          <a:tab pos="342900" algn="l"/>
-                        </a:tabLst>
-                      </a:pPr>
-                      <a:r>
-                        <a:rPr sz="800" b="1" i="1" baseline="0" dirty="0">
-                          <a:solidFill>
-                            <a:schemeClr val="tx1">
-                              <a:lumMod val="50000"/>
-                            </a:schemeClr>
-                          </a:solidFill>
-                        </a:rPr>
-                        <a:t>Anterior view.</a:t>
-                      </a:r>
-                    </a:p>
-                  </a:txBody>
-                  <a:tcPr marL="19050" marR="19050" marT="19050" marB="19050" horzOverflow="overflow">
-                    <a:lnL w="3175">
-                      <a:solidFill>
-                        <a:srgbClr val="000000"/>
-                      </a:solidFill>
-                      <a:miter lim="400000"/>
-                    </a:lnL>
-                    <a:lnR w="3175">
-                      <a:solidFill>
-                        <a:srgbClr val="000000"/>
-                      </a:solidFill>
-                      <a:miter lim="400000"/>
-                    </a:lnR>
-                    <a:lnT w="12700">
-                      <a:miter lim="400000"/>
-                    </a:lnT>
-                    <a:lnB w="12700">
-                      <a:miter lim="400000"/>
-                    </a:lnB>
-                    <a:solidFill>
-                      <a:schemeClr val="bg1"/>
-                    </a:solidFill>
-                  </a:tcPr>
-                </a:tc>
-                <a:tc hMerge="1">
-                  <a:txBody>
-                    <a:bodyPr/>
-                    <a:lstStyle/>
-                    <a:p>
-                      <a:endParaRPr lang="ko-KR"/>
-                    </a:p>
-                  </a:txBody>
-                  <a:tcPr/>
-                </a:tc>
-                <a:extLst>
-                  <a:ext uri="{0D108BD9-81ED-4DB2-BD59-A6C34878D82A}">
-                    <a16:rowId xmlns:a16="http://schemas.microsoft.com/office/drawing/2014/main" val="10021"/>
-                  </a:ext>
-                </a:extLst>
-              </a:tr>
-              <a:tr h="218622">
-                <a:tc vMerge="1">
-                  <a:txBody>
-                    <a:bodyPr/>
-                    <a:lstStyle/>
-                    <a:p>
-                      <a:endParaRPr lang="ko-KR"/>
-                    </a:p>
-                  </a:txBody>
-                  <a:tcPr/>
-                </a:tc>
-                <a:tc>
-                  <a:txBody>
-                    <a:bodyPr/>
-                    <a:lstStyle/>
-                    <a:p>
-                      <a:pPr algn="l" defTabSz="95250">
-                        <a:tabLst>
-                          <a:tab pos="342900" algn="l"/>
-                        </a:tabLst>
-                      </a:pPr>
-                      <a:r>
-                        <a:rPr sz="800" baseline="0">
-                          <a:solidFill>
-                            <a:schemeClr val="tx1">
-                              <a:lumMod val="50000"/>
-                            </a:schemeClr>
-                          </a:solidFill>
-                        </a:rPr>
-                        <a:t>1.Full body 2.Planta extension 3..Pelvic flare</a:t>
-                      </a:r>
-                    </a:p>
-                  </a:txBody>
-                  <a:tcPr marL="19050" marR="19050" marT="19050" marB="19050" horzOverflow="overflow">
-                    <a:lnL w="3175">
-                      <a:solidFill>
-                        <a:srgbClr val="000000"/>
-                      </a:solidFill>
-                      <a:miter lim="400000"/>
-                    </a:lnL>
-                    <a:lnR w="3175">
-                      <a:solidFill>
-                        <a:srgbClr val="000000"/>
-                      </a:solidFill>
-                      <a:miter lim="400000"/>
-                    </a:lnR>
-                    <a:lnT w="12700">
-                      <a:miter lim="400000"/>
-                    </a:lnT>
-                    <a:lnB w="3175">
-                      <a:solidFill>
-                        <a:srgbClr val="000000"/>
-                      </a:solidFill>
-                      <a:miter lim="400000"/>
-                    </a:lnB>
-                    <a:solidFill>
-                      <a:schemeClr val="bg1"/>
-                    </a:solidFill>
-                  </a:tcPr>
-                </a:tc>
-                <a:tc>
-                  <a:txBody>
-                    <a:bodyPr/>
-                    <a:lstStyle/>
-                    <a:p>
-                      <a:pPr defTabSz="914400">
-                        <a:tabLst>
-                          <a:tab pos="342900" algn="l"/>
-                        </a:tabLst>
-                        <a:defRPr sz="2200">
-                          <a:latin typeface="Avenir Next Regular"/>
-                          <a:ea typeface="Avenir Next Regular"/>
-                          <a:cs typeface="Avenir Next Regular"/>
-                          <a:sym typeface="Avenir Next Regular"/>
-                        </a:defRPr>
-                      </a:pPr>
-                      <a:endParaRPr sz="800" baseline="0" dirty="0">
-                        <a:solidFill>
-                          <a:schemeClr val="tx1">
-                            <a:lumMod val="50000"/>
-                          </a:schemeClr>
-                        </a:solidFill>
-                      </a:endParaRPr>
-                    </a:p>
-                  </a:txBody>
-                  <a:tcPr marL="19050" marR="19050" marT="19050" marB="19050" horzOverflow="overflow">
-                    <a:lnL w="3175">
-                      <a:solidFill>
-                        <a:srgbClr val="000000"/>
-                      </a:solidFill>
-                      <a:miter lim="400000"/>
-                    </a:lnL>
-                    <a:lnR w="3175">
-                      <a:solidFill>
-                        <a:srgbClr val="000000"/>
-                      </a:solidFill>
-                      <a:miter lim="400000"/>
-                    </a:lnR>
-                    <a:lnT w="12700">
-                      <a:miter lim="400000"/>
-                    </a:lnT>
-                    <a:lnB w="3175">
-                      <a:solidFill>
-                        <a:srgbClr val="000000"/>
-                      </a:solidFill>
-                      <a:miter lim="400000"/>
-                    </a:lnB>
-                    <a:solidFill>
-                      <a:schemeClr val="bg1"/>
-                    </a:solidFill>
-                  </a:tcPr>
-                </a:tc>
-                <a:extLst>
-                  <a:ext uri="{0D108BD9-81ED-4DB2-BD59-A6C34878D82A}">
-                    <a16:rowId xmlns:a16="http://schemas.microsoft.com/office/drawing/2014/main" val="10022"/>
-                  </a:ext>
-                </a:extLst>
-              </a:tr>
-            </a:tbl>
-          </a:graphicData>
-        </a:graphic>
-      </p:graphicFrame>
     </p:spTree>
+    <p:extLst>
+      <p:ext uri="{BB962C8B-B14F-4D97-AF65-F5344CB8AC3E}">
+        <p14:creationId xmlns:p14="http://schemas.microsoft.com/office/powerpoint/2010/main" val="479323280"/>
+      </p:ext>
+    </p:extLst>
   </p:cSld>
   <p:clrMapOvr>
     <a:masterClrMapping/>
   </p:clrMapOvr>
-  <p:transition spd="med"/>
 </p:sld>
 </file>
 

--- a/output_ppt.pptx
+++ b/output_ppt.pptx
@@ -7029,86 +7029,29 @@
             </a:lvl9pPr>
           </a:lstStyle>
           <a:p>
-            <a:pPr eaLnBrk="1" hangingPunct="1"/>
-            <a:r>
-              <a:rPr lang="en-US" altLang="ko-KR" sz="1600" b="1" dirty="0">
+            <a:pPr algn="ctr">
+              <a:defRPr sz="1500" b="1">
                 <a:solidFill>
-                  <a:schemeClr val="tx2"/>
+                  <a:srgbClr val="445474"/>
                 </a:solidFill>
-                <a:latin typeface="+mj-ea"/>
-                <a:ea typeface="+mj-ea"/>
-                <a:cs typeface="Arial" panose="020B0604020202020204" pitchFamily="34" charset="0"/>
-              </a:rPr>
-              <a:t>  (F)</a:t>
+                <a:latin typeface="맑은 고딕"/>
+              </a:defRPr>
+            </a:pPr>
+            <a:r>
+              <a:t>(M)  옥수수 9y 6m 2013.01.04</a:t>
             </a:r>
           </a:p>
           <a:p>
-            <a:pPr eaLnBrk="1" hangingPunct="1"/>
-            <a:r>
-              <a:rPr lang="en-US" altLang="ko-KR" sz="1600" b="1" dirty="0">
+            <a:pPr algn="ctr">
+              <a:defRPr sz="1500" b="1">
                 <a:solidFill>
-                  <a:schemeClr val="tx2"/>
+                  <a:srgbClr val="445474"/>
                 </a:solidFill>
-                <a:latin typeface="+mj-ea"/>
-                <a:ea typeface="+mj-ea"/>
-                <a:cs typeface="Arial" panose="020B0604020202020204" pitchFamily="34" charset="0"/>
-              </a:rPr>
-              <a:t>S1.B1.D1.C1-nbt(</a:t>
-            </a:r>
-            <a:r>
-              <a:rPr lang="en-US" altLang="ko-KR" sz="1600" b="1" dirty="0" err="1">
-                <a:solidFill>
-                  <a:schemeClr val="tx2"/>
-                </a:solidFill>
-                <a:latin typeface="+mj-ea"/>
-                <a:ea typeface="+mj-ea"/>
-                <a:cs typeface="Arial" panose="020B0604020202020204" pitchFamily="34" charset="0"/>
-              </a:rPr>
-              <a:t>dbt</a:t>
-            </a:r>
-            <a:r>
-              <a:rPr lang="en-US" altLang="ko-KR" sz="1600" b="1" dirty="0">
-                <a:solidFill>
-                  <a:schemeClr val="tx2"/>
-                </a:solidFill>
-                <a:latin typeface="+mj-ea"/>
-                <a:ea typeface="+mj-ea"/>
-                <a:cs typeface="Arial" panose="020B0604020202020204" pitchFamily="34" charset="0"/>
-              </a:rPr>
-              <a:t>)-RM(Rt)-</a:t>
-            </a:r>
-            <a:r>
-              <a:rPr lang="en-US" altLang="ko-KR" sz="1600" b="1" dirty="0" err="1">
-                <a:solidFill>
-                  <a:schemeClr val="tx2"/>
-                </a:solidFill>
-                <a:latin typeface="+mj-ea"/>
-                <a:ea typeface="+mj-ea"/>
-                <a:cs typeface="Arial" panose="020B0604020202020204" pitchFamily="34" charset="0"/>
-              </a:rPr>
-              <a:t>Fx:Ex-Fx</a:t>
-            </a:r>
-            <a:r>
-              <a:rPr lang="en-US" altLang="ko-KR" sz="1600" b="1" dirty="0">
-                <a:solidFill>
-                  <a:schemeClr val="tx2"/>
-                </a:solidFill>
-                <a:latin typeface="+mj-ea"/>
-                <a:ea typeface="+mj-ea"/>
-                <a:cs typeface="Arial" panose="020B0604020202020204" pitchFamily="34" charset="0"/>
-              </a:rPr>
-              <a:t>/0-Type IV   </a:t>
-            </a:r>
-            <a:r>
-              <a:rPr lang="ko-KR" altLang="en-US" sz="1600" b="1" dirty="0">
-                <a:solidFill>
-                  <a:schemeClr val="tx2"/>
-                </a:solidFill>
-                <a:latin typeface="+mj-ea"/>
-                <a:ea typeface="+mj-ea"/>
-                <a:cs typeface="Arial" panose="020B0604020202020204" pitchFamily="34" charset="0"/>
-              </a:rPr>
-              <a:t> </a:t>
+                <a:latin typeface="맑은 고딕"/>
+              </a:defRPr>
+            </a:pPr>
+            <a:r>
+              <a:t> S1.B1.D1.C1-nbt(nbt)-RM(Rt)-Fx:Ex-Fx/1-Type IV</a:t>
             </a:r>
           </a:p>
         </p:txBody>
@@ -12088,23 +12031,14 @@
                     <a:bodyPr/>
                     <a:lstStyle/>
                     <a:p>
-                      <a:pPr algn="ctr" fontAlgn="ctr"/>
+                      <a:pPr algn="ctr">
+                        <a:defRPr sz="700" b="0">
+                          <a:latin typeface="맑은 고딕"/>
+                        </a:defRPr>
+                      </a:pPr>
                       <a:r>
-                        <a:rPr lang="en-US" altLang="ko-KR" sz="600" u="none" strike="noStrike">
-                          <a:effectLst/>
-                          <a:latin typeface="+mn-ea"/>
-                          <a:ea typeface="+mn-ea"/>
-                        </a:rPr>
-                        <a:t>0</a:t>
+                        <a:t>1.93</a:t>
                       </a:r>
-                      <a:endParaRPr lang="en-US" altLang="ko-KR" sz="600" b="0" i="0" u="none" strike="noStrike">
-                        <a:solidFill>
-                          <a:srgbClr val="000000"/>
-                        </a:solidFill>
-                        <a:effectLst/>
-                        <a:latin typeface="+mn-ea"/>
-                        <a:ea typeface="+mn-ea"/>
-                      </a:endParaRPr>
                     </a:p>
                   </a:txBody>
                   <a:tcPr marL="0" marR="0" marT="0" marB="0" anchor="ctr">
@@ -12252,23 +12186,14 @@
                     <a:bodyPr/>
                     <a:lstStyle/>
                     <a:p>
-                      <a:pPr algn="ctr" fontAlgn="ctr"/>
+                      <a:pPr algn="ctr">
+                        <a:defRPr sz="700" b="0">
+                          <a:latin typeface="맑은 고딕"/>
+                        </a:defRPr>
+                      </a:pPr>
                       <a:r>
-                        <a:rPr lang="en-US" altLang="ko-KR" sz="600" u="none" strike="noStrike">
-                          <a:effectLst/>
-                          <a:latin typeface="+mn-ea"/>
-                          <a:ea typeface="+mn-ea"/>
-                        </a:rPr>
-                        <a:t>0</a:t>
+                        <a:t>79.31</a:t>
                       </a:r>
-                      <a:endParaRPr lang="en-US" altLang="ko-KR" sz="600" b="0" i="0" u="none" strike="noStrike">
-                        <a:solidFill>
-                          <a:srgbClr val="000000"/>
-                        </a:solidFill>
-                        <a:effectLst/>
-                        <a:latin typeface="+mn-ea"/>
-                        <a:ea typeface="+mn-ea"/>
-                      </a:endParaRPr>
                     </a:p>
                   </a:txBody>
                   <a:tcPr marL="0" marR="0" marT="0" marB="0" anchor="ctr">
@@ -12416,23 +12341,14 @@
                     <a:bodyPr/>
                     <a:lstStyle/>
                     <a:p>
-                      <a:pPr algn="ctr" fontAlgn="ctr"/>
+                      <a:pPr algn="ctr">
+                        <a:defRPr sz="700" b="0">
+                          <a:latin typeface="맑은 고딕"/>
+                        </a:defRPr>
+                      </a:pPr>
                       <a:r>
-                        <a:rPr lang="en-US" altLang="ko-KR" sz="600" u="none" strike="noStrike" dirty="0">
-                          <a:effectLst/>
-                          <a:latin typeface="+mn-ea"/>
-                          <a:ea typeface="+mn-ea"/>
-                        </a:rPr>
-                        <a:t>0</a:t>
+                        <a:t>77.37</a:t>
                       </a:r>
-                      <a:endParaRPr lang="en-US" altLang="ko-KR" sz="600" b="0" i="0" u="none" strike="noStrike" dirty="0">
-                        <a:solidFill>
-                          <a:srgbClr val="000000"/>
-                        </a:solidFill>
-                        <a:effectLst/>
-                        <a:latin typeface="+mn-ea"/>
-                        <a:ea typeface="+mn-ea"/>
-                      </a:endParaRPr>
                     </a:p>
                   </a:txBody>
                   <a:tcPr marL="0" marR="0" marT="0" marB="0" anchor="ctr">
@@ -12580,23 +12496,14 @@
                     <a:bodyPr/>
                     <a:lstStyle/>
                     <a:p>
-                      <a:pPr algn="ctr" fontAlgn="ctr"/>
+                      <a:pPr algn="ctr">
+                        <a:defRPr sz="700" b="0">
+                          <a:latin typeface="맑은 고딕"/>
+                        </a:defRPr>
+                      </a:pPr>
                       <a:r>
-                        <a:rPr lang="en-US" altLang="ko-KR" sz="600" u="none" strike="noStrike">
-                          <a:effectLst/>
-                          <a:latin typeface="+mn-ea"/>
-                          <a:ea typeface="+mn-ea"/>
-                        </a:rPr>
-                        <a:t>0</a:t>
+                        <a:t>58.04</a:t>
                       </a:r>
-                      <a:endParaRPr lang="en-US" altLang="ko-KR" sz="600" b="0" i="0" u="none" strike="noStrike">
-                        <a:solidFill>
-                          <a:srgbClr val="000000"/>
-                        </a:solidFill>
-                        <a:effectLst/>
-                        <a:latin typeface="+mn-ea"/>
-                        <a:ea typeface="+mn-ea"/>
-                      </a:endParaRPr>
                     </a:p>
                   </a:txBody>
                   <a:tcPr marL="0" marR="0" marT="0" marB="0" anchor="ctr">
@@ -12744,23 +12651,14 @@
                     <a:bodyPr/>
                     <a:lstStyle/>
                     <a:p>
-                      <a:pPr algn="ctr" fontAlgn="ctr"/>
+                      <a:pPr algn="ctr">
+                        <a:defRPr sz="700" b="0">
+                          <a:latin typeface="맑은 고딕"/>
+                        </a:defRPr>
+                      </a:pPr>
                       <a:r>
-                        <a:rPr lang="en-US" altLang="ko-KR" sz="600" u="none" strike="noStrike">
-                          <a:effectLst/>
-                          <a:latin typeface="+mn-ea"/>
-                          <a:ea typeface="+mn-ea"/>
-                        </a:rPr>
-                        <a:t>0</a:t>
+                        <a:t>94.55</a:t>
                       </a:r>
-                      <a:endParaRPr lang="en-US" altLang="ko-KR" sz="600" b="0" i="0" u="none" strike="noStrike">
-                        <a:solidFill>
-                          <a:srgbClr val="000000"/>
-                        </a:solidFill>
-                        <a:effectLst/>
-                        <a:latin typeface="+mn-ea"/>
-                        <a:ea typeface="+mn-ea"/>
-                      </a:endParaRPr>
                     </a:p>
                   </a:txBody>
                   <a:tcPr marL="0" marR="0" marT="0" marB="0" anchor="ctr">
@@ -12908,23 +12806,14 @@
                     <a:bodyPr/>
                     <a:lstStyle/>
                     <a:p>
-                      <a:pPr algn="ctr" fontAlgn="ctr"/>
+                      <a:pPr algn="ctr">
+                        <a:defRPr sz="700" b="0">
+                          <a:latin typeface="맑은 고딕"/>
+                        </a:defRPr>
+                      </a:pPr>
                       <a:r>
-                        <a:rPr lang="en-US" altLang="ko-KR" sz="600" u="none" strike="noStrike">
-                          <a:effectLst/>
-                          <a:latin typeface="+mn-ea"/>
-                          <a:ea typeface="+mn-ea"/>
-                        </a:rPr>
-                        <a:t>0</a:t>
+                        <a:t>27.41</a:t>
                       </a:r>
-                      <a:endParaRPr lang="en-US" altLang="ko-KR" sz="600" b="0" i="0" u="none" strike="noStrike">
-                        <a:solidFill>
-                          <a:srgbClr val="000000"/>
-                        </a:solidFill>
-                        <a:effectLst/>
-                        <a:latin typeface="+mn-ea"/>
-                        <a:ea typeface="+mn-ea"/>
-                      </a:endParaRPr>
                     </a:p>
                   </a:txBody>
                   <a:tcPr marL="0" marR="0" marT="0" marB="0" anchor="ctr">
@@ -13072,23 +12961,14 @@
                     <a:bodyPr/>
                     <a:lstStyle/>
                     <a:p>
-                      <a:pPr algn="ctr" fontAlgn="ctr"/>
+                      <a:pPr algn="ctr">
+                        <a:defRPr sz="700" b="0">
+                          <a:latin typeface="맑은 고딕"/>
+                        </a:defRPr>
+                      </a:pPr>
                       <a:r>
-                        <a:rPr lang="en-US" altLang="ko-KR" sz="600" u="none" strike="noStrike" dirty="0">
-                          <a:effectLst/>
-                          <a:latin typeface="+mn-ea"/>
-                          <a:ea typeface="+mn-ea"/>
-                        </a:rPr>
-                        <a:t>0</a:t>
+                        <a:t>26.02</a:t>
                       </a:r>
-                      <a:endParaRPr lang="en-US" altLang="ko-KR" sz="600" b="0" i="0" u="none" strike="noStrike" dirty="0">
-                        <a:solidFill>
-                          <a:srgbClr val="000000"/>
-                        </a:solidFill>
-                        <a:effectLst/>
-                        <a:latin typeface="+mn-ea"/>
-                        <a:ea typeface="+mn-ea"/>
-                      </a:endParaRPr>
                     </a:p>
                   </a:txBody>
                   <a:tcPr marL="0" marR="0" marT="0" marB="0" anchor="ctr">
@@ -13236,23 +13116,14 @@
                     <a:bodyPr/>
                     <a:lstStyle/>
                     <a:p>
-                      <a:pPr algn="ctr" fontAlgn="ctr"/>
+                      <a:pPr algn="ctr">
+                        <a:defRPr sz="700" b="0">
+                          <a:latin typeface="맑은 고딕"/>
+                        </a:defRPr>
+                      </a:pPr>
                       <a:r>
-                        <a:rPr lang="en-US" altLang="ko-KR" sz="600" u="none" strike="noStrike">
-                          <a:effectLst/>
-                          <a:latin typeface="+mn-ea"/>
-                          <a:ea typeface="+mn-ea"/>
-                        </a:rPr>
-                        <a:t>0</a:t>
+                        <a:t>72.82</a:t>
                       </a:r>
-                      <a:endParaRPr lang="en-US" altLang="ko-KR" sz="600" b="0" i="0" u="none" strike="noStrike">
-                        <a:solidFill>
-                          <a:srgbClr val="000000"/>
-                        </a:solidFill>
-                        <a:effectLst/>
-                        <a:latin typeface="+mn-ea"/>
-                        <a:ea typeface="+mn-ea"/>
-                      </a:endParaRPr>
                     </a:p>
                   </a:txBody>
                   <a:tcPr marL="0" marR="0" marT="0" marB="0" anchor="ctr">
@@ -13400,23 +13271,14 @@
                     <a:bodyPr/>
                     <a:lstStyle/>
                     <a:p>
-                      <a:pPr algn="ctr" fontAlgn="ctr"/>
+                      <a:pPr algn="ctr">
+                        <a:defRPr sz="700" b="0">
+                          <a:latin typeface="맑은 고딕"/>
+                        </a:defRPr>
+                      </a:pPr>
                       <a:r>
-                        <a:rPr lang="en-US" altLang="ko-KR" sz="600" u="none" strike="noStrike" dirty="0">
-                          <a:effectLst/>
-                          <a:latin typeface="+mn-ea"/>
-                          <a:ea typeface="+mn-ea"/>
-                        </a:rPr>
-                        <a:t>0</a:t>
+                        <a:t>94.6</a:t>
                       </a:r>
-                      <a:endParaRPr lang="en-US" altLang="ko-KR" sz="600" b="0" i="0" u="none" strike="noStrike" dirty="0">
-                        <a:solidFill>
-                          <a:srgbClr val="000000"/>
-                        </a:solidFill>
-                        <a:effectLst/>
-                        <a:latin typeface="+mn-ea"/>
-                        <a:ea typeface="+mn-ea"/>
-                      </a:endParaRPr>
                     </a:p>
                   </a:txBody>
                   <a:tcPr marL="0" marR="0" marT="0" marB="0" anchor="ctr">
@@ -13564,23 +13426,14 @@
                     <a:bodyPr/>
                     <a:lstStyle/>
                     <a:p>
-                      <a:pPr algn="ctr" fontAlgn="ctr"/>
+                      <a:pPr algn="ctr">
+                        <a:defRPr sz="700" b="0">
+                          <a:latin typeface="맑은 고딕"/>
+                        </a:defRPr>
+                      </a:pPr>
                       <a:r>
-                        <a:rPr lang="en-US" altLang="ko-KR" sz="600" u="none" strike="noStrike" dirty="0">
-                          <a:effectLst/>
-                          <a:latin typeface="+mn-ea"/>
-                          <a:ea typeface="+mn-ea"/>
-                        </a:rPr>
-                        <a:t>0</a:t>
+                        <a:t>0.08</a:t>
                       </a:r>
-                      <a:endParaRPr lang="en-US" altLang="ko-KR" sz="600" b="0" i="0" u="none" strike="noStrike" dirty="0">
-                        <a:solidFill>
-                          <a:srgbClr val="000000"/>
-                        </a:solidFill>
-                        <a:effectLst/>
-                        <a:latin typeface="+mn-ea"/>
-                        <a:ea typeface="+mn-ea"/>
-                      </a:endParaRPr>
                     </a:p>
                   </a:txBody>
                   <a:tcPr marL="0" marR="0" marT="0" marB="0" anchor="ctr">
@@ -13728,23 +13581,14 @@
                     <a:bodyPr/>
                     <a:lstStyle/>
                     <a:p>
-                      <a:pPr algn="ctr" fontAlgn="ctr"/>
+                      <a:pPr algn="ctr">
+                        <a:defRPr sz="700" b="0">
+                          <a:latin typeface="맑은 고딕"/>
+                        </a:defRPr>
+                      </a:pPr>
                       <a:r>
-                        <a:rPr lang="en-US" altLang="ko-KR" sz="600" u="none" strike="noStrike">
-                          <a:effectLst/>
-                          <a:latin typeface="+mn-ea"/>
-                          <a:ea typeface="+mn-ea"/>
-                        </a:rPr>
-                        <a:t>0</a:t>
+                        <a:t>82.94</a:t>
                       </a:r>
-                      <a:endParaRPr lang="en-US" altLang="ko-KR" sz="600" b="0" i="0" u="none" strike="noStrike">
-                        <a:solidFill>
-                          <a:srgbClr val="000000"/>
-                        </a:solidFill>
-                        <a:effectLst/>
-                        <a:latin typeface="+mn-ea"/>
-                        <a:ea typeface="+mn-ea"/>
-                      </a:endParaRPr>
                     </a:p>
                   </a:txBody>
                   <a:tcPr marL="0" marR="0" marT="0" marB="0" anchor="ctr">
@@ -13892,23 +13736,14 @@
                     <a:bodyPr/>
                     <a:lstStyle/>
                     <a:p>
-                      <a:pPr algn="ctr" fontAlgn="ctr"/>
+                      <a:pPr algn="ctr">
+                        <a:defRPr sz="700" b="0">
+                          <a:latin typeface="맑은 고딕"/>
+                        </a:defRPr>
+                      </a:pPr>
                       <a:r>
-                        <a:rPr lang="en-US" altLang="ko-KR" sz="600" u="none" strike="noStrike" dirty="0">
-                          <a:effectLst/>
-                          <a:latin typeface="+mn-ea"/>
-                          <a:ea typeface="+mn-ea"/>
-                        </a:rPr>
-                        <a:t>0</a:t>
+                        <a:t>79.77</a:t>
                       </a:r>
-                      <a:endParaRPr lang="en-US" altLang="ko-KR" sz="600" b="0" i="0" u="none" strike="noStrike" dirty="0">
-                        <a:solidFill>
-                          <a:srgbClr val="000000"/>
-                        </a:solidFill>
-                        <a:effectLst/>
-                        <a:latin typeface="+mn-ea"/>
-                        <a:ea typeface="+mn-ea"/>
-                      </a:endParaRPr>
                     </a:p>
                   </a:txBody>
                   <a:tcPr marL="0" marR="0" marT="0" marB="0" anchor="ctr">
@@ -14056,23 +13891,14 @@
                     <a:bodyPr/>
                     <a:lstStyle/>
                     <a:p>
-                      <a:pPr algn="ctr" fontAlgn="ctr"/>
+                      <a:pPr algn="ctr">
+                        <a:defRPr sz="700" b="0">
+                          <a:latin typeface="맑은 고딕"/>
+                        </a:defRPr>
+                      </a:pPr>
                       <a:r>
-                        <a:rPr lang="en-US" altLang="ko-KR" sz="600" u="none" strike="noStrike">
-                          <a:effectLst/>
-                          <a:latin typeface="+mn-ea"/>
-                          <a:ea typeface="+mn-ea"/>
-                        </a:rPr>
-                        <a:t>0</a:t>
+                        <a:t>-5.19</a:t>
                       </a:r>
-                      <a:endParaRPr lang="en-US" altLang="ko-KR" sz="600" b="0" i="0" u="none" strike="noStrike">
-                        <a:solidFill>
-                          <a:srgbClr val="000000"/>
-                        </a:solidFill>
-                        <a:effectLst/>
-                        <a:latin typeface="+mn-ea"/>
-                        <a:ea typeface="+mn-ea"/>
-                      </a:endParaRPr>
                     </a:p>
                   </a:txBody>
                   <a:tcPr marL="0" marR="0" marT="0" marB="0" anchor="ctr">
@@ -14220,23 +14046,14 @@
                     <a:bodyPr/>
                     <a:lstStyle/>
                     <a:p>
-                      <a:pPr algn="ctr" fontAlgn="ctr"/>
+                      <a:pPr algn="ctr">
+                        <a:defRPr sz="700" b="0">
+                          <a:latin typeface="맑은 고딕"/>
+                        </a:defRPr>
+                      </a:pPr>
                       <a:r>
-                        <a:rPr lang="en-US" altLang="ko-KR" sz="600" u="none" strike="noStrike" dirty="0">
-                          <a:effectLst/>
-                          <a:latin typeface="+mn-ea"/>
-                          <a:ea typeface="+mn-ea"/>
-                        </a:rPr>
-                        <a:t>0</a:t>
+                        <a:t>63.1</a:t>
                       </a:r>
-                      <a:endParaRPr lang="en-US" altLang="ko-KR" sz="600" b="0" i="0" u="none" strike="noStrike" dirty="0">
-                        <a:solidFill>
-                          <a:srgbClr val="000000"/>
-                        </a:solidFill>
-                        <a:effectLst/>
-                        <a:latin typeface="+mn-ea"/>
-                        <a:ea typeface="+mn-ea"/>
-                      </a:endParaRPr>
                     </a:p>
                   </a:txBody>
                   <a:tcPr marL="0" marR="0" marT="0" marB="0" anchor="ctr">
@@ -14384,23 +14201,14 @@
                     <a:bodyPr/>
                     <a:lstStyle/>
                     <a:p>
-                      <a:pPr algn="ctr" fontAlgn="ctr"/>
+                      <a:pPr algn="ctr">
+                        <a:defRPr sz="700" b="0">
+                          <a:latin typeface="맑은 고딕"/>
+                        </a:defRPr>
+                      </a:pPr>
                       <a:r>
-                        <a:rPr lang="en-US" altLang="ko-KR" sz="600" u="none" strike="noStrike">
-                          <a:effectLst/>
-                          <a:latin typeface="+mn-ea"/>
-                          <a:ea typeface="+mn-ea"/>
-                        </a:rPr>
-                        <a:t>0</a:t>
+                        <a:t>128.56</a:t>
                       </a:r>
-                      <a:endParaRPr lang="en-US" altLang="ko-KR" sz="600" b="0" i="0" u="none" strike="noStrike">
-                        <a:solidFill>
-                          <a:srgbClr val="000000"/>
-                        </a:solidFill>
-                        <a:effectLst/>
-                        <a:latin typeface="+mn-ea"/>
-                        <a:ea typeface="+mn-ea"/>
-                      </a:endParaRPr>
                     </a:p>
                   </a:txBody>
                   <a:tcPr marL="0" marR="0" marT="0" marB="0" anchor="ctr">
@@ -14548,23 +14356,14 @@
                     <a:bodyPr/>
                     <a:lstStyle/>
                     <a:p>
-                      <a:pPr algn="ctr" fontAlgn="ctr"/>
+                      <a:pPr algn="ctr">
+                        <a:defRPr sz="700" b="0">
+                          <a:latin typeface="맑은 고딕"/>
+                        </a:defRPr>
+                      </a:pPr>
                       <a:r>
-                        <a:rPr lang="en-US" altLang="ko-KR" sz="600" u="none" strike="noStrike" dirty="0">
-                          <a:effectLst/>
-                          <a:latin typeface="+mn-ea"/>
-                          <a:ea typeface="+mn-ea"/>
-                        </a:rPr>
-                        <a:t>0</a:t>
+                        <a:t>122.81</a:t>
                       </a:r>
-                      <a:endParaRPr lang="en-US" altLang="ko-KR" sz="600" b="0" i="0" u="none" strike="noStrike" dirty="0">
-                        <a:solidFill>
-                          <a:srgbClr val="000000"/>
-                        </a:solidFill>
-                        <a:effectLst/>
-                        <a:latin typeface="+mn-ea"/>
-                        <a:ea typeface="+mn-ea"/>
-                      </a:endParaRPr>
                     </a:p>
                   </a:txBody>
                   <a:tcPr marL="0" marR="0" marT="0" marB="0" anchor="ctr">
@@ -14712,23 +14511,14 @@
                     <a:bodyPr/>
                     <a:lstStyle/>
                     <a:p>
-                      <a:pPr algn="ctr" fontAlgn="ctr"/>
+                      <a:pPr algn="ctr">
+                        <a:defRPr sz="700" b="0">
+                          <a:latin typeface="맑은 고딕"/>
+                        </a:defRPr>
+                      </a:pPr>
                       <a:r>
-                        <a:rPr lang="en-US" altLang="ko-KR" sz="600" u="none" strike="noStrike" dirty="0">
-                          <a:effectLst/>
-                          <a:latin typeface="+mn-ea"/>
-                          <a:ea typeface="+mn-ea"/>
-                        </a:rPr>
-                        <a:t>0</a:t>
+                        <a:t>5.6</a:t>
                       </a:r>
-                      <a:endParaRPr lang="en-US" altLang="ko-KR" sz="600" b="0" i="0" u="none" strike="noStrike" dirty="0">
-                        <a:solidFill>
-                          <a:srgbClr val="000000"/>
-                        </a:solidFill>
-                        <a:effectLst/>
-                        <a:latin typeface="+mn-ea"/>
-                        <a:ea typeface="+mn-ea"/>
-                      </a:endParaRPr>
                     </a:p>
                   </a:txBody>
                   <a:tcPr marL="0" marR="0" marT="0" marB="0" anchor="ctr">
@@ -14876,23 +14666,14 @@
                     <a:bodyPr/>
                     <a:lstStyle/>
                     <a:p>
-                      <a:pPr algn="ctr" fontAlgn="ctr"/>
+                      <a:pPr algn="ctr">
+                        <a:defRPr sz="700" b="0">
+                          <a:latin typeface="맑은 고딕"/>
+                        </a:defRPr>
+                      </a:pPr>
                       <a:r>
-                        <a:rPr lang="en-US" altLang="ko-KR" sz="600" u="none" strike="noStrike">
-                          <a:effectLst/>
-                          <a:latin typeface="+mn-ea"/>
-                          <a:ea typeface="+mn-ea"/>
-                        </a:rPr>
-                        <a:t>0</a:t>
+                        <a:t>1.4</a:t>
                       </a:r>
-                      <a:endParaRPr lang="en-US" altLang="ko-KR" sz="600" b="0" i="0" u="none" strike="noStrike">
-                        <a:solidFill>
-                          <a:srgbClr val="000000"/>
-                        </a:solidFill>
-                        <a:effectLst/>
-                        <a:latin typeface="+mn-ea"/>
-                        <a:ea typeface="+mn-ea"/>
-                      </a:endParaRPr>
                     </a:p>
                   </a:txBody>
                   <a:tcPr marL="0" marR="0" marT="0" marB="0" anchor="ctr">
@@ -15040,23 +14821,14 @@
                     <a:bodyPr/>
                     <a:lstStyle/>
                     <a:p>
-                      <a:pPr algn="ctr" fontAlgn="ctr"/>
+                      <a:pPr algn="ctr">
+                        <a:defRPr sz="700" b="0">
+                          <a:latin typeface="맑은 고딕"/>
+                        </a:defRPr>
+                      </a:pPr>
                       <a:r>
-                        <a:rPr lang="en-US" altLang="ko-KR" sz="600" u="none" strike="noStrike" dirty="0">
-                          <a:effectLst/>
-                          <a:latin typeface="+mn-ea"/>
-                          <a:ea typeface="+mn-ea"/>
-                        </a:rPr>
-                        <a:t>0</a:t>
+                        <a:t>34.7</a:t>
                       </a:r>
-                      <a:endParaRPr lang="en-US" altLang="ko-KR" sz="600" b="0" i="0" u="none" strike="noStrike" dirty="0">
-                        <a:solidFill>
-                          <a:srgbClr val="000000"/>
-                        </a:solidFill>
-                        <a:effectLst/>
-                        <a:latin typeface="+mn-ea"/>
-                        <a:ea typeface="+mn-ea"/>
-                      </a:endParaRPr>
                     </a:p>
                   </a:txBody>
                   <a:tcPr marL="0" marR="0" marT="0" marB="0" anchor="ctr">
@@ -15204,23 +14976,14 @@
                     <a:bodyPr/>
                     <a:lstStyle/>
                     <a:p>
-                      <a:pPr algn="ctr" fontAlgn="ctr"/>
+                      <a:pPr algn="ctr">
+                        <a:defRPr sz="700" b="0">
+                          <a:latin typeface="맑은 고딕"/>
+                        </a:defRPr>
+                      </a:pPr>
                       <a:r>
-                        <a:rPr lang="en-US" altLang="ko-KR" sz="600" u="none" strike="noStrike" dirty="0">
-                          <a:effectLst/>
-                          <a:latin typeface="+mn-ea"/>
-                          <a:ea typeface="+mn-ea"/>
-                        </a:rPr>
-                        <a:t>0</a:t>
+                        <a:t>40.15</a:t>
                       </a:r>
-                      <a:endParaRPr lang="en-US" altLang="ko-KR" sz="600" b="0" i="0" u="none" strike="noStrike" dirty="0">
-                        <a:solidFill>
-                          <a:srgbClr val="000000"/>
-                        </a:solidFill>
-                        <a:effectLst/>
-                        <a:latin typeface="+mn-ea"/>
-                        <a:ea typeface="+mn-ea"/>
-                      </a:endParaRPr>
                     </a:p>
                   </a:txBody>
                   <a:tcPr marL="0" marR="0" marT="0" marB="0" anchor="ctr">
@@ -15368,23 +15131,14 @@
                     <a:bodyPr/>
                     <a:lstStyle/>
                     <a:p>
-                      <a:pPr algn="ctr" fontAlgn="ctr"/>
+                      <a:pPr algn="ctr">
+                        <a:defRPr sz="700" b="0">
+                          <a:latin typeface="맑은 고딕"/>
+                        </a:defRPr>
+                      </a:pPr>
                       <a:r>
-                        <a:rPr lang="en-US" altLang="ko-KR" sz="600" u="none" strike="noStrike">
-                          <a:effectLst/>
-                          <a:latin typeface="+mn-ea"/>
-                          <a:ea typeface="+mn-ea"/>
-                        </a:rPr>
-                        <a:t>0</a:t>
+                        <a:t>57.04</a:t>
                       </a:r>
-                      <a:endParaRPr lang="en-US" altLang="ko-KR" sz="600" b="0" i="0" u="none" strike="noStrike">
-                        <a:solidFill>
-                          <a:srgbClr val="000000"/>
-                        </a:solidFill>
-                        <a:effectLst/>
-                        <a:latin typeface="+mn-ea"/>
-                        <a:ea typeface="+mn-ea"/>
-                      </a:endParaRPr>
                     </a:p>
                   </a:txBody>
                   <a:tcPr marL="0" marR="0" marT="0" marB="0" anchor="ctr">
@@ -15532,23 +15286,14 @@
                     <a:bodyPr/>
                     <a:lstStyle/>
                     <a:p>
-                      <a:pPr algn="ctr" fontAlgn="ctr"/>
+                      <a:pPr algn="ctr">
+                        <a:defRPr sz="700" b="0">
+                          <a:latin typeface="맑은 고딕"/>
+                        </a:defRPr>
+                      </a:pPr>
                       <a:r>
-                        <a:rPr lang="en-US" altLang="ko-KR" sz="600" u="none" strike="noStrike" dirty="0">
-                          <a:effectLst/>
-                          <a:latin typeface="+mn-ea"/>
-                          <a:ea typeface="+mn-ea"/>
-                        </a:rPr>
-                        <a:t>0</a:t>
+                        <a:t>62.79</a:t>
                       </a:r>
-                      <a:endParaRPr lang="en-US" altLang="ko-KR" sz="600" b="0" i="0" u="none" strike="noStrike" dirty="0">
-                        <a:solidFill>
-                          <a:srgbClr val="000000"/>
-                        </a:solidFill>
-                        <a:effectLst/>
-                        <a:latin typeface="+mn-ea"/>
-                        <a:ea typeface="+mn-ea"/>
-                      </a:endParaRPr>
                     </a:p>
                   </a:txBody>
                   <a:tcPr marL="0" marR="0" marT="0" marB="0" anchor="ctr">
@@ -15699,23 +15444,14 @@
                     <a:bodyPr/>
                     <a:lstStyle/>
                     <a:p>
-                      <a:pPr algn="ctr" fontAlgn="ctr"/>
+                      <a:pPr algn="ctr">
+                        <a:defRPr sz="700" b="0">
+                          <a:latin typeface="맑은 고딕"/>
+                        </a:defRPr>
+                      </a:pPr>
                       <a:r>
-                        <a:rPr lang="en-US" altLang="ko-KR" sz="600" u="none" strike="noStrike">
-                          <a:effectLst/>
-                          <a:latin typeface="+mn-ea"/>
-                          <a:ea typeface="+mn-ea"/>
-                        </a:rPr>
-                        <a:t>0</a:t>
+                        <a:t>30.54</a:t>
                       </a:r>
-                      <a:endParaRPr lang="en-US" altLang="ko-KR" sz="600" b="0" i="0" u="none" strike="noStrike">
-                        <a:solidFill>
-                          <a:srgbClr val="000000"/>
-                        </a:solidFill>
-                        <a:effectLst/>
-                        <a:latin typeface="+mn-ea"/>
-                        <a:ea typeface="+mn-ea"/>
-                      </a:endParaRPr>
                     </a:p>
                   </a:txBody>
                   <a:tcPr marL="0" marR="0" marT="0" marB="0" anchor="ctr">
@@ -15863,23 +15599,14 @@
                     <a:bodyPr/>
                     <a:lstStyle/>
                     <a:p>
-                      <a:pPr algn="ctr" fontAlgn="ctr"/>
+                      <a:pPr algn="ctr">
+                        <a:defRPr sz="700" b="0">
+                          <a:latin typeface="맑은 고딕"/>
+                        </a:defRPr>
+                      </a:pPr>
                       <a:r>
-                        <a:rPr lang="en-US" altLang="ko-KR" sz="600" u="none" strike="noStrike" dirty="0">
-                          <a:effectLst/>
-                          <a:latin typeface="+mn-ea"/>
-                          <a:ea typeface="+mn-ea"/>
-                        </a:rPr>
-                        <a:t>0</a:t>
+                        <a:t>48.21</a:t>
                       </a:r>
-                      <a:endParaRPr lang="en-US" altLang="ko-KR" sz="600" b="0" i="0" u="none" strike="noStrike" dirty="0">
-                        <a:solidFill>
-                          <a:srgbClr val="000000"/>
-                        </a:solidFill>
-                        <a:effectLst/>
-                        <a:latin typeface="+mn-ea"/>
-                        <a:ea typeface="+mn-ea"/>
-                      </a:endParaRPr>
                     </a:p>
                   </a:txBody>
                   <a:tcPr marL="0" marR="0" marT="0" marB="0" anchor="ctr">
@@ -16027,23 +15754,14 @@
                     <a:bodyPr/>
                     <a:lstStyle/>
                     <a:p>
-                      <a:pPr algn="ctr" fontAlgn="ctr"/>
+                      <a:pPr algn="ctr">
+                        <a:defRPr sz="700" b="0">
+                          <a:latin typeface="맑은 고딕"/>
+                        </a:defRPr>
+                      </a:pPr>
                       <a:r>
-                        <a:rPr lang="en-US" altLang="ko-KR" sz="600" u="none" strike="noStrike">
-                          <a:effectLst/>
-                          <a:latin typeface="+mn-ea"/>
-                          <a:ea typeface="+mn-ea"/>
-                        </a:rPr>
-                        <a:t>0</a:t>
+                        <a:t>35.78</a:t>
                       </a:r>
-                      <a:endParaRPr lang="en-US" altLang="ko-KR" sz="600" b="0" i="0" u="none" strike="noStrike">
-                        <a:solidFill>
-                          <a:srgbClr val="000000"/>
-                        </a:solidFill>
-                        <a:effectLst/>
-                        <a:latin typeface="+mn-ea"/>
-                        <a:ea typeface="+mn-ea"/>
-                      </a:endParaRPr>
                     </a:p>
                   </a:txBody>
                   <a:tcPr marL="0" marR="0" marT="0" marB="0" anchor="ctr">
@@ -16191,23 +15909,14 @@
                     <a:bodyPr/>
                     <a:lstStyle/>
                     <a:p>
-                      <a:pPr algn="ctr" fontAlgn="ctr"/>
+                      <a:pPr algn="ctr">
+                        <a:defRPr sz="700" b="0">
+                          <a:latin typeface="맑은 고딕"/>
+                        </a:defRPr>
+                      </a:pPr>
                       <a:r>
-                        <a:rPr lang="en-US" altLang="ko-KR" sz="600" u="none" strike="noStrike" dirty="0">
-                          <a:effectLst/>
-                          <a:latin typeface="+mn-ea"/>
-                          <a:ea typeface="+mn-ea"/>
-                        </a:rPr>
-                        <a:t>0</a:t>
+                        <a:t>64.61</a:t>
                       </a:r>
-                      <a:endParaRPr lang="en-US" altLang="ko-KR" sz="600" b="0" i="0" u="none" strike="noStrike" dirty="0">
-                        <a:solidFill>
-                          <a:srgbClr val="000000"/>
-                        </a:solidFill>
-                        <a:effectLst/>
-                        <a:latin typeface="+mn-ea"/>
-                        <a:ea typeface="+mn-ea"/>
-                      </a:endParaRPr>
                     </a:p>
                   </a:txBody>
                   <a:tcPr marL="0" marR="0" marT="0" marB="0" anchor="ctr">
@@ -16355,23 +16064,14 @@
                     <a:bodyPr/>
                     <a:lstStyle/>
                     <a:p>
-                      <a:pPr algn="ctr" fontAlgn="ctr"/>
+                      <a:pPr algn="ctr">
+                        <a:defRPr sz="700" b="0">
+                          <a:latin typeface="맑은 고딕"/>
+                        </a:defRPr>
+                      </a:pPr>
                       <a:r>
-                        <a:rPr lang="en-US" altLang="ko-KR" sz="600" u="none" strike="noStrike">
-                          <a:effectLst/>
-                          <a:latin typeface="+mn-ea"/>
-                          <a:ea typeface="+mn-ea"/>
-                        </a:rPr>
-                        <a:t>0</a:t>
+                        <a:t>65.93</a:t>
                       </a:r>
-                      <a:endParaRPr lang="en-US" altLang="ko-KR" sz="600" b="0" i="0" u="none" strike="noStrike">
-                        <a:solidFill>
-                          <a:srgbClr val="000000"/>
-                        </a:solidFill>
-                        <a:effectLst/>
-                        <a:latin typeface="+mn-ea"/>
-                        <a:ea typeface="+mn-ea"/>
-                      </a:endParaRPr>
                     </a:p>
                   </a:txBody>
                   <a:tcPr marL="0" marR="0" marT="0" marB="0" anchor="ctr">
@@ -16519,23 +16219,14 @@
                     <a:bodyPr/>
                     <a:lstStyle/>
                     <a:p>
-                      <a:pPr algn="ctr" fontAlgn="ctr"/>
+                      <a:pPr algn="ctr">
+                        <a:defRPr sz="700" b="0">
+                          <a:latin typeface="맑은 고딕"/>
+                        </a:defRPr>
+                      </a:pPr>
                       <a:r>
-                        <a:rPr lang="en-US" altLang="ko-KR" sz="600" u="none" strike="noStrike" dirty="0">
-                          <a:effectLst/>
-                          <a:latin typeface="+mn-ea"/>
-                          <a:ea typeface="+mn-ea"/>
-                        </a:rPr>
-                        <a:t>0</a:t>
+                        <a:t>51.12</a:t>
                       </a:r>
-                      <a:endParaRPr lang="en-US" altLang="ko-KR" sz="600" b="0" i="0" u="none" strike="noStrike" dirty="0">
-                        <a:solidFill>
-                          <a:srgbClr val="000000"/>
-                        </a:solidFill>
-                        <a:effectLst/>
-                        <a:latin typeface="+mn-ea"/>
-                        <a:ea typeface="+mn-ea"/>
-                      </a:endParaRPr>
                     </a:p>
                   </a:txBody>
                   <a:tcPr marL="0" marR="0" marT="0" marB="0" anchor="ctr">
@@ -16683,23 +16374,14 @@
                     <a:bodyPr/>
                     <a:lstStyle/>
                     <a:p>
-                      <a:pPr algn="ctr" fontAlgn="ctr"/>
+                      <a:pPr algn="ctr">
+                        <a:defRPr sz="700" b="0">
+                          <a:latin typeface="맑은 고딕"/>
+                        </a:defRPr>
+                      </a:pPr>
                       <a:r>
-                        <a:rPr lang="en-US" altLang="ko-KR" sz="600" u="none" strike="noStrike">
-                          <a:effectLst/>
-                          <a:latin typeface="+mn-ea"/>
-                          <a:ea typeface="+mn-ea"/>
-                        </a:rPr>
-                        <a:t>0</a:t>
+                        <a:t>72.19</a:t>
                       </a:r>
-                      <a:endParaRPr lang="en-US" altLang="ko-KR" sz="600" b="0" i="0" u="none" strike="noStrike">
-                        <a:solidFill>
-                          <a:srgbClr val="000000"/>
-                        </a:solidFill>
-                        <a:effectLst/>
-                        <a:latin typeface="+mn-ea"/>
-                        <a:ea typeface="+mn-ea"/>
-                      </a:endParaRPr>
                     </a:p>
                   </a:txBody>
                   <a:tcPr marL="0" marR="0" marT="0" marB="0" anchor="ctr">
@@ -16847,23 +16529,14 @@
                     <a:bodyPr/>
                     <a:lstStyle/>
                     <a:p>
-                      <a:pPr algn="ctr" fontAlgn="ctr"/>
+                      <a:pPr algn="ctr">
+                        <a:defRPr sz="700" b="0">
+                          <a:latin typeface="맑은 고딕"/>
+                        </a:defRPr>
+                      </a:pPr>
                       <a:r>
-                        <a:rPr lang="en-US" altLang="ko-KR" sz="600" u="none" strike="noStrike" dirty="0">
-                          <a:effectLst/>
-                          <a:latin typeface="+mn-ea"/>
-                          <a:ea typeface="+mn-ea"/>
-                        </a:rPr>
-                        <a:t>0</a:t>
+                        <a:t>6.26</a:t>
                       </a:r>
-                      <a:endParaRPr lang="en-US" altLang="ko-KR" sz="600" b="0" i="0" u="none" strike="noStrike" dirty="0">
-                        <a:solidFill>
-                          <a:srgbClr val="000000"/>
-                        </a:solidFill>
-                        <a:effectLst/>
-                        <a:latin typeface="+mn-ea"/>
-                        <a:ea typeface="+mn-ea"/>
-                      </a:endParaRPr>
                     </a:p>
                   </a:txBody>
                   <a:tcPr marL="0" marR="0" marT="0" marB="0" anchor="ctr">
@@ -17011,23 +16684,14 @@
                     <a:bodyPr/>
                     <a:lstStyle/>
                     <a:p>
-                      <a:pPr algn="ctr" fontAlgn="ctr"/>
+                      <a:pPr algn="ctr">
+                        <a:defRPr sz="700" b="0">
+                          <a:latin typeface="맑은 고딕"/>
+                        </a:defRPr>
+                      </a:pPr>
                       <a:r>
-                        <a:rPr lang="en-US" altLang="ko-KR" sz="600" u="none" strike="noStrike">
-                          <a:effectLst/>
-                          <a:latin typeface="+mn-ea"/>
-                          <a:ea typeface="+mn-ea"/>
-                        </a:rPr>
-                        <a:t>0</a:t>
+                        <a:t>49.62</a:t>
                       </a:r>
-                      <a:endParaRPr lang="en-US" altLang="ko-KR" sz="600" b="0" i="0" u="none" strike="noStrike">
-                        <a:solidFill>
-                          <a:srgbClr val="000000"/>
-                        </a:solidFill>
-                        <a:effectLst/>
-                        <a:latin typeface="+mn-ea"/>
-                        <a:ea typeface="+mn-ea"/>
-                      </a:endParaRPr>
                     </a:p>
                   </a:txBody>
                   <a:tcPr marL="0" marR="0" marT="0" marB="0" anchor="ctr">
@@ -17175,23 +16839,14 @@
                     <a:bodyPr/>
                     <a:lstStyle/>
                     <a:p>
-                      <a:pPr algn="ctr" fontAlgn="ctr"/>
+                      <a:pPr algn="ctr">
+                        <a:defRPr sz="700" b="0">
+                          <a:latin typeface="맑은 고딕"/>
+                        </a:defRPr>
+                      </a:pPr>
                       <a:r>
-                        <a:rPr lang="en-US" altLang="ko-KR" sz="600" u="none" strike="noStrike">
-                          <a:effectLst/>
-                          <a:latin typeface="+mn-ea"/>
-                          <a:ea typeface="+mn-ea"/>
-                        </a:rPr>
-                        <a:t>0</a:t>
+                        <a:t>70.57</a:t>
                       </a:r>
-                      <a:endParaRPr lang="en-US" altLang="ko-KR" sz="600" b="0" i="0" u="none" strike="noStrike">
-                        <a:solidFill>
-                          <a:srgbClr val="000000"/>
-                        </a:solidFill>
-                        <a:effectLst/>
-                        <a:latin typeface="+mn-ea"/>
-                        <a:ea typeface="+mn-ea"/>
-                      </a:endParaRPr>
                     </a:p>
                   </a:txBody>
                   <a:tcPr marL="0" marR="0" marT="0" marB="0" anchor="ctr">
@@ -17339,23 +16994,14 @@
                     <a:bodyPr/>
                     <a:lstStyle/>
                     <a:p>
-                      <a:pPr algn="ctr" fontAlgn="ctr"/>
+                      <a:pPr algn="ctr">
+                        <a:defRPr sz="700" b="0">
+                          <a:latin typeface="맑은 고딕"/>
+                        </a:defRPr>
+                      </a:pPr>
                       <a:r>
-                        <a:rPr lang="en-US" altLang="ko-KR" sz="600" u="none" strike="noStrike" dirty="0">
-                          <a:effectLst/>
-                          <a:latin typeface="+mn-ea"/>
-                          <a:ea typeface="+mn-ea"/>
-                        </a:rPr>
-                        <a:t>0</a:t>
+                        <a:t>50.28</a:t>
                       </a:r>
-                      <a:endParaRPr lang="en-US" altLang="ko-KR" sz="600" b="0" i="0" u="none" strike="noStrike" dirty="0">
-                        <a:solidFill>
-                          <a:srgbClr val="000000"/>
-                        </a:solidFill>
-                        <a:effectLst/>
-                        <a:latin typeface="+mn-ea"/>
-                        <a:ea typeface="+mn-ea"/>
-                      </a:endParaRPr>
                     </a:p>
                   </a:txBody>
                   <a:tcPr marL="0" marR="0" marT="0" marB="0" anchor="ctr">
@@ -17503,23 +17149,14 @@
                     <a:bodyPr/>
                     <a:lstStyle/>
                     <a:p>
-                      <a:pPr algn="ctr" fontAlgn="ctr"/>
+                      <a:pPr algn="ctr">
+                        <a:defRPr sz="700" b="0">
+                          <a:latin typeface="맑은 고딕"/>
+                        </a:defRPr>
+                      </a:pPr>
                       <a:r>
-                        <a:rPr lang="en-US" altLang="ko-KR" sz="600" u="none" strike="noStrike" dirty="0">
-                          <a:effectLst/>
-                          <a:latin typeface="+mn-ea"/>
-                          <a:ea typeface="+mn-ea"/>
-                        </a:rPr>
-                        <a:t>0</a:t>
+                        <a:t>11.31</a:t>
                       </a:r>
-                      <a:endParaRPr lang="en-US" altLang="ko-KR" sz="600" b="0" i="0" u="none" strike="noStrike" dirty="0">
-                        <a:solidFill>
-                          <a:srgbClr val="000000"/>
-                        </a:solidFill>
-                        <a:effectLst/>
-                        <a:latin typeface="+mn-ea"/>
-                        <a:ea typeface="+mn-ea"/>
-                      </a:endParaRPr>
                     </a:p>
                   </a:txBody>
                   <a:tcPr marL="0" marR="0" marT="0" marB="0" anchor="ctr">
@@ -17667,23 +17304,14 @@
                     <a:bodyPr/>
                     <a:lstStyle/>
                     <a:p>
-                      <a:pPr algn="ctr" fontAlgn="ctr"/>
+                      <a:pPr algn="ctr">
+                        <a:defRPr sz="700" b="0">
+                          <a:latin typeface="맑은 고딕"/>
+                        </a:defRPr>
+                      </a:pPr>
                       <a:r>
-                        <a:rPr lang="en-US" altLang="ko-KR" sz="600" u="none" strike="noStrike" dirty="0">
-                          <a:effectLst/>
-                          <a:latin typeface="+mn-ea"/>
-                          <a:ea typeface="+mn-ea"/>
-                        </a:rPr>
-                        <a:t>0</a:t>
+                        <a:t>91.08</a:t>
                       </a:r>
-                      <a:endParaRPr lang="en-US" altLang="ko-KR" sz="600" b="0" i="0" u="none" strike="noStrike" dirty="0">
-                        <a:solidFill>
-                          <a:srgbClr val="000000"/>
-                        </a:solidFill>
-                        <a:effectLst/>
-                        <a:latin typeface="+mn-ea"/>
-                        <a:ea typeface="+mn-ea"/>
-                      </a:endParaRPr>
                     </a:p>
                   </a:txBody>
                   <a:tcPr marL="0" marR="0" marT="0" marB="0" anchor="ctr">
@@ -17831,23 +17459,14 @@
                     <a:bodyPr/>
                     <a:lstStyle/>
                     <a:p>
-                      <a:pPr algn="ctr" fontAlgn="ctr"/>
+                      <a:pPr algn="ctr">
+                        <a:defRPr sz="700" b="0">
+                          <a:latin typeface="맑은 고딕"/>
+                        </a:defRPr>
+                      </a:pPr>
                       <a:r>
-                        <a:rPr lang="en-US" altLang="ko-KR" sz="600" u="none" strike="noStrike">
-                          <a:effectLst/>
-                          <a:latin typeface="+mn-ea"/>
-                          <a:ea typeface="+mn-ea"/>
-                        </a:rPr>
-                        <a:t>0</a:t>
+                        <a:t>0.61</a:t>
                       </a:r>
-                      <a:endParaRPr lang="en-US" altLang="ko-KR" sz="600" b="0" i="0" u="none" strike="noStrike">
-                        <a:solidFill>
-                          <a:srgbClr val="000000"/>
-                        </a:solidFill>
-                        <a:effectLst/>
-                        <a:latin typeface="+mn-ea"/>
-                        <a:ea typeface="+mn-ea"/>
-                      </a:endParaRPr>
                     </a:p>
                   </a:txBody>
                   <a:tcPr marL="0" marR="0" marT="0" marB="0" anchor="ctr">
@@ -17995,23 +17614,14 @@
                     <a:bodyPr/>
                     <a:lstStyle/>
                     <a:p>
-                      <a:pPr algn="ctr" fontAlgn="ctr"/>
+                      <a:pPr algn="ctr">
+                        <a:defRPr sz="700" b="0">
+                          <a:latin typeface="맑은 고딕"/>
+                        </a:defRPr>
+                      </a:pPr>
                       <a:r>
-                        <a:rPr lang="en-US" altLang="ko-KR" sz="600" u="none" strike="noStrike" dirty="0">
-                          <a:effectLst/>
-                          <a:latin typeface="+mn-ea"/>
-                          <a:ea typeface="+mn-ea"/>
-                        </a:rPr>
-                        <a:t>0</a:t>
+                        <a:t>6.89</a:t>
                       </a:r>
-                      <a:endParaRPr lang="en-US" altLang="ko-KR" sz="600" b="0" i="0" u="none" strike="noStrike" dirty="0">
-                        <a:solidFill>
-                          <a:srgbClr val="000000"/>
-                        </a:solidFill>
-                        <a:effectLst/>
-                        <a:latin typeface="+mn-ea"/>
-                        <a:ea typeface="+mn-ea"/>
-                      </a:endParaRPr>
                     </a:p>
                   </a:txBody>
                   <a:tcPr marL="0" marR="0" marT="0" marB="0" anchor="ctr">
@@ -18159,23 +17769,14 @@
                     <a:bodyPr/>
                     <a:lstStyle/>
                     <a:p>
-                      <a:pPr algn="ctr" fontAlgn="ctr"/>
+                      <a:pPr algn="ctr">
+                        <a:defRPr sz="700" b="0">
+                          <a:latin typeface="맑은 고딕"/>
+                        </a:defRPr>
+                      </a:pPr>
                       <a:r>
-                        <a:rPr lang="en-US" altLang="ko-KR" sz="600" u="none" strike="noStrike" dirty="0">
-                          <a:effectLst/>
-                          <a:latin typeface="+mn-ea"/>
-                          <a:ea typeface="+mn-ea"/>
-                        </a:rPr>
-                        <a:t>0</a:t>
+                        <a:t>81.17</a:t>
                       </a:r>
-                      <a:endParaRPr lang="en-US" altLang="ko-KR" sz="600" b="0" i="0" u="none" strike="noStrike" dirty="0">
-                        <a:solidFill>
-                          <a:srgbClr val="000000"/>
-                        </a:solidFill>
-                        <a:effectLst/>
-                        <a:latin typeface="+mn-ea"/>
-                        <a:ea typeface="+mn-ea"/>
-                      </a:endParaRPr>
                     </a:p>
                   </a:txBody>
                   <a:tcPr marL="0" marR="0" marT="0" marB="0" anchor="ctr">
@@ -18323,23 +17924,14 @@
                     <a:bodyPr/>
                     <a:lstStyle/>
                     <a:p>
-                      <a:pPr algn="ctr" fontAlgn="ctr"/>
+                      <a:pPr algn="ctr">
+                        <a:defRPr sz="700" b="0">
+                          <a:latin typeface="맑은 고딕"/>
+                        </a:defRPr>
+                      </a:pPr>
                       <a:r>
-                        <a:rPr lang="en-US" altLang="ko-KR" sz="600" u="none" strike="noStrike" dirty="0">
-                          <a:effectLst/>
-                          <a:latin typeface="+mn-ea"/>
-                          <a:ea typeface="+mn-ea"/>
-                        </a:rPr>
-                        <a:t>0</a:t>
+                        <a:t>74.22</a:t>
                       </a:r>
-                      <a:endParaRPr lang="en-US" altLang="ko-KR" sz="600" b="0" i="0" u="none" strike="noStrike" dirty="0">
-                        <a:solidFill>
-                          <a:srgbClr val="000000"/>
-                        </a:solidFill>
-                        <a:effectLst/>
-                        <a:latin typeface="+mn-ea"/>
-                        <a:ea typeface="+mn-ea"/>
-                      </a:endParaRPr>
                     </a:p>
                   </a:txBody>
                   <a:tcPr marL="0" marR="0" marT="0" marB="0" anchor="ctr">
@@ -18457,11 +18049,12 @@
           <a:bodyPr rtlCol="0" anchor="ctr"/>
           <a:lstStyle/>
           <a:p>
-            <a:r>
-              <a:rPr lang="en-US" altLang="ko-KR" sz="1400" b="1" dirty="0">
-                <a:latin typeface="+mj-ea"/>
-                <a:ea typeface="+mj-ea"/>
-              </a:rPr>
+            <a:pPr algn="ctr">
+              <a:defRPr sz="1300" b="1">
+                <a:latin typeface="맑은 고딕"/>
+              </a:defRPr>
+            </a:pPr>
+            <a:r>
               <a:t>C/C &amp; Main problem</a:t>
             </a:r>
           </a:p>
@@ -18516,11 +18109,12 @@
           <a:bodyPr rtlCol="0" anchor="ctr"/>
           <a:lstStyle/>
           <a:p>
-            <a:r>
-              <a:rPr lang="en-US" altLang="ko-KR" sz="1200" b="1" dirty="0">
-                <a:latin typeface="+mj-ea"/>
-                <a:ea typeface="+mj-ea"/>
-              </a:rPr>
+            <a:pPr algn="ctr">
+              <a:defRPr sz="1300" b="1">
+                <a:latin typeface="맑은 고딕"/>
+              </a:defRPr>
+            </a:pPr>
+            <a:r>
               <a:t>MPH:</a:t>
             </a:r>
           </a:p>
@@ -18614,16 +18208,13 @@
           </a:bodyPr>
           <a:lstStyle/>
           <a:p>
-            <a:pPr eaLnBrk="1" hangingPunct="1"/>
-            <a:r>
-              <a:rPr lang="en-US" altLang="ko-KR" sz="1400" b="1" dirty="0">
-                <a:solidFill>
-                  <a:srgbClr val="000000"/>
-                </a:solidFill>
-                <a:latin typeface="+mn-ea"/>
-                <a:cs typeface="Times New Roman Bold" panose="02020803070505020304" pitchFamily="18" charset="0"/>
-              </a:rPr>
-              <a:t>HGI:+</a:t>
+            <a:pPr algn="ctr">
+              <a:defRPr sz="1300" b="1">
+                <a:latin typeface="맑은 고딕"/>
+              </a:defRPr>
+            </a:pPr>
+            <a:r>
+              <a:t>HGI:2.31</a:t>
             </a:r>
           </a:p>
         </p:txBody>
@@ -18707,16 +18298,13 @@
           </a:bodyPr>
           <a:lstStyle/>
           <a:p>
-            <a:pPr eaLnBrk="1" hangingPunct="1"/>
-            <a:r>
-              <a:rPr lang="en-US" altLang="ko-KR" sz="1400" b="1" dirty="0">
-                <a:solidFill>
-                  <a:srgbClr val="000000"/>
-                </a:solidFill>
-                <a:latin typeface="+mn-ea"/>
-                <a:cs typeface="Times New Roman Bold" panose="02020803070505020304" pitchFamily="18" charset="0"/>
-              </a:rPr>
-              <a:t>VGI:+</a:t>
+            <a:pPr algn="ctr">
+              <a:defRPr sz="1300" b="1">
+                <a:latin typeface="맑은 고딕"/>
+              </a:defRPr>
+            </a:pPr>
+            <a:r>
+              <a:t>VGI:2.59</a:t>
             </a:r>
           </a:p>
         </p:txBody>
@@ -19042,16 +18630,13 @@
           </a:bodyPr>
           <a:lstStyle/>
           <a:p>
-            <a:pPr algn="ctr" eaLnBrk="1" hangingPunct="1"/>
-            <a:r>
-              <a:rPr lang="en-US" altLang="ko-KR" sz="1300" b="1" dirty="0">
-                <a:solidFill>
-                  <a:srgbClr val="000000"/>
-                </a:solidFill>
-                <a:latin typeface="+mn-ea"/>
-                <a:cs typeface="Times New Roman Bold" panose="02020803070505020304" pitchFamily="18" charset="0"/>
-              </a:rPr>
-              <a:t>IAPDI:</a:t>
+            <a:pPr algn="ctr">
+              <a:defRPr sz="1300" b="1">
+                <a:latin typeface="맑은 고딕"/>
+              </a:defRPr>
+            </a:pPr>
+            <a:r>
+              <a:t>IAPDI:81.99</a:t>
             </a:r>
           </a:p>
         </p:txBody>
@@ -19265,16 +18850,13 @@
           </a:bodyPr>
           <a:lstStyle/>
           <a:p>
-            <a:pPr eaLnBrk="1" hangingPunct="1"/>
-            <a:r>
-              <a:rPr lang="en-US" altLang="ko-KR" sz="1300" b="1" dirty="0">
-                <a:solidFill>
-                  <a:srgbClr val="000000"/>
-                </a:solidFill>
-                <a:latin typeface="+mn-ea"/>
-                <a:cs typeface="Times New Roman Bold" panose="02020803070505020304" pitchFamily="18" charset="0"/>
-              </a:rPr>
-              <a:t>2APDL:</a:t>
+            <a:pPr algn="ctr">
+              <a:defRPr sz="1300" b="1">
+                <a:latin typeface="맑은 고딕"/>
+              </a:defRPr>
+            </a:pPr>
+            <a:r>
+              <a:t>2APDL:-0.66</a:t>
             </a:r>
           </a:p>
         </p:txBody>
@@ -19307,16 +18889,13 @@
           </a:bodyPr>
           <a:lstStyle/>
           <a:p>
-            <a:pPr eaLnBrk="1" hangingPunct="1"/>
-            <a:r>
-              <a:rPr lang="en-US" altLang="ko-KR" sz="1300" b="1" dirty="0">
-                <a:solidFill>
-                  <a:srgbClr val="000000"/>
-                </a:solidFill>
-                <a:latin typeface="+mn-ea"/>
-                <a:cs typeface="Times New Roman Bold" panose="02020803070505020304" pitchFamily="18" charset="0"/>
-              </a:rPr>
-              <a:t>IODI:</a:t>
+            <a:pPr algn="ctr">
+              <a:defRPr sz="1300" b="1">
+                <a:latin typeface="맑은 고딕"/>
+              </a:defRPr>
+            </a:pPr>
+            <a:r>
+              <a:t>IODI:72.32</a:t>
             </a:r>
           </a:p>
         </p:txBody>
@@ -19392,16 +18971,13 @@
           </a:bodyPr>
           <a:lstStyle/>
           <a:p>
-            <a:pPr eaLnBrk="1" hangingPunct="1"/>
-            <a:r>
-              <a:rPr lang="en-US" altLang="ko-KR" sz="1300" b="1" dirty="0">
-                <a:solidFill>
-                  <a:srgbClr val="000000"/>
-                </a:solidFill>
-                <a:latin typeface="+mn-ea"/>
-                <a:cs typeface="Times New Roman Bold" panose="02020803070505020304" pitchFamily="18" charset="0"/>
-              </a:rPr>
-              <a:t>VDL:</a:t>
+            <a:pPr algn="ctr">
+              <a:defRPr sz="1300" b="1">
+                <a:latin typeface="맑은 고딕"/>
+              </a:defRPr>
+            </a:pPr>
+            <a:r>
+              <a:t>VDL:0.92</a:t>
             </a:r>
           </a:p>
         </p:txBody>
@@ -19477,16 +19053,13 @@
           </a:bodyPr>
           <a:lstStyle/>
           <a:p>
-            <a:pPr eaLnBrk="1" hangingPunct="1"/>
-            <a:r>
-              <a:rPr lang="en-US" altLang="ko-KR" sz="1400" b="1" dirty="0">
-                <a:solidFill>
-                  <a:srgbClr val="000000"/>
-                </a:solidFill>
-                <a:latin typeface="+mn-ea"/>
-                <a:cs typeface="Times New Roman Bold" panose="02020803070505020304" pitchFamily="18" charset="0"/>
-              </a:rPr>
-              <a:t>CEPH:</a:t>
+            <a:pPr algn="ctr">
+              <a:defRPr sz="1300" b="1">
+                <a:latin typeface="맑은 고딕"/>
+              </a:defRPr>
+            </a:pPr>
+            <a:r>
+              <a:t>CEPH RESULT</a:t>
             </a:r>
           </a:p>
         </p:txBody>
@@ -19519,16 +19092,13 @@
           </a:bodyPr>
           <a:lstStyle/>
           <a:p>
-            <a:pPr eaLnBrk="1" hangingPunct="1"/>
-            <a:r>
-              <a:rPr lang="en-US" altLang="ko-KR" sz="1400" b="1" dirty="0">
-                <a:solidFill>
-                  <a:srgbClr val="000000"/>
-                </a:solidFill>
-                <a:latin typeface="+mn-ea"/>
-                <a:cs typeface="Times New Roman Bold" panose="02020803070505020304" pitchFamily="18" charset="0"/>
-              </a:rPr>
-              <a:t>CFD:</a:t>
+            <a:pPr algn="ctr">
+              <a:defRPr sz="1300" b="1">
+                <a:latin typeface="맑은 고딕"/>
+              </a:defRPr>
+            </a:pPr>
+            <a:r>
+              <a:t>CFD:1.08</a:t>
             </a:r>
           </a:p>
         </p:txBody>
@@ -19561,15 +19131,12 @@
           </a:bodyPr>
           <a:lstStyle/>
           <a:p>
-            <a:pPr eaLnBrk="1" hangingPunct="1"/>
-            <a:r>
-              <a:rPr lang="en-US" altLang="ko-KR" sz="1600" b="1" dirty="0">
-                <a:solidFill>
-                  <a:srgbClr val="000000"/>
-                </a:solidFill>
-                <a:latin typeface="+mn-ea"/>
-                <a:cs typeface="Times New Roman Bold" panose="02020803070505020304" pitchFamily="18" charset="0"/>
-              </a:rPr>
+            <a:pPr algn="ctr">
+              <a:defRPr sz="1300" b="1">
+                <a:latin typeface="맑은 고딕"/>
+              </a:defRPr>
+            </a:pPr>
+            <a:r>
               <a:t>Extraction:</a:t>
             </a:r>
           </a:p>
@@ -19622,6 +19189,30 @@
           </a:p>
         </p:txBody>
       </p:sp>
+      <p:pic>
+        <p:nvPicPr>
+          <p:cNvPr id="3170" name="Picture 3169" descr="oral_default.jpg"/>
+          <p:cNvPicPr>
+            <a:picLocks noChangeAspect="1"/>
+          </p:cNvPicPr>
+          <p:nvPr/>
+        </p:nvPicPr>
+        <p:blipFill>
+          <a:blip r:embed="rId2"/>
+          <a:stretch>
+            <a:fillRect/>
+          </a:stretch>
+        </p:blipFill>
+        <p:spPr>
+          <a:xfrm>
+            <a:off x="2468880" y="502920"/>
+            <a:ext cx="1463040" cy="1005840"/>
+          </a:xfrm>
+          <a:prstGeom prst="rect">
+            <a:avLst/>
+          </a:prstGeom>
+        </p:spPr>
+      </p:pic>
     </p:spTree>
     <p:extLst>
       <p:ext uri="{BB962C8B-B14F-4D97-AF65-F5344CB8AC3E}">
@@ -29200,8 +28791,8 @@
         </p:blipFill>
         <p:spPr>
           <a:xfrm>
-            <a:off x="311348" y="0"/>
-            <a:ext cx="8521302" cy="6858000"/>
+            <a:off x="0" y="1145683"/>
+            <a:ext cx="9144000" cy="4566633"/>
           </a:xfrm>
           <a:prstGeom prst="rect">
             <a:avLst/>
@@ -29799,7 +29390,7 @@
       </p:grpSpPr>
       <p:pic>
         <p:nvPicPr>
-          <p:cNvPr id="2" name="Picture 1" descr="posturePhoto_1.jpg"/>
+          <p:cNvPr id="2" name="Picture 1" descr="posture_default.jpg"/>
           <p:cNvPicPr>
             <a:picLocks noChangeAspect="1"/>
           </p:cNvPicPr>
@@ -29813,8 +29404,8 @@
         </p:blipFill>
         <p:spPr>
           <a:xfrm>
-            <a:off x="453502" y="2057400"/>
-            <a:ext cx="2059248" cy="2743200"/>
+            <a:off x="457200" y="2057400"/>
+            <a:ext cx="2057400" cy="2743200"/>
           </a:xfrm>
           <a:prstGeom prst="rect">
             <a:avLst/>
@@ -29830,15 +29421,15 @@
           <p:nvPr/>
         </p:nvPicPr>
         <p:blipFill>
-          <a:blip r:embed="rId3"/>
+          <a:blip r:embed="rId2"/>
           <a:stretch>
             <a:fillRect/>
           </a:stretch>
         </p:blipFill>
         <p:spPr>
           <a:xfrm>
-            <a:off x="2512751" y="2057400"/>
-            <a:ext cx="2059248" cy="2743200"/>
+            <a:off x="2514600" y="2057400"/>
+            <a:ext cx="2057400" cy="2743200"/>
           </a:xfrm>
           <a:prstGeom prst="rect">
             <a:avLst/>
@@ -29854,7 +29445,7 @@
           <p:nvPr/>
         </p:nvPicPr>
         <p:blipFill>
-          <a:blip r:embed="rId3"/>
+          <a:blip r:embed="rId2"/>
           <a:stretch>
             <a:fillRect/>
           </a:stretch>
@@ -29862,7 +29453,7 @@
         <p:spPr>
           <a:xfrm>
             <a:off x="4572000" y="2057400"/>
-            <a:ext cx="2059248" cy="2743200"/>
+            <a:ext cx="2057400" cy="2743200"/>
           </a:xfrm>
           <a:prstGeom prst="rect">
             <a:avLst/>
@@ -29878,6 +29469,30 @@
           <p:nvPr/>
         </p:nvPicPr>
         <p:blipFill>
+          <a:blip r:embed="rId2"/>
+          <a:stretch>
+            <a:fillRect/>
+          </a:stretch>
+        </p:blipFill>
+        <p:spPr>
+          <a:xfrm>
+            <a:off x="6629400" y="2057400"/>
+            <a:ext cx="2057400" cy="2743200"/>
+          </a:xfrm>
+          <a:prstGeom prst="rect">
+            <a:avLst/>
+          </a:prstGeom>
+        </p:spPr>
+      </p:pic>
+      <p:pic>
+        <p:nvPicPr>
+          <p:cNvPr id="6" name="Picture 5" descr="posturePhoto_6.jpg"/>
+          <p:cNvPicPr>
+            <a:picLocks noChangeAspect="1"/>
+          </p:cNvPicPr>
+          <p:nvPr/>
+        </p:nvPicPr>
+        <p:blipFill>
           <a:blip r:embed="rId3"/>
           <a:stretch>
             <a:fillRect/>
@@ -29885,8 +29500,80 @@
         </p:blipFill>
         <p:spPr>
           <a:xfrm>
-            <a:off x="6631248" y="2057400"/>
-            <a:ext cx="2059248" cy="2743200"/>
+            <a:off x="449704" y="2057400"/>
+            <a:ext cx="2061147" cy="2743200"/>
+          </a:xfrm>
+          <a:prstGeom prst="rect">
+            <a:avLst/>
+          </a:prstGeom>
+        </p:spPr>
+      </p:pic>
+      <p:pic>
+        <p:nvPicPr>
+          <p:cNvPr id="7" name="Picture 6" descr="posture_default.jpg"/>
+          <p:cNvPicPr>
+            <a:picLocks noChangeAspect="1"/>
+          </p:cNvPicPr>
+          <p:nvPr/>
+        </p:nvPicPr>
+        <p:blipFill>
+          <a:blip r:embed="rId2"/>
+          <a:stretch>
+            <a:fillRect/>
+          </a:stretch>
+        </p:blipFill>
+        <p:spPr>
+          <a:xfrm>
+            <a:off x="2510852" y="2057400"/>
+            <a:ext cx="2061147" cy="2743200"/>
+          </a:xfrm>
+          <a:prstGeom prst="rect">
+            <a:avLst/>
+          </a:prstGeom>
+        </p:spPr>
+      </p:pic>
+      <p:pic>
+        <p:nvPicPr>
+          <p:cNvPr id="8" name="Picture 7" descr="posture_default.jpg"/>
+          <p:cNvPicPr>
+            <a:picLocks noChangeAspect="1"/>
+          </p:cNvPicPr>
+          <p:nvPr/>
+        </p:nvPicPr>
+        <p:blipFill>
+          <a:blip r:embed="rId2"/>
+          <a:stretch>
+            <a:fillRect/>
+          </a:stretch>
+        </p:blipFill>
+        <p:spPr>
+          <a:xfrm>
+            <a:off x="4572000" y="2057400"/>
+            <a:ext cx="2061147" cy="2743200"/>
+          </a:xfrm>
+          <a:prstGeom prst="rect">
+            <a:avLst/>
+          </a:prstGeom>
+        </p:spPr>
+      </p:pic>
+      <p:pic>
+        <p:nvPicPr>
+          <p:cNvPr id="9" name="Picture 8" descr="posture_default.jpg"/>
+          <p:cNvPicPr>
+            <a:picLocks noChangeAspect="1"/>
+          </p:cNvPicPr>
+          <p:nvPr/>
+        </p:nvPicPr>
+        <p:blipFill>
+          <a:blip r:embed="rId2"/>
+          <a:stretch>
+            <a:fillRect/>
+          </a:stretch>
+        </p:blipFill>
+        <p:spPr>
+          <a:xfrm>
+            <a:off x="6633147" y="2057400"/>
+            <a:ext cx="2061147" cy="2743200"/>
           </a:xfrm>
           <a:prstGeom prst="rect">
             <a:avLst/>

--- a/output_ppt.pptx
+++ b/output_ppt.pptx
@@ -7029,29 +7029,86 @@
             </a:lvl9pPr>
           </a:lstStyle>
           <a:p>
-            <a:pPr algn="ctr">
-              <a:defRPr sz="1500" b="1">
+            <a:pPr eaLnBrk="1" hangingPunct="1"/>
+            <a:r>
+              <a:rPr lang="en-US" altLang="ko-KR" sz="1600" b="1" dirty="0">
                 <a:solidFill>
-                  <a:srgbClr val="445474"/>
+                  <a:schemeClr val="tx2"/>
                 </a:solidFill>
-                <a:latin typeface="맑은 고딕"/>
-              </a:defRPr>
-            </a:pPr>
-            <a:r>
-              <a:t>(M)  옥수수 9y 6m 2013.01.04</a:t>
+                <a:latin typeface="+mj-ea"/>
+                <a:ea typeface="+mj-ea"/>
+                <a:cs typeface="Arial" panose="020B0604020202020204" pitchFamily="34" charset="0"/>
+              </a:rPr>
+              <a:t>  (F)</a:t>
             </a:r>
           </a:p>
           <a:p>
-            <a:pPr algn="ctr">
-              <a:defRPr sz="1500" b="1">
+            <a:pPr eaLnBrk="1" hangingPunct="1"/>
+            <a:r>
+              <a:rPr lang="en-US" altLang="ko-KR" sz="1600" b="1" dirty="0">
                 <a:solidFill>
-                  <a:srgbClr val="445474"/>
+                  <a:schemeClr val="tx2"/>
                 </a:solidFill>
-                <a:latin typeface="맑은 고딕"/>
-              </a:defRPr>
-            </a:pPr>
-            <a:r>
-              <a:t> S1.B1.D1.C1-nbt(nbt)-RM(Rt)-Fx:Ex-Fx/1-Type IV</a:t>
+                <a:latin typeface="+mj-ea"/>
+                <a:ea typeface="+mj-ea"/>
+                <a:cs typeface="Arial" panose="020B0604020202020204" pitchFamily="34" charset="0"/>
+              </a:rPr>
+              <a:t>S1.B1.D1.C1-nbt(</a:t>
+            </a:r>
+            <a:r>
+              <a:rPr lang="en-US" altLang="ko-KR" sz="1600" b="1" dirty="0" err="1">
+                <a:solidFill>
+                  <a:schemeClr val="tx2"/>
+                </a:solidFill>
+                <a:latin typeface="+mj-ea"/>
+                <a:ea typeface="+mj-ea"/>
+                <a:cs typeface="Arial" panose="020B0604020202020204" pitchFamily="34" charset="0"/>
+              </a:rPr>
+              <a:t>dbt</a:t>
+            </a:r>
+            <a:r>
+              <a:rPr lang="en-US" altLang="ko-KR" sz="1600" b="1" dirty="0">
+                <a:solidFill>
+                  <a:schemeClr val="tx2"/>
+                </a:solidFill>
+                <a:latin typeface="+mj-ea"/>
+                <a:ea typeface="+mj-ea"/>
+                <a:cs typeface="Arial" panose="020B0604020202020204" pitchFamily="34" charset="0"/>
+              </a:rPr>
+              <a:t>)-RM(Rt)-</a:t>
+            </a:r>
+            <a:r>
+              <a:rPr lang="en-US" altLang="ko-KR" sz="1600" b="1" dirty="0" err="1">
+                <a:solidFill>
+                  <a:schemeClr val="tx2"/>
+                </a:solidFill>
+                <a:latin typeface="+mj-ea"/>
+                <a:ea typeface="+mj-ea"/>
+                <a:cs typeface="Arial" panose="020B0604020202020204" pitchFamily="34" charset="0"/>
+              </a:rPr>
+              <a:t>Fx:Ex-Fx</a:t>
+            </a:r>
+            <a:r>
+              <a:rPr lang="en-US" altLang="ko-KR" sz="1600" b="1" dirty="0">
+                <a:solidFill>
+                  <a:schemeClr val="tx2"/>
+                </a:solidFill>
+                <a:latin typeface="+mj-ea"/>
+                <a:ea typeface="+mj-ea"/>
+                <a:cs typeface="Arial" panose="020B0604020202020204" pitchFamily="34" charset="0"/>
+              </a:rPr>
+              <a:t>/0-Type IV   </a:t>
+            </a:r>
+            <a:r>
+              <a:rPr lang="ko-KR" altLang="en-US" sz="1600" b="1" dirty="0">
+                <a:solidFill>
+                  <a:schemeClr val="tx2"/>
+                </a:solidFill>
+                <a:latin typeface="+mj-ea"/>
+                <a:ea typeface="+mj-ea"/>
+                <a:cs typeface="Arial" panose="020B0604020202020204" pitchFamily="34" charset="0"/>
+              </a:rPr>
+              <a:t> </a:t>
             </a:r>
           </a:p>
         </p:txBody>
@@ -12031,14 +12088,23 @@
                     <a:bodyPr/>
                     <a:lstStyle/>
                     <a:p>
-                      <a:pPr algn="ctr">
-                        <a:defRPr sz="700" b="0">
-                          <a:latin typeface="맑은 고딕"/>
-                        </a:defRPr>
-                      </a:pPr>
+                      <a:pPr algn="ctr" fontAlgn="ctr"/>
                       <a:r>
-                        <a:t>1.93</a:t>
+                        <a:rPr lang="en-US" altLang="ko-KR" sz="600" u="none" strike="noStrike">
+                          <a:effectLst/>
+                          <a:latin typeface="+mn-ea"/>
+                          <a:ea typeface="+mn-ea"/>
+                        </a:rPr>
+                        <a:t>0</a:t>
                       </a:r>
+                      <a:endParaRPr lang="en-US" altLang="ko-KR" sz="600" b="0" i="0" u="none" strike="noStrike">
+                        <a:solidFill>
+                          <a:srgbClr val="000000"/>
+                        </a:solidFill>
+                        <a:effectLst/>
+                        <a:latin typeface="+mn-ea"/>
+                        <a:ea typeface="+mn-ea"/>
+                      </a:endParaRPr>
                     </a:p>
                   </a:txBody>
                   <a:tcPr marL="0" marR="0" marT="0" marB="0" anchor="ctr">
@@ -12186,14 +12252,23 @@
                     <a:bodyPr/>
                     <a:lstStyle/>
                     <a:p>
-                      <a:pPr algn="ctr">
-                        <a:defRPr sz="700" b="0">
-                          <a:latin typeface="맑은 고딕"/>
-                        </a:defRPr>
-                      </a:pPr>
+                      <a:pPr algn="ctr" fontAlgn="ctr"/>
                       <a:r>
-                        <a:t>79.31</a:t>
+                        <a:rPr lang="en-US" altLang="ko-KR" sz="600" u="none" strike="noStrike">
+                          <a:effectLst/>
+                          <a:latin typeface="+mn-ea"/>
+                          <a:ea typeface="+mn-ea"/>
+                        </a:rPr>
+                        <a:t>0</a:t>
                       </a:r>
+                      <a:endParaRPr lang="en-US" altLang="ko-KR" sz="600" b="0" i="0" u="none" strike="noStrike">
+                        <a:solidFill>
+                          <a:srgbClr val="000000"/>
+                        </a:solidFill>
+                        <a:effectLst/>
+                        <a:latin typeface="+mn-ea"/>
+                        <a:ea typeface="+mn-ea"/>
+                      </a:endParaRPr>
                     </a:p>
                   </a:txBody>
                   <a:tcPr marL="0" marR="0" marT="0" marB="0" anchor="ctr">
@@ -12341,14 +12416,23 @@
                     <a:bodyPr/>
                     <a:lstStyle/>
                     <a:p>
-                      <a:pPr algn="ctr">
-                        <a:defRPr sz="700" b="0">
-                          <a:latin typeface="맑은 고딕"/>
-                        </a:defRPr>
-                      </a:pPr>
+                      <a:pPr algn="ctr" fontAlgn="ctr"/>
                       <a:r>
-                        <a:t>77.37</a:t>
+                        <a:rPr lang="en-US" altLang="ko-KR" sz="600" u="none" strike="noStrike" dirty="0">
+                          <a:effectLst/>
+                          <a:latin typeface="+mn-ea"/>
+                          <a:ea typeface="+mn-ea"/>
+                        </a:rPr>
+                        <a:t>0</a:t>
                       </a:r>
+                      <a:endParaRPr lang="en-US" altLang="ko-KR" sz="600" b="0" i="0" u="none" strike="noStrike" dirty="0">
+                        <a:solidFill>
+                          <a:srgbClr val="000000"/>
+                        </a:solidFill>
+                        <a:effectLst/>
+                        <a:latin typeface="+mn-ea"/>
+                        <a:ea typeface="+mn-ea"/>
+                      </a:endParaRPr>
                     </a:p>
                   </a:txBody>
                   <a:tcPr marL="0" marR="0" marT="0" marB="0" anchor="ctr">
@@ -12496,14 +12580,23 @@
                     <a:bodyPr/>
                     <a:lstStyle/>
                     <a:p>
-                      <a:pPr algn="ctr">
-                        <a:defRPr sz="700" b="0">
-                          <a:latin typeface="맑은 고딕"/>
-                        </a:defRPr>
-                      </a:pPr>
+                      <a:pPr algn="ctr" fontAlgn="ctr"/>
                       <a:r>
-                        <a:t>58.04</a:t>
+                        <a:rPr lang="en-US" altLang="ko-KR" sz="600" u="none" strike="noStrike">
+                          <a:effectLst/>
+                          <a:latin typeface="+mn-ea"/>
+                          <a:ea typeface="+mn-ea"/>
+                        </a:rPr>
+                        <a:t>0</a:t>
                       </a:r>
+                      <a:endParaRPr lang="en-US" altLang="ko-KR" sz="600" b="0" i="0" u="none" strike="noStrike">
+                        <a:solidFill>
+                          <a:srgbClr val="000000"/>
+                        </a:solidFill>
+                        <a:effectLst/>
+                        <a:latin typeface="+mn-ea"/>
+                        <a:ea typeface="+mn-ea"/>
+                      </a:endParaRPr>
                     </a:p>
                   </a:txBody>
                   <a:tcPr marL="0" marR="0" marT="0" marB="0" anchor="ctr">
@@ -12651,14 +12744,23 @@
                     <a:bodyPr/>
                     <a:lstStyle/>
                     <a:p>
-                      <a:pPr algn="ctr">
-                        <a:defRPr sz="700" b="0">
-                          <a:latin typeface="맑은 고딕"/>
-                        </a:defRPr>
-                      </a:pPr>
+                      <a:pPr algn="ctr" fontAlgn="ctr"/>
                       <a:r>
-                        <a:t>94.55</a:t>
+                        <a:rPr lang="en-US" altLang="ko-KR" sz="600" u="none" strike="noStrike">
+                          <a:effectLst/>
+                          <a:latin typeface="+mn-ea"/>
+                          <a:ea typeface="+mn-ea"/>
+                        </a:rPr>
+                        <a:t>0</a:t>
                       </a:r>
+                      <a:endParaRPr lang="en-US" altLang="ko-KR" sz="600" b="0" i="0" u="none" strike="noStrike">
+                        <a:solidFill>
+                          <a:srgbClr val="000000"/>
+                        </a:solidFill>
+                        <a:effectLst/>
+                        <a:latin typeface="+mn-ea"/>
+                        <a:ea typeface="+mn-ea"/>
+                      </a:endParaRPr>
                     </a:p>
                   </a:txBody>
                   <a:tcPr marL="0" marR="0" marT="0" marB="0" anchor="ctr">
@@ -12806,14 +12908,23 @@
                     <a:bodyPr/>
                     <a:lstStyle/>
                     <a:p>
-                      <a:pPr algn="ctr">
-                        <a:defRPr sz="700" b="0">
-                          <a:latin typeface="맑은 고딕"/>
-                        </a:defRPr>
-                      </a:pPr>
+                      <a:pPr algn="ctr" fontAlgn="ctr"/>
                       <a:r>
-                        <a:t>27.41</a:t>
+                        <a:rPr lang="en-US" altLang="ko-KR" sz="600" u="none" strike="noStrike">
+                          <a:effectLst/>
+                          <a:latin typeface="+mn-ea"/>
+                          <a:ea typeface="+mn-ea"/>
+                        </a:rPr>
+                        <a:t>0</a:t>
                       </a:r>
+                      <a:endParaRPr lang="en-US" altLang="ko-KR" sz="600" b="0" i="0" u="none" strike="noStrike">
+                        <a:solidFill>
+                          <a:srgbClr val="000000"/>
+                        </a:solidFill>
+                        <a:effectLst/>
+                        <a:latin typeface="+mn-ea"/>
+                        <a:ea typeface="+mn-ea"/>
+                      </a:endParaRPr>
                     </a:p>
                   </a:txBody>
                   <a:tcPr marL="0" marR="0" marT="0" marB="0" anchor="ctr">
@@ -12961,14 +13072,23 @@
                     <a:bodyPr/>
                     <a:lstStyle/>
                     <a:p>
-                      <a:pPr algn="ctr">
-                        <a:defRPr sz="700" b="0">
-                          <a:latin typeface="맑은 고딕"/>
-                        </a:defRPr>
-                      </a:pPr>
+                      <a:pPr algn="ctr" fontAlgn="ctr"/>
                       <a:r>
-                        <a:t>26.02</a:t>
+                        <a:rPr lang="en-US" altLang="ko-KR" sz="600" u="none" strike="noStrike" dirty="0">
+                          <a:effectLst/>
+                          <a:latin typeface="+mn-ea"/>
+                          <a:ea typeface="+mn-ea"/>
+                        </a:rPr>
+                        <a:t>0</a:t>
                       </a:r>
+                      <a:endParaRPr lang="en-US" altLang="ko-KR" sz="600" b="0" i="0" u="none" strike="noStrike" dirty="0">
+                        <a:solidFill>
+                          <a:srgbClr val="000000"/>
+                        </a:solidFill>
+                        <a:effectLst/>
+                        <a:latin typeface="+mn-ea"/>
+                        <a:ea typeface="+mn-ea"/>
+                      </a:endParaRPr>
                     </a:p>
                   </a:txBody>
                   <a:tcPr marL="0" marR="0" marT="0" marB="0" anchor="ctr">
@@ -13116,14 +13236,23 @@
                     <a:bodyPr/>
                     <a:lstStyle/>
                     <a:p>
-                      <a:pPr algn="ctr">
-                        <a:defRPr sz="700" b="0">
-                          <a:latin typeface="맑은 고딕"/>
-                        </a:defRPr>
-                      </a:pPr>
+                      <a:pPr algn="ctr" fontAlgn="ctr"/>
                       <a:r>
-                        <a:t>72.82</a:t>
+                        <a:rPr lang="en-US" altLang="ko-KR" sz="600" u="none" strike="noStrike">
+                          <a:effectLst/>
+                          <a:latin typeface="+mn-ea"/>
+                          <a:ea typeface="+mn-ea"/>
+                        </a:rPr>
+                        <a:t>0</a:t>
                       </a:r>
+                      <a:endParaRPr lang="en-US" altLang="ko-KR" sz="600" b="0" i="0" u="none" strike="noStrike">
+                        <a:solidFill>
+                          <a:srgbClr val="000000"/>
+                        </a:solidFill>
+                        <a:effectLst/>
+                        <a:latin typeface="+mn-ea"/>
+                        <a:ea typeface="+mn-ea"/>
+                      </a:endParaRPr>
                     </a:p>
                   </a:txBody>
                   <a:tcPr marL="0" marR="0" marT="0" marB="0" anchor="ctr">
@@ -13271,14 +13400,23 @@
                     <a:bodyPr/>
                     <a:lstStyle/>
                     <a:p>
-                      <a:pPr algn="ctr">
-                        <a:defRPr sz="700" b="0">
-                          <a:latin typeface="맑은 고딕"/>
-                        </a:defRPr>
-                      </a:pPr>
+                      <a:pPr algn="ctr" fontAlgn="ctr"/>
                       <a:r>
-                        <a:t>94.6</a:t>
+                        <a:rPr lang="en-US" altLang="ko-KR" sz="600" u="none" strike="noStrike" dirty="0">
+                          <a:effectLst/>
+                          <a:latin typeface="+mn-ea"/>
+                          <a:ea typeface="+mn-ea"/>
+                        </a:rPr>
+                        <a:t>0</a:t>
                       </a:r>
+                      <a:endParaRPr lang="en-US" altLang="ko-KR" sz="600" b="0" i="0" u="none" strike="noStrike" dirty="0">
+                        <a:solidFill>
+                          <a:srgbClr val="000000"/>
+                        </a:solidFill>
+                        <a:effectLst/>
+                        <a:latin typeface="+mn-ea"/>
+                        <a:ea typeface="+mn-ea"/>
+                      </a:endParaRPr>
                     </a:p>
                   </a:txBody>
                   <a:tcPr marL="0" marR="0" marT="0" marB="0" anchor="ctr">
@@ -13426,14 +13564,23 @@
                     <a:bodyPr/>
                     <a:lstStyle/>
                     <a:p>
-                      <a:pPr algn="ctr">
-                        <a:defRPr sz="700" b="0">
-                          <a:latin typeface="맑은 고딕"/>
-                        </a:defRPr>
-                      </a:pPr>
+                      <a:pPr algn="ctr" fontAlgn="ctr"/>
                       <a:r>
-                        <a:t>0.08</a:t>
+                        <a:rPr lang="en-US" altLang="ko-KR" sz="600" u="none" strike="noStrike" dirty="0">
+                          <a:effectLst/>
+                          <a:latin typeface="+mn-ea"/>
+                          <a:ea typeface="+mn-ea"/>
+                        </a:rPr>
+                        <a:t>0</a:t>
                       </a:r>
+                      <a:endParaRPr lang="en-US" altLang="ko-KR" sz="600" b="0" i="0" u="none" strike="noStrike" dirty="0">
+                        <a:solidFill>
+                          <a:srgbClr val="000000"/>
+                        </a:solidFill>
+                        <a:effectLst/>
+                        <a:latin typeface="+mn-ea"/>
+                        <a:ea typeface="+mn-ea"/>
+                      </a:endParaRPr>
                     </a:p>
                   </a:txBody>
                   <a:tcPr marL="0" marR="0" marT="0" marB="0" anchor="ctr">
@@ -13581,14 +13728,23 @@
                     <a:bodyPr/>
                     <a:lstStyle/>
                     <a:p>
-                      <a:pPr algn="ctr">
-                        <a:defRPr sz="700" b="0">
-                          <a:latin typeface="맑은 고딕"/>
-                        </a:defRPr>
-                      </a:pPr>
+                      <a:pPr algn="ctr" fontAlgn="ctr"/>
                       <a:r>
-                        <a:t>82.94</a:t>
+                        <a:rPr lang="en-US" altLang="ko-KR" sz="600" u="none" strike="noStrike">
+                          <a:effectLst/>
+                          <a:latin typeface="+mn-ea"/>
+                          <a:ea typeface="+mn-ea"/>
+                        </a:rPr>
+                        <a:t>0</a:t>
                       </a:r>
+                      <a:endParaRPr lang="en-US" altLang="ko-KR" sz="600" b="0" i="0" u="none" strike="noStrike">
+                        <a:solidFill>
+                          <a:srgbClr val="000000"/>
+                        </a:solidFill>
+                        <a:effectLst/>
+                        <a:latin typeface="+mn-ea"/>
+                        <a:ea typeface="+mn-ea"/>
+                      </a:endParaRPr>
                     </a:p>
                   </a:txBody>
                   <a:tcPr marL="0" marR="0" marT="0" marB="0" anchor="ctr">
@@ -13736,14 +13892,23 @@
                     <a:bodyPr/>
                     <a:lstStyle/>
                     <a:p>
-                      <a:pPr algn="ctr">
-                        <a:defRPr sz="700" b="0">
-                          <a:latin typeface="맑은 고딕"/>
-                        </a:defRPr>
-                      </a:pPr>
+                      <a:pPr algn="ctr" fontAlgn="ctr"/>
                       <a:r>
-                        <a:t>79.77</a:t>
+                        <a:rPr lang="en-US" altLang="ko-KR" sz="600" u="none" strike="noStrike" dirty="0">
+                          <a:effectLst/>
+                          <a:latin typeface="+mn-ea"/>
+                          <a:ea typeface="+mn-ea"/>
+                        </a:rPr>
+                        <a:t>0</a:t>
                       </a:r>
+                      <a:endParaRPr lang="en-US" altLang="ko-KR" sz="600" b="0" i="0" u="none" strike="noStrike" dirty="0">
+                        <a:solidFill>
+                          <a:srgbClr val="000000"/>
+                        </a:solidFill>
+                        <a:effectLst/>
+                        <a:latin typeface="+mn-ea"/>
+                        <a:ea typeface="+mn-ea"/>
+                      </a:endParaRPr>
                     </a:p>
                   </a:txBody>
                   <a:tcPr marL="0" marR="0" marT="0" marB="0" anchor="ctr">
@@ -13891,14 +14056,23 @@
                     <a:bodyPr/>
                     <a:lstStyle/>
                     <a:p>
-                      <a:pPr algn="ctr">
-                        <a:defRPr sz="700" b="0">
-                          <a:latin typeface="맑은 고딕"/>
-                        </a:defRPr>
-                      </a:pPr>
+                      <a:pPr algn="ctr" fontAlgn="ctr"/>
                       <a:r>
-                        <a:t>-5.19</a:t>
+                        <a:rPr lang="en-US" altLang="ko-KR" sz="600" u="none" strike="noStrike">
+                          <a:effectLst/>
+                          <a:latin typeface="+mn-ea"/>
+                          <a:ea typeface="+mn-ea"/>
+                        </a:rPr>
+                        <a:t>0</a:t>
                       </a:r>
+                      <a:endParaRPr lang="en-US" altLang="ko-KR" sz="600" b="0" i="0" u="none" strike="noStrike">
+                        <a:solidFill>
+                          <a:srgbClr val="000000"/>
+                        </a:solidFill>
+                        <a:effectLst/>
+                        <a:latin typeface="+mn-ea"/>
+                        <a:ea typeface="+mn-ea"/>
+                      </a:endParaRPr>
                     </a:p>
                   </a:txBody>
                   <a:tcPr marL="0" marR="0" marT="0" marB="0" anchor="ctr">
@@ -14046,14 +14220,23 @@
                     <a:bodyPr/>
                     <a:lstStyle/>
                     <a:p>
-                      <a:pPr algn="ctr">
-                        <a:defRPr sz="700" b="0">
-                          <a:latin typeface="맑은 고딕"/>
-                        </a:defRPr>
-                      </a:pPr>
+                      <a:pPr algn="ctr" fontAlgn="ctr"/>
                       <a:r>
-                        <a:t>63.1</a:t>
+                        <a:rPr lang="en-US" altLang="ko-KR" sz="600" u="none" strike="noStrike" dirty="0">
+                          <a:effectLst/>
+                          <a:latin typeface="+mn-ea"/>
+                          <a:ea typeface="+mn-ea"/>
+                        </a:rPr>
+                        <a:t>0</a:t>
                       </a:r>
+                      <a:endParaRPr lang="en-US" altLang="ko-KR" sz="600" b="0" i="0" u="none" strike="noStrike" dirty="0">
+                        <a:solidFill>
+                          <a:srgbClr val="000000"/>
+                        </a:solidFill>
+                        <a:effectLst/>
+                        <a:latin typeface="+mn-ea"/>
+                        <a:ea typeface="+mn-ea"/>
+                      </a:endParaRPr>
                     </a:p>
                   </a:txBody>
                   <a:tcPr marL="0" marR="0" marT="0" marB="0" anchor="ctr">
@@ -14201,14 +14384,23 @@
                     <a:bodyPr/>
                     <a:lstStyle/>
                     <a:p>
-                      <a:pPr algn="ctr">
-                        <a:defRPr sz="700" b="0">
-                          <a:latin typeface="맑은 고딕"/>
-                        </a:defRPr>
-                      </a:pPr>
+                      <a:pPr algn="ctr" fontAlgn="ctr"/>
                       <a:r>
-                        <a:t>128.56</a:t>
+                        <a:rPr lang="en-US" altLang="ko-KR" sz="600" u="none" strike="noStrike">
+                          <a:effectLst/>
+                          <a:latin typeface="+mn-ea"/>
+                          <a:ea typeface="+mn-ea"/>
+                        </a:rPr>
+                        <a:t>0</a:t>
                       </a:r>
+                      <a:endParaRPr lang="en-US" altLang="ko-KR" sz="600" b="0" i="0" u="none" strike="noStrike">
+                        <a:solidFill>
+                          <a:srgbClr val="000000"/>
+                        </a:solidFill>
+                        <a:effectLst/>
+                        <a:latin typeface="+mn-ea"/>
+                        <a:ea typeface="+mn-ea"/>
+                      </a:endParaRPr>
                     </a:p>
                   </a:txBody>
                   <a:tcPr marL="0" marR="0" marT="0" marB="0" anchor="ctr">
@@ -14356,14 +14548,23 @@
                     <a:bodyPr/>
                     <a:lstStyle/>
                     <a:p>
-                      <a:pPr algn="ctr">
-                        <a:defRPr sz="700" b="0">
-                          <a:latin typeface="맑은 고딕"/>
-                        </a:defRPr>
-                      </a:pPr>
+                      <a:pPr algn="ctr" fontAlgn="ctr"/>
                       <a:r>
-                        <a:t>122.81</a:t>
+                        <a:rPr lang="en-US" altLang="ko-KR" sz="600" u="none" strike="noStrike" dirty="0">
+                          <a:effectLst/>
+                          <a:latin typeface="+mn-ea"/>
+                          <a:ea typeface="+mn-ea"/>
+                        </a:rPr>
+                        <a:t>0</a:t>
                       </a:r>
+                      <a:endParaRPr lang="en-US" altLang="ko-KR" sz="600" b="0" i="0" u="none" strike="noStrike" dirty="0">
+                        <a:solidFill>
+                          <a:srgbClr val="000000"/>
+                        </a:solidFill>
+                        <a:effectLst/>
+                        <a:latin typeface="+mn-ea"/>
+                        <a:ea typeface="+mn-ea"/>
+                      </a:endParaRPr>
                     </a:p>
                   </a:txBody>
                   <a:tcPr marL="0" marR="0" marT="0" marB="0" anchor="ctr">
@@ -14511,14 +14712,23 @@
                     <a:bodyPr/>
                     <a:lstStyle/>
                     <a:p>
-                      <a:pPr algn="ctr">
-                        <a:defRPr sz="700" b="0">
-                          <a:latin typeface="맑은 고딕"/>
-                        </a:defRPr>
-                      </a:pPr>
+                      <a:pPr algn="ctr" fontAlgn="ctr"/>
                       <a:r>
-                        <a:t>5.6</a:t>
+                        <a:rPr lang="en-US" altLang="ko-KR" sz="600" u="none" strike="noStrike" dirty="0">
+                          <a:effectLst/>
+                          <a:latin typeface="+mn-ea"/>
+                          <a:ea typeface="+mn-ea"/>
+                        </a:rPr>
+                        <a:t>0</a:t>
                       </a:r>
+                      <a:endParaRPr lang="en-US" altLang="ko-KR" sz="600" b="0" i="0" u="none" strike="noStrike" dirty="0">
+                        <a:solidFill>
+                          <a:srgbClr val="000000"/>
+                        </a:solidFill>
+                        <a:effectLst/>
+                        <a:latin typeface="+mn-ea"/>
+                        <a:ea typeface="+mn-ea"/>
+                      </a:endParaRPr>
                     </a:p>
                   </a:txBody>
                   <a:tcPr marL="0" marR="0" marT="0" marB="0" anchor="ctr">
@@ -14666,14 +14876,23 @@
                     <a:bodyPr/>
                     <a:lstStyle/>
                     <a:p>
-                      <a:pPr algn="ctr">
-                        <a:defRPr sz="700" b="0">
-                          <a:latin typeface="맑은 고딕"/>
-                        </a:defRPr>
-                      </a:pPr>
+                      <a:pPr algn="ctr" fontAlgn="ctr"/>
                       <a:r>
-                        <a:t>1.4</a:t>
+                        <a:rPr lang="en-US" altLang="ko-KR" sz="600" u="none" strike="noStrike">
+                          <a:effectLst/>
+                          <a:latin typeface="+mn-ea"/>
+                          <a:ea typeface="+mn-ea"/>
+                        </a:rPr>
+                        <a:t>0</a:t>
                       </a:r>
+                      <a:endParaRPr lang="en-US" altLang="ko-KR" sz="600" b="0" i="0" u="none" strike="noStrike">
+                        <a:solidFill>
+                          <a:srgbClr val="000000"/>
+                        </a:solidFill>
+                        <a:effectLst/>
+                        <a:latin typeface="+mn-ea"/>
+                        <a:ea typeface="+mn-ea"/>
+                      </a:endParaRPr>
                     </a:p>
                   </a:txBody>
                   <a:tcPr marL="0" marR="0" marT="0" marB="0" anchor="ctr">
@@ -14821,14 +15040,23 @@
                     <a:bodyPr/>
                     <a:lstStyle/>
                     <a:p>
-                      <a:pPr algn="ctr">
-                        <a:defRPr sz="700" b="0">
-                          <a:latin typeface="맑은 고딕"/>
-                        </a:defRPr>
-                      </a:pPr>
+                      <a:pPr algn="ctr" fontAlgn="ctr"/>
                       <a:r>
-                        <a:t>34.7</a:t>
+                        <a:rPr lang="en-US" altLang="ko-KR" sz="600" u="none" strike="noStrike" dirty="0">
+                          <a:effectLst/>
+                          <a:latin typeface="+mn-ea"/>
+                          <a:ea typeface="+mn-ea"/>
+                        </a:rPr>
+                        <a:t>0</a:t>
                       </a:r>
+                      <a:endParaRPr lang="en-US" altLang="ko-KR" sz="600" b="0" i="0" u="none" strike="noStrike" dirty="0">
+                        <a:solidFill>
+                          <a:srgbClr val="000000"/>
+                        </a:solidFill>
+                        <a:effectLst/>
+                        <a:latin typeface="+mn-ea"/>
+                        <a:ea typeface="+mn-ea"/>
+                      </a:endParaRPr>
                     </a:p>
                   </a:txBody>
                   <a:tcPr marL="0" marR="0" marT="0" marB="0" anchor="ctr">
@@ -14976,14 +15204,23 @@
                     <a:bodyPr/>
                     <a:lstStyle/>
                     <a:p>
-                      <a:pPr algn="ctr">
-                        <a:defRPr sz="700" b="0">
-                          <a:latin typeface="맑은 고딕"/>
-                        </a:defRPr>
-                      </a:pPr>
+                      <a:pPr algn="ctr" fontAlgn="ctr"/>
                       <a:r>
-                        <a:t>40.15</a:t>
+                        <a:rPr lang="en-US" altLang="ko-KR" sz="600" u="none" strike="noStrike" dirty="0">
+                          <a:effectLst/>
+                          <a:latin typeface="+mn-ea"/>
+                          <a:ea typeface="+mn-ea"/>
+                        </a:rPr>
+                        <a:t>0</a:t>
                       </a:r>
+                      <a:endParaRPr lang="en-US" altLang="ko-KR" sz="600" b="0" i="0" u="none" strike="noStrike" dirty="0">
+                        <a:solidFill>
+                          <a:srgbClr val="000000"/>
+                        </a:solidFill>
+                        <a:effectLst/>
+                        <a:latin typeface="+mn-ea"/>
+                        <a:ea typeface="+mn-ea"/>
+                      </a:endParaRPr>
                     </a:p>
                   </a:txBody>
                   <a:tcPr marL="0" marR="0" marT="0" marB="0" anchor="ctr">
@@ -15131,14 +15368,23 @@
                     <a:bodyPr/>
                     <a:lstStyle/>
                     <a:p>
-                      <a:pPr algn="ctr">
-                        <a:defRPr sz="700" b="0">
-                          <a:latin typeface="맑은 고딕"/>
-                        </a:defRPr>
-                      </a:pPr>
+                      <a:pPr algn="ctr" fontAlgn="ctr"/>
                       <a:r>
-                        <a:t>57.04</a:t>
+                        <a:rPr lang="en-US" altLang="ko-KR" sz="600" u="none" strike="noStrike">
+                          <a:effectLst/>
+                          <a:latin typeface="+mn-ea"/>
+                          <a:ea typeface="+mn-ea"/>
+                        </a:rPr>
+                        <a:t>0</a:t>
                       </a:r>
+                      <a:endParaRPr lang="en-US" altLang="ko-KR" sz="600" b="0" i="0" u="none" strike="noStrike">
+                        <a:solidFill>
+                          <a:srgbClr val="000000"/>
+                        </a:solidFill>
+                        <a:effectLst/>
+                        <a:latin typeface="+mn-ea"/>
+                        <a:ea typeface="+mn-ea"/>
+                      </a:endParaRPr>
                     </a:p>
                   </a:txBody>
                   <a:tcPr marL="0" marR="0" marT="0" marB="0" anchor="ctr">
@@ -15286,14 +15532,23 @@
                     <a:bodyPr/>
                     <a:lstStyle/>
                     <a:p>
-                      <a:pPr algn="ctr">
-                        <a:defRPr sz="700" b="0">
-                          <a:latin typeface="맑은 고딕"/>
-                        </a:defRPr>
-                      </a:pPr>
+                      <a:pPr algn="ctr" fontAlgn="ctr"/>
                       <a:r>
-                        <a:t>62.79</a:t>
+                        <a:rPr lang="en-US" altLang="ko-KR" sz="600" u="none" strike="noStrike" dirty="0">
+                          <a:effectLst/>
+                          <a:latin typeface="+mn-ea"/>
+                          <a:ea typeface="+mn-ea"/>
+                        </a:rPr>
+                        <a:t>0</a:t>
                       </a:r>
+                      <a:endParaRPr lang="en-US" altLang="ko-KR" sz="600" b="0" i="0" u="none" strike="noStrike" dirty="0">
+                        <a:solidFill>
+                          <a:srgbClr val="000000"/>
+                        </a:solidFill>
+                        <a:effectLst/>
+                        <a:latin typeface="+mn-ea"/>
+                        <a:ea typeface="+mn-ea"/>
+                      </a:endParaRPr>
                     </a:p>
                   </a:txBody>
                   <a:tcPr marL="0" marR="0" marT="0" marB="0" anchor="ctr">
@@ -15444,14 +15699,23 @@
                     <a:bodyPr/>
                     <a:lstStyle/>
                     <a:p>
-                      <a:pPr algn="ctr">
-                        <a:defRPr sz="700" b="0">
-                          <a:latin typeface="맑은 고딕"/>
-                        </a:defRPr>
-                      </a:pPr>
+                      <a:pPr algn="ctr" fontAlgn="ctr"/>
                       <a:r>
-                        <a:t>30.54</a:t>
+                        <a:rPr lang="en-US" altLang="ko-KR" sz="600" u="none" strike="noStrike">
+                          <a:effectLst/>
+                          <a:latin typeface="+mn-ea"/>
+                          <a:ea typeface="+mn-ea"/>
+                        </a:rPr>
+                        <a:t>0</a:t>
                       </a:r>
+                      <a:endParaRPr lang="en-US" altLang="ko-KR" sz="600" b="0" i="0" u="none" strike="noStrike">
+                        <a:solidFill>
+                          <a:srgbClr val="000000"/>
+                        </a:solidFill>
+                        <a:effectLst/>
+                        <a:latin typeface="+mn-ea"/>
+                        <a:ea typeface="+mn-ea"/>
+                      </a:endParaRPr>
                     </a:p>
                   </a:txBody>
                   <a:tcPr marL="0" marR="0" marT="0" marB="0" anchor="ctr">
@@ -15599,14 +15863,23 @@
                     <a:bodyPr/>
                     <a:lstStyle/>
                     <a:p>
-                      <a:pPr algn="ctr">
-                        <a:defRPr sz="700" b="0">
-                          <a:latin typeface="맑은 고딕"/>
-                        </a:defRPr>
-                      </a:pPr>
+                      <a:pPr algn="ctr" fontAlgn="ctr"/>
                       <a:r>
-                        <a:t>48.21</a:t>
+                        <a:rPr lang="en-US" altLang="ko-KR" sz="600" u="none" strike="noStrike" dirty="0">
+                          <a:effectLst/>
+                          <a:latin typeface="+mn-ea"/>
+                          <a:ea typeface="+mn-ea"/>
+                        </a:rPr>
+                        <a:t>0</a:t>
                       </a:r>
+                      <a:endParaRPr lang="en-US" altLang="ko-KR" sz="600" b="0" i="0" u="none" strike="noStrike" dirty="0">
+                        <a:solidFill>
+                          <a:srgbClr val="000000"/>
+                        </a:solidFill>
+                        <a:effectLst/>
+                        <a:latin typeface="+mn-ea"/>
+                        <a:ea typeface="+mn-ea"/>
+                      </a:endParaRPr>
                     </a:p>
                   </a:txBody>
                   <a:tcPr marL="0" marR="0" marT="0" marB="0" anchor="ctr">
@@ -15754,14 +16027,23 @@
                     <a:bodyPr/>
                     <a:lstStyle/>
                     <a:p>
-                      <a:pPr algn="ctr">
-                        <a:defRPr sz="700" b="0">
-                          <a:latin typeface="맑은 고딕"/>
-                        </a:defRPr>
-                      </a:pPr>
+                      <a:pPr algn="ctr" fontAlgn="ctr"/>
                       <a:r>
-                        <a:t>35.78</a:t>
+                        <a:rPr lang="en-US" altLang="ko-KR" sz="600" u="none" strike="noStrike">
+                          <a:effectLst/>
+                          <a:latin typeface="+mn-ea"/>
+                          <a:ea typeface="+mn-ea"/>
+                        </a:rPr>
+                        <a:t>0</a:t>
                       </a:r>
+                      <a:endParaRPr lang="en-US" altLang="ko-KR" sz="600" b="0" i="0" u="none" strike="noStrike">
+                        <a:solidFill>
+                          <a:srgbClr val="000000"/>
+                        </a:solidFill>
+                        <a:effectLst/>
+                        <a:latin typeface="+mn-ea"/>
+                        <a:ea typeface="+mn-ea"/>
+                      </a:endParaRPr>
                     </a:p>
                   </a:txBody>
                   <a:tcPr marL="0" marR="0" marT="0" marB="0" anchor="ctr">
@@ -15909,14 +16191,23 @@
                     <a:bodyPr/>
                     <a:lstStyle/>
                     <a:p>
-                      <a:pPr algn="ctr">
-                        <a:defRPr sz="700" b="0">
-                          <a:latin typeface="맑은 고딕"/>
-                        </a:defRPr>
-                      </a:pPr>
+                      <a:pPr algn="ctr" fontAlgn="ctr"/>
                       <a:r>
-                        <a:t>64.61</a:t>
+                        <a:rPr lang="en-US" altLang="ko-KR" sz="600" u="none" strike="noStrike" dirty="0">
+                          <a:effectLst/>
+                          <a:latin typeface="+mn-ea"/>
+                          <a:ea typeface="+mn-ea"/>
+                        </a:rPr>
+                        <a:t>0</a:t>
                       </a:r>
+                      <a:endParaRPr lang="en-US" altLang="ko-KR" sz="600" b="0" i="0" u="none" strike="noStrike" dirty="0">
+                        <a:solidFill>
+                          <a:srgbClr val="000000"/>
+                        </a:solidFill>
+                        <a:effectLst/>
+                        <a:latin typeface="+mn-ea"/>
+                        <a:ea typeface="+mn-ea"/>
+                      </a:endParaRPr>
                     </a:p>
                   </a:txBody>
                   <a:tcPr marL="0" marR="0" marT="0" marB="0" anchor="ctr">
@@ -16064,14 +16355,23 @@
                     <a:bodyPr/>
                     <a:lstStyle/>
                     <a:p>
-                      <a:pPr algn="ctr">
-                        <a:defRPr sz="700" b="0">
-                          <a:latin typeface="맑은 고딕"/>
-                        </a:defRPr>
-                      </a:pPr>
+                      <a:pPr algn="ctr" fontAlgn="ctr"/>
                       <a:r>
-                        <a:t>65.93</a:t>
+                        <a:rPr lang="en-US" altLang="ko-KR" sz="600" u="none" strike="noStrike">
+                          <a:effectLst/>
+                          <a:latin typeface="+mn-ea"/>
+                          <a:ea typeface="+mn-ea"/>
+                        </a:rPr>
+                        <a:t>0</a:t>
                       </a:r>
+                      <a:endParaRPr lang="en-US" altLang="ko-KR" sz="600" b="0" i="0" u="none" strike="noStrike">
+                        <a:solidFill>
+                          <a:srgbClr val="000000"/>
+                        </a:solidFill>
+                        <a:effectLst/>
+                        <a:latin typeface="+mn-ea"/>
+                        <a:ea typeface="+mn-ea"/>
+                      </a:endParaRPr>
                     </a:p>
                   </a:txBody>
                   <a:tcPr marL="0" marR="0" marT="0" marB="0" anchor="ctr">
@@ -16219,14 +16519,23 @@
                     <a:bodyPr/>
                     <a:lstStyle/>
                     <a:p>
-                      <a:pPr algn="ctr">
-                        <a:defRPr sz="700" b="0">
-                          <a:latin typeface="맑은 고딕"/>
-                        </a:defRPr>
-                      </a:pPr>
+                      <a:pPr algn="ctr" fontAlgn="ctr"/>
                       <a:r>
-                        <a:t>51.12</a:t>
+                        <a:rPr lang="en-US" altLang="ko-KR" sz="600" u="none" strike="noStrike" dirty="0">
+                          <a:effectLst/>
+                          <a:latin typeface="+mn-ea"/>
+                          <a:ea typeface="+mn-ea"/>
+                        </a:rPr>
+                        <a:t>0</a:t>
                       </a:r>
+                      <a:endParaRPr lang="en-US" altLang="ko-KR" sz="600" b="0" i="0" u="none" strike="noStrike" dirty="0">
+                        <a:solidFill>
+                          <a:srgbClr val="000000"/>
+                        </a:solidFill>
+                        <a:effectLst/>
+                        <a:latin typeface="+mn-ea"/>
+                        <a:ea typeface="+mn-ea"/>
+                      </a:endParaRPr>
                     </a:p>
                   </a:txBody>
                   <a:tcPr marL="0" marR="0" marT="0" marB="0" anchor="ctr">
@@ -16374,14 +16683,23 @@
                     <a:bodyPr/>
                     <a:lstStyle/>
                     <a:p>
-                      <a:pPr algn="ctr">
-                        <a:defRPr sz="700" b="0">
-                          <a:latin typeface="맑은 고딕"/>
-                        </a:defRPr>
-                      </a:pPr>
+                      <a:pPr algn="ctr" fontAlgn="ctr"/>
                       <a:r>
-                        <a:t>72.19</a:t>
+                        <a:rPr lang="en-US" altLang="ko-KR" sz="600" u="none" strike="noStrike">
+                          <a:effectLst/>
+                          <a:latin typeface="+mn-ea"/>
+                          <a:ea typeface="+mn-ea"/>
+                        </a:rPr>
+                        <a:t>0</a:t>
                       </a:r>
+                      <a:endParaRPr lang="en-US" altLang="ko-KR" sz="600" b="0" i="0" u="none" strike="noStrike">
+                        <a:solidFill>
+                          <a:srgbClr val="000000"/>
+                        </a:solidFill>
+                        <a:effectLst/>
+                        <a:latin typeface="+mn-ea"/>
+                        <a:ea typeface="+mn-ea"/>
+                      </a:endParaRPr>
                     </a:p>
                   </a:txBody>
                   <a:tcPr marL="0" marR="0" marT="0" marB="0" anchor="ctr">
@@ -16529,14 +16847,23 @@
                     <a:bodyPr/>
                     <a:lstStyle/>
                     <a:p>
-                      <a:pPr algn="ctr">
-                        <a:defRPr sz="700" b="0">
-                          <a:latin typeface="맑은 고딕"/>
-                        </a:defRPr>
-                      </a:pPr>
+                      <a:pPr algn="ctr" fontAlgn="ctr"/>
                       <a:r>
-                        <a:t>6.26</a:t>
+                        <a:rPr lang="en-US" altLang="ko-KR" sz="600" u="none" strike="noStrike" dirty="0">
+                          <a:effectLst/>
+                          <a:latin typeface="+mn-ea"/>
+                          <a:ea typeface="+mn-ea"/>
+                        </a:rPr>
+                        <a:t>0</a:t>
                       </a:r>
+                      <a:endParaRPr lang="en-US" altLang="ko-KR" sz="600" b="0" i="0" u="none" strike="noStrike" dirty="0">
+                        <a:solidFill>
+                          <a:srgbClr val="000000"/>
+                        </a:solidFill>
+                        <a:effectLst/>
+                        <a:latin typeface="+mn-ea"/>
+                        <a:ea typeface="+mn-ea"/>
+                      </a:endParaRPr>
                     </a:p>
                   </a:txBody>
                   <a:tcPr marL="0" marR="0" marT="0" marB="0" anchor="ctr">
@@ -16684,14 +17011,23 @@
                     <a:bodyPr/>
                     <a:lstStyle/>
                     <a:p>
-                      <a:pPr algn="ctr">
-                        <a:defRPr sz="700" b="0">
-                          <a:latin typeface="맑은 고딕"/>
-                        </a:defRPr>
-                      </a:pPr>
+                      <a:pPr algn="ctr" fontAlgn="ctr"/>
                       <a:r>
-                        <a:t>49.62</a:t>
+                        <a:rPr lang="en-US" altLang="ko-KR" sz="600" u="none" strike="noStrike">
+                          <a:effectLst/>
+                          <a:latin typeface="+mn-ea"/>
+                          <a:ea typeface="+mn-ea"/>
+                        </a:rPr>
+                        <a:t>0</a:t>
                       </a:r>
+                      <a:endParaRPr lang="en-US" altLang="ko-KR" sz="600" b="0" i="0" u="none" strike="noStrike">
+                        <a:solidFill>
+                          <a:srgbClr val="000000"/>
+                        </a:solidFill>
+                        <a:effectLst/>
+                        <a:latin typeface="+mn-ea"/>
+                        <a:ea typeface="+mn-ea"/>
+                      </a:endParaRPr>
                     </a:p>
                   </a:txBody>
                   <a:tcPr marL="0" marR="0" marT="0" marB="0" anchor="ctr">
@@ -16839,14 +17175,23 @@
                     <a:bodyPr/>
                     <a:lstStyle/>
                     <a:p>
-                      <a:pPr algn="ctr">
-                        <a:defRPr sz="700" b="0">
-                          <a:latin typeface="맑은 고딕"/>
-                        </a:defRPr>
-                      </a:pPr>
+                      <a:pPr algn="ctr" fontAlgn="ctr"/>
                       <a:r>
-                        <a:t>70.57</a:t>
+                        <a:rPr lang="en-US" altLang="ko-KR" sz="600" u="none" strike="noStrike">
+                          <a:effectLst/>
+                          <a:latin typeface="+mn-ea"/>
+                          <a:ea typeface="+mn-ea"/>
+                        </a:rPr>
+                        <a:t>0</a:t>
                       </a:r>
+                      <a:endParaRPr lang="en-US" altLang="ko-KR" sz="600" b="0" i="0" u="none" strike="noStrike">
+                        <a:solidFill>
+                          <a:srgbClr val="000000"/>
+                        </a:solidFill>
+                        <a:effectLst/>
+                        <a:latin typeface="+mn-ea"/>
+                        <a:ea typeface="+mn-ea"/>
+                      </a:endParaRPr>
                     </a:p>
                   </a:txBody>
                   <a:tcPr marL="0" marR="0" marT="0" marB="0" anchor="ctr">
@@ -16994,14 +17339,23 @@
                     <a:bodyPr/>
                     <a:lstStyle/>
                     <a:p>
-                      <a:pPr algn="ctr">
-                        <a:defRPr sz="700" b="0">
-                          <a:latin typeface="맑은 고딕"/>
-                        </a:defRPr>
-                      </a:pPr>
+                      <a:pPr algn="ctr" fontAlgn="ctr"/>
                       <a:r>
-                        <a:t>50.28</a:t>
+                        <a:rPr lang="en-US" altLang="ko-KR" sz="600" u="none" strike="noStrike" dirty="0">
+                          <a:effectLst/>
+                          <a:latin typeface="+mn-ea"/>
+                          <a:ea typeface="+mn-ea"/>
+                        </a:rPr>
+                        <a:t>0</a:t>
                       </a:r>
+                      <a:endParaRPr lang="en-US" altLang="ko-KR" sz="600" b="0" i="0" u="none" strike="noStrike" dirty="0">
+                        <a:solidFill>
+                          <a:srgbClr val="000000"/>
+                        </a:solidFill>
+                        <a:effectLst/>
+                        <a:latin typeface="+mn-ea"/>
+                        <a:ea typeface="+mn-ea"/>
+                      </a:endParaRPr>
                     </a:p>
                   </a:txBody>
                   <a:tcPr marL="0" marR="0" marT="0" marB="0" anchor="ctr">
@@ -17149,14 +17503,23 @@
                     <a:bodyPr/>
                     <a:lstStyle/>
                     <a:p>
-                      <a:pPr algn="ctr">
-                        <a:defRPr sz="700" b="0">
-                          <a:latin typeface="맑은 고딕"/>
-                        </a:defRPr>
-                      </a:pPr>
+                      <a:pPr algn="ctr" fontAlgn="ctr"/>
                       <a:r>
-                        <a:t>11.31</a:t>
+                        <a:rPr lang="en-US" altLang="ko-KR" sz="600" u="none" strike="noStrike" dirty="0">
+                          <a:effectLst/>
+                          <a:latin typeface="+mn-ea"/>
+                          <a:ea typeface="+mn-ea"/>
+                        </a:rPr>
+                        <a:t>0</a:t>
                       </a:r>
+                      <a:endParaRPr lang="en-US" altLang="ko-KR" sz="600" b="0" i="0" u="none" strike="noStrike" dirty="0">
+                        <a:solidFill>
+                          <a:srgbClr val="000000"/>
+                        </a:solidFill>
+                        <a:effectLst/>
+                        <a:latin typeface="+mn-ea"/>
+                        <a:ea typeface="+mn-ea"/>
+                      </a:endParaRPr>
                     </a:p>
                   </a:txBody>
                   <a:tcPr marL="0" marR="0" marT="0" marB="0" anchor="ctr">
@@ -17304,14 +17667,23 @@
                     <a:bodyPr/>
                     <a:lstStyle/>
                     <a:p>
-                      <a:pPr algn="ctr">
-                        <a:defRPr sz="700" b="0">
-                          <a:latin typeface="맑은 고딕"/>
-                        </a:defRPr>
-                      </a:pPr>
+                      <a:pPr algn="ctr" fontAlgn="ctr"/>
                       <a:r>
-                        <a:t>91.08</a:t>
+                        <a:rPr lang="en-US" altLang="ko-KR" sz="600" u="none" strike="noStrike" dirty="0">
+                          <a:effectLst/>
+                          <a:latin typeface="+mn-ea"/>
+                          <a:ea typeface="+mn-ea"/>
+                        </a:rPr>
+                        <a:t>0</a:t>
                       </a:r>
+                      <a:endParaRPr lang="en-US" altLang="ko-KR" sz="600" b="0" i="0" u="none" strike="noStrike" dirty="0">
+                        <a:solidFill>
+                          <a:srgbClr val="000000"/>
+                        </a:solidFill>
+                        <a:effectLst/>
+                        <a:latin typeface="+mn-ea"/>
+                        <a:ea typeface="+mn-ea"/>
+                      </a:endParaRPr>
                     </a:p>
                   </a:txBody>
                   <a:tcPr marL="0" marR="0" marT="0" marB="0" anchor="ctr">
@@ -17459,14 +17831,23 @@
                     <a:bodyPr/>
                     <a:lstStyle/>
                     <a:p>
-                      <a:pPr algn="ctr">
-                        <a:defRPr sz="700" b="0">
-                          <a:latin typeface="맑은 고딕"/>
-                        </a:defRPr>
-                      </a:pPr>
+                      <a:pPr algn="ctr" fontAlgn="ctr"/>
                       <a:r>
-                        <a:t>0.61</a:t>
+                        <a:rPr lang="en-US" altLang="ko-KR" sz="600" u="none" strike="noStrike">
+                          <a:effectLst/>
+                          <a:latin typeface="+mn-ea"/>
+                          <a:ea typeface="+mn-ea"/>
+                        </a:rPr>
+                        <a:t>0</a:t>
                       </a:r>
+                      <a:endParaRPr lang="en-US" altLang="ko-KR" sz="600" b="0" i="0" u="none" strike="noStrike">
+                        <a:solidFill>
+                          <a:srgbClr val="000000"/>
+                        </a:solidFill>
+                        <a:effectLst/>
+                        <a:latin typeface="+mn-ea"/>
+                        <a:ea typeface="+mn-ea"/>
+                      </a:endParaRPr>
                     </a:p>
                   </a:txBody>
                   <a:tcPr marL="0" marR="0" marT="0" marB="0" anchor="ctr">
@@ -17614,14 +17995,23 @@
                     <a:bodyPr/>
                     <a:lstStyle/>
                     <a:p>
-                      <a:pPr algn="ctr">
-                        <a:defRPr sz="700" b="0">
-                          <a:latin typeface="맑은 고딕"/>
-                        </a:defRPr>
-                      </a:pPr>
+                      <a:pPr algn="ctr" fontAlgn="ctr"/>
                       <a:r>
-                        <a:t>6.89</a:t>
+                        <a:rPr lang="en-US" altLang="ko-KR" sz="600" u="none" strike="noStrike" dirty="0">
+                          <a:effectLst/>
+                          <a:latin typeface="+mn-ea"/>
+                          <a:ea typeface="+mn-ea"/>
+                        </a:rPr>
+                        <a:t>0</a:t>
                       </a:r>
+                      <a:endParaRPr lang="en-US" altLang="ko-KR" sz="600" b="0" i="0" u="none" strike="noStrike" dirty="0">
+                        <a:solidFill>
+                          <a:srgbClr val="000000"/>
+                        </a:solidFill>
+                        <a:effectLst/>
+                        <a:latin typeface="+mn-ea"/>
+                        <a:ea typeface="+mn-ea"/>
+                      </a:endParaRPr>
                     </a:p>
                   </a:txBody>
                   <a:tcPr marL="0" marR="0" marT="0" marB="0" anchor="ctr">
@@ -17769,14 +18159,23 @@
                     <a:bodyPr/>
                     <a:lstStyle/>
                     <a:p>
-                      <a:pPr algn="ctr">
-                        <a:defRPr sz="700" b="0">
-                          <a:latin typeface="맑은 고딕"/>
-                        </a:defRPr>
-                      </a:pPr>
+                      <a:pPr algn="ctr" fontAlgn="ctr"/>
                       <a:r>
-                        <a:t>81.17</a:t>
+                        <a:rPr lang="en-US" altLang="ko-KR" sz="600" u="none" strike="noStrike" dirty="0">
+                          <a:effectLst/>
+                          <a:latin typeface="+mn-ea"/>
+                          <a:ea typeface="+mn-ea"/>
+                        </a:rPr>
+                        <a:t>0</a:t>
                       </a:r>
+                      <a:endParaRPr lang="en-US" altLang="ko-KR" sz="600" b="0" i="0" u="none" strike="noStrike" dirty="0">
+                        <a:solidFill>
+                          <a:srgbClr val="000000"/>
+                        </a:solidFill>
+                        <a:effectLst/>
+                        <a:latin typeface="+mn-ea"/>
+                        <a:ea typeface="+mn-ea"/>
+                      </a:endParaRPr>
                     </a:p>
                   </a:txBody>
                   <a:tcPr marL="0" marR="0" marT="0" marB="0" anchor="ctr">
@@ -17924,14 +18323,23 @@
                     <a:bodyPr/>
                     <a:lstStyle/>
                     <a:p>
-                      <a:pPr algn="ctr">
-                        <a:defRPr sz="700" b="0">
-                          <a:latin typeface="맑은 고딕"/>
-                        </a:defRPr>
-                      </a:pPr>
+                      <a:pPr algn="ctr" fontAlgn="ctr"/>
                       <a:r>
-                        <a:t>74.22</a:t>
+                        <a:rPr lang="en-US" altLang="ko-KR" sz="600" u="none" strike="noStrike" dirty="0">
+                          <a:effectLst/>
+                          <a:latin typeface="+mn-ea"/>
+                          <a:ea typeface="+mn-ea"/>
+                        </a:rPr>
+                        <a:t>0</a:t>
                       </a:r>
+                      <a:endParaRPr lang="en-US" altLang="ko-KR" sz="600" b="0" i="0" u="none" strike="noStrike" dirty="0">
+                        <a:solidFill>
+                          <a:srgbClr val="000000"/>
+                        </a:solidFill>
+                        <a:effectLst/>
+                        <a:latin typeface="+mn-ea"/>
+                        <a:ea typeface="+mn-ea"/>
+                      </a:endParaRPr>
                     </a:p>
                   </a:txBody>
                   <a:tcPr marL="0" marR="0" marT="0" marB="0" anchor="ctr">
@@ -18049,12 +18457,11 @@
           <a:bodyPr rtlCol="0" anchor="ctr"/>
           <a:lstStyle/>
           <a:p>
-            <a:pPr algn="ctr">
-              <a:defRPr sz="1300" b="1">
-                <a:latin typeface="맑은 고딕"/>
-              </a:defRPr>
-            </a:pPr>
-            <a:r>
+            <a:r>
+              <a:rPr lang="en-US" altLang="ko-KR" sz="1400" b="1" dirty="0">
+                <a:latin typeface="+mj-ea"/>
+                <a:ea typeface="+mj-ea"/>
+              </a:rPr>
               <a:t>C/C &amp; Main problem</a:t>
             </a:r>
           </a:p>
@@ -18109,12 +18516,11 @@
           <a:bodyPr rtlCol="0" anchor="ctr"/>
           <a:lstStyle/>
           <a:p>
-            <a:pPr algn="ctr">
-              <a:defRPr sz="1300" b="1">
-                <a:latin typeface="맑은 고딕"/>
-              </a:defRPr>
-            </a:pPr>
-            <a:r>
+            <a:r>
+              <a:rPr lang="en-US" altLang="ko-KR" sz="1200" b="1" dirty="0">
+                <a:latin typeface="+mj-ea"/>
+                <a:ea typeface="+mj-ea"/>
+              </a:rPr>
               <a:t>MPH:</a:t>
             </a:r>
           </a:p>
@@ -18208,13 +18614,16 @@
           </a:bodyPr>
           <a:lstStyle/>
           <a:p>
-            <a:pPr algn="ctr">
-              <a:defRPr sz="1300" b="1">
-                <a:latin typeface="맑은 고딕"/>
-              </a:defRPr>
-            </a:pPr>
-            <a:r>
-              <a:t>HGI:2.31</a:t>
+            <a:pPr eaLnBrk="1" hangingPunct="1"/>
+            <a:r>
+              <a:rPr lang="en-US" altLang="ko-KR" sz="1400" b="1" dirty="0">
+                <a:solidFill>
+                  <a:srgbClr val="000000"/>
+                </a:solidFill>
+                <a:latin typeface="+mn-ea"/>
+                <a:cs typeface="Times New Roman Bold" panose="02020803070505020304" pitchFamily="18" charset="0"/>
+              </a:rPr>
+              <a:t>HGI:+</a:t>
             </a:r>
           </a:p>
         </p:txBody>
@@ -18298,13 +18707,16 @@
           </a:bodyPr>
           <a:lstStyle/>
           <a:p>
-            <a:pPr algn="ctr">
-              <a:defRPr sz="1300" b="1">
-                <a:latin typeface="맑은 고딕"/>
-              </a:defRPr>
-            </a:pPr>
-            <a:r>
-              <a:t>VGI:2.59</a:t>
+            <a:pPr eaLnBrk="1" hangingPunct="1"/>
+            <a:r>
+              <a:rPr lang="en-US" altLang="ko-KR" sz="1400" b="1" dirty="0">
+                <a:solidFill>
+                  <a:srgbClr val="000000"/>
+                </a:solidFill>
+                <a:latin typeface="+mn-ea"/>
+                <a:cs typeface="Times New Roman Bold" panose="02020803070505020304" pitchFamily="18" charset="0"/>
+              </a:rPr>
+              <a:t>VGI:+</a:t>
             </a:r>
           </a:p>
         </p:txBody>
@@ -18630,13 +19042,16 @@
           </a:bodyPr>
           <a:lstStyle/>
           <a:p>
-            <a:pPr algn="ctr">
-              <a:defRPr sz="1300" b="1">
-                <a:latin typeface="맑은 고딕"/>
-              </a:defRPr>
-            </a:pPr>
-            <a:r>
-              <a:t>IAPDI:81.99</a:t>
+            <a:pPr algn="ctr" eaLnBrk="1" hangingPunct="1"/>
+            <a:r>
+              <a:rPr lang="en-US" altLang="ko-KR" sz="1300" b="1" dirty="0">
+                <a:solidFill>
+                  <a:srgbClr val="000000"/>
+                </a:solidFill>
+                <a:latin typeface="+mn-ea"/>
+                <a:cs typeface="Times New Roman Bold" panose="02020803070505020304" pitchFamily="18" charset="0"/>
+              </a:rPr>
+              <a:t>IAPDI:</a:t>
             </a:r>
           </a:p>
         </p:txBody>
@@ -18850,13 +19265,16 @@
           </a:bodyPr>
           <a:lstStyle/>
           <a:p>
-            <a:pPr algn="ctr">
-              <a:defRPr sz="1300" b="1">
-                <a:latin typeface="맑은 고딕"/>
-              </a:defRPr>
-            </a:pPr>
-            <a:r>
-              <a:t>2APDL:-0.66</a:t>
+            <a:pPr eaLnBrk="1" hangingPunct="1"/>
+            <a:r>
+              <a:rPr lang="en-US" altLang="ko-KR" sz="1300" b="1" dirty="0">
+                <a:solidFill>
+                  <a:srgbClr val="000000"/>
+                </a:solidFill>
+                <a:latin typeface="+mn-ea"/>
+                <a:cs typeface="Times New Roman Bold" panose="02020803070505020304" pitchFamily="18" charset="0"/>
+              </a:rPr>
+              <a:t>2APDL:</a:t>
             </a:r>
           </a:p>
         </p:txBody>
@@ -18889,13 +19307,16 @@
           </a:bodyPr>
           <a:lstStyle/>
           <a:p>
-            <a:pPr algn="ctr">
-              <a:defRPr sz="1300" b="1">
-                <a:latin typeface="맑은 고딕"/>
-              </a:defRPr>
-            </a:pPr>
-            <a:r>
-              <a:t>IODI:72.32</a:t>
+            <a:pPr eaLnBrk="1" hangingPunct="1"/>
+            <a:r>
+              <a:rPr lang="en-US" altLang="ko-KR" sz="1300" b="1" dirty="0">
+                <a:solidFill>
+                  <a:srgbClr val="000000"/>
+                </a:solidFill>
+                <a:latin typeface="+mn-ea"/>
+                <a:cs typeface="Times New Roman Bold" panose="02020803070505020304" pitchFamily="18" charset="0"/>
+              </a:rPr>
+              <a:t>IODI:</a:t>
             </a:r>
           </a:p>
         </p:txBody>
@@ -18971,13 +19392,16 @@
           </a:bodyPr>
           <a:lstStyle/>
           <a:p>
-            <a:pPr algn="ctr">
-              <a:defRPr sz="1300" b="1">
-                <a:latin typeface="맑은 고딕"/>
-              </a:defRPr>
-            </a:pPr>
-            <a:r>
-              <a:t>VDL:0.92</a:t>
+            <a:pPr eaLnBrk="1" hangingPunct="1"/>
+            <a:r>
+              <a:rPr lang="en-US" altLang="ko-KR" sz="1300" b="1" dirty="0">
+                <a:solidFill>
+                  <a:srgbClr val="000000"/>
+                </a:solidFill>
+                <a:latin typeface="+mn-ea"/>
+                <a:cs typeface="Times New Roman Bold" panose="02020803070505020304" pitchFamily="18" charset="0"/>
+              </a:rPr>
+              <a:t>VDL:</a:t>
             </a:r>
           </a:p>
         </p:txBody>
@@ -19053,13 +19477,16 @@
           </a:bodyPr>
           <a:lstStyle/>
           <a:p>
-            <a:pPr algn="ctr">
-              <a:defRPr sz="1300" b="1">
-                <a:latin typeface="맑은 고딕"/>
-              </a:defRPr>
-            </a:pPr>
-            <a:r>
-              <a:t>CEPH RESULT</a:t>
+            <a:pPr eaLnBrk="1" hangingPunct="1"/>
+            <a:r>
+              <a:rPr lang="en-US" altLang="ko-KR" sz="1400" b="1" dirty="0">
+                <a:solidFill>
+                  <a:srgbClr val="000000"/>
+                </a:solidFill>
+                <a:latin typeface="+mn-ea"/>
+                <a:cs typeface="Times New Roman Bold" panose="02020803070505020304" pitchFamily="18" charset="0"/>
+              </a:rPr>
+              <a:t>CEPH:</a:t>
             </a:r>
           </a:p>
         </p:txBody>
@@ -19092,13 +19519,16 @@
           </a:bodyPr>
           <a:lstStyle/>
           <a:p>
-            <a:pPr algn="ctr">
-              <a:defRPr sz="1300" b="1">
-                <a:latin typeface="맑은 고딕"/>
-              </a:defRPr>
-            </a:pPr>
-            <a:r>
-              <a:t>CFD:1.08</a:t>
+            <a:pPr eaLnBrk="1" hangingPunct="1"/>
+            <a:r>
+              <a:rPr lang="en-US" altLang="ko-KR" sz="1400" b="1" dirty="0">
+                <a:solidFill>
+                  <a:srgbClr val="000000"/>
+                </a:solidFill>
+                <a:latin typeface="+mn-ea"/>
+                <a:cs typeface="Times New Roman Bold" panose="02020803070505020304" pitchFamily="18" charset="0"/>
+              </a:rPr>
+              <a:t>CFD:</a:t>
             </a:r>
           </a:p>
         </p:txBody>
@@ -19131,12 +19561,15 @@
           </a:bodyPr>
           <a:lstStyle/>
           <a:p>
-            <a:pPr algn="ctr">
-              <a:defRPr sz="1300" b="1">
-                <a:latin typeface="맑은 고딕"/>
-              </a:defRPr>
-            </a:pPr>
-            <a:r>
+            <a:pPr eaLnBrk="1" hangingPunct="1"/>
+            <a:r>
+              <a:rPr lang="en-US" altLang="ko-KR" sz="1600" b="1" dirty="0">
+                <a:solidFill>
+                  <a:srgbClr val="000000"/>
+                </a:solidFill>
+                <a:latin typeface="+mn-ea"/>
+                <a:cs typeface="Times New Roman Bold" panose="02020803070505020304" pitchFamily="18" charset="0"/>
+              </a:rPr>
               <a:t>Extraction:</a:t>
             </a:r>
           </a:p>
@@ -19189,30 +19622,6 @@
           </a:p>
         </p:txBody>
       </p:sp>
-      <p:pic>
-        <p:nvPicPr>
-          <p:cNvPr id="3170" name="Picture 3169" descr="oral_default.jpg"/>
-          <p:cNvPicPr>
-            <a:picLocks noChangeAspect="1"/>
-          </p:cNvPicPr>
-          <p:nvPr/>
-        </p:nvPicPr>
-        <p:blipFill>
-          <a:blip r:embed="rId2"/>
-          <a:stretch>
-            <a:fillRect/>
-          </a:stretch>
-        </p:blipFill>
-        <p:spPr>
-          <a:xfrm>
-            <a:off x="2468880" y="502920"/>
-            <a:ext cx="1463040" cy="1005840"/>
-          </a:xfrm>
-          <a:prstGeom prst="rect">
-            <a:avLst/>
-          </a:prstGeom>
-        </p:spPr>
-      </p:pic>
     </p:spTree>
     <p:extLst>
       <p:ext uri="{BB962C8B-B14F-4D97-AF65-F5344CB8AC3E}">
@@ -28791,8 +29200,8 @@
         </p:blipFill>
         <p:spPr>
           <a:xfrm>
-            <a:off x="0" y="1145683"/>
-            <a:ext cx="9144000" cy="4566633"/>
+            <a:off x="311348" y="0"/>
+            <a:ext cx="8521302" cy="6858000"/>
           </a:xfrm>
           <a:prstGeom prst="rect">
             <a:avLst/>
@@ -29282,7 +29691,7 @@
       </p:grpSpPr>
       <p:pic>
         <p:nvPicPr>
-          <p:cNvPr id="2" name="Picture 1" descr="default_image.jpg"/>
+          <p:cNvPr id="2" name="Picture 1" descr="lateral_ceph.jpg"/>
           <p:cNvPicPr>
             <a:picLocks noChangeAspect="1"/>
           </p:cNvPicPr>
@@ -29296,8 +29705,8 @@
         </p:blipFill>
         <p:spPr>
           <a:xfrm>
-            <a:off x="2275973" y="0"/>
-            <a:ext cx="4592052" cy="6858000"/>
+            <a:off x="311348" y="0"/>
+            <a:ext cx="8521302" cy="6858000"/>
           </a:xfrm>
           <a:prstGeom prst="rect">
             <a:avLst/>
@@ -29484,102 +29893,6 @@
           </a:prstGeom>
         </p:spPr>
       </p:pic>
-      <p:pic>
-        <p:nvPicPr>
-          <p:cNvPr id="6" name="Picture 5" descr="posturePhoto_6.jpg"/>
-          <p:cNvPicPr>
-            <a:picLocks noChangeAspect="1"/>
-          </p:cNvPicPr>
-          <p:nvPr/>
-        </p:nvPicPr>
-        <p:blipFill>
-          <a:blip r:embed="rId3"/>
-          <a:stretch>
-            <a:fillRect/>
-          </a:stretch>
-        </p:blipFill>
-        <p:spPr>
-          <a:xfrm>
-            <a:off x="449704" y="2057400"/>
-            <a:ext cx="2061147" cy="2743200"/>
-          </a:xfrm>
-          <a:prstGeom prst="rect">
-            <a:avLst/>
-          </a:prstGeom>
-        </p:spPr>
-      </p:pic>
-      <p:pic>
-        <p:nvPicPr>
-          <p:cNvPr id="7" name="Picture 6" descr="posture_default.jpg"/>
-          <p:cNvPicPr>
-            <a:picLocks noChangeAspect="1"/>
-          </p:cNvPicPr>
-          <p:nvPr/>
-        </p:nvPicPr>
-        <p:blipFill>
-          <a:blip r:embed="rId2"/>
-          <a:stretch>
-            <a:fillRect/>
-          </a:stretch>
-        </p:blipFill>
-        <p:spPr>
-          <a:xfrm>
-            <a:off x="2510852" y="2057400"/>
-            <a:ext cx="2061147" cy="2743200"/>
-          </a:xfrm>
-          <a:prstGeom prst="rect">
-            <a:avLst/>
-          </a:prstGeom>
-        </p:spPr>
-      </p:pic>
-      <p:pic>
-        <p:nvPicPr>
-          <p:cNvPr id="8" name="Picture 7" descr="posture_default.jpg"/>
-          <p:cNvPicPr>
-            <a:picLocks noChangeAspect="1"/>
-          </p:cNvPicPr>
-          <p:nvPr/>
-        </p:nvPicPr>
-        <p:blipFill>
-          <a:blip r:embed="rId2"/>
-          <a:stretch>
-            <a:fillRect/>
-          </a:stretch>
-        </p:blipFill>
-        <p:spPr>
-          <a:xfrm>
-            <a:off x="4572000" y="2057400"/>
-            <a:ext cx="2061147" cy="2743200"/>
-          </a:xfrm>
-          <a:prstGeom prst="rect">
-            <a:avLst/>
-          </a:prstGeom>
-        </p:spPr>
-      </p:pic>
-      <p:pic>
-        <p:nvPicPr>
-          <p:cNvPr id="9" name="Picture 8" descr="posture_default.jpg"/>
-          <p:cNvPicPr>
-            <a:picLocks noChangeAspect="1"/>
-          </p:cNvPicPr>
-          <p:nvPr/>
-        </p:nvPicPr>
-        <p:blipFill>
-          <a:blip r:embed="rId2"/>
-          <a:stretch>
-            <a:fillRect/>
-          </a:stretch>
-        </p:blipFill>
-        <p:spPr>
-          <a:xfrm>
-            <a:off x="6633147" y="2057400"/>
-            <a:ext cx="2061147" cy="2743200"/>
-          </a:xfrm>
-          <a:prstGeom prst="rect">
-            <a:avLst/>
-          </a:prstGeom>
-        </p:spPr>
-      </p:pic>
     </p:spTree>
     <p:extLst>
       <p:ext uri="{BB962C8B-B14F-4D97-AF65-F5344CB8AC3E}">
@@ -29610,6 +29923,102 @@
           <a:chExt cx="0" cy="0"/>
         </a:xfrm>
       </p:grpSpPr>
+      <p:pic>
+        <p:nvPicPr>
+          <p:cNvPr id="2" name="Picture 1" descr="posture_default.jpg"/>
+          <p:cNvPicPr>
+            <a:picLocks noChangeAspect="1"/>
+          </p:cNvPicPr>
+          <p:nvPr/>
+        </p:nvPicPr>
+        <p:blipFill>
+          <a:blip r:embed="rId2"/>
+          <a:stretch>
+            <a:fillRect/>
+          </a:stretch>
+        </p:blipFill>
+        <p:spPr>
+          <a:xfrm>
+            <a:off x="457200" y="2057400"/>
+            <a:ext cx="2057400" cy="2743200"/>
+          </a:xfrm>
+          <a:prstGeom prst="rect">
+            <a:avLst/>
+          </a:prstGeom>
+        </p:spPr>
+      </p:pic>
+      <p:pic>
+        <p:nvPicPr>
+          <p:cNvPr id="3" name="Picture 2" descr="posture_default.jpg"/>
+          <p:cNvPicPr>
+            <a:picLocks noChangeAspect="1"/>
+          </p:cNvPicPr>
+          <p:nvPr/>
+        </p:nvPicPr>
+        <p:blipFill>
+          <a:blip r:embed="rId2"/>
+          <a:stretch>
+            <a:fillRect/>
+          </a:stretch>
+        </p:blipFill>
+        <p:spPr>
+          <a:xfrm>
+            <a:off x="2514600" y="2057400"/>
+            <a:ext cx="2057400" cy="2743200"/>
+          </a:xfrm>
+          <a:prstGeom prst="rect">
+            <a:avLst/>
+          </a:prstGeom>
+        </p:spPr>
+      </p:pic>
+      <p:pic>
+        <p:nvPicPr>
+          <p:cNvPr id="4" name="Picture 3" descr="posture_default.jpg"/>
+          <p:cNvPicPr>
+            <a:picLocks noChangeAspect="1"/>
+          </p:cNvPicPr>
+          <p:nvPr/>
+        </p:nvPicPr>
+        <p:blipFill>
+          <a:blip r:embed="rId2"/>
+          <a:stretch>
+            <a:fillRect/>
+          </a:stretch>
+        </p:blipFill>
+        <p:spPr>
+          <a:xfrm>
+            <a:off x="4572000" y="2057400"/>
+            <a:ext cx="2057400" cy="2743200"/>
+          </a:xfrm>
+          <a:prstGeom prst="rect">
+            <a:avLst/>
+          </a:prstGeom>
+        </p:spPr>
+      </p:pic>
+      <p:pic>
+        <p:nvPicPr>
+          <p:cNvPr id="5" name="Picture 4" descr="posture_default.jpg"/>
+          <p:cNvPicPr>
+            <a:picLocks noChangeAspect="1"/>
+          </p:cNvPicPr>
+          <p:nvPr/>
+        </p:nvPicPr>
+        <p:blipFill>
+          <a:blip r:embed="rId2"/>
+          <a:stretch>
+            <a:fillRect/>
+          </a:stretch>
+        </p:blipFill>
+        <p:spPr>
+          <a:xfrm>
+            <a:off x="6629400" y="2057400"/>
+            <a:ext cx="2057400" cy="2743200"/>
+          </a:xfrm>
+          <a:prstGeom prst="rect">
+            <a:avLst/>
+          </a:prstGeom>
+        </p:spPr>
+      </p:pic>
     </p:spTree>
     <p:extLst>
       <p:ext uri="{BB962C8B-B14F-4D97-AF65-F5344CB8AC3E}">

--- a/output_ppt.pptx
+++ b/output_ppt.pptx
@@ -29200,8 +29200,8 @@
         </p:blipFill>
         <p:spPr>
           <a:xfrm>
-            <a:off x="311348" y="0"/>
-            <a:ext cx="8521302" cy="6858000"/>
+            <a:off x="305335" y="0"/>
+            <a:ext cx="8533328" cy="6858000"/>
           </a:xfrm>
           <a:prstGeom prst="rect">
             <a:avLst/>

--- a/output_ppt.pptx
+++ b/output_ppt.pptx
@@ -29200,8 +29200,8 @@
         </p:blipFill>
         <p:spPr>
           <a:xfrm>
-            <a:off x="305335" y="0"/>
-            <a:ext cx="8533328" cy="6858000"/>
+            <a:off x="308589" y="0"/>
+            <a:ext cx="8526820" cy="6858000"/>
           </a:xfrm>
           <a:prstGeom prst="rect">
             <a:avLst/>
@@ -29433,14 +29433,14 @@
       </p:pic>
       <p:pic>
         <p:nvPicPr>
-          <p:cNvPr id="10" name="Picture 9" descr="default_image.jpg"/>
+          <p:cNvPr id="10" name="Picture 9" descr="photo_8.jpg"/>
           <p:cNvPicPr>
             <a:picLocks noChangeAspect="1"/>
           </p:cNvPicPr>
           <p:nvPr/>
         </p:nvPicPr>
         <p:blipFill>
-          <a:blip r:embed="rId2"/>
+          <a:blip r:embed="rId3"/>
           <a:stretch>
             <a:fillRect/>
           </a:stretch>

--- a/output_ppt.pptx
+++ b/output_ppt.pptx
@@ -7029,86 +7029,29 @@
             </a:lvl9pPr>
           </a:lstStyle>
           <a:p>
-            <a:pPr eaLnBrk="1" hangingPunct="1"/>
-            <a:r>
-              <a:rPr lang="en-US" altLang="ko-KR" sz="1600" b="1" dirty="0">
+            <a:pPr algn="ctr">
+              <a:defRPr sz="1500" b="1">
                 <a:solidFill>
-                  <a:schemeClr val="tx2"/>
+                  <a:srgbClr val="445474"/>
                 </a:solidFill>
-                <a:latin typeface="+mj-ea"/>
-                <a:ea typeface="+mj-ea"/>
-                <a:cs typeface="Arial" panose="020B0604020202020204" pitchFamily="34" charset="0"/>
-              </a:rPr>
-              <a:t>  (F)</a:t>
+                <a:latin typeface="맑은 고딕"/>
+              </a:defRPr>
+            </a:pPr>
+            <a:r>
+              <a:t>(M)  옥수수 9y 6m 2013.01.04</a:t>
             </a:r>
           </a:p>
           <a:p>
-            <a:pPr eaLnBrk="1" hangingPunct="1"/>
-            <a:r>
-              <a:rPr lang="en-US" altLang="ko-KR" sz="1600" b="1" dirty="0">
+            <a:pPr algn="ctr">
+              <a:defRPr sz="1500" b="1">
                 <a:solidFill>
-                  <a:schemeClr val="tx2"/>
+                  <a:srgbClr val="445474"/>
                 </a:solidFill>
-                <a:latin typeface="+mj-ea"/>
-                <a:ea typeface="+mj-ea"/>
-                <a:cs typeface="Arial" panose="020B0604020202020204" pitchFamily="34" charset="0"/>
-              </a:rPr>
-              <a:t>S1.B1.D1.C1-nbt(</a:t>
-            </a:r>
-            <a:r>
-              <a:rPr lang="en-US" altLang="ko-KR" sz="1600" b="1" dirty="0" err="1">
-                <a:solidFill>
-                  <a:schemeClr val="tx2"/>
-                </a:solidFill>
-                <a:latin typeface="+mj-ea"/>
-                <a:ea typeface="+mj-ea"/>
-                <a:cs typeface="Arial" panose="020B0604020202020204" pitchFamily="34" charset="0"/>
-              </a:rPr>
-              <a:t>dbt</a:t>
-            </a:r>
-            <a:r>
-              <a:rPr lang="en-US" altLang="ko-KR" sz="1600" b="1" dirty="0">
-                <a:solidFill>
-                  <a:schemeClr val="tx2"/>
-                </a:solidFill>
-                <a:latin typeface="+mj-ea"/>
-                <a:ea typeface="+mj-ea"/>
-                <a:cs typeface="Arial" panose="020B0604020202020204" pitchFamily="34" charset="0"/>
-              </a:rPr>
-              <a:t>)-RM(Rt)-</a:t>
-            </a:r>
-            <a:r>
-              <a:rPr lang="en-US" altLang="ko-KR" sz="1600" b="1" dirty="0" err="1">
-                <a:solidFill>
-                  <a:schemeClr val="tx2"/>
-                </a:solidFill>
-                <a:latin typeface="+mj-ea"/>
-                <a:ea typeface="+mj-ea"/>
-                <a:cs typeface="Arial" panose="020B0604020202020204" pitchFamily="34" charset="0"/>
-              </a:rPr>
-              <a:t>Fx:Ex-Fx</a:t>
-            </a:r>
-            <a:r>
-              <a:rPr lang="en-US" altLang="ko-KR" sz="1600" b="1" dirty="0">
-                <a:solidFill>
-                  <a:schemeClr val="tx2"/>
-                </a:solidFill>
-                <a:latin typeface="+mj-ea"/>
-                <a:ea typeface="+mj-ea"/>
-                <a:cs typeface="Arial" panose="020B0604020202020204" pitchFamily="34" charset="0"/>
-              </a:rPr>
-              <a:t>/0-Type IV   </a:t>
-            </a:r>
-            <a:r>
-              <a:rPr lang="ko-KR" altLang="en-US" sz="1600" b="1" dirty="0">
-                <a:solidFill>
-                  <a:schemeClr val="tx2"/>
-                </a:solidFill>
-                <a:latin typeface="+mj-ea"/>
-                <a:ea typeface="+mj-ea"/>
-                <a:cs typeface="Arial" panose="020B0604020202020204" pitchFamily="34" charset="0"/>
-              </a:rPr>
-              <a:t> </a:t>
+                <a:latin typeface="맑은 고딕"/>
+              </a:defRPr>
+            </a:pPr>
+            <a:r>
+              <a:t> S1.B1.D1.C1-nbt(nbt)-RM(Rt)-Fx:Ex-Fx/1-Type IV</a:t>
             </a:r>
           </a:p>
         </p:txBody>
@@ -12088,23 +12031,17 @@
                     <a:bodyPr/>
                     <a:lstStyle/>
                     <a:p>
-                      <a:pPr algn="ctr" fontAlgn="ctr"/>
+                      <a:pPr algn="ctr">
+                        <a:defRPr sz="700" b="0">
+                          <a:solidFill>
+                            <a:srgbClr val="445474"/>
+                          </a:solidFill>
+                          <a:latin typeface="맑은 고딕"/>
+                        </a:defRPr>
+                      </a:pPr>
                       <a:r>
-                        <a:rPr lang="en-US" altLang="ko-KR" sz="600" u="none" strike="noStrike">
-                          <a:effectLst/>
-                          <a:latin typeface="+mn-ea"/>
-                          <a:ea typeface="+mn-ea"/>
-                        </a:rPr>
-                        <a:t>0</a:t>
+                        <a:t>1.93</a:t>
                       </a:r>
-                      <a:endParaRPr lang="en-US" altLang="ko-KR" sz="600" b="0" i="0" u="none" strike="noStrike">
-                        <a:solidFill>
-                          <a:srgbClr val="000000"/>
-                        </a:solidFill>
-                        <a:effectLst/>
-                        <a:latin typeface="+mn-ea"/>
-                        <a:ea typeface="+mn-ea"/>
-                      </a:endParaRPr>
                     </a:p>
                   </a:txBody>
                   <a:tcPr marL="0" marR="0" marT="0" marB="0" anchor="ctr">
@@ -12252,23 +12189,17 @@
                     <a:bodyPr/>
                     <a:lstStyle/>
                     <a:p>
-                      <a:pPr algn="ctr" fontAlgn="ctr"/>
+                      <a:pPr algn="ctr">
+                        <a:defRPr sz="700" b="0">
+                          <a:solidFill>
+                            <a:srgbClr val="445474"/>
+                          </a:solidFill>
+                          <a:latin typeface="맑은 고딕"/>
+                        </a:defRPr>
+                      </a:pPr>
                       <a:r>
-                        <a:rPr lang="en-US" altLang="ko-KR" sz="600" u="none" strike="noStrike">
-                          <a:effectLst/>
-                          <a:latin typeface="+mn-ea"/>
-                          <a:ea typeface="+mn-ea"/>
-                        </a:rPr>
-                        <a:t>0</a:t>
+                        <a:t>79.31</a:t>
                       </a:r>
-                      <a:endParaRPr lang="en-US" altLang="ko-KR" sz="600" b="0" i="0" u="none" strike="noStrike">
-                        <a:solidFill>
-                          <a:srgbClr val="000000"/>
-                        </a:solidFill>
-                        <a:effectLst/>
-                        <a:latin typeface="+mn-ea"/>
-                        <a:ea typeface="+mn-ea"/>
-                      </a:endParaRPr>
                     </a:p>
                   </a:txBody>
                   <a:tcPr marL="0" marR="0" marT="0" marB="0" anchor="ctr">
@@ -12416,23 +12347,17 @@
                     <a:bodyPr/>
                     <a:lstStyle/>
                     <a:p>
-                      <a:pPr algn="ctr" fontAlgn="ctr"/>
+                      <a:pPr algn="ctr">
+                        <a:defRPr sz="700" b="0">
+                          <a:solidFill>
+                            <a:srgbClr val="445474"/>
+                          </a:solidFill>
+                          <a:latin typeface="맑은 고딕"/>
+                        </a:defRPr>
+                      </a:pPr>
                       <a:r>
-                        <a:rPr lang="en-US" altLang="ko-KR" sz="600" u="none" strike="noStrike" dirty="0">
-                          <a:effectLst/>
-                          <a:latin typeface="+mn-ea"/>
-                          <a:ea typeface="+mn-ea"/>
-                        </a:rPr>
-                        <a:t>0</a:t>
+                        <a:t>77.37</a:t>
                       </a:r>
-                      <a:endParaRPr lang="en-US" altLang="ko-KR" sz="600" b="0" i="0" u="none" strike="noStrike" dirty="0">
-                        <a:solidFill>
-                          <a:srgbClr val="000000"/>
-                        </a:solidFill>
-                        <a:effectLst/>
-                        <a:latin typeface="+mn-ea"/>
-                        <a:ea typeface="+mn-ea"/>
-                      </a:endParaRPr>
                     </a:p>
                   </a:txBody>
                   <a:tcPr marL="0" marR="0" marT="0" marB="0" anchor="ctr">
@@ -12580,23 +12505,17 @@
                     <a:bodyPr/>
                     <a:lstStyle/>
                     <a:p>
-                      <a:pPr algn="ctr" fontAlgn="ctr"/>
+                      <a:pPr algn="ctr">
+                        <a:defRPr sz="700" b="0">
+                          <a:solidFill>
+                            <a:srgbClr val="445474"/>
+                          </a:solidFill>
+                          <a:latin typeface="맑은 고딕"/>
+                        </a:defRPr>
+                      </a:pPr>
                       <a:r>
-                        <a:rPr lang="en-US" altLang="ko-KR" sz="600" u="none" strike="noStrike">
-                          <a:effectLst/>
-                          <a:latin typeface="+mn-ea"/>
-                          <a:ea typeface="+mn-ea"/>
-                        </a:rPr>
-                        <a:t>0</a:t>
+                        <a:t>58.04</a:t>
                       </a:r>
-                      <a:endParaRPr lang="en-US" altLang="ko-KR" sz="600" b="0" i="0" u="none" strike="noStrike">
-                        <a:solidFill>
-                          <a:srgbClr val="000000"/>
-                        </a:solidFill>
-                        <a:effectLst/>
-                        <a:latin typeface="+mn-ea"/>
-                        <a:ea typeface="+mn-ea"/>
-                      </a:endParaRPr>
                     </a:p>
                   </a:txBody>
                   <a:tcPr marL="0" marR="0" marT="0" marB="0" anchor="ctr">
@@ -12744,23 +12663,17 @@
                     <a:bodyPr/>
                     <a:lstStyle/>
                     <a:p>
-                      <a:pPr algn="ctr" fontAlgn="ctr"/>
+                      <a:pPr algn="ctr">
+                        <a:defRPr sz="700" b="0">
+                          <a:solidFill>
+                            <a:srgbClr val="445474"/>
+                          </a:solidFill>
+                          <a:latin typeface="맑은 고딕"/>
+                        </a:defRPr>
+                      </a:pPr>
                       <a:r>
-                        <a:rPr lang="en-US" altLang="ko-KR" sz="600" u="none" strike="noStrike">
-                          <a:effectLst/>
-                          <a:latin typeface="+mn-ea"/>
-                          <a:ea typeface="+mn-ea"/>
-                        </a:rPr>
-                        <a:t>0</a:t>
+                        <a:t>94.55</a:t>
                       </a:r>
-                      <a:endParaRPr lang="en-US" altLang="ko-KR" sz="600" b="0" i="0" u="none" strike="noStrike">
-                        <a:solidFill>
-                          <a:srgbClr val="000000"/>
-                        </a:solidFill>
-                        <a:effectLst/>
-                        <a:latin typeface="+mn-ea"/>
-                        <a:ea typeface="+mn-ea"/>
-                      </a:endParaRPr>
                     </a:p>
                   </a:txBody>
                   <a:tcPr marL="0" marR="0" marT="0" marB="0" anchor="ctr">
@@ -12908,23 +12821,17 @@
                     <a:bodyPr/>
                     <a:lstStyle/>
                     <a:p>
-                      <a:pPr algn="ctr" fontAlgn="ctr"/>
+                      <a:pPr algn="ctr">
+                        <a:defRPr sz="700" b="0">
+                          <a:solidFill>
+                            <a:srgbClr val="445474"/>
+                          </a:solidFill>
+                          <a:latin typeface="맑은 고딕"/>
+                        </a:defRPr>
+                      </a:pPr>
                       <a:r>
-                        <a:rPr lang="en-US" altLang="ko-KR" sz="600" u="none" strike="noStrike">
-                          <a:effectLst/>
-                          <a:latin typeface="+mn-ea"/>
-                          <a:ea typeface="+mn-ea"/>
-                        </a:rPr>
-                        <a:t>0</a:t>
+                        <a:t>27.41</a:t>
                       </a:r>
-                      <a:endParaRPr lang="en-US" altLang="ko-KR" sz="600" b="0" i="0" u="none" strike="noStrike">
-                        <a:solidFill>
-                          <a:srgbClr val="000000"/>
-                        </a:solidFill>
-                        <a:effectLst/>
-                        <a:latin typeface="+mn-ea"/>
-                        <a:ea typeface="+mn-ea"/>
-                      </a:endParaRPr>
                     </a:p>
                   </a:txBody>
                   <a:tcPr marL="0" marR="0" marT="0" marB="0" anchor="ctr">
@@ -13072,23 +12979,17 @@
                     <a:bodyPr/>
                     <a:lstStyle/>
                     <a:p>
-                      <a:pPr algn="ctr" fontAlgn="ctr"/>
+                      <a:pPr algn="ctr">
+                        <a:defRPr sz="700" b="0">
+                          <a:solidFill>
+                            <a:srgbClr val="445474"/>
+                          </a:solidFill>
+                          <a:latin typeface="맑은 고딕"/>
+                        </a:defRPr>
+                      </a:pPr>
                       <a:r>
-                        <a:rPr lang="en-US" altLang="ko-KR" sz="600" u="none" strike="noStrike" dirty="0">
-                          <a:effectLst/>
-                          <a:latin typeface="+mn-ea"/>
-                          <a:ea typeface="+mn-ea"/>
-                        </a:rPr>
-                        <a:t>0</a:t>
+                        <a:t>26.02</a:t>
                       </a:r>
-                      <a:endParaRPr lang="en-US" altLang="ko-KR" sz="600" b="0" i="0" u="none" strike="noStrike" dirty="0">
-                        <a:solidFill>
-                          <a:srgbClr val="000000"/>
-                        </a:solidFill>
-                        <a:effectLst/>
-                        <a:latin typeface="+mn-ea"/>
-                        <a:ea typeface="+mn-ea"/>
-                      </a:endParaRPr>
                     </a:p>
                   </a:txBody>
                   <a:tcPr marL="0" marR="0" marT="0" marB="0" anchor="ctr">
@@ -13236,23 +13137,17 @@
                     <a:bodyPr/>
                     <a:lstStyle/>
                     <a:p>
-                      <a:pPr algn="ctr" fontAlgn="ctr"/>
+                      <a:pPr algn="ctr">
+                        <a:defRPr sz="700" b="0">
+                          <a:solidFill>
+                            <a:srgbClr val="445474"/>
+                          </a:solidFill>
+                          <a:latin typeface="맑은 고딕"/>
+                        </a:defRPr>
+                      </a:pPr>
                       <a:r>
-                        <a:rPr lang="en-US" altLang="ko-KR" sz="600" u="none" strike="noStrike">
-                          <a:effectLst/>
-                          <a:latin typeface="+mn-ea"/>
-                          <a:ea typeface="+mn-ea"/>
-                        </a:rPr>
-                        <a:t>0</a:t>
+                        <a:t>72.82</a:t>
                       </a:r>
-                      <a:endParaRPr lang="en-US" altLang="ko-KR" sz="600" b="0" i="0" u="none" strike="noStrike">
-                        <a:solidFill>
-                          <a:srgbClr val="000000"/>
-                        </a:solidFill>
-                        <a:effectLst/>
-                        <a:latin typeface="+mn-ea"/>
-                        <a:ea typeface="+mn-ea"/>
-                      </a:endParaRPr>
                     </a:p>
                   </a:txBody>
                   <a:tcPr marL="0" marR="0" marT="0" marB="0" anchor="ctr">
@@ -13400,23 +13295,17 @@
                     <a:bodyPr/>
                     <a:lstStyle/>
                     <a:p>
-                      <a:pPr algn="ctr" fontAlgn="ctr"/>
+                      <a:pPr algn="ctr">
+                        <a:defRPr sz="700" b="0">
+                          <a:solidFill>
+                            <a:srgbClr val="445474"/>
+                          </a:solidFill>
+                          <a:latin typeface="맑은 고딕"/>
+                        </a:defRPr>
+                      </a:pPr>
                       <a:r>
-                        <a:rPr lang="en-US" altLang="ko-KR" sz="600" u="none" strike="noStrike" dirty="0">
-                          <a:effectLst/>
-                          <a:latin typeface="+mn-ea"/>
-                          <a:ea typeface="+mn-ea"/>
-                        </a:rPr>
-                        <a:t>0</a:t>
+                        <a:t>94.6</a:t>
                       </a:r>
-                      <a:endParaRPr lang="en-US" altLang="ko-KR" sz="600" b="0" i="0" u="none" strike="noStrike" dirty="0">
-                        <a:solidFill>
-                          <a:srgbClr val="000000"/>
-                        </a:solidFill>
-                        <a:effectLst/>
-                        <a:latin typeface="+mn-ea"/>
-                        <a:ea typeface="+mn-ea"/>
-                      </a:endParaRPr>
                     </a:p>
                   </a:txBody>
                   <a:tcPr marL="0" marR="0" marT="0" marB="0" anchor="ctr">
@@ -13564,23 +13453,17 @@
                     <a:bodyPr/>
                     <a:lstStyle/>
                     <a:p>
-                      <a:pPr algn="ctr" fontAlgn="ctr"/>
+                      <a:pPr algn="ctr">
+                        <a:defRPr sz="700" b="0">
+                          <a:solidFill>
+                            <a:srgbClr val="445474"/>
+                          </a:solidFill>
+                          <a:latin typeface="맑은 고딕"/>
+                        </a:defRPr>
+                      </a:pPr>
                       <a:r>
-                        <a:rPr lang="en-US" altLang="ko-KR" sz="600" u="none" strike="noStrike" dirty="0">
-                          <a:effectLst/>
-                          <a:latin typeface="+mn-ea"/>
-                          <a:ea typeface="+mn-ea"/>
-                        </a:rPr>
-                        <a:t>0</a:t>
+                        <a:t>0.08</a:t>
                       </a:r>
-                      <a:endParaRPr lang="en-US" altLang="ko-KR" sz="600" b="0" i="0" u="none" strike="noStrike" dirty="0">
-                        <a:solidFill>
-                          <a:srgbClr val="000000"/>
-                        </a:solidFill>
-                        <a:effectLst/>
-                        <a:latin typeface="+mn-ea"/>
-                        <a:ea typeface="+mn-ea"/>
-                      </a:endParaRPr>
                     </a:p>
                   </a:txBody>
                   <a:tcPr marL="0" marR="0" marT="0" marB="0" anchor="ctr">
@@ -13728,23 +13611,17 @@
                     <a:bodyPr/>
                     <a:lstStyle/>
                     <a:p>
-                      <a:pPr algn="ctr" fontAlgn="ctr"/>
+                      <a:pPr algn="ctr">
+                        <a:defRPr sz="700" b="0">
+                          <a:solidFill>
+                            <a:srgbClr val="445474"/>
+                          </a:solidFill>
+                          <a:latin typeface="맑은 고딕"/>
+                        </a:defRPr>
+                      </a:pPr>
                       <a:r>
-                        <a:rPr lang="en-US" altLang="ko-KR" sz="600" u="none" strike="noStrike">
-                          <a:effectLst/>
-                          <a:latin typeface="+mn-ea"/>
-                          <a:ea typeface="+mn-ea"/>
-                        </a:rPr>
-                        <a:t>0</a:t>
+                        <a:t>82.94</a:t>
                       </a:r>
-                      <a:endParaRPr lang="en-US" altLang="ko-KR" sz="600" b="0" i="0" u="none" strike="noStrike">
-                        <a:solidFill>
-                          <a:srgbClr val="000000"/>
-                        </a:solidFill>
-                        <a:effectLst/>
-                        <a:latin typeface="+mn-ea"/>
-                        <a:ea typeface="+mn-ea"/>
-                      </a:endParaRPr>
                     </a:p>
                   </a:txBody>
                   <a:tcPr marL="0" marR="0" marT="0" marB="0" anchor="ctr">
@@ -13892,23 +13769,17 @@
                     <a:bodyPr/>
                     <a:lstStyle/>
                     <a:p>
-                      <a:pPr algn="ctr" fontAlgn="ctr"/>
+                      <a:pPr algn="ctr">
+                        <a:defRPr sz="700" b="0">
+                          <a:solidFill>
+                            <a:srgbClr val="445474"/>
+                          </a:solidFill>
+                          <a:latin typeface="맑은 고딕"/>
+                        </a:defRPr>
+                      </a:pPr>
                       <a:r>
-                        <a:rPr lang="en-US" altLang="ko-KR" sz="600" u="none" strike="noStrike" dirty="0">
-                          <a:effectLst/>
-                          <a:latin typeface="+mn-ea"/>
-                          <a:ea typeface="+mn-ea"/>
-                        </a:rPr>
-                        <a:t>0</a:t>
+                        <a:t>79.77</a:t>
                       </a:r>
-                      <a:endParaRPr lang="en-US" altLang="ko-KR" sz="600" b="0" i="0" u="none" strike="noStrike" dirty="0">
-                        <a:solidFill>
-                          <a:srgbClr val="000000"/>
-                        </a:solidFill>
-                        <a:effectLst/>
-                        <a:latin typeface="+mn-ea"/>
-                        <a:ea typeface="+mn-ea"/>
-                      </a:endParaRPr>
                     </a:p>
                   </a:txBody>
                   <a:tcPr marL="0" marR="0" marT="0" marB="0" anchor="ctr">
@@ -14056,23 +13927,17 @@
                     <a:bodyPr/>
                     <a:lstStyle/>
                     <a:p>
-                      <a:pPr algn="ctr" fontAlgn="ctr"/>
+                      <a:pPr algn="ctr">
+                        <a:defRPr sz="700" b="0">
+                          <a:solidFill>
+                            <a:srgbClr val="445474"/>
+                          </a:solidFill>
+                          <a:latin typeface="맑은 고딕"/>
+                        </a:defRPr>
+                      </a:pPr>
                       <a:r>
-                        <a:rPr lang="en-US" altLang="ko-KR" sz="600" u="none" strike="noStrike">
-                          <a:effectLst/>
-                          <a:latin typeface="+mn-ea"/>
-                          <a:ea typeface="+mn-ea"/>
-                        </a:rPr>
-                        <a:t>0</a:t>
+                        <a:t>-5.19</a:t>
                       </a:r>
-                      <a:endParaRPr lang="en-US" altLang="ko-KR" sz="600" b="0" i="0" u="none" strike="noStrike">
-                        <a:solidFill>
-                          <a:srgbClr val="000000"/>
-                        </a:solidFill>
-                        <a:effectLst/>
-                        <a:latin typeface="+mn-ea"/>
-                        <a:ea typeface="+mn-ea"/>
-                      </a:endParaRPr>
                     </a:p>
                   </a:txBody>
                   <a:tcPr marL="0" marR="0" marT="0" marB="0" anchor="ctr">
@@ -14220,23 +14085,17 @@
                     <a:bodyPr/>
                     <a:lstStyle/>
                     <a:p>
-                      <a:pPr algn="ctr" fontAlgn="ctr"/>
+                      <a:pPr algn="ctr">
+                        <a:defRPr sz="700" b="0">
+                          <a:solidFill>
+                            <a:srgbClr val="445474"/>
+                          </a:solidFill>
+                          <a:latin typeface="맑은 고딕"/>
+                        </a:defRPr>
+                      </a:pPr>
                       <a:r>
-                        <a:rPr lang="en-US" altLang="ko-KR" sz="600" u="none" strike="noStrike" dirty="0">
-                          <a:effectLst/>
-                          <a:latin typeface="+mn-ea"/>
-                          <a:ea typeface="+mn-ea"/>
-                        </a:rPr>
-                        <a:t>0</a:t>
+                        <a:t>63.1</a:t>
                       </a:r>
-                      <a:endParaRPr lang="en-US" altLang="ko-KR" sz="600" b="0" i="0" u="none" strike="noStrike" dirty="0">
-                        <a:solidFill>
-                          <a:srgbClr val="000000"/>
-                        </a:solidFill>
-                        <a:effectLst/>
-                        <a:latin typeface="+mn-ea"/>
-                        <a:ea typeface="+mn-ea"/>
-                      </a:endParaRPr>
                     </a:p>
                   </a:txBody>
                   <a:tcPr marL="0" marR="0" marT="0" marB="0" anchor="ctr">
@@ -14384,23 +14243,17 @@
                     <a:bodyPr/>
                     <a:lstStyle/>
                     <a:p>
-                      <a:pPr algn="ctr" fontAlgn="ctr"/>
+                      <a:pPr algn="ctr">
+                        <a:defRPr sz="700" b="0">
+                          <a:solidFill>
+                            <a:srgbClr val="445474"/>
+                          </a:solidFill>
+                          <a:latin typeface="맑은 고딕"/>
+                        </a:defRPr>
+                      </a:pPr>
                       <a:r>
-                        <a:rPr lang="en-US" altLang="ko-KR" sz="600" u="none" strike="noStrike">
-                          <a:effectLst/>
-                          <a:latin typeface="+mn-ea"/>
-                          <a:ea typeface="+mn-ea"/>
-                        </a:rPr>
-                        <a:t>0</a:t>
+                        <a:t>128.56</a:t>
                       </a:r>
-                      <a:endParaRPr lang="en-US" altLang="ko-KR" sz="600" b="0" i="0" u="none" strike="noStrike">
-                        <a:solidFill>
-                          <a:srgbClr val="000000"/>
-                        </a:solidFill>
-                        <a:effectLst/>
-                        <a:latin typeface="+mn-ea"/>
-                        <a:ea typeface="+mn-ea"/>
-                      </a:endParaRPr>
                     </a:p>
                   </a:txBody>
                   <a:tcPr marL="0" marR="0" marT="0" marB="0" anchor="ctr">
@@ -14548,23 +14401,17 @@
                     <a:bodyPr/>
                     <a:lstStyle/>
                     <a:p>
-                      <a:pPr algn="ctr" fontAlgn="ctr"/>
+                      <a:pPr algn="ctr">
+                        <a:defRPr sz="700" b="0">
+                          <a:solidFill>
+                            <a:srgbClr val="445474"/>
+                          </a:solidFill>
+                          <a:latin typeface="맑은 고딕"/>
+                        </a:defRPr>
+                      </a:pPr>
                       <a:r>
-                        <a:rPr lang="en-US" altLang="ko-KR" sz="600" u="none" strike="noStrike" dirty="0">
-                          <a:effectLst/>
-                          <a:latin typeface="+mn-ea"/>
-                          <a:ea typeface="+mn-ea"/>
-                        </a:rPr>
-                        <a:t>0</a:t>
+                        <a:t>122.81</a:t>
                       </a:r>
-                      <a:endParaRPr lang="en-US" altLang="ko-KR" sz="600" b="0" i="0" u="none" strike="noStrike" dirty="0">
-                        <a:solidFill>
-                          <a:srgbClr val="000000"/>
-                        </a:solidFill>
-                        <a:effectLst/>
-                        <a:latin typeface="+mn-ea"/>
-                        <a:ea typeface="+mn-ea"/>
-                      </a:endParaRPr>
                     </a:p>
                   </a:txBody>
                   <a:tcPr marL="0" marR="0" marT="0" marB="0" anchor="ctr">
@@ -14712,23 +14559,17 @@
                     <a:bodyPr/>
                     <a:lstStyle/>
                     <a:p>
-                      <a:pPr algn="ctr" fontAlgn="ctr"/>
+                      <a:pPr algn="ctr">
+                        <a:defRPr sz="700" b="0">
+                          <a:solidFill>
+                            <a:srgbClr val="445474"/>
+                          </a:solidFill>
+                          <a:latin typeface="맑은 고딕"/>
+                        </a:defRPr>
+                      </a:pPr>
                       <a:r>
-                        <a:rPr lang="en-US" altLang="ko-KR" sz="600" u="none" strike="noStrike" dirty="0">
-                          <a:effectLst/>
-                          <a:latin typeface="+mn-ea"/>
-                          <a:ea typeface="+mn-ea"/>
-                        </a:rPr>
-                        <a:t>0</a:t>
+                        <a:t>5.6</a:t>
                       </a:r>
-                      <a:endParaRPr lang="en-US" altLang="ko-KR" sz="600" b="0" i="0" u="none" strike="noStrike" dirty="0">
-                        <a:solidFill>
-                          <a:srgbClr val="000000"/>
-                        </a:solidFill>
-                        <a:effectLst/>
-                        <a:latin typeface="+mn-ea"/>
-                        <a:ea typeface="+mn-ea"/>
-                      </a:endParaRPr>
                     </a:p>
                   </a:txBody>
                   <a:tcPr marL="0" marR="0" marT="0" marB="0" anchor="ctr">
@@ -14876,23 +14717,17 @@
                     <a:bodyPr/>
                     <a:lstStyle/>
                     <a:p>
-                      <a:pPr algn="ctr" fontAlgn="ctr"/>
+                      <a:pPr algn="ctr">
+                        <a:defRPr sz="700" b="0">
+                          <a:solidFill>
+                            <a:srgbClr val="445474"/>
+                          </a:solidFill>
+                          <a:latin typeface="맑은 고딕"/>
+                        </a:defRPr>
+                      </a:pPr>
                       <a:r>
-                        <a:rPr lang="en-US" altLang="ko-KR" sz="600" u="none" strike="noStrike">
-                          <a:effectLst/>
-                          <a:latin typeface="+mn-ea"/>
-                          <a:ea typeface="+mn-ea"/>
-                        </a:rPr>
-                        <a:t>0</a:t>
+                        <a:t>1.4</a:t>
                       </a:r>
-                      <a:endParaRPr lang="en-US" altLang="ko-KR" sz="600" b="0" i="0" u="none" strike="noStrike">
-                        <a:solidFill>
-                          <a:srgbClr val="000000"/>
-                        </a:solidFill>
-                        <a:effectLst/>
-                        <a:latin typeface="+mn-ea"/>
-                        <a:ea typeface="+mn-ea"/>
-                      </a:endParaRPr>
                     </a:p>
                   </a:txBody>
                   <a:tcPr marL="0" marR="0" marT="0" marB="0" anchor="ctr">
@@ -15040,23 +14875,17 @@
                     <a:bodyPr/>
                     <a:lstStyle/>
                     <a:p>
-                      <a:pPr algn="ctr" fontAlgn="ctr"/>
+                      <a:pPr algn="ctr">
+                        <a:defRPr sz="700" b="0">
+                          <a:solidFill>
+                            <a:srgbClr val="445474"/>
+                          </a:solidFill>
+                          <a:latin typeface="맑은 고딕"/>
+                        </a:defRPr>
+                      </a:pPr>
                       <a:r>
-                        <a:rPr lang="en-US" altLang="ko-KR" sz="600" u="none" strike="noStrike" dirty="0">
-                          <a:effectLst/>
-                          <a:latin typeface="+mn-ea"/>
-                          <a:ea typeface="+mn-ea"/>
-                        </a:rPr>
-                        <a:t>0</a:t>
+                        <a:t>34.7</a:t>
                       </a:r>
-                      <a:endParaRPr lang="en-US" altLang="ko-KR" sz="600" b="0" i="0" u="none" strike="noStrike" dirty="0">
-                        <a:solidFill>
-                          <a:srgbClr val="000000"/>
-                        </a:solidFill>
-                        <a:effectLst/>
-                        <a:latin typeface="+mn-ea"/>
-                        <a:ea typeface="+mn-ea"/>
-                      </a:endParaRPr>
                     </a:p>
                   </a:txBody>
                   <a:tcPr marL="0" marR="0" marT="0" marB="0" anchor="ctr">
@@ -15204,23 +15033,17 @@
                     <a:bodyPr/>
                     <a:lstStyle/>
                     <a:p>
-                      <a:pPr algn="ctr" fontAlgn="ctr"/>
+                      <a:pPr algn="ctr">
+                        <a:defRPr sz="700" b="0">
+                          <a:solidFill>
+                            <a:srgbClr val="445474"/>
+                          </a:solidFill>
+                          <a:latin typeface="맑은 고딕"/>
+                        </a:defRPr>
+                      </a:pPr>
                       <a:r>
-                        <a:rPr lang="en-US" altLang="ko-KR" sz="600" u="none" strike="noStrike" dirty="0">
-                          <a:effectLst/>
-                          <a:latin typeface="+mn-ea"/>
-                          <a:ea typeface="+mn-ea"/>
-                        </a:rPr>
-                        <a:t>0</a:t>
+                        <a:t>40.15</a:t>
                       </a:r>
-                      <a:endParaRPr lang="en-US" altLang="ko-KR" sz="600" b="0" i="0" u="none" strike="noStrike" dirty="0">
-                        <a:solidFill>
-                          <a:srgbClr val="000000"/>
-                        </a:solidFill>
-                        <a:effectLst/>
-                        <a:latin typeface="+mn-ea"/>
-                        <a:ea typeface="+mn-ea"/>
-                      </a:endParaRPr>
                     </a:p>
                   </a:txBody>
                   <a:tcPr marL="0" marR="0" marT="0" marB="0" anchor="ctr">
@@ -15368,23 +15191,17 @@
                     <a:bodyPr/>
                     <a:lstStyle/>
                     <a:p>
-                      <a:pPr algn="ctr" fontAlgn="ctr"/>
+                      <a:pPr algn="ctr">
+                        <a:defRPr sz="700" b="0">
+                          <a:solidFill>
+                            <a:srgbClr val="445474"/>
+                          </a:solidFill>
+                          <a:latin typeface="맑은 고딕"/>
+                        </a:defRPr>
+                      </a:pPr>
                       <a:r>
-                        <a:rPr lang="en-US" altLang="ko-KR" sz="600" u="none" strike="noStrike">
-                          <a:effectLst/>
-                          <a:latin typeface="+mn-ea"/>
-                          <a:ea typeface="+mn-ea"/>
-                        </a:rPr>
-                        <a:t>0</a:t>
+                        <a:t>57.04</a:t>
                       </a:r>
-                      <a:endParaRPr lang="en-US" altLang="ko-KR" sz="600" b="0" i="0" u="none" strike="noStrike">
-                        <a:solidFill>
-                          <a:srgbClr val="000000"/>
-                        </a:solidFill>
-                        <a:effectLst/>
-                        <a:latin typeface="+mn-ea"/>
-                        <a:ea typeface="+mn-ea"/>
-                      </a:endParaRPr>
                     </a:p>
                   </a:txBody>
                   <a:tcPr marL="0" marR="0" marT="0" marB="0" anchor="ctr">
@@ -15532,23 +15349,17 @@
                     <a:bodyPr/>
                     <a:lstStyle/>
                     <a:p>
-                      <a:pPr algn="ctr" fontAlgn="ctr"/>
+                      <a:pPr algn="ctr">
+                        <a:defRPr sz="700" b="0">
+                          <a:solidFill>
+                            <a:srgbClr val="445474"/>
+                          </a:solidFill>
+                          <a:latin typeface="맑은 고딕"/>
+                        </a:defRPr>
+                      </a:pPr>
                       <a:r>
-                        <a:rPr lang="en-US" altLang="ko-KR" sz="600" u="none" strike="noStrike" dirty="0">
-                          <a:effectLst/>
-                          <a:latin typeface="+mn-ea"/>
-                          <a:ea typeface="+mn-ea"/>
-                        </a:rPr>
-                        <a:t>0</a:t>
+                        <a:t>62.79</a:t>
                       </a:r>
-                      <a:endParaRPr lang="en-US" altLang="ko-KR" sz="600" b="0" i="0" u="none" strike="noStrike" dirty="0">
-                        <a:solidFill>
-                          <a:srgbClr val="000000"/>
-                        </a:solidFill>
-                        <a:effectLst/>
-                        <a:latin typeface="+mn-ea"/>
-                        <a:ea typeface="+mn-ea"/>
-                      </a:endParaRPr>
                     </a:p>
                   </a:txBody>
                   <a:tcPr marL="0" marR="0" marT="0" marB="0" anchor="ctr">
@@ -15699,23 +15510,17 @@
                     <a:bodyPr/>
                     <a:lstStyle/>
                     <a:p>
-                      <a:pPr algn="ctr" fontAlgn="ctr"/>
+                      <a:pPr algn="ctr">
+                        <a:defRPr sz="700" b="0">
+                          <a:solidFill>
+                            <a:srgbClr val="445474"/>
+                          </a:solidFill>
+                          <a:latin typeface="맑은 고딕"/>
+                        </a:defRPr>
+                      </a:pPr>
                       <a:r>
-                        <a:rPr lang="en-US" altLang="ko-KR" sz="600" u="none" strike="noStrike">
-                          <a:effectLst/>
-                          <a:latin typeface="+mn-ea"/>
-                          <a:ea typeface="+mn-ea"/>
-                        </a:rPr>
-                        <a:t>0</a:t>
+                        <a:t>30.54</a:t>
                       </a:r>
-                      <a:endParaRPr lang="en-US" altLang="ko-KR" sz="600" b="0" i="0" u="none" strike="noStrike">
-                        <a:solidFill>
-                          <a:srgbClr val="000000"/>
-                        </a:solidFill>
-                        <a:effectLst/>
-                        <a:latin typeface="+mn-ea"/>
-                        <a:ea typeface="+mn-ea"/>
-                      </a:endParaRPr>
                     </a:p>
                   </a:txBody>
                   <a:tcPr marL="0" marR="0" marT="0" marB="0" anchor="ctr">
@@ -15863,23 +15668,17 @@
                     <a:bodyPr/>
                     <a:lstStyle/>
                     <a:p>
-                      <a:pPr algn="ctr" fontAlgn="ctr"/>
+                      <a:pPr algn="ctr">
+                        <a:defRPr sz="700" b="0">
+                          <a:solidFill>
+                            <a:srgbClr val="445474"/>
+                          </a:solidFill>
+                          <a:latin typeface="맑은 고딕"/>
+                        </a:defRPr>
+                      </a:pPr>
                       <a:r>
-                        <a:rPr lang="en-US" altLang="ko-KR" sz="600" u="none" strike="noStrike" dirty="0">
-                          <a:effectLst/>
-                          <a:latin typeface="+mn-ea"/>
-                          <a:ea typeface="+mn-ea"/>
-                        </a:rPr>
-                        <a:t>0</a:t>
+                        <a:t>48.21</a:t>
                       </a:r>
-                      <a:endParaRPr lang="en-US" altLang="ko-KR" sz="600" b="0" i="0" u="none" strike="noStrike" dirty="0">
-                        <a:solidFill>
-                          <a:srgbClr val="000000"/>
-                        </a:solidFill>
-                        <a:effectLst/>
-                        <a:latin typeface="+mn-ea"/>
-                        <a:ea typeface="+mn-ea"/>
-                      </a:endParaRPr>
                     </a:p>
                   </a:txBody>
                   <a:tcPr marL="0" marR="0" marT="0" marB="0" anchor="ctr">
@@ -16027,23 +15826,17 @@
                     <a:bodyPr/>
                     <a:lstStyle/>
                     <a:p>
-                      <a:pPr algn="ctr" fontAlgn="ctr"/>
+                      <a:pPr algn="ctr">
+                        <a:defRPr sz="700" b="0">
+                          <a:solidFill>
+                            <a:srgbClr val="445474"/>
+                          </a:solidFill>
+                          <a:latin typeface="맑은 고딕"/>
+                        </a:defRPr>
+                      </a:pPr>
                       <a:r>
-                        <a:rPr lang="en-US" altLang="ko-KR" sz="600" u="none" strike="noStrike">
-                          <a:effectLst/>
-                          <a:latin typeface="+mn-ea"/>
-                          <a:ea typeface="+mn-ea"/>
-                        </a:rPr>
-                        <a:t>0</a:t>
+                        <a:t>35.78</a:t>
                       </a:r>
-                      <a:endParaRPr lang="en-US" altLang="ko-KR" sz="600" b="0" i="0" u="none" strike="noStrike">
-                        <a:solidFill>
-                          <a:srgbClr val="000000"/>
-                        </a:solidFill>
-                        <a:effectLst/>
-                        <a:latin typeface="+mn-ea"/>
-                        <a:ea typeface="+mn-ea"/>
-                      </a:endParaRPr>
                     </a:p>
                   </a:txBody>
                   <a:tcPr marL="0" marR="0" marT="0" marB="0" anchor="ctr">
@@ -16191,23 +15984,17 @@
                     <a:bodyPr/>
                     <a:lstStyle/>
                     <a:p>
-                      <a:pPr algn="ctr" fontAlgn="ctr"/>
+                      <a:pPr algn="ctr">
+                        <a:defRPr sz="700" b="0">
+                          <a:solidFill>
+                            <a:srgbClr val="445474"/>
+                          </a:solidFill>
+                          <a:latin typeface="맑은 고딕"/>
+                        </a:defRPr>
+                      </a:pPr>
                       <a:r>
-                        <a:rPr lang="en-US" altLang="ko-KR" sz="600" u="none" strike="noStrike" dirty="0">
-                          <a:effectLst/>
-                          <a:latin typeface="+mn-ea"/>
-                          <a:ea typeface="+mn-ea"/>
-                        </a:rPr>
-                        <a:t>0</a:t>
+                        <a:t>64.61</a:t>
                       </a:r>
-                      <a:endParaRPr lang="en-US" altLang="ko-KR" sz="600" b="0" i="0" u="none" strike="noStrike" dirty="0">
-                        <a:solidFill>
-                          <a:srgbClr val="000000"/>
-                        </a:solidFill>
-                        <a:effectLst/>
-                        <a:latin typeface="+mn-ea"/>
-                        <a:ea typeface="+mn-ea"/>
-                      </a:endParaRPr>
                     </a:p>
                   </a:txBody>
                   <a:tcPr marL="0" marR="0" marT="0" marB="0" anchor="ctr">
@@ -16355,23 +16142,17 @@
                     <a:bodyPr/>
                     <a:lstStyle/>
                     <a:p>
-                      <a:pPr algn="ctr" fontAlgn="ctr"/>
+                      <a:pPr algn="ctr">
+                        <a:defRPr sz="700" b="0">
+                          <a:solidFill>
+                            <a:srgbClr val="445474"/>
+                          </a:solidFill>
+                          <a:latin typeface="맑은 고딕"/>
+                        </a:defRPr>
+                      </a:pPr>
                       <a:r>
-                        <a:rPr lang="en-US" altLang="ko-KR" sz="600" u="none" strike="noStrike">
-                          <a:effectLst/>
-                          <a:latin typeface="+mn-ea"/>
-                          <a:ea typeface="+mn-ea"/>
-                        </a:rPr>
-                        <a:t>0</a:t>
+                        <a:t>65.93</a:t>
                       </a:r>
-                      <a:endParaRPr lang="en-US" altLang="ko-KR" sz="600" b="0" i="0" u="none" strike="noStrike">
-                        <a:solidFill>
-                          <a:srgbClr val="000000"/>
-                        </a:solidFill>
-                        <a:effectLst/>
-                        <a:latin typeface="+mn-ea"/>
-                        <a:ea typeface="+mn-ea"/>
-                      </a:endParaRPr>
                     </a:p>
                   </a:txBody>
                   <a:tcPr marL="0" marR="0" marT="0" marB="0" anchor="ctr">
@@ -16519,23 +16300,17 @@
                     <a:bodyPr/>
                     <a:lstStyle/>
                     <a:p>
-                      <a:pPr algn="ctr" fontAlgn="ctr"/>
+                      <a:pPr algn="ctr">
+                        <a:defRPr sz="700" b="0">
+                          <a:solidFill>
+                            <a:srgbClr val="445474"/>
+                          </a:solidFill>
+                          <a:latin typeface="맑은 고딕"/>
+                        </a:defRPr>
+                      </a:pPr>
                       <a:r>
-                        <a:rPr lang="en-US" altLang="ko-KR" sz="600" u="none" strike="noStrike" dirty="0">
-                          <a:effectLst/>
-                          <a:latin typeface="+mn-ea"/>
-                          <a:ea typeface="+mn-ea"/>
-                        </a:rPr>
-                        <a:t>0</a:t>
+                        <a:t>51.12</a:t>
                       </a:r>
-                      <a:endParaRPr lang="en-US" altLang="ko-KR" sz="600" b="0" i="0" u="none" strike="noStrike" dirty="0">
-                        <a:solidFill>
-                          <a:srgbClr val="000000"/>
-                        </a:solidFill>
-                        <a:effectLst/>
-                        <a:latin typeface="+mn-ea"/>
-                        <a:ea typeface="+mn-ea"/>
-                      </a:endParaRPr>
                     </a:p>
                   </a:txBody>
                   <a:tcPr marL="0" marR="0" marT="0" marB="0" anchor="ctr">
@@ -16683,23 +16458,17 @@
                     <a:bodyPr/>
                     <a:lstStyle/>
                     <a:p>
-                      <a:pPr algn="ctr" fontAlgn="ctr"/>
+                      <a:pPr algn="ctr">
+                        <a:defRPr sz="700" b="0">
+                          <a:solidFill>
+                            <a:srgbClr val="445474"/>
+                          </a:solidFill>
+                          <a:latin typeface="맑은 고딕"/>
+                        </a:defRPr>
+                      </a:pPr>
                       <a:r>
-                        <a:rPr lang="en-US" altLang="ko-KR" sz="600" u="none" strike="noStrike">
-                          <a:effectLst/>
-                          <a:latin typeface="+mn-ea"/>
-                          <a:ea typeface="+mn-ea"/>
-                        </a:rPr>
-                        <a:t>0</a:t>
+                        <a:t>72.19</a:t>
                       </a:r>
-                      <a:endParaRPr lang="en-US" altLang="ko-KR" sz="600" b="0" i="0" u="none" strike="noStrike">
-                        <a:solidFill>
-                          <a:srgbClr val="000000"/>
-                        </a:solidFill>
-                        <a:effectLst/>
-                        <a:latin typeface="+mn-ea"/>
-                        <a:ea typeface="+mn-ea"/>
-                      </a:endParaRPr>
                     </a:p>
                   </a:txBody>
                   <a:tcPr marL="0" marR="0" marT="0" marB="0" anchor="ctr">
@@ -16847,23 +16616,17 @@
                     <a:bodyPr/>
                     <a:lstStyle/>
                     <a:p>
-                      <a:pPr algn="ctr" fontAlgn="ctr"/>
+                      <a:pPr algn="ctr">
+                        <a:defRPr sz="700" b="0">
+                          <a:solidFill>
+                            <a:srgbClr val="445474"/>
+                          </a:solidFill>
+                          <a:latin typeface="맑은 고딕"/>
+                        </a:defRPr>
+                      </a:pPr>
                       <a:r>
-                        <a:rPr lang="en-US" altLang="ko-KR" sz="600" u="none" strike="noStrike" dirty="0">
-                          <a:effectLst/>
-                          <a:latin typeface="+mn-ea"/>
-                          <a:ea typeface="+mn-ea"/>
-                        </a:rPr>
-                        <a:t>0</a:t>
+                        <a:t>6.26</a:t>
                       </a:r>
-                      <a:endParaRPr lang="en-US" altLang="ko-KR" sz="600" b="0" i="0" u="none" strike="noStrike" dirty="0">
-                        <a:solidFill>
-                          <a:srgbClr val="000000"/>
-                        </a:solidFill>
-                        <a:effectLst/>
-                        <a:latin typeface="+mn-ea"/>
-                        <a:ea typeface="+mn-ea"/>
-                      </a:endParaRPr>
                     </a:p>
                   </a:txBody>
                   <a:tcPr marL="0" marR="0" marT="0" marB="0" anchor="ctr">
@@ -17011,23 +16774,17 @@
                     <a:bodyPr/>
                     <a:lstStyle/>
                     <a:p>
-                      <a:pPr algn="ctr" fontAlgn="ctr"/>
+                      <a:pPr algn="ctr">
+                        <a:defRPr sz="700" b="0">
+                          <a:solidFill>
+                            <a:srgbClr val="445474"/>
+                          </a:solidFill>
+                          <a:latin typeface="맑은 고딕"/>
+                        </a:defRPr>
+                      </a:pPr>
                       <a:r>
-                        <a:rPr lang="en-US" altLang="ko-KR" sz="600" u="none" strike="noStrike">
-                          <a:effectLst/>
-                          <a:latin typeface="+mn-ea"/>
-                          <a:ea typeface="+mn-ea"/>
-                        </a:rPr>
-                        <a:t>0</a:t>
+                        <a:t>49.62</a:t>
                       </a:r>
-                      <a:endParaRPr lang="en-US" altLang="ko-KR" sz="600" b="0" i="0" u="none" strike="noStrike">
-                        <a:solidFill>
-                          <a:srgbClr val="000000"/>
-                        </a:solidFill>
-                        <a:effectLst/>
-                        <a:latin typeface="+mn-ea"/>
-                        <a:ea typeface="+mn-ea"/>
-                      </a:endParaRPr>
                     </a:p>
                   </a:txBody>
                   <a:tcPr marL="0" marR="0" marT="0" marB="0" anchor="ctr">
@@ -17175,23 +16932,17 @@
                     <a:bodyPr/>
                     <a:lstStyle/>
                     <a:p>
-                      <a:pPr algn="ctr" fontAlgn="ctr"/>
+                      <a:pPr algn="ctr">
+                        <a:defRPr sz="700" b="0">
+                          <a:solidFill>
+                            <a:srgbClr val="445474"/>
+                          </a:solidFill>
+                          <a:latin typeface="맑은 고딕"/>
+                        </a:defRPr>
+                      </a:pPr>
                       <a:r>
-                        <a:rPr lang="en-US" altLang="ko-KR" sz="600" u="none" strike="noStrike">
-                          <a:effectLst/>
-                          <a:latin typeface="+mn-ea"/>
-                          <a:ea typeface="+mn-ea"/>
-                        </a:rPr>
-                        <a:t>0</a:t>
+                        <a:t>70.57</a:t>
                       </a:r>
-                      <a:endParaRPr lang="en-US" altLang="ko-KR" sz="600" b="0" i="0" u="none" strike="noStrike">
-                        <a:solidFill>
-                          <a:srgbClr val="000000"/>
-                        </a:solidFill>
-                        <a:effectLst/>
-                        <a:latin typeface="+mn-ea"/>
-                        <a:ea typeface="+mn-ea"/>
-                      </a:endParaRPr>
                     </a:p>
                   </a:txBody>
                   <a:tcPr marL="0" marR="0" marT="0" marB="0" anchor="ctr">
@@ -17339,23 +17090,17 @@
                     <a:bodyPr/>
                     <a:lstStyle/>
                     <a:p>
-                      <a:pPr algn="ctr" fontAlgn="ctr"/>
+                      <a:pPr algn="ctr">
+                        <a:defRPr sz="700" b="0">
+                          <a:solidFill>
+                            <a:srgbClr val="445474"/>
+                          </a:solidFill>
+                          <a:latin typeface="맑은 고딕"/>
+                        </a:defRPr>
+                      </a:pPr>
                       <a:r>
-                        <a:rPr lang="en-US" altLang="ko-KR" sz="600" u="none" strike="noStrike" dirty="0">
-                          <a:effectLst/>
-                          <a:latin typeface="+mn-ea"/>
-                          <a:ea typeface="+mn-ea"/>
-                        </a:rPr>
-                        <a:t>0</a:t>
+                        <a:t>50.28</a:t>
                       </a:r>
-                      <a:endParaRPr lang="en-US" altLang="ko-KR" sz="600" b="0" i="0" u="none" strike="noStrike" dirty="0">
-                        <a:solidFill>
-                          <a:srgbClr val="000000"/>
-                        </a:solidFill>
-                        <a:effectLst/>
-                        <a:latin typeface="+mn-ea"/>
-                        <a:ea typeface="+mn-ea"/>
-                      </a:endParaRPr>
                     </a:p>
                   </a:txBody>
                   <a:tcPr marL="0" marR="0" marT="0" marB="0" anchor="ctr">
@@ -17503,23 +17248,17 @@
                     <a:bodyPr/>
                     <a:lstStyle/>
                     <a:p>
-                      <a:pPr algn="ctr" fontAlgn="ctr"/>
+                      <a:pPr algn="ctr">
+                        <a:defRPr sz="700" b="0">
+                          <a:solidFill>
+                            <a:srgbClr val="445474"/>
+                          </a:solidFill>
+                          <a:latin typeface="맑은 고딕"/>
+                        </a:defRPr>
+                      </a:pPr>
                       <a:r>
-                        <a:rPr lang="en-US" altLang="ko-KR" sz="600" u="none" strike="noStrike" dirty="0">
-                          <a:effectLst/>
-                          <a:latin typeface="+mn-ea"/>
-                          <a:ea typeface="+mn-ea"/>
-                        </a:rPr>
-                        <a:t>0</a:t>
+                        <a:t>11.31</a:t>
                       </a:r>
-                      <a:endParaRPr lang="en-US" altLang="ko-KR" sz="600" b="0" i="0" u="none" strike="noStrike" dirty="0">
-                        <a:solidFill>
-                          <a:srgbClr val="000000"/>
-                        </a:solidFill>
-                        <a:effectLst/>
-                        <a:latin typeface="+mn-ea"/>
-                        <a:ea typeface="+mn-ea"/>
-                      </a:endParaRPr>
                     </a:p>
                   </a:txBody>
                   <a:tcPr marL="0" marR="0" marT="0" marB="0" anchor="ctr">
@@ -18323,23 +18062,17 @@
                     <a:bodyPr/>
                     <a:lstStyle/>
                     <a:p>
-                      <a:pPr algn="ctr" fontAlgn="ctr"/>
+                      <a:pPr algn="ctr">
+                        <a:defRPr sz="700" b="0">
+                          <a:solidFill>
+                            <a:srgbClr val="445474"/>
+                          </a:solidFill>
+                          <a:latin typeface="맑은 고딕"/>
+                        </a:defRPr>
+                      </a:pPr>
                       <a:r>
-                        <a:rPr lang="en-US" altLang="ko-KR" sz="600" u="none" strike="noStrike" dirty="0">
-                          <a:effectLst/>
-                          <a:latin typeface="+mn-ea"/>
-                          <a:ea typeface="+mn-ea"/>
-                        </a:rPr>
-                        <a:t>0</a:t>
+                        <a:t>74.22</a:t>
                       </a:r>
-                      <a:endParaRPr lang="en-US" altLang="ko-KR" sz="600" b="0" i="0" u="none" strike="noStrike" dirty="0">
-                        <a:solidFill>
-                          <a:srgbClr val="000000"/>
-                        </a:solidFill>
-                        <a:effectLst/>
-                        <a:latin typeface="+mn-ea"/>
-                        <a:ea typeface="+mn-ea"/>
-                      </a:endParaRPr>
                     </a:p>
                   </a:txBody>
                   <a:tcPr marL="0" marR="0" marT="0" marB="0" anchor="ctr">
@@ -18457,11 +18190,12 @@
           <a:bodyPr rtlCol="0" anchor="ctr"/>
           <a:lstStyle/>
           <a:p>
-            <a:r>
-              <a:rPr lang="en-US" altLang="ko-KR" sz="1400" b="1" dirty="0">
-                <a:latin typeface="+mj-ea"/>
-                <a:ea typeface="+mj-ea"/>
-              </a:rPr>
+            <a:pPr algn="ctr">
+              <a:defRPr sz="1300" b="1">
+                <a:latin typeface="맑은 고딕"/>
+              </a:defRPr>
+            </a:pPr>
+            <a:r>
               <a:t>C/C &amp; Main problem</a:t>
             </a:r>
           </a:p>
@@ -18516,11 +18250,12 @@
           <a:bodyPr rtlCol="0" anchor="ctr"/>
           <a:lstStyle/>
           <a:p>
-            <a:r>
-              <a:rPr lang="en-US" altLang="ko-KR" sz="1200" b="1" dirty="0">
-                <a:latin typeface="+mj-ea"/>
-                <a:ea typeface="+mj-ea"/>
-              </a:rPr>
+            <a:pPr algn="ctr">
+              <a:defRPr sz="1300" b="1">
+                <a:latin typeface="맑은 고딕"/>
+              </a:defRPr>
+            </a:pPr>
+            <a:r>
               <a:t>MPH:</a:t>
             </a:r>
           </a:p>
@@ -18614,16 +18349,13 @@
           </a:bodyPr>
           <a:lstStyle/>
           <a:p>
-            <a:pPr eaLnBrk="1" hangingPunct="1"/>
-            <a:r>
-              <a:rPr lang="en-US" altLang="ko-KR" sz="1400" b="1" dirty="0">
-                <a:solidFill>
-                  <a:srgbClr val="000000"/>
-                </a:solidFill>
-                <a:latin typeface="+mn-ea"/>
-                <a:cs typeface="Times New Roman Bold" panose="02020803070505020304" pitchFamily="18" charset="0"/>
-              </a:rPr>
-              <a:t>HGI:+</a:t>
+            <a:pPr algn="ctr">
+              <a:defRPr sz="1300" b="1">
+                <a:latin typeface="맑은 고딕"/>
+              </a:defRPr>
+            </a:pPr>
+            <a:r>
+              <a:t>HGI:2.31</a:t>
             </a:r>
           </a:p>
         </p:txBody>
@@ -18707,16 +18439,13 @@
           </a:bodyPr>
           <a:lstStyle/>
           <a:p>
-            <a:pPr eaLnBrk="1" hangingPunct="1"/>
-            <a:r>
-              <a:rPr lang="en-US" altLang="ko-KR" sz="1400" b="1" dirty="0">
-                <a:solidFill>
-                  <a:srgbClr val="000000"/>
-                </a:solidFill>
-                <a:latin typeface="+mn-ea"/>
-                <a:cs typeface="Times New Roman Bold" panose="02020803070505020304" pitchFamily="18" charset="0"/>
-              </a:rPr>
-              <a:t>VGI:+</a:t>
+            <a:pPr algn="ctr">
+              <a:defRPr sz="1300" b="1">
+                <a:latin typeface="맑은 고딕"/>
+              </a:defRPr>
+            </a:pPr>
+            <a:r>
+              <a:t>VGI:2.59</a:t>
             </a:r>
           </a:p>
         </p:txBody>
@@ -19042,16 +18771,13 @@
           </a:bodyPr>
           <a:lstStyle/>
           <a:p>
-            <a:pPr algn="ctr" eaLnBrk="1" hangingPunct="1"/>
-            <a:r>
-              <a:rPr lang="en-US" altLang="ko-KR" sz="1300" b="1" dirty="0">
-                <a:solidFill>
-                  <a:srgbClr val="000000"/>
-                </a:solidFill>
-                <a:latin typeface="+mn-ea"/>
-                <a:cs typeface="Times New Roman Bold" panose="02020803070505020304" pitchFamily="18" charset="0"/>
-              </a:rPr>
-              <a:t>IAPDI:</a:t>
+            <a:pPr algn="ctr">
+              <a:defRPr sz="1300" b="1">
+                <a:latin typeface="맑은 고딕"/>
+              </a:defRPr>
+            </a:pPr>
+            <a:r>
+              <a:t>IAPDI:81.99</a:t>
             </a:r>
           </a:p>
         </p:txBody>
@@ -19265,16 +18991,13 @@
           </a:bodyPr>
           <a:lstStyle/>
           <a:p>
-            <a:pPr eaLnBrk="1" hangingPunct="1"/>
-            <a:r>
-              <a:rPr lang="en-US" altLang="ko-KR" sz="1300" b="1" dirty="0">
-                <a:solidFill>
-                  <a:srgbClr val="000000"/>
-                </a:solidFill>
-                <a:latin typeface="+mn-ea"/>
-                <a:cs typeface="Times New Roman Bold" panose="02020803070505020304" pitchFamily="18" charset="0"/>
-              </a:rPr>
-              <a:t>2APDL:</a:t>
+            <a:pPr algn="ctr">
+              <a:defRPr sz="1300" b="1">
+                <a:latin typeface="맑은 고딕"/>
+              </a:defRPr>
+            </a:pPr>
+            <a:r>
+              <a:t>2APDL:-0.66</a:t>
             </a:r>
           </a:p>
         </p:txBody>
@@ -19307,16 +19030,13 @@
           </a:bodyPr>
           <a:lstStyle/>
           <a:p>
-            <a:pPr eaLnBrk="1" hangingPunct="1"/>
-            <a:r>
-              <a:rPr lang="en-US" altLang="ko-KR" sz="1300" b="1" dirty="0">
-                <a:solidFill>
-                  <a:srgbClr val="000000"/>
-                </a:solidFill>
-                <a:latin typeface="+mn-ea"/>
-                <a:cs typeface="Times New Roman Bold" panose="02020803070505020304" pitchFamily="18" charset="0"/>
-              </a:rPr>
-              <a:t>IODI:</a:t>
+            <a:pPr algn="ctr">
+              <a:defRPr sz="1300" b="1">
+                <a:latin typeface="맑은 고딕"/>
+              </a:defRPr>
+            </a:pPr>
+            <a:r>
+              <a:t>IODI:72.32</a:t>
             </a:r>
           </a:p>
         </p:txBody>
@@ -19392,16 +19112,13 @@
           </a:bodyPr>
           <a:lstStyle/>
           <a:p>
-            <a:pPr eaLnBrk="1" hangingPunct="1"/>
-            <a:r>
-              <a:rPr lang="en-US" altLang="ko-KR" sz="1300" b="1" dirty="0">
-                <a:solidFill>
-                  <a:srgbClr val="000000"/>
-                </a:solidFill>
-                <a:latin typeface="+mn-ea"/>
-                <a:cs typeface="Times New Roman Bold" panose="02020803070505020304" pitchFamily="18" charset="0"/>
-              </a:rPr>
-              <a:t>VDL:</a:t>
+            <a:pPr algn="ctr">
+              <a:defRPr sz="1300" b="1">
+                <a:latin typeface="맑은 고딕"/>
+              </a:defRPr>
+            </a:pPr>
+            <a:r>
+              <a:t>VDL:0.92</a:t>
             </a:r>
           </a:p>
         </p:txBody>
@@ -19477,16 +19194,13 @@
           </a:bodyPr>
           <a:lstStyle/>
           <a:p>
-            <a:pPr eaLnBrk="1" hangingPunct="1"/>
-            <a:r>
-              <a:rPr lang="en-US" altLang="ko-KR" sz="1400" b="1" dirty="0">
-                <a:solidFill>
-                  <a:srgbClr val="000000"/>
-                </a:solidFill>
-                <a:latin typeface="+mn-ea"/>
-                <a:cs typeface="Times New Roman Bold" panose="02020803070505020304" pitchFamily="18" charset="0"/>
-              </a:rPr>
-              <a:t>CEPH:</a:t>
+            <a:pPr algn="ctr">
+              <a:defRPr sz="1300" b="1">
+                <a:latin typeface="맑은 고딕"/>
+              </a:defRPr>
+            </a:pPr>
+            <a:r>
+              <a:t>CEPH RESULT</a:t>
             </a:r>
           </a:p>
         </p:txBody>
@@ -19519,16 +19233,13 @@
           </a:bodyPr>
           <a:lstStyle/>
           <a:p>
-            <a:pPr eaLnBrk="1" hangingPunct="1"/>
-            <a:r>
-              <a:rPr lang="en-US" altLang="ko-KR" sz="1400" b="1" dirty="0">
-                <a:solidFill>
-                  <a:srgbClr val="000000"/>
-                </a:solidFill>
-                <a:latin typeface="+mn-ea"/>
-                <a:cs typeface="Times New Roman Bold" panose="02020803070505020304" pitchFamily="18" charset="0"/>
-              </a:rPr>
-              <a:t>CFD:</a:t>
+            <a:pPr algn="ctr">
+              <a:defRPr sz="1300" b="1">
+                <a:latin typeface="맑은 고딕"/>
+              </a:defRPr>
+            </a:pPr>
+            <a:r>
+              <a:t>CFD:1.08</a:t>
             </a:r>
           </a:p>
         </p:txBody>
@@ -19561,15 +19272,12 @@
           </a:bodyPr>
           <a:lstStyle/>
           <a:p>
-            <a:pPr eaLnBrk="1" hangingPunct="1"/>
-            <a:r>
-              <a:rPr lang="en-US" altLang="ko-KR" sz="1600" b="1" dirty="0">
-                <a:solidFill>
-                  <a:srgbClr val="000000"/>
-                </a:solidFill>
-                <a:latin typeface="+mn-ea"/>
-                <a:cs typeface="Times New Roman Bold" panose="02020803070505020304" pitchFamily="18" charset="0"/>
-              </a:rPr>
+            <a:pPr algn="ctr">
+              <a:defRPr sz="1300" b="1">
+                <a:latin typeface="맑은 고딕"/>
+              </a:defRPr>
+            </a:pPr>
+            <a:r>
               <a:t>Extraction:</a:t>
             </a:r>
           </a:p>
@@ -19622,6 +19330,30 @@
           </a:p>
         </p:txBody>
       </p:sp>
+      <p:pic>
+        <p:nvPicPr>
+          <p:cNvPr id="3170" name="Picture 3169" descr="oral_default.jpg"/>
+          <p:cNvPicPr>
+            <a:picLocks noChangeAspect="1"/>
+          </p:cNvPicPr>
+          <p:nvPr/>
+        </p:nvPicPr>
+        <p:blipFill>
+          <a:blip r:embed="rId2"/>
+          <a:stretch>
+            <a:fillRect/>
+          </a:stretch>
+        </p:blipFill>
+        <p:spPr>
+          <a:xfrm>
+            <a:off x="2468880" y="502920"/>
+            <a:ext cx="1463040" cy="1005840"/>
+          </a:xfrm>
+          <a:prstGeom prst="rect">
+            <a:avLst/>
+          </a:prstGeom>
+        </p:spPr>
+      </p:pic>
     </p:spTree>
     <p:extLst>
       <p:ext uri="{BB962C8B-B14F-4D97-AF65-F5344CB8AC3E}">
@@ -29186,7 +28918,7 @@
       </p:sp>
       <p:pic>
         <p:nvPicPr>
-          <p:cNvPr id="3" name="Picture 2" descr="psa_name_result.png"/>
+          <p:cNvPr id="3" name="Picture 2" descr="default_image.jpg"/>
           <p:cNvPicPr>
             <a:picLocks noChangeAspect="1"/>
           </p:cNvPicPr>
@@ -29200,8 +28932,8 @@
         </p:blipFill>
         <p:spPr>
           <a:xfrm>
-            <a:off x="308589" y="0"/>
-            <a:ext cx="8526820" cy="6858000"/>
+            <a:off x="2275973" y="0"/>
+            <a:ext cx="4592052" cy="6858000"/>
           </a:xfrm>
           <a:prstGeom prst="rect">
             <a:avLst/>
@@ -29433,14 +29165,14 @@
       </p:pic>
       <p:pic>
         <p:nvPicPr>
-          <p:cNvPr id="10" name="Picture 9" descr="photo_8.jpg"/>
+          <p:cNvPr id="10" name="Picture 9" descr="default_image.jpg"/>
           <p:cNvPicPr>
             <a:picLocks noChangeAspect="1"/>
           </p:cNvPicPr>
           <p:nvPr/>
         </p:nvPicPr>
         <p:blipFill>
-          <a:blip r:embed="rId3"/>
+          <a:blip r:embed="rId2"/>
           <a:stretch>
             <a:fillRect/>
           </a:stretch>
@@ -29691,7 +29423,7 @@
       </p:grpSpPr>
       <p:pic>
         <p:nvPicPr>
-          <p:cNvPr id="2" name="Picture 1" descr="lateral_ceph.jpg"/>
+          <p:cNvPr id="2" name="Picture 1" descr="default_image.jpg"/>
           <p:cNvPicPr>
             <a:picLocks noChangeAspect="1"/>
           </p:cNvPicPr>
@@ -29705,8 +29437,8 @@
         </p:blipFill>
         <p:spPr>
           <a:xfrm>
-            <a:off x="311348" y="0"/>
-            <a:ext cx="8521302" cy="6858000"/>
+            <a:off x="2275973" y="0"/>
+            <a:ext cx="4592052" cy="6858000"/>
           </a:xfrm>
           <a:prstGeom prst="rect">
             <a:avLst/>

--- a/output_ppt.pptx
+++ b/output_ppt.pptx
@@ -7038,7 +7038,7 @@
               </a:defRPr>
             </a:pPr>
             <a:r>
-              <a:t>(M)  옥수수 9y 6m 2013.01.04</a:t>
+              <a:t>Female 순응교합 20 2005-03-21</a:t>
             </a:r>
           </a:p>
           <a:p>
@@ -7051,7 +7051,7 @@
               </a:defRPr>
             </a:pPr>
             <a:r>
-              <a:t> S1.B1.D1.C1-nbt(nbt)-RM(Rt)-Fx:Ex-Fx/1-Type IV</a:t>
+              <a:t> S1.B3.D1.C1-nbt(obt)-RM(Rt)-Fx:Ex-Fx/1-Type IV</a:t>
             </a:r>
           </a:p>
         </p:txBody>
@@ -12040,7 +12040,7 @@
                         </a:defRPr>
                       </a:pPr>
                       <a:r>
-                        <a:t>1.93</a:t>
+                        <a:t>자료없음</a:t>
                       </a:r>
                     </a:p>
                   </a:txBody>
@@ -12198,7 +12198,7 @@
                         </a:defRPr>
                       </a:pPr>
                       <a:r>
-                        <a:t>79.31</a:t>
+                        <a:t>168.99</a:t>
                       </a:r>
                     </a:p>
                   </a:txBody>
@@ -12356,7 +12356,7 @@
                         </a:defRPr>
                       </a:pPr>
                       <a:r>
-                        <a:t>77.37</a:t>
+                        <a:t>106.17</a:t>
                       </a:r>
                     </a:p>
                   </a:txBody>
@@ -12514,7 +12514,7 @@
                         </a:defRPr>
                       </a:pPr>
                       <a:r>
-                        <a:t>58.04</a:t>
+                        <a:t>자료없음</a:t>
                       </a:r>
                     </a:p>
                   </a:txBody>
@@ -12672,7 +12672,7 @@
                         </a:defRPr>
                       </a:pPr>
                       <a:r>
-                        <a:t>94.55</a:t>
+                        <a:t>97.32</a:t>
                       </a:r>
                     </a:p>
                   </a:txBody>
@@ -12830,7 +12830,7 @@
                         </a:defRPr>
                       </a:pPr>
                       <a:r>
-                        <a:t>27.41</a:t>
+                        <a:t>76.06</a:t>
                       </a:r>
                     </a:p>
                   </a:txBody>
@@ -12988,7 +12988,7 @@
                         </a:defRPr>
                       </a:pPr>
                       <a:r>
-                        <a:t>26.02</a:t>
+                        <a:t>103.94</a:t>
                       </a:r>
                     </a:p>
                   </a:txBody>
@@ -13146,7 +13146,7 @@
                         </a:defRPr>
                       </a:pPr>
                       <a:r>
-                        <a:t>72.82</a:t>
+                        <a:t>자료없음</a:t>
                       </a:r>
                     </a:p>
                   </a:txBody>
@@ -13304,7 +13304,7 @@
                         </a:defRPr>
                       </a:pPr>
                       <a:r>
-                        <a:t>94.6</a:t>
+                        <a:t>21.61</a:t>
                       </a:r>
                     </a:p>
                   </a:txBody>
@@ -13462,7 +13462,7 @@
                         </a:defRPr>
                       </a:pPr>
                       <a:r>
-                        <a:t>0.08</a:t>
+                        <a:t>자료없음</a:t>
                       </a:r>
                     </a:p>
                   </a:txBody>
@@ -13620,7 +13620,7 @@
                         </a:defRPr>
                       </a:pPr>
                       <a:r>
-                        <a:t>82.94</a:t>
+                        <a:t>88.68</a:t>
                       </a:r>
                     </a:p>
                   </a:txBody>
@@ -13778,7 +13778,7 @@
                         </a:defRPr>
                       </a:pPr>
                       <a:r>
-                        <a:t>79.77</a:t>
+                        <a:t>143.74</a:t>
                       </a:r>
                     </a:p>
                   </a:txBody>
@@ -13936,7 +13936,7 @@
                         </a:defRPr>
                       </a:pPr>
                       <a:r>
-                        <a:t>-5.19</a:t>
+                        <a:t>자료없음</a:t>
                       </a:r>
                     </a:p>
                   </a:txBody>
@@ -14094,7 +14094,7 @@
                         </a:defRPr>
                       </a:pPr>
                       <a:r>
-                        <a:t>63.1</a:t>
+                        <a:t>자료없음</a:t>
                       </a:r>
                     </a:p>
                   </a:txBody>
@@ -14252,7 +14252,7 @@
                         </a:defRPr>
                       </a:pPr>
                       <a:r>
-                        <a:t>128.56</a:t>
+                        <a:t>자료없음</a:t>
                       </a:r>
                     </a:p>
                   </a:txBody>
@@ -14410,7 +14410,7 @@
                         </a:defRPr>
                       </a:pPr>
                       <a:r>
-                        <a:t>122.81</a:t>
+                        <a:t>6.09</a:t>
                       </a:r>
                     </a:p>
                   </a:txBody>
@@ -14568,7 +14568,7 @@
                         </a:defRPr>
                       </a:pPr>
                       <a:r>
-                        <a:t>5.6</a:t>
+                        <a:t>자료없음</a:t>
                       </a:r>
                     </a:p>
                   </a:txBody>
@@ -14726,7 +14726,7 @@
                         </a:defRPr>
                       </a:pPr>
                       <a:r>
-                        <a:t>1.4</a:t>
+                        <a:t>자료없음</a:t>
                       </a:r>
                     </a:p>
                   </a:txBody>
@@ -14884,7 +14884,7 @@
                         </a:defRPr>
                       </a:pPr>
                       <a:r>
-                        <a:t>34.7</a:t>
+                        <a:t>41.62</a:t>
                       </a:r>
                     </a:p>
                   </a:txBody>
@@ -15042,7 +15042,7 @@
                         </a:defRPr>
                       </a:pPr>
                       <a:r>
-                        <a:t>40.15</a:t>
+                        <a:t>70.72</a:t>
                       </a:r>
                     </a:p>
                   </a:txBody>
@@ -15200,7 +15200,7 @@
                         </a:defRPr>
                       </a:pPr>
                       <a:r>
-                        <a:t>57.04</a:t>
+                        <a:t>자료없음</a:t>
                       </a:r>
                     </a:p>
                   </a:txBody>
@@ -15358,7 +15358,7 @@
                         </a:defRPr>
                       </a:pPr>
                       <a:r>
-                        <a:t>62.79</a:t>
+                        <a:t>자료없음</a:t>
                       </a:r>
                     </a:p>
                   </a:txBody>
@@ -15519,7 +15519,7 @@
                         </a:defRPr>
                       </a:pPr>
                       <a:r>
-                        <a:t>30.54</a:t>
+                        <a:t>자료없음</a:t>
                       </a:r>
                     </a:p>
                   </a:txBody>
@@ -15677,7 +15677,7 @@
                         </a:defRPr>
                       </a:pPr>
                       <a:r>
-                        <a:t>48.21</a:t>
+                        <a:t>자료없음</a:t>
                       </a:r>
                     </a:p>
                   </a:txBody>
@@ -15835,7 +15835,7 @@
                         </a:defRPr>
                       </a:pPr>
                       <a:r>
-                        <a:t>35.78</a:t>
+                        <a:t>자료없음</a:t>
                       </a:r>
                     </a:p>
                   </a:txBody>
@@ -15993,7 +15993,7 @@
                         </a:defRPr>
                       </a:pPr>
                       <a:r>
-                        <a:t>64.61</a:t>
+                        <a:t>자료없음</a:t>
                       </a:r>
                     </a:p>
                   </a:txBody>
@@ -16151,7 +16151,7 @@
                         </a:defRPr>
                       </a:pPr>
                       <a:r>
-                        <a:t>65.93</a:t>
+                        <a:t>자료없음</a:t>
                       </a:r>
                     </a:p>
                   </a:txBody>
@@ -16309,7 +16309,7 @@
                         </a:defRPr>
                       </a:pPr>
                       <a:r>
-                        <a:t>51.12</a:t>
+                        <a:t>자료없음</a:t>
                       </a:r>
                     </a:p>
                   </a:txBody>
@@ -16467,7 +16467,7 @@
                         </a:defRPr>
                       </a:pPr>
                       <a:r>
-                        <a:t>72.19</a:t>
+                        <a:t>자료없음</a:t>
                       </a:r>
                     </a:p>
                   </a:txBody>
@@ -16625,7 +16625,7 @@
                         </a:defRPr>
                       </a:pPr>
                       <a:r>
-                        <a:t>6.26</a:t>
+                        <a:t>자료없음</a:t>
                       </a:r>
                     </a:p>
                   </a:txBody>
@@ -16783,7 +16783,7 @@
                         </a:defRPr>
                       </a:pPr>
                       <a:r>
-                        <a:t>49.62</a:t>
+                        <a:t>29.44</a:t>
                       </a:r>
                     </a:p>
                   </a:txBody>
@@ -16941,7 +16941,7 @@
                         </a:defRPr>
                       </a:pPr>
                       <a:r>
-                        <a:t>70.57</a:t>
+                        <a:t>2.05</a:t>
                       </a:r>
                     </a:p>
                   </a:txBody>
@@ -17099,7 +17099,7 @@
                         </a:defRPr>
                       </a:pPr>
                       <a:r>
-                        <a:t>50.28</a:t>
+                        <a:t>자료없음</a:t>
                       </a:r>
                     </a:p>
                   </a:txBody>
@@ -17257,7 +17257,7 @@
                         </a:defRPr>
                       </a:pPr>
                       <a:r>
-                        <a:t>11.31</a:t>
+                        <a:t>자료없음</a:t>
                       </a:r>
                     </a:p>
                   </a:txBody>
@@ -17406,23 +17406,17 @@
                     <a:bodyPr/>
                     <a:lstStyle/>
                     <a:p>
-                      <a:pPr algn="ctr" fontAlgn="ctr"/>
+                      <a:pPr algn="ctr">
+                        <a:defRPr sz="700" b="0">
+                          <a:solidFill>
+                            <a:srgbClr val="445474"/>
+                          </a:solidFill>
+                          <a:latin typeface="맑은 고딕"/>
+                        </a:defRPr>
+                      </a:pPr>
                       <a:r>
-                        <a:rPr lang="en-US" altLang="ko-KR" sz="600" u="none" strike="noStrike" dirty="0">
-                          <a:effectLst/>
-                          <a:latin typeface="+mn-ea"/>
-                          <a:ea typeface="+mn-ea"/>
-                        </a:rPr>
-                        <a:t>0</a:t>
+                        <a:t>자료없음</a:t>
                       </a:r>
-                      <a:endParaRPr lang="en-US" altLang="ko-KR" sz="600" b="0" i="0" u="none" strike="noStrike" dirty="0">
-                        <a:solidFill>
-                          <a:srgbClr val="000000"/>
-                        </a:solidFill>
-                        <a:effectLst/>
-                        <a:latin typeface="+mn-ea"/>
-                        <a:ea typeface="+mn-ea"/>
-                      </a:endParaRPr>
                     </a:p>
                   </a:txBody>
                   <a:tcPr marL="0" marR="0" marT="0" marB="0" anchor="ctr">
@@ -17570,23 +17564,17 @@
                     <a:bodyPr/>
                     <a:lstStyle/>
                     <a:p>
-                      <a:pPr algn="ctr" fontAlgn="ctr"/>
+                      <a:pPr algn="ctr">
+                        <a:defRPr sz="700" b="0">
+                          <a:solidFill>
+                            <a:srgbClr val="445474"/>
+                          </a:solidFill>
+                          <a:latin typeface="맑은 고딕"/>
+                        </a:defRPr>
+                      </a:pPr>
                       <a:r>
-                        <a:rPr lang="en-US" altLang="ko-KR" sz="600" u="none" strike="noStrike">
-                          <a:effectLst/>
-                          <a:latin typeface="+mn-ea"/>
-                          <a:ea typeface="+mn-ea"/>
-                        </a:rPr>
-                        <a:t>0</a:t>
+                        <a:t>자료없음</a:t>
                       </a:r>
-                      <a:endParaRPr lang="en-US" altLang="ko-KR" sz="600" b="0" i="0" u="none" strike="noStrike">
-                        <a:solidFill>
-                          <a:srgbClr val="000000"/>
-                        </a:solidFill>
-                        <a:effectLst/>
-                        <a:latin typeface="+mn-ea"/>
-                        <a:ea typeface="+mn-ea"/>
-                      </a:endParaRPr>
                     </a:p>
                   </a:txBody>
                   <a:tcPr marL="0" marR="0" marT="0" marB="0" anchor="ctr">
@@ -17734,23 +17722,17 @@
                     <a:bodyPr/>
                     <a:lstStyle/>
                     <a:p>
-                      <a:pPr algn="ctr" fontAlgn="ctr"/>
+                      <a:pPr algn="ctr">
+                        <a:defRPr sz="700" b="0">
+                          <a:solidFill>
+                            <a:srgbClr val="445474"/>
+                          </a:solidFill>
+                          <a:latin typeface="맑은 고딕"/>
+                        </a:defRPr>
+                      </a:pPr>
                       <a:r>
-                        <a:rPr lang="en-US" altLang="ko-KR" sz="600" u="none" strike="noStrike" dirty="0">
-                          <a:effectLst/>
-                          <a:latin typeface="+mn-ea"/>
-                          <a:ea typeface="+mn-ea"/>
-                        </a:rPr>
-                        <a:t>0</a:t>
+                        <a:t>자료없음</a:t>
                       </a:r>
-                      <a:endParaRPr lang="en-US" altLang="ko-KR" sz="600" b="0" i="0" u="none" strike="noStrike" dirty="0">
-                        <a:solidFill>
-                          <a:srgbClr val="000000"/>
-                        </a:solidFill>
-                        <a:effectLst/>
-                        <a:latin typeface="+mn-ea"/>
-                        <a:ea typeface="+mn-ea"/>
-                      </a:endParaRPr>
                     </a:p>
                   </a:txBody>
                   <a:tcPr marL="0" marR="0" marT="0" marB="0" anchor="ctr">
@@ -17898,23 +17880,17 @@
                     <a:bodyPr/>
                     <a:lstStyle/>
                     <a:p>
-                      <a:pPr algn="ctr" fontAlgn="ctr"/>
+                      <a:pPr algn="ctr">
+                        <a:defRPr sz="700" b="0">
+                          <a:solidFill>
+                            <a:srgbClr val="445474"/>
+                          </a:solidFill>
+                          <a:latin typeface="맑은 고딕"/>
+                        </a:defRPr>
+                      </a:pPr>
                       <a:r>
-                        <a:rPr lang="en-US" altLang="ko-KR" sz="600" u="none" strike="noStrike" dirty="0">
-                          <a:effectLst/>
-                          <a:latin typeface="+mn-ea"/>
-                          <a:ea typeface="+mn-ea"/>
-                        </a:rPr>
-                        <a:t>0</a:t>
+                        <a:t>자료없음</a:t>
                       </a:r>
-                      <a:endParaRPr lang="en-US" altLang="ko-KR" sz="600" b="0" i="0" u="none" strike="noStrike" dirty="0">
-                        <a:solidFill>
-                          <a:srgbClr val="000000"/>
-                        </a:solidFill>
-                        <a:effectLst/>
-                        <a:latin typeface="+mn-ea"/>
-                        <a:ea typeface="+mn-ea"/>
-                      </a:endParaRPr>
                     </a:p>
                   </a:txBody>
                   <a:tcPr marL="0" marR="0" marT="0" marB="0" anchor="ctr">
@@ -18071,7 +18047,7 @@
                         </a:defRPr>
                       </a:pPr>
                       <a:r>
-                        <a:t>74.22</a:t>
+                        <a:t>자료없음</a:t>
                       </a:r>
                     </a:p>
                   </a:txBody>
@@ -18355,7 +18331,7 @@
               </a:defRPr>
             </a:pPr>
             <a:r>
-              <a:t>HGI:2.31</a:t>
+              <a:t>HGI:-4.11</a:t>
             </a:r>
           </a:p>
         </p:txBody>
@@ -18445,7 +18421,7 @@
               </a:defRPr>
             </a:pPr>
             <a:r>
-              <a:t>VGI:2.59</a:t>
+              <a:t>VGI:14.59</a:t>
             </a:r>
           </a:p>
         </p:txBody>
@@ -18777,7 +18753,7 @@
               </a:defRPr>
             </a:pPr>
             <a:r>
-              <a:t>IAPDI:81.99</a:t>
+              <a:t>IAPDI:81</a:t>
             </a:r>
           </a:p>
         </p:txBody>
@@ -18997,7 +18973,7 @@
               </a:defRPr>
             </a:pPr>
             <a:r>
-              <a:t>2APDL:-0.66</a:t>
+              <a:t>2APDL:0.0</a:t>
             </a:r>
           </a:p>
         </p:txBody>
@@ -19036,7 +19012,7 @@
               </a:defRPr>
             </a:pPr>
             <a:r>
-              <a:t>IODI:72.32</a:t>
+              <a:t>IODI:38.14</a:t>
             </a:r>
           </a:p>
         </p:txBody>
@@ -19118,7 +19094,7 @@
               </a:defRPr>
             </a:pPr>
             <a:r>
-              <a:t>VDL:0.92</a:t>
+              <a:t>VDL:-18.49</a:t>
             </a:r>
           </a:p>
         </p:txBody>
@@ -19239,7 +19215,7 @@
               </a:defRPr>
             </a:pPr>
             <a:r>
-              <a:t>CFD:1.08</a:t>
+              <a:t>CFD:-38.14</a:t>
             </a:r>
           </a:p>
         </p:txBody>
@@ -28918,7 +28894,7 @@
       </p:sp>
       <p:pic>
         <p:nvPicPr>
-          <p:cNvPr id="3" name="Picture 2" descr="default_image.jpg"/>
+          <p:cNvPr id="3" name="Picture 2" descr="psa_name_result.png"/>
           <p:cNvPicPr>
             <a:picLocks noChangeAspect="1"/>
           </p:cNvPicPr>
@@ -28932,8 +28908,8 @@
         </p:blipFill>
         <p:spPr>
           <a:xfrm>
-            <a:off x="2275973" y="0"/>
-            <a:ext cx="4592052" cy="6858000"/>
+            <a:off x="305335" y="0"/>
+            <a:ext cx="8533328" cy="6858000"/>
           </a:xfrm>
           <a:prstGeom prst="rect">
             <a:avLst/>
@@ -29021,14 +28997,14 @@
       </p:pic>
       <p:pic>
         <p:nvPicPr>
-          <p:cNvPr id="4" name="Picture 3" descr="default_image.jpg"/>
+          <p:cNvPr id="4" name="Picture 3" descr="photo_2.jpg"/>
           <p:cNvPicPr>
             <a:picLocks noChangeAspect="1"/>
           </p:cNvPicPr>
           <p:nvPr/>
         </p:nvPicPr>
         <p:blipFill>
-          <a:blip r:embed="rId2"/>
+          <a:blip r:embed="rId3"/>
           <a:stretch>
             <a:fillRect/>
           </a:stretch>
@@ -29423,7 +29399,7 @@
       </p:grpSpPr>
       <p:pic>
         <p:nvPicPr>
-          <p:cNvPr id="2" name="Picture 1" descr="default_image.jpg"/>
+          <p:cNvPr id="2" name="Picture 1" descr="lateral_ceph.jpg"/>
           <p:cNvPicPr>
             <a:picLocks noChangeAspect="1"/>
           </p:cNvPicPr>
@@ -29437,8 +29413,8 @@
         </p:blipFill>
         <p:spPr>
           <a:xfrm>
-            <a:off x="2275973" y="0"/>
-            <a:ext cx="4592052" cy="6858000"/>
+            <a:off x="311348" y="0"/>
+            <a:ext cx="8521302" cy="6858000"/>
           </a:xfrm>
           <a:prstGeom prst="rect">
             <a:avLst/>

--- a/output_ppt.pptx
+++ b/output_ppt.pptx
@@ -7038,7 +7038,7 @@
               </a:defRPr>
             </a:pPr>
             <a:r>
-              <a:t>Female 순응교합 20 2005-03-21</a:t>
+              <a:t>Male 순응교합 20 2005-03-22</a:t>
             </a:r>
           </a:p>
           <a:p>
@@ -7051,7 +7051,7 @@
               </a:defRPr>
             </a:pPr>
             <a:r>
-              <a:t> S1.B3.D1.C1-nbt(obt)-RM(Rt)-Fx:Ex-Fx/1-Type IV</a:t>
+              <a:t> S1.B2.D1.C1-nbt(obt)-RM(Rt)-Fx:Ex-Fx/1-Type IV</a:t>
             </a:r>
           </a:p>
         </p:txBody>
@@ -12198,7 +12198,7 @@
                         </a:defRPr>
                       </a:pPr>
                       <a:r>
-                        <a:t>168.99</a:t>
+                        <a:t>57.8</a:t>
                       </a:r>
                     </a:p>
                   </a:txBody>
@@ -12356,7 +12356,7 @@
                         </a:defRPr>
                       </a:pPr>
                       <a:r>
-                        <a:t>106.17</a:t>
+                        <a:t>131.21</a:t>
                       </a:r>
                     </a:p>
                   </a:txBody>
@@ -12672,7 +12672,7 @@
                         </a:defRPr>
                       </a:pPr>
                       <a:r>
-                        <a:t>97.32</a:t>
+                        <a:t>154.77</a:t>
                       </a:r>
                     </a:p>
                   </a:txBody>
@@ -12830,7 +12830,7 @@
                         </a:defRPr>
                       </a:pPr>
                       <a:r>
-                        <a:t>76.06</a:t>
+                        <a:t>104.28</a:t>
                       </a:r>
                     </a:p>
                   </a:txBody>
@@ -12988,7 +12988,7 @@
                         </a:defRPr>
                       </a:pPr>
                       <a:r>
-                        <a:t>103.94</a:t>
+                        <a:t>75.72</a:t>
                       </a:r>
                     </a:p>
                   </a:txBody>
@@ -13304,7 +13304,7 @@
                         </a:defRPr>
                       </a:pPr>
                       <a:r>
-                        <a:t>21.61</a:t>
+                        <a:t>165.74</a:t>
                       </a:r>
                     </a:p>
                   </a:txBody>
@@ -13620,7 +13620,7 @@
                         </a:defRPr>
                       </a:pPr>
                       <a:r>
-                        <a:t>88.68</a:t>
+                        <a:t>70.56</a:t>
                       </a:r>
                     </a:p>
                   </a:txBody>
@@ -13778,7 +13778,7 @@
                         </a:defRPr>
                       </a:pPr>
                       <a:r>
-                        <a:t>143.74</a:t>
+                        <a:t>31.14</a:t>
                       </a:r>
                     </a:p>
                   </a:txBody>
@@ -14410,7 +14410,7 @@
                         </a:defRPr>
                       </a:pPr>
                       <a:r>
-                        <a:t>6.09</a:t>
+                        <a:t>109.47</a:t>
                       </a:r>
                     </a:p>
                   </a:txBody>
@@ -14884,7 +14884,7 @@
                         </a:defRPr>
                       </a:pPr>
                       <a:r>
-                        <a:t>41.62</a:t>
+                        <a:t>30.41</a:t>
                       </a:r>
                     </a:p>
                   </a:txBody>
@@ -15042,7 +15042,7 @@
                         </a:defRPr>
                       </a:pPr>
                       <a:r>
-                        <a:t>70.72</a:t>
+                        <a:t>98.85</a:t>
                       </a:r>
                     </a:p>
                   </a:txBody>
@@ -15519,7 +15519,7 @@
                         </a:defRPr>
                       </a:pPr>
                       <a:r>
-                        <a:t>자료없음</a:t>
+                        <a:t>50.1</a:t>
                       </a:r>
                     </a:p>
                   </a:txBody>
@@ -15677,7 +15677,7 @@
                         </a:defRPr>
                       </a:pPr>
                       <a:r>
-                        <a:t>자료없음</a:t>
+                        <a:t>65.1</a:t>
                       </a:r>
                     </a:p>
                   </a:txBody>
@@ -15835,7 +15835,7 @@
                         </a:defRPr>
                       </a:pPr>
                       <a:r>
-                        <a:t>자료없음</a:t>
+                        <a:t>118.1</a:t>
                       </a:r>
                     </a:p>
                   </a:txBody>
@@ -16151,7 +16151,7 @@
                         </a:defRPr>
                       </a:pPr>
                       <a:r>
-                        <a:t>자료없음</a:t>
+                        <a:t>36.9</a:t>
                       </a:r>
                     </a:p>
                   </a:txBody>
@@ -16309,7 +16309,7 @@
                         </a:defRPr>
                       </a:pPr>
                       <a:r>
-                        <a:t>자료없음</a:t>
+                        <a:t>23.4</a:t>
                       </a:r>
                     </a:p>
                   </a:txBody>
@@ -16467,7 +16467,7 @@
                         </a:defRPr>
                       </a:pPr>
                       <a:r>
-                        <a:t>자료없음</a:t>
+                        <a:t>89.8</a:t>
                       </a:r>
                     </a:p>
                   </a:txBody>
@@ -16783,7 +16783,7 @@
                         </a:defRPr>
                       </a:pPr>
                       <a:r>
-                        <a:t>29.44</a:t>
+                        <a:t>18.59</a:t>
                       </a:r>
                     </a:p>
                   </a:txBody>
@@ -16941,7 +16941,7 @@
                         </a:defRPr>
                       </a:pPr>
                       <a:r>
-                        <a:t>2.05</a:t>
+                        <a:t>21.59</a:t>
                       </a:r>
                     </a:p>
                   </a:txBody>
@@ -17573,7 +17573,7 @@
                         </a:defRPr>
                       </a:pPr>
                       <a:r>
-                        <a:t>자료없음</a:t>
+                        <a:t>개발 중</a:t>
                       </a:r>
                     </a:p>
                   </a:txBody>
@@ -17731,7 +17731,7 @@
                         </a:defRPr>
                       </a:pPr>
                       <a:r>
-                        <a:t>자료없음</a:t>
+                        <a:t>개발 중</a:t>
                       </a:r>
                     </a:p>
                   </a:txBody>
@@ -18331,7 +18331,7 @@
               </a:defRPr>
             </a:pPr>
             <a:r>
-              <a:t>HGI:-4.11</a:t>
+              <a:t>HGI:14.88</a:t>
             </a:r>
           </a:p>
         </p:txBody>
@@ -18421,7 +18421,7 @@
               </a:defRPr>
             </a:pPr>
             <a:r>
-              <a:t>VGI:14.59</a:t>
+              <a:t>VGI:10.68</a:t>
             </a:r>
           </a:p>
         </p:txBody>
@@ -19012,7 +19012,7 @@
               </a:defRPr>
             </a:pPr>
             <a:r>
-              <a:t>IODI:38.14</a:t>
+              <a:t>IODI:54.44</a:t>
             </a:r>
           </a:p>
         </p:txBody>
@@ -19094,7 +19094,7 @@
               </a:defRPr>
             </a:pPr>
             <a:r>
-              <a:t>VDL:-18.49</a:t>
+              <a:t>VDL:-26.4</a:t>
             </a:r>
           </a:p>
         </p:txBody>
@@ -19215,7 +19215,7 @@
               </a:defRPr>
             </a:pPr>
             <a:r>
-              <a:t>CFD:-38.14</a:t>
+              <a:t>CFD:-54.44</a:t>
             </a:r>
           </a:p>
         </p:txBody>
@@ -28997,14 +28997,14 @@
       </p:pic>
       <p:pic>
         <p:nvPicPr>
-          <p:cNvPr id="4" name="Picture 3" descr="photo_2.jpg"/>
+          <p:cNvPr id="4" name="Picture 3" descr="default_image.jpg"/>
           <p:cNvPicPr>
             <a:picLocks noChangeAspect="1"/>
           </p:cNvPicPr>
           <p:nvPr/>
         </p:nvPicPr>
         <p:blipFill>
-          <a:blip r:embed="rId3"/>
+          <a:blip r:embed="rId2"/>
           <a:stretch>
             <a:fillRect/>
           </a:stretch>

--- a/output_ppt.pptx
+++ b/output_ppt.pptx
@@ -7038,7 +7038,7 @@
               </a:defRPr>
             </a:pPr>
             <a:r>
-              <a:t>Male 순응교합 20 2005-03-22</a:t>
+              <a:t>Male 순응교합 20 2005-03-24</a:t>
             </a:r>
           </a:p>
           <a:p>
@@ -12198,7 +12198,7 @@
                         </a:defRPr>
                       </a:pPr>
                       <a:r>
-                        <a:t>57.8</a:t>
+                        <a:t>58.91</a:t>
                       </a:r>
                     </a:p>
                   </a:txBody>
@@ -12356,7 +12356,7 @@
                         </a:defRPr>
                       </a:pPr>
                       <a:r>
-                        <a:t>131.21</a:t>
+                        <a:t>77.62</a:t>
                       </a:r>
                     </a:p>
                   </a:txBody>
@@ -12672,7 +12672,7 @@
                         </a:defRPr>
                       </a:pPr>
                       <a:r>
-                        <a:t>154.77</a:t>
+                        <a:t>37.36</a:t>
                       </a:r>
                     </a:p>
                   </a:txBody>
@@ -12830,7 +12830,7 @@
                         </a:defRPr>
                       </a:pPr>
                       <a:r>
-                        <a:t>104.28</a:t>
+                        <a:t>92.57</a:t>
                       </a:r>
                     </a:p>
                   </a:txBody>
@@ -12988,7 +12988,7 @@
                         </a:defRPr>
                       </a:pPr>
                       <a:r>
-                        <a:t>75.72</a:t>
+                        <a:t>87.43</a:t>
                       </a:r>
                     </a:p>
                   </a:txBody>
@@ -13304,7 +13304,7 @@
                         </a:defRPr>
                       </a:pPr>
                       <a:r>
-                        <a:t>165.74</a:t>
+                        <a:t>99.93</a:t>
                       </a:r>
                     </a:p>
                   </a:txBody>
@@ -13620,7 +13620,7 @@
                         </a:defRPr>
                       </a:pPr>
                       <a:r>
-                        <a:t>70.56</a:t>
+                        <a:t>109.07</a:t>
                       </a:r>
                     </a:p>
                   </a:txBody>
@@ -13778,7 +13778,7 @@
                         </a:defRPr>
                       </a:pPr>
                       <a:r>
-                        <a:t>31.14</a:t>
+                        <a:t>69.18</a:t>
                       </a:r>
                     </a:p>
                   </a:txBody>
@@ -14410,7 +14410,7 @@
                         </a:defRPr>
                       </a:pPr>
                       <a:r>
-                        <a:t>109.47</a:t>
+                        <a:t>170.95</a:t>
                       </a:r>
                     </a:p>
                   </a:txBody>
@@ -14884,7 +14884,7 @@
                         </a:defRPr>
                       </a:pPr>
                       <a:r>
-                        <a:t>30.41</a:t>
+                        <a:t>17.27</a:t>
                       </a:r>
                     </a:p>
                   </a:txBody>
@@ -15042,7 +15042,7 @@
                         </a:defRPr>
                       </a:pPr>
                       <a:r>
-                        <a:t>98.85</a:t>
+                        <a:t>89.34</a:t>
                       </a:r>
                     </a:p>
                   </a:txBody>
@@ -15519,7 +15519,7 @@
                         </a:defRPr>
                       </a:pPr>
                       <a:r>
-                        <a:t>50.1</a:t>
+                        <a:t>45.7</a:t>
                       </a:r>
                     </a:p>
                   </a:txBody>
@@ -15677,7 +15677,7 @@
                         </a:defRPr>
                       </a:pPr>
                       <a:r>
-                        <a:t>65.1</a:t>
+                        <a:t>55.6</a:t>
                       </a:r>
                     </a:p>
                   </a:txBody>
@@ -15835,7 +15835,7 @@
                         </a:defRPr>
                       </a:pPr>
                       <a:r>
-                        <a:t>118.1</a:t>
+                        <a:t>17.4</a:t>
                       </a:r>
                     </a:p>
                   </a:txBody>
@@ -16151,7 +16151,7 @@
                         </a:defRPr>
                       </a:pPr>
                       <a:r>
-                        <a:t>36.9</a:t>
+                        <a:t>51.5</a:t>
                       </a:r>
                     </a:p>
                   </a:txBody>
@@ -16309,7 +16309,7 @@
                         </a:defRPr>
                       </a:pPr>
                       <a:r>
-                        <a:t>23.4</a:t>
+                        <a:t>29.6</a:t>
                       </a:r>
                     </a:p>
                   </a:txBody>
@@ -16467,7 +16467,7 @@
                         </a:defRPr>
                       </a:pPr>
                       <a:r>
-                        <a:t>89.8</a:t>
+                        <a:t>61.1</a:t>
                       </a:r>
                     </a:p>
                   </a:txBody>
@@ -16783,7 +16783,7 @@
                         </a:defRPr>
                       </a:pPr>
                       <a:r>
-                        <a:t>18.59</a:t>
+                        <a:t>169.74</a:t>
                       </a:r>
                     </a:p>
                   </a:txBody>
@@ -16941,7 +16941,7 @@
                         </a:defRPr>
                       </a:pPr>
                       <a:r>
-                        <a:t>21.59</a:t>
+                        <a:t>61.36</a:t>
                       </a:r>
                     </a:p>
                   </a:txBody>
@@ -18331,7 +18331,7 @@
               </a:defRPr>
             </a:pPr>
             <a:r>
-              <a:t>HGI:14.88</a:t>
+              <a:t>HGI:27.79</a:t>
             </a:r>
           </a:p>
         </p:txBody>
@@ -18421,7 +18421,7 @@
               </a:defRPr>
             </a:pPr>
             <a:r>
-              <a:t>VGI:10.68</a:t>
+              <a:t>VGI:2.73</a:t>
             </a:r>
           </a:p>
         </p:txBody>
@@ -19012,7 +19012,7 @@
               </a:defRPr>
             </a:pPr>
             <a:r>
-              <a:t>IODI:54.44</a:t>
+              <a:t>IODI:54.15</a:t>
             </a:r>
           </a:p>
         </p:txBody>
@@ -19094,7 +19094,7 @@
               </a:defRPr>
             </a:pPr>
             <a:r>
-              <a:t>VDL:-26.4</a:t>
+              <a:t>VDL:-26.26</a:t>
             </a:r>
           </a:p>
         </p:txBody>
@@ -19215,7 +19215,7 @@
               </a:defRPr>
             </a:pPr>
             <a:r>
-              <a:t>CFD:-54.44</a:t>
+              <a:t>CFD:-54.15</a:t>
             </a:r>
           </a:p>
         </p:txBody>
@@ -28894,7 +28894,7 @@
       </p:sp>
       <p:pic>
         <p:nvPicPr>
-          <p:cNvPr id="3" name="Picture 2" descr="psa_name_result.png"/>
+          <p:cNvPr id="3" name="Picture 2" descr="psa.jpg"/>
           <p:cNvPicPr>
             <a:picLocks noChangeAspect="1"/>
           </p:cNvPicPr>
@@ -29093,14 +29093,14 @@
       </p:pic>
       <p:pic>
         <p:nvPicPr>
-          <p:cNvPr id="8" name="Picture 7" descr="default_image.jpg"/>
+          <p:cNvPr id="8" name="Picture 7" descr="photo_6.jpg"/>
           <p:cNvPicPr>
             <a:picLocks noChangeAspect="1"/>
           </p:cNvPicPr>
           <p:nvPr/>
         </p:nvPicPr>
         <p:blipFill>
-          <a:blip r:embed="rId2"/>
+          <a:blip r:embed="rId3"/>
           <a:stretch>
             <a:fillRect/>
           </a:stretch>

--- a/output_ppt.pptx
+++ b/output_ppt.pptx
@@ -499,7 +499,7 @@
           <a:p>
             <a:fld id="{B00729D7-BDA7-41E1-AD79-DC61E6DD2EC2}" type="datetimeFigureOut">
               <a:rPr lang="ko-KR" altLang="en-US" smtClean="0"/>
-              <a:t>2025-02-17</a:t>
+              <a:t>2025-03-19</a:t>
             </a:fld>
             <a:endParaRPr lang="ko-KR" altLang="en-US"/>
           </a:p>
@@ -669,7 +669,7 @@
           <a:p>
             <a:fld id="{B00729D7-BDA7-41E1-AD79-DC61E6DD2EC2}" type="datetimeFigureOut">
               <a:rPr lang="ko-KR" altLang="en-US" smtClean="0"/>
-              <a:t>2025-02-17</a:t>
+              <a:t>2025-03-19</a:t>
             </a:fld>
             <a:endParaRPr lang="ko-KR" altLang="en-US"/>
           </a:p>
@@ -849,7 +849,7 @@
           <a:p>
             <a:fld id="{B00729D7-BDA7-41E1-AD79-DC61E6DD2EC2}" type="datetimeFigureOut">
               <a:rPr lang="ko-KR" altLang="en-US" smtClean="0"/>
-              <a:t>2025-02-17</a:t>
+              <a:t>2025-03-19</a:t>
             </a:fld>
             <a:endParaRPr lang="ko-KR" altLang="en-US"/>
           </a:p>
@@ -1525,7 +1525,7 @@
           <a:p>
             <a:fld id="{B00729D7-BDA7-41E1-AD79-DC61E6DD2EC2}" type="datetimeFigureOut">
               <a:rPr lang="ko-KR" altLang="en-US" smtClean="0"/>
-              <a:t>2025-02-17</a:t>
+              <a:t>2025-03-19</a:t>
             </a:fld>
             <a:endParaRPr lang="ko-KR" altLang="en-US"/>
           </a:p>
@@ -1769,7 +1769,7 @@
           <a:p>
             <a:fld id="{B00729D7-BDA7-41E1-AD79-DC61E6DD2EC2}" type="datetimeFigureOut">
               <a:rPr lang="ko-KR" altLang="en-US" smtClean="0"/>
-              <a:t>2025-02-17</a:t>
+              <a:t>2025-03-19</a:t>
             </a:fld>
             <a:endParaRPr lang="ko-KR" altLang="en-US"/>
           </a:p>
@@ -2001,7 +2001,7 @@
           <a:p>
             <a:fld id="{B00729D7-BDA7-41E1-AD79-DC61E6DD2EC2}" type="datetimeFigureOut">
               <a:rPr lang="ko-KR" altLang="en-US" smtClean="0"/>
-              <a:t>2025-02-17</a:t>
+              <a:t>2025-03-19</a:t>
             </a:fld>
             <a:endParaRPr lang="ko-KR" altLang="en-US"/>
           </a:p>
@@ -2368,7 +2368,7 @@
           <a:p>
             <a:fld id="{B00729D7-BDA7-41E1-AD79-DC61E6DD2EC2}" type="datetimeFigureOut">
               <a:rPr lang="ko-KR" altLang="en-US" smtClean="0"/>
-              <a:t>2025-02-17</a:t>
+              <a:t>2025-03-19</a:t>
             </a:fld>
             <a:endParaRPr lang="ko-KR" altLang="en-US"/>
           </a:p>
@@ -2486,7 +2486,7 @@
           <a:p>
             <a:fld id="{B00729D7-BDA7-41E1-AD79-DC61E6DD2EC2}" type="datetimeFigureOut">
               <a:rPr lang="ko-KR" altLang="en-US" smtClean="0"/>
-              <a:t>2025-02-17</a:t>
+              <a:t>2025-03-19</a:t>
             </a:fld>
             <a:endParaRPr lang="ko-KR" altLang="en-US"/>
           </a:p>
@@ -2581,7 +2581,7 @@
           <a:p>
             <a:fld id="{B00729D7-BDA7-41E1-AD79-DC61E6DD2EC2}" type="datetimeFigureOut">
               <a:rPr lang="ko-KR" altLang="en-US" smtClean="0"/>
-              <a:t>2025-02-17</a:t>
+              <a:t>2025-03-19</a:t>
             </a:fld>
             <a:endParaRPr lang="ko-KR" altLang="en-US"/>
           </a:p>
@@ -2858,7 +2858,7 @@
           <a:p>
             <a:fld id="{B00729D7-BDA7-41E1-AD79-DC61E6DD2EC2}" type="datetimeFigureOut">
               <a:rPr lang="ko-KR" altLang="en-US" smtClean="0"/>
-              <a:t>2025-02-17</a:t>
+              <a:t>2025-03-19</a:t>
             </a:fld>
             <a:endParaRPr lang="ko-KR" altLang="en-US"/>
           </a:p>
@@ -3071,7 +3071,7 @@
           <a:p>
             <a:fld id="{B00729D7-BDA7-41E1-AD79-DC61E6DD2EC2}" type="datetimeFigureOut">
               <a:rPr lang="ko-KR" altLang="en-US" smtClean="0"/>
-              <a:t>2025-02-17</a:t>
+              <a:t>2025-03-19</a:t>
             </a:fld>
             <a:endParaRPr lang="ko-KR" altLang="en-US"/>
           </a:p>
@@ -7038,7 +7038,7 @@
               </a:defRPr>
             </a:pPr>
             <a:r>
-              <a:t>Male 순응교합 20 2005-03-24</a:t>
+              <a:t>Male 순응교합 20 2005-03-25</a:t>
             </a:r>
           </a:p>
           <a:p>
@@ -7051,7 +7051,7 @@
               </a:defRPr>
             </a:pPr>
             <a:r>
-              <a:t> S1.B2.D1.C1-nbt(obt)-RM(Rt)-Fx:Ex-Fx/1-Type IV</a:t>
+              <a:t> S1.B3.D1.C1-nbt(dbt)-RM(Rt)-Fx:Ex-Fx/1-Type IV</a:t>
             </a:r>
           </a:p>
         </p:txBody>
@@ -12198,7 +12198,7 @@
                         </a:defRPr>
                       </a:pPr>
                       <a:r>
-                        <a:t>58.91</a:t>
+                        <a:t>101.5</a:t>
                       </a:r>
                     </a:p>
                   </a:txBody>
@@ -12356,7 +12356,7 @@
                         </a:defRPr>
                       </a:pPr>
                       <a:r>
-                        <a:t>77.62</a:t>
+                        <a:t>37.4</a:t>
                       </a:r>
                     </a:p>
                   </a:txBody>
@@ -12672,7 +12672,7 @@
                         </a:defRPr>
                       </a:pPr>
                       <a:r>
-                        <a:t>37.36</a:t>
+                        <a:t>-38</a:t>
                       </a:r>
                     </a:p>
                   </a:txBody>
@@ -12830,7 +12830,7 @@
                         </a:defRPr>
                       </a:pPr>
                       <a:r>
-                        <a:t>92.57</a:t>
+                        <a:t>-90.4</a:t>
                       </a:r>
                     </a:p>
                   </a:txBody>
@@ -12988,7 +12988,7 @@
                         </a:defRPr>
                       </a:pPr>
                       <a:r>
-                        <a:t>87.43</a:t>
+                        <a:t>71.6</a:t>
                       </a:r>
                     </a:p>
                   </a:txBody>
@@ -13304,7 +13304,7 @@
                         </a:defRPr>
                       </a:pPr>
                       <a:r>
-                        <a:t>99.93</a:t>
+                        <a:t>143.3</a:t>
                       </a:r>
                     </a:p>
                   </a:txBody>
@@ -13620,7 +13620,7 @@
                         </a:defRPr>
                       </a:pPr>
                       <a:r>
-                        <a:t>109.07</a:t>
+                        <a:t>152.7</a:t>
                       </a:r>
                     </a:p>
                   </a:txBody>
@@ -13778,7 +13778,7 @@
                         </a:defRPr>
                       </a:pPr>
                       <a:r>
-                        <a:t>69.18</a:t>
+                        <a:t>141.6</a:t>
                       </a:r>
                     </a:p>
                   </a:txBody>
@@ -14410,7 +14410,7 @@
                         </a:defRPr>
                       </a:pPr>
                       <a:r>
-                        <a:t>170.95</a:t>
+                        <a:t>162.7</a:t>
                       </a:r>
                     </a:p>
                   </a:txBody>
@@ -14884,7 +14884,7 @@
                         </a:defRPr>
                       </a:pPr>
                       <a:r>
-                        <a:t>17.27</a:t>
+                        <a:t>21.6</a:t>
                       </a:r>
                     </a:p>
                   </a:txBody>
@@ -15042,7 +15042,7 @@
                         </a:defRPr>
                       </a:pPr>
                       <a:r>
-                        <a:t>89.34</a:t>
+                        <a:t>-18.2</a:t>
                       </a:r>
                     </a:p>
                   </a:txBody>
@@ -15519,7 +15519,7 @@
                         </a:defRPr>
                       </a:pPr>
                       <a:r>
-                        <a:t>45.7</a:t>
+                        <a:t>104.6</a:t>
                       </a:r>
                     </a:p>
                   </a:txBody>
@@ -15677,7 +15677,7 @@
                         </a:defRPr>
                       </a:pPr>
                       <a:r>
-                        <a:t>55.6</a:t>
+                        <a:t>192.6</a:t>
                       </a:r>
                     </a:p>
                   </a:txBody>
@@ -15835,7 +15835,7 @@
                         </a:defRPr>
                       </a:pPr>
                       <a:r>
-                        <a:t>17.4</a:t>
+                        <a:t>120.1</a:t>
                       </a:r>
                     </a:p>
                   </a:txBody>
@@ -16151,7 +16151,7 @@
                         </a:defRPr>
                       </a:pPr>
                       <a:r>
-                        <a:t>51.5</a:t>
+                        <a:t>80.6</a:t>
                       </a:r>
                     </a:p>
                   </a:txBody>
@@ -16309,7 +16309,7 @@
                         </a:defRPr>
                       </a:pPr>
                       <a:r>
-                        <a:t>29.6</a:t>
+                        <a:t>59.2</a:t>
                       </a:r>
                     </a:p>
                   </a:txBody>
@@ -16467,7 +16467,7 @@
                         </a:defRPr>
                       </a:pPr>
                       <a:r>
-                        <a:t>61.1</a:t>
+                        <a:t>156.6</a:t>
                       </a:r>
                     </a:p>
                   </a:txBody>
@@ -16783,7 +16783,7 @@
                         </a:defRPr>
                       </a:pPr>
                       <a:r>
-                        <a:t>169.74</a:t>
+                        <a:t>140</a:t>
                       </a:r>
                     </a:p>
                   </a:txBody>
@@ -16941,7 +16941,7 @@
                         </a:defRPr>
                       </a:pPr>
                       <a:r>
-                        <a:t>61.36</a:t>
+                        <a:t>79</a:t>
                       </a:r>
                     </a:p>
                   </a:txBody>
@@ -18331,7 +18331,7 @@
               </a:defRPr>
             </a:pPr>
             <a:r>
-              <a:t>HGI:27.79</a:t>
+              <a:t>HGI:48.4</a:t>
             </a:r>
           </a:p>
         </p:txBody>
@@ -18421,7 +18421,7 @@
               </a:defRPr>
             </a:pPr>
             <a:r>
-              <a:t>VGI:2.73</a:t>
+              <a:t>VGI:-0.8</a:t>
             </a:r>
           </a:p>
         </p:txBody>
@@ -19012,7 +19012,7 @@
               </a:defRPr>
             </a:pPr>
             <a:r>
-              <a:t>IODI:54.15</a:t>
+              <a:t>IODI:-33.83</a:t>
             </a:r>
           </a:p>
         </p:txBody>
@@ -19094,7 +19094,7 @@
               </a:defRPr>
             </a:pPr>
             <a:r>
-              <a:t>VDL:-26.26</a:t>
+              <a:t>VDL:16.4</a:t>
             </a:r>
           </a:p>
         </p:txBody>
@@ -19215,7 +19215,7 @@
               </a:defRPr>
             </a:pPr>
             <a:r>
-              <a:t>CFD:-54.15</a:t>
+              <a:t>CFD:33.83</a:t>
             </a:r>
           </a:p>
         </p:txBody>
@@ -21936,7 +21936,7 @@
           </a:ln>
           <a:extLst>
             <a:ext uri="{C572A759-6A51-4108-AA02-DFA0A04FC94B}">
-              <ma14:wrappingTextBoxFlag xmlns:ma14="http://schemas.microsoft.com/office/mac/drawingml/2011/main" xmlns:a14="http://schemas.microsoft.com/office/drawing/2010/main" xmlns:m="http://schemas.openxmlformats.org/officeDocument/2006/math" xmlns="" val="1"/>
+              <ma14:wrappingTextBoxFlag xmlns="" xmlns:m="http://schemas.openxmlformats.org/officeDocument/2006/math" xmlns:a14="http://schemas.microsoft.com/office/drawing/2010/main" xmlns:ma14="http://schemas.microsoft.com/office/mac/drawingml/2011/main" val="1"/>
             </a:ext>
           </a:extLst>
         </p:spPr>
@@ -22720,7 +22720,7 @@
           </a:ln>
           <a:extLst>
             <a:ext uri="{C572A759-6A51-4108-AA02-DFA0A04FC94B}">
-              <ma14:wrappingTextBoxFlag xmlns="" xmlns:m="http://schemas.openxmlformats.org/officeDocument/2006/math" xmlns:a14="http://schemas.microsoft.com/office/drawing/2010/main" xmlns:ma14="http://schemas.microsoft.com/office/mac/drawingml/2011/main" val="1"/>
+              <ma14:wrappingTextBoxFlag xmlns:ma14="http://schemas.microsoft.com/office/mac/drawingml/2011/main" xmlns:a14="http://schemas.microsoft.com/office/drawing/2010/main" xmlns:m="http://schemas.openxmlformats.org/officeDocument/2006/math" xmlns="" val="1"/>
             </a:ext>
           </a:extLst>
         </p:spPr>
@@ -22770,7 +22770,7 @@
           </a:ln>
           <a:extLst>
             <a:ext uri="{C572A759-6A51-4108-AA02-DFA0A04FC94B}">
-              <ma14:wrappingTextBoxFlag xmlns="" xmlns:m="http://schemas.openxmlformats.org/officeDocument/2006/math" xmlns:a14="http://schemas.microsoft.com/office/drawing/2010/main" xmlns:ma14="http://schemas.microsoft.com/office/mac/drawingml/2011/main" val="1"/>
+              <ma14:wrappingTextBoxFlag xmlns:ma14="http://schemas.microsoft.com/office/mac/drawingml/2011/main" xmlns:a14="http://schemas.microsoft.com/office/drawing/2010/main" xmlns:m="http://schemas.openxmlformats.org/officeDocument/2006/math" xmlns="" val="1"/>
             </a:ext>
           </a:extLst>
         </p:spPr>
@@ -22840,7 +22840,7 @@
           </a:ln>
           <a:extLst>
             <a:ext uri="{C572A759-6A51-4108-AA02-DFA0A04FC94B}">
-              <ma14:wrappingTextBoxFlag xmlns="" xmlns:m="http://schemas.openxmlformats.org/officeDocument/2006/math" xmlns:a14="http://schemas.microsoft.com/office/drawing/2010/main" xmlns:ma14="http://schemas.microsoft.com/office/mac/drawingml/2011/main" val="1"/>
+              <ma14:wrappingTextBoxFlag xmlns:ma14="http://schemas.microsoft.com/office/mac/drawingml/2011/main" xmlns:a14="http://schemas.microsoft.com/office/drawing/2010/main" xmlns:m="http://schemas.openxmlformats.org/officeDocument/2006/math" xmlns="" val="1"/>
             </a:ext>
           </a:extLst>
         </p:spPr>
@@ -22910,7 +22910,7 @@
           </a:ln>
           <a:extLst>
             <a:ext uri="{C572A759-6A51-4108-AA02-DFA0A04FC94B}">
-              <ma14:wrappingTextBoxFlag xmlns="" xmlns:m="http://schemas.openxmlformats.org/officeDocument/2006/math" xmlns:a14="http://schemas.microsoft.com/office/drawing/2010/main" xmlns:ma14="http://schemas.microsoft.com/office/mac/drawingml/2011/main" val="1"/>
+              <ma14:wrappingTextBoxFlag xmlns:ma14="http://schemas.microsoft.com/office/mac/drawingml/2011/main" xmlns:a14="http://schemas.microsoft.com/office/drawing/2010/main" xmlns:m="http://schemas.openxmlformats.org/officeDocument/2006/math" xmlns="" val="1"/>
             </a:ext>
           </a:extLst>
         </p:spPr>
@@ -23445,7 +23445,7 @@
           </a:ln>
           <a:extLst>
             <a:ext uri="{C572A759-6A51-4108-AA02-DFA0A04FC94B}">
-              <ma14:wrappingTextBoxFlag xmlns="" xmlns:m="http://schemas.openxmlformats.org/officeDocument/2006/math" xmlns:a14="http://schemas.microsoft.com/office/drawing/2010/main" xmlns:p14="http://schemas.microsoft.com/office/powerpoint/2010/main" xmlns:ma14="http://schemas.microsoft.com/office/mac/drawingml/2011/main" val="1"/>
+              <ma14:wrappingTextBoxFlag xmlns:ma14="http://schemas.microsoft.com/office/mac/drawingml/2011/main" xmlns:p14="http://schemas.microsoft.com/office/powerpoint/2010/main" xmlns:a14="http://schemas.microsoft.com/office/drawing/2010/main" xmlns:m="http://schemas.openxmlformats.org/officeDocument/2006/math" xmlns="" val="1"/>
             </a:ext>
           </a:extLst>
         </p:spPr>
@@ -23613,7 +23613,7 @@
           </a:ln>
           <a:extLst>
             <a:ext uri="{C572A759-6A51-4108-AA02-DFA0A04FC94B}">
-              <ma14:wrappingTextBoxFlag xmlns="" xmlns:m="http://schemas.openxmlformats.org/officeDocument/2006/math" xmlns:a14="http://schemas.microsoft.com/office/drawing/2010/main" xmlns:p14="http://schemas.microsoft.com/office/powerpoint/2010/main" xmlns:ma14="http://schemas.microsoft.com/office/mac/drawingml/2011/main" val="1"/>
+              <ma14:wrappingTextBoxFlag xmlns:ma14="http://schemas.microsoft.com/office/mac/drawingml/2011/main" xmlns:p14="http://schemas.microsoft.com/office/powerpoint/2010/main" xmlns:a14="http://schemas.microsoft.com/office/drawing/2010/main" xmlns:m="http://schemas.openxmlformats.org/officeDocument/2006/math" xmlns="" val="1"/>
             </a:ext>
           </a:extLst>
         </p:spPr>
@@ -24124,7 +24124,7 @@
           </a:ln>
           <a:extLst>
             <a:ext uri="{C572A759-6A51-4108-AA02-DFA0A04FC94B}">
-              <ma14:wrappingTextBoxFlag xmlns="" xmlns:m="http://schemas.openxmlformats.org/officeDocument/2006/math" xmlns:a14="http://schemas.microsoft.com/office/drawing/2010/main" xmlns:p14="http://schemas.microsoft.com/office/powerpoint/2010/main" xmlns:ma14="http://schemas.microsoft.com/office/mac/drawingml/2011/main" val="1"/>
+              <ma14:wrappingTextBoxFlag xmlns:ma14="http://schemas.microsoft.com/office/mac/drawingml/2011/main" xmlns:p14="http://schemas.microsoft.com/office/powerpoint/2010/main" xmlns:a14="http://schemas.microsoft.com/office/drawing/2010/main" xmlns:m="http://schemas.openxmlformats.org/officeDocument/2006/math" xmlns="" val="1"/>
             </a:ext>
           </a:extLst>
         </p:spPr>
@@ -24459,7 +24459,7 @@
     <mc:Choice Requires="p14">
       <p:transition spd="med"/>
     </mc:Choice>
-    <mc:Fallback xmlns="" xmlns:m="http://schemas.openxmlformats.org/officeDocument/2006/math" xmlns:a14="http://schemas.microsoft.com/office/drawing/2010/main">
+    <mc:Fallback xmlns:a14="http://schemas.microsoft.com/office/drawing/2010/main" xmlns:m="http://schemas.openxmlformats.org/officeDocument/2006/math" xmlns="">
       <p:transition spd="slow"/>
     </mc:Fallback>
   </mc:AlternateContent>
@@ -24502,7 +24502,7 @@
           </a:ln>
           <a:extLst>
             <a:ext uri="{C572A759-6A51-4108-AA02-DFA0A04FC94B}">
-              <ma14:wrappingTextBoxFlag xmlns="" xmlns:m="http://schemas.openxmlformats.org/officeDocument/2006/math" xmlns:a14="http://schemas.microsoft.com/office/drawing/2010/main" xmlns:ma14="http://schemas.microsoft.com/office/mac/drawingml/2011/main" val="1"/>
+              <ma14:wrappingTextBoxFlag xmlns:ma14="http://schemas.microsoft.com/office/mac/drawingml/2011/main" xmlns:a14="http://schemas.microsoft.com/office/drawing/2010/main" xmlns:m="http://schemas.openxmlformats.org/officeDocument/2006/math" xmlns="" val="1"/>
             </a:ext>
           </a:extLst>
         </p:spPr>
@@ -24628,7 +24628,7 @@
           </a:ln>
           <a:extLst>
             <a:ext uri="{C572A759-6A51-4108-AA02-DFA0A04FC94B}">
-              <ma14:wrappingTextBoxFlag xmlns="" xmlns:m="http://schemas.openxmlformats.org/officeDocument/2006/math" xmlns:a14="http://schemas.microsoft.com/office/drawing/2010/main" xmlns:ma14="http://schemas.microsoft.com/office/mac/drawingml/2011/main" val="1"/>
+              <ma14:wrappingTextBoxFlag xmlns:ma14="http://schemas.microsoft.com/office/mac/drawingml/2011/main" xmlns:a14="http://schemas.microsoft.com/office/drawing/2010/main" xmlns:m="http://schemas.openxmlformats.org/officeDocument/2006/math" xmlns="" val="1"/>
             </a:ext>
           </a:extLst>
         </p:spPr>
@@ -28024,7 +28024,7 @@
           </a:ln>
           <a:extLst>
             <a:ext uri="{C572A759-6A51-4108-AA02-DFA0A04FC94B}">
-              <ma14:wrappingTextBoxFlag xmlns="" xmlns:m="http://schemas.openxmlformats.org/officeDocument/2006/math" xmlns:a14="http://schemas.microsoft.com/office/drawing/2010/main" xmlns:ma14="http://schemas.microsoft.com/office/mac/drawingml/2011/main" val="1"/>
+              <ma14:wrappingTextBoxFlag xmlns:ma14="http://schemas.microsoft.com/office/mac/drawingml/2011/main" xmlns:a14="http://schemas.microsoft.com/office/drawing/2010/main" xmlns:m="http://schemas.openxmlformats.org/officeDocument/2006/math" xmlns="" val="1"/>
             </a:ext>
           </a:extLst>
         </p:spPr>
@@ -28157,7 +28157,7 @@
           </a:ln>
           <a:extLst>
             <a:ext uri="{C572A759-6A51-4108-AA02-DFA0A04FC94B}">
-              <ma14:wrappingTextBoxFlag xmlns="" xmlns:m="http://schemas.openxmlformats.org/officeDocument/2006/math" xmlns:a14="http://schemas.microsoft.com/office/drawing/2010/main" xmlns:ma14="http://schemas.microsoft.com/office/mac/drawingml/2011/main" val="1"/>
+              <ma14:wrappingTextBoxFlag xmlns:ma14="http://schemas.microsoft.com/office/mac/drawingml/2011/main" xmlns:a14="http://schemas.microsoft.com/office/drawing/2010/main" xmlns:m="http://schemas.openxmlformats.org/officeDocument/2006/math" xmlns="" val="1"/>
             </a:ext>
           </a:extLst>
         </p:spPr>
@@ -28283,7 +28283,7 @@
           </a:ln>
           <a:extLst>
             <a:ext uri="{C572A759-6A51-4108-AA02-DFA0A04FC94B}">
-              <ma14:wrappingTextBoxFlag xmlns="" xmlns:m="http://schemas.openxmlformats.org/officeDocument/2006/math" xmlns:a14="http://schemas.microsoft.com/office/drawing/2010/main" xmlns:ma14="http://schemas.microsoft.com/office/mac/drawingml/2011/main" val="1"/>
+              <ma14:wrappingTextBoxFlag xmlns:ma14="http://schemas.microsoft.com/office/mac/drawingml/2011/main" xmlns:a14="http://schemas.microsoft.com/office/drawing/2010/main" xmlns:m="http://schemas.openxmlformats.org/officeDocument/2006/math" xmlns="" val="1"/>
             </a:ext>
           </a:extLst>
         </p:spPr>
@@ -28753,7 +28753,7 @@
           </a:ln>
           <a:extLst>
             <a:ext uri="{C572A759-6A51-4108-AA02-DFA0A04FC94B}">
-              <ma14:wrappingTextBoxFlag xmlns="" xmlns:m="http://schemas.openxmlformats.org/officeDocument/2006/math" xmlns:a14="http://schemas.microsoft.com/office/drawing/2010/main" xmlns:ma14="http://schemas.microsoft.com/office/mac/drawingml/2011/main" val="1"/>
+              <ma14:wrappingTextBoxFlag xmlns:ma14="http://schemas.microsoft.com/office/mac/drawingml/2011/main" xmlns:a14="http://schemas.microsoft.com/office/drawing/2010/main" xmlns:m="http://schemas.openxmlformats.org/officeDocument/2006/math" xmlns="" val="1"/>
             </a:ext>
           </a:extLst>
         </p:spPr>
@@ -29093,14 +29093,14 @@
       </p:pic>
       <p:pic>
         <p:nvPicPr>
-          <p:cNvPr id="8" name="Picture 7" descr="photo_6.jpg"/>
+          <p:cNvPr id="8" name="Picture 7" descr="default_image.jpg"/>
           <p:cNvPicPr>
             <a:picLocks noChangeAspect="1"/>
           </p:cNvPicPr>
           <p:nvPr/>
         </p:nvPicPr>
         <p:blipFill>
-          <a:blip r:embed="rId3"/>
+          <a:blip r:embed="rId2"/>
           <a:stretch>
             <a:fillRect/>
           </a:stretch>

--- a/output_ppt.pptx
+++ b/output_ppt.pptx
@@ -499,7 +499,7 @@
           <a:p>
             <a:fld id="{B00729D7-BDA7-41E1-AD79-DC61E6DD2EC2}" type="datetimeFigureOut">
               <a:rPr lang="ko-KR" altLang="en-US" smtClean="0"/>
-              <a:t>2025-03-19</a:t>
+              <a:t>2025-03-21</a:t>
             </a:fld>
             <a:endParaRPr lang="ko-KR" altLang="en-US"/>
           </a:p>
@@ -669,7 +669,7 @@
           <a:p>
             <a:fld id="{B00729D7-BDA7-41E1-AD79-DC61E6DD2EC2}" type="datetimeFigureOut">
               <a:rPr lang="ko-KR" altLang="en-US" smtClean="0"/>
-              <a:t>2025-03-19</a:t>
+              <a:t>2025-03-21</a:t>
             </a:fld>
             <a:endParaRPr lang="ko-KR" altLang="en-US"/>
           </a:p>
@@ -849,7 +849,7 @@
           <a:p>
             <a:fld id="{B00729D7-BDA7-41E1-AD79-DC61E6DD2EC2}" type="datetimeFigureOut">
               <a:rPr lang="ko-KR" altLang="en-US" smtClean="0"/>
-              <a:t>2025-03-19</a:t>
+              <a:t>2025-03-21</a:t>
             </a:fld>
             <a:endParaRPr lang="ko-KR" altLang="en-US"/>
           </a:p>
@@ -1525,7 +1525,7 @@
           <a:p>
             <a:fld id="{B00729D7-BDA7-41E1-AD79-DC61E6DD2EC2}" type="datetimeFigureOut">
               <a:rPr lang="ko-KR" altLang="en-US" smtClean="0"/>
-              <a:t>2025-03-19</a:t>
+              <a:t>2025-03-21</a:t>
             </a:fld>
             <a:endParaRPr lang="ko-KR" altLang="en-US"/>
           </a:p>
@@ -1769,7 +1769,7 @@
           <a:p>
             <a:fld id="{B00729D7-BDA7-41E1-AD79-DC61E6DD2EC2}" type="datetimeFigureOut">
               <a:rPr lang="ko-KR" altLang="en-US" smtClean="0"/>
-              <a:t>2025-03-19</a:t>
+              <a:t>2025-03-21</a:t>
             </a:fld>
             <a:endParaRPr lang="ko-KR" altLang="en-US"/>
           </a:p>
@@ -2001,7 +2001,7 @@
           <a:p>
             <a:fld id="{B00729D7-BDA7-41E1-AD79-DC61E6DD2EC2}" type="datetimeFigureOut">
               <a:rPr lang="ko-KR" altLang="en-US" smtClean="0"/>
-              <a:t>2025-03-19</a:t>
+              <a:t>2025-03-21</a:t>
             </a:fld>
             <a:endParaRPr lang="ko-KR" altLang="en-US"/>
           </a:p>
@@ -2368,7 +2368,7 @@
           <a:p>
             <a:fld id="{B00729D7-BDA7-41E1-AD79-DC61E6DD2EC2}" type="datetimeFigureOut">
               <a:rPr lang="ko-KR" altLang="en-US" smtClean="0"/>
-              <a:t>2025-03-19</a:t>
+              <a:t>2025-03-21</a:t>
             </a:fld>
             <a:endParaRPr lang="ko-KR" altLang="en-US"/>
           </a:p>
@@ -2486,7 +2486,7 @@
           <a:p>
             <a:fld id="{B00729D7-BDA7-41E1-AD79-DC61E6DD2EC2}" type="datetimeFigureOut">
               <a:rPr lang="ko-KR" altLang="en-US" smtClean="0"/>
-              <a:t>2025-03-19</a:t>
+              <a:t>2025-03-21</a:t>
             </a:fld>
             <a:endParaRPr lang="ko-KR" altLang="en-US"/>
           </a:p>
@@ -2581,7 +2581,7 @@
           <a:p>
             <a:fld id="{B00729D7-BDA7-41E1-AD79-DC61E6DD2EC2}" type="datetimeFigureOut">
               <a:rPr lang="ko-KR" altLang="en-US" smtClean="0"/>
-              <a:t>2025-03-19</a:t>
+              <a:t>2025-03-21</a:t>
             </a:fld>
             <a:endParaRPr lang="ko-KR" altLang="en-US"/>
           </a:p>
@@ -2858,7 +2858,7 @@
           <a:p>
             <a:fld id="{B00729D7-BDA7-41E1-AD79-DC61E6DD2EC2}" type="datetimeFigureOut">
               <a:rPr lang="ko-KR" altLang="en-US" smtClean="0"/>
-              <a:t>2025-03-19</a:t>
+              <a:t>2025-03-21</a:t>
             </a:fld>
             <a:endParaRPr lang="ko-KR" altLang="en-US"/>
           </a:p>
@@ -3071,7 +3071,7 @@
           <a:p>
             <a:fld id="{B00729D7-BDA7-41E1-AD79-DC61E6DD2EC2}" type="datetimeFigureOut">
               <a:rPr lang="ko-KR" altLang="en-US" smtClean="0"/>
-              <a:t>2025-03-19</a:t>
+              <a:t>2025-03-21</a:t>
             </a:fld>
             <a:endParaRPr lang="ko-KR" altLang="en-US"/>
           </a:p>
@@ -7038,7 +7038,7 @@
               </a:defRPr>
             </a:pPr>
             <a:r>
-              <a:t>Male 순응교합 20 2005-03-25</a:t>
+              <a:t>Female 순응교합 20 2005-03-27</a:t>
             </a:r>
           </a:p>
           <a:p>
@@ -7051,7 +7051,7 @@
               </a:defRPr>
             </a:pPr>
             <a:r>
-              <a:t> S1.B3.D1.C1-nbt(dbt)-RM(Rt)-Fx:Ex-Fx/1-Type IV</a:t>
+              <a:t> S1.B2.D3.C1-nbt(dbt)-RM(Rt)-Fx:Ex-Fx/1-Type IV</a:t>
             </a:r>
           </a:p>
         </p:txBody>
@@ -11917,14 +11917,14 @@
           <p:nvPr>
             <p:extLst>
               <p:ext uri="{D42A27DB-BD31-4B8C-83A1-F6EECF244321}">
-                <p14:modId xmlns:p14="http://schemas.microsoft.com/office/powerpoint/2010/main" val="1749568792"/>
+                <p14:modId xmlns:p14="http://schemas.microsoft.com/office/powerpoint/2010/main" val="3084902523"/>
               </p:ext>
             </p:extLst>
           </p:nvPr>
         </p:nvGraphicFramePr>
         <p:xfrm>
           <a:off x="243585" y="794606"/>
-          <a:ext cx="2065991" cy="5770586"/>
+          <a:ext cx="2065991" cy="5724496"/>
         </p:xfrm>
         <a:graphic>
           <a:graphicData uri="http://schemas.openxmlformats.org/drawingml/2006/table">
@@ -12040,7 +12040,7 @@
                         </a:defRPr>
                       </a:pPr>
                       <a:r>
-                        <a:t>자료없음</a:t>
+                        <a:t>19.1</a:t>
                       </a:r>
                     </a:p>
                   </a:txBody>
@@ -12198,7 +12198,7 @@
                         </a:defRPr>
                       </a:pPr>
                       <a:r>
-                        <a:t>101.5</a:t>
+                        <a:t>20.6</a:t>
                       </a:r>
                     </a:p>
                   </a:txBody>
@@ -12356,7 +12356,7 @@
                         </a:defRPr>
                       </a:pPr>
                       <a:r>
-                        <a:t>37.4</a:t>
+                        <a:t>1.5</a:t>
                       </a:r>
                     </a:p>
                   </a:txBody>
@@ -12514,7 +12514,7 @@
                         </a:defRPr>
                       </a:pPr>
                       <a:r>
-                        <a:t>자료없음</a:t>
+                        <a:t>20.7</a:t>
                       </a:r>
                     </a:p>
                   </a:txBody>
@@ -12672,7 +12672,7 @@
                         </a:defRPr>
                       </a:pPr>
                       <a:r>
-                        <a:t>-38</a:t>
+                        <a:t>67.9</a:t>
                       </a:r>
                     </a:p>
                   </a:txBody>
@@ -12830,7 +12830,7 @@
                         </a:defRPr>
                       </a:pPr>
                       <a:r>
-                        <a:t>-90.4</a:t>
+                        <a:t>132.9</a:t>
                       </a:r>
                     </a:p>
                   </a:txBody>
@@ -12988,7 +12988,7 @@
                         </a:defRPr>
                       </a:pPr>
                       <a:r>
-                        <a:t>71.6</a:t>
+                        <a:t>132.9</a:t>
                       </a:r>
                     </a:p>
                   </a:txBody>
@@ -13146,7 +13146,7 @@
                         </a:defRPr>
                       </a:pPr>
                       <a:r>
-                        <a:t>자료없음</a:t>
+                        <a:t>96.2</a:t>
                       </a:r>
                     </a:p>
                   </a:txBody>
@@ -13212,7 +13212,7 @@
                   </a:ext>
                 </a:extLst>
               </a:tr>
-              <a:tr h="152770">
+              <a:tr h="100285">
                 <a:tc>
                   <a:txBody>
                     <a:bodyPr/>
@@ -13304,7 +13304,7 @@
                         </a:defRPr>
                       </a:pPr>
                       <a:r>
-                        <a:t>143.3</a:t>
+                        <a:t>161.4</a:t>
                       </a:r>
                     </a:p>
                   </a:txBody>
@@ -13378,14 +13378,22 @@
                     <a:p>
                       <a:pPr algn="ctr" fontAlgn="ctr"/>
                       <a:r>
-                        <a:rPr lang="en-US" sz="700" u="none" strike="noStrike">
+                        <a:rPr lang="en-US" sz="700" u="none" strike="noStrike" dirty="0" err="1">
                           <a:effectLst/>
                           <a:latin typeface="+mn-ea"/>
                           <a:ea typeface="+mn-ea"/>
                         </a:rPr>
-                        <a:t>L.Lip E-line</a:t>
+                        <a:t>L.Lip</a:t>
                       </a:r>
-                      <a:endParaRPr lang="en-US" sz="700" b="0" i="0" u="none" strike="noStrike">
+                      <a:r>
+                        <a:rPr lang="en-US" sz="700" u="none" strike="noStrike" dirty="0">
+                          <a:effectLst/>
+                          <a:latin typeface="+mn-ea"/>
+                          <a:ea typeface="+mn-ea"/>
+                        </a:rPr>
+                        <a:t> E-line</a:t>
+                      </a:r>
+                      <a:endParaRPr lang="en-US" sz="700" b="0" i="0" u="none" strike="noStrike" dirty="0">
                         <a:effectLst/>
                         <a:latin typeface="+mn-ea"/>
                         <a:ea typeface="+mn-ea"/>
@@ -13462,7 +13470,7 @@
                         </a:defRPr>
                       </a:pPr>
                       <a:r>
-                        <a:t>자료없음</a:t>
+                        <a:t>-16.1</a:t>
                       </a:r>
                     </a:p>
                   </a:txBody>
@@ -13536,14 +13544,14 @@
                     <a:p>
                       <a:pPr algn="ctr" fontAlgn="ctr"/>
                       <a:r>
-                        <a:rPr lang="en-US" sz="700" u="none" strike="noStrike">
+                        <a:rPr lang="en-US" sz="700" u="none" strike="noStrike" dirty="0">
                           <a:effectLst/>
                           <a:latin typeface="+mn-ea"/>
                           <a:ea typeface="+mn-ea"/>
                         </a:rPr>
                         <a:t>FA'B'</a:t>
                       </a:r>
-                      <a:endParaRPr lang="en-US" sz="700" b="0" i="0" u="none" strike="noStrike">
+                      <a:endParaRPr lang="en-US" sz="700" b="0" i="0" u="none" strike="noStrike" dirty="0">
                         <a:effectLst/>
                         <a:latin typeface="+mn-ea"/>
                         <a:ea typeface="+mn-ea"/>
@@ -13620,7 +13628,7 @@
                         </a:defRPr>
                       </a:pPr>
                       <a:r>
-                        <a:t>152.7</a:t>
+                        <a:t>13.7</a:t>
                       </a:r>
                     </a:p>
                   </a:txBody>
@@ -13778,7 +13786,7 @@
                         </a:defRPr>
                       </a:pPr>
                       <a:r>
-                        <a:t>141.6</a:t>
+                        <a:t>49</a:t>
                       </a:r>
                     </a:p>
                   </a:txBody>
@@ -13936,7 +13944,7 @@
                         </a:defRPr>
                       </a:pPr>
                       <a:r>
-                        <a:t>자료없음</a:t>
+                        <a:t>16.8</a:t>
                       </a:r>
                     </a:p>
                   </a:txBody>
@@ -14094,7 +14102,7 @@
                         </a:defRPr>
                       </a:pPr>
                       <a:r>
-                        <a:t>자료없음</a:t>
+                        <a:t>28.8</a:t>
                       </a:r>
                     </a:p>
                   </a:txBody>
@@ -14252,7 +14260,7 @@
                         </a:defRPr>
                       </a:pPr>
                       <a:r>
-                        <a:t>자료없음</a:t>
+                        <a:t>36.4</a:t>
                       </a:r>
                     </a:p>
                   </a:txBody>
@@ -14410,7 +14418,7 @@
                         </a:defRPr>
                       </a:pPr>
                       <a:r>
-                        <a:t>162.7</a:t>
+                        <a:t>52.9</a:t>
                       </a:r>
                     </a:p>
                   </a:txBody>
@@ -14568,7 +14576,7 @@
                         </a:defRPr>
                       </a:pPr>
                       <a:r>
-                        <a:t>자료없음</a:t>
+                        <a:t>43.8</a:t>
                       </a:r>
                     </a:p>
                   </a:txBody>
@@ -14726,7 +14734,7 @@
                         </a:defRPr>
                       </a:pPr>
                       <a:r>
-                        <a:t>자료없음</a:t>
+                        <a:t>0</a:t>
                       </a:r>
                     </a:p>
                   </a:txBody>
@@ -14884,7 +14892,7 @@
                         </a:defRPr>
                       </a:pPr>
                       <a:r>
-                        <a:t>21.6</a:t>
+                        <a:t>128</a:t>
                       </a:r>
                     </a:p>
                   </a:txBody>
@@ -15042,7 +15050,7 @@
                         </a:defRPr>
                       </a:pPr>
                       <a:r>
-                        <a:t>-18.2</a:t>
+                        <a:t>73.2</a:t>
                       </a:r>
                     </a:p>
                   </a:txBody>
@@ -15200,7 +15208,7 @@
                         </a:defRPr>
                       </a:pPr>
                       <a:r>
-                        <a:t>자료없음</a:t>
+                        <a:t>80.2</a:t>
                       </a:r>
                     </a:p>
                   </a:txBody>
@@ -15358,7 +15366,7 @@
                         </a:defRPr>
                       </a:pPr>
                       <a:r>
-                        <a:t>자료없음</a:t>
+                        <a:t>36.4</a:t>
                       </a:r>
                     </a:p>
                   </a:txBody>
@@ -15519,7 +15527,7 @@
                         </a:defRPr>
                       </a:pPr>
                       <a:r>
-                        <a:t>104.6</a:t>
+                        <a:t>15.9</a:t>
                       </a:r>
                     </a:p>
                   </a:txBody>
@@ -15677,7 +15685,7 @@
                         </a:defRPr>
                       </a:pPr>
                       <a:r>
-                        <a:t>192.6</a:t>
+                        <a:t>8.1</a:t>
                       </a:r>
                     </a:p>
                   </a:txBody>
@@ -15835,7 +15843,7 @@
                         </a:defRPr>
                       </a:pPr>
                       <a:r>
-                        <a:t>120.1</a:t>
+                        <a:t>25.9</a:t>
                       </a:r>
                     </a:p>
                   </a:txBody>
@@ -15993,7 +16001,7 @@
                         </a:defRPr>
                       </a:pPr>
                       <a:r>
-                        <a:t>자료없음</a:t>
+                        <a:t>309.2</a:t>
                       </a:r>
                     </a:p>
                   </a:txBody>
@@ -16151,7 +16159,7 @@
                         </a:defRPr>
                       </a:pPr>
                       <a:r>
-                        <a:t>80.6</a:t>
+                        <a:t>12.3</a:t>
                       </a:r>
                     </a:p>
                   </a:txBody>
@@ -16309,7 +16317,7 @@
                         </a:defRPr>
                       </a:pPr>
                       <a:r>
-                        <a:t>59.2</a:t>
+                        <a:t>3</a:t>
                       </a:r>
                     </a:p>
                   </a:txBody>
@@ -16467,7 +16475,7 @@
                         </a:defRPr>
                       </a:pPr>
                       <a:r>
-                        <a:t>156.6</a:t>
+                        <a:t>16.6</a:t>
                       </a:r>
                     </a:p>
                   </a:txBody>
@@ -16625,7 +16633,7 @@
                         </a:defRPr>
                       </a:pPr>
                       <a:r>
-                        <a:t>자료없음</a:t>
+                        <a:t>4.3</a:t>
                       </a:r>
                     </a:p>
                   </a:txBody>
@@ -16783,7 +16791,7 @@
                         </a:defRPr>
                       </a:pPr>
                       <a:r>
-                        <a:t>140</a:t>
+                        <a:t>52.7</a:t>
                       </a:r>
                     </a:p>
                   </a:txBody>
@@ -16941,7 +16949,7 @@
                         </a:defRPr>
                       </a:pPr>
                       <a:r>
-                        <a:t>79</a:t>
+                        <a:t>24</a:t>
                       </a:r>
                     </a:p>
                   </a:txBody>
@@ -17099,7 +17107,7 @@
                         </a:defRPr>
                       </a:pPr>
                       <a:r>
-                        <a:t>자료없음</a:t>
+                        <a:t>124.3</a:t>
                       </a:r>
                     </a:p>
                   </a:txBody>
@@ -17257,7 +17265,7 @@
                         </a:defRPr>
                       </a:pPr>
                       <a:r>
-                        <a:t>자료없음</a:t>
+                        <a:t>68.5</a:t>
                       </a:r>
                     </a:p>
                   </a:txBody>
@@ -17415,7 +17423,7 @@
                         </a:defRPr>
                       </a:pPr>
                       <a:r>
-                        <a:t>자료없음</a:t>
+                        <a:t>31.7</a:t>
                       </a:r>
                     </a:p>
                   </a:txBody>
@@ -17573,7 +17581,7 @@
                         </a:defRPr>
                       </a:pPr>
                       <a:r>
-                        <a:t>개발 중</a:t>
+                        <a:t>8</a:t>
                       </a:r>
                     </a:p>
                   </a:txBody>
@@ -17731,7 +17739,7 @@
                         </a:defRPr>
                       </a:pPr>
                       <a:r>
-                        <a:t>개발 중</a:t>
+                        <a:t>-10</a:t>
                       </a:r>
                     </a:p>
                   </a:txBody>
@@ -17805,14 +17813,14 @@
                     <a:p>
                       <a:pPr algn="ctr" fontAlgn="ctr"/>
                       <a:r>
-                        <a:rPr lang="en-US" sz="700" u="none" strike="noStrike">
+                        <a:rPr lang="en-US" sz="700" u="none" strike="noStrike" dirty="0">
                           <a:effectLst/>
                           <a:latin typeface="+mn-ea"/>
                           <a:ea typeface="+mn-ea"/>
                         </a:rPr>
-                        <a:t>APDI(PABA)</a:t>
+                        <a:t>APDI</a:t>
                       </a:r>
-                      <a:endParaRPr lang="en-US" sz="700" b="0" i="0" u="none" strike="noStrike">
+                      <a:endParaRPr lang="en-US" sz="700" b="0" i="0" u="none" strike="noStrike" dirty="0">
                         <a:effectLst/>
                         <a:latin typeface="+mn-ea"/>
                         <a:ea typeface="+mn-ea"/>
@@ -17889,7 +17897,7 @@
                         </a:defRPr>
                       </a:pPr>
                       <a:r>
-                        <a:t>자료없음</a:t>
+                        <a:t>49</a:t>
                       </a:r>
                     </a:p>
                   </a:txBody>
@@ -18047,7 +18055,7 @@
                         </a:defRPr>
                       </a:pPr>
                       <a:r>
-                        <a:t>자료없음</a:t>
+                        <a:t>96.2</a:t>
                       </a:r>
                     </a:p>
                   </a:txBody>
@@ -18331,7 +18339,7 @@
               </a:defRPr>
             </a:pPr>
             <a:r>
-              <a:t>HGI:48.4</a:t>
+              <a:t>HGI:-0.5</a:t>
             </a:r>
           </a:p>
         </p:txBody>
@@ -18421,7 +18429,7 @@
               </a:defRPr>
             </a:pPr>
             <a:r>
-              <a:t>VGI:-0.8</a:t>
+              <a:t>VGI:113.56</a:t>
             </a:r>
           </a:p>
         </p:txBody>
@@ -18753,7 +18761,7 @@
               </a:defRPr>
             </a:pPr>
             <a:r>
-              <a:t>IAPDI:81</a:t>
+              <a:t>IAPDI:9.67</a:t>
             </a:r>
           </a:p>
         </p:txBody>
@@ -18973,7 +18981,7 @@
               </a:defRPr>
             </a:pPr>
             <a:r>
-              <a:t>2APDL:0.0</a:t>
+              <a:t>2APDL:31.46</a:t>
             </a:r>
           </a:p>
         </p:txBody>
@@ -19012,7 +19020,7 @@
               </a:defRPr>
             </a:pPr>
             <a:r>
-              <a:t>IODI:-33.83</a:t>
+              <a:t>IODI:31.23</a:t>
             </a:r>
           </a:p>
         </p:txBody>
@@ -19094,7 +19102,7 @@
               </a:defRPr>
             </a:pPr>
             <a:r>
-              <a:t>VDL:16.4</a:t>
+              <a:t>VDL:31.5</a:t>
             </a:r>
           </a:p>
         </p:txBody>
@@ -19215,7 +19223,7 @@
               </a:defRPr>
             </a:pPr>
             <a:r>
-              <a:t>CFD:33.83</a:t>
+              <a:t>CFD:104.3</a:t>
             </a:r>
           </a:p>
         </p:txBody>
@@ -21936,7 +21944,7 @@
           </a:ln>
           <a:extLst>
             <a:ext uri="{C572A759-6A51-4108-AA02-DFA0A04FC94B}">
-              <ma14:wrappingTextBoxFlag xmlns="" xmlns:m="http://schemas.openxmlformats.org/officeDocument/2006/math" xmlns:a14="http://schemas.microsoft.com/office/drawing/2010/main" xmlns:ma14="http://schemas.microsoft.com/office/mac/drawingml/2011/main" val="1"/>
+              <ma14:wrappingTextBoxFlag xmlns:ma14="http://schemas.microsoft.com/office/mac/drawingml/2011/main" xmlns:a14="http://schemas.microsoft.com/office/drawing/2010/main" xmlns:m="http://schemas.openxmlformats.org/officeDocument/2006/math" xmlns="" val="1"/>
             </a:ext>
           </a:extLst>
         </p:spPr>
@@ -22720,7 +22728,7 @@
           </a:ln>
           <a:extLst>
             <a:ext uri="{C572A759-6A51-4108-AA02-DFA0A04FC94B}">
-              <ma14:wrappingTextBoxFlag xmlns:ma14="http://schemas.microsoft.com/office/mac/drawingml/2011/main" xmlns:a14="http://schemas.microsoft.com/office/drawing/2010/main" xmlns:m="http://schemas.openxmlformats.org/officeDocument/2006/math" xmlns="" val="1"/>
+              <ma14:wrappingTextBoxFlag xmlns="" xmlns:m="http://schemas.openxmlformats.org/officeDocument/2006/math" xmlns:a14="http://schemas.microsoft.com/office/drawing/2010/main" xmlns:ma14="http://schemas.microsoft.com/office/mac/drawingml/2011/main" val="1"/>
             </a:ext>
           </a:extLst>
         </p:spPr>
@@ -22770,7 +22778,7 @@
           </a:ln>
           <a:extLst>
             <a:ext uri="{C572A759-6A51-4108-AA02-DFA0A04FC94B}">
-              <ma14:wrappingTextBoxFlag xmlns:ma14="http://schemas.microsoft.com/office/mac/drawingml/2011/main" xmlns:a14="http://schemas.microsoft.com/office/drawing/2010/main" xmlns:m="http://schemas.openxmlformats.org/officeDocument/2006/math" xmlns="" val="1"/>
+              <ma14:wrappingTextBoxFlag xmlns="" xmlns:m="http://schemas.openxmlformats.org/officeDocument/2006/math" xmlns:a14="http://schemas.microsoft.com/office/drawing/2010/main" xmlns:ma14="http://schemas.microsoft.com/office/mac/drawingml/2011/main" val="1"/>
             </a:ext>
           </a:extLst>
         </p:spPr>
@@ -22840,7 +22848,7 @@
           </a:ln>
           <a:extLst>
             <a:ext uri="{C572A759-6A51-4108-AA02-DFA0A04FC94B}">
-              <ma14:wrappingTextBoxFlag xmlns:ma14="http://schemas.microsoft.com/office/mac/drawingml/2011/main" xmlns:a14="http://schemas.microsoft.com/office/drawing/2010/main" xmlns:m="http://schemas.openxmlformats.org/officeDocument/2006/math" xmlns="" val="1"/>
+              <ma14:wrappingTextBoxFlag xmlns="" xmlns:m="http://schemas.openxmlformats.org/officeDocument/2006/math" xmlns:a14="http://schemas.microsoft.com/office/drawing/2010/main" xmlns:ma14="http://schemas.microsoft.com/office/mac/drawingml/2011/main" val="1"/>
             </a:ext>
           </a:extLst>
         </p:spPr>
@@ -22910,7 +22918,7 @@
           </a:ln>
           <a:extLst>
             <a:ext uri="{C572A759-6A51-4108-AA02-DFA0A04FC94B}">
-              <ma14:wrappingTextBoxFlag xmlns:ma14="http://schemas.microsoft.com/office/mac/drawingml/2011/main" xmlns:a14="http://schemas.microsoft.com/office/drawing/2010/main" xmlns:m="http://schemas.openxmlformats.org/officeDocument/2006/math" xmlns="" val="1"/>
+              <ma14:wrappingTextBoxFlag xmlns="" xmlns:m="http://schemas.openxmlformats.org/officeDocument/2006/math" xmlns:a14="http://schemas.microsoft.com/office/drawing/2010/main" xmlns:ma14="http://schemas.microsoft.com/office/mac/drawingml/2011/main" val="1"/>
             </a:ext>
           </a:extLst>
         </p:spPr>
@@ -23445,7 +23453,7 @@
           </a:ln>
           <a:extLst>
             <a:ext uri="{C572A759-6A51-4108-AA02-DFA0A04FC94B}">
-              <ma14:wrappingTextBoxFlag xmlns:ma14="http://schemas.microsoft.com/office/mac/drawingml/2011/main" xmlns:p14="http://schemas.microsoft.com/office/powerpoint/2010/main" xmlns:a14="http://schemas.microsoft.com/office/drawing/2010/main" xmlns:m="http://schemas.openxmlformats.org/officeDocument/2006/math" xmlns="" val="1"/>
+              <ma14:wrappingTextBoxFlag xmlns="" xmlns:m="http://schemas.openxmlformats.org/officeDocument/2006/math" xmlns:a14="http://schemas.microsoft.com/office/drawing/2010/main" xmlns:p14="http://schemas.microsoft.com/office/powerpoint/2010/main" xmlns:ma14="http://schemas.microsoft.com/office/mac/drawingml/2011/main" val="1"/>
             </a:ext>
           </a:extLst>
         </p:spPr>
@@ -23613,7 +23621,7 @@
           </a:ln>
           <a:extLst>
             <a:ext uri="{C572A759-6A51-4108-AA02-DFA0A04FC94B}">
-              <ma14:wrappingTextBoxFlag xmlns:ma14="http://schemas.microsoft.com/office/mac/drawingml/2011/main" xmlns:p14="http://schemas.microsoft.com/office/powerpoint/2010/main" xmlns:a14="http://schemas.microsoft.com/office/drawing/2010/main" xmlns:m="http://schemas.openxmlformats.org/officeDocument/2006/math" xmlns="" val="1"/>
+              <ma14:wrappingTextBoxFlag xmlns="" xmlns:m="http://schemas.openxmlformats.org/officeDocument/2006/math" xmlns:a14="http://schemas.microsoft.com/office/drawing/2010/main" xmlns:p14="http://schemas.microsoft.com/office/powerpoint/2010/main" xmlns:ma14="http://schemas.microsoft.com/office/mac/drawingml/2011/main" val="1"/>
             </a:ext>
           </a:extLst>
         </p:spPr>
@@ -24124,7 +24132,7 @@
           </a:ln>
           <a:extLst>
             <a:ext uri="{C572A759-6A51-4108-AA02-DFA0A04FC94B}">
-              <ma14:wrappingTextBoxFlag xmlns:ma14="http://schemas.microsoft.com/office/mac/drawingml/2011/main" xmlns:p14="http://schemas.microsoft.com/office/powerpoint/2010/main" xmlns:a14="http://schemas.microsoft.com/office/drawing/2010/main" xmlns:m="http://schemas.openxmlformats.org/officeDocument/2006/math" xmlns="" val="1"/>
+              <ma14:wrappingTextBoxFlag xmlns="" xmlns:m="http://schemas.openxmlformats.org/officeDocument/2006/math" xmlns:a14="http://schemas.microsoft.com/office/drawing/2010/main" xmlns:p14="http://schemas.microsoft.com/office/powerpoint/2010/main" xmlns:ma14="http://schemas.microsoft.com/office/mac/drawingml/2011/main" val="1"/>
             </a:ext>
           </a:extLst>
         </p:spPr>
@@ -24459,7 +24467,7 @@
     <mc:Choice Requires="p14">
       <p:transition spd="med"/>
     </mc:Choice>
-    <mc:Fallback xmlns:a14="http://schemas.microsoft.com/office/drawing/2010/main" xmlns:m="http://schemas.openxmlformats.org/officeDocument/2006/math" xmlns="">
+    <mc:Fallback xmlns="" xmlns:m="http://schemas.openxmlformats.org/officeDocument/2006/math" xmlns:a14="http://schemas.microsoft.com/office/drawing/2010/main">
       <p:transition spd="slow"/>
     </mc:Fallback>
   </mc:AlternateContent>
@@ -24502,7 +24510,7 @@
           </a:ln>
           <a:extLst>
             <a:ext uri="{C572A759-6A51-4108-AA02-DFA0A04FC94B}">
-              <ma14:wrappingTextBoxFlag xmlns:ma14="http://schemas.microsoft.com/office/mac/drawingml/2011/main" xmlns:a14="http://schemas.microsoft.com/office/drawing/2010/main" xmlns:m="http://schemas.openxmlformats.org/officeDocument/2006/math" xmlns="" val="1"/>
+              <ma14:wrappingTextBoxFlag xmlns="" xmlns:m="http://schemas.openxmlformats.org/officeDocument/2006/math" xmlns:a14="http://schemas.microsoft.com/office/drawing/2010/main" xmlns:ma14="http://schemas.microsoft.com/office/mac/drawingml/2011/main" val="1"/>
             </a:ext>
           </a:extLst>
         </p:spPr>
@@ -24628,7 +24636,7 @@
           </a:ln>
           <a:extLst>
             <a:ext uri="{C572A759-6A51-4108-AA02-DFA0A04FC94B}">
-              <ma14:wrappingTextBoxFlag xmlns:ma14="http://schemas.microsoft.com/office/mac/drawingml/2011/main" xmlns:a14="http://schemas.microsoft.com/office/drawing/2010/main" xmlns:m="http://schemas.openxmlformats.org/officeDocument/2006/math" xmlns="" val="1"/>
+              <ma14:wrappingTextBoxFlag xmlns="" xmlns:m="http://schemas.openxmlformats.org/officeDocument/2006/math" xmlns:a14="http://schemas.microsoft.com/office/drawing/2010/main" xmlns:ma14="http://schemas.microsoft.com/office/mac/drawingml/2011/main" val="1"/>
             </a:ext>
           </a:extLst>
         </p:spPr>
@@ -28024,7 +28032,7 @@
           </a:ln>
           <a:extLst>
             <a:ext uri="{C572A759-6A51-4108-AA02-DFA0A04FC94B}">
-              <ma14:wrappingTextBoxFlag xmlns:ma14="http://schemas.microsoft.com/office/mac/drawingml/2011/main" xmlns:a14="http://schemas.microsoft.com/office/drawing/2010/main" xmlns:m="http://schemas.openxmlformats.org/officeDocument/2006/math" xmlns="" val="1"/>
+              <ma14:wrappingTextBoxFlag xmlns="" xmlns:m="http://schemas.openxmlformats.org/officeDocument/2006/math" xmlns:a14="http://schemas.microsoft.com/office/drawing/2010/main" xmlns:ma14="http://schemas.microsoft.com/office/mac/drawingml/2011/main" val="1"/>
             </a:ext>
           </a:extLst>
         </p:spPr>
@@ -28157,7 +28165,7 @@
           </a:ln>
           <a:extLst>
             <a:ext uri="{C572A759-6A51-4108-AA02-DFA0A04FC94B}">
-              <ma14:wrappingTextBoxFlag xmlns:ma14="http://schemas.microsoft.com/office/mac/drawingml/2011/main" xmlns:a14="http://schemas.microsoft.com/office/drawing/2010/main" xmlns:m="http://schemas.openxmlformats.org/officeDocument/2006/math" xmlns="" val="1"/>
+              <ma14:wrappingTextBoxFlag xmlns="" xmlns:m="http://schemas.openxmlformats.org/officeDocument/2006/math" xmlns:a14="http://schemas.microsoft.com/office/drawing/2010/main" xmlns:ma14="http://schemas.microsoft.com/office/mac/drawingml/2011/main" val="1"/>
             </a:ext>
           </a:extLst>
         </p:spPr>
@@ -28283,7 +28291,7 @@
           </a:ln>
           <a:extLst>
             <a:ext uri="{C572A759-6A51-4108-AA02-DFA0A04FC94B}">
-              <ma14:wrappingTextBoxFlag xmlns:ma14="http://schemas.microsoft.com/office/mac/drawingml/2011/main" xmlns:a14="http://schemas.microsoft.com/office/drawing/2010/main" xmlns:m="http://schemas.openxmlformats.org/officeDocument/2006/math" xmlns="" val="1"/>
+              <ma14:wrappingTextBoxFlag xmlns="" xmlns:m="http://schemas.openxmlformats.org/officeDocument/2006/math" xmlns:a14="http://schemas.microsoft.com/office/drawing/2010/main" xmlns:ma14="http://schemas.microsoft.com/office/mac/drawingml/2011/main" val="1"/>
             </a:ext>
           </a:extLst>
         </p:spPr>
@@ -28753,7 +28761,7 @@
           </a:ln>
           <a:extLst>
             <a:ext uri="{C572A759-6A51-4108-AA02-DFA0A04FC94B}">
-              <ma14:wrappingTextBoxFlag xmlns:ma14="http://schemas.microsoft.com/office/mac/drawingml/2011/main" xmlns:a14="http://schemas.microsoft.com/office/drawing/2010/main" xmlns:m="http://schemas.openxmlformats.org/officeDocument/2006/math" xmlns="" val="1"/>
+              <ma14:wrappingTextBoxFlag xmlns="" xmlns:m="http://schemas.openxmlformats.org/officeDocument/2006/math" xmlns:a14="http://schemas.microsoft.com/office/drawing/2010/main" xmlns:ma14="http://schemas.microsoft.com/office/mac/drawingml/2011/main" val="1"/>
             </a:ext>
           </a:extLst>
         </p:spPr>
@@ -28894,7 +28902,7 @@
       </p:sp>
       <p:pic>
         <p:nvPicPr>
-          <p:cNvPr id="3" name="Picture 2" descr="psa.jpg"/>
+          <p:cNvPr id="3" name="Picture 2" descr="default_image.jpg"/>
           <p:cNvPicPr>
             <a:picLocks noChangeAspect="1"/>
           </p:cNvPicPr>
@@ -28908,8 +28916,8 @@
         </p:blipFill>
         <p:spPr>
           <a:xfrm>
-            <a:off x="305335" y="0"/>
-            <a:ext cx="8533328" cy="6858000"/>
+            <a:off x="2275973" y="0"/>
+            <a:ext cx="4592052" cy="6858000"/>
           </a:xfrm>
           <a:prstGeom prst="rect">
             <a:avLst/>

--- a/output_ppt.pptx
+++ b/output_ppt.pptx
@@ -499,7 +499,7 @@
           <a:p>
             <a:fld id="{B00729D7-BDA7-41E1-AD79-DC61E6DD2EC2}" type="datetimeFigureOut">
               <a:rPr lang="ko-KR" altLang="en-US" smtClean="0"/>
-              <a:t>2025-03-21</a:t>
+              <a:t>2025-03-22</a:t>
             </a:fld>
             <a:endParaRPr lang="ko-KR" altLang="en-US"/>
           </a:p>
@@ -669,7 +669,7 @@
           <a:p>
             <a:fld id="{B00729D7-BDA7-41E1-AD79-DC61E6DD2EC2}" type="datetimeFigureOut">
               <a:rPr lang="ko-KR" altLang="en-US" smtClean="0"/>
-              <a:t>2025-03-21</a:t>
+              <a:t>2025-03-22</a:t>
             </a:fld>
             <a:endParaRPr lang="ko-KR" altLang="en-US"/>
           </a:p>
@@ -849,7 +849,7 @@
           <a:p>
             <a:fld id="{B00729D7-BDA7-41E1-AD79-DC61E6DD2EC2}" type="datetimeFigureOut">
               <a:rPr lang="ko-KR" altLang="en-US" smtClean="0"/>
-              <a:t>2025-03-21</a:t>
+              <a:t>2025-03-22</a:t>
             </a:fld>
             <a:endParaRPr lang="ko-KR" altLang="en-US"/>
           </a:p>
@@ -1525,7 +1525,7 @@
           <a:p>
             <a:fld id="{B00729D7-BDA7-41E1-AD79-DC61E6DD2EC2}" type="datetimeFigureOut">
               <a:rPr lang="ko-KR" altLang="en-US" smtClean="0"/>
-              <a:t>2025-03-21</a:t>
+              <a:t>2025-03-22</a:t>
             </a:fld>
             <a:endParaRPr lang="ko-KR" altLang="en-US"/>
           </a:p>
@@ -1769,7 +1769,7 @@
           <a:p>
             <a:fld id="{B00729D7-BDA7-41E1-AD79-DC61E6DD2EC2}" type="datetimeFigureOut">
               <a:rPr lang="ko-KR" altLang="en-US" smtClean="0"/>
-              <a:t>2025-03-21</a:t>
+              <a:t>2025-03-22</a:t>
             </a:fld>
             <a:endParaRPr lang="ko-KR" altLang="en-US"/>
           </a:p>
@@ -2001,7 +2001,7 @@
           <a:p>
             <a:fld id="{B00729D7-BDA7-41E1-AD79-DC61E6DD2EC2}" type="datetimeFigureOut">
               <a:rPr lang="ko-KR" altLang="en-US" smtClean="0"/>
-              <a:t>2025-03-21</a:t>
+              <a:t>2025-03-22</a:t>
             </a:fld>
             <a:endParaRPr lang="ko-KR" altLang="en-US"/>
           </a:p>
@@ -2368,7 +2368,7 @@
           <a:p>
             <a:fld id="{B00729D7-BDA7-41E1-AD79-DC61E6DD2EC2}" type="datetimeFigureOut">
               <a:rPr lang="ko-KR" altLang="en-US" smtClean="0"/>
-              <a:t>2025-03-21</a:t>
+              <a:t>2025-03-22</a:t>
             </a:fld>
             <a:endParaRPr lang="ko-KR" altLang="en-US"/>
           </a:p>
@@ -2486,7 +2486,7 @@
           <a:p>
             <a:fld id="{B00729D7-BDA7-41E1-AD79-DC61E6DD2EC2}" type="datetimeFigureOut">
               <a:rPr lang="ko-KR" altLang="en-US" smtClean="0"/>
-              <a:t>2025-03-21</a:t>
+              <a:t>2025-03-22</a:t>
             </a:fld>
             <a:endParaRPr lang="ko-KR" altLang="en-US"/>
           </a:p>
@@ -2581,7 +2581,7 @@
           <a:p>
             <a:fld id="{B00729D7-BDA7-41E1-AD79-DC61E6DD2EC2}" type="datetimeFigureOut">
               <a:rPr lang="ko-KR" altLang="en-US" smtClean="0"/>
-              <a:t>2025-03-21</a:t>
+              <a:t>2025-03-22</a:t>
             </a:fld>
             <a:endParaRPr lang="ko-KR" altLang="en-US"/>
           </a:p>
@@ -2858,7 +2858,7 @@
           <a:p>
             <a:fld id="{B00729D7-BDA7-41E1-AD79-DC61E6DD2EC2}" type="datetimeFigureOut">
               <a:rPr lang="ko-KR" altLang="en-US" smtClean="0"/>
-              <a:t>2025-03-21</a:t>
+              <a:t>2025-03-22</a:t>
             </a:fld>
             <a:endParaRPr lang="ko-KR" altLang="en-US"/>
           </a:p>
@@ -3071,7 +3071,7 @@
           <a:p>
             <a:fld id="{B00729D7-BDA7-41E1-AD79-DC61E6DD2EC2}" type="datetimeFigureOut">
               <a:rPr lang="ko-KR" altLang="en-US" smtClean="0"/>
-              <a:t>2025-03-21</a:t>
+              <a:t>2025-03-22</a:t>
             </a:fld>
             <a:endParaRPr lang="ko-KR" altLang="en-US"/>
           </a:p>
@@ -7029,29 +7029,108 @@
             </a:lvl9pPr>
           </a:lstStyle>
           <a:p>
-            <a:pPr algn="ctr">
-              <a:defRPr sz="1500" b="1">
+            <a:pPr eaLnBrk="1" hangingPunct="1"/>
+            <a:r>
+              <a:rPr lang="en-US" altLang="ko-KR" sz="1600" b="1" dirty="0">
                 <a:solidFill>
-                  <a:srgbClr val="445474"/>
+                  <a:schemeClr val="tx2"/>
                 </a:solidFill>
-                <a:latin typeface="맑은 고딕"/>
-              </a:defRPr>
-            </a:pPr>
-            <a:r>
-              <a:t>Female 순응교합 20 2005-03-27</a:t>
+                <a:latin typeface="+mj-ea"/>
+                <a:ea typeface="+mj-ea"/>
+                <a:cs typeface="Arial" panose="020B0604020202020204" pitchFamily="34" charset="0"/>
+              </a:rPr>
+              <a:t>  (F) </a:t>
+            </a:r>
+            <a:r>
+              <a:rPr lang="ko-KR" altLang="en-US" sz="1600" b="1" dirty="0">
+                <a:solidFill>
+                  <a:schemeClr val="tx2"/>
+                </a:solidFill>
+                <a:latin typeface="+mj-ea"/>
+                <a:ea typeface="+mj-ea"/>
+                <a:cs typeface="Arial" panose="020B0604020202020204" pitchFamily="34" charset="0"/>
+              </a:rPr>
+              <a:t>순응교합연구회 </a:t>
+            </a:r>
+            <a:r>
+              <a:rPr lang="en-US" altLang="ko-KR" sz="1600" b="1" dirty="0">
+                <a:solidFill>
+                  <a:schemeClr val="tx2"/>
+                </a:solidFill>
+                <a:latin typeface="+mj-ea"/>
+                <a:ea typeface="+mj-ea"/>
+                <a:cs typeface="Arial" panose="020B0604020202020204" pitchFamily="34" charset="0"/>
+              </a:rPr>
+              <a:t>8y since 2017</a:t>
             </a:r>
           </a:p>
           <a:p>
-            <a:pPr algn="ctr">
-              <a:defRPr sz="1500" b="1">
+            <a:pPr eaLnBrk="1" hangingPunct="1"/>
+            <a:r>
+              <a:rPr lang="en-US" altLang="ko-KR" sz="1600" b="1" dirty="0">
                 <a:solidFill>
-                  <a:srgbClr val="445474"/>
+                  <a:schemeClr val="tx2"/>
                 </a:solidFill>
-                <a:latin typeface="맑은 고딕"/>
-              </a:defRPr>
-            </a:pPr>
-            <a:r>
-              <a:t> S1.B2.D3.C1-nbt(dbt)-RM(Rt)-Fx:Ex-Fx/1-Type IV</a:t>
+                <a:latin typeface="+mj-ea"/>
+                <a:ea typeface="+mj-ea"/>
+                <a:cs typeface="Arial" panose="020B0604020202020204" pitchFamily="34" charset="0"/>
+              </a:rPr>
+              <a:t>S1.B1.D1.C1-nbt(</a:t>
+            </a:r>
+            <a:r>
+              <a:rPr lang="en-US" altLang="ko-KR" sz="1600" b="1" dirty="0" err="1">
+                <a:solidFill>
+                  <a:schemeClr val="tx2"/>
+                </a:solidFill>
+                <a:latin typeface="+mj-ea"/>
+                <a:ea typeface="+mj-ea"/>
+                <a:cs typeface="Arial" panose="020B0604020202020204" pitchFamily="34" charset="0"/>
+              </a:rPr>
+              <a:t>dbt</a:t>
+            </a:r>
+            <a:r>
+              <a:rPr lang="en-US" altLang="ko-KR" sz="1600" b="1" dirty="0">
+                <a:solidFill>
+                  <a:schemeClr val="tx2"/>
+                </a:solidFill>
+                <a:latin typeface="+mj-ea"/>
+                <a:ea typeface="+mj-ea"/>
+                <a:cs typeface="Arial" panose="020B0604020202020204" pitchFamily="34" charset="0"/>
+              </a:rPr>
+              <a:t>)-RM(Rt)-</a:t>
+            </a:r>
+            <a:r>
+              <a:rPr lang="en-US" altLang="ko-KR" sz="1600" b="1" dirty="0" err="1">
+                <a:solidFill>
+                  <a:schemeClr val="tx2"/>
+                </a:solidFill>
+                <a:latin typeface="+mj-ea"/>
+                <a:ea typeface="+mj-ea"/>
+                <a:cs typeface="Arial" panose="020B0604020202020204" pitchFamily="34" charset="0"/>
+              </a:rPr>
+              <a:t>Fx:Ex-Fx</a:t>
+            </a:r>
+            <a:r>
+              <a:rPr lang="en-US" altLang="ko-KR" sz="1600" b="1" dirty="0">
+                <a:solidFill>
+                  <a:schemeClr val="tx2"/>
+                </a:solidFill>
+                <a:latin typeface="+mj-ea"/>
+                <a:ea typeface="+mj-ea"/>
+                <a:cs typeface="Arial" panose="020B0604020202020204" pitchFamily="34" charset="0"/>
+              </a:rPr>
+              <a:t>/0-Type IV   </a:t>
+            </a:r>
+            <a:r>
+              <a:rPr lang="ko-KR" altLang="en-US" sz="1600" b="1" dirty="0">
+                <a:solidFill>
+                  <a:schemeClr val="tx2"/>
+                </a:solidFill>
+                <a:latin typeface="+mj-ea"/>
+                <a:ea typeface="+mj-ea"/>
+                <a:cs typeface="Arial" panose="020B0604020202020204" pitchFamily="34" charset="0"/>
+              </a:rPr>
+              <a:t> </a:t>
             </a:r>
           </a:p>
         </p:txBody>
@@ -11917,14 +11996,14 @@
           <p:nvPr>
             <p:extLst>
               <p:ext uri="{D42A27DB-BD31-4B8C-83A1-F6EECF244321}">
-                <p14:modId xmlns:p14="http://schemas.microsoft.com/office/powerpoint/2010/main" val="3084902523"/>
+                <p14:modId xmlns:p14="http://schemas.microsoft.com/office/powerpoint/2010/main" val="642388886"/>
               </p:ext>
             </p:extLst>
           </p:nvPr>
         </p:nvGraphicFramePr>
         <p:xfrm>
-          <a:off x="243585" y="794606"/>
-          <a:ext cx="2065991" cy="5724496"/>
+          <a:off x="188638" y="761933"/>
+          <a:ext cx="2065991" cy="5787026"/>
         </p:xfrm>
         <a:graphic>
           <a:graphicData uri="http://schemas.openxmlformats.org/drawingml/2006/table">
@@ -11956,14 +12035,14 @@
                     <a:p>
                       <a:pPr algn="ctr" fontAlgn="ctr"/>
                       <a:r>
-                        <a:rPr lang="en-US" sz="700" u="none" strike="noStrike">
+                        <a:rPr lang="en-US" sz="700" u="none" strike="noStrike" dirty="0">
                           <a:effectLst/>
                           <a:latin typeface="+mn-ea"/>
                           <a:ea typeface="+mn-ea"/>
                         </a:rPr>
                         <a:t>ANB</a:t>
                       </a:r>
-                      <a:endParaRPr lang="en-US" sz="700" b="0" i="0" u="none" strike="noStrike">
+                      <a:endParaRPr lang="en-US" sz="700" b="0" i="0" u="none" strike="noStrike" dirty="0">
                         <a:effectLst/>
                         <a:latin typeface="+mn-ea"/>
                         <a:ea typeface="+mn-ea"/>
@@ -12031,17 +12110,23 @@
                     <a:bodyPr/>
                     <a:lstStyle/>
                     <a:p>
-                      <a:pPr algn="ctr">
-                        <a:defRPr sz="700" b="0">
-                          <a:solidFill>
-                            <a:srgbClr val="445474"/>
-                          </a:solidFill>
-                          <a:latin typeface="맑은 고딕"/>
-                        </a:defRPr>
-                      </a:pPr>
+                      <a:pPr algn="ctr" fontAlgn="ctr"/>
                       <a:r>
-                        <a:t>19.1</a:t>
+                        <a:rPr lang="en-US" altLang="ko-KR" sz="600" u="none" strike="noStrike" dirty="0">
+                          <a:effectLst/>
+                          <a:latin typeface="+mn-ea"/>
+                          <a:ea typeface="+mn-ea"/>
+                        </a:rPr>
+                        <a:t>0</a:t>
                       </a:r>
+                      <a:endParaRPr lang="en-US" altLang="ko-KR" sz="600" b="0" i="0" u="none" strike="noStrike" dirty="0">
+                        <a:solidFill>
+                          <a:srgbClr val="000000"/>
+                        </a:solidFill>
+                        <a:effectLst/>
+                        <a:latin typeface="+mn-ea"/>
+                        <a:ea typeface="+mn-ea"/>
+                      </a:endParaRPr>
                     </a:p>
                   </a:txBody>
                   <a:tcPr marL="0" marR="0" marT="0" marB="0" anchor="ctr">
@@ -12189,17 +12274,23 @@
                     <a:bodyPr/>
                     <a:lstStyle/>
                     <a:p>
-                      <a:pPr algn="ctr">
-                        <a:defRPr sz="700" b="0">
-                          <a:solidFill>
-                            <a:srgbClr val="445474"/>
-                          </a:solidFill>
-                          <a:latin typeface="맑은 고딕"/>
-                        </a:defRPr>
-                      </a:pPr>
+                      <a:pPr algn="ctr" fontAlgn="ctr"/>
                       <a:r>
-                        <a:t>20.6</a:t>
+                        <a:rPr lang="en-US" altLang="ko-KR" sz="600" u="none" strike="noStrike" dirty="0">
+                          <a:effectLst/>
+                          <a:latin typeface="+mn-ea"/>
+                          <a:ea typeface="+mn-ea"/>
+                        </a:rPr>
+                        <a:t>0</a:t>
                       </a:r>
+                      <a:endParaRPr lang="en-US" altLang="ko-KR" sz="600" b="0" i="0" u="none" strike="noStrike" dirty="0">
+                        <a:solidFill>
+                          <a:srgbClr val="000000"/>
+                        </a:solidFill>
+                        <a:effectLst/>
+                        <a:latin typeface="+mn-ea"/>
+                        <a:ea typeface="+mn-ea"/>
+                      </a:endParaRPr>
                     </a:p>
                   </a:txBody>
                   <a:tcPr marL="0" marR="0" marT="0" marB="0" anchor="ctr">
@@ -12347,17 +12438,23 @@
                     <a:bodyPr/>
                     <a:lstStyle/>
                     <a:p>
-                      <a:pPr algn="ctr">
-                        <a:defRPr sz="700" b="0">
-                          <a:solidFill>
-                            <a:srgbClr val="445474"/>
-                          </a:solidFill>
-                          <a:latin typeface="맑은 고딕"/>
-                        </a:defRPr>
-                      </a:pPr>
+                      <a:pPr algn="ctr" fontAlgn="ctr"/>
                       <a:r>
-                        <a:t>1.5</a:t>
+                        <a:rPr lang="en-US" altLang="ko-KR" sz="600" u="none" strike="noStrike" dirty="0">
+                          <a:effectLst/>
+                          <a:latin typeface="+mn-ea"/>
+                          <a:ea typeface="+mn-ea"/>
+                        </a:rPr>
+                        <a:t>0</a:t>
                       </a:r>
+                      <a:endParaRPr lang="en-US" altLang="ko-KR" sz="600" b="0" i="0" u="none" strike="noStrike" dirty="0">
+                        <a:solidFill>
+                          <a:srgbClr val="000000"/>
+                        </a:solidFill>
+                        <a:effectLst/>
+                        <a:latin typeface="+mn-ea"/>
+                        <a:ea typeface="+mn-ea"/>
+                      </a:endParaRPr>
                     </a:p>
                   </a:txBody>
                   <a:tcPr marL="0" marR="0" marT="0" marB="0" anchor="ctr">
@@ -12505,17 +12602,23 @@
                     <a:bodyPr/>
                     <a:lstStyle/>
                     <a:p>
-                      <a:pPr algn="ctr">
-                        <a:defRPr sz="700" b="0">
-                          <a:solidFill>
-                            <a:srgbClr val="445474"/>
-                          </a:solidFill>
-                          <a:latin typeface="맑은 고딕"/>
-                        </a:defRPr>
-                      </a:pPr>
+                      <a:pPr algn="ctr" fontAlgn="ctr"/>
                       <a:r>
-                        <a:t>20.7</a:t>
+                        <a:rPr lang="en-US" altLang="ko-KR" sz="600" u="none" strike="noStrike">
+                          <a:effectLst/>
+                          <a:latin typeface="+mn-ea"/>
+                          <a:ea typeface="+mn-ea"/>
+                        </a:rPr>
+                        <a:t>0</a:t>
                       </a:r>
+                      <a:endParaRPr lang="en-US" altLang="ko-KR" sz="600" b="0" i="0" u="none" strike="noStrike">
+                        <a:solidFill>
+                          <a:srgbClr val="000000"/>
+                        </a:solidFill>
+                        <a:effectLst/>
+                        <a:latin typeface="+mn-ea"/>
+                        <a:ea typeface="+mn-ea"/>
+                      </a:endParaRPr>
                     </a:p>
                   </a:txBody>
                   <a:tcPr marL="0" marR="0" marT="0" marB="0" anchor="ctr">
@@ -12663,17 +12766,23 @@
                     <a:bodyPr/>
                     <a:lstStyle/>
                     <a:p>
-                      <a:pPr algn="ctr">
-                        <a:defRPr sz="700" b="0">
-                          <a:solidFill>
-                            <a:srgbClr val="445474"/>
-                          </a:solidFill>
-                          <a:latin typeface="맑은 고딕"/>
-                        </a:defRPr>
-                      </a:pPr>
+                      <a:pPr algn="ctr" fontAlgn="ctr"/>
                       <a:r>
-                        <a:t>67.9</a:t>
+                        <a:rPr lang="en-US" altLang="ko-KR" sz="600" u="none" strike="noStrike" dirty="0">
+                          <a:effectLst/>
+                          <a:latin typeface="+mn-ea"/>
+                          <a:ea typeface="+mn-ea"/>
+                        </a:rPr>
+                        <a:t>0</a:t>
                       </a:r>
+                      <a:endParaRPr lang="en-US" altLang="ko-KR" sz="600" b="0" i="0" u="none" strike="noStrike" dirty="0">
+                        <a:solidFill>
+                          <a:srgbClr val="000000"/>
+                        </a:solidFill>
+                        <a:effectLst/>
+                        <a:latin typeface="+mn-ea"/>
+                        <a:ea typeface="+mn-ea"/>
+                      </a:endParaRPr>
                     </a:p>
                   </a:txBody>
                   <a:tcPr marL="0" marR="0" marT="0" marB="0" anchor="ctr">
@@ -12821,17 +12930,23 @@
                     <a:bodyPr/>
                     <a:lstStyle/>
                     <a:p>
-                      <a:pPr algn="ctr">
-                        <a:defRPr sz="700" b="0">
-                          <a:solidFill>
-                            <a:srgbClr val="445474"/>
-                          </a:solidFill>
-                          <a:latin typeface="맑은 고딕"/>
-                        </a:defRPr>
-                      </a:pPr>
+                      <a:pPr algn="ctr" fontAlgn="ctr"/>
                       <a:r>
-                        <a:t>132.9</a:t>
+                        <a:rPr lang="en-US" altLang="ko-KR" sz="600" u="none" strike="noStrike">
+                          <a:effectLst/>
+                          <a:latin typeface="+mn-ea"/>
+                          <a:ea typeface="+mn-ea"/>
+                        </a:rPr>
+                        <a:t>0</a:t>
                       </a:r>
+                      <a:endParaRPr lang="en-US" altLang="ko-KR" sz="600" b="0" i="0" u="none" strike="noStrike">
+                        <a:solidFill>
+                          <a:srgbClr val="000000"/>
+                        </a:solidFill>
+                        <a:effectLst/>
+                        <a:latin typeface="+mn-ea"/>
+                        <a:ea typeface="+mn-ea"/>
+                      </a:endParaRPr>
                     </a:p>
                   </a:txBody>
                   <a:tcPr marL="0" marR="0" marT="0" marB="0" anchor="ctr">
@@ -12979,17 +13094,23 @@
                     <a:bodyPr/>
                     <a:lstStyle/>
                     <a:p>
-                      <a:pPr algn="ctr">
-                        <a:defRPr sz="700" b="0">
-                          <a:solidFill>
-                            <a:srgbClr val="445474"/>
-                          </a:solidFill>
-                          <a:latin typeface="맑은 고딕"/>
-                        </a:defRPr>
-                      </a:pPr>
+                      <a:pPr algn="ctr" fontAlgn="ctr"/>
                       <a:r>
-                        <a:t>132.9</a:t>
+                        <a:rPr lang="en-US" altLang="ko-KR" sz="600" u="none" strike="noStrike" dirty="0">
+                          <a:effectLst/>
+                          <a:latin typeface="+mn-ea"/>
+                          <a:ea typeface="+mn-ea"/>
+                        </a:rPr>
+                        <a:t>0</a:t>
                       </a:r>
+                      <a:endParaRPr lang="en-US" altLang="ko-KR" sz="600" b="0" i="0" u="none" strike="noStrike" dirty="0">
+                        <a:solidFill>
+                          <a:srgbClr val="000000"/>
+                        </a:solidFill>
+                        <a:effectLst/>
+                        <a:latin typeface="+mn-ea"/>
+                        <a:ea typeface="+mn-ea"/>
+                      </a:endParaRPr>
                     </a:p>
                   </a:txBody>
                   <a:tcPr marL="0" marR="0" marT="0" marB="0" anchor="ctr">
@@ -13054,7 +13175,7 @@
                   </a:ext>
                 </a:extLst>
               </a:tr>
-              <a:tr h="111418">
+              <a:tr h="142776">
                 <a:tc>
                   <a:txBody>
                     <a:bodyPr/>
@@ -13137,17 +13258,23 @@
                     <a:bodyPr/>
                     <a:lstStyle/>
                     <a:p>
-                      <a:pPr algn="ctr">
-                        <a:defRPr sz="700" b="0">
-                          <a:solidFill>
-                            <a:srgbClr val="445474"/>
-                          </a:solidFill>
-                          <a:latin typeface="맑은 고딕"/>
-                        </a:defRPr>
-                      </a:pPr>
+                      <a:pPr algn="ctr" fontAlgn="ctr"/>
                       <a:r>
-                        <a:t>96.2</a:t>
+                        <a:rPr lang="en-US" altLang="ko-KR" sz="600" u="none" strike="noStrike">
+                          <a:effectLst/>
+                          <a:latin typeface="+mn-ea"/>
+                          <a:ea typeface="+mn-ea"/>
+                        </a:rPr>
+                        <a:t>0</a:t>
                       </a:r>
+                      <a:endParaRPr lang="en-US" altLang="ko-KR" sz="600" b="0" i="0" u="none" strike="noStrike">
+                        <a:solidFill>
+                          <a:srgbClr val="000000"/>
+                        </a:solidFill>
+                        <a:effectLst/>
+                        <a:latin typeface="+mn-ea"/>
+                        <a:ea typeface="+mn-ea"/>
+                      </a:endParaRPr>
                     </a:p>
                   </a:txBody>
                   <a:tcPr marL="0" marR="0" marT="0" marB="0" anchor="ctr">
@@ -13212,7 +13339,7 @@
                   </a:ext>
                 </a:extLst>
               </a:tr>
-              <a:tr h="100285">
+              <a:tr h="137852">
                 <a:tc>
                   <a:txBody>
                     <a:bodyPr/>
@@ -13295,17 +13422,23 @@
                     <a:bodyPr/>
                     <a:lstStyle/>
                     <a:p>
-                      <a:pPr algn="ctr">
-                        <a:defRPr sz="700" b="0">
-                          <a:solidFill>
-                            <a:srgbClr val="445474"/>
-                          </a:solidFill>
-                          <a:latin typeface="맑은 고딕"/>
-                        </a:defRPr>
-                      </a:pPr>
+                      <a:pPr algn="ctr" fontAlgn="ctr"/>
                       <a:r>
-                        <a:t>161.4</a:t>
+                        <a:rPr lang="en-US" altLang="ko-KR" sz="600" u="none" strike="noStrike" dirty="0">
+                          <a:effectLst/>
+                          <a:latin typeface="+mn-ea"/>
+                          <a:ea typeface="+mn-ea"/>
+                        </a:rPr>
+                        <a:t>0</a:t>
                       </a:r>
+                      <a:endParaRPr lang="en-US" altLang="ko-KR" sz="600" b="0" i="0" u="none" strike="noStrike" dirty="0">
+                        <a:solidFill>
+                          <a:srgbClr val="000000"/>
+                        </a:solidFill>
+                        <a:effectLst/>
+                        <a:latin typeface="+mn-ea"/>
+                        <a:ea typeface="+mn-ea"/>
+                      </a:endParaRPr>
                     </a:p>
                   </a:txBody>
                   <a:tcPr marL="0" marR="0" marT="0" marB="0" anchor="ctr">
@@ -13378,20 +13511,12 @@
                     <a:p>
                       <a:pPr algn="ctr" fontAlgn="ctr"/>
                       <a:r>
-                        <a:rPr lang="en-US" sz="700" u="none" strike="noStrike" dirty="0" err="1">
-                          <a:effectLst/>
-                          <a:latin typeface="+mn-ea"/>
-                          <a:ea typeface="+mn-ea"/>
-                        </a:rPr>
-                        <a:t>L.Lip</a:t>
-                      </a:r>
-                      <a:r>
                         <a:rPr lang="en-US" sz="700" u="none" strike="noStrike" dirty="0">
                           <a:effectLst/>
                           <a:latin typeface="+mn-ea"/>
                           <a:ea typeface="+mn-ea"/>
                         </a:rPr>
-                        <a:t> E-line</a:t>
+                        <a:t>E-line</a:t>
                       </a:r>
                       <a:endParaRPr lang="en-US" sz="700" b="0" i="0" u="none" strike="noStrike" dirty="0">
                         <a:effectLst/>
@@ -13461,17 +13586,23 @@
                     <a:bodyPr/>
                     <a:lstStyle/>
                     <a:p>
-                      <a:pPr algn="ctr">
-                        <a:defRPr sz="700" b="0">
-                          <a:solidFill>
-                            <a:srgbClr val="445474"/>
-                          </a:solidFill>
-                          <a:latin typeface="맑은 고딕"/>
-                        </a:defRPr>
-                      </a:pPr>
+                      <a:pPr algn="ctr" fontAlgn="ctr"/>
                       <a:r>
-                        <a:t>-16.1</a:t>
+                        <a:rPr lang="en-US" altLang="ko-KR" sz="600" u="none" strike="noStrike" dirty="0">
+                          <a:effectLst/>
+                          <a:latin typeface="+mn-ea"/>
+                          <a:ea typeface="+mn-ea"/>
+                        </a:rPr>
+                        <a:t>0</a:t>
                       </a:r>
+                      <a:endParaRPr lang="en-US" altLang="ko-KR" sz="600" b="0" i="0" u="none" strike="noStrike" dirty="0">
+                        <a:solidFill>
+                          <a:srgbClr val="000000"/>
+                        </a:solidFill>
+                        <a:effectLst/>
+                        <a:latin typeface="+mn-ea"/>
+                        <a:ea typeface="+mn-ea"/>
+                      </a:endParaRPr>
                     </a:p>
                   </a:txBody>
                   <a:tcPr marL="0" marR="0" marT="0" marB="0" anchor="ctr">
@@ -13619,17 +13750,23 @@
                     <a:bodyPr/>
                     <a:lstStyle/>
                     <a:p>
-                      <a:pPr algn="ctr">
-                        <a:defRPr sz="700" b="0">
-                          <a:solidFill>
-                            <a:srgbClr val="445474"/>
-                          </a:solidFill>
-                          <a:latin typeface="맑은 고딕"/>
-                        </a:defRPr>
-                      </a:pPr>
+                      <a:pPr algn="ctr" fontAlgn="ctr"/>
                       <a:r>
-                        <a:t>13.7</a:t>
+                        <a:rPr lang="en-US" altLang="ko-KR" sz="600" u="none" strike="noStrike" dirty="0">
+                          <a:effectLst/>
+                          <a:latin typeface="+mn-ea"/>
+                          <a:ea typeface="+mn-ea"/>
+                        </a:rPr>
+                        <a:t>0</a:t>
                       </a:r>
+                      <a:endParaRPr lang="en-US" altLang="ko-KR" sz="600" b="0" i="0" u="none" strike="noStrike" dirty="0">
+                        <a:solidFill>
+                          <a:srgbClr val="000000"/>
+                        </a:solidFill>
+                        <a:effectLst/>
+                        <a:latin typeface="+mn-ea"/>
+                        <a:ea typeface="+mn-ea"/>
+                      </a:endParaRPr>
                     </a:p>
                   </a:txBody>
                   <a:tcPr marL="0" marR="0" marT="0" marB="0" anchor="ctr">
@@ -13777,17 +13914,23 @@
                     <a:bodyPr/>
                     <a:lstStyle/>
                     <a:p>
-                      <a:pPr algn="ctr">
-                        <a:defRPr sz="700" b="0">
-                          <a:solidFill>
-                            <a:srgbClr val="445474"/>
-                          </a:solidFill>
-                          <a:latin typeface="맑은 고딕"/>
-                        </a:defRPr>
-                      </a:pPr>
+                      <a:pPr algn="ctr" fontAlgn="ctr"/>
                       <a:r>
-                        <a:t>49</a:t>
+                        <a:rPr lang="en-US" altLang="ko-KR" sz="600" u="none" strike="noStrike" dirty="0">
+                          <a:effectLst/>
+                          <a:latin typeface="+mn-ea"/>
+                          <a:ea typeface="+mn-ea"/>
+                        </a:rPr>
+                        <a:t>0</a:t>
                       </a:r>
+                      <a:endParaRPr lang="en-US" altLang="ko-KR" sz="600" b="0" i="0" u="none" strike="noStrike" dirty="0">
+                        <a:solidFill>
+                          <a:srgbClr val="000000"/>
+                        </a:solidFill>
+                        <a:effectLst/>
+                        <a:latin typeface="+mn-ea"/>
+                        <a:ea typeface="+mn-ea"/>
+                      </a:endParaRPr>
                     </a:p>
                   </a:txBody>
                   <a:tcPr marL="0" marR="0" marT="0" marB="0" anchor="ctr">
@@ -13935,17 +14078,23 @@
                     <a:bodyPr/>
                     <a:lstStyle/>
                     <a:p>
-                      <a:pPr algn="ctr">
-                        <a:defRPr sz="700" b="0">
-                          <a:solidFill>
-                            <a:srgbClr val="445474"/>
-                          </a:solidFill>
-                          <a:latin typeface="맑은 고딕"/>
-                        </a:defRPr>
-                      </a:pPr>
+                      <a:pPr algn="ctr" fontAlgn="ctr"/>
                       <a:r>
-                        <a:t>16.8</a:t>
+                        <a:rPr lang="en-US" altLang="ko-KR" sz="600" u="none" strike="noStrike">
+                          <a:effectLst/>
+                          <a:latin typeface="+mn-ea"/>
+                          <a:ea typeface="+mn-ea"/>
+                        </a:rPr>
+                        <a:t>0</a:t>
                       </a:r>
+                      <a:endParaRPr lang="en-US" altLang="ko-KR" sz="600" b="0" i="0" u="none" strike="noStrike">
+                        <a:solidFill>
+                          <a:srgbClr val="000000"/>
+                        </a:solidFill>
+                        <a:effectLst/>
+                        <a:latin typeface="+mn-ea"/>
+                        <a:ea typeface="+mn-ea"/>
+                      </a:endParaRPr>
                     </a:p>
                   </a:txBody>
                   <a:tcPr marL="0" marR="0" marT="0" marB="0" anchor="ctr">
@@ -14093,17 +14242,23 @@
                     <a:bodyPr/>
                     <a:lstStyle/>
                     <a:p>
-                      <a:pPr algn="ctr">
-                        <a:defRPr sz="700" b="0">
-                          <a:solidFill>
-                            <a:srgbClr val="445474"/>
-                          </a:solidFill>
-                          <a:latin typeface="맑은 고딕"/>
-                        </a:defRPr>
-                      </a:pPr>
+                      <a:pPr algn="ctr" fontAlgn="ctr"/>
                       <a:r>
-                        <a:t>28.8</a:t>
+                        <a:rPr lang="en-US" altLang="ko-KR" sz="600" u="none" strike="noStrike" dirty="0">
+                          <a:effectLst/>
+                          <a:latin typeface="+mn-ea"/>
+                          <a:ea typeface="+mn-ea"/>
+                        </a:rPr>
+                        <a:t>0</a:t>
                       </a:r>
+                      <a:endParaRPr lang="en-US" altLang="ko-KR" sz="600" b="0" i="0" u="none" strike="noStrike" dirty="0">
+                        <a:solidFill>
+                          <a:srgbClr val="000000"/>
+                        </a:solidFill>
+                        <a:effectLst/>
+                        <a:latin typeface="+mn-ea"/>
+                        <a:ea typeface="+mn-ea"/>
+                      </a:endParaRPr>
                     </a:p>
                   </a:txBody>
                   <a:tcPr marL="0" marR="0" marT="0" marB="0" anchor="ctr">
@@ -14251,17 +14406,23 @@
                     <a:bodyPr/>
                     <a:lstStyle/>
                     <a:p>
-                      <a:pPr algn="ctr">
-                        <a:defRPr sz="700" b="0">
-                          <a:solidFill>
-                            <a:srgbClr val="445474"/>
-                          </a:solidFill>
-                          <a:latin typeface="맑은 고딕"/>
-                        </a:defRPr>
-                      </a:pPr>
+                      <a:pPr algn="ctr" fontAlgn="ctr"/>
                       <a:r>
-                        <a:t>36.4</a:t>
+                        <a:rPr lang="en-US" altLang="ko-KR" sz="600" u="none" strike="noStrike" dirty="0">
+                          <a:effectLst/>
+                          <a:latin typeface="+mn-ea"/>
+                          <a:ea typeface="+mn-ea"/>
+                        </a:rPr>
+                        <a:t>0</a:t>
                       </a:r>
+                      <a:endParaRPr lang="en-US" altLang="ko-KR" sz="600" b="0" i="0" u="none" strike="noStrike" dirty="0">
+                        <a:solidFill>
+                          <a:srgbClr val="000000"/>
+                        </a:solidFill>
+                        <a:effectLst/>
+                        <a:latin typeface="+mn-ea"/>
+                        <a:ea typeface="+mn-ea"/>
+                      </a:endParaRPr>
                     </a:p>
                   </a:txBody>
                   <a:tcPr marL="0" marR="0" marT="0" marB="0" anchor="ctr">
@@ -14409,17 +14570,23 @@
                     <a:bodyPr/>
                     <a:lstStyle/>
                     <a:p>
-                      <a:pPr algn="ctr">
-                        <a:defRPr sz="700" b="0">
-                          <a:solidFill>
-                            <a:srgbClr val="445474"/>
-                          </a:solidFill>
-                          <a:latin typeface="맑은 고딕"/>
-                        </a:defRPr>
-                      </a:pPr>
+                      <a:pPr algn="ctr" fontAlgn="ctr"/>
                       <a:r>
-                        <a:t>52.9</a:t>
+                        <a:rPr lang="en-US" altLang="ko-KR" sz="600" u="none" strike="noStrike" dirty="0">
+                          <a:effectLst/>
+                          <a:latin typeface="+mn-ea"/>
+                          <a:ea typeface="+mn-ea"/>
+                        </a:rPr>
+                        <a:t>0</a:t>
                       </a:r>
+                      <a:endParaRPr lang="en-US" altLang="ko-KR" sz="600" b="0" i="0" u="none" strike="noStrike" dirty="0">
+                        <a:solidFill>
+                          <a:srgbClr val="000000"/>
+                        </a:solidFill>
+                        <a:effectLst/>
+                        <a:latin typeface="+mn-ea"/>
+                        <a:ea typeface="+mn-ea"/>
+                      </a:endParaRPr>
                     </a:p>
                   </a:txBody>
                   <a:tcPr marL="0" marR="0" marT="0" marB="0" anchor="ctr">
@@ -14567,17 +14734,23 @@
                     <a:bodyPr/>
                     <a:lstStyle/>
                     <a:p>
-                      <a:pPr algn="ctr">
-                        <a:defRPr sz="700" b="0">
-                          <a:solidFill>
-                            <a:srgbClr val="445474"/>
-                          </a:solidFill>
-                          <a:latin typeface="맑은 고딕"/>
-                        </a:defRPr>
-                      </a:pPr>
+                      <a:pPr algn="ctr" fontAlgn="ctr"/>
                       <a:r>
-                        <a:t>43.8</a:t>
+                        <a:rPr lang="en-US" altLang="ko-KR" sz="600" u="none" strike="noStrike" dirty="0">
+                          <a:effectLst/>
+                          <a:latin typeface="+mn-ea"/>
+                          <a:ea typeface="+mn-ea"/>
+                        </a:rPr>
+                        <a:t>0</a:t>
                       </a:r>
+                      <a:endParaRPr lang="en-US" altLang="ko-KR" sz="600" b="0" i="0" u="none" strike="noStrike" dirty="0">
+                        <a:solidFill>
+                          <a:srgbClr val="000000"/>
+                        </a:solidFill>
+                        <a:effectLst/>
+                        <a:latin typeface="+mn-ea"/>
+                        <a:ea typeface="+mn-ea"/>
+                      </a:endParaRPr>
                     </a:p>
                   </a:txBody>
                   <a:tcPr marL="0" marR="0" marT="0" marB="0" anchor="ctr">
@@ -14725,17 +14898,23 @@
                     <a:bodyPr/>
                     <a:lstStyle/>
                     <a:p>
-                      <a:pPr algn="ctr">
-                        <a:defRPr sz="700" b="0">
-                          <a:solidFill>
-                            <a:srgbClr val="445474"/>
-                          </a:solidFill>
-                          <a:latin typeface="맑은 고딕"/>
-                        </a:defRPr>
-                      </a:pPr>
+                      <a:pPr algn="ctr" fontAlgn="ctr"/>
                       <a:r>
+                        <a:rPr lang="en-US" altLang="ko-KR" sz="600" u="none" strike="noStrike" dirty="0">
+                          <a:effectLst/>
+                          <a:latin typeface="+mn-ea"/>
+                          <a:ea typeface="+mn-ea"/>
+                        </a:rPr>
                         <a:t>0</a:t>
                       </a:r>
+                      <a:endParaRPr lang="en-US" altLang="ko-KR" sz="600" b="0" i="0" u="none" strike="noStrike" dirty="0">
+                        <a:solidFill>
+                          <a:srgbClr val="000000"/>
+                        </a:solidFill>
+                        <a:effectLst/>
+                        <a:latin typeface="+mn-ea"/>
+                        <a:ea typeface="+mn-ea"/>
+                      </a:endParaRPr>
                     </a:p>
                   </a:txBody>
                   <a:tcPr marL="0" marR="0" marT="0" marB="0" anchor="ctr">
@@ -14883,17 +15062,23 @@
                     <a:bodyPr/>
                     <a:lstStyle/>
                     <a:p>
-                      <a:pPr algn="ctr">
-                        <a:defRPr sz="700" b="0">
-                          <a:solidFill>
-                            <a:srgbClr val="445474"/>
-                          </a:solidFill>
-                          <a:latin typeface="맑은 고딕"/>
-                        </a:defRPr>
-                      </a:pPr>
+                      <a:pPr algn="ctr" fontAlgn="ctr"/>
                       <a:r>
-                        <a:t>128</a:t>
+                        <a:rPr lang="en-US" altLang="ko-KR" sz="600" u="none" strike="noStrike" dirty="0">
+                          <a:effectLst/>
+                          <a:latin typeface="+mn-ea"/>
+                          <a:ea typeface="+mn-ea"/>
+                        </a:rPr>
+                        <a:t>0</a:t>
                       </a:r>
+                      <a:endParaRPr lang="en-US" altLang="ko-KR" sz="600" b="0" i="0" u="none" strike="noStrike" dirty="0">
+                        <a:solidFill>
+                          <a:srgbClr val="000000"/>
+                        </a:solidFill>
+                        <a:effectLst/>
+                        <a:latin typeface="+mn-ea"/>
+                        <a:ea typeface="+mn-ea"/>
+                      </a:endParaRPr>
                     </a:p>
                   </a:txBody>
                   <a:tcPr marL="0" marR="0" marT="0" marB="0" anchor="ctr">
@@ -15041,17 +15226,23 @@
                     <a:bodyPr/>
                     <a:lstStyle/>
                     <a:p>
-                      <a:pPr algn="ctr">
-                        <a:defRPr sz="700" b="0">
-                          <a:solidFill>
-                            <a:srgbClr val="445474"/>
-                          </a:solidFill>
-                          <a:latin typeface="맑은 고딕"/>
-                        </a:defRPr>
-                      </a:pPr>
+                      <a:pPr algn="ctr" fontAlgn="ctr"/>
                       <a:r>
-                        <a:t>73.2</a:t>
+                        <a:rPr lang="en-US" altLang="ko-KR" sz="600" u="none" strike="noStrike" dirty="0">
+                          <a:effectLst/>
+                          <a:latin typeface="+mn-ea"/>
+                          <a:ea typeface="+mn-ea"/>
+                        </a:rPr>
+                        <a:t>0</a:t>
                       </a:r>
+                      <a:endParaRPr lang="en-US" altLang="ko-KR" sz="600" b="0" i="0" u="none" strike="noStrike" dirty="0">
+                        <a:solidFill>
+                          <a:srgbClr val="000000"/>
+                        </a:solidFill>
+                        <a:effectLst/>
+                        <a:latin typeface="+mn-ea"/>
+                        <a:ea typeface="+mn-ea"/>
+                      </a:endParaRPr>
                     </a:p>
                   </a:txBody>
                   <a:tcPr marL="0" marR="0" marT="0" marB="0" anchor="ctr">
@@ -15199,17 +15390,23 @@
                     <a:bodyPr/>
                     <a:lstStyle/>
                     <a:p>
-                      <a:pPr algn="ctr">
-                        <a:defRPr sz="700" b="0">
-                          <a:solidFill>
-                            <a:srgbClr val="445474"/>
-                          </a:solidFill>
-                          <a:latin typeface="맑은 고딕"/>
-                        </a:defRPr>
-                      </a:pPr>
+                      <a:pPr algn="ctr" fontAlgn="ctr"/>
                       <a:r>
-                        <a:t>80.2</a:t>
+                        <a:rPr lang="en-US" altLang="ko-KR" sz="600" u="none" strike="noStrike" dirty="0">
+                          <a:effectLst/>
+                          <a:latin typeface="+mn-ea"/>
+                          <a:ea typeface="+mn-ea"/>
+                        </a:rPr>
+                        <a:t>0</a:t>
                       </a:r>
+                      <a:endParaRPr lang="en-US" altLang="ko-KR" sz="600" b="0" i="0" u="none" strike="noStrike" dirty="0">
+                        <a:solidFill>
+                          <a:srgbClr val="000000"/>
+                        </a:solidFill>
+                        <a:effectLst/>
+                        <a:latin typeface="+mn-ea"/>
+                        <a:ea typeface="+mn-ea"/>
+                      </a:endParaRPr>
                     </a:p>
                   </a:txBody>
                   <a:tcPr marL="0" marR="0" marT="0" marB="0" anchor="ctr">
@@ -15357,17 +15554,23 @@
                     <a:bodyPr/>
                     <a:lstStyle/>
                     <a:p>
-                      <a:pPr algn="ctr">
-                        <a:defRPr sz="700" b="0">
-                          <a:solidFill>
-                            <a:srgbClr val="445474"/>
-                          </a:solidFill>
-                          <a:latin typeface="맑은 고딕"/>
-                        </a:defRPr>
-                      </a:pPr>
+                      <a:pPr algn="ctr" fontAlgn="ctr"/>
                       <a:r>
-                        <a:t>36.4</a:t>
+                        <a:rPr lang="en-US" altLang="ko-KR" sz="600" u="none" strike="noStrike" dirty="0">
+                          <a:effectLst/>
+                          <a:latin typeface="+mn-ea"/>
+                          <a:ea typeface="+mn-ea"/>
+                        </a:rPr>
+                        <a:t>0</a:t>
                       </a:r>
+                      <a:endParaRPr lang="en-US" altLang="ko-KR" sz="600" b="0" i="0" u="none" strike="noStrike" dirty="0">
+                        <a:solidFill>
+                          <a:srgbClr val="000000"/>
+                        </a:solidFill>
+                        <a:effectLst/>
+                        <a:latin typeface="+mn-ea"/>
+                        <a:ea typeface="+mn-ea"/>
+                      </a:endParaRPr>
                     </a:p>
                   </a:txBody>
                   <a:tcPr marL="0" marR="0" marT="0" marB="0" anchor="ctr">
@@ -15518,17 +15721,23 @@
                     <a:bodyPr/>
                     <a:lstStyle/>
                     <a:p>
-                      <a:pPr algn="ctr">
-                        <a:defRPr sz="700" b="0">
-                          <a:solidFill>
-                            <a:srgbClr val="445474"/>
-                          </a:solidFill>
-                          <a:latin typeface="맑은 고딕"/>
-                        </a:defRPr>
-                      </a:pPr>
+                      <a:pPr algn="ctr" fontAlgn="ctr"/>
                       <a:r>
-                        <a:t>15.9</a:t>
+                        <a:rPr lang="en-US" altLang="ko-KR" sz="600" u="none" strike="noStrike" dirty="0">
+                          <a:effectLst/>
+                          <a:latin typeface="+mn-ea"/>
+                          <a:ea typeface="+mn-ea"/>
+                        </a:rPr>
+                        <a:t>0</a:t>
                       </a:r>
+                      <a:endParaRPr lang="en-US" altLang="ko-KR" sz="600" b="0" i="0" u="none" strike="noStrike" dirty="0">
+                        <a:solidFill>
+                          <a:srgbClr val="000000"/>
+                        </a:solidFill>
+                        <a:effectLst/>
+                        <a:latin typeface="+mn-ea"/>
+                        <a:ea typeface="+mn-ea"/>
+                      </a:endParaRPr>
                     </a:p>
                   </a:txBody>
                   <a:tcPr marL="0" marR="0" marT="0" marB="0" anchor="ctr">
@@ -15676,17 +15885,23 @@
                     <a:bodyPr/>
                     <a:lstStyle/>
                     <a:p>
-                      <a:pPr algn="ctr">
-                        <a:defRPr sz="700" b="0">
-                          <a:solidFill>
-                            <a:srgbClr val="445474"/>
-                          </a:solidFill>
-                          <a:latin typeface="맑은 고딕"/>
-                        </a:defRPr>
-                      </a:pPr>
+                      <a:pPr algn="ctr" fontAlgn="ctr"/>
                       <a:r>
-                        <a:t>8.1</a:t>
+                        <a:rPr lang="en-US" altLang="ko-KR" sz="600" u="none" strike="noStrike" dirty="0">
+                          <a:effectLst/>
+                          <a:latin typeface="+mn-ea"/>
+                          <a:ea typeface="+mn-ea"/>
+                        </a:rPr>
+                        <a:t>0</a:t>
                       </a:r>
+                      <a:endParaRPr lang="en-US" altLang="ko-KR" sz="600" b="0" i="0" u="none" strike="noStrike" dirty="0">
+                        <a:solidFill>
+                          <a:srgbClr val="000000"/>
+                        </a:solidFill>
+                        <a:effectLst/>
+                        <a:latin typeface="+mn-ea"/>
+                        <a:ea typeface="+mn-ea"/>
+                      </a:endParaRPr>
                     </a:p>
                   </a:txBody>
                   <a:tcPr marL="0" marR="0" marT="0" marB="0" anchor="ctr">
@@ -15834,17 +16049,23 @@
                     <a:bodyPr/>
                     <a:lstStyle/>
                     <a:p>
-                      <a:pPr algn="ctr">
-                        <a:defRPr sz="700" b="0">
-                          <a:solidFill>
-                            <a:srgbClr val="445474"/>
-                          </a:solidFill>
-                          <a:latin typeface="맑은 고딕"/>
-                        </a:defRPr>
-                      </a:pPr>
+                      <a:pPr algn="ctr" fontAlgn="ctr"/>
                       <a:r>
-                        <a:t>25.9</a:t>
+                        <a:rPr lang="en-US" altLang="ko-KR" sz="600" u="none" strike="noStrike">
+                          <a:effectLst/>
+                          <a:latin typeface="+mn-ea"/>
+                          <a:ea typeface="+mn-ea"/>
+                        </a:rPr>
+                        <a:t>0</a:t>
                       </a:r>
+                      <a:endParaRPr lang="en-US" altLang="ko-KR" sz="600" b="0" i="0" u="none" strike="noStrike">
+                        <a:solidFill>
+                          <a:srgbClr val="000000"/>
+                        </a:solidFill>
+                        <a:effectLst/>
+                        <a:latin typeface="+mn-ea"/>
+                        <a:ea typeface="+mn-ea"/>
+                      </a:endParaRPr>
                     </a:p>
                   </a:txBody>
                   <a:tcPr marL="0" marR="0" marT="0" marB="0" anchor="ctr">
@@ -15992,17 +16213,23 @@
                     <a:bodyPr/>
                     <a:lstStyle/>
                     <a:p>
-                      <a:pPr algn="ctr">
-                        <a:defRPr sz="700" b="0">
-                          <a:solidFill>
-                            <a:srgbClr val="445474"/>
-                          </a:solidFill>
-                          <a:latin typeface="맑은 고딕"/>
-                        </a:defRPr>
-                      </a:pPr>
+                      <a:pPr algn="ctr" fontAlgn="ctr"/>
                       <a:r>
-                        <a:t>309.2</a:t>
+                        <a:rPr lang="en-US" altLang="ko-KR" sz="600" u="none" strike="noStrike" dirty="0">
+                          <a:effectLst/>
+                          <a:latin typeface="+mn-ea"/>
+                          <a:ea typeface="+mn-ea"/>
+                        </a:rPr>
+                        <a:t>0</a:t>
                       </a:r>
+                      <a:endParaRPr lang="en-US" altLang="ko-KR" sz="600" b="0" i="0" u="none" strike="noStrike" dirty="0">
+                        <a:solidFill>
+                          <a:srgbClr val="000000"/>
+                        </a:solidFill>
+                        <a:effectLst/>
+                        <a:latin typeface="+mn-ea"/>
+                        <a:ea typeface="+mn-ea"/>
+                      </a:endParaRPr>
                     </a:p>
                   </a:txBody>
                   <a:tcPr marL="0" marR="0" marT="0" marB="0" anchor="ctr">
@@ -16150,17 +16377,23 @@
                     <a:bodyPr/>
                     <a:lstStyle/>
                     <a:p>
-                      <a:pPr algn="ctr">
-                        <a:defRPr sz="700" b="0">
-                          <a:solidFill>
-                            <a:srgbClr val="445474"/>
-                          </a:solidFill>
-                          <a:latin typeface="맑은 고딕"/>
-                        </a:defRPr>
-                      </a:pPr>
+                      <a:pPr algn="ctr" fontAlgn="ctr"/>
                       <a:r>
-                        <a:t>12.3</a:t>
+                        <a:rPr lang="en-US" altLang="ko-KR" sz="600" u="none" strike="noStrike" dirty="0">
+                          <a:effectLst/>
+                          <a:latin typeface="+mn-ea"/>
+                          <a:ea typeface="+mn-ea"/>
+                        </a:rPr>
+                        <a:t>0</a:t>
                       </a:r>
+                      <a:endParaRPr lang="en-US" altLang="ko-KR" sz="600" b="0" i="0" u="none" strike="noStrike" dirty="0">
+                        <a:solidFill>
+                          <a:srgbClr val="000000"/>
+                        </a:solidFill>
+                        <a:effectLst/>
+                        <a:latin typeface="+mn-ea"/>
+                        <a:ea typeface="+mn-ea"/>
+                      </a:endParaRPr>
                     </a:p>
                   </a:txBody>
                   <a:tcPr marL="0" marR="0" marT="0" marB="0" anchor="ctr">
@@ -16308,17 +16541,23 @@
                     <a:bodyPr/>
                     <a:lstStyle/>
                     <a:p>
-                      <a:pPr algn="ctr">
-                        <a:defRPr sz="700" b="0">
-                          <a:solidFill>
-                            <a:srgbClr val="445474"/>
-                          </a:solidFill>
-                          <a:latin typeface="맑은 고딕"/>
-                        </a:defRPr>
-                      </a:pPr>
+                      <a:pPr algn="ctr" fontAlgn="ctr"/>
                       <a:r>
-                        <a:t>3</a:t>
+                        <a:rPr lang="en-US" altLang="ko-KR" sz="600" u="none" strike="noStrike" dirty="0">
+                          <a:effectLst/>
+                          <a:latin typeface="+mn-ea"/>
+                          <a:ea typeface="+mn-ea"/>
+                        </a:rPr>
+                        <a:t>0</a:t>
                       </a:r>
+                      <a:endParaRPr lang="en-US" altLang="ko-KR" sz="600" b="0" i="0" u="none" strike="noStrike" dirty="0">
+                        <a:solidFill>
+                          <a:srgbClr val="000000"/>
+                        </a:solidFill>
+                        <a:effectLst/>
+                        <a:latin typeface="+mn-ea"/>
+                        <a:ea typeface="+mn-ea"/>
+                      </a:endParaRPr>
                     </a:p>
                   </a:txBody>
                   <a:tcPr marL="0" marR="0" marT="0" marB="0" anchor="ctr">
@@ -16466,17 +16705,23 @@
                     <a:bodyPr/>
                     <a:lstStyle/>
                     <a:p>
-                      <a:pPr algn="ctr">
-                        <a:defRPr sz="700" b="0">
-                          <a:solidFill>
-                            <a:srgbClr val="445474"/>
-                          </a:solidFill>
-                          <a:latin typeface="맑은 고딕"/>
-                        </a:defRPr>
-                      </a:pPr>
+                      <a:pPr algn="ctr" fontAlgn="ctr"/>
                       <a:r>
-                        <a:t>16.6</a:t>
+                        <a:rPr lang="en-US" altLang="ko-KR" sz="600" u="none" strike="noStrike">
+                          <a:effectLst/>
+                          <a:latin typeface="+mn-ea"/>
+                          <a:ea typeface="+mn-ea"/>
+                        </a:rPr>
+                        <a:t>0</a:t>
                       </a:r>
+                      <a:endParaRPr lang="en-US" altLang="ko-KR" sz="600" b="0" i="0" u="none" strike="noStrike">
+                        <a:solidFill>
+                          <a:srgbClr val="000000"/>
+                        </a:solidFill>
+                        <a:effectLst/>
+                        <a:latin typeface="+mn-ea"/>
+                        <a:ea typeface="+mn-ea"/>
+                      </a:endParaRPr>
                     </a:p>
                   </a:txBody>
                   <a:tcPr marL="0" marR="0" marT="0" marB="0" anchor="ctr">
@@ -16624,17 +16869,23 @@
                     <a:bodyPr/>
                     <a:lstStyle/>
                     <a:p>
-                      <a:pPr algn="ctr">
-                        <a:defRPr sz="700" b="0">
-                          <a:solidFill>
-                            <a:srgbClr val="445474"/>
-                          </a:solidFill>
-                          <a:latin typeface="맑은 고딕"/>
-                        </a:defRPr>
-                      </a:pPr>
+                      <a:pPr algn="ctr" fontAlgn="ctr"/>
                       <a:r>
-                        <a:t>4.3</a:t>
+                        <a:rPr lang="en-US" altLang="ko-KR" sz="600" u="none" strike="noStrike" dirty="0">
+                          <a:effectLst/>
+                          <a:latin typeface="+mn-ea"/>
+                          <a:ea typeface="+mn-ea"/>
+                        </a:rPr>
+                        <a:t>0</a:t>
                       </a:r>
+                      <a:endParaRPr lang="en-US" altLang="ko-KR" sz="600" b="0" i="0" u="none" strike="noStrike" dirty="0">
+                        <a:solidFill>
+                          <a:srgbClr val="000000"/>
+                        </a:solidFill>
+                        <a:effectLst/>
+                        <a:latin typeface="+mn-ea"/>
+                        <a:ea typeface="+mn-ea"/>
+                      </a:endParaRPr>
                     </a:p>
                   </a:txBody>
                   <a:tcPr marL="0" marR="0" marT="0" marB="0" anchor="ctr">
@@ -16782,17 +17033,23 @@
                     <a:bodyPr/>
                     <a:lstStyle/>
                     <a:p>
-                      <a:pPr algn="ctr">
-                        <a:defRPr sz="700" b="0">
-                          <a:solidFill>
-                            <a:srgbClr val="445474"/>
-                          </a:solidFill>
-                          <a:latin typeface="맑은 고딕"/>
-                        </a:defRPr>
-                      </a:pPr>
+                      <a:pPr algn="ctr" fontAlgn="ctr"/>
                       <a:r>
-                        <a:t>52.7</a:t>
+                        <a:rPr lang="en-US" altLang="ko-KR" sz="600" u="none" strike="noStrike">
+                          <a:effectLst/>
+                          <a:latin typeface="+mn-ea"/>
+                          <a:ea typeface="+mn-ea"/>
+                        </a:rPr>
+                        <a:t>0</a:t>
                       </a:r>
+                      <a:endParaRPr lang="en-US" altLang="ko-KR" sz="600" b="0" i="0" u="none" strike="noStrike">
+                        <a:solidFill>
+                          <a:srgbClr val="000000"/>
+                        </a:solidFill>
+                        <a:effectLst/>
+                        <a:latin typeface="+mn-ea"/>
+                        <a:ea typeface="+mn-ea"/>
+                      </a:endParaRPr>
                     </a:p>
                   </a:txBody>
                   <a:tcPr marL="0" marR="0" marT="0" marB="0" anchor="ctr">
@@ -16940,17 +17197,23 @@
                     <a:bodyPr/>
                     <a:lstStyle/>
                     <a:p>
-                      <a:pPr algn="ctr">
-                        <a:defRPr sz="700" b="0">
-                          <a:solidFill>
-                            <a:srgbClr val="445474"/>
-                          </a:solidFill>
-                          <a:latin typeface="맑은 고딕"/>
-                        </a:defRPr>
-                      </a:pPr>
+                      <a:pPr algn="ctr" fontAlgn="ctr"/>
                       <a:r>
-                        <a:t>24</a:t>
+                        <a:rPr lang="en-US" altLang="ko-KR" sz="600" u="none" strike="noStrike">
+                          <a:effectLst/>
+                          <a:latin typeface="+mn-ea"/>
+                          <a:ea typeface="+mn-ea"/>
+                        </a:rPr>
+                        <a:t>0</a:t>
                       </a:r>
+                      <a:endParaRPr lang="en-US" altLang="ko-KR" sz="600" b="0" i="0" u="none" strike="noStrike">
+                        <a:solidFill>
+                          <a:srgbClr val="000000"/>
+                        </a:solidFill>
+                        <a:effectLst/>
+                        <a:latin typeface="+mn-ea"/>
+                        <a:ea typeface="+mn-ea"/>
+                      </a:endParaRPr>
                     </a:p>
                   </a:txBody>
                   <a:tcPr marL="0" marR="0" marT="0" marB="0" anchor="ctr">
@@ -17098,17 +17361,23 @@
                     <a:bodyPr/>
                     <a:lstStyle/>
                     <a:p>
-                      <a:pPr algn="ctr">
-                        <a:defRPr sz="700" b="0">
-                          <a:solidFill>
-                            <a:srgbClr val="445474"/>
-                          </a:solidFill>
-                          <a:latin typeface="맑은 고딕"/>
-                        </a:defRPr>
-                      </a:pPr>
+                      <a:pPr algn="ctr" fontAlgn="ctr"/>
                       <a:r>
-                        <a:t>124.3</a:t>
+                        <a:rPr lang="en-US" altLang="ko-KR" sz="600" u="none" strike="noStrike" dirty="0">
+                          <a:effectLst/>
+                          <a:latin typeface="+mn-ea"/>
+                          <a:ea typeface="+mn-ea"/>
+                        </a:rPr>
+                        <a:t>0</a:t>
                       </a:r>
+                      <a:endParaRPr lang="en-US" altLang="ko-KR" sz="600" b="0" i="0" u="none" strike="noStrike" dirty="0">
+                        <a:solidFill>
+                          <a:srgbClr val="000000"/>
+                        </a:solidFill>
+                        <a:effectLst/>
+                        <a:latin typeface="+mn-ea"/>
+                        <a:ea typeface="+mn-ea"/>
+                      </a:endParaRPr>
                     </a:p>
                   </a:txBody>
                   <a:tcPr marL="0" marR="0" marT="0" marB="0" anchor="ctr">
@@ -17256,17 +17525,23 @@
                     <a:bodyPr/>
                     <a:lstStyle/>
                     <a:p>
-                      <a:pPr algn="ctr">
-                        <a:defRPr sz="700" b="0">
-                          <a:solidFill>
-                            <a:srgbClr val="445474"/>
-                          </a:solidFill>
-                          <a:latin typeface="맑은 고딕"/>
-                        </a:defRPr>
-                      </a:pPr>
+                      <a:pPr algn="ctr" fontAlgn="ctr"/>
                       <a:r>
-                        <a:t>68.5</a:t>
+                        <a:rPr lang="en-US" altLang="ko-KR" sz="600" u="none" strike="noStrike" dirty="0">
+                          <a:effectLst/>
+                          <a:latin typeface="+mn-ea"/>
+                          <a:ea typeface="+mn-ea"/>
+                        </a:rPr>
+                        <a:t>0</a:t>
                       </a:r>
+                      <a:endParaRPr lang="en-US" altLang="ko-KR" sz="600" b="0" i="0" u="none" strike="noStrike" dirty="0">
+                        <a:solidFill>
+                          <a:srgbClr val="000000"/>
+                        </a:solidFill>
+                        <a:effectLst/>
+                        <a:latin typeface="+mn-ea"/>
+                        <a:ea typeface="+mn-ea"/>
+                      </a:endParaRPr>
                     </a:p>
                   </a:txBody>
                   <a:tcPr marL="0" marR="0" marT="0" marB="0" anchor="ctr">
@@ -17414,17 +17689,23 @@
                     <a:bodyPr/>
                     <a:lstStyle/>
                     <a:p>
-                      <a:pPr algn="ctr">
-                        <a:defRPr sz="700" b="0">
-                          <a:solidFill>
-                            <a:srgbClr val="445474"/>
-                          </a:solidFill>
-                          <a:latin typeface="맑은 고딕"/>
-                        </a:defRPr>
-                      </a:pPr>
+                      <a:pPr algn="ctr" fontAlgn="ctr"/>
                       <a:r>
-                        <a:t>31.7</a:t>
+                        <a:rPr lang="en-US" altLang="ko-KR" sz="600" u="none" strike="noStrike" dirty="0">
+                          <a:effectLst/>
+                          <a:latin typeface="+mn-ea"/>
+                          <a:ea typeface="+mn-ea"/>
+                        </a:rPr>
+                        <a:t>0</a:t>
                       </a:r>
+                      <a:endParaRPr lang="en-US" altLang="ko-KR" sz="600" b="0" i="0" u="none" strike="noStrike" dirty="0">
+                        <a:solidFill>
+                          <a:srgbClr val="000000"/>
+                        </a:solidFill>
+                        <a:effectLst/>
+                        <a:latin typeface="+mn-ea"/>
+                        <a:ea typeface="+mn-ea"/>
+                      </a:endParaRPr>
                     </a:p>
                   </a:txBody>
                   <a:tcPr marL="0" marR="0" marT="0" marB="0" anchor="ctr">
@@ -17572,17 +17853,23 @@
                     <a:bodyPr/>
                     <a:lstStyle/>
                     <a:p>
-                      <a:pPr algn="ctr">
-                        <a:defRPr sz="700" b="0">
-                          <a:solidFill>
-                            <a:srgbClr val="445474"/>
-                          </a:solidFill>
-                          <a:latin typeface="맑은 고딕"/>
-                        </a:defRPr>
-                      </a:pPr>
+                      <a:pPr algn="ctr" fontAlgn="ctr"/>
                       <a:r>
-                        <a:t>8</a:t>
+                        <a:rPr lang="en-US" altLang="ko-KR" sz="600" u="none" strike="noStrike">
+                          <a:effectLst/>
+                          <a:latin typeface="+mn-ea"/>
+                          <a:ea typeface="+mn-ea"/>
+                        </a:rPr>
+                        <a:t>0</a:t>
                       </a:r>
+                      <a:endParaRPr lang="en-US" altLang="ko-KR" sz="600" b="0" i="0" u="none" strike="noStrike">
+                        <a:solidFill>
+                          <a:srgbClr val="000000"/>
+                        </a:solidFill>
+                        <a:effectLst/>
+                        <a:latin typeface="+mn-ea"/>
+                        <a:ea typeface="+mn-ea"/>
+                      </a:endParaRPr>
                     </a:p>
                   </a:txBody>
                   <a:tcPr marL="0" marR="0" marT="0" marB="0" anchor="ctr">
@@ -17730,17 +18017,23 @@
                     <a:bodyPr/>
                     <a:lstStyle/>
                     <a:p>
-                      <a:pPr algn="ctr">
-                        <a:defRPr sz="700" b="0">
-                          <a:solidFill>
-                            <a:srgbClr val="445474"/>
-                          </a:solidFill>
-                          <a:latin typeface="맑은 고딕"/>
-                        </a:defRPr>
-                      </a:pPr>
+                      <a:pPr algn="ctr" fontAlgn="ctr"/>
                       <a:r>
-                        <a:t>-10</a:t>
+                        <a:rPr lang="en-US" altLang="ko-KR" sz="600" u="none" strike="noStrike" dirty="0">
+                          <a:effectLst/>
+                          <a:latin typeface="+mn-ea"/>
+                          <a:ea typeface="+mn-ea"/>
+                        </a:rPr>
+                        <a:t>0</a:t>
                       </a:r>
+                      <a:endParaRPr lang="en-US" altLang="ko-KR" sz="600" b="0" i="0" u="none" strike="noStrike" dirty="0">
+                        <a:solidFill>
+                          <a:srgbClr val="000000"/>
+                        </a:solidFill>
+                        <a:effectLst/>
+                        <a:latin typeface="+mn-ea"/>
+                        <a:ea typeface="+mn-ea"/>
+                      </a:endParaRPr>
                     </a:p>
                   </a:txBody>
                   <a:tcPr marL="0" marR="0" marT="0" marB="0" anchor="ctr">
@@ -17888,17 +18181,23 @@
                     <a:bodyPr/>
                     <a:lstStyle/>
                     <a:p>
-                      <a:pPr algn="ctr">
-                        <a:defRPr sz="700" b="0">
-                          <a:solidFill>
-                            <a:srgbClr val="445474"/>
-                          </a:solidFill>
-                          <a:latin typeface="맑은 고딕"/>
-                        </a:defRPr>
-                      </a:pPr>
+                      <a:pPr algn="ctr" fontAlgn="ctr"/>
                       <a:r>
-                        <a:t>49</a:t>
+                        <a:rPr lang="en-US" altLang="ko-KR" sz="600" u="none" strike="noStrike" dirty="0">
+                          <a:effectLst/>
+                          <a:latin typeface="+mn-ea"/>
+                          <a:ea typeface="+mn-ea"/>
+                        </a:rPr>
+                        <a:t>0</a:t>
                       </a:r>
+                      <a:endParaRPr lang="en-US" altLang="ko-KR" sz="600" b="0" i="0" u="none" strike="noStrike" dirty="0">
+                        <a:solidFill>
+                          <a:srgbClr val="000000"/>
+                        </a:solidFill>
+                        <a:effectLst/>
+                        <a:latin typeface="+mn-ea"/>
+                        <a:ea typeface="+mn-ea"/>
+                      </a:endParaRPr>
                     </a:p>
                   </a:txBody>
                   <a:tcPr marL="0" marR="0" marT="0" marB="0" anchor="ctr">
@@ -18046,17 +18345,23 @@
                     <a:bodyPr/>
                     <a:lstStyle/>
                     <a:p>
-                      <a:pPr algn="ctr">
-                        <a:defRPr sz="700" b="0">
-                          <a:solidFill>
-                            <a:srgbClr val="445474"/>
-                          </a:solidFill>
-                          <a:latin typeface="맑은 고딕"/>
-                        </a:defRPr>
-                      </a:pPr>
+                      <a:pPr algn="ctr" fontAlgn="ctr"/>
                       <a:r>
-                        <a:t>96.2</a:t>
+                        <a:rPr lang="en-US" altLang="ko-KR" sz="600" u="none" strike="noStrike" dirty="0">
+                          <a:effectLst/>
+                          <a:latin typeface="+mn-ea"/>
+                          <a:ea typeface="+mn-ea"/>
+                        </a:rPr>
+                        <a:t>0</a:t>
                       </a:r>
+                      <a:endParaRPr lang="en-US" altLang="ko-KR" sz="600" b="0" i="0" u="none" strike="noStrike" dirty="0">
+                        <a:solidFill>
+                          <a:srgbClr val="000000"/>
+                        </a:solidFill>
+                        <a:effectLst/>
+                        <a:latin typeface="+mn-ea"/>
+                        <a:ea typeface="+mn-ea"/>
+                      </a:endParaRPr>
                     </a:p>
                   </a:txBody>
                   <a:tcPr marL="0" marR="0" marT="0" marB="0" anchor="ctr">
@@ -18174,12 +18479,11 @@
           <a:bodyPr rtlCol="0" anchor="ctr"/>
           <a:lstStyle/>
           <a:p>
-            <a:pPr algn="ctr">
-              <a:defRPr sz="1300" b="1">
-                <a:latin typeface="맑은 고딕"/>
-              </a:defRPr>
-            </a:pPr>
-            <a:r>
+            <a:r>
+              <a:rPr lang="en-US" altLang="ko-KR" sz="1400" b="1" dirty="0">
+                <a:latin typeface="+mj-ea"/>
+                <a:ea typeface="+mj-ea"/>
+              </a:rPr>
               <a:t>C/C &amp; Main problem</a:t>
             </a:r>
           </a:p>
@@ -18234,12 +18538,11 @@
           <a:bodyPr rtlCol="0" anchor="ctr"/>
           <a:lstStyle/>
           <a:p>
-            <a:pPr algn="ctr">
-              <a:defRPr sz="1300" b="1">
-                <a:latin typeface="맑은 고딕"/>
-              </a:defRPr>
-            </a:pPr>
-            <a:r>
+            <a:r>
+              <a:rPr lang="en-US" altLang="ko-KR" sz="1200" b="1" dirty="0">
+                <a:latin typeface="+mj-ea"/>
+                <a:ea typeface="+mj-ea"/>
+              </a:rPr>
               <a:t>MPH:</a:t>
             </a:r>
           </a:p>
@@ -18333,13 +18636,16 @@
           </a:bodyPr>
           <a:lstStyle/>
           <a:p>
-            <a:pPr algn="ctr">
-              <a:defRPr sz="1300" b="1">
-                <a:latin typeface="맑은 고딕"/>
-              </a:defRPr>
-            </a:pPr>
-            <a:r>
-              <a:t>HGI:-0.5</a:t>
+            <a:pPr eaLnBrk="1" hangingPunct="1"/>
+            <a:r>
+              <a:rPr lang="en-US" altLang="ko-KR" sz="1400" b="1" dirty="0">
+                <a:solidFill>
+                  <a:srgbClr val="000000"/>
+                </a:solidFill>
+                <a:latin typeface="+mn-ea"/>
+                <a:cs typeface="Times New Roman Bold" panose="02020803070505020304" pitchFamily="18" charset="0"/>
+              </a:rPr>
+              <a:t>HGI:+</a:t>
             </a:r>
           </a:p>
         </p:txBody>
@@ -18423,13 +18729,16 @@
           </a:bodyPr>
           <a:lstStyle/>
           <a:p>
-            <a:pPr algn="ctr">
-              <a:defRPr sz="1300" b="1">
-                <a:latin typeface="맑은 고딕"/>
-              </a:defRPr>
-            </a:pPr>
-            <a:r>
-              <a:t>VGI:113.56</a:t>
+            <a:pPr eaLnBrk="1" hangingPunct="1"/>
+            <a:r>
+              <a:rPr lang="en-US" altLang="ko-KR" sz="1400" b="1" dirty="0">
+                <a:solidFill>
+                  <a:srgbClr val="000000"/>
+                </a:solidFill>
+                <a:latin typeface="+mn-ea"/>
+                <a:cs typeface="Times New Roman Bold" panose="02020803070505020304" pitchFamily="18" charset="0"/>
+              </a:rPr>
+              <a:t>VGI:+</a:t>
             </a:r>
           </a:p>
         </p:txBody>
@@ -18755,13 +19064,16 @@
           </a:bodyPr>
           <a:lstStyle/>
           <a:p>
-            <a:pPr algn="ctr">
-              <a:defRPr sz="1300" b="1">
-                <a:latin typeface="맑은 고딕"/>
-              </a:defRPr>
-            </a:pPr>
-            <a:r>
-              <a:t>IAPDI:9.67</a:t>
+            <a:pPr algn="ctr" eaLnBrk="1" hangingPunct="1"/>
+            <a:r>
+              <a:rPr lang="en-US" altLang="ko-KR" sz="1300" b="1" dirty="0">
+                <a:solidFill>
+                  <a:srgbClr val="000000"/>
+                </a:solidFill>
+                <a:latin typeface="+mn-ea"/>
+                <a:cs typeface="Times New Roman Bold" panose="02020803070505020304" pitchFamily="18" charset="0"/>
+              </a:rPr>
+              <a:t>IAPDI:</a:t>
             </a:r>
           </a:p>
         </p:txBody>
@@ -18975,13 +19287,16 @@
           </a:bodyPr>
           <a:lstStyle/>
           <a:p>
-            <a:pPr algn="ctr">
-              <a:defRPr sz="1300" b="1">
-                <a:latin typeface="맑은 고딕"/>
-              </a:defRPr>
-            </a:pPr>
-            <a:r>
-              <a:t>2APDL:31.46</a:t>
+            <a:pPr eaLnBrk="1" hangingPunct="1"/>
+            <a:r>
+              <a:rPr lang="en-US" altLang="ko-KR" sz="1300" b="1" dirty="0">
+                <a:solidFill>
+                  <a:srgbClr val="000000"/>
+                </a:solidFill>
+                <a:latin typeface="+mn-ea"/>
+                <a:cs typeface="Times New Roman Bold" panose="02020803070505020304" pitchFamily="18" charset="0"/>
+              </a:rPr>
+              <a:t>2APDL:</a:t>
             </a:r>
           </a:p>
         </p:txBody>
@@ -19014,13 +19329,16 @@
           </a:bodyPr>
           <a:lstStyle/>
           <a:p>
-            <a:pPr algn="ctr">
-              <a:defRPr sz="1300" b="1">
-                <a:latin typeface="맑은 고딕"/>
-              </a:defRPr>
-            </a:pPr>
-            <a:r>
-              <a:t>IODI:31.23</a:t>
+            <a:pPr eaLnBrk="1" hangingPunct="1"/>
+            <a:r>
+              <a:rPr lang="en-US" altLang="ko-KR" sz="1300" b="1" dirty="0">
+                <a:solidFill>
+                  <a:srgbClr val="000000"/>
+                </a:solidFill>
+                <a:latin typeface="+mn-ea"/>
+                <a:cs typeface="Times New Roman Bold" panose="02020803070505020304" pitchFamily="18" charset="0"/>
+              </a:rPr>
+              <a:t>IODI:</a:t>
             </a:r>
           </a:p>
         </p:txBody>
@@ -19096,13 +19414,16 @@
           </a:bodyPr>
           <a:lstStyle/>
           <a:p>
-            <a:pPr algn="ctr">
-              <a:defRPr sz="1300" b="1">
-                <a:latin typeface="맑은 고딕"/>
-              </a:defRPr>
-            </a:pPr>
-            <a:r>
-              <a:t>VDL:31.5</a:t>
+            <a:pPr eaLnBrk="1" hangingPunct="1"/>
+            <a:r>
+              <a:rPr lang="en-US" altLang="ko-KR" sz="1300" b="1" dirty="0">
+                <a:solidFill>
+                  <a:srgbClr val="000000"/>
+                </a:solidFill>
+                <a:latin typeface="+mn-ea"/>
+                <a:cs typeface="Times New Roman Bold" panose="02020803070505020304" pitchFamily="18" charset="0"/>
+              </a:rPr>
+              <a:t>VDL:</a:t>
             </a:r>
           </a:p>
         </p:txBody>
@@ -19164,7 +19485,7 @@
         </p:nvSpPr>
         <p:spPr>
           <a:xfrm>
-            <a:off x="225650" y="469547"/>
+            <a:off x="381063" y="246083"/>
             <a:ext cx="1989405" cy="307777"/>
           </a:xfrm>
           <a:prstGeom prst="rect">
@@ -19178,14 +19499,34 @@
           </a:bodyPr>
           <a:lstStyle/>
           <a:p>
-            <a:pPr algn="ctr">
-              <a:defRPr sz="1300" b="1">
-                <a:latin typeface="맑은 고딕"/>
-              </a:defRPr>
-            </a:pPr>
-            <a:r>
-              <a:t>CEPH RESULT</a:t>
-            </a:r>
+            <a:pPr eaLnBrk="1" hangingPunct="1"/>
+            <a:r>
+              <a:rPr lang="en-US" altLang="ko-KR" sz="1400" b="1" dirty="0">
+                <a:solidFill>
+                  <a:srgbClr val="000000"/>
+                </a:solidFill>
+                <a:latin typeface="+mn-ea"/>
+                <a:cs typeface="Times New Roman Bold" panose="02020803070505020304" pitchFamily="18" charset="0"/>
+              </a:rPr>
+              <a:t>CEPH </a:t>
+            </a:r>
+            <a:r>
+              <a:rPr lang="ko-KR" altLang="en-US" sz="1400" b="1" dirty="0">
+                <a:solidFill>
+                  <a:srgbClr val="000000"/>
+                </a:solidFill>
+                <a:latin typeface="+mn-ea"/>
+                <a:cs typeface="Times New Roman Bold" panose="02020803070505020304" pitchFamily="18" charset="0"/>
+              </a:rPr>
+              <a:t>데이터</a:t>
+            </a:r>
+            <a:endParaRPr lang="en-US" altLang="ko-KR" sz="1400" b="1" dirty="0">
+              <a:solidFill>
+                <a:srgbClr val="000000"/>
+              </a:solidFill>
+              <a:latin typeface="+mn-ea"/>
+              <a:cs typeface="Times New Roman Bold" panose="02020803070505020304" pitchFamily="18" charset="0"/>
+            </a:endParaRPr>
           </a:p>
         </p:txBody>
       </p:sp>
@@ -19217,13 +19558,16 @@
           </a:bodyPr>
           <a:lstStyle/>
           <a:p>
-            <a:pPr algn="ctr">
-              <a:defRPr sz="1300" b="1">
-                <a:latin typeface="맑은 고딕"/>
-              </a:defRPr>
-            </a:pPr>
-            <a:r>
-              <a:t>CFD:104.3</a:t>
+            <a:pPr eaLnBrk="1" hangingPunct="1"/>
+            <a:r>
+              <a:rPr lang="en-US" altLang="ko-KR" sz="1400" b="1" dirty="0">
+                <a:solidFill>
+                  <a:srgbClr val="000000"/>
+                </a:solidFill>
+                <a:latin typeface="+mn-ea"/>
+                <a:cs typeface="Times New Roman Bold" panose="02020803070505020304" pitchFamily="18" charset="0"/>
+              </a:rPr>
+              <a:t>CFD:</a:t>
             </a:r>
           </a:p>
         </p:txBody>
@@ -19256,12 +19600,15 @@
           </a:bodyPr>
           <a:lstStyle/>
           <a:p>
-            <a:pPr algn="ctr">
-              <a:defRPr sz="1300" b="1">
-                <a:latin typeface="맑은 고딕"/>
-              </a:defRPr>
-            </a:pPr>
-            <a:r>
+            <a:pPr eaLnBrk="1" hangingPunct="1"/>
+            <a:r>
+              <a:rPr lang="en-US" altLang="ko-KR" sz="1600" b="1" dirty="0">
+                <a:solidFill>
+                  <a:srgbClr val="000000"/>
+                </a:solidFill>
+                <a:latin typeface="+mn-ea"/>
+                <a:cs typeface="Times New Roman Bold" panose="02020803070505020304" pitchFamily="18" charset="0"/>
+              </a:rPr>
               <a:t>Extraction:</a:t>
             </a:r>
           </a:p>
@@ -19314,30 +19661,6 @@
           </a:p>
         </p:txBody>
       </p:sp>
-      <p:pic>
-        <p:nvPicPr>
-          <p:cNvPr id="3170" name="Picture 3169" descr="oral_default.jpg"/>
-          <p:cNvPicPr>
-            <a:picLocks noChangeAspect="1"/>
-          </p:cNvPicPr>
-          <p:nvPr/>
-        </p:nvPicPr>
-        <p:blipFill>
-          <a:blip r:embed="rId2"/>
-          <a:stretch>
-            <a:fillRect/>
-          </a:stretch>
-        </p:blipFill>
-        <p:spPr>
-          <a:xfrm>
-            <a:off x="2468880" y="502920"/>
-            <a:ext cx="1463040" cy="1005840"/>
-          </a:xfrm>
-          <a:prstGeom prst="rect">
-            <a:avLst/>
-          </a:prstGeom>
-        </p:spPr>
-      </p:pic>
     </p:spTree>
     <p:extLst>
       <p:ext uri="{BB962C8B-B14F-4D97-AF65-F5344CB8AC3E}">
@@ -28875,34 +29198,9 @@
           <a:chExt cx="0" cy="0"/>
         </a:xfrm>
       </p:grpSpPr>
-      <p:sp>
-        <p:nvSpPr>
-          <p:cNvPr id="2" name="제목 1">
-            <a:extLst>
-              <a:ext uri="{FF2B5EF4-FFF2-40B4-BE49-F238E27FC236}">
-                <a16:creationId xmlns:a16="http://schemas.microsoft.com/office/drawing/2014/main" id="{976147FE-A153-B348-7A75-33F30DDB9832}"/>
-              </a:ext>
-            </a:extLst>
-          </p:cNvPr>
-          <p:cNvSpPr>
-            <a:spLocks noGrp="1"/>
-          </p:cNvSpPr>
-          <p:nvPr>
-            <p:ph type="title"/>
-          </p:nvPr>
-        </p:nvSpPr>
-        <p:spPr/>
-        <p:txBody>
-          <a:bodyPr/>
-          <a:lstStyle/>
-          <a:p>
-            <a:endParaRPr lang="ko-KR" altLang="en-US" dirty="0"/>
-          </a:p>
-        </p:txBody>
-      </p:sp>
       <p:pic>
         <p:nvPicPr>
-          <p:cNvPr id="3" name="Picture 2" descr="default_image.jpg"/>
+          <p:cNvPr id="2" name="Picture 1" descr="psa.jpg"/>
           <p:cNvPicPr>
             <a:picLocks noChangeAspect="1"/>
           </p:cNvPicPr>
@@ -28916,8 +29214,8 @@
         </p:blipFill>
         <p:spPr>
           <a:xfrm>
-            <a:off x="2275973" y="0"/>
-            <a:ext cx="4592052" cy="6858000"/>
+            <a:off x="305335" y="0"/>
+            <a:ext cx="8533328" cy="6858000"/>
           </a:xfrm>
           <a:prstGeom prst="rect">
             <a:avLst/>
@@ -28954,34 +29252,9 @@
           <a:chExt cx="0" cy="0"/>
         </a:xfrm>
       </p:grpSpPr>
-      <p:sp>
-        <p:nvSpPr>
-          <p:cNvPr id="2" name="제목 1">
-            <a:extLst>
-              <a:ext uri="{FF2B5EF4-FFF2-40B4-BE49-F238E27FC236}">
-                <a16:creationId xmlns:a16="http://schemas.microsoft.com/office/drawing/2014/main" id="{976147FE-A153-B348-7A75-33F30DDB9832}"/>
-              </a:ext>
-            </a:extLst>
-          </p:cNvPr>
-          <p:cNvSpPr>
-            <a:spLocks noGrp="1"/>
-          </p:cNvSpPr>
-          <p:nvPr>
-            <p:ph type="title"/>
-          </p:nvPr>
-        </p:nvSpPr>
-        <p:spPr/>
-        <p:txBody>
-          <a:bodyPr/>
-          <a:lstStyle/>
-          <a:p>
-            <a:endParaRPr lang="ko-KR" altLang="en-US" dirty="0"/>
-          </a:p>
-        </p:txBody>
-      </p:sp>
       <p:pic>
         <p:nvPicPr>
-          <p:cNvPr id="3" name="Picture 2" descr="default_image.jpg"/>
+          <p:cNvPr id="2" name="Picture 1" descr="default_image.jpg"/>
           <p:cNvPicPr>
             <a:picLocks noChangeAspect="1"/>
           </p:cNvPicPr>
@@ -29005,7 +29278,7 @@
       </p:pic>
       <p:pic>
         <p:nvPicPr>
-          <p:cNvPr id="4" name="Picture 3" descr="default_image.jpg"/>
+          <p:cNvPr id="3" name="Picture 2" descr="default_image.jpg"/>
           <p:cNvPicPr>
             <a:picLocks noChangeAspect="1"/>
           </p:cNvPicPr>
@@ -29029,7 +29302,7 @@
       </p:pic>
       <p:pic>
         <p:nvPicPr>
-          <p:cNvPr id="5" name="Picture 4" descr="default_image.jpg"/>
+          <p:cNvPr id="4" name="Picture 3" descr="default_image.jpg"/>
           <p:cNvPicPr>
             <a:picLocks noChangeAspect="1"/>
           </p:cNvPicPr>
@@ -29053,7 +29326,7 @@
       </p:pic>
       <p:pic>
         <p:nvPicPr>
-          <p:cNvPr id="6" name="Picture 5" descr="default_image.jpg"/>
+          <p:cNvPr id="5" name="Picture 4" descr="default_image.jpg"/>
           <p:cNvPicPr>
             <a:picLocks noChangeAspect="1"/>
           </p:cNvPicPr>
@@ -29077,7 +29350,7 @@
       </p:pic>
       <p:pic>
         <p:nvPicPr>
-          <p:cNvPr id="7" name="Picture 6" descr="default_image.jpg"/>
+          <p:cNvPr id="6" name="Picture 5" descr="default_image.jpg"/>
           <p:cNvPicPr>
             <a:picLocks noChangeAspect="1"/>
           </p:cNvPicPr>
@@ -29101,7 +29374,7 @@
       </p:pic>
       <p:pic>
         <p:nvPicPr>
-          <p:cNvPr id="8" name="Picture 7" descr="default_image.jpg"/>
+          <p:cNvPr id="7" name="Picture 6" descr="default_image.jpg"/>
           <p:cNvPicPr>
             <a:picLocks noChangeAspect="1"/>
           </p:cNvPicPr>
@@ -29125,7 +29398,7 @@
       </p:pic>
       <p:pic>
         <p:nvPicPr>
-          <p:cNvPr id="9" name="Picture 8" descr="default_image.jpg"/>
+          <p:cNvPr id="8" name="Picture 7" descr="default_image.jpg"/>
           <p:cNvPicPr>
             <a:picLocks noChangeAspect="1"/>
           </p:cNvPicPr>
@@ -29149,7 +29422,7 @@
       </p:pic>
       <p:pic>
         <p:nvPicPr>
-          <p:cNvPr id="10" name="Picture 9" descr="default_image.jpg"/>
+          <p:cNvPr id="9" name="Picture 8" descr="default_image.jpg"/>
           <p:cNvPicPr>
             <a:picLocks noChangeAspect="1"/>
           </p:cNvPicPr>

--- a/output_ppt.pptx
+++ b/output_ppt.pptx
@@ -499,7 +499,7 @@
           <a:p>
             <a:fld id="{B00729D7-BDA7-41E1-AD79-DC61E6DD2EC2}" type="datetimeFigureOut">
               <a:rPr lang="ko-KR" altLang="en-US" smtClean="0"/>
-              <a:t>2025-03-22</a:t>
+              <a:t>2025-03-23</a:t>
             </a:fld>
             <a:endParaRPr lang="ko-KR" altLang="en-US"/>
           </a:p>
@@ -669,7 +669,7 @@
           <a:p>
             <a:fld id="{B00729D7-BDA7-41E1-AD79-DC61E6DD2EC2}" type="datetimeFigureOut">
               <a:rPr lang="ko-KR" altLang="en-US" smtClean="0"/>
-              <a:t>2025-03-22</a:t>
+              <a:t>2025-03-23</a:t>
             </a:fld>
             <a:endParaRPr lang="ko-KR" altLang="en-US"/>
           </a:p>
@@ -849,7 +849,7 @@
           <a:p>
             <a:fld id="{B00729D7-BDA7-41E1-AD79-DC61E6DD2EC2}" type="datetimeFigureOut">
               <a:rPr lang="ko-KR" altLang="en-US" smtClean="0"/>
-              <a:t>2025-03-22</a:t>
+              <a:t>2025-03-23</a:t>
             </a:fld>
             <a:endParaRPr lang="ko-KR" altLang="en-US"/>
           </a:p>
@@ -1525,7 +1525,7 @@
           <a:p>
             <a:fld id="{B00729D7-BDA7-41E1-AD79-DC61E6DD2EC2}" type="datetimeFigureOut">
               <a:rPr lang="ko-KR" altLang="en-US" smtClean="0"/>
-              <a:t>2025-03-22</a:t>
+              <a:t>2025-03-23</a:t>
             </a:fld>
             <a:endParaRPr lang="ko-KR" altLang="en-US"/>
           </a:p>
@@ -1769,7 +1769,7 @@
           <a:p>
             <a:fld id="{B00729D7-BDA7-41E1-AD79-DC61E6DD2EC2}" type="datetimeFigureOut">
               <a:rPr lang="ko-KR" altLang="en-US" smtClean="0"/>
-              <a:t>2025-03-22</a:t>
+              <a:t>2025-03-23</a:t>
             </a:fld>
             <a:endParaRPr lang="ko-KR" altLang="en-US"/>
           </a:p>
@@ -2001,7 +2001,7 @@
           <a:p>
             <a:fld id="{B00729D7-BDA7-41E1-AD79-DC61E6DD2EC2}" type="datetimeFigureOut">
               <a:rPr lang="ko-KR" altLang="en-US" smtClean="0"/>
-              <a:t>2025-03-22</a:t>
+              <a:t>2025-03-23</a:t>
             </a:fld>
             <a:endParaRPr lang="ko-KR" altLang="en-US"/>
           </a:p>
@@ -2368,7 +2368,7 @@
           <a:p>
             <a:fld id="{B00729D7-BDA7-41E1-AD79-DC61E6DD2EC2}" type="datetimeFigureOut">
               <a:rPr lang="ko-KR" altLang="en-US" smtClean="0"/>
-              <a:t>2025-03-22</a:t>
+              <a:t>2025-03-23</a:t>
             </a:fld>
             <a:endParaRPr lang="ko-KR" altLang="en-US"/>
           </a:p>
@@ -2486,7 +2486,7 @@
           <a:p>
             <a:fld id="{B00729D7-BDA7-41E1-AD79-DC61E6DD2EC2}" type="datetimeFigureOut">
               <a:rPr lang="ko-KR" altLang="en-US" smtClean="0"/>
-              <a:t>2025-03-22</a:t>
+              <a:t>2025-03-23</a:t>
             </a:fld>
             <a:endParaRPr lang="ko-KR" altLang="en-US"/>
           </a:p>
@@ -2581,7 +2581,7 @@
           <a:p>
             <a:fld id="{B00729D7-BDA7-41E1-AD79-DC61E6DD2EC2}" type="datetimeFigureOut">
               <a:rPr lang="ko-KR" altLang="en-US" smtClean="0"/>
-              <a:t>2025-03-22</a:t>
+              <a:t>2025-03-23</a:t>
             </a:fld>
             <a:endParaRPr lang="ko-KR" altLang="en-US"/>
           </a:p>
@@ -2858,7 +2858,7 @@
           <a:p>
             <a:fld id="{B00729D7-BDA7-41E1-AD79-DC61E6DD2EC2}" type="datetimeFigureOut">
               <a:rPr lang="ko-KR" altLang="en-US" smtClean="0"/>
-              <a:t>2025-03-22</a:t>
+              <a:t>2025-03-23</a:t>
             </a:fld>
             <a:endParaRPr lang="ko-KR" altLang="en-US"/>
           </a:p>
@@ -3071,7 +3071,7 @@
           <a:p>
             <a:fld id="{B00729D7-BDA7-41E1-AD79-DC61E6DD2EC2}" type="datetimeFigureOut">
               <a:rPr lang="ko-KR" altLang="en-US" smtClean="0"/>
-              <a:t>2025-03-22</a:t>
+              <a:t>2025-03-23</a:t>
             </a:fld>
             <a:endParaRPr lang="ko-KR" altLang="en-US"/>
           </a:p>
@@ -7029,108 +7029,29 @@
             </a:lvl9pPr>
           </a:lstStyle>
           <a:p>
-            <a:pPr eaLnBrk="1" hangingPunct="1"/>
-            <a:r>
-              <a:rPr lang="en-US" altLang="ko-KR" sz="1600" b="1" dirty="0">
+            <a:pPr algn="ctr">
+              <a:defRPr sz="1500" b="1">
                 <a:solidFill>
-                  <a:schemeClr val="tx2"/>
+                  <a:srgbClr val="445474"/>
                 </a:solidFill>
-                <a:latin typeface="+mj-ea"/>
-                <a:ea typeface="+mj-ea"/>
-                <a:cs typeface="Arial" panose="020B0604020202020204" pitchFamily="34" charset="0"/>
-              </a:rPr>
-              <a:t>  (F) </a:t>
-            </a:r>
-            <a:r>
-              <a:rPr lang="ko-KR" altLang="en-US" sz="1600" b="1" dirty="0">
-                <a:solidFill>
-                  <a:schemeClr val="tx2"/>
-                </a:solidFill>
-                <a:latin typeface="+mj-ea"/>
-                <a:ea typeface="+mj-ea"/>
-                <a:cs typeface="Arial" panose="020B0604020202020204" pitchFamily="34" charset="0"/>
-              </a:rPr>
-              <a:t>순응교합연구회 </a:t>
-            </a:r>
-            <a:r>
-              <a:rPr lang="en-US" altLang="ko-KR" sz="1600" b="1" dirty="0">
-                <a:solidFill>
-                  <a:schemeClr val="tx2"/>
-                </a:solidFill>
-                <a:latin typeface="+mj-ea"/>
-                <a:ea typeface="+mj-ea"/>
-                <a:cs typeface="Arial" panose="020B0604020202020204" pitchFamily="34" charset="0"/>
-              </a:rPr>
-              <a:t>8y since 2017</a:t>
+                <a:latin typeface="맑은 고딕"/>
+              </a:defRPr>
+            </a:pPr>
+            <a:r>
+              <a:t>Male 순응교합 20 2005-03-28</a:t>
             </a:r>
           </a:p>
           <a:p>
-            <a:pPr eaLnBrk="1" hangingPunct="1"/>
-            <a:r>
-              <a:rPr lang="en-US" altLang="ko-KR" sz="1600" b="1" dirty="0">
+            <a:pPr algn="ctr">
+              <a:defRPr sz="1500" b="1">
                 <a:solidFill>
-                  <a:schemeClr val="tx2"/>
+                  <a:srgbClr val="445474"/>
                 </a:solidFill>
-                <a:latin typeface="+mj-ea"/>
-                <a:ea typeface="+mj-ea"/>
-                <a:cs typeface="Arial" panose="020B0604020202020204" pitchFamily="34" charset="0"/>
-              </a:rPr>
-              <a:t>S1.B1.D1.C1-nbt(</a:t>
-            </a:r>
-            <a:r>
-              <a:rPr lang="en-US" altLang="ko-KR" sz="1600" b="1" dirty="0" err="1">
-                <a:solidFill>
-                  <a:schemeClr val="tx2"/>
-                </a:solidFill>
-                <a:latin typeface="+mj-ea"/>
-                <a:ea typeface="+mj-ea"/>
-                <a:cs typeface="Arial" panose="020B0604020202020204" pitchFamily="34" charset="0"/>
-              </a:rPr>
-              <a:t>dbt</a:t>
-            </a:r>
-            <a:r>
-              <a:rPr lang="en-US" altLang="ko-KR" sz="1600" b="1" dirty="0">
-                <a:solidFill>
-                  <a:schemeClr val="tx2"/>
-                </a:solidFill>
-                <a:latin typeface="+mj-ea"/>
-                <a:ea typeface="+mj-ea"/>
-                <a:cs typeface="Arial" panose="020B0604020202020204" pitchFamily="34" charset="0"/>
-              </a:rPr>
-              <a:t>)-RM(Rt)-</a:t>
-            </a:r>
-            <a:r>
-              <a:rPr lang="en-US" altLang="ko-KR" sz="1600" b="1" dirty="0" err="1">
-                <a:solidFill>
-                  <a:schemeClr val="tx2"/>
-                </a:solidFill>
-                <a:latin typeface="+mj-ea"/>
-                <a:ea typeface="+mj-ea"/>
-                <a:cs typeface="Arial" panose="020B0604020202020204" pitchFamily="34" charset="0"/>
-              </a:rPr>
-              <a:t>Fx:Ex-Fx</a:t>
-            </a:r>
-            <a:r>
-              <a:rPr lang="en-US" altLang="ko-KR" sz="1600" b="1" dirty="0">
-                <a:solidFill>
-                  <a:schemeClr val="tx2"/>
-                </a:solidFill>
-                <a:latin typeface="+mj-ea"/>
-                <a:ea typeface="+mj-ea"/>
-                <a:cs typeface="Arial" panose="020B0604020202020204" pitchFamily="34" charset="0"/>
-              </a:rPr>
-              <a:t>/0-Type IV   </a:t>
-            </a:r>
-            <a:r>
-              <a:rPr lang="ko-KR" altLang="en-US" sz="1600" b="1" dirty="0">
-                <a:solidFill>
-                  <a:schemeClr val="tx2"/>
-                </a:solidFill>
-                <a:latin typeface="+mj-ea"/>
-                <a:ea typeface="+mj-ea"/>
-                <a:cs typeface="Arial" panose="020B0604020202020204" pitchFamily="34" charset="0"/>
-              </a:rPr>
-              <a:t> </a:t>
+                <a:latin typeface="맑은 고딕"/>
+              </a:defRPr>
+            </a:pPr>
+            <a:r>
+              <a:t> S1.B2.D2.C1-nbt(dbt)-RM(Rt)-Fx:Ex-Fx/1-Type IV</a:t>
             </a:r>
           </a:p>
         </p:txBody>
@@ -11996,7 +11917,7 @@
           <p:nvPr>
             <p:extLst>
               <p:ext uri="{D42A27DB-BD31-4B8C-83A1-F6EECF244321}">
-                <p14:modId xmlns:p14="http://schemas.microsoft.com/office/powerpoint/2010/main" val="642388886"/>
+                <p14:modId xmlns:p14="http://schemas.microsoft.com/office/powerpoint/2010/main" val="1021680342"/>
               </p:ext>
             </p:extLst>
           </p:nvPr>
@@ -12110,23 +12031,17 @@
                     <a:bodyPr/>
                     <a:lstStyle/>
                     <a:p>
-                      <a:pPr algn="ctr" fontAlgn="ctr"/>
+                      <a:pPr algn="ctr">
+                        <a:defRPr sz="700" b="0">
+                          <a:solidFill>
+                            <a:srgbClr val="445474"/>
+                          </a:solidFill>
+                          <a:latin typeface="맑은 고딕"/>
+                        </a:defRPr>
+                      </a:pPr>
                       <a:r>
-                        <a:rPr lang="en-US" altLang="ko-KR" sz="600" u="none" strike="noStrike" dirty="0">
-                          <a:effectLst/>
-                          <a:latin typeface="+mn-ea"/>
-                          <a:ea typeface="+mn-ea"/>
-                        </a:rPr>
-                        <a:t>0</a:t>
+                        <a:t>-12.4</a:t>
                       </a:r>
-                      <a:endParaRPr lang="en-US" altLang="ko-KR" sz="600" b="0" i="0" u="none" strike="noStrike" dirty="0">
-                        <a:solidFill>
-                          <a:srgbClr val="000000"/>
-                        </a:solidFill>
-                        <a:effectLst/>
-                        <a:latin typeface="+mn-ea"/>
-                        <a:ea typeface="+mn-ea"/>
-                      </a:endParaRPr>
                     </a:p>
                   </a:txBody>
                   <a:tcPr marL="0" marR="0" marT="0" marB="0" anchor="ctr">
@@ -12274,23 +12189,17 @@
                     <a:bodyPr/>
                     <a:lstStyle/>
                     <a:p>
-                      <a:pPr algn="ctr" fontAlgn="ctr"/>
+                      <a:pPr algn="ctr">
+                        <a:defRPr sz="700" b="0">
+                          <a:solidFill>
+                            <a:srgbClr val="445474"/>
+                          </a:solidFill>
+                          <a:latin typeface="맑은 고딕"/>
+                        </a:defRPr>
+                      </a:pPr>
                       <a:r>
-                        <a:rPr lang="en-US" altLang="ko-KR" sz="600" u="none" strike="noStrike" dirty="0">
-                          <a:effectLst/>
-                          <a:latin typeface="+mn-ea"/>
-                          <a:ea typeface="+mn-ea"/>
-                        </a:rPr>
-                        <a:t>0</a:t>
+                        <a:t>3.7</a:t>
                       </a:r>
-                      <a:endParaRPr lang="en-US" altLang="ko-KR" sz="600" b="0" i="0" u="none" strike="noStrike" dirty="0">
-                        <a:solidFill>
-                          <a:srgbClr val="000000"/>
-                        </a:solidFill>
-                        <a:effectLst/>
-                        <a:latin typeface="+mn-ea"/>
-                        <a:ea typeface="+mn-ea"/>
-                      </a:endParaRPr>
                     </a:p>
                   </a:txBody>
                   <a:tcPr marL="0" marR="0" marT="0" marB="0" anchor="ctr">
@@ -12438,23 +12347,17 @@
                     <a:bodyPr/>
                     <a:lstStyle/>
                     <a:p>
-                      <a:pPr algn="ctr" fontAlgn="ctr"/>
+                      <a:pPr algn="ctr">
+                        <a:defRPr sz="700" b="0">
+                          <a:solidFill>
+                            <a:srgbClr val="445474"/>
+                          </a:solidFill>
+                          <a:latin typeface="맑은 고딕"/>
+                        </a:defRPr>
+                      </a:pPr>
                       <a:r>
-                        <a:rPr lang="en-US" altLang="ko-KR" sz="600" u="none" strike="noStrike" dirty="0">
-                          <a:effectLst/>
-                          <a:latin typeface="+mn-ea"/>
-                          <a:ea typeface="+mn-ea"/>
-                        </a:rPr>
-                        <a:t>0</a:t>
+                        <a:t>16.1</a:t>
                       </a:r>
-                      <a:endParaRPr lang="en-US" altLang="ko-KR" sz="600" b="0" i="0" u="none" strike="noStrike" dirty="0">
-                        <a:solidFill>
-                          <a:srgbClr val="000000"/>
-                        </a:solidFill>
-                        <a:effectLst/>
-                        <a:latin typeface="+mn-ea"/>
-                        <a:ea typeface="+mn-ea"/>
-                      </a:endParaRPr>
                     </a:p>
                   </a:txBody>
                   <a:tcPr marL="0" marR="0" marT="0" marB="0" anchor="ctr">
@@ -12602,23 +12505,17 @@
                     <a:bodyPr/>
                     <a:lstStyle/>
                     <a:p>
-                      <a:pPr algn="ctr" fontAlgn="ctr"/>
+                      <a:pPr algn="ctr">
+                        <a:defRPr sz="700" b="0">
+                          <a:solidFill>
+                            <a:srgbClr val="445474"/>
+                          </a:solidFill>
+                          <a:latin typeface="맑은 고딕"/>
+                        </a:defRPr>
+                      </a:pPr>
                       <a:r>
-                        <a:rPr lang="en-US" altLang="ko-KR" sz="600" u="none" strike="noStrike">
-                          <a:effectLst/>
-                          <a:latin typeface="+mn-ea"/>
-                          <a:ea typeface="+mn-ea"/>
-                        </a:rPr>
-                        <a:t>0</a:t>
+                        <a:t>23</a:t>
                       </a:r>
-                      <a:endParaRPr lang="en-US" altLang="ko-KR" sz="600" b="0" i="0" u="none" strike="noStrike">
-                        <a:solidFill>
-                          <a:srgbClr val="000000"/>
-                        </a:solidFill>
-                        <a:effectLst/>
-                        <a:latin typeface="+mn-ea"/>
-                        <a:ea typeface="+mn-ea"/>
-                      </a:endParaRPr>
                     </a:p>
                   </a:txBody>
                   <a:tcPr marL="0" marR="0" marT="0" marB="0" anchor="ctr">
@@ -12766,23 +12663,17 @@
                     <a:bodyPr/>
                     <a:lstStyle/>
                     <a:p>
-                      <a:pPr algn="ctr" fontAlgn="ctr"/>
+                      <a:pPr algn="ctr">
+                        <a:defRPr sz="700" b="0">
+                          <a:solidFill>
+                            <a:srgbClr val="445474"/>
+                          </a:solidFill>
+                          <a:latin typeface="맑은 고딕"/>
+                        </a:defRPr>
+                      </a:pPr>
                       <a:r>
-                        <a:rPr lang="en-US" altLang="ko-KR" sz="600" u="none" strike="noStrike" dirty="0">
-                          <a:effectLst/>
-                          <a:latin typeface="+mn-ea"/>
-                          <a:ea typeface="+mn-ea"/>
-                        </a:rPr>
-                        <a:t>0</a:t>
+                        <a:t>144</a:t>
                       </a:r>
-                      <a:endParaRPr lang="en-US" altLang="ko-KR" sz="600" b="0" i="0" u="none" strike="noStrike" dirty="0">
-                        <a:solidFill>
-                          <a:srgbClr val="000000"/>
-                        </a:solidFill>
-                        <a:effectLst/>
-                        <a:latin typeface="+mn-ea"/>
-                        <a:ea typeface="+mn-ea"/>
-                      </a:endParaRPr>
                     </a:p>
                   </a:txBody>
                   <a:tcPr marL="0" marR="0" marT="0" marB="0" anchor="ctr">
@@ -12930,23 +12821,17 @@
                     <a:bodyPr/>
                     <a:lstStyle/>
                     <a:p>
-                      <a:pPr algn="ctr" fontAlgn="ctr"/>
+                      <a:pPr algn="ctr">
+                        <a:defRPr sz="700" b="0">
+                          <a:solidFill>
+                            <a:srgbClr val="445474"/>
+                          </a:solidFill>
+                          <a:latin typeface="맑은 고딕"/>
+                        </a:defRPr>
+                      </a:pPr>
                       <a:r>
-                        <a:rPr lang="en-US" altLang="ko-KR" sz="600" u="none" strike="noStrike">
-                          <a:effectLst/>
-                          <a:latin typeface="+mn-ea"/>
-                          <a:ea typeface="+mn-ea"/>
-                        </a:rPr>
-                        <a:t>0</a:t>
+                        <a:t>167</a:t>
                       </a:r>
-                      <a:endParaRPr lang="en-US" altLang="ko-KR" sz="600" b="0" i="0" u="none" strike="noStrike">
-                        <a:solidFill>
-                          <a:srgbClr val="000000"/>
-                        </a:solidFill>
-                        <a:effectLst/>
-                        <a:latin typeface="+mn-ea"/>
-                        <a:ea typeface="+mn-ea"/>
-                      </a:endParaRPr>
                     </a:p>
                   </a:txBody>
                   <a:tcPr marL="0" marR="0" marT="0" marB="0" anchor="ctr">
@@ -13094,23 +12979,17 @@
                     <a:bodyPr/>
                     <a:lstStyle/>
                     <a:p>
-                      <a:pPr algn="ctr" fontAlgn="ctr"/>
+                      <a:pPr algn="ctr">
+                        <a:defRPr sz="700" b="0">
+                          <a:solidFill>
+                            <a:srgbClr val="445474"/>
+                          </a:solidFill>
+                          <a:latin typeface="맑은 고딕"/>
+                        </a:defRPr>
+                      </a:pPr>
                       <a:r>
-                        <a:rPr lang="en-US" altLang="ko-KR" sz="600" u="none" strike="noStrike" dirty="0">
-                          <a:effectLst/>
-                          <a:latin typeface="+mn-ea"/>
-                          <a:ea typeface="+mn-ea"/>
-                        </a:rPr>
-                        <a:t>0</a:t>
+                        <a:t>167</a:t>
                       </a:r>
-                      <a:endParaRPr lang="en-US" altLang="ko-KR" sz="600" b="0" i="0" u="none" strike="noStrike" dirty="0">
-                        <a:solidFill>
-                          <a:srgbClr val="000000"/>
-                        </a:solidFill>
-                        <a:effectLst/>
-                        <a:latin typeface="+mn-ea"/>
-                        <a:ea typeface="+mn-ea"/>
-                      </a:endParaRPr>
                     </a:p>
                   </a:txBody>
                   <a:tcPr marL="0" marR="0" marT="0" marB="0" anchor="ctr">
@@ -13258,23 +13137,17 @@
                     <a:bodyPr/>
                     <a:lstStyle/>
                     <a:p>
-                      <a:pPr algn="ctr" fontAlgn="ctr"/>
+                      <a:pPr algn="ctr">
+                        <a:defRPr sz="700" b="0">
+                          <a:solidFill>
+                            <a:srgbClr val="445474"/>
+                          </a:solidFill>
+                          <a:latin typeface="맑은 고딕"/>
+                        </a:defRPr>
+                      </a:pPr>
                       <a:r>
-                        <a:rPr lang="en-US" altLang="ko-KR" sz="600" u="none" strike="noStrike">
-                          <a:effectLst/>
-                          <a:latin typeface="+mn-ea"/>
-                          <a:ea typeface="+mn-ea"/>
-                        </a:rPr>
-                        <a:t>0</a:t>
+                        <a:t>166.5</a:t>
                       </a:r>
-                      <a:endParaRPr lang="en-US" altLang="ko-KR" sz="600" b="0" i="0" u="none" strike="noStrike">
-                        <a:solidFill>
-                          <a:srgbClr val="000000"/>
-                        </a:solidFill>
-                        <a:effectLst/>
-                        <a:latin typeface="+mn-ea"/>
-                        <a:ea typeface="+mn-ea"/>
-                      </a:endParaRPr>
                     </a:p>
                   </a:txBody>
                   <a:tcPr marL="0" marR="0" marT="0" marB="0" anchor="ctr">
@@ -13422,23 +13295,17 @@
                     <a:bodyPr/>
                     <a:lstStyle/>
                     <a:p>
-                      <a:pPr algn="ctr" fontAlgn="ctr"/>
+                      <a:pPr algn="ctr">
+                        <a:defRPr sz="700" b="0">
+                          <a:solidFill>
+                            <a:srgbClr val="445474"/>
+                          </a:solidFill>
+                          <a:latin typeface="맑은 고딕"/>
+                        </a:defRPr>
+                      </a:pPr>
                       <a:r>
-                        <a:rPr lang="en-US" altLang="ko-KR" sz="600" u="none" strike="noStrike" dirty="0">
-                          <a:effectLst/>
-                          <a:latin typeface="+mn-ea"/>
-                          <a:ea typeface="+mn-ea"/>
-                        </a:rPr>
-                        <a:t>0</a:t>
+                        <a:t>143.1</a:t>
                       </a:r>
-                      <a:endParaRPr lang="en-US" altLang="ko-KR" sz="600" b="0" i="0" u="none" strike="noStrike" dirty="0">
-                        <a:solidFill>
-                          <a:srgbClr val="000000"/>
-                        </a:solidFill>
-                        <a:effectLst/>
-                        <a:latin typeface="+mn-ea"/>
-                        <a:ea typeface="+mn-ea"/>
-                      </a:endParaRPr>
                     </a:p>
                   </a:txBody>
                   <a:tcPr marL="0" marR="0" marT="0" marB="0" anchor="ctr">
@@ -13586,23 +13453,17 @@
                     <a:bodyPr/>
                     <a:lstStyle/>
                     <a:p>
-                      <a:pPr algn="ctr" fontAlgn="ctr"/>
+                      <a:pPr algn="ctr">
+                        <a:defRPr sz="700" b="0">
+                          <a:solidFill>
+                            <a:srgbClr val="445474"/>
+                          </a:solidFill>
+                          <a:latin typeface="맑은 고딕"/>
+                        </a:defRPr>
+                      </a:pPr>
                       <a:r>
-                        <a:rPr lang="en-US" altLang="ko-KR" sz="600" u="none" strike="noStrike" dirty="0">
-                          <a:effectLst/>
-                          <a:latin typeface="+mn-ea"/>
-                          <a:ea typeface="+mn-ea"/>
-                        </a:rPr>
-                        <a:t>0</a:t>
+                        <a:t>-126.1</a:t>
                       </a:r>
-                      <a:endParaRPr lang="en-US" altLang="ko-KR" sz="600" b="0" i="0" u="none" strike="noStrike" dirty="0">
-                        <a:solidFill>
-                          <a:srgbClr val="000000"/>
-                        </a:solidFill>
-                        <a:effectLst/>
-                        <a:latin typeface="+mn-ea"/>
-                        <a:ea typeface="+mn-ea"/>
-                      </a:endParaRPr>
                     </a:p>
                   </a:txBody>
                   <a:tcPr marL="0" marR="0" marT="0" marB="0" anchor="ctr">
@@ -13750,23 +13611,17 @@
                     <a:bodyPr/>
                     <a:lstStyle/>
                     <a:p>
-                      <a:pPr algn="ctr" fontAlgn="ctr"/>
+                      <a:pPr algn="ctr">
+                        <a:defRPr sz="700" b="0">
+                          <a:solidFill>
+                            <a:srgbClr val="445474"/>
+                          </a:solidFill>
+                          <a:latin typeface="맑은 고딕"/>
+                        </a:defRPr>
+                      </a:pPr>
                       <a:r>
-                        <a:rPr lang="en-US" altLang="ko-KR" sz="600" u="none" strike="noStrike" dirty="0">
-                          <a:effectLst/>
-                          <a:latin typeface="+mn-ea"/>
-                          <a:ea typeface="+mn-ea"/>
-                        </a:rPr>
-                        <a:t>0</a:t>
+                        <a:t>2.1</a:t>
                       </a:r>
-                      <a:endParaRPr lang="en-US" altLang="ko-KR" sz="600" b="0" i="0" u="none" strike="noStrike" dirty="0">
-                        <a:solidFill>
-                          <a:srgbClr val="000000"/>
-                        </a:solidFill>
-                        <a:effectLst/>
-                        <a:latin typeface="+mn-ea"/>
-                        <a:ea typeface="+mn-ea"/>
-                      </a:endParaRPr>
                     </a:p>
                   </a:txBody>
                   <a:tcPr marL="0" marR="0" marT="0" marB="0" anchor="ctr">
@@ -13914,23 +13769,17 @@
                     <a:bodyPr/>
                     <a:lstStyle/>
                     <a:p>
-                      <a:pPr algn="ctr" fontAlgn="ctr"/>
+                      <a:pPr algn="ctr">
+                        <a:defRPr sz="700" b="0">
+                          <a:solidFill>
+                            <a:srgbClr val="445474"/>
+                          </a:solidFill>
+                          <a:latin typeface="맑은 고딕"/>
+                        </a:defRPr>
+                      </a:pPr>
                       <a:r>
-                        <a:rPr lang="en-US" altLang="ko-KR" sz="600" u="none" strike="noStrike" dirty="0">
-                          <a:effectLst/>
-                          <a:latin typeface="+mn-ea"/>
-                          <a:ea typeface="+mn-ea"/>
-                        </a:rPr>
-                        <a:t>0</a:t>
+                        <a:t>26.5</a:t>
                       </a:r>
-                      <a:endParaRPr lang="en-US" altLang="ko-KR" sz="600" b="0" i="0" u="none" strike="noStrike" dirty="0">
-                        <a:solidFill>
-                          <a:srgbClr val="000000"/>
-                        </a:solidFill>
-                        <a:effectLst/>
-                        <a:latin typeface="+mn-ea"/>
-                        <a:ea typeface="+mn-ea"/>
-                      </a:endParaRPr>
                     </a:p>
                   </a:txBody>
                   <a:tcPr marL="0" marR="0" marT="0" marB="0" anchor="ctr">
@@ -14078,23 +13927,17 @@
                     <a:bodyPr/>
                     <a:lstStyle/>
                     <a:p>
-                      <a:pPr algn="ctr" fontAlgn="ctr"/>
+                      <a:pPr algn="ctr">
+                        <a:defRPr sz="700" b="0">
+                          <a:solidFill>
+                            <a:srgbClr val="445474"/>
+                          </a:solidFill>
+                          <a:latin typeface="맑은 고딕"/>
+                        </a:defRPr>
+                      </a:pPr>
                       <a:r>
-                        <a:rPr lang="en-US" altLang="ko-KR" sz="600" u="none" strike="noStrike">
-                          <a:effectLst/>
-                          <a:latin typeface="+mn-ea"/>
-                          <a:ea typeface="+mn-ea"/>
-                        </a:rPr>
-                        <a:t>0</a:t>
+                        <a:t>0.2</a:t>
                       </a:r>
-                      <a:endParaRPr lang="en-US" altLang="ko-KR" sz="600" b="0" i="0" u="none" strike="noStrike">
-                        <a:solidFill>
-                          <a:srgbClr val="000000"/>
-                        </a:solidFill>
-                        <a:effectLst/>
-                        <a:latin typeface="+mn-ea"/>
-                        <a:ea typeface="+mn-ea"/>
-                      </a:endParaRPr>
                     </a:p>
                   </a:txBody>
                   <a:tcPr marL="0" marR="0" marT="0" marB="0" anchor="ctr">
@@ -14242,23 +14085,17 @@
                     <a:bodyPr/>
                     <a:lstStyle/>
                     <a:p>
-                      <a:pPr algn="ctr" fontAlgn="ctr"/>
+                      <a:pPr algn="ctr">
+                        <a:defRPr sz="700" b="0">
+                          <a:solidFill>
+                            <a:srgbClr val="445474"/>
+                          </a:solidFill>
+                          <a:latin typeface="맑은 고딕"/>
+                        </a:defRPr>
+                      </a:pPr>
                       <a:r>
-                        <a:rPr lang="en-US" altLang="ko-KR" sz="600" u="none" strike="noStrike" dirty="0">
-                          <a:effectLst/>
-                          <a:latin typeface="+mn-ea"/>
-                          <a:ea typeface="+mn-ea"/>
-                        </a:rPr>
-                        <a:t>0</a:t>
+                        <a:t>101.8</a:t>
                       </a:r>
-                      <a:endParaRPr lang="en-US" altLang="ko-KR" sz="600" b="0" i="0" u="none" strike="noStrike" dirty="0">
-                        <a:solidFill>
-                          <a:srgbClr val="000000"/>
-                        </a:solidFill>
-                        <a:effectLst/>
-                        <a:latin typeface="+mn-ea"/>
-                        <a:ea typeface="+mn-ea"/>
-                      </a:endParaRPr>
                     </a:p>
                   </a:txBody>
                   <a:tcPr marL="0" marR="0" marT="0" marB="0" anchor="ctr">
@@ -14406,23 +14243,17 @@
                     <a:bodyPr/>
                     <a:lstStyle/>
                     <a:p>
-                      <a:pPr algn="ctr" fontAlgn="ctr"/>
+                      <a:pPr algn="ctr">
+                        <a:defRPr sz="700" b="0">
+                          <a:solidFill>
+                            <a:srgbClr val="445474"/>
+                          </a:solidFill>
+                          <a:latin typeface="맑은 고딕"/>
+                        </a:defRPr>
+                      </a:pPr>
                       <a:r>
-                        <a:rPr lang="en-US" altLang="ko-KR" sz="600" u="none" strike="noStrike" dirty="0">
-                          <a:effectLst/>
-                          <a:latin typeface="+mn-ea"/>
-                          <a:ea typeface="+mn-ea"/>
-                        </a:rPr>
-                        <a:t>0</a:t>
+                        <a:t>55.2</a:t>
                       </a:r>
-                      <a:endParaRPr lang="en-US" altLang="ko-KR" sz="600" b="0" i="0" u="none" strike="noStrike" dirty="0">
-                        <a:solidFill>
-                          <a:srgbClr val="000000"/>
-                        </a:solidFill>
-                        <a:effectLst/>
-                        <a:latin typeface="+mn-ea"/>
-                        <a:ea typeface="+mn-ea"/>
-                      </a:endParaRPr>
                     </a:p>
                   </a:txBody>
                   <a:tcPr marL="0" marR="0" marT="0" marB="0" anchor="ctr">
@@ -14570,23 +14401,17 @@
                     <a:bodyPr/>
                     <a:lstStyle/>
                     <a:p>
-                      <a:pPr algn="ctr" fontAlgn="ctr"/>
+                      <a:pPr algn="ctr">
+                        <a:defRPr sz="700" b="0">
+                          <a:solidFill>
+                            <a:srgbClr val="445474"/>
+                          </a:solidFill>
+                          <a:latin typeface="맑은 고딕"/>
+                        </a:defRPr>
+                      </a:pPr>
                       <a:r>
-                        <a:rPr lang="en-US" altLang="ko-KR" sz="600" u="none" strike="noStrike" dirty="0">
-                          <a:effectLst/>
-                          <a:latin typeface="+mn-ea"/>
-                          <a:ea typeface="+mn-ea"/>
-                        </a:rPr>
-                        <a:t>0</a:t>
+                        <a:t>99.9</a:t>
                       </a:r>
-                      <a:endParaRPr lang="en-US" altLang="ko-KR" sz="600" b="0" i="0" u="none" strike="noStrike" dirty="0">
-                        <a:solidFill>
-                          <a:srgbClr val="000000"/>
-                        </a:solidFill>
-                        <a:effectLst/>
-                        <a:latin typeface="+mn-ea"/>
-                        <a:ea typeface="+mn-ea"/>
-                      </a:endParaRPr>
                     </a:p>
                   </a:txBody>
                   <a:tcPr marL="0" marR="0" marT="0" marB="0" anchor="ctr">
@@ -14734,23 +14559,17 @@
                     <a:bodyPr/>
                     <a:lstStyle/>
                     <a:p>
-                      <a:pPr algn="ctr" fontAlgn="ctr"/>
+                      <a:pPr algn="ctr">
+                        <a:defRPr sz="700" b="0">
+                          <a:solidFill>
+                            <a:srgbClr val="445474"/>
+                          </a:solidFill>
+                          <a:latin typeface="맑은 고딕"/>
+                        </a:defRPr>
+                      </a:pPr>
                       <a:r>
-                        <a:rPr lang="en-US" altLang="ko-KR" sz="600" u="none" strike="noStrike" dirty="0">
-                          <a:effectLst/>
-                          <a:latin typeface="+mn-ea"/>
-                          <a:ea typeface="+mn-ea"/>
-                        </a:rPr>
-                        <a:t>0</a:t>
+                        <a:t>86.2</a:t>
                       </a:r>
-                      <a:endParaRPr lang="en-US" altLang="ko-KR" sz="600" b="0" i="0" u="none" strike="noStrike" dirty="0">
-                        <a:solidFill>
-                          <a:srgbClr val="000000"/>
-                        </a:solidFill>
-                        <a:effectLst/>
-                        <a:latin typeface="+mn-ea"/>
-                        <a:ea typeface="+mn-ea"/>
-                      </a:endParaRPr>
                     </a:p>
                   </a:txBody>
                   <a:tcPr marL="0" marR="0" marT="0" marB="0" anchor="ctr">
@@ -14898,23 +14717,17 @@
                     <a:bodyPr/>
                     <a:lstStyle/>
                     <a:p>
-                      <a:pPr algn="ctr" fontAlgn="ctr"/>
+                      <a:pPr algn="ctr">
+                        <a:defRPr sz="700" b="0">
+                          <a:solidFill>
+                            <a:srgbClr val="445474"/>
+                          </a:solidFill>
+                          <a:latin typeface="맑은 고딕"/>
+                        </a:defRPr>
+                      </a:pPr>
                       <a:r>
-                        <a:rPr lang="en-US" altLang="ko-KR" sz="600" u="none" strike="noStrike" dirty="0">
-                          <a:effectLst/>
-                          <a:latin typeface="+mn-ea"/>
-                          <a:ea typeface="+mn-ea"/>
-                        </a:rPr>
                         <a:t>0</a:t>
                       </a:r>
-                      <a:endParaRPr lang="en-US" altLang="ko-KR" sz="600" b="0" i="0" u="none" strike="noStrike" dirty="0">
-                        <a:solidFill>
-                          <a:srgbClr val="000000"/>
-                        </a:solidFill>
-                        <a:effectLst/>
-                        <a:latin typeface="+mn-ea"/>
-                        <a:ea typeface="+mn-ea"/>
-                      </a:endParaRPr>
                     </a:p>
                   </a:txBody>
                   <a:tcPr marL="0" marR="0" marT="0" marB="0" anchor="ctr">
@@ -15062,23 +14875,17 @@
                     <a:bodyPr/>
                     <a:lstStyle/>
                     <a:p>
-                      <a:pPr algn="ctr" fontAlgn="ctr"/>
+                      <a:pPr algn="ctr">
+                        <a:defRPr sz="700" b="0">
+                          <a:solidFill>
+                            <a:srgbClr val="445474"/>
+                          </a:solidFill>
+                          <a:latin typeface="맑은 고딕"/>
+                        </a:defRPr>
+                      </a:pPr>
                       <a:r>
-                        <a:rPr lang="en-US" altLang="ko-KR" sz="600" u="none" strike="noStrike" dirty="0">
-                          <a:effectLst/>
-                          <a:latin typeface="+mn-ea"/>
-                          <a:ea typeface="+mn-ea"/>
-                        </a:rPr>
-                        <a:t>0</a:t>
+                        <a:t>12.8</a:t>
                       </a:r>
-                      <a:endParaRPr lang="en-US" altLang="ko-KR" sz="600" b="0" i="0" u="none" strike="noStrike" dirty="0">
-                        <a:solidFill>
-                          <a:srgbClr val="000000"/>
-                        </a:solidFill>
-                        <a:effectLst/>
-                        <a:latin typeface="+mn-ea"/>
-                        <a:ea typeface="+mn-ea"/>
-                      </a:endParaRPr>
                     </a:p>
                   </a:txBody>
                   <a:tcPr marL="0" marR="0" marT="0" marB="0" anchor="ctr">
@@ -15226,23 +15033,17 @@
                     <a:bodyPr/>
                     <a:lstStyle/>
                     <a:p>
-                      <a:pPr algn="ctr" fontAlgn="ctr"/>
+                      <a:pPr algn="ctr">
+                        <a:defRPr sz="700" b="0">
+                          <a:solidFill>
+                            <a:srgbClr val="445474"/>
+                          </a:solidFill>
+                          <a:latin typeface="맑은 고딕"/>
+                        </a:defRPr>
+                      </a:pPr>
                       <a:r>
-                        <a:rPr lang="en-US" altLang="ko-KR" sz="600" u="none" strike="noStrike" dirty="0">
-                          <a:effectLst/>
-                          <a:latin typeface="+mn-ea"/>
-                          <a:ea typeface="+mn-ea"/>
-                        </a:rPr>
-                        <a:t>0</a:t>
+                        <a:t>68.7</a:t>
                       </a:r>
-                      <a:endParaRPr lang="en-US" altLang="ko-KR" sz="600" b="0" i="0" u="none" strike="noStrike" dirty="0">
-                        <a:solidFill>
-                          <a:srgbClr val="000000"/>
-                        </a:solidFill>
-                        <a:effectLst/>
-                        <a:latin typeface="+mn-ea"/>
-                        <a:ea typeface="+mn-ea"/>
-                      </a:endParaRPr>
                     </a:p>
                   </a:txBody>
                   <a:tcPr marL="0" marR="0" marT="0" marB="0" anchor="ctr">
@@ -15390,23 +15191,17 @@
                     <a:bodyPr/>
                     <a:lstStyle/>
                     <a:p>
-                      <a:pPr algn="ctr" fontAlgn="ctr"/>
+                      <a:pPr algn="ctr">
+                        <a:defRPr sz="700" b="0">
+                          <a:solidFill>
+                            <a:srgbClr val="445474"/>
+                          </a:solidFill>
+                          <a:latin typeface="맑은 고딕"/>
+                        </a:defRPr>
+                      </a:pPr>
                       <a:r>
-                        <a:rPr lang="en-US" altLang="ko-KR" sz="600" u="none" strike="noStrike" dirty="0">
-                          <a:effectLst/>
-                          <a:latin typeface="+mn-ea"/>
-                          <a:ea typeface="+mn-ea"/>
-                        </a:rPr>
-                        <a:t>0</a:t>
+                        <a:t>31</a:t>
                       </a:r>
-                      <a:endParaRPr lang="en-US" altLang="ko-KR" sz="600" b="0" i="0" u="none" strike="noStrike" dirty="0">
-                        <a:solidFill>
-                          <a:srgbClr val="000000"/>
-                        </a:solidFill>
-                        <a:effectLst/>
-                        <a:latin typeface="+mn-ea"/>
-                        <a:ea typeface="+mn-ea"/>
-                      </a:endParaRPr>
                     </a:p>
                   </a:txBody>
                   <a:tcPr marL="0" marR="0" marT="0" marB="0" anchor="ctr">
@@ -15554,23 +15349,17 @@
                     <a:bodyPr/>
                     <a:lstStyle/>
                     <a:p>
-                      <a:pPr algn="ctr" fontAlgn="ctr"/>
+                      <a:pPr algn="ctr">
+                        <a:defRPr sz="700" b="0">
+                          <a:solidFill>
+                            <a:srgbClr val="445474"/>
+                          </a:solidFill>
+                          <a:latin typeface="맑은 고딕"/>
+                        </a:defRPr>
+                      </a:pPr>
                       <a:r>
-                        <a:rPr lang="en-US" altLang="ko-KR" sz="600" u="none" strike="noStrike" dirty="0">
-                          <a:effectLst/>
-                          <a:latin typeface="+mn-ea"/>
-                          <a:ea typeface="+mn-ea"/>
-                        </a:rPr>
-                        <a:t>0</a:t>
+                        <a:t>55.2</a:t>
                       </a:r>
-                      <a:endParaRPr lang="en-US" altLang="ko-KR" sz="600" b="0" i="0" u="none" strike="noStrike" dirty="0">
-                        <a:solidFill>
-                          <a:srgbClr val="000000"/>
-                        </a:solidFill>
-                        <a:effectLst/>
-                        <a:latin typeface="+mn-ea"/>
-                        <a:ea typeface="+mn-ea"/>
-                      </a:endParaRPr>
                     </a:p>
                   </a:txBody>
                   <a:tcPr marL="0" marR="0" marT="0" marB="0" anchor="ctr">
@@ -15721,23 +15510,17 @@
                     <a:bodyPr/>
                     <a:lstStyle/>
                     <a:p>
-                      <a:pPr algn="ctr" fontAlgn="ctr"/>
+                      <a:pPr algn="ctr">
+                        <a:defRPr sz="700" b="0">
+                          <a:solidFill>
+                            <a:srgbClr val="445474"/>
+                          </a:solidFill>
+                          <a:latin typeface="맑은 고딕"/>
+                        </a:defRPr>
+                      </a:pPr>
                       <a:r>
-                        <a:rPr lang="en-US" altLang="ko-KR" sz="600" u="none" strike="noStrike" dirty="0">
-                          <a:effectLst/>
-                          <a:latin typeface="+mn-ea"/>
-                          <a:ea typeface="+mn-ea"/>
-                        </a:rPr>
-                        <a:t>0</a:t>
+                        <a:t>94.8</a:t>
                       </a:r>
-                      <a:endParaRPr lang="en-US" altLang="ko-KR" sz="600" b="0" i="0" u="none" strike="noStrike" dirty="0">
-                        <a:solidFill>
-                          <a:srgbClr val="000000"/>
-                        </a:solidFill>
-                        <a:effectLst/>
-                        <a:latin typeface="+mn-ea"/>
-                        <a:ea typeface="+mn-ea"/>
-                      </a:endParaRPr>
                     </a:p>
                   </a:txBody>
                   <a:tcPr marL="0" marR="0" marT="0" marB="0" anchor="ctr">
@@ -15885,23 +15668,17 @@
                     <a:bodyPr/>
                     <a:lstStyle/>
                     <a:p>
-                      <a:pPr algn="ctr" fontAlgn="ctr"/>
+                      <a:pPr algn="ctr">
+                        <a:defRPr sz="700" b="0">
+                          <a:solidFill>
+                            <a:srgbClr val="445474"/>
+                          </a:solidFill>
+                          <a:latin typeface="맑은 고딕"/>
+                        </a:defRPr>
+                      </a:pPr>
                       <a:r>
-                        <a:rPr lang="en-US" altLang="ko-KR" sz="600" u="none" strike="noStrike" dirty="0">
-                          <a:effectLst/>
-                          <a:latin typeface="+mn-ea"/>
-                          <a:ea typeface="+mn-ea"/>
-                        </a:rPr>
-                        <a:t>0</a:t>
+                        <a:t>80.4</a:t>
                       </a:r>
-                      <a:endParaRPr lang="en-US" altLang="ko-KR" sz="600" b="0" i="0" u="none" strike="noStrike" dirty="0">
-                        <a:solidFill>
-                          <a:srgbClr val="000000"/>
-                        </a:solidFill>
-                        <a:effectLst/>
-                        <a:latin typeface="+mn-ea"/>
-                        <a:ea typeface="+mn-ea"/>
-                      </a:endParaRPr>
                     </a:p>
                   </a:txBody>
                   <a:tcPr marL="0" marR="0" marT="0" marB="0" anchor="ctr">
@@ -16049,23 +15826,17 @@
                     <a:bodyPr/>
                     <a:lstStyle/>
                     <a:p>
-                      <a:pPr algn="ctr" fontAlgn="ctr"/>
+                      <a:pPr algn="ctr">
+                        <a:defRPr sz="700" b="0">
+                          <a:solidFill>
+                            <a:srgbClr val="445474"/>
+                          </a:solidFill>
+                          <a:latin typeface="맑은 고딕"/>
+                        </a:defRPr>
+                      </a:pPr>
                       <a:r>
-                        <a:rPr lang="en-US" altLang="ko-KR" sz="600" u="none" strike="noStrike">
-                          <a:effectLst/>
-                          <a:latin typeface="+mn-ea"/>
-                          <a:ea typeface="+mn-ea"/>
-                        </a:rPr>
-                        <a:t>0</a:t>
+                        <a:t>40.3</a:t>
                       </a:r>
-                      <a:endParaRPr lang="en-US" altLang="ko-KR" sz="600" b="0" i="0" u="none" strike="noStrike">
-                        <a:solidFill>
-                          <a:srgbClr val="000000"/>
-                        </a:solidFill>
-                        <a:effectLst/>
-                        <a:latin typeface="+mn-ea"/>
-                        <a:ea typeface="+mn-ea"/>
-                      </a:endParaRPr>
                     </a:p>
                   </a:txBody>
                   <a:tcPr marL="0" marR="0" marT="0" marB="0" anchor="ctr">
@@ -16213,23 +15984,17 @@
                     <a:bodyPr/>
                     <a:lstStyle/>
                     <a:p>
-                      <a:pPr algn="ctr" fontAlgn="ctr"/>
+                      <a:pPr algn="ctr">
+                        <a:defRPr sz="700" b="0">
+                          <a:solidFill>
+                            <a:srgbClr val="445474"/>
+                          </a:solidFill>
+                          <a:latin typeface="맑은 고딕"/>
+                        </a:defRPr>
+                      </a:pPr>
                       <a:r>
-                        <a:rPr lang="en-US" altLang="ko-KR" sz="600" u="none" strike="noStrike" dirty="0">
-                          <a:effectLst/>
-                          <a:latin typeface="+mn-ea"/>
-                          <a:ea typeface="+mn-ea"/>
-                        </a:rPr>
-                        <a:t>0</a:t>
+                        <a:t>166.7</a:t>
                       </a:r>
-                      <a:endParaRPr lang="en-US" altLang="ko-KR" sz="600" b="0" i="0" u="none" strike="noStrike" dirty="0">
-                        <a:solidFill>
-                          <a:srgbClr val="000000"/>
-                        </a:solidFill>
-                        <a:effectLst/>
-                        <a:latin typeface="+mn-ea"/>
-                        <a:ea typeface="+mn-ea"/>
-                      </a:endParaRPr>
                     </a:p>
                   </a:txBody>
                   <a:tcPr marL="0" marR="0" marT="0" marB="0" anchor="ctr">
@@ -16377,23 +16142,17 @@
                     <a:bodyPr/>
                     <a:lstStyle/>
                     <a:p>
-                      <a:pPr algn="ctr" fontAlgn="ctr"/>
+                      <a:pPr algn="ctr">
+                        <a:defRPr sz="700" b="0">
+                          <a:solidFill>
+                            <a:srgbClr val="445474"/>
+                          </a:solidFill>
+                          <a:latin typeface="맑은 고딕"/>
+                        </a:defRPr>
+                      </a:pPr>
                       <a:r>
-                        <a:rPr lang="en-US" altLang="ko-KR" sz="600" u="none" strike="noStrike" dirty="0">
-                          <a:effectLst/>
-                          <a:latin typeface="+mn-ea"/>
-                          <a:ea typeface="+mn-ea"/>
-                        </a:rPr>
-                        <a:t>0</a:t>
+                        <a:t>93.1</a:t>
                       </a:r>
-                      <a:endParaRPr lang="en-US" altLang="ko-KR" sz="600" b="0" i="0" u="none" strike="noStrike" dirty="0">
-                        <a:solidFill>
-                          <a:srgbClr val="000000"/>
-                        </a:solidFill>
-                        <a:effectLst/>
-                        <a:latin typeface="+mn-ea"/>
-                        <a:ea typeface="+mn-ea"/>
-                      </a:endParaRPr>
                     </a:p>
                   </a:txBody>
                   <a:tcPr marL="0" marR="0" marT="0" marB="0" anchor="ctr">
@@ -16541,23 +16300,17 @@
                     <a:bodyPr/>
                     <a:lstStyle/>
                     <a:p>
-                      <a:pPr algn="ctr" fontAlgn="ctr"/>
+                      <a:pPr algn="ctr">
+                        <a:defRPr sz="700" b="0">
+                          <a:solidFill>
+                            <a:srgbClr val="445474"/>
+                          </a:solidFill>
+                          <a:latin typeface="맑은 고딕"/>
+                        </a:defRPr>
+                      </a:pPr>
                       <a:r>
-                        <a:rPr lang="en-US" altLang="ko-KR" sz="600" u="none" strike="noStrike" dirty="0">
-                          <a:effectLst/>
-                          <a:latin typeface="+mn-ea"/>
-                          <a:ea typeface="+mn-ea"/>
-                        </a:rPr>
-                        <a:t>0</a:t>
+                        <a:t>97.4</a:t>
                       </a:r>
-                      <a:endParaRPr lang="en-US" altLang="ko-KR" sz="600" b="0" i="0" u="none" strike="noStrike" dirty="0">
-                        <a:solidFill>
-                          <a:srgbClr val="000000"/>
-                        </a:solidFill>
-                        <a:effectLst/>
-                        <a:latin typeface="+mn-ea"/>
-                        <a:ea typeface="+mn-ea"/>
-                      </a:endParaRPr>
                     </a:p>
                   </a:txBody>
                   <a:tcPr marL="0" marR="0" marT="0" marB="0" anchor="ctr">
@@ -16705,23 +16458,17 @@
                     <a:bodyPr/>
                     <a:lstStyle/>
                     <a:p>
-                      <a:pPr algn="ctr" fontAlgn="ctr"/>
+                      <a:pPr algn="ctr">
+                        <a:defRPr sz="700" b="0">
+                          <a:solidFill>
+                            <a:srgbClr val="445474"/>
+                          </a:solidFill>
+                          <a:latin typeface="맑은 고딕"/>
+                        </a:defRPr>
+                      </a:pPr>
                       <a:r>
-                        <a:rPr lang="en-US" altLang="ko-KR" sz="600" u="none" strike="noStrike">
-                          <a:effectLst/>
-                          <a:latin typeface="+mn-ea"/>
-                          <a:ea typeface="+mn-ea"/>
-                        </a:rPr>
-                        <a:t>0</a:t>
+                        <a:t>81.2</a:t>
                       </a:r>
-                      <a:endParaRPr lang="en-US" altLang="ko-KR" sz="600" b="0" i="0" u="none" strike="noStrike">
-                        <a:solidFill>
-                          <a:srgbClr val="000000"/>
-                        </a:solidFill>
-                        <a:effectLst/>
-                        <a:latin typeface="+mn-ea"/>
-                        <a:ea typeface="+mn-ea"/>
-                      </a:endParaRPr>
                     </a:p>
                   </a:txBody>
                   <a:tcPr marL="0" marR="0" marT="0" marB="0" anchor="ctr">
@@ -16869,23 +16616,17 @@
                     <a:bodyPr/>
                     <a:lstStyle/>
                     <a:p>
-                      <a:pPr algn="ctr" fontAlgn="ctr"/>
+                      <a:pPr algn="ctr">
+                        <a:defRPr sz="700" b="0">
+                          <a:solidFill>
+                            <a:srgbClr val="445474"/>
+                          </a:solidFill>
+                          <a:latin typeface="맑은 고딕"/>
+                        </a:defRPr>
+                      </a:pPr>
                       <a:r>
-                        <a:rPr lang="en-US" altLang="ko-KR" sz="600" u="none" strike="noStrike" dirty="0">
-                          <a:effectLst/>
-                          <a:latin typeface="+mn-ea"/>
-                          <a:ea typeface="+mn-ea"/>
-                        </a:rPr>
-                        <a:t>0</a:t>
+                        <a:t>-11.9</a:t>
                       </a:r>
-                      <a:endParaRPr lang="en-US" altLang="ko-KR" sz="600" b="0" i="0" u="none" strike="noStrike" dirty="0">
-                        <a:solidFill>
-                          <a:srgbClr val="000000"/>
-                        </a:solidFill>
-                        <a:effectLst/>
-                        <a:latin typeface="+mn-ea"/>
-                        <a:ea typeface="+mn-ea"/>
-                      </a:endParaRPr>
                     </a:p>
                   </a:txBody>
                   <a:tcPr marL="0" marR="0" marT="0" marB="0" anchor="ctr">
@@ -17033,23 +16774,17 @@
                     <a:bodyPr/>
                     <a:lstStyle/>
                     <a:p>
-                      <a:pPr algn="ctr" fontAlgn="ctr"/>
+                      <a:pPr algn="ctr">
+                        <a:defRPr sz="700" b="0">
+                          <a:solidFill>
+                            <a:srgbClr val="445474"/>
+                          </a:solidFill>
+                          <a:latin typeface="맑은 고딕"/>
+                        </a:defRPr>
+                      </a:pPr>
                       <a:r>
-                        <a:rPr lang="en-US" altLang="ko-KR" sz="600" u="none" strike="noStrike">
-                          <a:effectLst/>
-                          <a:latin typeface="+mn-ea"/>
-                          <a:ea typeface="+mn-ea"/>
-                        </a:rPr>
-                        <a:t>0</a:t>
+                        <a:t>104.3</a:t>
                       </a:r>
-                      <a:endParaRPr lang="en-US" altLang="ko-KR" sz="600" b="0" i="0" u="none" strike="noStrike">
-                        <a:solidFill>
-                          <a:srgbClr val="000000"/>
-                        </a:solidFill>
-                        <a:effectLst/>
-                        <a:latin typeface="+mn-ea"/>
-                        <a:ea typeface="+mn-ea"/>
-                      </a:endParaRPr>
                     </a:p>
                   </a:txBody>
                   <a:tcPr marL="0" marR="0" marT="0" marB="0" anchor="ctr">
@@ -17197,23 +16932,17 @@
                     <a:bodyPr/>
                     <a:lstStyle/>
                     <a:p>
-                      <a:pPr algn="ctr" fontAlgn="ctr"/>
+                      <a:pPr algn="ctr">
+                        <a:defRPr sz="700" b="0">
+                          <a:solidFill>
+                            <a:srgbClr val="445474"/>
+                          </a:solidFill>
+                          <a:latin typeface="맑은 고딕"/>
+                        </a:defRPr>
+                      </a:pPr>
                       <a:r>
-                        <a:rPr lang="en-US" altLang="ko-KR" sz="600" u="none" strike="noStrike">
-                          <a:effectLst/>
-                          <a:latin typeface="+mn-ea"/>
-                          <a:ea typeface="+mn-ea"/>
-                        </a:rPr>
-                        <a:t>0</a:t>
+                        <a:t>21.5</a:t>
                       </a:r>
-                      <a:endParaRPr lang="en-US" altLang="ko-KR" sz="600" b="0" i="0" u="none" strike="noStrike">
-                        <a:solidFill>
-                          <a:srgbClr val="000000"/>
-                        </a:solidFill>
-                        <a:effectLst/>
-                        <a:latin typeface="+mn-ea"/>
-                        <a:ea typeface="+mn-ea"/>
-                      </a:endParaRPr>
                     </a:p>
                   </a:txBody>
                   <a:tcPr marL="0" marR="0" marT="0" marB="0" anchor="ctr">
@@ -17361,23 +17090,17 @@
                     <a:bodyPr/>
                     <a:lstStyle/>
                     <a:p>
-                      <a:pPr algn="ctr" fontAlgn="ctr"/>
+                      <a:pPr algn="ctr">
+                        <a:defRPr sz="700" b="0">
+                          <a:solidFill>
+                            <a:srgbClr val="445474"/>
+                          </a:solidFill>
+                          <a:latin typeface="맑은 고딕"/>
+                        </a:defRPr>
+                      </a:pPr>
                       <a:r>
-                        <a:rPr lang="en-US" altLang="ko-KR" sz="600" u="none" strike="noStrike" dirty="0">
-                          <a:effectLst/>
-                          <a:latin typeface="+mn-ea"/>
-                          <a:ea typeface="+mn-ea"/>
-                        </a:rPr>
-                        <a:t>0</a:t>
+                        <a:t>147.1</a:t>
                       </a:r>
-                      <a:endParaRPr lang="en-US" altLang="ko-KR" sz="600" b="0" i="0" u="none" strike="noStrike" dirty="0">
-                        <a:solidFill>
-                          <a:srgbClr val="000000"/>
-                        </a:solidFill>
-                        <a:effectLst/>
-                        <a:latin typeface="+mn-ea"/>
-                        <a:ea typeface="+mn-ea"/>
-                      </a:endParaRPr>
                     </a:p>
                   </a:txBody>
                   <a:tcPr marL="0" marR="0" marT="0" marB="0" anchor="ctr">
@@ -17525,23 +17248,17 @@
                     <a:bodyPr/>
                     <a:lstStyle/>
                     <a:p>
-                      <a:pPr algn="ctr" fontAlgn="ctr"/>
+                      <a:pPr algn="ctr">
+                        <a:defRPr sz="700" b="0">
+                          <a:solidFill>
+                            <a:srgbClr val="445474"/>
+                          </a:solidFill>
+                          <a:latin typeface="맑은 고딕"/>
+                        </a:defRPr>
+                      </a:pPr>
                       <a:r>
-                        <a:rPr lang="en-US" altLang="ko-KR" sz="600" u="none" strike="noStrike" dirty="0">
-                          <a:effectLst/>
-                          <a:latin typeface="+mn-ea"/>
-                          <a:ea typeface="+mn-ea"/>
-                        </a:rPr>
-                        <a:t>0</a:t>
+                        <a:t>139.7</a:t>
                       </a:r>
-                      <a:endParaRPr lang="en-US" altLang="ko-KR" sz="600" b="0" i="0" u="none" strike="noStrike" dirty="0">
-                        <a:solidFill>
-                          <a:srgbClr val="000000"/>
-                        </a:solidFill>
-                        <a:effectLst/>
-                        <a:latin typeface="+mn-ea"/>
-                        <a:ea typeface="+mn-ea"/>
-                      </a:endParaRPr>
                     </a:p>
                   </a:txBody>
                   <a:tcPr marL="0" marR="0" marT="0" marB="0" anchor="ctr">
@@ -17689,23 +17406,17 @@
                     <a:bodyPr/>
                     <a:lstStyle/>
                     <a:p>
-                      <a:pPr algn="ctr" fontAlgn="ctr"/>
+                      <a:pPr algn="ctr">
+                        <a:defRPr sz="700" b="0">
+                          <a:solidFill>
+                            <a:srgbClr val="445474"/>
+                          </a:solidFill>
+                          <a:latin typeface="맑은 고딕"/>
+                        </a:defRPr>
+                      </a:pPr>
                       <a:r>
-                        <a:rPr lang="en-US" altLang="ko-KR" sz="600" u="none" strike="noStrike" dirty="0">
-                          <a:effectLst/>
-                          <a:latin typeface="+mn-ea"/>
-                          <a:ea typeface="+mn-ea"/>
-                        </a:rPr>
-                        <a:t>0</a:t>
+                        <a:t>139.2</a:t>
                       </a:r>
-                      <a:endParaRPr lang="en-US" altLang="ko-KR" sz="600" b="0" i="0" u="none" strike="noStrike" dirty="0">
-                        <a:solidFill>
-                          <a:srgbClr val="000000"/>
-                        </a:solidFill>
-                        <a:effectLst/>
-                        <a:latin typeface="+mn-ea"/>
-                        <a:ea typeface="+mn-ea"/>
-                      </a:endParaRPr>
                     </a:p>
                   </a:txBody>
                   <a:tcPr marL="0" marR="0" marT="0" marB="0" anchor="ctr">
@@ -17778,14 +17489,14 @@
                     <a:p>
                       <a:pPr algn="ctr" fontAlgn="ctr"/>
                       <a:r>
-                        <a:rPr lang="en-US" sz="700" u="none" strike="noStrike">
+                        <a:rPr lang="en-US" sz="700" u="none" strike="noStrike" dirty="0">
                           <a:effectLst/>
                           <a:latin typeface="+mn-ea"/>
                           <a:ea typeface="+mn-ea"/>
                         </a:rPr>
-                        <a:t>incisor Overbite</a:t>
+                        <a:t>Incisor Overbite</a:t>
                       </a:r>
-                      <a:endParaRPr lang="en-US" sz="700" b="0" i="0" u="none" strike="noStrike">
+                      <a:endParaRPr lang="en-US" sz="700" b="0" i="0" u="none" strike="noStrike" dirty="0">
                         <a:effectLst/>
                         <a:latin typeface="+mn-ea"/>
                         <a:ea typeface="+mn-ea"/>
@@ -17853,23 +17564,17 @@
                     <a:bodyPr/>
                     <a:lstStyle/>
                     <a:p>
-                      <a:pPr algn="ctr" fontAlgn="ctr"/>
+                      <a:pPr algn="ctr">
+                        <a:defRPr sz="700" b="0">
+                          <a:solidFill>
+                            <a:srgbClr val="445474"/>
+                          </a:solidFill>
+                          <a:latin typeface="맑은 고딕"/>
+                        </a:defRPr>
+                      </a:pPr>
                       <a:r>
-                        <a:rPr lang="en-US" altLang="ko-KR" sz="600" u="none" strike="noStrike">
-                          <a:effectLst/>
-                          <a:latin typeface="+mn-ea"/>
-                          <a:ea typeface="+mn-ea"/>
-                        </a:rPr>
-                        <a:t>0</a:t>
+                        <a:t>-93</a:t>
                       </a:r>
-                      <a:endParaRPr lang="en-US" altLang="ko-KR" sz="600" b="0" i="0" u="none" strike="noStrike">
-                        <a:solidFill>
-                          <a:srgbClr val="000000"/>
-                        </a:solidFill>
-                        <a:effectLst/>
-                        <a:latin typeface="+mn-ea"/>
-                        <a:ea typeface="+mn-ea"/>
-                      </a:endParaRPr>
                     </a:p>
                   </a:txBody>
                   <a:tcPr marL="0" marR="0" marT="0" marB="0" anchor="ctr">
@@ -17947,9 +17652,17 @@
                           <a:latin typeface="+mn-ea"/>
                           <a:ea typeface="+mn-ea"/>
                         </a:rPr>
-                        <a:t>incisor Overjet</a:t>
+                        <a:t>Incisor </a:t>
                       </a:r>
-                      <a:endParaRPr lang="en-US" sz="700" b="0" i="0" u="none" strike="noStrike">
+                      <a:r>
+                        <a:rPr lang="en-US" sz="700" u="none" strike="noStrike" dirty="0">
+                          <a:effectLst/>
+                          <a:latin typeface="+mn-ea"/>
+                          <a:ea typeface="+mn-ea"/>
+                        </a:rPr>
+                        <a:t>Overjet</a:t>
+                      </a:r>
+                      <a:endParaRPr lang="en-US" sz="700" b="0" i="0" u="none" strike="noStrike" dirty="0">
                         <a:effectLst/>
                         <a:latin typeface="+mn-ea"/>
                         <a:ea typeface="+mn-ea"/>
@@ -18017,23 +17730,17 @@
                     <a:bodyPr/>
                     <a:lstStyle/>
                     <a:p>
-                      <a:pPr algn="ctr" fontAlgn="ctr"/>
+                      <a:pPr algn="ctr">
+                        <a:defRPr sz="700" b="0">
+                          <a:solidFill>
+                            <a:srgbClr val="445474"/>
+                          </a:solidFill>
+                          <a:latin typeface="맑은 고딕"/>
+                        </a:defRPr>
+                      </a:pPr>
                       <a:r>
-                        <a:rPr lang="en-US" altLang="ko-KR" sz="600" u="none" strike="noStrike" dirty="0">
-                          <a:effectLst/>
-                          <a:latin typeface="+mn-ea"/>
-                          <a:ea typeface="+mn-ea"/>
-                        </a:rPr>
-                        <a:t>0</a:t>
+                        <a:t>78</a:t>
                       </a:r>
-                      <a:endParaRPr lang="en-US" altLang="ko-KR" sz="600" b="0" i="0" u="none" strike="noStrike" dirty="0">
-                        <a:solidFill>
-                          <a:srgbClr val="000000"/>
-                        </a:solidFill>
-                        <a:effectLst/>
-                        <a:latin typeface="+mn-ea"/>
-                        <a:ea typeface="+mn-ea"/>
-                      </a:endParaRPr>
                     </a:p>
                   </a:txBody>
                   <a:tcPr marL="0" marR="0" marT="0" marB="0" anchor="ctr">
@@ -18181,23 +17888,17 @@
                     <a:bodyPr/>
                     <a:lstStyle/>
                     <a:p>
-                      <a:pPr algn="ctr" fontAlgn="ctr"/>
+                      <a:pPr algn="ctr">
+                        <a:defRPr sz="700" b="0">
+                          <a:solidFill>
+                            <a:srgbClr val="445474"/>
+                          </a:solidFill>
+                          <a:latin typeface="맑은 고딕"/>
+                        </a:defRPr>
+                      </a:pPr>
                       <a:r>
-                        <a:rPr lang="en-US" altLang="ko-KR" sz="600" u="none" strike="noStrike" dirty="0">
-                          <a:effectLst/>
-                          <a:latin typeface="+mn-ea"/>
-                          <a:ea typeface="+mn-ea"/>
-                        </a:rPr>
-                        <a:t>0</a:t>
+                        <a:t>26.5</a:t>
                       </a:r>
-                      <a:endParaRPr lang="en-US" altLang="ko-KR" sz="600" b="0" i="0" u="none" strike="noStrike" dirty="0">
-                        <a:solidFill>
-                          <a:srgbClr val="000000"/>
-                        </a:solidFill>
-                        <a:effectLst/>
-                        <a:latin typeface="+mn-ea"/>
-                        <a:ea typeface="+mn-ea"/>
-                      </a:endParaRPr>
                     </a:p>
                   </a:txBody>
                   <a:tcPr marL="0" marR="0" marT="0" marB="0" anchor="ctr">
@@ -18345,23 +18046,17 @@
                     <a:bodyPr/>
                     <a:lstStyle/>
                     <a:p>
-                      <a:pPr algn="ctr" fontAlgn="ctr"/>
+                      <a:pPr algn="ctr">
+                        <a:defRPr sz="700" b="0">
+                          <a:solidFill>
+                            <a:srgbClr val="445474"/>
+                          </a:solidFill>
+                          <a:latin typeface="맑은 고딕"/>
+                        </a:defRPr>
+                      </a:pPr>
                       <a:r>
-                        <a:rPr lang="en-US" altLang="ko-KR" sz="600" u="none" strike="noStrike" dirty="0">
-                          <a:effectLst/>
-                          <a:latin typeface="+mn-ea"/>
-                          <a:ea typeface="+mn-ea"/>
-                        </a:rPr>
-                        <a:t>0</a:t>
+                        <a:t>166.5</a:t>
                       </a:r>
-                      <a:endParaRPr lang="en-US" altLang="ko-KR" sz="600" b="0" i="0" u="none" strike="noStrike" dirty="0">
-                        <a:solidFill>
-                          <a:srgbClr val="000000"/>
-                        </a:solidFill>
-                        <a:effectLst/>
-                        <a:latin typeface="+mn-ea"/>
-                        <a:ea typeface="+mn-ea"/>
-                      </a:endParaRPr>
                     </a:p>
                   </a:txBody>
                   <a:tcPr marL="0" marR="0" marT="0" marB="0" anchor="ctr">
@@ -18479,11 +18174,12 @@
           <a:bodyPr rtlCol="0" anchor="ctr"/>
           <a:lstStyle/>
           <a:p>
-            <a:r>
-              <a:rPr lang="en-US" altLang="ko-KR" sz="1400" b="1" dirty="0">
-                <a:latin typeface="+mj-ea"/>
-                <a:ea typeface="+mj-ea"/>
-              </a:rPr>
+            <a:pPr algn="ctr">
+              <a:defRPr sz="1300" b="1">
+                <a:latin typeface="맑은 고딕"/>
+              </a:defRPr>
+            </a:pPr>
+            <a:r>
               <a:t>C/C &amp; Main problem</a:t>
             </a:r>
           </a:p>
@@ -18538,11 +18234,12 @@
           <a:bodyPr rtlCol="0" anchor="ctr"/>
           <a:lstStyle/>
           <a:p>
-            <a:r>
-              <a:rPr lang="en-US" altLang="ko-KR" sz="1200" b="1" dirty="0">
-                <a:latin typeface="+mj-ea"/>
-                <a:ea typeface="+mj-ea"/>
-              </a:rPr>
+            <a:pPr algn="ctr">
+              <a:defRPr sz="1300" b="1">
+                <a:latin typeface="맑은 고딕"/>
+              </a:defRPr>
+            </a:pPr>
+            <a:r>
               <a:t>MPH:</a:t>
             </a:r>
           </a:p>
@@ -18636,16 +18333,13 @@
           </a:bodyPr>
           <a:lstStyle/>
           <a:p>
-            <a:pPr eaLnBrk="1" hangingPunct="1"/>
-            <a:r>
-              <a:rPr lang="en-US" altLang="ko-KR" sz="1400" b="1" dirty="0">
-                <a:solidFill>
-                  <a:srgbClr val="000000"/>
-                </a:solidFill>
-                <a:latin typeface="+mn-ea"/>
-                <a:cs typeface="Times New Roman Bold" panose="02020803070505020304" pitchFamily="18" charset="0"/>
-              </a:rPr>
-              <a:t>HGI:+</a:t>
+            <a:pPr algn="ctr">
+              <a:defRPr sz="1300" b="1">
+                <a:latin typeface="맑은 고딕"/>
+              </a:defRPr>
+            </a:pPr>
+            <a:r>
+              <a:t>HGI:5.22</a:t>
             </a:r>
           </a:p>
         </p:txBody>
@@ -18729,16 +18423,13 @@
           </a:bodyPr>
           <a:lstStyle/>
           <a:p>
-            <a:pPr eaLnBrk="1" hangingPunct="1"/>
-            <a:r>
-              <a:rPr lang="en-US" altLang="ko-KR" sz="1400" b="1" dirty="0">
-                <a:solidFill>
-                  <a:srgbClr val="000000"/>
-                </a:solidFill>
-                <a:latin typeface="+mn-ea"/>
-                <a:cs typeface="Times New Roman Bold" panose="02020803070505020304" pitchFamily="18" charset="0"/>
-              </a:rPr>
-              <a:t>VGI:+</a:t>
+            <a:pPr algn="ctr">
+              <a:defRPr sz="1300" b="1">
+                <a:latin typeface="맑은 고딕"/>
+              </a:defRPr>
+            </a:pPr>
+            <a:r>
+              <a:t>VGI:61.3</a:t>
             </a:r>
           </a:p>
         </p:txBody>
@@ -19064,16 +18755,13 @@
           </a:bodyPr>
           <a:lstStyle/>
           <a:p>
-            <a:pPr algn="ctr" eaLnBrk="1" hangingPunct="1"/>
-            <a:r>
-              <a:rPr lang="en-US" altLang="ko-KR" sz="1300" b="1" dirty="0">
-                <a:solidFill>
-                  <a:srgbClr val="000000"/>
-                </a:solidFill>
-                <a:latin typeface="+mn-ea"/>
-                <a:cs typeface="Times New Roman Bold" panose="02020803070505020304" pitchFamily="18" charset="0"/>
-              </a:rPr>
-              <a:t>IAPDI:</a:t>
+            <a:pPr algn="ctr">
+              <a:defRPr sz="1300" b="1">
+                <a:latin typeface="맑은 고딕"/>
+              </a:defRPr>
+            </a:pPr>
+            <a:r>
+              <a:t>IAPDI:165.0</a:t>
             </a:r>
           </a:p>
         </p:txBody>
@@ -19287,16 +18975,13 @@
           </a:bodyPr>
           <a:lstStyle/>
           <a:p>
-            <a:pPr eaLnBrk="1" hangingPunct="1"/>
-            <a:r>
-              <a:rPr lang="en-US" altLang="ko-KR" sz="1300" b="1" dirty="0">
-                <a:solidFill>
-                  <a:srgbClr val="000000"/>
-                </a:solidFill>
-                <a:latin typeface="+mn-ea"/>
-                <a:cs typeface="Times New Roman Bold" panose="02020803070505020304" pitchFamily="18" charset="0"/>
-              </a:rPr>
-              <a:t>2APDL:</a:t>
+            <a:pPr algn="ctr">
+              <a:defRPr sz="1300" b="1">
+                <a:latin typeface="맑은 고딕"/>
+              </a:defRPr>
+            </a:pPr>
+            <a:r>
+              <a:t>2APDL:-110.8</a:t>
             </a:r>
           </a:p>
         </p:txBody>
@@ -19329,16 +19014,13 @@
           </a:bodyPr>
           <a:lstStyle/>
           <a:p>
-            <a:pPr eaLnBrk="1" hangingPunct="1"/>
-            <a:r>
-              <a:rPr lang="en-US" altLang="ko-KR" sz="1300" b="1" dirty="0">
-                <a:solidFill>
-                  <a:srgbClr val="000000"/>
-                </a:solidFill>
-                <a:latin typeface="+mn-ea"/>
-                <a:cs typeface="Times New Roman Bold" panose="02020803070505020304" pitchFamily="18" charset="0"/>
-              </a:rPr>
-              <a:t>IODI:</a:t>
+            <a:pPr algn="ctr">
+              <a:defRPr sz="1300" b="1">
+                <a:latin typeface="맑은 고딕"/>
+              </a:defRPr>
+            </a:pPr>
+            <a:r>
+              <a:t>IODI:-0.06</a:t>
             </a:r>
           </a:p>
         </p:txBody>
@@ -19414,16 +19096,13 @@
           </a:bodyPr>
           <a:lstStyle/>
           <a:p>
-            <a:pPr eaLnBrk="1" hangingPunct="1"/>
-            <a:r>
-              <a:rPr lang="en-US" altLang="ko-KR" sz="1300" b="1" dirty="0">
-                <a:solidFill>
-                  <a:srgbClr val="000000"/>
-                </a:solidFill>
-                <a:latin typeface="+mn-ea"/>
-                <a:cs typeface="Times New Roman Bold" panose="02020803070505020304" pitchFamily="18" charset="0"/>
-              </a:rPr>
-              <a:t>VDL:</a:t>
+            <a:pPr algn="ctr">
+              <a:defRPr sz="1300" b="1">
+                <a:latin typeface="맑은 고딕"/>
+              </a:defRPr>
+            </a:pPr>
+            <a:r>
+              <a:t>VDL:80.76</a:t>
             </a:r>
           </a:p>
         </p:txBody>
@@ -19499,34 +19178,14 @@
           </a:bodyPr>
           <a:lstStyle/>
           <a:p>
-            <a:pPr eaLnBrk="1" hangingPunct="1"/>
-            <a:r>
-              <a:rPr lang="en-US" altLang="ko-KR" sz="1400" b="1" dirty="0">
-                <a:solidFill>
-                  <a:srgbClr val="000000"/>
-                </a:solidFill>
-                <a:latin typeface="+mn-ea"/>
-                <a:cs typeface="Times New Roman Bold" panose="02020803070505020304" pitchFamily="18" charset="0"/>
-              </a:rPr>
-              <a:t>CEPH </a:t>
-            </a:r>
-            <a:r>
-              <a:rPr lang="ko-KR" altLang="en-US" sz="1400" b="1" dirty="0">
-                <a:solidFill>
-                  <a:srgbClr val="000000"/>
-                </a:solidFill>
-                <a:latin typeface="+mn-ea"/>
-                <a:cs typeface="Times New Roman Bold" panose="02020803070505020304" pitchFamily="18" charset="0"/>
-              </a:rPr>
-              <a:t>데이터</a:t>
-            </a:r>
-            <a:endParaRPr lang="en-US" altLang="ko-KR" sz="1400" b="1" dirty="0">
-              <a:solidFill>
-                <a:srgbClr val="000000"/>
-              </a:solidFill>
-              <a:latin typeface="+mn-ea"/>
-              <a:cs typeface="Times New Roman Bold" panose="02020803070505020304" pitchFamily="18" charset="0"/>
-            </a:endParaRPr>
+            <a:pPr algn="ctr">
+              <a:defRPr sz="1300" b="1">
+                <a:latin typeface="맑은 고딕"/>
+              </a:defRPr>
+            </a:pPr>
+            <a:r>
+              <a:t>CEPH RESULT</a:t>
+            </a:r>
           </a:p>
         </p:txBody>
       </p:sp>
@@ -19558,16 +19217,13 @@
           </a:bodyPr>
           <a:lstStyle/>
           <a:p>
-            <a:pPr eaLnBrk="1" hangingPunct="1"/>
-            <a:r>
-              <a:rPr lang="en-US" altLang="ko-KR" sz="1400" b="1" dirty="0">
-                <a:solidFill>
-                  <a:srgbClr val="000000"/>
-                </a:solidFill>
-                <a:latin typeface="+mn-ea"/>
-                <a:cs typeface="Times New Roman Bold" panose="02020803070505020304" pitchFamily="18" charset="0"/>
-              </a:rPr>
-              <a:t>CFD:</a:t>
+            <a:pPr algn="ctr">
+              <a:defRPr sz="1300" b="1">
+                <a:latin typeface="맑은 고딕"/>
+              </a:defRPr>
+            </a:pPr>
+            <a:r>
+              <a:t>CFD:28.06</a:t>
             </a:r>
           </a:p>
         </p:txBody>
@@ -19600,15 +19256,12 @@
           </a:bodyPr>
           <a:lstStyle/>
           <a:p>
-            <a:pPr eaLnBrk="1" hangingPunct="1"/>
-            <a:r>
-              <a:rPr lang="en-US" altLang="ko-KR" sz="1600" b="1" dirty="0">
-                <a:solidFill>
-                  <a:srgbClr val="000000"/>
-                </a:solidFill>
-                <a:latin typeface="+mn-ea"/>
-                <a:cs typeface="Times New Roman Bold" panose="02020803070505020304" pitchFamily="18" charset="0"/>
-              </a:rPr>
+            <a:pPr algn="ctr">
+              <a:defRPr sz="1300" b="1">
+                <a:latin typeface="맑은 고딕"/>
+              </a:defRPr>
+            </a:pPr>
+            <a:r>
               <a:t>Extraction:</a:t>
             </a:r>
           </a:p>
@@ -19661,6 +19314,30 @@
           </a:p>
         </p:txBody>
       </p:sp>
+      <p:pic>
+        <p:nvPicPr>
+          <p:cNvPr id="3170" name="Picture 3169" descr="oral_default.jpg"/>
+          <p:cNvPicPr>
+            <a:picLocks noChangeAspect="1"/>
+          </p:cNvPicPr>
+          <p:nvPr/>
+        </p:nvPicPr>
+        <p:blipFill>
+          <a:blip r:embed="rId2"/>
+          <a:stretch>
+            <a:fillRect/>
+          </a:stretch>
+        </p:blipFill>
+        <p:spPr>
+          <a:xfrm>
+            <a:off x="2468880" y="502920"/>
+            <a:ext cx="1463040" cy="1005840"/>
+          </a:xfrm>
+          <a:prstGeom prst="rect">
+            <a:avLst/>
+          </a:prstGeom>
+        </p:spPr>
+      </p:pic>
     </p:spTree>
     <p:extLst>
       <p:ext uri="{BB962C8B-B14F-4D97-AF65-F5344CB8AC3E}">
@@ -22267,7 +21944,7 @@
           </a:ln>
           <a:extLst>
             <a:ext uri="{C572A759-6A51-4108-AA02-DFA0A04FC94B}">
-              <ma14:wrappingTextBoxFlag xmlns:ma14="http://schemas.microsoft.com/office/mac/drawingml/2011/main" xmlns:a14="http://schemas.microsoft.com/office/drawing/2010/main" xmlns:m="http://schemas.openxmlformats.org/officeDocument/2006/math" xmlns="" val="1"/>
+              <ma14:wrappingTextBoxFlag xmlns="" xmlns:m="http://schemas.openxmlformats.org/officeDocument/2006/math" xmlns:a14="http://schemas.microsoft.com/office/drawing/2010/main" xmlns:ma14="http://schemas.microsoft.com/office/mac/drawingml/2011/main" val="1"/>
             </a:ext>
           </a:extLst>
         </p:spPr>
@@ -23051,7 +22728,7 @@
           </a:ln>
           <a:extLst>
             <a:ext uri="{C572A759-6A51-4108-AA02-DFA0A04FC94B}">
-              <ma14:wrappingTextBoxFlag xmlns="" xmlns:m="http://schemas.openxmlformats.org/officeDocument/2006/math" xmlns:a14="http://schemas.microsoft.com/office/drawing/2010/main" xmlns:ma14="http://schemas.microsoft.com/office/mac/drawingml/2011/main" val="1"/>
+              <ma14:wrappingTextBoxFlag xmlns:ma14="http://schemas.microsoft.com/office/mac/drawingml/2011/main" xmlns:a14="http://schemas.microsoft.com/office/drawing/2010/main" xmlns:m="http://schemas.openxmlformats.org/officeDocument/2006/math" xmlns="" val="1"/>
             </a:ext>
           </a:extLst>
         </p:spPr>
@@ -23101,7 +22778,7 @@
           </a:ln>
           <a:extLst>
             <a:ext uri="{C572A759-6A51-4108-AA02-DFA0A04FC94B}">
-              <ma14:wrappingTextBoxFlag xmlns="" xmlns:m="http://schemas.openxmlformats.org/officeDocument/2006/math" xmlns:a14="http://schemas.microsoft.com/office/drawing/2010/main" xmlns:ma14="http://schemas.microsoft.com/office/mac/drawingml/2011/main" val="1"/>
+              <ma14:wrappingTextBoxFlag xmlns:ma14="http://schemas.microsoft.com/office/mac/drawingml/2011/main" xmlns:a14="http://schemas.microsoft.com/office/drawing/2010/main" xmlns:m="http://schemas.openxmlformats.org/officeDocument/2006/math" xmlns="" val="1"/>
             </a:ext>
           </a:extLst>
         </p:spPr>
@@ -23171,7 +22848,7 @@
           </a:ln>
           <a:extLst>
             <a:ext uri="{C572A759-6A51-4108-AA02-DFA0A04FC94B}">
-              <ma14:wrappingTextBoxFlag xmlns="" xmlns:m="http://schemas.openxmlformats.org/officeDocument/2006/math" xmlns:a14="http://schemas.microsoft.com/office/drawing/2010/main" xmlns:ma14="http://schemas.microsoft.com/office/mac/drawingml/2011/main" val="1"/>
+              <ma14:wrappingTextBoxFlag xmlns:ma14="http://schemas.microsoft.com/office/mac/drawingml/2011/main" xmlns:a14="http://schemas.microsoft.com/office/drawing/2010/main" xmlns:m="http://schemas.openxmlformats.org/officeDocument/2006/math" xmlns="" val="1"/>
             </a:ext>
           </a:extLst>
         </p:spPr>
@@ -23241,7 +22918,7 @@
           </a:ln>
           <a:extLst>
             <a:ext uri="{C572A759-6A51-4108-AA02-DFA0A04FC94B}">
-              <ma14:wrappingTextBoxFlag xmlns="" xmlns:m="http://schemas.openxmlformats.org/officeDocument/2006/math" xmlns:a14="http://schemas.microsoft.com/office/drawing/2010/main" xmlns:ma14="http://schemas.microsoft.com/office/mac/drawingml/2011/main" val="1"/>
+              <ma14:wrappingTextBoxFlag xmlns:ma14="http://schemas.microsoft.com/office/mac/drawingml/2011/main" xmlns:a14="http://schemas.microsoft.com/office/drawing/2010/main" xmlns:m="http://schemas.openxmlformats.org/officeDocument/2006/math" xmlns="" val="1"/>
             </a:ext>
           </a:extLst>
         </p:spPr>
@@ -23776,7 +23453,7 @@
           </a:ln>
           <a:extLst>
             <a:ext uri="{C572A759-6A51-4108-AA02-DFA0A04FC94B}">
-              <ma14:wrappingTextBoxFlag xmlns="" xmlns:m="http://schemas.openxmlformats.org/officeDocument/2006/math" xmlns:a14="http://schemas.microsoft.com/office/drawing/2010/main" xmlns:p14="http://schemas.microsoft.com/office/powerpoint/2010/main" xmlns:ma14="http://schemas.microsoft.com/office/mac/drawingml/2011/main" val="1"/>
+              <ma14:wrappingTextBoxFlag xmlns:ma14="http://schemas.microsoft.com/office/mac/drawingml/2011/main" xmlns:p14="http://schemas.microsoft.com/office/powerpoint/2010/main" xmlns:a14="http://schemas.microsoft.com/office/drawing/2010/main" xmlns:m="http://schemas.openxmlformats.org/officeDocument/2006/math" xmlns="" val="1"/>
             </a:ext>
           </a:extLst>
         </p:spPr>
@@ -23944,7 +23621,7 @@
           </a:ln>
           <a:extLst>
             <a:ext uri="{C572A759-6A51-4108-AA02-DFA0A04FC94B}">
-              <ma14:wrappingTextBoxFlag xmlns="" xmlns:m="http://schemas.openxmlformats.org/officeDocument/2006/math" xmlns:a14="http://schemas.microsoft.com/office/drawing/2010/main" xmlns:p14="http://schemas.microsoft.com/office/powerpoint/2010/main" xmlns:ma14="http://schemas.microsoft.com/office/mac/drawingml/2011/main" val="1"/>
+              <ma14:wrappingTextBoxFlag xmlns:ma14="http://schemas.microsoft.com/office/mac/drawingml/2011/main" xmlns:p14="http://schemas.microsoft.com/office/powerpoint/2010/main" xmlns:a14="http://schemas.microsoft.com/office/drawing/2010/main" xmlns:m="http://schemas.openxmlformats.org/officeDocument/2006/math" xmlns="" val="1"/>
             </a:ext>
           </a:extLst>
         </p:spPr>
@@ -24455,7 +24132,7 @@
           </a:ln>
           <a:extLst>
             <a:ext uri="{C572A759-6A51-4108-AA02-DFA0A04FC94B}">
-              <ma14:wrappingTextBoxFlag xmlns="" xmlns:m="http://schemas.openxmlformats.org/officeDocument/2006/math" xmlns:a14="http://schemas.microsoft.com/office/drawing/2010/main" xmlns:p14="http://schemas.microsoft.com/office/powerpoint/2010/main" xmlns:ma14="http://schemas.microsoft.com/office/mac/drawingml/2011/main" val="1"/>
+              <ma14:wrappingTextBoxFlag xmlns:ma14="http://schemas.microsoft.com/office/mac/drawingml/2011/main" xmlns:p14="http://schemas.microsoft.com/office/powerpoint/2010/main" xmlns:a14="http://schemas.microsoft.com/office/drawing/2010/main" xmlns:m="http://schemas.openxmlformats.org/officeDocument/2006/math" xmlns="" val="1"/>
             </a:ext>
           </a:extLst>
         </p:spPr>
@@ -24790,7 +24467,7 @@
     <mc:Choice Requires="p14">
       <p:transition spd="med"/>
     </mc:Choice>
-    <mc:Fallback xmlns="" xmlns:m="http://schemas.openxmlformats.org/officeDocument/2006/math" xmlns:a14="http://schemas.microsoft.com/office/drawing/2010/main">
+    <mc:Fallback xmlns:a14="http://schemas.microsoft.com/office/drawing/2010/main" xmlns:m="http://schemas.openxmlformats.org/officeDocument/2006/math" xmlns="">
       <p:transition spd="slow"/>
     </mc:Fallback>
   </mc:AlternateContent>
@@ -24833,7 +24510,7 @@
           </a:ln>
           <a:extLst>
             <a:ext uri="{C572A759-6A51-4108-AA02-DFA0A04FC94B}">
-              <ma14:wrappingTextBoxFlag xmlns="" xmlns:m="http://schemas.openxmlformats.org/officeDocument/2006/math" xmlns:a14="http://schemas.microsoft.com/office/drawing/2010/main" xmlns:ma14="http://schemas.microsoft.com/office/mac/drawingml/2011/main" val="1"/>
+              <ma14:wrappingTextBoxFlag xmlns:ma14="http://schemas.microsoft.com/office/mac/drawingml/2011/main" xmlns:a14="http://schemas.microsoft.com/office/drawing/2010/main" xmlns:m="http://schemas.openxmlformats.org/officeDocument/2006/math" xmlns="" val="1"/>
             </a:ext>
           </a:extLst>
         </p:spPr>
@@ -24959,7 +24636,7 @@
           </a:ln>
           <a:extLst>
             <a:ext uri="{C572A759-6A51-4108-AA02-DFA0A04FC94B}">
-              <ma14:wrappingTextBoxFlag xmlns="" xmlns:m="http://schemas.openxmlformats.org/officeDocument/2006/math" xmlns:a14="http://schemas.microsoft.com/office/drawing/2010/main" xmlns:ma14="http://schemas.microsoft.com/office/mac/drawingml/2011/main" val="1"/>
+              <ma14:wrappingTextBoxFlag xmlns:ma14="http://schemas.microsoft.com/office/mac/drawingml/2011/main" xmlns:a14="http://schemas.microsoft.com/office/drawing/2010/main" xmlns:m="http://schemas.openxmlformats.org/officeDocument/2006/math" xmlns="" val="1"/>
             </a:ext>
           </a:extLst>
         </p:spPr>
@@ -28355,7 +28032,7 @@
           </a:ln>
           <a:extLst>
             <a:ext uri="{C572A759-6A51-4108-AA02-DFA0A04FC94B}">
-              <ma14:wrappingTextBoxFlag xmlns="" xmlns:m="http://schemas.openxmlformats.org/officeDocument/2006/math" xmlns:a14="http://schemas.microsoft.com/office/drawing/2010/main" xmlns:ma14="http://schemas.microsoft.com/office/mac/drawingml/2011/main" val="1"/>
+              <ma14:wrappingTextBoxFlag xmlns:ma14="http://schemas.microsoft.com/office/mac/drawingml/2011/main" xmlns:a14="http://schemas.microsoft.com/office/drawing/2010/main" xmlns:m="http://schemas.openxmlformats.org/officeDocument/2006/math" xmlns="" val="1"/>
             </a:ext>
           </a:extLst>
         </p:spPr>
@@ -28488,7 +28165,7 @@
           </a:ln>
           <a:extLst>
             <a:ext uri="{C572A759-6A51-4108-AA02-DFA0A04FC94B}">
-              <ma14:wrappingTextBoxFlag xmlns="" xmlns:m="http://schemas.openxmlformats.org/officeDocument/2006/math" xmlns:a14="http://schemas.microsoft.com/office/drawing/2010/main" xmlns:ma14="http://schemas.microsoft.com/office/mac/drawingml/2011/main" val="1"/>
+              <ma14:wrappingTextBoxFlag xmlns:ma14="http://schemas.microsoft.com/office/mac/drawingml/2011/main" xmlns:a14="http://schemas.microsoft.com/office/drawing/2010/main" xmlns:m="http://schemas.openxmlformats.org/officeDocument/2006/math" xmlns="" val="1"/>
             </a:ext>
           </a:extLst>
         </p:spPr>
@@ -28614,7 +28291,7 @@
           </a:ln>
           <a:extLst>
             <a:ext uri="{C572A759-6A51-4108-AA02-DFA0A04FC94B}">
-              <ma14:wrappingTextBoxFlag xmlns="" xmlns:m="http://schemas.openxmlformats.org/officeDocument/2006/math" xmlns:a14="http://schemas.microsoft.com/office/drawing/2010/main" xmlns:ma14="http://schemas.microsoft.com/office/mac/drawingml/2011/main" val="1"/>
+              <ma14:wrappingTextBoxFlag xmlns:ma14="http://schemas.microsoft.com/office/mac/drawingml/2011/main" xmlns:a14="http://schemas.microsoft.com/office/drawing/2010/main" xmlns:m="http://schemas.openxmlformats.org/officeDocument/2006/math" xmlns="" val="1"/>
             </a:ext>
           </a:extLst>
         </p:spPr>
@@ -29084,7 +28761,7 @@
           </a:ln>
           <a:extLst>
             <a:ext uri="{C572A759-6A51-4108-AA02-DFA0A04FC94B}">
-              <ma14:wrappingTextBoxFlag xmlns="" xmlns:m="http://schemas.openxmlformats.org/officeDocument/2006/math" xmlns:a14="http://schemas.microsoft.com/office/drawing/2010/main" xmlns:ma14="http://schemas.microsoft.com/office/mac/drawingml/2011/main" val="1"/>
+              <ma14:wrappingTextBoxFlag xmlns:ma14="http://schemas.microsoft.com/office/mac/drawingml/2011/main" xmlns:a14="http://schemas.microsoft.com/office/drawing/2010/main" xmlns:m="http://schemas.openxmlformats.org/officeDocument/2006/math" xmlns="" val="1"/>
             </a:ext>
           </a:extLst>
         </p:spPr>

--- a/output_ppt.pptx
+++ b/output_ppt.pptx
@@ -7029,29 +7029,108 @@
             </a:lvl9pPr>
           </a:lstStyle>
           <a:p>
-            <a:pPr algn="ctr">
-              <a:defRPr sz="1500" b="1">
+            <a:pPr eaLnBrk="1" hangingPunct="1"/>
+            <a:r>
+              <a:rPr lang="en-US" altLang="ko-KR" sz="1600" b="1" dirty="0">
                 <a:solidFill>
-                  <a:srgbClr val="445474"/>
+                  <a:schemeClr val="tx2"/>
                 </a:solidFill>
-                <a:latin typeface="맑은 고딕"/>
-              </a:defRPr>
-            </a:pPr>
-            <a:r>
-              <a:t>Male 순응교합 20 2005-03-28</a:t>
+                <a:latin typeface="+mj-ea"/>
+                <a:ea typeface="+mj-ea"/>
+                <a:cs typeface="Arial" panose="020B0604020202020204" pitchFamily="34" charset="0"/>
+              </a:rPr>
+              <a:t>  (F) </a:t>
+            </a:r>
+            <a:r>
+              <a:rPr lang="ko-KR" altLang="en-US" sz="1600" b="1" dirty="0">
+                <a:solidFill>
+                  <a:schemeClr val="tx2"/>
+                </a:solidFill>
+                <a:latin typeface="+mj-ea"/>
+                <a:ea typeface="+mj-ea"/>
+                <a:cs typeface="Arial" panose="020B0604020202020204" pitchFamily="34" charset="0"/>
+              </a:rPr>
+              <a:t>순응교합연구회 </a:t>
+            </a:r>
+            <a:r>
+              <a:rPr lang="en-US" altLang="ko-KR" sz="1600" b="1" dirty="0">
+                <a:solidFill>
+                  <a:schemeClr val="tx2"/>
+                </a:solidFill>
+                <a:latin typeface="+mj-ea"/>
+                <a:ea typeface="+mj-ea"/>
+                <a:cs typeface="Arial" panose="020B0604020202020204" pitchFamily="34" charset="0"/>
+              </a:rPr>
+              <a:t>8y since 2017</a:t>
             </a:r>
           </a:p>
           <a:p>
-            <a:pPr algn="ctr">
-              <a:defRPr sz="1500" b="1">
+            <a:pPr eaLnBrk="1" hangingPunct="1"/>
+            <a:r>
+              <a:rPr lang="en-US" altLang="ko-KR" sz="1600" b="1" dirty="0">
                 <a:solidFill>
-                  <a:srgbClr val="445474"/>
+                  <a:schemeClr val="tx2"/>
                 </a:solidFill>
-                <a:latin typeface="맑은 고딕"/>
-              </a:defRPr>
-            </a:pPr>
-            <a:r>
-              <a:t> S1.B2.D2.C1-nbt(dbt)-RM(Rt)-Fx:Ex-Fx/1-Type IV</a:t>
+                <a:latin typeface="+mj-ea"/>
+                <a:ea typeface="+mj-ea"/>
+                <a:cs typeface="Arial" panose="020B0604020202020204" pitchFamily="34" charset="0"/>
+              </a:rPr>
+              <a:t>S1.B1.D1.C1-nbt(</a:t>
+            </a:r>
+            <a:r>
+              <a:rPr lang="en-US" altLang="ko-KR" sz="1600" b="1" dirty="0" err="1">
+                <a:solidFill>
+                  <a:schemeClr val="tx2"/>
+                </a:solidFill>
+                <a:latin typeface="+mj-ea"/>
+                <a:ea typeface="+mj-ea"/>
+                <a:cs typeface="Arial" panose="020B0604020202020204" pitchFamily="34" charset="0"/>
+              </a:rPr>
+              <a:t>dbt</a:t>
+            </a:r>
+            <a:r>
+              <a:rPr lang="en-US" altLang="ko-KR" sz="1600" b="1" dirty="0">
+                <a:solidFill>
+                  <a:schemeClr val="tx2"/>
+                </a:solidFill>
+                <a:latin typeface="+mj-ea"/>
+                <a:ea typeface="+mj-ea"/>
+                <a:cs typeface="Arial" panose="020B0604020202020204" pitchFamily="34" charset="0"/>
+              </a:rPr>
+              <a:t>)-RM(Rt)-</a:t>
+            </a:r>
+            <a:r>
+              <a:rPr lang="en-US" altLang="ko-KR" sz="1600" b="1" dirty="0" err="1">
+                <a:solidFill>
+                  <a:schemeClr val="tx2"/>
+                </a:solidFill>
+                <a:latin typeface="+mj-ea"/>
+                <a:ea typeface="+mj-ea"/>
+                <a:cs typeface="Arial" panose="020B0604020202020204" pitchFamily="34" charset="0"/>
+              </a:rPr>
+              <a:t>Fx:Ex-Fx</a:t>
+            </a:r>
+            <a:r>
+              <a:rPr lang="en-US" altLang="ko-KR" sz="1600" b="1" dirty="0">
+                <a:solidFill>
+                  <a:schemeClr val="tx2"/>
+                </a:solidFill>
+                <a:latin typeface="+mj-ea"/>
+                <a:ea typeface="+mj-ea"/>
+                <a:cs typeface="Arial" panose="020B0604020202020204" pitchFamily="34" charset="0"/>
+              </a:rPr>
+              <a:t>/0-Type IV   </a:t>
+            </a:r>
+            <a:r>
+              <a:rPr lang="ko-KR" altLang="en-US" sz="1600" b="1" dirty="0">
+                <a:solidFill>
+                  <a:schemeClr val="tx2"/>
+                </a:solidFill>
+                <a:latin typeface="+mj-ea"/>
+                <a:ea typeface="+mj-ea"/>
+                <a:cs typeface="Arial" panose="020B0604020202020204" pitchFamily="34" charset="0"/>
+              </a:rPr>
+              <a:t> </a:t>
             </a:r>
           </a:p>
         </p:txBody>
@@ -12031,17 +12110,23 @@
                     <a:bodyPr/>
                     <a:lstStyle/>
                     <a:p>
-                      <a:pPr algn="ctr">
-                        <a:defRPr sz="700" b="0">
-                          <a:solidFill>
-                            <a:srgbClr val="445474"/>
-                          </a:solidFill>
-                          <a:latin typeface="맑은 고딕"/>
-                        </a:defRPr>
-                      </a:pPr>
+                      <a:pPr algn="ctr" fontAlgn="ctr"/>
                       <a:r>
-                        <a:t>-12.4</a:t>
+                        <a:rPr lang="en-US" altLang="ko-KR" sz="600" u="none" strike="noStrike" dirty="0">
+                          <a:effectLst/>
+                          <a:latin typeface="+mn-ea"/>
+                          <a:ea typeface="+mn-ea"/>
+                        </a:rPr>
+                        <a:t>0</a:t>
                       </a:r>
+                      <a:endParaRPr lang="en-US" altLang="ko-KR" sz="600" b="0" i="0" u="none" strike="noStrike" dirty="0">
+                        <a:solidFill>
+                          <a:srgbClr val="000000"/>
+                        </a:solidFill>
+                        <a:effectLst/>
+                        <a:latin typeface="+mn-ea"/>
+                        <a:ea typeface="+mn-ea"/>
+                      </a:endParaRPr>
                     </a:p>
                   </a:txBody>
                   <a:tcPr marL="0" marR="0" marT="0" marB="0" anchor="ctr">
@@ -12189,17 +12274,23 @@
                     <a:bodyPr/>
                     <a:lstStyle/>
                     <a:p>
-                      <a:pPr algn="ctr">
-                        <a:defRPr sz="700" b="0">
-                          <a:solidFill>
-                            <a:srgbClr val="445474"/>
-                          </a:solidFill>
-                          <a:latin typeface="맑은 고딕"/>
-                        </a:defRPr>
-                      </a:pPr>
+                      <a:pPr algn="ctr" fontAlgn="ctr"/>
                       <a:r>
-                        <a:t>3.7</a:t>
+                        <a:rPr lang="en-US" altLang="ko-KR" sz="600" u="none" strike="noStrike" dirty="0">
+                          <a:effectLst/>
+                          <a:latin typeface="+mn-ea"/>
+                          <a:ea typeface="+mn-ea"/>
+                        </a:rPr>
+                        <a:t>0</a:t>
                       </a:r>
+                      <a:endParaRPr lang="en-US" altLang="ko-KR" sz="600" b="0" i="0" u="none" strike="noStrike" dirty="0">
+                        <a:solidFill>
+                          <a:srgbClr val="000000"/>
+                        </a:solidFill>
+                        <a:effectLst/>
+                        <a:latin typeface="+mn-ea"/>
+                        <a:ea typeface="+mn-ea"/>
+                      </a:endParaRPr>
                     </a:p>
                   </a:txBody>
                   <a:tcPr marL="0" marR="0" marT="0" marB="0" anchor="ctr">
@@ -12347,17 +12438,23 @@
                     <a:bodyPr/>
                     <a:lstStyle/>
                     <a:p>
-                      <a:pPr algn="ctr">
-                        <a:defRPr sz="700" b="0">
-                          <a:solidFill>
-                            <a:srgbClr val="445474"/>
-                          </a:solidFill>
-                          <a:latin typeface="맑은 고딕"/>
-                        </a:defRPr>
-                      </a:pPr>
+                      <a:pPr algn="ctr" fontAlgn="ctr"/>
                       <a:r>
-                        <a:t>16.1</a:t>
+                        <a:rPr lang="en-US" altLang="ko-KR" sz="600" u="none" strike="noStrike" dirty="0">
+                          <a:effectLst/>
+                          <a:latin typeface="+mn-ea"/>
+                          <a:ea typeface="+mn-ea"/>
+                        </a:rPr>
+                        <a:t>0</a:t>
                       </a:r>
+                      <a:endParaRPr lang="en-US" altLang="ko-KR" sz="600" b="0" i="0" u="none" strike="noStrike" dirty="0">
+                        <a:solidFill>
+                          <a:srgbClr val="000000"/>
+                        </a:solidFill>
+                        <a:effectLst/>
+                        <a:latin typeface="+mn-ea"/>
+                        <a:ea typeface="+mn-ea"/>
+                      </a:endParaRPr>
                     </a:p>
                   </a:txBody>
                   <a:tcPr marL="0" marR="0" marT="0" marB="0" anchor="ctr">
@@ -12505,17 +12602,23 @@
                     <a:bodyPr/>
                     <a:lstStyle/>
                     <a:p>
-                      <a:pPr algn="ctr">
-                        <a:defRPr sz="700" b="0">
-                          <a:solidFill>
-                            <a:srgbClr val="445474"/>
-                          </a:solidFill>
-                          <a:latin typeface="맑은 고딕"/>
-                        </a:defRPr>
-                      </a:pPr>
+                      <a:pPr algn="ctr" fontAlgn="ctr"/>
                       <a:r>
-                        <a:t>23</a:t>
+                        <a:rPr lang="en-US" altLang="ko-KR" sz="600" u="none" strike="noStrike">
+                          <a:effectLst/>
+                          <a:latin typeface="+mn-ea"/>
+                          <a:ea typeface="+mn-ea"/>
+                        </a:rPr>
+                        <a:t>0</a:t>
                       </a:r>
+                      <a:endParaRPr lang="en-US" altLang="ko-KR" sz="600" b="0" i="0" u="none" strike="noStrike">
+                        <a:solidFill>
+                          <a:srgbClr val="000000"/>
+                        </a:solidFill>
+                        <a:effectLst/>
+                        <a:latin typeface="+mn-ea"/>
+                        <a:ea typeface="+mn-ea"/>
+                      </a:endParaRPr>
                     </a:p>
                   </a:txBody>
                   <a:tcPr marL="0" marR="0" marT="0" marB="0" anchor="ctr">
@@ -12663,17 +12766,23 @@
                     <a:bodyPr/>
                     <a:lstStyle/>
                     <a:p>
-                      <a:pPr algn="ctr">
-                        <a:defRPr sz="700" b="0">
-                          <a:solidFill>
-                            <a:srgbClr val="445474"/>
-                          </a:solidFill>
-                          <a:latin typeface="맑은 고딕"/>
-                        </a:defRPr>
-                      </a:pPr>
+                      <a:pPr algn="ctr" fontAlgn="ctr"/>
                       <a:r>
-                        <a:t>144</a:t>
+                        <a:rPr lang="en-US" altLang="ko-KR" sz="600" u="none" strike="noStrike" dirty="0">
+                          <a:effectLst/>
+                          <a:latin typeface="+mn-ea"/>
+                          <a:ea typeface="+mn-ea"/>
+                        </a:rPr>
+                        <a:t>0</a:t>
                       </a:r>
+                      <a:endParaRPr lang="en-US" altLang="ko-KR" sz="600" b="0" i="0" u="none" strike="noStrike" dirty="0">
+                        <a:solidFill>
+                          <a:srgbClr val="000000"/>
+                        </a:solidFill>
+                        <a:effectLst/>
+                        <a:latin typeface="+mn-ea"/>
+                        <a:ea typeface="+mn-ea"/>
+                      </a:endParaRPr>
                     </a:p>
                   </a:txBody>
                   <a:tcPr marL="0" marR="0" marT="0" marB="0" anchor="ctr">
@@ -12821,17 +12930,23 @@
                     <a:bodyPr/>
                     <a:lstStyle/>
                     <a:p>
-                      <a:pPr algn="ctr">
-                        <a:defRPr sz="700" b="0">
-                          <a:solidFill>
-                            <a:srgbClr val="445474"/>
-                          </a:solidFill>
-                          <a:latin typeface="맑은 고딕"/>
-                        </a:defRPr>
-                      </a:pPr>
+                      <a:pPr algn="ctr" fontAlgn="ctr"/>
                       <a:r>
-                        <a:t>167</a:t>
+                        <a:rPr lang="en-US" altLang="ko-KR" sz="600" u="none" strike="noStrike">
+                          <a:effectLst/>
+                          <a:latin typeface="+mn-ea"/>
+                          <a:ea typeface="+mn-ea"/>
+                        </a:rPr>
+                        <a:t>0</a:t>
                       </a:r>
+                      <a:endParaRPr lang="en-US" altLang="ko-KR" sz="600" b="0" i="0" u="none" strike="noStrike">
+                        <a:solidFill>
+                          <a:srgbClr val="000000"/>
+                        </a:solidFill>
+                        <a:effectLst/>
+                        <a:latin typeface="+mn-ea"/>
+                        <a:ea typeface="+mn-ea"/>
+                      </a:endParaRPr>
                     </a:p>
                   </a:txBody>
                   <a:tcPr marL="0" marR="0" marT="0" marB="0" anchor="ctr">
@@ -12979,17 +13094,23 @@
                     <a:bodyPr/>
                     <a:lstStyle/>
                     <a:p>
-                      <a:pPr algn="ctr">
-                        <a:defRPr sz="700" b="0">
-                          <a:solidFill>
-                            <a:srgbClr val="445474"/>
-                          </a:solidFill>
-                          <a:latin typeface="맑은 고딕"/>
-                        </a:defRPr>
-                      </a:pPr>
+                      <a:pPr algn="ctr" fontAlgn="ctr"/>
                       <a:r>
-                        <a:t>167</a:t>
+                        <a:rPr lang="en-US" altLang="ko-KR" sz="600" u="none" strike="noStrike" dirty="0">
+                          <a:effectLst/>
+                          <a:latin typeface="+mn-ea"/>
+                          <a:ea typeface="+mn-ea"/>
+                        </a:rPr>
+                        <a:t>0</a:t>
                       </a:r>
+                      <a:endParaRPr lang="en-US" altLang="ko-KR" sz="600" b="0" i="0" u="none" strike="noStrike" dirty="0">
+                        <a:solidFill>
+                          <a:srgbClr val="000000"/>
+                        </a:solidFill>
+                        <a:effectLst/>
+                        <a:latin typeface="+mn-ea"/>
+                        <a:ea typeface="+mn-ea"/>
+                      </a:endParaRPr>
                     </a:p>
                   </a:txBody>
                   <a:tcPr marL="0" marR="0" marT="0" marB="0" anchor="ctr">
@@ -13137,17 +13258,23 @@
                     <a:bodyPr/>
                     <a:lstStyle/>
                     <a:p>
-                      <a:pPr algn="ctr">
-                        <a:defRPr sz="700" b="0">
-                          <a:solidFill>
-                            <a:srgbClr val="445474"/>
-                          </a:solidFill>
-                          <a:latin typeface="맑은 고딕"/>
-                        </a:defRPr>
-                      </a:pPr>
+                      <a:pPr algn="ctr" fontAlgn="ctr"/>
                       <a:r>
-                        <a:t>166.5</a:t>
+                        <a:rPr lang="en-US" altLang="ko-KR" sz="600" u="none" strike="noStrike">
+                          <a:effectLst/>
+                          <a:latin typeface="+mn-ea"/>
+                          <a:ea typeface="+mn-ea"/>
+                        </a:rPr>
+                        <a:t>0</a:t>
                       </a:r>
+                      <a:endParaRPr lang="en-US" altLang="ko-KR" sz="600" b="0" i="0" u="none" strike="noStrike">
+                        <a:solidFill>
+                          <a:srgbClr val="000000"/>
+                        </a:solidFill>
+                        <a:effectLst/>
+                        <a:latin typeface="+mn-ea"/>
+                        <a:ea typeface="+mn-ea"/>
+                      </a:endParaRPr>
                     </a:p>
                   </a:txBody>
                   <a:tcPr marL="0" marR="0" marT="0" marB="0" anchor="ctr">
@@ -13295,17 +13422,23 @@
                     <a:bodyPr/>
                     <a:lstStyle/>
                     <a:p>
-                      <a:pPr algn="ctr">
-                        <a:defRPr sz="700" b="0">
-                          <a:solidFill>
-                            <a:srgbClr val="445474"/>
-                          </a:solidFill>
-                          <a:latin typeface="맑은 고딕"/>
-                        </a:defRPr>
-                      </a:pPr>
+                      <a:pPr algn="ctr" fontAlgn="ctr"/>
                       <a:r>
-                        <a:t>143.1</a:t>
+                        <a:rPr lang="en-US" altLang="ko-KR" sz="600" u="none" strike="noStrike" dirty="0">
+                          <a:effectLst/>
+                          <a:latin typeface="+mn-ea"/>
+                          <a:ea typeface="+mn-ea"/>
+                        </a:rPr>
+                        <a:t>0</a:t>
                       </a:r>
+                      <a:endParaRPr lang="en-US" altLang="ko-KR" sz="600" b="0" i="0" u="none" strike="noStrike" dirty="0">
+                        <a:solidFill>
+                          <a:srgbClr val="000000"/>
+                        </a:solidFill>
+                        <a:effectLst/>
+                        <a:latin typeface="+mn-ea"/>
+                        <a:ea typeface="+mn-ea"/>
+                      </a:endParaRPr>
                     </a:p>
                   </a:txBody>
                   <a:tcPr marL="0" marR="0" marT="0" marB="0" anchor="ctr">
@@ -13453,17 +13586,23 @@
                     <a:bodyPr/>
                     <a:lstStyle/>
                     <a:p>
-                      <a:pPr algn="ctr">
-                        <a:defRPr sz="700" b="0">
-                          <a:solidFill>
-                            <a:srgbClr val="445474"/>
-                          </a:solidFill>
-                          <a:latin typeface="맑은 고딕"/>
-                        </a:defRPr>
-                      </a:pPr>
+                      <a:pPr algn="ctr" fontAlgn="ctr"/>
                       <a:r>
-                        <a:t>-126.1</a:t>
+                        <a:rPr lang="en-US" altLang="ko-KR" sz="600" u="none" strike="noStrike" dirty="0">
+                          <a:effectLst/>
+                          <a:latin typeface="+mn-ea"/>
+                          <a:ea typeface="+mn-ea"/>
+                        </a:rPr>
+                        <a:t>0</a:t>
                       </a:r>
+                      <a:endParaRPr lang="en-US" altLang="ko-KR" sz="600" b="0" i="0" u="none" strike="noStrike" dirty="0">
+                        <a:solidFill>
+                          <a:srgbClr val="000000"/>
+                        </a:solidFill>
+                        <a:effectLst/>
+                        <a:latin typeface="+mn-ea"/>
+                        <a:ea typeface="+mn-ea"/>
+                      </a:endParaRPr>
                     </a:p>
                   </a:txBody>
                   <a:tcPr marL="0" marR="0" marT="0" marB="0" anchor="ctr">
@@ -13611,17 +13750,23 @@
                     <a:bodyPr/>
                     <a:lstStyle/>
                     <a:p>
-                      <a:pPr algn="ctr">
-                        <a:defRPr sz="700" b="0">
-                          <a:solidFill>
-                            <a:srgbClr val="445474"/>
-                          </a:solidFill>
-                          <a:latin typeface="맑은 고딕"/>
-                        </a:defRPr>
-                      </a:pPr>
+                      <a:pPr algn="ctr" fontAlgn="ctr"/>
                       <a:r>
-                        <a:t>2.1</a:t>
+                        <a:rPr lang="en-US" altLang="ko-KR" sz="600" u="none" strike="noStrike" dirty="0">
+                          <a:effectLst/>
+                          <a:latin typeface="+mn-ea"/>
+                          <a:ea typeface="+mn-ea"/>
+                        </a:rPr>
+                        <a:t>0</a:t>
                       </a:r>
+                      <a:endParaRPr lang="en-US" altLang="ko-KR" sz="600" b="0" i="0" u="none" strike="noStrike" dirty="0">
+                        <a:solidFill>
+                          <a:srgbClr val="000000"/>
+                        </a:solidFill>
+                        <a:effectLst/>
+                        <a:latin typeface="+mn-ea"/>
+                        <a:ea typeface="+mn-ea"/>
+                      </a:endParaRPr>
                     </a:p>
                   </a:txBody>
                   <a:tcPr marL="0" marR="0" marT="0" marB="0" anchor="ctr">
@@ -13769,17 +13914,23 @@
                     <a:bodyPr/>
                     <a:lstStyle/>
                     <a:p>
-                      <a:pPr algn="ctr">
-                        <a:defRPr sz="700" b="0">
-                          <a:solidFill>
-                            <a:srgbClr val="445474"/>
-                          </a:solidFill>
-                          <a:latin typeface="맑은 고딕"/>
-                        </a:defRPr>
-                      </a:pPr>
+                      <a:pPr algn="ctr" fontAlgn="ctr"/>
                       <a:r>
-                        <a:t>26.5</a:t>
+                        <a:rPr lang="en-US" altLang="ko-KR" sz="600" u="none" strike="noStrike" dirty="0">
+                          <a:effectLst/>
+                          <a:latin typeface="+mn-ea"/>
+                          <a:ea typeface="+mn-ea"/>
+                        </a:rPr>
+                        <a:t>0</a:t>
                       </a:r>
+                      <a:endParaRPr lang="en-US" altLang="ko-KR" sz="600" b="0" i="0" u="none" strike="noStrike" dirty="0">
+                        <a:solidFill>
+                          <a:srgbClr val="000000"/>
+                        </a:solidFill>
+                        <a:effectLst/>
+                        <a:latin typeface="+mn-ea"/>
+                        <a:ea typeface="+mn-ea"/>
+                      </a:endParaRPr>
                     </a:p>
                   </a:txBody>
                   <a:tcPr marL="0" marR="0" marT="0" marB="0" anchor="ctr">
@@ -13927,17 +14078,23 @@
                     <a:bodyPr/>
                     <a:lstStyle/>
                     <a:p>
-                      <a:pPr algn="ctr">
-                        <a:defRPr sz="700" b="0">
-                          <a:solidFill>
-                            <a:srgbClr val="445474"/>
-                          </a:solidFill>
-                          <a:latin typeface="맑은 고딕"/>
-                        </a:defRPr>
-                      </a:pPr>
+                      <a:pPr algn="ctr" fontAlgn="ctr"/>
                       <a:r>
-                        <a:t>0.2</a:t>
+                        <a:rPr lang="en-US" altLang="ko-KR" sz="600" u="none" strike="noStrike">
+                          <a:effectLst/>
+                          <a:latin typeface="+mn-ea"/>
+                          <a:ea typeface="+mn-ea"/>
+                        </a:rPr>
+                        <a:t>0</a:t>
                       </a:r>
+                      <a:endParaRPr lang="en-US" altLang="ko-KR" sz="600" b="0" i="0" u="none" strike="noStrike">
+                        <a:solidFill>
+                          <a:srgbClr val="000000"/>
+                        </a:solidFill>
+                        <a:effectLst/>
+                        <a:latin typeface="+mn-ea"/>
+                        <a:ea typeface="+mn-ea"/>
+                      </a:endParaRPr>
                     </a:p>
                   </a:txBody>
                   <a:tcPr marL="0" marR="0" marT="0" marB="0" anchor="ctr">
@@ -14085,17 +14242,23 @@
                     <a:bodyPr/>
                     <a:lstStyle/>
                     <a:p>
-                      <a:pPr algn="ctr">
-                        <a:defRPr sz="700" b="0">
-                          <a:solidFill>
-                            <a:srgbClr val="445474"/>
-                          </a:solidFill>
-                          <a:latin typeface="맑은 고딕"/>
-                        </a:defRPr>
-                      </a:pPr>
+                      <a:pPr algn="ctr" fontAlgn="ctr"/>
                       <a:r>
-                        <a:t>101.8</a:t>
+                        <a:rPr lang="en-US" altLang="ko-KR" sz="600" u="none" strike="noStrike" dirty="0">
+                          <a:effectLst/>
+                          <a:latin typeface="+mn-ea"/>
+                          <a:ea typeface="+mn-ea"/>
+                        </a:rPr>
+                        <a:t>0</a:t>
                       </a:r>
+                      <a:endParaRPr lang="en-US" altLang="ko-KR" sz="600" b="0" i="0" u="none" strike="noStrike" dirty="0">
+                        <a:solidFill>
+                          <a:srgbClr val="000000"/>
+                        </a:solidFill>
+                        <a:effectLst/>
+                        <a:latin typeface="+mn-ea"/>
+                        <a:ea typeface="+mn-ea"/>
+                      </a:endParaRPr>
                     </a:p>
                   </a:txBody>
                   <a:tcPr marL="0" marR="0" marT="0" marB="0" anchor="ctr">
@@ -14243,17 +14406,23 @@
                     <a:bodyPr/>
                     <a:lstStyle/>
                     <a:p>
-                      <a:pPr algn="ctr">
-                        <a:defRPr sz="700" b="0">
-                          <a:solidFill>
-                            <a:srgbClr val="445474"/>
-                          </a:solidFill>
-                          <a:latin typeface="맑은 고딕"/>
-                        </a:defRPr>
-                      </a:pPr>
+                      <a:pPr algn="ctr" fontAlgn="ctr"/>
                       <a:r>
-                        <a:t>55.2</a:t>
+                        <a:rPr lang="en-US" altLang="ko-KR" sz="600" u="none" strike="noStrike" dirty="0">
+                          <a:effectLst/>
+                          <a:latin typeface="+mn-ea"/>
+                          <a:ea typeface="+mn-ea"/>
+                        </a:rPr>
+                        <a:t>0</a:t>
                       </a:r>
+                      <a:endParaRPr lang="en-US" altLang="ko-KR" sz="600" b="0" i="0" u="none" strike="noStrike" dirty="0">
+                        <a:solidFill>
+                          <a:srgbClr val="000000"/>
+                        </a:solidFill>
+                        <a:effectLst/>
+                        <a:latin typeface="+mn-ea"/>
+                        <a:ea typeface="+mn-ea"/>
+                      </a:endParaRPr>
                     </a:p>
                   </a:txBody>
                   <a:tcPr marL="0" marR="0" marT="0" marB="0" anchor="ctr">
@@ -14401,17 +14570,23 @@
                     <a:bodyPr/>
                     <a:lstStyle/>
                     <a:p>
-                      <a:pPr algn="ctr">
-                        <a:defRPr sz="700" b="0">
-                          <a:solidFill>
-                            <a:srgbClr val="445474"/>
-                          </a:solidFill>
-                          <a:latin typeface="맑은 고딕"/>
-                        </a:defRPr>
-                      </a:pPr>
+                      <a:pPr algn="ctr" fontAlgn="ctr"/>
                       <a:r>
-                        <a:t>99.9</a:t>
+                        <a:rPr lang="en-US" altLang="ko-KR" sz="600" u="none" strike="noStrike" dirty="0">
+                          <a:effectLst/>
+                          <a:latin typeface="+mn-ea"/>
+                          <a:ea typeface="+mn-ea"/>
+                        </a:rPr>
+                        <a:t>0</a:t>
                       </a:r>
+                      <a:endParaRPr lang="en-US" altLang="ko-KR" sz="600" b="0" i="0" u="none" strike="noStrike" dirty="0">
+                        <a:solidFill>
+                          <a:srgbClr val="000000"/>
+                        </a:solidFill>
+                        <a:effectLst/>
+                        <a:latin typeface="+mn-ea"/>
+                        <a:ea typeface="+mn-ea"/>
+                      </a:endParaRPr>
                     </a:p>
                   </a:txBody>
                   <a:tcPr marL="0" marR="0" marT="0" marB="0" anchor="ctr">
@@ -14559,17 +14734,23 @@
                     <a:bodyPr/>
                     <a:lstStyle/>
                     <a:p>
-                      <a:pPr algn="ctr">
-                        <a:defRPr sz="700" b="0">
-                          <a:solidFill>
-                            <a:srgbClr val="445474"/>
-                          </a:solidFill>
-                          <a:latin typeface="맑은 고딕"/>
-                        </a:defRPr>
-                      </a:pPr>
+                      <a:pPr algn="ctr" fontAlgn="ctr"/>
                       <a:r>
-                        <a:t>86.2</a:t>
+                        <a:rPr lang="en-US" altLang="ko-KR" sz="600" u="none" strike="noStrike" dirty="0">
+                          <a:effectLst/>
+                          <a:latin typeface="+mn-ea"/>
+                          <a:ea typeface="+mn-ea"/>
+                        </a:rPr>
+                        <a:t>0</a:t>
                       </a:r>
+                      <a:endParaRPr lang="en-US" altLang="ko-KR" sz="600" b="0" i="0" u="none" strike="noStrike" dirty="0">
+                        <a:solidFill>
+                          <a:srgbClr val="000000"/>
+                        </a:solidFill>
+                        <a:effectLst/>
+                        <a:latin typeface="+mn-ea"/>
+                        <a:ea typeface="+mn-ea"/>
+                      </a:endParaRPr>
                     </a:p>
                   </a:txBody>
                   <a:tcPr marL="0" marR="0" marT="0" marB="0" anchor="ctr">
@@ -14717,17 +14898,23 @@
                     <a:bodyPr/>
                     <a:lstStyle/>
                     <a:p>
-                      <a:pPr algn="ctr">
-                        <a:defRPr sz="700" b="0">
-                          <a:solidFill>
-                            <a:srgbClr val="445474"/>
-                          </a:solidFill>
-                          <a:latin typeface="맑은 고딕"/>
-                        </a:defRPr>
-                      </a:pPr>
+                      <a:pPr algn="ctr" fontAlgn="ctr"/>
                       <a:r>
+                        <a:rPr lang="en-US" altLang="ko-KR" sz="600" u="none" strike="noStrike" dirty="0">
+                          <a:effectLst/>
+                          <a:latin typeface="+mn-ea"/>
+                          <a:ea typeface="+mn-ea"/>
+                        </a:rPr>
                         <a:t>0</a:t>
                       </a:r>
+                      <a:endParaRPr lang="en-US" altLang="ko-KR" sz="600" b="0" i="0" u="none" strike="noStrike" dirty="0">
+                        <a:solidFill>
+                          <a:srgbClr val="000000"/>
+                        </a:solidFill>
+                        <a:effectLst/>
+                        <a:latin typeface="+mn-ea"/>
+                        <a:ea typeface="+mn-ea"/>
+                      </a:endParaRPr>
                     </a:p>
                   </a:txBody>
                   <a:tcPr marL="0" marR="0" marT="0" marB="0" anchor="ctr">
@@ -14875,17 +15062,23 @@
                     <a:bodyPr/>
                     <a:lstStyle/>
                     <a:p>
-                      <a:pPr algn="ctr">
-                        <a:defRPr sz="700" b="0">
-                          <a:solidFill>
-                            <a:srgbClr val="445474"/>
-                          </a:solidFill>
-                          <a:latin typeface="맑은 고딕"/>
-                        </a:defRPr>
-                      </a:pPr>
+                      <a:pPr algn="ctr" fontAlgn="ctr"/>
                       <a:r>
-                        <a:t>12.8</a:t>
+                        <a:rPr lang="en-US" altLang="ko-KR" sz="600" u="none" strike="noStrike" dirty="0">
+                          <a:effectLst/>
+                          <a:latin typeface="+mn-ea"/>
+                          <a:ea typeface="+mn-ea"/>
+                        </a:rPr>
+                        <a:t>0</a:t>
                       </a:r>
+                      <a:endParaRPr lang="en-US" altLang="ko-KR" sz="600" b="0" i="0" u="none" strike="noStrike" dirty="0">
+                        <a:solidFill>
+                          <a:srgbClr val="000000"/>
+                        </a:solidFill>
+                        <a:effectLst/>
+                        <a:latin typeface="+mn-ea"/>
+                        <a:ea typeface="+mn-ea"/>
+                      </a:endParaRPr>
                     </a:p>
                   </a:txBody>
                   <a:tcPr marL="0" marR="0" marT="0" marB="0" anchor="ctr">
@@ -15033,17 +15226,23 @@
                     <a:bodyPr/>
                     <a:lstStyle/>
                     <a:p>
-                      <a:pPr algn="ctr">
-                        <a:defRPr sz="700" b="0">
-                          <a:solidFill>
-                            <a:srgbClr val="445474"/>
-                          </a:solidFill>
-                          <a:latin typeface="맑은 고딕"/>
-                        </a:defRPr>
-                      </a:pPr>
+                      <a:pPr algn="ctr" fontAlgn="ctr"/>
                       <a:r>
-                        <a:t>68.7</a:t>
+                        <a:rPr lang="en-US" altLang="ko-KR" sz="600" u="none" strike="noStrike" dirty="0">
+                          <a:effectLst/>
+                          <a:latin typeface="+mn-ea"/>
+                          <a:ea typeface="+mn-ea"/>
+                        </a:rPr>
+                        <a:t>0</a:t>
                       </a:r>
+                      <a:endParaRPr lang="en-US" altLang="ko-KR" sz="600" b="0" i="0" u="none" strike="noStrike" dirty="0">
+                        <a:solidFill>
+                          <a:srgbClr val="000000"/>
+                        </a:solidFill>
+                        <a:effectLst/>
+                        <a:latin typeface="+mn-ea"/>
+                        <a:ea typeface="+mn-ea"/>
+                      </a:endParaRPr>
                     </a:p>
                   </a:txBody>
                   <a:tcPr marL="0" marR="0" marT="0" marB="0" anchor="ctr">
@@ -15191,17 +15390,23 @@
                     <a:bodyPr/>
                     <a:lstStyle/>
                     <a:p>
-                      <a:pPr algn="ctr">
-                        <a:defRPr sz="700" b="0">
-                          <a:solidFill>
-                            <a:srgbClr val="445474"/>
-                          </a:solidFill>
-                          <a:latin typeface="맑은 고딕"/>
-                        </a:defRPr>
-                      </a:pPr>
+                      <a:pPr algn="ctr" fontAlgn="ctr"/>
                       <a:r>
-                        <a:t>31</a:t>
+                        <a:rPr lang="en-US" altLang="ko-KR" sz="600" u="none" strike="noStrike" dirty="0">
+                          <a:effectLst/>
+                          <a:latin typeface="+mn-ea"/>
+                          <a:ea typeface="+mn-ea"/>
+                        </a:rPr>
+                        <a:t>0</a:t>
                       </a:r>
+                      <a:endParaRPr lang="en-US" altLang="ko-KR" sz="600" b="0" i="0" u="none" strike="noStrike" dirty="0">
+                        <a:solidFill>
+                          <a:srgbClr val="000000"/>
+                        </a:solidFill>
+                        <a:effectLst/>
+                        <a:latin typeface="+mn-ea"/>
+                        <a:ea typeface="+mn-ea"/>
+                      </a:endParaRPr>
                     </a:p>
                   </a:txBody>
                   <a:tcPr marL="0" marR="0" marT="0" marB="0" anchor="ctr">
@@ -15349,17 +15554,23 @@
                     <a:bodyPr/>
                     <a:lstStyle/>
                     <a:p>
-                      <a:pPr algn="ctr">
-                        <a:defRPr sz="700" b="0">
-                          <a:solidFill>
-                            <a:srgbClr val="445474"/>
-                          </a:solidFill>
-                          <a:latin typeface="맑은 고딕"/>
-                        </a:defRPr>
-                      </a:pPr>
+                      <a:pPr algn="ctr" fontAlgn="ctr"/>
                       <a:r>
-                        <a:t>55.2</a:t>
+                        <a:rPr lang="en-US" altLang="ko-KR" sz="600" u="none" strike="noStrike" dirty="0">
+                          <a:effectLst/>
+                          <a:latin typeface="+mn-ea"/>
+                          <a:ea typeface="+mn-ea"/>
+                        </a:rPr>
+                        <a:t>0</a:t>
                       </a:r>
+                      <a:endParaRPr lang="en-US" altLang="ko-KR" sz="600" b="0" i="0" u="none" strike="noStrike" dirty="0">
+                        <a:solidFill>
+                          <a:srgbClr val="000000"/>
+                        </a:solidFill>
+                        <a:effectLst/>
+                        <a:latin typeface="+mn-ea"/>
+                        <a:ea typeface="+mn-ea"/>
+                      </a:endParaRPr>
                     </a:p>
                   </a:txBody>
                   <a:tcPr marL="0" marR="0" marT="0" marB="0" anchor="ctr">
@@ -15510,17 +15721,23 @@
                     <a:bodyPr/>
                     <a:lstStyle/>
                     <a:p>
-                      <a:pPr algn="ctr">
-                        <a:defRPr sz="700" b="0">
-                          <a:solidFill>
-                            <a:srgbClr val="445474"/>
-                          </a:solidFill>
-                          <a:latin typeface="맑은 고딕"/>
-                        </a:defRPr>
-                      </a:pPr>
+                      <a:pPr algn="ctr" fontAlgn="ctr"/>
                       <a:r>
-                        <a:t>94.8</a:t>
+                        <a:rPr lang="en-US" altLang="ko-KR" sz="600" u="none" strike="noStrike" dirty="0">
+                          <a:effectLst/>
+                          <a:latin typeface="+mn-ea"/>
+                          <a:ea typeface="+mn-ea"/>
+                        </a:rPr>
+                        <a:t>0</a:t>
                       </a:r>
+                      <a:endParaRPr lang="en-US" altLang="ko-KR" sz="600" b="0" i="0" u="none" strike="noStrike" dirty="0">
+                        <a:solidFill>
+                          <a:srgbClr val="000000"/>
+                        </a:solidFill>
+                        <a:effectLst/>
+                        <a:latin typeface="+mn-ea"/>
+                        <a:ea typeface="+mn-ea"/>
+                      </a:endParaRPr>
                     </a:p>
                   </a:txBody>
                   <a:tcPr marL="0" marR="0" marT="0" marB="0" anchor="ctr">
@@ -15668,17 +15885,23 @@
                     <a:bodyPr/>
                     <a:lstStyle/>
                     <a:p>
-                      <a:pPr algn="ctr">
-                        <a:defRPr sz="700" b="0">
-                          <a:solidFill>
-                            <a:srgbClr val="445474"/>
-                          </a:solidFill>
-                          <a:latin typeface="맑은 고딕"/>
-                        </a:defRPr>
-                      </a:pPr>
+                      <a:pPr algn="ctr" fontAlgn="ctr"/>
                       <a:r>
-                        <a:t>80.4</a:t>
+                        <a:rPr lang="en-US" altLang="ko-KR" sz="600" u="none" strike="noStrike" dirty="0">
+                          <a:effectLst/>
+                          <a:latin typeface="+mn-ea"/>
+                          <a:ea typeface="+mn-ea"/>
+                        </a:rPr>
+                        <a:t>0</a:t>
                       </a:r>
+                      <a:endParaRPr lang="en-US" altLang="ko-KR" sz="600" b="0" i="0" u="none" strike="noStrike" dirty="0">
+                        <a:solidFill>
+                          <a:srgbClr val="000000"/>
+                        </a:solidFill>
+                        <a:effectLst/>
+                        <a:latin typeface="+mn-ea"/>
+                        <a:ea typeface="+mn-ea"/>
+                      </a:endParaRPr>
                     </a:p>
                   </a:txBody>
                   <a:tcPr marL="0" marR="0" marT="0" marB="0" anchor="ctr">
@@ -15826,17 +16049,23 @@
                     <a:bodyPr/>
                     <a:lstStyle/>
                     <a:p>
-                      <a:pPr algn="ctr">
-                        <a:defRPr sz="700" b="0">
-                          <a:solidFill>
-                            <a:srgbClr val="445474"/>
-                          </a:solidFill>
-                          <a:latin typeface="맑은 고딕"/>
-                        </a:defRPr>
-                      </a:pPr>
+                      <a:pPr algn="ctr" fontAlgn="ctr"/>
                       <a:r>
-                        <a:t>40.3</a:t>
+                        <a:rPr lang="en-US" altLang="ko-KR" sz="600" u="none" strike="noStrike">
+                          <a:effectLst/>
+                          <a:latin typeface="+mn-ea"/>
+                          <a:ea typeface="+mn-ea"/>
+                        </a:rPr>
+                        <a:t>0</a:t>
                       </a:r>
+                      <a:endParaRPr lang="en-US" altLang="ko-KR" sz="600" b="0" i="0" u="none" strike="noStrike">
+                        <a:solidFill>
+                          <a:srgbClr val="000000"/>
+                        </a:solidFill>
+                        <a:effectLst/>
+                        <a:latin typeface="+mn-ea"/>
+                        <a:ea typeface="+mn-ea"/>
+                      </a:endParaRPr>
                     </a:p>
                   </a:txBody>
                   <a:tcPr marL="0" marR="0" marT="0" marB="0" anchor="ctr">
@@ -15984,17 +16213,23 @@
                     <a:bodyPr/>
                     <a:lstStyle/>
                     <a:p>
-                      <a:pPr algn="ctr">
-                        <a:defRPr sz="700" b="0">
-                          <a:solidFill>
-                            <a:srgbClr val="445474"/>
-                          </a:solidFill>
-                          <a:latin typeface="맑은 고딕"/>
-                        </a:defRPr>
-                      </a:pPr>
+                      <a:pPr algn="ctr" fontAlgn="ctr"/>
                       <a:r>
-                        <a:t>166.7</a:t>
+                        <a:rPr lang="en-US" altLang="ko-KR" sz="600" u="none" strike="noStrike" dirty="0">
+                          <a:effectLst/>
+                          <a:latin typeface="+mn-ea"/>
+                          <a:ea typeface="+mn-ea"/>
+                        </a:rPr>
+                        <a:t>0</a:t>
                       </a:r>
+                      <a:endParaRPr lang="en-US" altLang="ko-KR" sz="600" b="0" i="0" u="none" strike="noStrike" dirty="0">
+                        <a:solidFill>
+                          <a:srgbClr val="000000"/>
+                        </a:solidFill>
+                        <a:effectLst/>
+                        <a:latin typeface="+mn-ea"/>
+                        <a:ea typeface="+mn-ea"/>
+                      </a:endParaRPr>
                     </a:p>
                   </a:txBody>
                   <a:tcPr marL="0" marR="0" marT="0" marB="0" anchor="ctr">
@@ -16142,17 +16377,23 @@
                     <a:bodyPr/>
                     <a:lstStyle/>
                     <a:p>
-                      <a:pPr algn="ctr">
-                        <a:defRPr sz="700" b="0">
-                          <a:solidFill>
-                            <a:srgbClr val="445474"/>
-                          </a:solidFill>
-                          <a:latin typeface="맑은 고딕"/>
-                        </a:defRPr>
-                      </a:pPr>
+                      <a:pPr algn="ctr" fontAlgn="ctr"/>
                       <a:r>
-                        <a:t>93.1</a:t>
+                        <a:rPr lang="en-US" altLang="ko-KR" sz="600" u="none" strike="noStrike" dirty="0">
+                          <a:effectLst/>
+                          <a:latin typeface="+mn-ea"/>
+                          <a:ea typeface="+mn-ea"/>
+                        </a:rPr>
+                        <a:t>0</a:t>
                       </a:r>
+                      <a:endParaRPr lang="en-US" altLang="ko-KR" sz="600" b="0" i="0" u="none" strike="noStrike" dirty="0">
+                        <a:solidFill>
+                          <a:srgbClr val="000000"/>
+                        </a:solidFill>
+                        <a:effectLst/>
+                        <a:latin typeface="+mn-ea"/>
+                        <a:ea typeface="+mn-ea"/>
+                      </a:endParaRPr>
                     </a:p>
                   </a:txBody>
                   <a:tcPr marL="0" marR="0" marT="0" marB="0" anchor="ctr">
@@ -16300,17 +16541,23 @@
                     <a:bodyPr/>
                     <a:lstStyle/>
                     <a:p>
-                      <a:pPr algn="ctr">
-                        <a:defRPr sz="700" b="0">
-                          <a:solidFill>
-                            <a:srgbClr val="445474"/>
-                          </a:solidFill>
-                          <a:latin typeface="맑은 고딕"/>
-                        </a:defRPr>
-                      </a:pPr>
+                      <a:pPr algn="ctr" fontAlgn="ctr"/>
                       <a:r>
-                        <a:t>97.4</a:t>
+                        <a:rPr lang="en-US" altLang="ko-KR" sz="600" u="none" strike="noStrike" dirty="0">
+                          <a:effectLst/>
+                          <a:latin typeface="+mn-ea"/>
+                          <a:ea typeface="+mn-ea"/>
+                        </a:rPr>
+                        <a:t>0</a:t>
                       </a:r>
+                      <a:endParaRPr lang="en-US" altLang="ko-KR" sz="600" b="0" i="0" u="none" strike="noStrike" dirty="0">
+                        <a:solidFill>
+                          <a:srgbClr val="000000"/>
+                        </a:solidFill>
+                        <a:effectLst/>
+                        <a:latin typeface="+mn-ea"/>
+                        <a:ea typeface="+mn-ea"/>
+                      </a:endParaRPr>
                     </a:p>
                   </a:txBody>
                   <a:tcPr marL="0" marR="0" marT="0" marB="0" anchor="ctr">
@@ -16458,17 +16705,23 @@
                     <a:bodyPr/>
                     <a:lstStyle/>
                     <a:p>
-                      <a:pPr algn="ctr">
-                        <a:defRPr sz="700" b="0">
-                          <a:solidFill>
-                            <a:srgbClr val="445474"/>
-                          </a:solidFill>
-                          <a:latin typeface="맑은 고딕"/>
-                        </a:defRPr>
-                      </a:pPr>
+                      <a:pPr algn="ctr" fontAlgn="ctr"/>
                       <a:r>
-                        <a:t>81.2</a:t>
+                        <a:rPr lang="en-US" altLang="ko-KR" sz="600" u="none" strike="noStrike">
+                          <a:effectLst/>
+                          <a:latin typeface="+mn-ea"/>
+                          <a:ea typeface="+mn-ea"/>
+                        </a:rPr>
+                        <a:t>0</a:t>
                       </a:r>
+                      <a:endParaRPr lang="en-US" altLang="ko-KR" sz="600" b="0" i="0" u="none" strike="noStrike">
+                        <a:solidFill>
+                          <a:srgbClr val="000000"/>
+                        </a:solidFill>
+                        <a:effectLst/>
+                        <a:latin typeface="+mn-ea"/>
+                        <a:ea typeface="+mn-ea"/>
+                      </a:endParaRPr>
                     </a:p>
                   </a:txBody>
                   <a:tcPr marL="0" marR="0" marT="0" marB="0" anchor="ctr">
@@ -16616,17 +16869,23 @@
                     <a:bodyPr/>
                     <a:lstStyle/>
                     <a:p>
-                      <a:pPr algn="ctr">
-                        <a:defRPr sz="700" b="0">
-                          <a:solidFill>
-                            <a:srgbClr val="445474"/>
-                          </a:solidFill>
-                          <a:latin typeface="맑은 고딕"/>
-                        </a:defRPr>
-                      </a:pPr>
+                      <a:pPr algn="ctr" fontAlgn="ctr"/>
                       <a:r>
-                        <a:t>-11.9</a:t>
+                        <a:rPr lang="en-US" altLang="ko-KR" sz="600" u="none" strike="noStrike" dirty="0">
+                          <a:effectLst/>
+                          <a:latin typeface="+mn-ea"/>
+                          <a:ea typeface="+mn-ea"/>
+                        </a:rPr>
+                        <a:t>0</a:t>
                       </a:r>
+                      <a:endParaRPr lang="en-US" altLang="ko-KR" sz="600" b="0" i="0" u="none" strike="noStrike" dirty="0">
+                        <a:solidFill>
+                          <a:srgbClr val="000000"/>
+                        </a:solidFill>
+                        <a:effectLst/>
+                        <a:latin typeface="+mn-ea"/>
+                        <a:ea typeface="+mn-ea"/>
+                      </a:endParaRPr>
                     </a:p>
                   </a:txBody>
                   <a:tcPr marL="0" marR="0" marT="0" marB="0" anchor="ctr">
@@ -16774,17 +17033,23 @@
                     <a:bodyPr/>
                     <a:lstStyle/>
                     <a:p>
-                      <a:pPr algn="ctr">
-                        <a:defRPr sz="700" b="0">
-                          <a:solidFill>
-                            <a:srgbClr val="445474"/>
-                          </a:solidFill>
-                          <a:latin typeface="맑은 고딕"/>
-                        </a:defRPr>
-                      </a:pPr>
+                      <a:pPr algn="ctr" fontAlgn="ctr"/>
                       <a:r>
-                        <a:t>104.3</a:t>
+                        <a:rPr lang="en-US" altLang="ko-KR" sz="600" u="none" strike="noStrike">
+                          <a:effectLst/>
+                          <a:latin typeface="+mn-ea"/>
+                          <a:ea typeface="+mn-ea"/>
+                        </a:rPr>
+                        <a:t>0</a:t>
                       </a:r>
+                      <a:endParaRPr lang="en-US" altLang="ko-KR" sz="600" b="0" i="0" u="none" strike="noStrike">
+                        <a:solidFill>
+                          <a:srgbClr val="000000"/>
+                        </a:solidFill>
+                        <a:effectLst/>
+                        <a:latin typeface="+mn-ea"/>
+                        <a:ea typeface="+mn-ea"/>
+                      </a:endParaRPr>
                     </a:p>
                   </a:txBody>
                   <a:tcPr marL="0" marR="0" marT="0" marB="0" anchor="ctr">
@@ -16932,17 +17197,23 @@
                     <a:bodyPr/>
                     <a:lstStyle/>
                     <a:p>
-                      <a:pPr algn="ctr">
-                        <a:defRPr sz="700" b="0">
-                          <a:solidFill>
-                            <a:srgbClr val="445474"/>
-                          </a:solidFill>
-                          <a:latin typeface="맑은 고딕"/>
-                        </a:defRPr>
-                      </a:pPr>
+                      <a:pPr algn="ctr" fontAlgn="ctr"/>
                       <a:r>
-                        <a:t>21.5</a:t>
+                        <a:rPr lang="en-US" altLang="ko-KR" sz="600" u="none" strike="noStrike">
+                          <a:effectLst/>
+                          <a:latin typeface="+mn-ea"/>
+                          <a:ea typeface="+mn-ea"/>
+                        </a:rPr>
+                        <a:t>0</a:t>
                       </a:r>
+                      <a:endParaRPr lang="en-US" altLang="ko-KR" sz="600" b="0" i="0" u="none" strike="noStrike">
+                        <a:solidFill>
+                          <a:srgbClr val="000000"/>
+                        </a:solidFill>
+                        <a:effectLst/>
+                        <a:latin typeface="+mn-ea"/>
+                        <a:ea typeface="+mn-ea"/>
+                      </a:endParaRPr>
                     </a:p>
                   </a:txBody>
                   <a:tcPr marL="0" marR="0" marT="0" marB="0" anchor="ctr">
@@ -17090,17 +17361,23 @@
                     <a:bodyPr/>
                     <a:lstStyle/>
                     <a:p>
-                      <a:pPr algn="ctr">
-                        <a:defRPr sz="700" b="0">
-                          <a:solidFill>
-                            <a:srgbClr val="445474"/>
-                          </a:solidFill>
-                          <a:latin typeface="맑은 고딕"/>
-                        </a:defRPr>
-                      </a:pPr>
+                      <a:pPr algn="ctr" fontAlgn="ctr"/>
                       <a:r>
-                        <a:t>147.1</a:t>
+                        <a:rPr lang="en-US" altLang="ko-KR" sz="600" u="none" strike="noStrike" dirty="0">
+                          <a:effectLst/>
+                          <a:latin typeface="+mn-ea"/>
+                          <a:ea typeface="+mn-ea"/>
+                        </a:rPr>
+                        <a:t>0</a:t>
                       </a:r>
+                      <a:endParaRPr lang="en-US" altLang="ko-KR" sz="600" b="0" i="0" u="none" strike="noStrike" dirty="0">
+                        <a:solidFill>
+                          <a:srgbClr val="000000"/>
+                        </a:solidFill>
+                        <a:effectLst/>
+                        <a:latin typeface="+mn-ea"/>
+                        <a:ea typeface="+mn-ea"/>
+                      </a:endParaRPr>
                     </a:p>
                   </a:txBody>
                   <a:tcPr marL="0" marR="0" marT="0" marB="0" anchor="ctr">
@@ -17248,17 +17525,23 @@
                     <a:bodyPr/>
                     <a:lstStyle/>
                     <a:p>
-                      <a:pPr algn="ctr">
-                        <a:defRPr sz="700" b="0">
-                          <a:solidFill>
-                            <a:srgbClr val="445474"/>
-                          </a:solidFill>
-                          <a:latin typeface="맑은 고딕"/>
-                        </a:defRPr>
-                      </a:pPr>
+                      <a:pPr algn="ctr" fontAlgn="ctr"/>
                       <a:r>
-                        <a:t>139.7</a:t>
+                        <a:rPr lang="en-US" altLang="ko-KR" sz="600" u="none" strike="noStrike" dirty="0">
+                          <a:effectLst/>
+                          <a:latin typeface="+mn-ea"/>
+                          <a:ea typeface="+mn-ea"/>
+                        </a:rPr>
+                        <a:t>0</a:t>
                       </a:r>
+                      <a:endParaRPr lang="en-US" altLang="ko-KR" sz="600" b="0" i="0" u="none" strike="noStrike" dirty="0">
+                        <a:solidFill>
+                          <a:srgbClr val="000000"/>
+                        </a:solidFill>
+                        <a:effectLst/>
+                        <a:latin typeface="+mn-ea"/>
+                        <a:ea typeface="+mn-ea"/>
+                      </a:endParaRPr>
                     </a:p>
                   </a:txBody>
                   <a:tcPr marL="0" marR="0" marT="0" marB="0" anchor="ctr">
@@ -17406,17 +17689,23 @@
                     <a:bodyPr/>
                     <a:lstStyle/>
                     <a:p>
-                      <a:pPr algn="ctr">
-                        <a:defRPr sz="700" b="0">
-                          <a:solidFill>
-                            <a:srgbClr val="445474"/>
-                          </a:solidFill>
-                          <a:latin typeface="맑은 고딕"/>
-                        </a:defRPr>
-                      </a:pPr>
+                      <a:pPr algn="ctr" fontAlgn="ctr"/>
                       <a:r>
-                        <a:t>139.2</a:t>
+                        <a:rPr lang="en-US" altLang="ko-KR" sz="600" u="none" strike="noStrike" dirty="0">
+                          <a:effectLst/>
+                          <a:latin typeface="+mn-ea"/>
+                          <a:ea typeface="+mn-ea"/>
+                        </a:rPr>
+                        <a:t>0</a:t>
                       </a:r>
+                      <a:endParaRPr lang="en-US" altLang="ko-KR" sz="600" b="0" i="0" u="none" strike="noStrike" dirty="0">
+                        <a:solidFill>
+                          <a:srgbClr val="000000"/>
+                        </a:solidFill>
+                        <a:effectLst/>
+                        <a:latin typeface="+mn-ea"/>
+                        <a:ea typeface="+mn-ea"/>
+                      </a:endParaRPr>
                     </a:p>
                   </a:txBody>
                   <a:tcPr marL="0" marR="0" marT="0" marB="0" anchor="ctr">
@@ -17564,17 +17853,23 @@
                     <a:bodyPr/>
                     <a:lstStyle/>
                     <a:p>
-                      <a:pPr algn="ctr">
-                        <a:defRPr sz="700" b="0">
-                          <a:solidFill>
-                            <a:srgbClr val="445474"/>
-                          </a:solidFill>
-                          <a:latin typeface="맑은 고딕"/>
-                        </a:defRPr>
-                      </a:pPr>
+                      <a:pPr algn="ctr" fontAlgn="ctr"/>
                       <a:r>
-                        <a:t>-93</a:t>
+                        <a:rPr lang="en-US" altLang="ko-KR" sz="600" u="none" strike="noStrike">
+                          <a:effectLst/>
+                          <a:latin typeface="+mn-ea"/>
+                          <a:ea typeface="+mn-ea"/>
+                        </a:rPr>
+                        <a:t>0</a:t>
                       </a:r>
+                      <a:endParaRPr lang="en-US" altLang="ko-KR" sz="600" b="0" i="0" u="none" strike="noStrike">
+                        <a:solidFill>
+                          <a:srgbClr val="000000"/>
+                        </a:solidFill>
+                        <a:effectLst/>
+                        <a:latin typeface="+mn-ea"/>
+                        <a:ea typeface="+mn-ea"/>
+                      </a:endParaRPr>
                     </a:p>
                   </a:txBody>
                   <a:tcPr marL="0" marR="0" marT="0" marB="0" anchor="ctr">
@@ -17730,17 +18025,23 @@
                     <a:bodyPr/>
                     <a:lstStyle/>
                     <a:p>
-                      <a:pPr algn="ctr">
-                        <a:defRPr sz="700" b="0">
-                          <a:solidFill>
-                            <a:srgbClr val="445474"/>
-                          </a:solidFill>
-                          <a:latin typeface="맑은 고딕"/>
-                        </a:defRPr>
-                      </a:pPr>
+                      <a:pPr algn="ctr" fontAlgn="ctr"/>
                       <a:r>
-                        <a:t>78</a:t>
+                        <a:rPr lang="en-US" altLang="ko-KR" sz="600" u="none" strike="noStrike" dirty="0">
+                          <a:effectLst/>
+                          <a:latin typeface="+mn-ea"/>
+                          <a:ea typeface="+mn-ea"/>
+                        </a:rPr>
+                        <a:t>0</a:t>
                       </a:r>
+                      <a:endParaRPr lang="en-US" altLang="ko-KR" sz="600" b="0" i="0" u="none" strike="noStrike" dirty="0">
+                        <a:solidFill>
+                          <a:srgbClr val="000000"/>
+                        </a:solidFill>
+                        <a:effectLst/>
+                        <a:latin typeface="+mn-ea"/>
+                        <a:ea typeface="+mn-ea"/>
+                      </a:endParaRPr>
                     </a:p>
                   </a:txBody>
                   <a:tcPr marL="0" marR="0" marT="0" marB="0" anchor="ctr">
@@ -17888,17 +18189,23 @@
                     <a:bodyPr/>
                     <a:lstStyle/>
                     <a:p>
-                      <a:pPr algn="ctr">
-                        <a:defRPr sz="700" b="0">
-                          <a:solidFill>
-                            <a:srgbClr val="445474"/>
-                          </a:solidFill>
-                          <a:latin typeface="맑은 고딕"/>
-                        </a:defRPr>
-                      </a:pPr>
+                      <a:pPr algn="ctr" fontAlgn="ctr"/>
                       <a:r>
-                        <a:t>26.5</a:t>
+                        <a:rPr lang="en-US" altLang="ko-KR" sz="600" u="none" strike="noStrike" dirty="0">
+                          <a:effectLst/>
+                          <a:latin typeface="+mn-ea"/>
+                          <a:ea typeface="+mn-ea"/>
+                        </a:rPr>
+                        <a:t>0</a:t>
                       </a:r>
+                      <a:endParaRPr lang="en-US" altLang="ko-KR" sz="600" b="0" i="0" u="none" strike="noStrike" dirty="0">
+                        <a:solidFill>
+                          <a:srgbClr val="000000"/>
+                        </a:solidFill>
+                        <a:effectLst/>
+                        <a:latin typeface="+mn-ea"/>
+                        <a:ea typeface="+mn-ea"/>
+                      </a:endParaRPr>
                     </a:p>
                   </a:txBody>
                   <a:tcPr marL="0" marR="0" marT="0" marB="0" anchor="ctr">
@@ -18046,17 +18353,23 @@
                     <a:bodyPr/>
                     <a:lstStyle/>
                     <a:p>
-                      <a:pPr algn="ctr">
-                        <a:defRPr sz="700" b="0">
-                          <a:solidFill>
-                            <a:srgbClr val="445474"/>
-                          </a:solidFill>
-                          <a:latin typeface="맑은 고딕"/>
-                        </a:defRPr>
-                      </a:pPr>
+                      <a:pPr algn="ctr" fontAlgn="ctr"/>
                       <a:r>
-                        <a:t>166.5</a:t>
+                        <a:rPr lang="en-US" altLang="ko-KR" sz="600" u="none" strike="noStrike" dirty="0">
+                          <a:effectLst/>
+                          <a:latin typeface="+mn-ea"/>
+                          <a:ea typeface="+mn-ea"/>
+                        </a:rPr>
+                        <a:t>0</a:t>
                       </a:r>
+                      <a:endParaRPr lang="en-US" altLang="ko-KR" sz="600" b="0" i="0" u="none" strike="noStrike" dirty="0">
+                        <a:solidFill>
+                          <a:srgbClr val="000000"/>
+                        </a:solidFill>
+                        <a:effectLst/>
+                        <a:latin typeface="+mn-ea"/>
+                        <a:ea typeface="+mn-ea"/>
+                      </a:endParaRPr>
                     </a:p>
                   </a:txBody>
                   <a:tcPr marL="0" marR="0" marT="0" marB="0" anchor="ctr">
@@ -18174,12 +18487,11 @@
           <a:bodyPr rtlCol="0" anchor="ctr"/>
           <a:lstStyle/>
           <a:p>
-            <a:pPr algn="ctr">
-              <a:defRPr sz="1300" b="1">
-                <a:latin typeface="맑은 고딕"/>
-              </a:defRPr>
-            </a:pPr>
-            <a:r>
+            <a:r>
+              <a:rPr lang="en-US" altLang="ko-KR" sz="1400" b="1" dirty="0">
+                <a:latin typeface="+mj-ea"/>
+                <a:ea typeface="+mj-ea"/>
+              </a:rPr>
               <a:t>C/C &amp; Main problem</a:t>
             </a:r>
           </a:p>
@@ -18234,12 +18546,11 @@
           <a:bodyPr rtlCol="0" anchor="ctr"/>
           <a:lstStyle/>
           <a:p>
-            <a:pPr algn="ctr">
-              <a:defRPr sz="1300" b="1">
-                <a:latin typeface="맑은 고딕"/>
-              </a:defRPr>
-            </a:pPr>
-            <a:r>
+            <a:r>
+              <a:rPr lang="en-US" altLang="ko-KR" sz="1200" b="1" dirty="0">
+                <a:latin typeface="+mj-ea"/>
+                <a:ea typeface="+mj-ea"/>
+              </a:rPr>
               <a:t>MPH:</a:t>
             </a:r>
           </a:p>
@@ -18333,13 +18644,16 @@
           </a:bodyPr>
           <a:lstStyle/>
           <a:p>
-            <a:pPr algn="ctr">
-              <a:defRPr sz="1300" b="1">
-                <a:latin typeface="맑은 고딕"/>
-              </a:defRPr>
-            </a:pPr>
-            <a:r>
-              <a:t>HGI:5.22</a:t>
+            <a:pPr eaLnBrk="1" hangingPunct="1"/>
+            <a:r>
+              <a:rPr lang="en-US" altLang="ko-KR" sz="1400" b="1" dirty="0">
+                <a:solidFill>
+                  <a:srgbClr val="000000"/>
+                </a:solidFill>
+                <a:latin typeface="+mn-ea"/>
+                <a:cs typeface="Times New Roman Bold" panose="02020803070505020304" pitchFamily="18" charset="0"/>
+              </a:rPr>
+              <a:t>HGI:+</a:t>
             </a:r>
           </a:p>
         </p:txBody>
@@ -18423,13 +18737,16 @@
           </a:bodyPr>
           <a:lstStyle/>
           <a:p>
-            <a:pPr algn="ctr">
-              <a:defRPr sz="1300" b="1">
-                <a:latin typeface="맑은 고딕"/>
-              </a:defRPr>
-            </a:pPr>
-            <a:r>
-              <a:t>VGI:61.3</a:t>
+            <a:pPr eaLnBrk="1" hangingPunct="1"/>
+            <a:r>
+              <a:rPr lang="en-US" altLang="ko-KR" sz="1400" b="1" dirty="0">
+                <a:solidFill>
+                  <a:srgbClr val="000000"/>
+                </a:solidFill>
+                <a:latin typeface="+mn-ea"/>
+                <a:cs typeface="Times New Roman Bold" panose="02020803070505020304" pitchFamily="18" charset="0"/>
+              </a:rPr>
+              <a:t>VGI:+</a:t>
             </a:r>
           </a:p>
         </p:txBody>
@@ -18755,13 +19072,16 @@
           </a:bodyPr>
           <a:lstStyle/>
           <a:p>
-            <a:pPr algn="ctr">
-              <a:defRPr sz="1300" b="1">
-                <a:latin typeface="맑은 고딕"/>
-              </a:defRPr>
-            </a:pPr>
-            <a:r>
-              <a:t>IAPDI:165.0</a:t>
+            <a:pPr algn="ctr" eaLnBrk="1" hangingPunct="1"/>
+            <a:r>
+              <a:rPr lang="en-US" altLang="ko-KR" sz="1300" b="1" dirty="0">
+                <a:solidFill>
+                  <a:srgbClr val="000000"/>
+                </a:solidFill>
+                <a:latin typeface="+mn-ea"/>
+                <a:cs typeface="Times New Roman Bold" panose="02020803070505020304" pitchFamily="18" charset="0"/>
+              </a:rPr>
+              <a:t>IAPDI:</a:t>
             </a:r>
           </a:p>
         </p:txBody>
@@ -18975,13 +19295,16 @@
           </a:bodyPr>
           <a:lstStyle/>
           <a:p>
-            <a:pPr algn="ctr">
-              <a:defRPr sz="1300" b="1">
-                <a:latin typeface="맑은 고딕"/>
-              </a:defRPr>
-            </a:pPr>
-            <a:r>
-              <a:t>2APDL:-110.8</a:t>
+            <a:pPr eaLnBrk="1" hangingPunct="1"/>
+            <a:r>
+              <a:rPr lang="en-US" altLang="ko-KR" sz="1300" b="1" dirty="0">
+                <a:solidFill>
+                  <a:srgbClr val="000000"/>
+                </a:solidFill>
+                <a:latin typeface="+mn-ea"/>
+                <a:cs typeface="Times New Roman Bold" panose="02020803070505020304" pitchFamily="18" charset="0"/>
+              </a:rPr>
+              <a:t>2APDL:</a:t>
             </a:r>
           </a:p>
         </p:txBody>
@@ -19014,13 +19337,16 @@
           </a:bodyPr>
           <a:lstStyle/>
           <a:p>
-            <a:pPr algn="ctr">
-              <a:defRPr sz="1300" b="1">
-                <a:latin typeface="맑은 고딕"/>
-              </a:defRPr>
-            </a:pPr>
-            <a:r>
-              <a:t>IODI:-0.06</a:t>
+            <a:pPr eaLnBrk="1" hangingPunct="1"/>
+            <a:r>
+              <a:rPr lang="en-US" altLang="ko-KR" sz="1300" b="1" dirty="0">
+                <a:solidFill>
+                  <a:srgbClr val="000000"/>
+                </a:solidFill>
+                <a:latin typeface="+mn-ea"/>
+                <a:cs typeface="Times New Roman Bold" panose="02020803070505020304" pitchFamily="18" charset="0"/>
+              </a:rPr>
+              <a:t>IODI:</a:t>
             </a:r>
           </a:p>
         </p:txBody>
@@ -19096,13 +19422,16 @@
           </a:bodyPr>
           <a:lstStyle/>
           <a:p>
-            <a:pPr algn="ctr">
-              <a:defRPr sz="1300" b="1">
-                <a:latin typeface="맑은 고딕"/>
-              </a:defRPr>
-            </a:pPr>
-            <a:r>
-              <a:t>VDL:80.76</a:t>
+            <a:pPr eaLnBrk="1" hangingPunct="1"/>
+            <a:r>
+              <a:rPr lang="en-US" altLang="ko-KR" sz="1300" b="1" dirty="0">
+                <a:solidFill>
+                  <a:srgbClr val="000000"/>
+                </a:solidFill>
+                <a:latin typeface="+mn-ea"/>
+                <a:cs typeface="Times New Roman Bold" panose="02020803070505020304" pitchFamily="18" charset="0"/>
+              </a:rPr>
+              <a:t>VDL:</a:t>
             </a:r>
           </a:p>
         </p:txBody>
@@ -19178,14 +19507,34 @@
           </a:bodyPr>
           <a:lstStyle/>
           <a:p>
-            <a:pPr algn="ctr">
-              <a:defRPr sz="1300" b="1">
-                <a:latin typeface="맑은 고딕"/>
-              </a:defRPr>
-            </a:pPr>
-            <a:r>
-              <a:t>CEPH RESULT</a:t>
-            </a:r>
+            <a:pPr eaLnBrk="1" hangingPunct="1"/>
+            <a:r>
+              <a:rPr lang="en-US" altLang="ko-KR" sz="1400" b="1" dirty="0">
+                <a:solidFill>
+                  <a:srgbClr val="000000"/>
+                </a:solidFill>
+                <a:latin typeface="+mn-ea"/>
+                <a:cs typeface="Times New Roman Bold" panose="02020803070505020304" pitchFamily="18" charset="0"/>
+              </a:rPr>
+              <a:t>CEPH </a:t>
+            </a:r>
+            <a:r>
+              <a:rPr lang="ko-KR" altLang="en-US" sz="1400" b="1" dirty="0">
+                <a:solidFill>
+                  <a:srgbClr val="000000"/>
+                </a:solidFill>
+                <a:latin typeface="+mn-ea"/>
+                <a:cs typeface="Times New Roman Bold" panose="02020803070505020304" pitchFamily="18" charset="0"/>
+              </a:rPr>
+              <a:t>데이터</a:t>
+            </a:r>
+            <a:endParaRPr lang="en-US" altLang="ko-KR" sz="1400" b="1" dirty="0">
+              <a:solidFill>
+                <a:srgbClr val="000000"/>
+              </a:solidFill>
+              <a:latin typeface="+mn-ea"/>
+              <a:cs typeface="Times New Roman Bold" panose="02020803070505020304" pitchFamily="18" charset="0"/>
+            </a:endParaRPr>
           </a:p>
         </p:txBody>
       </p:sp>
@@ -19217,13 +19566,16 @@
           </a:bodyPr>
           <a:lstStyle/>
           <a:p>
-            <a:pPr algn="ctr">
-              <a:defRPr sz="1300" b="1">
-                <a:latin typeface="맑은 고딕"/>
-              </a:defRPr>
-            </a:pPr>
-            <a:r>
-              <a:t>CFD:28.06</a:t>
+            <a:pPr eaLnBrk="1" hangingPunct="1"/>
+            <a:r>
+              <a:rPr lang="en-US" altLang="ko-KR" sz="1400" b="1" dirty="0">
+                <a:solidFill>
+                  <a:srgbClr val="000000"/>
+                </a:solidFill>
+                <a:latin typeface="+mn-ea"/>
+                <a:cs typeface="Times New Roman Bold" panose="02020803070505020304" pitchFamily="18" charset="0"/>
+              </a:rPr>
+              <a:t>CFD:</a:t>
             </a:r>
           </a:p>
         </p:txBody>
@@ -19256,12 +19608,15 @@
           </a:bodyPr>
           <a:lstStyle/>
           <a:p>
-            <a:pPr algn="ctr">
-              <a:defRPr sz="1300" b="1">
-                <a:latin typeface="맑은 고딕"/>
-              </a:defRPr>
-            </a:pPr>
-            <a:r>
+            <a:pPr eaLnBrk="1" hangingPunct="1"/>
+            <a:r>
+              <a:rPr lang="en-US" altLang="ko-KR" sz="1600" b="1" dirty="0">
+                <a:solidFill>
+                  <a:srgbClr val="000000"/>
+                </a:solidFill>
+                <a:latin typeface="+mn-ea"/>
+                <a:cs typeface="Times New Roman Bold" panose="02020803070505020304" pitchFamily="18" charset="0"/>
+              </a:rPr>
               <a:t>Extraction:</a:t>
             </a:r>
           </a:p>
@@ -19314,30 +19669,6 @@
           </a:p>
         </p:txBody>
       </p:sp>
-      <p:pic>
-        <p:nvPicPr>
-          <p:cNvPr id="3170" name="Picture 3169" descr="oral_default.jpg"/>
-          <p:cNvPicPr>
-            <a:picLocks noChangeAspect="1"/>
-          </p:cNvPicPr>
-          <p:nvPr/>
-        </p:nvPicPr>
-        <p:blipFill>
-          <a:blip r:embed="rId2"/>
-          <a:stretch>
-            <a:fillRect/>
-          </a:stretch>
-        </p:blipFill>
-        <p:spPr>
-          <a:xfrm>
-            <a:off x="2468880" y="502920"/>
-            <a:ext cx="1463040" cy="1005840"/>
-          </a:xfrm>
-          <a:prstGeom prst="rect">
-            <a:avLst/>
-          </a:prstGeom>
-        </p:spPr>
-      </p:pic>
     </p:spTree>
     <p:extLst>
       <p:ext uri="{BB962C8B-B14F-4D97-AF65-F5344CB8AC3E}">
@@ -28877,7 +29208,7 @@
       </p:grpSpPr>
       <p:pic>
         <p:nvPicPr>
-          <p:cNvPr id="2" name="Picture 1" descr="psa.jpg"/>
+          <p:cNvPr id="2" name="Picture 1" descr="default_image.jpg"/>
           <p:cNvPicPr>
             <a:picLocks noChangeAspect="1"/>
           </p:cNvPicPr>
@@ -28891,8 +29222,8 @@
         </p:blipFill>
         <p:spPr>
           <a:xfrm>
-            <a:off x="305335" y="0"/>
-            <a:ext cx="8533328" cy="6858000"/>
+            <a:off x="2275973" y="0"/>
+            <a:ext cx="4592052" cy="6858000"/>
           </a:xfrm>
           <a:prstGeom prst="rect">
             <a:avLst/>
@@ -29357,7 +29688,7 @@
       </p:grpSpPr>
       <p:pic>
         <p:nvPicPr>
-          <p:cNvPr id="2" name="Picture 1" descr="lateral_ceph.jpg"/>
+          <p:cNvPr id="2" name="Picture 1" descr="default_image.jpg"/>
           <p:cNvPicPr>
             <a:picLocks noChangeAspect="1"/>
           </p:cNvPicPr>
@@ -29371,8 +29702,8 @@
         </p:blipFill>
         <p:spPr>
           <a:xfrm>
-            <a:off x="311348" y="0"/>
-            <a:ext cx="8521302" cy="6858000"/>
+            <a:off x="2275973" y="0"/>
+            <a:ext cx="4592052" cy="6858000"/>
           </a:xfrm>
           <a:prstGeom prst="rect">
             <a:avLst/>
@@ -29465,7 +29796,7 @@
       </p:grpSpPr>
       <p:pic>
         <p:nvPicPr>
-          <p:cNvPr id="2" name="Picture 1" descr="posture_default.jpg"/>
+          <p:cNvPr id="2" name="Picture 1" descr="posturePhoto_1.jpg"/>
           <p:cNvPicPr>
             <a:picLocks noChangeAspect="1"/>
           </p:cNvPicPr>
@@ -29489,22 +29820,22 @@
       </p:pic>
       <p:pic>
         <p:nvPicPr>
-          <p:cNvPr id="3" name="Picture 2" descr="posture_default.jpg"/>
+          <p:cNvPr id="3" name="Picture 2" descr="posturePhoto_2.jpg"/>
           <p:cNvPicPr>
             <a:picLocks noChangeAspect="1"/>
           </p:cNvPicPr>
           <p:nvPr/>
         </p:nvPicPr>
         <p:blipFill>
-          <a:blip r:embed="rId2"/>
+          <a:blip r:embed="rId3"/>
           <a:stretch>
             <a:fillRect/>
           </a:stretch>
         </p:blipFill>
         <p:spPr>
           <a:xfrm>
-            <a:off x="2514600" y="2057400"/>
-            <a:ext cx="2057400" cy="2743200"/>
+            <a:off x="2514600" y="2743200"/>
+            <a:ext cx="2057400" cy="1371600"/>
           </a:xfrm>
           <a:prstGeom prst="rect">
             <a:avLst/>
@@ -29513,22 +29844,22 @@
       </p:pic>
       <p:pic>
         <p:nvPicPr>
-          <p:cNvPr id="4" name="Picture 3" descr="posture_default.jpg"/>
+          <p:cNvPr id="4" name="Picture 3" descr="posturePhoto_3.jpg"/>
           <p:cNvPicPr>
             <a:picLocks noChangeAspect="1"/>
           </p:cNvPicPr>
           <p:nvPr/>
         </p:nvPicPr>
         <p:blipFill>
-          <a:blip r:embed="rId2"/>
+          <a:blip r:embed="rId4"/>
           <a:stretch>
             <a:fillRect/>
           </a:stretch>
         </p:blipFill>
         <p:spPr>
           <a:xfrm>
-            <a:off x="4572000" y="2057400"/>
-            <a:ext cx="2057400" cy="2743200"/>
+            <a:off x="4572000" y="2601095"/>
+            <a:ext cx="2057400" cy="1655809"/>
           </a:xfrm>
           <a:prstGeom prst="rect">
             <a:avLst/>
@@ -29544,7 +29875,7 @@
           <p:nvPr/>
         </p:nvPicPr>
         <p:blipFill>
-          <a:blip r:embed="rId2"/>
+          <a:blip r:embed="rId5"/>
           <a:stretch>
             <a:fillRect/>
           </a:stretch>
@@ -29615,22 +29946,22 @@
       </p:pic>
       <p:pic>
         <p:nvPicPr>
-          <p:cNvPr id="3" name="Picture 2" descr="posture_default.jpg"/>
+          <p:cNvPr id="3" name="Picture 2" descr="posturePhoto_7.jpg"/>
           <p:cNvPicPr>
             <a:picLocks noChangeAspect="1"/>
           </p:cNvPicPr>
           <p:nvPr/>
         </p:nvPicPr>
         <p:blipFill>
-          <a:blip r:embed="rId2"/>
+          <a:blip r:embed="rId3"/>
           <a:stretch>
             <a:fillRect/>
           </a:stretch>
         </p:blipFill>
         <p:spPr>
           <a:xfrm>
-            <a:off x="2514600" y="2057400"/>
-            <a:ext cx="2057400" cy="2743200"/>
+            <a:off x="4572000" y="2657475"/>
+            <a:ext cx="2057400" cy="1543050"/>
           </a:xfrm>
           <a:prstGeom prst="rect">
             <a:avLst/>
@@ -29639,46 +29970,22 @@
       </p:pic>
       <p:pic>
         <p:nvPicPr>
-          <p:cNvPr id="4" name="Picture 3" descr="posture_default.jpg"/>
+          <p:cNvPr id="4" name="Picture 3" descr="posturePhoto_8.jpg"/>
           <p:cNvPicPr>
             <a:picLocks noChangeAspect="1"/>
           </p:cNvPicPr>
           <p:nvPr/>
         </p:nvPicPr>
         <p:blipFill>
-          <a:blip r:embed="rId2"/>
+          <a:blip r:embed="rId4"/>
           <a:stretch>
             <a:fillRect/>
           </a:stretch>
         </p:blipFill>
         <p:spPr>
           <a:xfrm>
-            <a:off x="4572000" y="2057400"/>
-            <a:ext cx="2057400" cy="2743200"/>
-          </a:xfrm>
-          <a:prstGeom prst="rect">
-            <a:avLst/>
-          </a:prstGeom>
-        </p:spPr>
-      </p:pic>
-      <p:pic>
-        <p:nvPicPr>
-          <p:cNvPr id="5" name="Picture 4" descr="posture_default.jpg"/>
-          <p:cNvPicPr>
-            <a:picLocks noChangeAspect="1"/>
-          </p:cNvPicPr>
-          <p:nvPr/>
-        </p:nvPicPr>
-        <p:blipFill>
-          <a:blip r:embed="rId2"/>
-          <a:stretch>
-            <a:fillRect/>
-          </a:stretch>
-        </p:blipFill>
-        <p:spPr>
-          <a:xfrm>
-            <a:off x="6629400" y="2057400"/>
-            <a:ext cx="2057400" cy="2743200"/>
+            <a:off x="6629400" y="2602262"/>
+            <a:ext cx="2057400" cy="1653475"/>
           </a:xfrm>
           <a:prstGeom prst="rect">
             <a:avLst/>

--- a/output_ppt.pptx
+++ b/output_ppt.pptx
@@ -29286,14 +29286,14 @@
       </p:pic>
       <p:pic>
         <p:nvPicPr>
-          <p:cNvPr id="3" name="Picture 2" descr="default_image.jpg"/>
+          <p:cNvPr id="3" name="Picture 2" descr="photo_2.jpg"/>
           <p:cNvPicPr>
             <a:picLocks noChangeAspect="1"/>
           </p:cNvPicPr>
           <p:nvPr/>
         </p:nvPicPr>
         <p:blipFill>
-          <a:blip r:embed="rId2"/>
+          <a:blip r:embed="rId3"/>
           <a:stretch>
             <a:fillRect/>
           </a:stretch>
@@ -29334,14 +29334,14 @@
       </p:pic>
       <p:pic>
         <p:nvPicPr>
-          <p:cNvPr id="5" name="Picture 4" descr="default_image.jpg"/>
+          <p:cNvPr id="5" name="Picture 4" descr="photo_4.jpg"/>
           <p:cNvPicPr>
             <a:picLocks noChangeAspect="1"/>
           </p:cNvPicPr>
           <p:nvPr/>
         </p:nvPicPr>
         <p:blipFill>
-          <a:blip r:embed="rId2"/>
+          <a:blip r:embed="rId4"/>
           <a:stretch>
             <a:fillRect/>
           </a:stretch>
@@ -29406,14 +29406,14 @@
       </p:pic>
       <p:pic>
         <p:nvPicPr>
-          <p:cNvPr id="8" name="Picture 7" descr="default_image.jpg"/>
+          <p:cNvPr id="8" name="Picture 7" descr="photo_7.jpg"/>
           <p:cNvPicPr>
             <a:picLocks noChangeAspect="1"/>
           </p:cNvPicPr>
           <p:nvPr/>
         </p:nvPicPr>
         <p:blipFill>
-          <a:blip r:embed="rId2"/>
+          <a:blip r:embed="rId5"/>
           <a:stretch>
             <a:fillRect/>
           </a:stretch>
@@ -29484,7 +29484,7 @@
       </p:grpSpPr>
       <p:pic>
         <p:nvPicPr>
-          <p:cNvPr id="2" name="Picture 1" descr="oral_default.jpg"/>
+          <p:cNvPr id="2" name="Picture 1" descr="oralPhoto_1.jpg"/>
           <p:cNvPicPr>
             <a:picLocks noChangeAspect="1"/>
           </p:cNvPicPr>
@@ -29498,8 +29498,8 @@
         </p:blipFill>
         <p:spPr>
           <a:xfrm>
-            <a:off x="1564849" y="914400"/>
-            <a:ext cx="3007150" cy="2011680"/>
+            <a:off x="1554479" y="914400"/>
+            <a:ext cx="3017520" cy="2011680"/>
           </a:xfrm>
           <a:prstGeom prst="rect">
             <a:avLst/>
@@ -29515,7 +29515,7 @@
           <p:nvPr/>
         </p:nvPicPr>
         <p:blipFill>
-          <a:blip r:embed="rId2"/>
+          <a:blip r:embed="rId3"/>
           <a:stretch>
             <a:fillRect/>
           </a:stretch>
@@ -29523,7 +29523,7 @@
         <p:spPr>
           <a:xfrm>
             <a:off x="4572000" y="914400"/>
-            <a:ext cx="3007150" cy="2011680"/>
+            <a:ext cx="3017520" cy="2011680"/>
           </a:xfrm>
           <a:prstGeom prst="rect">
             <a:avLst/>
@@ -29539,15 +29539,15 @@
           <p:nvPr/>
         </p:nvPicPr>
         <p:blipFill>
-          <a:blip r:embed="rId2"/>
+          <a:blip r:embed="rId3"/>
           <a:stretch>
             <a:fillRect/>
           </a:stretch>
         </p:blipFill>
         <p:spPr>
           <a:xfrm>
-            <a:off x="61274" y="2926080"/>
-            <a:ext cx="3007150" cy="2011680"/>
+            <a:off x="45719" y="2926080"/>
+            <a:ext cx="3017520" cy="2011680"/>
           </a:xfrm>
           <a:prstGeom prst="rect">
             <a:avLst/>
@@ -29556,22 +29556,22 @@
       </p:pic>
       <p:pic>
         <p:nvPicPr>
-          <p:cNvPr id="5" name="Picture 4" descr="oral_default.jpg"/>
+          <p:cNvPr id="5" name="Picture 4" descr="oralPhoto_4.jpg"/>
           <p:cNvPicPr>
             <a:picLocks noChangeAspect="1"/>
           </p:cNvPicPr>
           <p:nvPr/>
         </p:nvPicPr>
         <p:blipFill>
-          <a:blip r:embed="rId2"/>
+          <a:blip r:embed="rId4"/>
           <a:stretch>
             <a:fillRect/>
           </a:stretch>
         </p:blipFill>
         <p:spPr>
           <a:xfrm>
-            <a:off x="3068424" y="2926080"/>
-            <a:ext cx="3007150" cy="2011680"/>
+            <a:off x="3063240" y="2926080"/>
+            <a:ext cx="3017520" cy="2011680"/>
           </a:xfrm>
           <a:prstGeom prst="rect">
             <a:avLst/>
@@ -29587,15 +29587,15 @@
           <p:nvPr/>
         </p:nvPicPr>
         <p:blipFill>
-          <a:blip r:embed="rId2"/>
+          <a:blip r:embed="rId3"/>
           <a:stretch>
             <a:fillRect/>
           </a:stretch>
         </p:blipFill>
         <p:spPr>
           <a:xfrm>
-            <a:off x="6075575" y="2926080"/>
-            <a:ext cx="3007150" cy="2011680"/>
+            <a:off x="6080760" y="2926080"/>
+            <a:ext cx="3017520" cy="2011680"/>
           </a:xfrm>
           <a:prstGeom prst="rect">
             <a:avLst/>
@@ -29796,7 +29796,7 @@
       </p:grpSpPr>
       <p:pic>
         <p:nvPicPr>
-          <p:cNvPr id="2" name="Picture 1" descr="posturePhoto_1.jpg"/>
+          <p:cNvPr id="2" name="Picture 1" descr="posture_default.jpg"/>
           <p:cNvPicPr>
             <a:picLocks noChangeAspect="1"/>
           </p:cNvPicPr>
@@ -29834,8 +29834,8 @@
         </p:blipFill>
         <p:spPr>
           <a:xfrm>
-            <a:off x="2514600" y="2743200"/>
-            <a:ext cx="2057400" cy="1371600"/>
+            <a:off x="2514600" y="1885950"/>
+            <a:ext cx="2057400" cy="3086100"/>
           </a:xfrm>
           <a:prstGeom prst="rect">
             <a:avLst/>
@@ -29844,22 +29844,22 @@
       </p:pic>
       <p:pic>
         <p:nvPicPr>
-          <p:cNvPr id="4" name="Picture 3" descr="posturePhoto_3.jpg"/>
+          <p:cNvPr id="4" name="Picture 3" descr="posture_default.jpg"/>
           <p:cNvPicPr>
             <a:picLocks noChangeAspect="1"/>
           </p:cNvPicPr>
           <p:nvPr/>
         </p:nvPicPr>
         <p:blipFill>
-          <a:blip r:embed="rId4"/>
+          <a:blip r:embed="rId2"/>
           <a:stretch>
             <a:fillRect/>
           </a:stretch>
         </p:blipFill>
         <p:spPr>
           <a:xfrm>
-            <a:off x="4572000" y="2601095"/>
-            <a:ext cx="2057400" cy="1655809"/>
+            <a:off x="4572000" y="2057400"/>
+            <a:ext cx="2057400" cy="2743200"/>
           </a:xfrm>
           <a:prstGeom prst="rect">
             <a:avLst/>
@@ -29875,7 +29875,7 @@
           <p:nvPr/>
         </p:nvPicPr>
         <p:blipFill>
-          <a:blip r:embed="rId5"/>
+          <a:blip r:embed="rId2"/>
           <a:stretch>
             <a:fillRect/>
           </a:stretch>
@@ -29946,22 +29946,22 @@
       </p:pic>
       <p:pic>
         <p:nvPicPr>
-          <p:cNvPr id="3" name="Picture 2" descr="posturePhoto_7.jpg"/>
+          <p:cNvPr id="3" name="Picture 2" descr="posture_default.jpg"/>
           <p:cNvPicPr>
             <a:picLocks noChangeAspect="1"/>
           </p:cNvPicPr>
           <p:nvPr/>
         </p:nvPicPr>
         <p:blipFill>
-          <a:blip r:embed="rId3"/>
+          <a:blip r:embed="rId2"/>
           <a:stretch>
             <a:fillRect/>
           </a:stretch>
         </p:blipFill>
         <p:spPr>
           <a:xfrm>
-            <a:off x="4572000" y="2657475"/>
-            <a:ext cx="2057400" cy="1543050"/>
+            <a:off x="2514600" y="2057400"/>
+            <a:ext cx="2057400" cy="2743200"/>
           </a:xfrm>
           <a:prstGeom prst="rect">
             <a:avLst/>
@@ -29970,22 +29970,46 @@
       </p:pic>
       <p:pic>
         <p:nvPicPr>
-          <p:cNvPr id="4" name="Picture 3" descr="posturePhoto_8.jpg"/>
+          <p:cNvPr id="4" name="Picture 3" descr="posture_default.jpg"/>
           <p:cNvPicPr>
             <a:picLocks noChangeAspect="1"/>
           </p:cNvPicPr>
           <p:nvPr/>
         </p:nvPicPr>
         <p:blipFill>
-          <a:blip r:embed="rId4"/>
+          <a:blip r:embed="rId2"/>
           <a:stretch>
             <a:fillRect/>
           </a:stretch>
         </p:blipFill>
         <p:spPr>
           <a:xfrm>
-            <a:off x="6629400" y="2602262"/>
-            <a:ext cx="2057400" cy="1653475"/>
+            <a:off x="4572000" y="2057400"/>
+            <a:ext cx="2057400" cy="2743200"/>
+          </a:xfrm>
+          <a:prstGeom prst="rect">
+            <a:avLst/>
+          </a:prstGeom>
+        </p:spPr>
+      </p:pic>
+      <p:pic>
+        <p:nvPicPr>
+          <p:cNvPr id="5" name="Picture 4" descr="posture_default.jpg"/>
+          <p:cNvPicPr>
+            <a:picLocks noChangeAspect="1"/>
+          </p:cNvPicPr>
+          <p:nvPr/>
+        </p:nvPicPr>
+        <p:blipFill>
+          <a:blip r:embed="rId2"/>
+          <a:stretch>
+            <a:fillRect/>
+          </a:stretch>
+        </p:blipFill>
+        <p:spPr>
+          <a:xfrm>
+            <a:off x="6629400" y="2057400"/>
+            <a:ext cx="2057400" cy="2743200"/>
           </a:xfrm>
           <a:prstGeom prst="rect">
             <a:avLst/>

--- a/output_ppt.pptx
+++ b/output_ppt.pptx
@@ -29208,7 +29208,7 @@
       </p:grpSpPr>
       <p:pic>
         <p:nvPicPr>
-          <p:cNvPr id="2" name="Picture 1" descr="default_image.jpg"/>
+          <p:cNvPr id="2" name="Picture 1" descr="psa.jpg"/>
           <p:cNvPicPr>
             <a:picLocks noChangeAspect="1"/>
           </p:cNvPicPr>
@@ -29222,8 +29222,8 @@
         </p:blipFill>
         <p:spPr>
           <a:xfrm>
-            <a:off x="2275973" y="0"/>
-            <a:ext cx="4592052" cy="6858000"/>
+            <a:off x="305335" y="0"/>
+            <a:ext cx="8533328" cy="6858000"/>
           </a:xfrm>
           <a:prstGeom prst="rect">
             <a:avLst/>
@@ -29286,14 +29286,14 @@
       </p:pic>
       <p:pic>
         <p:nvPicPr>
-          <p:cNvPr id="3" name="Picture 2" descr="photo_2.jpg"/>
+          <p:cNvPr id="3" name="Picture 2" descr="default_image.jpg"/>
           <p:cNvPicPr>
             <a:picLocks noChangeAspect="1"/>
           </p:cNvPicPr>
           <p:nvPr/>
         </p:nvPicPr>
         <p:blipFill>
-          <a:blip r:embed="rId3"/>
+          <a:blip r:embed="rId2"/>
           <a:stretch>
             <a:fillRect/>
           </a:stretch>
@@ -29334,14 +29334,14 @@
       </p:pic>
       <p:pic>
         <p:nvPicPr>
-          <p:cNvPr id="5" name="Picture 4" descr="photo_4.jpg"/>
+          <p:cNvPr id="5" name="Picture 4" descr="default_image.jpg"/>
           <p:cNvPicPr>
             <a:picLocks noChangeAspect="1"/>
           </p:cNvPicPr>
           <p:nvPr/>
         </p:nvPicPr>
         <p:blipFill>
-          <a:blip r:embed="rId4"/>
+          <a:blip r:embed="rId2"/>
           <a:stretch>
             <a:fillRect/>
           </a:stretch>
@@ -29406,14 +29406,14 @@
       </p:pic>
       <p:pic>
         <p:nvPicPr>
-          <p:cNvPr id="8" name="Picture 7" descr="photo_7.jpg"/>
+          <p:cNvPr id="8" name="Picture 7" descr="default_image.jpg"/>
           <p:cNvPicPr>
             <a:picLocks noChangeAspect="1"/>
           </p:cNvPicPr>
           <p:nvPr/>
         </p:nvPicPr>
         <p:blipFill>
-          <a:blip r:embed="rId5"/>
+          <a:blip r:embed="rId2"/>
           <a:stretch>
             <a:fillRect/>
           </a:stretch>
@@ -29484,7 +29484,7 @@
       </p:grpSpPr>
       <p:pic>
         <p:nvPicPr>
-          <p:cNvPr id="2" name="Picture 1" descr="oralPhoto_1.jpg"/>
+          <p:cNvPr id="2" name="Picture 1" descr="oral_default.jpg"/>
           <p:cNvPicPr>
             <a:picLocks noChangeAspect="1"/>
           </p:cNvPicPr>
@@ -29498,8 +29498,8 @@
         </p:blipFill>
         <p:spPr>
           <a:xfrm>
-            <a:off x="1554479" y="914400"/>
-            <a:ext cx="3017520" cy="2011680"/>
+            <a:off x="1564849" y="914400"/>
+            <a:ext cx="3007150" cy="2011680"/>
           </a:xfrm>
           <a:prstGeom prst="rect">
             <a:avLst/>
@@ -29515,7 +29515,7 @@
           <p:nvPr/>
         </p:nvPicPr>
         <p:blipFill>
-          <a:blip r:embed="rId3"/>
+          <a:blip r:embed="rId2"/>
           <a:stretch>
             <a:fillRect/>
           </a:stretch>
@@ -29523,7 +29523,7 @@
         <p:spPr>
           <a:xfrm>
             <a:off x="4572000" y="914400"/>
-            <a:ext cx="3017520" cy="2011680"/>
+            <a:ext cx="3007150" cy="2011680"/>
           </a:xfrm>
           <a:prstGeom prst="rect">
             <a:avLst/>
@@ -29539,15 +29539,15 @@
           <p:nvPr/>
         </p:nvPicPr>
         <p:blipFill>
-          <a:blip r:embed="rId3"/>
+          <a:blip r:embed="rId2"/>
           <a:stretch>
             <a:fillRect/>
           </a:stretch>
         </p:blipFill>
         <p:spPr>
           <a:xfrm>
-            <a:off x="45719" y="2926080"/>
-            <a:ext cx="3017520" cy="2011680"/>
+            <a:off x="61274" y="2926080"/>
+            <a:ext cx="3007150" cy="2011680"/>
           </a:xfrm>
           <a:prstGeom prst="rect">
             <a:avLst/>
@@ -29556,22 +29556,22 @@
       </p:pic>
       <p:pic>
         <p:nvPicPr>
-          <p:cNvPr id="5" name="Picture 4" descr="oralPhoto_4.jpg"/>
+          <p:cNvPr id="5" name="Picture 4" descr="oral_default.jpg"/>
           <p:cNvPicPr>
             <a:picLocks noChangeAspect="1"/>
           </p:cNvPicPr>
           <p:nvPr/>
         </p:nvPicPr>
         <p:blipFill>
-          <a:blip r:embed="rId4"/>
+          <a:blip r:embed="rId2"/>
           <a:stretch>
             <a:fillRect/>
           </a:stretch>
         </p:blipFill>
         <p:spPr>
           <a:xfrm>
-            <a:off x="3063240" y="2926080"/>
-            <a:ext cx="3017520" cy="2011680"/>
+            <a:off x="3068424" y="2926080"/>
+            <a:ext cx="3007150" cy="2011680"/>
           </a:xfrm>
           <a:prstGeom prst="rect">
             <a:avLst/>
@@ -29587,15 +29587,15 @@
           <p:nvPr/>
         </p:nvPicPr>
         <p:blipFill>
-          <a:blip r:embed="rId3"/>
+          <a:blip r:embed="rId2"/>
           <a:stretch>
             <a:fillRect/>
           </a:stretch>
         </p:blipFill>
         <p:spPr>
           <a:xfrm>
-            <a:off x="6080760" y="2926080"/>
-            <a:ext cx="3017520" cy="2011680"/>
+            <a:off x="6075575" y="2926080"/>
+            <a:ext cx="3007150" cy="2011680"/>
           </a:xfrm>
           <a:prstGeom prst="rect">
             <a:avLst/>
@@ -29688,7 +29688,7 @@
       </p:grpSpPr>
       <p:pic>
         <p:nvPicPr>
-          <p:cNvPr id="2" name="Picture 1" descr="default_image.jpg"/>
+          <p:cNvPr id="2" name="Picture 1" descr="lateral_ceph.jpg"/>
           <p:cNvPicPr>
             <a:picLocks noChangeAspect="1"/>
           </p:cNvPicPr>
@@ -29702,8 +29702,8 @@
         </p:blipFill>
         <p:spPr>
           <a:xfrm>
-            <a:off x="2275973" y="0"/>
-            <a:ext cx="4592052" cy="6858000"/>
+            <a:off x="311348" y="0"/>
+            <a:ext cx="8521302" cy="6858000"/>
           </a:xfrm>
           <a:prstGeom prst="rect">
             <a:avLst/>
@@ -29820,22 +29820,22 @@
       </p:pic>
       <p:pic>
         <p:nvPicPr>
-          <p:cNvPr id="3" name="Picture 2" descr="posturePhoto_2.jpg"/>
+          <p:cNvPr id="3" name="Picture 2" descr="posture_default.jpg"/>
           <p:cNvPicPr>
             <a:picLocks noChangeAspect="1"/>
           </p:cNvPicPr>
           <p:nvPr/>
         </p:nvPicPr>
         <p:blipFill>
-          <a:blip r:embed="rId3"/>
+          <a:blip r:embed="rId2"/>
           <a:stretch>
             <a:fillRect/>
           </a:stretch>
         </p:blipFill>
         <p:spPr>
           <a:xfrm>
-            <a:off x="2514600" y="1885950"/>
-            <a:ext cx="2057400" cy="3086100"/>
+            <a:off x="2514600" y="2057400"/>
+            <a:ext cx="2057400" cy="2743200"/>
           </a:xfrm>
           <a:prstGeom prst="rect">
             <a:avLst/>

--- a/output_ppt.pptx
+++ b/output_ppt.pptx
@@ -7029,108 +7029,29 @@
             </a:lvl9pPr>
           </a:lstStyle>
           <a:p>
-            <a:pPr eaLnBrk="1" hangingPunct="1"/>
-            <a:r>
-              <a:rPr lang="en-US" altLang="ko-KR" sz="1600" b="1" dirty="0">
+            <a:pPr algn="ctr">
+              <a:defRPr sz="1500" b="1">
                 <a:solidFill>
-                  <a:schemeClr val="tx2"/>
+                  <a:srgbClr val="445474"/>
                 </a:solidFill>
-                <a:latin typeface="+mj-ea"/>
-                <a:ea typeface="+mj-ea"/>
-                <a:cs typeface="Arial" panose="020B0604020202020204" pitchFamily="34" charset="0"/>
-              </a:rPr>
-              <a:t>  (F) </a:t>
-            </a:r>
-            <a:r>
-              <a:rPr lang="ko-KR" altLang="en-US" sz="1600" b="1" dirty="0">
-                <a:solidFill>
-                  <a:schemeClr val="tx2"/>
-                </a:solidFill>
-                <a:latin typeface="+mj-ea"/>
-                <a:ea typeface="+mj-ea"/>
-                <a:cs typeface="Arial" panose="020B0604020202020204" pitchFamily="34" charset="0"/>
-              </a:rPr>
-              <a:t>순응교합연구회 </a:t>
-            </a:r>
-            <a:r>
-              <a:rPr lang="en-US" altLang="ko-KR" sz="1600" b="1" dirty="0">
-                <a:solidFill>
-                  <a:schemeClr val="tx2"/>
-                </a:solidFill>
-                <a:latin typeface="+mj-ea"/>
-                <a:ea typeface="+mj-ea"/>
-                <a:cs typeface="Arial" panose="020B0604020202020204" pitchFamily="34" charset="0"/>
-              </a:rPr>
-              <a:t>8y since 2017</a:t>
+                <a:latin typeface="맑은 고딕"/>
+              </a:defRPr>
+            </a:pPr>
+            <a:r>
+              <a:t>Female 순응교합 20 2005-03-31</a:t>
             </a:r>
           </a:p>
           <a:p>
-            <a:pPr eaLnBrk="1" hangingPunct="1"/>
-            <a:r>
-              <a:rPr lang="en-US" altLang="ko-KR" sz="1600" b="1" dirty="0">
+            <a:pPr algn="ctr">
+              <a:defRPr sz="1500" b="1">
                 <a:solidFill>
-                  <a:schemeClr val="tx2"/>
+                  <a:srgbClr val="445474"/>
                 </a:solidFill>
-                <a:latin typeface="+mj-ea"/>
-                <a:ea typeface="+mj-ea"/>
-                <a:cs typeface="Arial" panose="020B0604020202020204" pitchFamily="34" charset="0"/>
-              </a:rPr>
-              <a:t>S1.B1.D1.C1-nbt(</a:t>
-            </a:r>
-            <a:r>
-              <a:rPr lang="en-US" altLang="ko-KR" sz="1600" b="1" dirty="0" err="1">
-                <a:solidFill>
-                  <a:schemeClr val="tx2"/>
-                </a:solidFill>
-                <a:latin typeface="+mj-ea"/>
-                <a:ea typeface="+mj-ea"/>
-                <a:cs typeface="Arial" panose="020B0604020202020204" pitchFamily="34" charset="0"/>
-              </a:rPr>
-              <a:t>dbt</a:t>
-            </a:r>
-            <a:r>
-              <a:rPr lang="en-US" altLang="ko-KR" sz="1600" b="1" dirty="0">
-                <a:solidFill>
-                  <a:schemeClr val="tx2"/>
-                </a:solidFill>
-                <a:latin typeface="+mj-ea"/>
-                <a:ea typeface="+mj-ea"/>
-                <a:cs typeface="Arial" panose="020B0604020202020204" pitchFamily="34" charset="0"/>
-              </a:rPr>
-              <a:t>)-RM(Rt)-</a:t>
-            </a:r>
-            <a:r>
-              <a:rPr lang="en-US" altLang="ko-KR" sz="1600" b="1" dirty="0" err="1">
-                <a:solidFill>
-                  <a:schemeClr val="tx2"/>
-                </a:solidFill>
-                <a:latin typeface="+mj-ea"/>
-                <a:ea typeface="+mj-ea"/>
-                <a:cs typeface="Arial" panose="020B0604020202020204" pitchFamily="34" charset="0"/>
-              </a:rPr>
-              <a:t>Fx:Ex-Fx</a:t>
-            </a:r>
-            <a:r>
-              <a:rPr lang="en-US" altLang="ko-KR" sz="1600" b="1" dirty="0">
-                <a:solidFill>
-                  <a:schemeClr val="tx2"/>
-                </a:solidFill>
-                <a:latin typeface="+mj-ea"/>
-                <a:ea typeface="+mj-ea"/>
-                <a:cs typeface="Arial" panose="020B0604020202020204" pitchFamily="34" charset="0"/>
-              </a:rPr>
-              <a:t>/0-Type IV   </a:t>
-            </a:r>
-            <a:r>
-              <a:rPr lang="ko-KR" altLang="en-US" sz="1600" b="1" dirty="0">
-                <a:solidFill>
-                  <a:schemeClr val="tx2"/>
-                </a:solidFill>
-                <a:latin typeface="+mj-ea"/>
-                <a:ea typeface="+mj-ea"/>
-                <a:cs typeface="Arial" panose="020B0604020202020204" pitchFamily="34" charset="0"/>
-              </a:rPr>
-              <a:t> </a:t>
+                <a:latin typeface="맑은 고딕"/>
+              </a:defRPr>
+            </a:pPr>
+            <a:r>
+              <a:t> S1.B3.D3.C1-nbt(dbt)-RM(Rt)-Fx:Ex-Fx/1-Type IV</a:t>
             </a:r>
           </a:p>
         </p:txBody>
@@ -12110,23 +12031,17 @@
                     <a:bodyPr/>
                     <a:lstStyle/>
                     <a:p>
-                      <a:pPr algn="ctr" fontAlgn="ctr"/>
+                      <a:pPr algn="ctr">
+                        <a:defRPr sz="700" b="0">
+                          <a:solidFill>
+                            <a:srgbClr val="445474"/>
+                          </a:solidFill>
+                          <a:latin typeface="맑은 고딕"/>
+                        </a:defRPr>
+                      </a:pPr>
                       <a:r>
-                        <a:rPr lang="en-US" altLang="ko-KR" sz="600" u="none" strike="noStrike" dirty="0">
-                          <a:effectLst/>
-                          <a:latin typeface="+mn-ea"/>
-                          <a:ea typeface="+mn-ea"/>
-                        </a:rPr>
-                        <a:t>0</a:t>
+                        <a:t>-24</a:t>
                       </a:r>
-                      <a:endParaRPr lang="en-US" altLang="ko-KR" sz="600" b="0" i="0" u="none" strike="noStrike" dirty="0">
-                        <a:solidFill>
-                          <a:srgbClr val="000000"/>
-                        </a:solidFill>
-                        <a:effectLst/>
-                        <a:latin typeface="+mn-ea"/>
-                        <a:ea typeface="+mn-ea"/>
-                      </a:endParaRPr>
                     </a:p>
                   </a:txBody>
                   <a:tcPr marL="0" marR="0" marT="0" marB="0" anchor="ctr">
@@ -12274,23 +12189,17 @@
                     <a:bodyPr/>
                     <a:lstStyle/>
                     <a:p>
-                      <a:pPr algn="ctr" fontAlgn="ctr"/>
+                      <a:pPr algn="ctr">
+                        <a:defRPr sz="700" b="0">
+                          <a:solidFill>
+                            <a:srgbClr val="445474"/>
+                          </a:solidFill>
+                          <a:latin typeface="맑은 고딕"/>
+                        </a:defRPr>
+                      </a:pPr>
                       <a:r>
-                        <a:rPr lang="en-US" altLang="ko-KR" sz="600" u="none" strike="noStrike" dirty="0">
-                          <a:effectLst/>
-                          <a:latin typeface="+mn-ea"/>
-                          <a:ea typeface="+mn-ea"/>
-                        </a:rPr>
-                        <a:t>0</a:t>
+                        <a:t>79.6</a:t>
                       </a:r>
-                      <a:endParaRPr lang="en-US" altLang="ko-KR" sz="600" b="0" i="0" u="none" strike="noStrike" dirty="0">
-                        <a:solidFill>
-                          <a:srgbClr val="000000"/>
-                        </a:solidFill>
-                        <a:effectLst/>
-                        <a:latin typeface="+mn-ea"/>
-                        <a:ea typeface="+mn-ea"/>
-                      </a:endParaRPr>
                     </a:p>
                   </a:txBody>
                   <a:tcPr marL="0" marR="0" marT="0" marB="0" anchor="ctr">
@@ -12438,23 +12347,17 @@
                     <a:bodyPr/>
                     <a:lstStyle/>
                     <a:p>
-                      <a:pPr algn="ctr" fontAlgn="ctr"/>
+                      <a:pPr algn="ctr">
+                        <a:defRPr sz="700" b="0">
+                          <a:solidFill>
+                            <a:srgbClr val="445474"/>
+                          </a:solidFill>
+                          <a:latin typeface="맑은 고딕"/>
+                        </a:defRPr>
+                      </a:pPr>
                       <a:r>
-                        <a:rPr lang="en-US" altLang="ko-KR" sz="600" u="none" strike="noStrike" dirty="0">
-                          <a:effectLst/>
-                          <a:latin typeface="+mn-ea"/>
-                          <a:ea typeface="+mn-ea"/>
-                        </a:rPr>
-                        <a:t>0</a:t>
+                        <a:t>103.6</a:t>
                       </a:r>
-                      <a:endParaRPr lang="en-US" altLang="ko-KR" sz="600" b="0" i="0" u="none" strike="noStrike" dirty="0">
-                        <a:solidFill>
-                          <a:srgbClr val="000000"/>
-                        </a:solidFill>
-                        <a:effectLst/>
-                        <a:latin typeface="+mn-ea"/>
-                        <a:ea typeface="+mn-ea"/>
-                      </a:endParaRPr>
                     </a:p>
                   </a:txBody>
                   <a:tcPr marL="0" marR="0" marT="0" marB="0" anchor="ctr">
@@ -12602,23 +12505,17 @@
                     <a:bodyPr/>
                     <a:lstStyle/>
                     <a:p>
-                      <a:pPr algn="ctr" fontAlgn="ctr"/>
+                      <a:pPr algn="ctr">
+                        <a:defRPr sz="700" b="0">
+                          <a:solidFill>
+                            <a:srgbClr val="445474"/>
+                          </a:solidFill>
+                          <a:latin typeface="맑은 고딕"/>
+                        </a:defRPr>
+                      </a:pPr>
                       <a:r>
-                        <a:rPr lang="en-US" altLang="ko-KR" sz="600" u="none" strike="noStrike">
-                          <a:effectLst/>
-                          <a:latin typeface="+mn-ea"/>
-                          <a:ea typeface="+mn-ea"/>
-                        </a:rPr>
-                        <a:t>0</a:t>
+                        <a:t>89.2</a:t>
                       </a:r>
-                      <a:endParaRPr lang="en-US" altLang="ko-KR" sz="600" b="0" i="0" u="none" strike="noStrike">
-                        <a:solidFill>
-                          <a:srgbClr val="000000"/>
-                        </a:solidFill>
-                        <a:effectLst/>
-                        <a:latin typeface="+mn-ea"/>
-                        <a:ea typeface="+mn-ea"/>
-                      </a:endParaRPr>
                     </a:p>
                   </a:txBody>
                   <a:tcPr marL="0" marR="0" marT="0" marB="0" anchor="ctr">
@@ -12766,23 +12663,17 @@
                     <a:bodyPr/>
                     <a:lstStyle/>
                     <a:p>
-                      <a:pPr algn="ctr" fontAlgn="ctr"/>
+                      <a:pPr algn="ctr">
+                        <a:defRPr sz="700" b="0">
+                          <a:solidFill>
+                            <a:srgbClr val="445474"/>
+                          </a:solidFill>
+                          <a:latin typeface="맑은 고딕"/>
+                        </a:defRPr>
+                      </a:pPr>
                       <a:r>
-                        <a:rPr lang="en-US" altLang="ko-KR" sz="600" u="none" strike="noStrike" dirty="0">
-                          <a:effectLst/>
-                          <a:latin typeface="+mn-ea"/>
-                          <a:ea typeface="+mn-ea"/>
-                        </a:rPr>
-                        <a:t>0</a:t>
+                        <a:t>155.3</a:t>
                       </a:r>
-                      <a:endParaRPr lang="en-US" altLang="ko-KR" sz="600" b="0" i="0" u="none" strike="noStrike" dirty="0">
-                        <a:solidFill>
-                          <a:srgbClr val="000000"/>
-                        </a:solidFill>
-                        <a:effectLst/>
-                        <a:latin typeface="+mn-ea"/>
-                        <a:ea typeface="+mn-ea"/>
-                      </a:endParaRPr>
                     </a:p>
                   </a:txBody>
                   <a:tcPr marL="0" marR="0" marT="0" marB="0" anchor="ctr">
@@ -12930,23 +12821,17 @@
                     <a:bodyPr/>
                     <a:lstStyle/>
                     <a:p>
-                      <a:pPr algn="ctr" fontAlgn="ctr"/>
+                      <a:pPr algn="ctr">
+                        <a:defRPr sz="700" b="0">
+                          <a:solidFill>
+                            <a:srgbClr val="445474"/>
+                          </a:solidFill>
+                          <a:latin typeface="맑은 고딕"/>
+                        </a:defRPr>
+                      </a:pPr>
                       <a:r>
-                        <a:rPr lang="en-US" altLang="ko-KR" sz="600" u="none" strike="noStrike">
-                          <a:effectLst/>
-                          <a:latin typeface="+mn-ea"/>
-                          <a:ea typeface="+mn-ea"/>
-                        </a:rPr>
-                        <a:t>0</a:t>
+                        <a:t>113.9</a:t>
                       </a:r>
-                      <a:endParaRPr lang="en-US" altLang="ko-KR" sz="600" b="0" i="0" u="none" strike="noStrike">
-                        <a:solidFill>
-                          <a:srgbClr val="000000"/>
-                        </a:solidFill>
-                        <a:effectLst/>
-                        <a:latin typeface="+mn-ea"/>
-                        <a:ea typeface="+mn-ea"/>
-                      </a:endParaRPr>
                     </a:p>
                   </a:txBody>
                   <a:tcPr marL="0" marR="0" marT="0" marB="0" anchor="ctr">
@@ -13094,23 +12979,17 @@
                     <a:bodyPr/>
                     <a:lstStyle/>
                     <a:p>
-                      <a:pPr algn="ctr" fontAlgn="ctr"/>
+                      <a:pPr algn="ctr">
+                        <a:defRPr sz="700" b="0">
+                          <a:solidFill>
+                            <a:srgbClr val="445474"/>
+                          </a:solidFill>
+                          <a:latin typeface="맑은 고딕"/>
+                        </a:defRPr>
+                      </a:pPr>
                       <a:r>
-                        <a:rPr lang="en-US" altLang="ko-KR" sz="600" u="none" strike="noStrike" dirty="0">
-                          <a:effectLst/>
-                          <a:latin typeface="+mn-ea"/>
-                          <a:ea typeface="+mn-ea"/>
-                        </a:rPr>
-                        <a:t>0</a:t>
+                        <a:t>113.9</a:t>
                       </a:r>
-                      <a:endParaRPr lang="en-US" altLang="ko-KR" sz="600" b="0" i="0" u="none" strike="noStrike" dirty="0">
-                        <a:solidFill>
-                          <a:srgbClr val="000000"/>
-                        </a:solidFill>
-                        <a:effectLst/>
-                        <a:latin typeface="+mn-ea"/>
-                        <a:ea typeface="+mn-ea"/>
-                      </a:endParaRPr>
                     </a:p>
                   </a:txBody>
                   <a:tcPr marL="0" marR="0" marT="0" marB="0" anchor="ctr">
@@ -13258,23 +13137,17 @@
                     <a:bodyPr/>
                     <a:lstStyle/>
                     <a:p>
-                      <a:pPr algn="ctr" fontAlgn="ctr"/>
+                      <a:pPr algn="ctr">
+                        <a:defRPr sz="700" b="0">
+                          <a:solidFill>
+                            <a:srgbClr val="445474"/>
+                          </a:solidFill>
+                          <a:latin typeface="맑은 고딕"/>
+                        </a:defRPr>
+                      </a:pPr>
                       <a:r>
-                        <a:rPr lang="en-US" altLang="ko-KR" sz="600" u="none" strike="noStrike">
-                          <a:effectLst/>
-                          <a:latin typeface="+mn-ea"/>
-                          <a:ea typeface="+mn-ea"/>
-                        </a:rPr>
-                        <a:t>0</a:t>
+                        <a:t>83.6</a:t>
                       </a:r>
-                      <a:endParaRPr lang="en-US" altLang="ko-KR" sz="600" b="0" i="0" u="none" strike="noStrike">
-                        <a:solidFill>
-                          <a:srgbClr val="000000"/>
-                        </a:solidFill>
-                        <a:effectLst/>
-                        <a:latin typeface="+mn-ea"/>
-                        <a:ea typeface="+mn-ea"/>
-                      </a:endParaRPr>
                     </a:p>
                   </a:txBody>
                   <a:tcPr marL="0" marR="0" marT="0" marB="0" anchor="ctr">
@@ -13422,23 +13295,17 @@
                     <a:bodyPr/>
                     <a:lstStyle/>
                     <a:p>
-                      <a:pPr algn="ctr" fontAlgn="ctr"/>
+                      <a:pPr algn="ctr">
+                        <a:defRPr sz="700" b="0">
+                          <a:solidFill>
+                            <a:srgbClr val="445474"/>
+                          </a:solidFill>
+                          <a:latin typeface="맑은 고딕"/>
+                        </a:defRPr>
+                      </a:pPr>
                       <a:r>
-                        <a:rPr lang="en-US" altLang="ko-KR" sz="600" u="none" strike="noStrike" dirty="0">
-                          <a:effectLst/>
-                          <a:latin typeface="+mn-ea"/>
-                          <a:ea typeface="+mn-ea"/>
-                        </a:rPr>
-                        <a:t>0</a:t>
+                        <a:t>128.3</a:t>
                       </a:r>
-                      <a:endParaRPr lang="en-US" altLang="ko-KR" sz="600" b="0" i="0" u="none" strike="noStrike" dirty="0">
-                        <a:solidFill>
-                          <a:srgbClr val="000000"/>
-                        </a:solidFill>
-                        <a:effectLst/>
-                        <a:latin typeface="+mn-ea"/>
-                        <a:ea typeface="+mn-ea"/>
-                      </a:endParaRPr>
                     </a:p>
                   </a:txBody>
                   <a:tcPr marL="0" marR="0" marT="0" marB="0" anchor="ctr">
@@ -13586,23 +13453,17 @@
                     <a:bodyPr/>
                     <a:lstStyle/>
                     <a:p>
-                      <a:pPr algn="ctr" fontAlgn="ctr"/>
+                      <a:pPr algn="ctr">
+                        <a:defRPr sz="700" b="0">
+                          <a:solidFill>
+                            <a:srgbClr val="445474"/>
+                          </a:solidFill>
+                          <a:latin typeface="맑은 고딕"/>
+                        </a:defRPr>
+                      </a:pPr>
                       <a:r>
-                        <a:rPr lang="en-US" altLang="ko-KR" sz="600" u="none" strike="noStrike" dirty="0">
-                          <a:effectLst/>
-                          <a:latin typeface="+mn-ea"/>
-                          <a:ea typeface="+mn-ea"/>
-                        </a:rPr>
-                        <a:t>0</a:t>
+                        <a:t>538.7</a:t>
                       </a:r>
-                      <a:endParaRPr lang="en-US" altLang="ko-KR" sz="600" b="0" i="0" u="none" strike="noStrike" dirty="0">
-                        <a:solidFill>
-                          <a:srgbClr val="000000"/>
-                        </a:solidFill>
-                        <a:effectLst/>
-                        <a:latin typeface="+mn-ea"/>
-                        <a:ea typeface="+mn-ea"/>
-                      </a:endParaRPr>
                     </a:p>
                   </a:txBody>
                   <a:tcPr marL="0" marR="0" marT="0" marB="0" anchor="ctr">
@@ -13750,23 +13611,17 @@
                     <a:bodyPr/>
                     <a:lstStyle/>
                     <a:p>
-                      <a:pPr algn="ctr" fontAlgn="ctr"/>
+                      <a:pPr algn="ctr">
+                        <a:defRPr sz="700" b="0">
+                          <a:solidFill>
+                            <a:srgbClr val="445474"/>
+                          </a:solidFill>
+                          <a:latin typeface="맑은 고딕"/>
+                        </a:defRPr>
+                      </a:pPr>
                       <a:r>
-                        <a:rPr lang="en-US" altLang="ko-KR" sz="600" u="none" strike="noStrike" dirty="0">
-                          <a:effectLst/>
-                          <a:latin typeface="+mn-ea"/>
-                          <a:ea typeface="+mn-ea"/>
-                        </a:rPr>
-                        <a:t>0</a:t>
+                        <a:t>146.8</a:t>
                       </a:r>
-                      <a:endParaRPr lang="en-US" altLang="ko-KR" sz="600" b="0" i="0" u="none" strike="noStrike" dirty="0">
-                        <a:solidFill>
-                          <a:srgbClr val="000000"/>
-                        </a:solidFill>
-                        <a:effectLst/>
-                        <a:latin typeface="+mn-ea"/>
-                        <a:ea typeface="+mn-ea"/>
-                      </a:endParaRPr>
                     </a:p>
                   </a:txBody>
                   <a:tcPr marL="0" marR="0" marT="0" marB="0" anchor="ctr">
@@ -13914,23 +13769,17 @@
                     <a:bodyPr/>
                     <a:lstStyle/>
                     <a:p>
-                      <a:pPr algn="ctr" fontAlgn="ctr"/>
+                      <a:pPr algn="ctr">
+                        <a:defRPr sz="700" b="0">
+                          <a:solidFill>
+                            <a:srgbClr val="445474"/>
+                          </a:solidFill>
+                          <a:latin typeface="맑은 고딕"/>
+                        </a:defRPr>
+                      </a:pPr>
                       <a:r>
-                        <a:rPr lang="en-US" altLang="ko-KR" sz="600" u="none" strike="noStrike" dirty="0">
-                          <a:effectLst/>
-                          <a:latin typeface="+mn-ea"/>
-                          <a:ea typeface="+mn-ea"/>
-                        </a:rPr>
-                        <a:t>0</a:t>
+                        <a:t>149.8</a:t>
                       </a:r>
-                      <a:endParaRPr lang="en-US" altLang="ko-KR" sz="600" b="0" i="0" u="none" strike="noStrike" dirty="0">
-                        <a:solidFill>
-                          <a:srgbClr val="000000"/>
-                        </a:solidFill>
-                        <a:effectLst/>
-                        <a:latin typeface="+mn-ea"/>
-                        <a:ea typeface="+mn-ea"/>
-                      </a:endParaRPr>
                     </a:p>
                   </a:txBody>
                   <a:tcPr marL="0" marR="0" marT="0" marB="0" anchor="ctr">
@@ -14078,23 +13927,17 @@
                     <a:bodyPr/>
                     <a:lstStyle/>
                     <a:p>
-                      <a:pPr algn="ctr" fontAlgn="ctr"/>
+                      <a:pPr algn="ctr">
+                        <a:defRPr sz="700" b="0">
+                          <a:solidFill>
+                            <a:srgbClr val="445474"/>
+                          </a:solidFill>
+                          <a:latin typeface="맑은 고딕"/>
+                        </a:defRPr>
+                      </a:pPr>
                       <a:r>
-                        <a:rPr lang="en-US" altLang="ko-KR" sz="600" u="none" strike="noStrike">
-                          <a:effectLst/>
-                          <a:latin typeface="+mn-ea"/>
-                          <a:ea typeface="+mn-ea"/>
-                        </a:rPr>
-                        <a:t>0</a:t>
+                        <a:t>445.4</a:t>
                       </a:r>
-                      <a:endParaRPr lang="en-US" altLang="ko-KR" sz="600" b="0" i="0" u="none" strike="noStrike">
-                        <a:solidFill>
-                          <a:srgbClr val="000000"/>
-                        </a:solidFill>
-                        <a:effectLst/>
-                        <a:latin typeface="+mn-ea"/>
-                        <a:ea typeface="+mn-ea"/>
-                      </a:endParaRPr>
                     </a:p>
                   </a:txBody>
                   <a:tcPr marL="0" marR="0" marT="0" marB="0" anchor="ctr">
@@ -14242,23 +14085,17 @@
                     <a:bodyPr/>
                     <a:lstStyle/>
                     <a:p>
-                      <a:pPr algn="ctr" fontAlgn="ctr"/>
+                      <a:pPr algn="ctr">
+                        <a:defRPr sz="700" b="0">
+                          <a:solidFill>
+                            <a:srgbClr val="445474"/>
+                          </a:solidFill>
+                          <a:latin typeface="맑은 고딕"/>
+                        </a:defRPr>
+                      </a:pPr>
                       <a:r>
-                        <a:rPr lang="en-US" altLang="ko-KR" sz="600" u="none" strike="noStrike" dirty="0">
-                          <a:effectLst/>
-                          <a:latin typeface="+mn-ea"/>
-                          <a:ea typeface="+mn-ea"/>
-                        </a:rPr>
-                        <a:t>0</a:t>
+                        <a:t>127.1</a:t>
                       </a:r>
-                      <a:endParaRPr lang="en-US" altLang="ko-KR" sz="600" b="0" i="0" u="none" strike="noStrike" dirty="0">
-                        <a:solidFill>
-                          <a:srgbClr val="000000"/>
-                        </a:solidFill>
-                        <a:effectLst/>
-                        <a:latin typeface="+mn-ea"/>
-                        <a:ea typeface="+mn-ea"/>
-                      </a:endParaRPr>
                     </a:p>
                   </a:txBody>
                   <a:tcPr marL="0" marR="0" marT="0" marB="0" anchor="ctr">
@@ -14406,23 +14243,17 @@
                     <a:bodyPr/>
                     <a:lstStyle/>
                     <a:p>
-                      <a:pPr algn="ctr" fontAlgn="ctr"/>
+                      <a:pPr algn="ctr">
+                        <a:defRPr sz="700" b="0">
+                          <a:solidFill>
+                            <a:srgbClr val="445474"/>
+                          </a:solidFill>
+                          <a:latin typeface="맑은 고딕"/>
+                        </a:defRPr>
+                      </a:pPr>
                       <a:r>
-                        <a:rPr lang="en-US" altLang="ko-KR" sz="600" u="none" strike="noStrike" dirty="0">
-                          <a:effectLst/>
-                          <a:latin typeface="+mn-ea"/>
-                          <a:ea typeface="+mn-ea"/>
-                        </a:rPr>
-                        <a:t>0</a:t>
+                        <a:t>57.9</a:t>
                       </a:r>
-                      <a:endParaRPr lang="en-US" altLang="ko-KR" sz="600" b="0" i="0" u="none" strike="noStrike" dirty="0">
-                        <a:solidFill>
-                          <a:srgbClr val="000000"/>
-                        </a:solidFill>
-                        <a:effectLst/>
-                        <a:latin typeface="+mn-ea"/>
-                        <a:ea typeface="+mn-ea"/>
-                      </a:endParaRPr>
                     </a:p>
                   </a:txBody>
                   <a:tcPr marL="0" marR="0" marT="0" marB="0" anchor="ctr">
@@ -14570,23 +14401,17 @@
                     <a:bodyPr/>
                     <a:lstStyle/>
                     <a:p>
-                      <a:pPr algn="ctr" fontAlgn="ctr"/>
+                      <a:pPr algn="ctr">
+                        <a:defRPr sz="700" b="0">
+                          <a:solidFill>
+                            <a:srgbClr val="445474"/>
+                          </a:solidFill>
+                          <a:latin typeface="맑은 고딕"/>
+                        </a:defRPr>
+                      </a:pPr>
                       <a:r>
-                        <a:rPr lang="en-US" altLang="ko-KR" sz="600" u="none" strike="noStrike" dirty="0">
-                          <a:effectLst/>
-                          <a:latin typeface="+mn-ea"/>
-                          <a:ea typeface="+mn-ea"/>
-                        </a:rPr>
-                        <a:t>0</a:t>
+                        <a:t>7.9</a:t>
                       </a:r>
-                      <a:endParaRPr lang="en-US" altLang="ko-KR" sz="600" b="0" i="0" u="none" strike="noStrike" dirty="0">
-                        <a:solidFill>
-                          <a:srgbClr val="000000"/>
-                        </a:solidFill>
-                        <a:effectLst/>
-                        <a:latin typeface="+mn-ea"/>
-                        <a:ea typeface="+mn-ea"/>
-                      </a:endParaRPr>
                     </a:p>
                   </a:txBody>
                   <a:tcPr marL="0" marR="0" marT="0" marB="0" anchor="ctr">
@@ -14734,23 +14559,17 @@
                     <a:bodyPr/>
                     <a:lstStyle/>
                     <a:p>
-                      <a:pPr algn="ctr" fontAlgn="ctr"/>
+                      <a:pPr algn="ctr">
+                        <a:defRPr sz="700" b="0">
+                          <a:solidFill>
+                            <a:srgbClr val="445474"/>
+                          </a:solidFill>
+                          <a:latin typeface="맑은 고딕"/>
+                        </a:defRPr>
+                      </a:pPr>
                       <a:r>
-                        <a:rPr lang="en-US" altLang="ko-KR" sz="600" u="none" strike="noStrike" dirty="0">
-                          <a:effectLst/>
-                          <a:latin typeface="+mn-ea"/>
-                          <a:ea typeface="+mn-ea"/>
-                        </a:rPr>
-                        <a:t>0</a:t>
+                        <a:t>23.4</a:t>
                       </a:r>
-                      <a:endParaRPr lang="en-US" altLang="ko-KR" sz="600" b="0" i="0" u="none" strike="noStrike" dirty="0">
-                        <a:solidFill>
-                          <a:srgbClr val="000000"/>
-                        </a:solidFill>
-                        <a:effectLst/>
-                        <a:latin typeface="+mn-ea"/>
-                        <a:ea typeface="+mn-ea"/>
-                      </a:endParaRPr>
                     </a:p>
                   </a:txBody>
                   <a:tcPr marL="0" marR="0" marT="0" marB="0" anchor="ctr">
@@ -14898,23 +14717,17 @@
                     <a:bodyPr/>
                     <a:lstStyle/>
                     <a:p>
-                      <a:pPr algn="ctr" fontAlgn="ctr"/>
+                      <a:pPr algn="ctr">
+                        <a:defRPr sz="700" b="0">
+                          <a:solidFill>
+                            <a:srgbClr val="445474"/>
+                          </a:solidFill>
+                          <a:latin typeface="맑은 고딕"/>
+                        </a:defRPr>
+                      </a:pPr>
                       <a:r>
-                        <a:rPr lang="en-US" altLang="ko-KR" sz="600" u="none" strike="noStrike" dirty="0">
-                          <a:effectLst/>
-                          <a:latin typeface="+mn-ea"/>
-                          <a:ea typeface="+mn-ea"/>
-                        </a:rPr>
                         <a:t>0</a:t>
                       </a:r>
-                      <a:endParaRPr lang="en-US" altLang="ko-KR" sz="600" b="0" i="0" u="none" strike="noStrike" dirty="0">
-                        <a:solidFill>
-                          <a:srgbClr val="000000"/>
-                        </a:solidFill>
-                        <a:effectLst/>
-                        <a:latin typeface="+mn-ea"/>
-                        <a:ea typeface="+mn-ea"/>
-                      </a:endParaRPr>
                     </a:p>
                   </a:txBody>
                   <a:tcPr marL="0" marR="0" marT="0" marB="0" anchor="ctr">
@@ -15062,23 +14875,17 @@
                     <a:bodyPr/>
                     <a:lstStyle/>
                     <a:p>
-                      <a:pPr algn="ctr" fontAlgn="ctr"/>
+                      <a:pPr algn="ctr">
+                        <a:defRPr sz="700" b="0">
+                          <a:solidFill>
+                            <a:srgbClr val="445474"/>
+                          </a:solidFill>
+                          <a:latin typeface="맑은 고딕"/>
+                        </a:defRPr>
+                      </a:pPr>
                       <a:r>
-                        <a:rPr lang="en-US" altLang="ko-KR" sz="600" u="none" strike="noStrike" dirty="0">
-                          <a:effectLst/>
-                          <a:latin typeface="+mn-ea"/>
-                          <a:ea typeface="+mn-ea"/>
-                        </a:rPr>
-                        <a:t>0</a:t>
+                        <a:t>140.1</a:t>
                       </a:r>
-                      <a:endParaRPr lang="en-US" altLang="ko-KR" sz="600" b="0" i="0" u="none" strike="noStrike" dirty="0">
-                        <a:solidFill>
-                          <a:srgbClr val="000000"/>
-                        </a:solidFill>
-                        <a:effectLst/>
-                        <a:latin typeface="+mn-ea"/>
-                        <a:ea typeface="+mn-ea"/>
-                      </a:endParaRPr>
                     </a:p>
                   </a:txBody>
                   <a:tcPr marL="0" marR="0" marT="0" marB="0" anchor="ctr">
@@ -15226,23 +15033,17 @@
                     <a:bodyPr/>
                     <a:lstStyle/>
                     <a:p>
-                      <a:pPr algn="ctr" fontAlgn="ctr"/>
+                      <a:pPr algn="ctr">
+                        <a:defRPr sz="700" b="0">
+                          <a:solidFill>
+                            <a:srgbClr val="445474"/>
+                          </a:solidFill>
+                          <a:latin typeface="맑은 고딕"/>
+                        </a:defRPr>
+                      </a:pPr>
                       <a:r>
-                        <a:rPr lang="en-US" altLang="ko-KR" sz="600" u="none" strike="noStrike" dirty="0">
-                          <a:effectLst/>
-                          <a:latin typeface="+mn-ea"/>
-                          <a:ea typeface="+mn-ea"/>
-                        </a:rPr>
-                        <a:t>0</a:t>
+                        <a:t>65.9</a:t>
                       </a:r>
-                      <a:endParaRPr lang="en-US" altLang="ko-KR" sz="600" b="0" i="0" u="none" strike="noStrike" dirty="0">
-                        <a:solidFill>
-                          <a:srgbClr val="000000"/>
-                        </a:solidFill>
-                        <a:effectLst/>
-                        <a:latin typeface="+mn-ea"/>
-                        <a:ea typeface="+mn-ea"/>
-                      </a:endParaRPr>
                     </a:p>
                   </a:txBody>
                   <a:tcPr marL="0" marR="0" marT="0" marB="0" anchor="ctr">
@@ -15390,23 +15191,17 @@
                     <a:bodyPr/>
                     <a:lstStyle/>
                     <a:p>
-                      <a:pPr algn="ctr" fontAlgn="ctr"/>
+                      <a:pPr algn="ctr">
+                        <a:defRPr sz="700" b="0">
+                          <a:solidFill>
+                            <a:srgbClr val="445474"/>
+                          </a:solidFill>
+                          <a:latin typeface="맑은 고딕"/>
+                        </a:defRPr>
+                      </a:pPr>
                       <a:r>
-                        <a:rPr lang="en-US" altLang="ko-KR" sz="600" u="none" strike="noStrike" dirty="0">
-                          <a:effectLst/>
-                          <a:latin typeface="+mn-ea"/>
-                          <a:ea typeface="+mn-ea"/>
-                        </a:rPr>
-                        <a:t>0</a:t>
+                        <a:t>98.7</a:t>
                       </a:r>
-                      <a:endParaRPr lang="en-US" altLang="ko-KR" sz="600" b="0" i="0" u="none" strike="noStrike" dirty="0">
-                        <a:solidFill>
-                          <a:srgbClr val="000000"/>
-                        </a:solidFill>
-                        <a:effectLst/>
-                        <a:latin typeface="+mn-ea"/>
-                        <a:ea typeface="+mn-ea"/>
-                      </a:endParaRPr>
                     </a:p>
                   </a:txBody>
                   <a:tcPr marL="0" marR="0" marT="0" marB="0" anchor="ctr">
@@ -15554,23 +15349,17 @@
                     <a:bodyPr/>
                     <a:lstStyle/>
                     <a:p>
-                      <a:pPr algn="ctr" fontAlgn="ctr"/>
+                      <a:pPr algn="ctr">
+                        <a:defRPr sz="700" b="0">
+                          <a:solidFill>
+                            <a:srgbClr val="445474"/>
+                          </a:solidFill>
+                          <a:latin typeface="맑은 고딕"/>
+                        </a:defRPr>
+                      </a:pPr>
                       <a:r>
-                        <a:rPr lang="en-US" altLang="ko-KR" sz="600" u="none" strike="noStrike" dirty="0">
-                          <a:effectLst/>
-                          <a:latin typeface="+mn-ea"/>
-                          <a:ea typeface="+mn-ea"/>
-                        </a:rPr>
-                        <a:t>0</a:t>
+                        <a:t>148.7</a:t>
                       </a:r>
-                      <a:endParaRPr lang="en-US" altLang="ko-KR" sz="600" b="0" i="0" u="none" strike="noStrike" dirty="0">
-                        <a:solidFill>
-                          <a:srgbClr val="000000"/>
-                        </a:solidFill>
-                        <a:effectLst/>
-                        <a:latin typeface="+mn-ea"/>
-                        <a:ea typeface="+mn-ea"/>
-                      </a:endParaRPr>
                     </a:p>
                   </a:txBody>
                   <a:tcPr marL="0" marR="0" marT="0" marB="0" anchor="ctr">
@@ -15721,23 +15510,17 @@
                     <a:bodyPr/>
                     <a:lstStyle/>
                     <a:p>
-                      <a:pPr algn="ctr" fontAlgn="ctr"/>
+                      <a:pPr algn="ctr">
+                        <a:defRPr sz="700" b="0">
+                          <a:solidFill>
+                            <a:srgbClr val="445474"/>
+                          </a:solidFill>
+                          <a:latin typeface="맑은 고딕"/>
+                        </a:defRPr>
+                      </a:pPr>
                       <a:r>
-                        <a:rPr lang="en-US" altLang="ko-KR" sz="600" u="none" strike="noStrike" dirty="0">
-                          <a:effectLst/>
-                          <a:latin typeface="+mn-ea"/>
-                          <a:ea typeface="+mn-ea"/>
-                        </a:rPr>
-                        <a:t>0</a:t>
+                        <a:t>487.4</a:t>
                       </a:r>
-                      <a:endParaRPr lang="en-US" altLang="ko-KR" sz="600" b="0" i="0" u="none" strike="noStrike" dirty="0">
-                        <a:solidFill>
-                          <a:srgbClr val="000000"/>
-                        </a:solidFill>
-                        <a:effectLst/>
-                        <a:latin typeface="+mn-ea"/>
-                        <a:ea typeface="+mn-ea"/>
-                      </a:endParaRPr>
                     </a:p>
                   </a:txBody>
                   <a:tcPr marL="0" marR="0" marT="0" marB="0" anchor="ctr">
@@ -15885,23 +15668,17 @@
                     <a:bodyPr/>
                     <a:lstStyle/>
                     <a:p>
-                      <a:pPr algn="ctr" fontAlgn="ctr"/>
+                      <a:pPr algn="ctr">
+                        <a:defRPr sz="700" b="0">
+                          <a:solidFill>
+                            <a:srgbClr val="445474"/>
+                          </a:solidFill>
+                          <a:latin typeface="맑은 고딕"/>
+                        </a:defRPr>
+                      </a:pPr>
                       <a:r>
-                        <a:rPr lang="en-US" altLang="ko-KR" sz="600" u="none" strike="noStrike" dirty="0">
-                          <a:effectLst/>
-                          <a:latin typeface="+mn-ea"/>
-                          <a:ea typeface="+mn-ea"/>
-                        </a:rPr>
-                        <a:t>0</a:t>
+                        <a:t>449.9</a:t>
                       </a:r>
-                      <a:endParaRPr lang="en-US" altLang="ko-KR" sz="600" b="0" i="0" u="none" strike="noStrike" dirty="0">
-                        <a:solidFill>
-                          <a:srgbClr val="000000"/>
-                        </a:solidFill>
-                        <a:effectLst/>
-                        <a:latin typeface="+mn-ea"/>
-                        <a:ea typeface="+mn-ea"/>
-                      </a:endParaRPr>
                     </a:p>
                   </a:txBody>
                   <a:tcPr marL="0" marR="0" marT="0" marB="0" anchor="ctr">
@@ -16049,23 +15826,17 @@
                     <a:bodyPr/>
                     <a:lstStyle/>
                     <a:p>
-                      <a:pPr algn="ctr" fontAlgn="ctr"/>
+                      <a:pPr algn="ctr">
+                        <a:defRPr sz="700" b="0">
+                          <a:solidFill>
+                            <a:srgbClr val="445474"/>
+                          </a:solidFill>
+                          <a:latin typeface="맑은 고딕"/>
+                        </a:defRPr>
+                      </a:pPr>
                       <a:r>
-                        <a:rPr lang="en-US" altLang="ko-KR" sz="600" u="none" strike="noStrike">
-                          <a:effectLst/>
-                          <a:latin typeface="+mn-ea"/>
-                          <a:ea typeface="+mn-ea"/>
-                        </a:rPr>
-                        <a:t>0</a:t>
+                        <a:t>1112.2</a:t>
                       </a:r>
-                      <a:endParaRPr lang="en-US" altLang="ko-KR" sz="600" b="0" i="0" u="none" strike="noStrike">
-                        <a:solidFill>
-                          <a:srgbClr val="000000"/>
-                        </a:solidFill>
-                        <a:effectLst/>
-                        <a:latin typeface="+mn-ea"/>
-                        <a:ea typeface="+mn-ea"/>
-                      </a:endParaRPr>
                     </a:p>
                   </a:txBody>
                   <a:tcPr marL="0" marR="0" marT="0" marB="0" anchor="ctr">
@@ -16213,23 +15984,17 @@
                     <a:bodyPr/>
                     <a:lstStyle/>
                     <a:p>
-                      <a:pPr algn="ctr" fontAlgn="ctr"/>
+                      <a:pPr algn="ctr">
+                        <a:defRPr sz="700" b="0">
+                          <a:solidFill>
+                            <a:srgbClr val="445474"/>
+                          </a:solidFill>
+                          <a:latin typeface="맑은 고딕"/>
+                        </a:defRPr>
+                      </a:pPr>
                       <a:r>
-                        <a:rPr lang="en-US" altLang="ko-KR" sz="600" u="none" strike="noStrike" dirty="0">
-                          <a:effectLst/>
-                          <a:latin typeface="+mn-ea"/>
-                          <a:ea typeface="+mn-ea"/>
-                        </a:rPr>
-                        <a:t>0</a:t>
+                        <a:t>51.4</a:t>
                       </a:r>
-                      <a:endParaRPr lang="en-US" altLang="ko-KR" sz="600" b="0" i="0" u="none" strike="noStrike" dirty="0">
-                        <a:solidFill>
-                          <a:srgbClr val="000000"/>
-                        </a:solidFill>
-                        <a:effectLst/>
-                        <a:latin typeface="+mn-ea"/>
-                        <a:ea typeface="+mn-ea"/>
-                      </a:endParaRPr>
                     </a:p>
                   </a:txBody>
                   <a:tcPr marL="0" marR="0" marT="0" marB="0" anchor="ctr">
@@ -16377,23 +16142,17 @@
                     <a:bodyPr/>
                     <a:lstStyle/>
                     <a:p>
-                      <a:pPr algn="ctr" fontAlgn="ctr"/>
+                      <a:pPr algn="ctr">
+                        <a:defRPr sz="700" b="0">
+                          <a:solidFill>
+                            <a:srgbClr val="445474"/>
+                          </a:solidFill>
+                          <a:latin typeface="맑은 고딕"/>
+                        </a:defRPr>
+                      </a:pPr>
                       <a:r>
-                        <a:rPr lang="en-US" altLang="ko-KR" sz="600" u="none" strike="noStrike" dirty="0">
-                          <a:effectLst/>
-                          <a:latin typeface="+mn-ea"/>
-                          <a:ea typeface="+mn-ea"/>
-                        </a:rPr>
-                        <a:t>0</a:t>
+                        <a:t>161.9</a:t>
                       </a:r>
-                      <a:endParaRPr lang="en-US" altLang="ko-KR" sz="600" b="0" i="0" u="none" strike="noStrike" dirty="0">
-                        <a:solidFill>
-                          <a:srgbClr val="000000"/>
-                        </a:solidFill>
-                        <a:effectLst/>
-                        <a:latin typeface="+mn-ea"/>
-                        <a:ea typeface="+mn-ea"/>
-                      </a:endParaRPr>
                     </a:p>
                   </a:txBody>
                   <a:tcPr marL="0" marR="0" marT="0" marB="0" anchor="ctr">
@@ -16541,23 +16300,17 @@
                     <a:bodyPr/>
                     <a:lstStyle/>
                     <a:p>
-                      <a:pPr algn="ctr" fontAlgn="ctr"/>
+                      <a:pPr algn="ctr">
+                        <a:defRPr sz="700" b="0">
+                          <a:solidFill>
+                            <a:srgbClr val="445474"/>
+                          </a:solidFill>
+                          <a:latin typeface="맑은 고딕"/>
+                        </a:defRPr>
+                      </a:pPr>
                       <a:r>
-                        <a:rPr lang="en-US" altLang="ko-KR" sz="600" u="none" strike="noStrike" dirty="0">
-                          <a:effectLst/>
-                          <a:latin typeface="+mn-ea"/>
-                          <a:ea typeface="+mn-ea"/>
-                        </a:rPr>
-                        <a:t>0</a:t>
+                        <a:t>137.9</a:t>
                       </a:r>
-                      <a:endParaRPr lang="en-US" altLang="ko-KR" sz="600" b="0" i="0" u="none" strike="noStrike" dirty="0">
-                        <a:solidFill>
-                          <a:srgbClr val="000000"/>
-                        </a:solidFill>
-                        <a:effectLst/>
-                        <a:latin typeface="+mn-ea"/>
-                        <a:ea typeface="+mn-ea"/>
-                      </a:endParaRPr>
                     </a:p>
                   </a:txBody>
                   <a:tcPr marL="0" marR="0" marT="0" marB="0" anchor="ctr">
@@ -16705,23 +16458,17 @@
                     <a:bodyPr/>
                     <a:lstStyle/>
                     <a:p>
-                      <a:pPr algn="ctr" fontAlgn="ctr"/>
+                      <a:pPr algn="ctr">
+                        <a:defRPr sz="700" b="0">
+                          <a:solidFill>
+                            <a:srgbClr val="445474"/>
+                          </a:solidFill>
+                          <a:latin typeface="맑은 고딕"/>
+                        </a:defRPr>
+                      </a:pPr>
                       <a:r>
-                        <a:rPr lang="en-US" altLang="ko-KR" sz="600" u="none" strike="noStrike">
-                          <a:effectLst/>
-                          <a:latin typeface="+mn-ea"/>
-                          <a:ea typeface="+mn-ea"/>
-                        </a:rPr>
-                        <a:t>0</a:t>
+                        <a:t>942.5</a:t>
                       </a:r>
-                      <a:endParaRPr lang="en-US" altLang="ko-KR" sz="600" b="0" i="0" u="none" strike="noStrike">
-                        <a:solidFill>
-                          <a:srgbClr val="000000"/>
-                        </a:solidFill>
-                        <a:effectLst/>
-                        <a:latin typeface="+mn-ea"/>
-                        <a:ea typeface="+mn-ea"/>
-                      </a:endParaRPr>
                     </a:p>
                   </a:txBody>
                   <a:tcPr marL="0" marR="0" marT="0" marB="0" anchor="ctr">
@@ -16869,23 +16616,17 @@
                     <a:bodyPr/>
                     <a:lstStyle/>
                     <a:p>
-                      <a:pPr algn="ctr" fontAlgn="ctr"/>
+                      <a:pPr algn="ctr">
+                        <a:defRPr sz="700" b="0">
+                          <a:solidFill>
+                            <a:srgbClr val="445474"/>
+                          </a:solidFill>
+                          <a:latin typeface="맑은 고딕"/>
+                        </a:defRPr>
+                      </a:pPr>
                       <a:r>
-                        <a:rPr lang="en-US" altLang="ko-KR" sz="600" u="none" strike="noStrike" dirty="0">
-                          <a:effectLst/>
-                          <a:latin typeface="+mn-ea"/>
-                          <a:ea typeface="+mn-ea"/>
-                        </a:rPr>
-                        <a:t>0</a:t>
+                        <a:t>780.6</a:t>
                       </a:r>
-                      <a:endParaRPr lang="en-US" altLang="ko-KR" sz="600" b="0" i="0" u="none" strike="noStrike" dirty="0">
-                        <a:solidFill>
-                          <a:srgbClr val="000000"/>
-                        </a:solidFill>
-                        <a:effectLst/>
-                        <a:latin typeface="+mn-ea"/>
-                        <a:ea typeface="+mn-ea"/>
-                      </a:endParaRPr>
                     </a:p>
                   </a:txBody>
                   <a:tcPr marL="0" marR="0" marT="0" marB="0" anchor="ctr">
@@ -17033,23 +16774,17 @@
                     <a:bodyPr/>
                     <a:lstStyle/>
                     <a:p>
-                      <a:pPr algn="ctr" fontAlgn="ctr"/>
+                      <a:pPr algn="ctr">
+                        <a:defRPr sz="700" b="0">
+                          <a:solidFill>
+                            <a:srgbClr val="445474"/>
+                          </a:solidFill>
+                          <a:latin typeface="맑은 고딕"/>
+                        </a:defRPr>
+                      </a:pPr>
                       <a:r>
-                        <a:rPr lang="en-US" altLang="ko-KR" sz="600" u="none" strike="noStrike">
-                          <a:effectLst/>
-                          <a:latin typeface="+mn-ea"/>
-                          <a:ea typeface="+mn-ea"/>
-                        </a:rPr>
-                        <a:t>0</a:t>
+                        <a:t>3.7</a:t>
                       </a:r>
-                      <a:endParaRPr lang="en-US" altLang="ko-KR" sz="600" b="0" i="0" u="none" strike="noStrike">
-                        <a:solidFill>
-                          <a:srgbClr val="000000"/>
-                        </a:solidFill>
-                        <a:effectLst/>
-                        <a:latin typeface="+mn-ea"/>
-                        <a:ea typeface="+mn-ea"/>
-                      </a:endParaRPr>
                     </a:p>
                   </a:txBody>
                   <a:tcPr marL="0" marR="0" marT="0" marB="0" anchor="ctr">
@@ -17197,23 +16932,17 @@
                     <a:bodyPr/>
                     <a:lstStyle/>
                     <a:p>
-                      <a:pPr algn="ctr" fontAlgn="ctr"/>
+                      <a:pPr algn="ctr">
+                        <a:defRPr sz="700" b="0">
+                          <a:solidFill>
+                            <a:srgbClr val="445474"/>
+                          </a:solidFill>
+                          <a:latin typeface="맑은 고딕"/>
+                        </a:defRPr>
+                      </a:pPr>
                       <a:r>
-                        <a:rPr lang="en-US" altLang="ko-KR" sz="600" u="none" strike="noStrike">
-                          <a:effectLst/>
-                          <a:latin typeface="+mn-ea"/>
-                          <a:ea typeface="+mn-ea"/>
-                        </a:rPr>
-                        <a:t>0</a:t>
+                        <a:t>71.2</a:t>
                       </a:r>
-                      <a:endParaRPr lang="en-US" altLang="ko-KR" sz="600" b="0" i="0" u="none" strike="noStrike">
-                        <a:solidFill>
-                          <a:srgbClr val="000000"/>
-                        </a:solidFill>
-                        <a:effectLst/>
-                        <a:latin typeface="+mn-ea"/>
-                        <a:ea typeface="+mn-ea"/>
-                      </a:endParaRPr>
                     </a:p>
                   </a:txBody>
                   <a:tcPr marL="0" marR="0" marT="0" marB="0" anchor="ctr">
@@ -17361,23 +17090,17 @@
                     <a:bodyPr/>
                     <a:lstStyle/>
                     <a:p>
-                      <a:pPr algn="ctr" fontAlgn="ctr"/>
+                      <a:pPr algn="ctr">
+                        <a:defRPr sz="700" b="0">
+                          <a:solidFill>
+                            <a:srgbClr val="445474"/>
+                          </a:solidFill>
+                          <a:latin typeface="맑은 고딕"/>
+                        </a:defRPr>
+                      </a:pPr>
                       <a:r>
-                        <a:rPr lang="en-US" altLang="ko-KR" sz="600" u="none" strike="noStrike" dirty="0">
-                          <a:effectLst/>
-                          <a:latin typeface="+mn-ea"/>
-                          <a:ea typeface="+mn-ea"/>
-                        </a:rPr>
-                        <a:t>0</a:t>
+                        <a:t>36.7</a:t>
                       </a:r>
-                      <a:endParaRPr lang="en-US" altLang="ko-KR" sz="600" b="0" i="0" u="none" strike="noStrike" dirty="0">
-                        <a:solidFill>
-                          <a:srgbClr val="000000"/>
-                        </a:solidFill>
-                        <a:effectLst/>
-                        <a:latin typeface="+mn-ea"/>
-                        <a:ea typeface="+mn-ea"/>
-                      </a:endParaRPr>
                     </a:p>
                   </a:txBody>
                   <a:tcPr marL="0" marR="0" marT="0" marB="0" anchor="ctr">
@@ -17525,23 +17248,17 @@
                     <a:bodyPr/>
                     <a:lstStyle/>
                     <a:p>
-                      <a:pPr algn="ctr" fontAlgn="ctr"/>
+                      <a:pPr algn="ctr">
+                        <a:defRPr sz="700" b="0">
+                          <a:solidFill>
+                            <a:srgbClr val="445474"/>
+                          </a:solidFill>
+                          <a:latin typeface="맑은 고딕"/>
+                        </a:defRPr>
+                      </a:pPr>
                       <a:r>
-                        <a:rPr lang="en-US" altLang="ko-KR" sz="600" u="none" strike="noStrike" dirty="0">
-                          <a:effectLst/>
-                          <a:latin typeface="+mn-ea"/>
-                          <a:ea typeface="+mn-ea"/>
-                        </a:rPr>
-                        <a:t>0</a:t>
+                        <a:t>102.7</a:t>
                       </a:r>
-                      <a:endParaRPr lang="en-US" altLang="ko-KR" sz="600" b="0" i="0" u="none" strike="noStrike" dirty="0">
-                        <a:solidFill>
-                          <a:srgbClr val="000000"/>
-                        </a:solidFill>
-                        <a:effectLst/>
-                        <a:latin typeface="+mn-ea"/>
-                        <a:ea typeface="+mn-ea"/>
-                      </a:endParaRPr>
                     </a:p>
                   </a:txBody>
                   <a:tcPr marL="0" marR="0" marT="0" marB="0" anchor="ctr">
@@ -17689,23 +17406,17 @@
                     <a:bodyPr/>
                     <a:lstStyle/>
                     <a:p>
-                      <a:pPr algn="ctr" fontAlgn="ctr"/>
+                      <a:pPr algn="ctr">
+                        <a:defRPr sz="700" b="0">
+                          <a:solidFill>
+                            <a:srgbClr val="445474"/>
+                          </a:solidFill>
+                          <a:latin typeface="맑은 고딕"/>
+                        </a:defRPr>
+                      </a:pPr>
                       <a:r>
-                        <a:rPr lang="en-US" altLang="ko-KR" sz="600" u="none" strike="noStrike" dirty="0">
-                          <a:effectLst/>
-                          <a:latin typeface="+mn-ea"/>
-                          <a:ea typeface="+mn-ea"/>
-                        </a:rPr>
-                        <a:t>0</a:t>
+                        <a:t>107.6</a:t>
                       </a:r>
-                      <a:endParaRPr lang="en-US" altLang="ko-KR" sz="600" b="0" i="0" u="none" strike="noStrike" dirty="0">
-                        <a:solidFill>
-                          <a:srgbClr val="000000"/>
-                        </a:solidFill>
-                        <a:effectLst/>
-                        <a:latin typeface="+mn-ea"/>
-                        <a:ea typeface="+mn-ea"/>
-                      </a:endParaRPr>
                     </a:p>
                   </a:txBody>
                   <a:tcPr marL="0" marR="0" marT="0" marB="0" anchor="ctr">
@@ -17853,23 +17564,17 @@
                     <a:bodyPr/>
                     <a:lstStyle/>
                     <a:p>
-                      <a:pPr algn="ctr" fontAlgn="ctr"/>
+                      <a:pPr algn="ctr">
+                        <a:defRPr sz="700" b="0">
+                          <a:solidFill>
+                            <a:srgbClr val="445474"/>
+                          </a:solidFill>
+                          <a:latin typeface="맑은 고딕"/>
+                        </a:defRPr>
+                      </a:pPr>
                       <a:r>
-                        <a:rPr lang="en-US" altLang="ko-KR" sz="600" u="none" strike="noStrike">
-                          <a:effectLst/>
-                          <a:latin typeface="+mn-ea"/>
-                          <a:ea typeface="+mn-ea"/>
-                        </a:rPr>
-                        <a:t>0</a:t>
+                        <a:t>201</a:t>
                       </a:r>
-                      <a:endParaRPr lang="en-US" altLang="ko-KR" sz="600" b="0" i="0" u="none" strike="noStrike">
-                        <a:solidFill>
-                          <a:srgbClr val="000000"/>
-                        </a:solidFill>
-                        <a:effectLst/>
-                        <a:latin typeface="+mn-ea"/>
-                        <a:ea typeface="+mn-ea"/>
-                      </a:endParaRPr>
                     </a:p>
                   </a:txBody>
                   <a:tcPr marL="0" marR="0" marT="0" marB="0" anchor="ctr">
@@ -18025,23 +17730,17 @@
                     <a:bodyPr/>
                     <a:lstStyle/>
                     <a:p>
-                      <a:pPr algn="ctr" fontAlgn="ctr"/>
+                      <a:pPr algn="ctr">
+                        <a:defRPr sz="700" b="0">
+                          <a:solidFill>
+                            <a:srgbClr val="445474"/>
+                          </a:solidFill>
+                          <a:latin typeface="맑은 고딕"/>
+                        </a:defRPr>
+                      </a:pPr>
                       <a:r>
-                        <a:rPr lang="en-US" altLang="ko-KR" sz="600" u="none" strike="noStrike" dirty="0">
-                          <a:effectLst/>
-                          <a:latin typeface="+mn-ea"/>
-                          <a:ea typeface="+mn-ea"/>
-                        </a:rPr>
-                        <a:t>0</a:t>
+                        <a:t>-241</a:t>
                       </a:r>
-                      <a:endParaRPr lang="en-US" altLang="ko-KR" sz="600" b="0" i="0" u="none" strike="noStrike" dirty="0">
-                        <a:solidFill>
-                          <a:srgbClr val="000000"/>
-                        </a:solidFill>
-                        <a:effectLst/>
-                        <a:latin typeface="+mn-ea"/>
-                        <a:ea typeface="+mn-ea"/>
-                      </a:endParaRPr>
                     </a:p>
                   </a:txBody>
                   <a:tcPr marL="0" marR="0" marT="0" marB="0" anchor="ctr">
@@ -18189,23 +17888,17 @@
                     <a:bodyPr/>
                     <a:lstStyle/>
                     <a:p>
-                      <a:pPr algn="ctr" fontAlgn="ctr"/>
+                      <a:pPr algn="ctr">
+                        <a:defRPr sz="700" b="0">
+                          <a:solidFill>
+                            <a:srgbClr val="445474"/>
+                          </a:solidFill>
+                          <a:latin typeface="맑은 고딕"/>
+                        </a:defRPr>
+                      </a:pPr>
                       <a:r>
-                        <a:rPr lang="en-US" altLang="ko-KR" sz="600" u="none" strike="noStrike" dirty="0">
-                          <a:effectLst/>
-                          <a:latin typeface="+mn-ea"/>
-                          <a:ea typeface="+mn-ea"/>
-                        </a:rPr>
-                        <a:t>0</a:t>
+                        <a:t>149.8</a:t>
                       </a:r>
-                      <a:endParaRPr lang="en-US" altLang="ko-KR" sz="600" b="0" i="0" u="none" strike="noStrike" dirty="0">
-                        <a:solidFill>
-                          <a:srgbClr val="000000"/>
-                        </a:solidFill>
-                        <a:effectLst/>
-                        <a:latin typeface="+mn-ea"/>
-                        <a:ea typeface="+mn-ea"/>
-                      </a:endParaRPr>
                     </a:p>
                   </a:txBody>
                   <a:tcPr marL="0" marR="0" marT="0" marB="0" anchor="ctr">
@@ -18353,23 +18046,17 @@
                     <a:bodyPr/>
                     <a:lstStyle/>
                     <a:p>
-                      <a:pPr algn="ctr" fontAlgn="ctr"/>
+                      <a:pPr algn="ctr">
+                        <a:defRPr sz="700" b="0">
+                          <a:solidFill>
+                            <a:srgbClr val="445474"/>
+                          </a:solidFill>
+                          <a:latin typeface="맑은 고딕"/>
+                        </a:defRPr>
+                      </a:pPr>
                       <a:r>
-                        <a:rPr lang="en-US" altLang="ko-KR" sz="600" u="none" strike="noStrike" dirty="0">
-                          <a:effectLst/>
-                          <a:latin typeface="+mn-ea"/>
-                          <a:ea typeface="+mn-ea"/>
-                        </a:rPr>
-                        <a:t>0</a:t>
+                        <a:t>83.6</a:t>
                       </a:r>
-                      <a:endParaRPr lang="en-US" altLang="ko-KR" sz="600" b="0" i="0" u="none" strike="noStrike" dirty="0">
-                        <a:solidFill>
-                          <a:srgbClr val="000000"/>
-                        </a:solidFill>
-                        <a:effectLst/>
-                        <a:latin typeface="+mn-ea"/>
-                        <a:ea typeface="+mn-ea"/>
-                      </a:endParaRPr>
                     </a:p>
                   </a:txBody>
                   <a:tcPr marL="0" marR="0" marT="0" marB="0" anchor="ctr">
@@ -18487,11 +18174,12 @@
           <a:bodyPr rtlCol="0" anchor="ctr"/>
           <a:lstStyle/>
           <a:p>
-            <a:r>
-              <a:rPr lang="en-US" altLang="ko-KR" sz="1400" b="1" dirty="0">
-                <a:latin typeface="+mj-ea"/>
-                <a:ea typeface="+mj-ea"/>
-              </a:rPr>
+            <a:pPr algn="ctr">
+              <a:defRPr sz="1300" b="1">
+                <a:latin typeface="맑은 고딕"/>
+              </a:defRPr>
+            </a:pPr>
+            <a:r>
               <a:t>C/C &amp; Main problem</a:t>
             </a:r>
           </a:p>
@@ -18546,11 +18234,12 @@
           <a:bodyPr rtlCol="0" anchor="ctr"/>
           <a:lstStyle/>
           <a:p>
-            <a:r>
-              <a:rPr lang="en-US" altLang="ko-KR" sz="1200" b="1" dirty="0">
-                <a:latin typeface="+mj-ea"/>
-                <a:ea typeface="+mj-ea"/>
-              </a:rPr>
+            <a:pPr algn="ctr">
+              <a:defRPr sz="1300" b="1">
+                <a:latin typeface="맑은 고딕"/>
+              </a:defRPr>
+            </a:pPr>
+            <a:r>
               <a:t>MPH:</a:t>
             </a:r>
           </a:p>
@@ -18644,16 +18333,13 @@
           </a:bodyPr>
           <a:lstStyle/>
           <a:p>
-            <a:pPr eaLnBrk="1" hangingPunct="1"/>
-            <a:r>
-              <a:rPr lang="en-US" altLang="ko-KR" sz="1400" b="1" dirty="0">
-                <a:solidFill>
-                  <a:srgbClr val="000000"/>
-                </a:solidFill>
-                <a:latin typeface="+mn-ea"/>
-                <a:cs typeface="Times New Roman Bold" panose="02020803070505020304" pitchFamily="18" charset="0"/>
-              </a:rPr>
-              <a:t>HGI:+</a:t>
+            <a:pPr algn="ctr">
+              <a:defRPr sz="1300" b="1">
+                <a:latin typeface="맑은 고딕"/>
+              </a:defRPr>
+            </a:pPr>
+            <a:r>
+              <a:t>HGI:311.45</a:t>
             </a:r>
           </a:p>
         </p:txBody>
@@ -18737,16 +18423,13 @@
           </a:bodyPr>
           <a:lstStyle/>
           <a:p>
-            <a:pPr eaLnBrk="1" hangingPunct="1"/>
-            <a:r>
-              <a:rPr lang="en-US" altLang="ko-KR" sz="1400" b="1" dirty="0">
-                <a:solidFill>
-                  <a:srgbClr val="000000"/>
-                </a:solidFill>
-                <a:latin typeface="+mn-ea"/>
-                <a:cs typeface="Times New Roman Bold" panose="02020803070505020304" pitchFamily="18" charset="0"/>
-              </a:rPr>
-              <a:t>VGI:+</a:t>
+            <a:pPr algn="ctr">
+              <a:defRPr sz="1300" b="1">
+                <a:latin typeface="맑은 고딕"/>
+              </a:defRPr>
+            </a:pPr>
+            <a:r>
+              <a:t>VGI:-1.04</a:t>
             </a:r>
           </a:p>
         </p:txBody>
@@ -19072,16 +18755,13 @@
           </a:bodyPr>
           <a:lstStyle/>
           <a:p>
-            <a:pPr algn="ctr" eaLnBrk="1" hangingPunct="1"/>
-            <a:r>
-              <a:rPr lang="en-US" altLang="ko-KR" sz="1300" b="1" dirty="0">
-                <a:solidFill>
-                  <a:srgbClr val="000000"/>
-                </a:solidFill>
-                <a:latin typeface="+mn-ea"/>
-                <a:cs typeface="Times New Roman Bold" panose="02020803070505020304" pitchFamily="18" charset="0"/>
-              </a:rPr>
-              <a:t>IAPDI:</a:t>
+            <a:pPr algn="ctr">
+              <a:defRPr sz="1300" b="1">
+                <a:latin typeface="맑은 고딕"/>
+              </a:defRPr>
+            </a:pPr>
+            <a:r>
+              <a:t>IAPDI:81</a:t>
             </a:r>
           </a:p>
         </p:txBody>
@@ -19295,16 +18975,13 @@
           </a:bodyPr>
           <a:lstStyle/>
           <a:p>
-            <a:pPr eaLnBrk="1" hangingPunct="1"/>
-            <a:r>
-              <a:rPr lang="en-US" altLang="ko-KR" sz="1300" b="1" dirty="0">
-                <a:solidFill>
-                  <a:srgbClr val="000000"/>
-                </a:solidFill>
-                <a:latin typeface="+mn-ea"/>
-                <a:cs typeface="Times New Roman Bold" panose="02020803070505020304" pitchFamily="18" charset="0"/>
-              </a:rPr>
-              <a:t>2APDL:</a:t>
+            <a:pPr algn="ctr">
+              <a:defRPr sz="1300" b="1">
+                <a:latin typeface="맑은 고딕"/>
+              </a:defRPr>
+            </a:pPr>
+            <a:r>
+              <a:t>2APDL:55.04</a:t>
             </a:r>
           </a:p>
         </p:txBody>
@@ -19337,16 +19014,13 @@
           </a:bodyPr>
           <a:lstStyle/>
           <a:p>
-            <a:pPr eaLnBrk="1" hangingPunct="1"/>
-            <a:r>
-              <a:rPr lang="en-US" altLang="ko-KR" sz="1300" b="1" dirty="0">
-                <a:solidFill>
-                  <a:srgbClr val="000000"/>
-                </a:solidFill>
-                <a:latin typeface="+mn-ea"/>
-                <a:cs typeface="Times New Roman Bold" panose="02020803070505020304" pitchFamily="18" charset="0"/>
-              </a:rPr>
-              <a:t>IODI:</a:t>
+            <a:pPr algn="ctr">
+              <a:defRPr sz="1300" b="1">
+                <a:latin typeface="맑은 고딕"/>
+              </a:defRPr>
+            </a:pPr>
+            <a:r>
+              <a:t>IODI:55.27</a:t>
             </a:r>
           </a:p>
         </p:txBody>
@@ -19422,16 +19096,13 @@
           </a:bodyPr>
           <a:lstStyle/>
           <a:p>
-            <a:pPr eaLnBrk="1" hangingPunct="1"/>
-            <a:r>
-              <a:rPr lang="en-US" altLang="ko-KR" sz="1300" b="1" dirty="0">
-                <a:solidFill>
-                  <a:srgbClr val="000000"/>
-                </a:solidFill>
-                <a:latin typeface="+mn-ea"/>
-                <a:cs typeface="Times New Roman Bold" panose="02020803070505020304" pitchFamily="18" charset="0"/>
-              </a:rPr>
-              <a:t>VDL:</a:t>
+            <a:pPr algn="ctr">
+              <a:defRPr sz="1300" b="1">
+                <a:latin typeface="맑은 고딕"/>
+              </a:defRPr>
+            </a:pPr>
+            <a:r>
+              <a:t>VDL:13.74</a:t>
             </a:r>
           </a:p>
         </p:txBody>
@@ -19507,34 +19178,14 @@
           </a:bodyPr>
           <a:lstStyle/>
           <a:p>
-            <a:pPr eaLnBrk="1" hangingPunct="1"/>
-            <a:r>
-              <a:rPr lang="en-US" altLang="ko-KR" sz="1400" b="1" dirty="0">
-                <a:solidFill>
-                  <a:srgbClr val="000000"/>
-                </a:solidFill>
-                <a:latin typeface="+mn-ea"/>
-                <a:cs typeface="Times New Roman Bold" panose="02020803070505020304" pitchFamily="18" charset="0"/>
-              </a:rPr>
-              <a:t>CEPH </a:t>
-            </a:r>
-            <a:r>
-              <a:rPr lang="ko-KR" altLang="en-US" sz="1400" b="1" dirty="0">
-                <a:solidFill>
-                  <a:srgbClr val="000000"/>
-                </a:solidFill>
-                <a:latin typeface="+mn-ea"/>
-                <a:cs typeface="Times New Roman Bold" panose="02020803070505020304" pitchFamily="18" charset="0"/>
-              </a:rPr>
-              <a:t>데이터</a:t>
-            </a:r>
-            <a:endParaRPr lang="en-US" altLang="ko-KR" sz="1400" b="1" dirty="0">
-              <a:solidFill>
-                <a:srgbClr val="000000"/>
-              </a:solidFill>
-              <a:latin typeface="+mn-ea"/>
-              <a:cs typeface="Times New Roman Bold" panose="02020803070505020304" pitchFamily="18" charset="0"/>
-            </a:endParaRPr>
+            <a:pPr algn="ctr">
+              <a:defRPr sz="1300" b="1">
+                <a:latin typeface="맑은 고딕"/>
+              </a:defRPr>
+            </a:pPr>
+            <a:r>
+              <a:t>CEPH RESULT</a:t>
+            </a:r>
           </a:p>
         </p:txBody>
       </p:sp>
@@ -19566,16 +19217,13 @@
           </a:bodyPr>
           <a:lstStyle/>
           <a:p>
-            <a:pPr eaLnBrk="1" hangingPunct="1"/>
-            <a:r>
-              <a:rPr lang="en-US" altLang="ko-KR" sz="1400" b="1" dirty="0">
-                <a:solidFill>
-                  <a:srgbClr val="000000"/>
-                </a:solidFill>
-                <a:latin typeface="+mn-ea"/>
-                <a:cs typeface="Times New Roman Bold" panose="02020803070505020304" pitchFamily="18" charset="0"/>
-              </a:rPr>
-              <a:t>CFD:</a:t>
+            <a:pPr algn="ctr">
+              <a:defRPr sz="1300" b="1">
+                <a:latin typeface="맑은 고딕"/>
+              </a:defRPr>
+            </a:pPr>
+            <a:r>
+              <a:t>CFD:97.13</a:t>
             </a:r>
           </a:p>
         </p:txBody>
@@ -19608,15 +19256,12 @@
           </a:bodyPr>
           <a:lstStyle/>
           <a:p>
-            <a:pPr eaLnBrk="1" hangingPunct="1"/>
-            <a:r>
-              <a:rPr lang="en-US" altLang="ko-KR" sz="1600" b="1" dirty="0">
-                <a:solidFill>
-                  <a:srgbClr val="000000"/>
-                </a:solidFill>
-                <a:latin typeface="+mn-ea"/>
-                <a:cs typeface="Times New Roman Bold" panose="02020803070505020304" pitchFamily="18" charset="0"/>
-              </a:rPr>
+            <a:pPr algn="ctr">
+              <a:defRPr sz="1300" b="1">
+                <a:latin typeface="맑은 고딕"/>
+              </a:defRPr>
+            </a:pPr>
+            <a:r>
               <a:t>Extraction:</a:t>
             </a:r>
           </a:p>
@@ -19669,6 +19314,30 @@
           </a:p>
         </p:txBody>
       </p:sp>
+      <p:pic>
+        <p:nvPicPr>
+          <p:cNvPr id="3170" name="Picture 3169" descr="oral_default.jpg"/>
+          <p:cNvPicPr>
+            <a:picLocks noChangeAspect="1"/>
+          </p:cNvPicPr>
+          <p:nvPr/>
+        </p:nvPicPr>
+        <p:blipFill>
+          <a:blip r:embed="rId2"/>
+          <a:stretch>
+            <a:fillRect/>
+          </a:stretch>
+        </p:blipFill>
+        <p:spPr>
+          <a:xfrm>
+            <a:off x="2468880" y="502920"/>
+            <a:ext cx="1463040" cy="1005840"/>
+          </a:xfrm>
+          <a:prstGeom prst="rect">
+            <a:avLst/>
+          </a:prstGeom>
+        </p:spPr>
+      </p:pic>
     </p:spTree>
     <p:extLst>
       <p:ext uri="{BB962C8B-B14F-4D97-AF65-F5344CB8AC3E}">
@@ -29430,14 +29099,14 @@
       </p:pic>
       <p:pic>
         <p:nvPicPr>
-          <p:cNvPr id="9" name="Picture 8" descr="default_image.jpg"/>
+          <p:cNvPr id="9" name="Picture 8" descr="photo_8.jpg"/>
           <p:cNvPicPr>
             <a:picLocks noChangeAspect="1"/>
           </p:cNvPicPr>
           <p:nvPr/>
         </p:nvPicPr>
         <p:blipFill>
-          <a:blip r:embed="rId2"/>
+          <a:blip r:embed="rId3"/>
           <a:stretch>
             <a:fillRect/>
           </a:stretch>
@@ -29556,14 +29225,14 @@
       </p:pic>
       <p:pic>
         <p:nvPicPr>
-          <p:cNvPr id="5" name="Picture 4" descr="oral_default.jpg"/>
+          <p:cNvPr id="5" name="Picture 4" descr="oralPhoto_4.jpg"/>
           <p:cNvPicPr>
             <a:picLocks noChangeAspect="1"/>
           </p:cNvPicPr>
           <p:nvPr/>
         </p:nvPicPr>
         <p:blipFill>
-          <a:blip r:embed="rId2"/>
+          <a:blip r:embed="rId3"/>
           <a:stretch>
             <a:fillRect/>
           </a:stretch>
@@ -29946,22 +29615,22 @@
       </p:pic>
       <p:pic>
         <p:nvPicPr>
-          <p:cNvPr id="3" name="Picture 2" descr="posture_default.jpg"/>
+          <p:cNvPr id="3" name="Picture 2" descr="posturePhoto_6.jpg"/>
           <p:cNvPicPr>
             <a:picLocks noChangeAspect="1"/>
           </p:cNvPicPr>
           <p:nvPr/>
         </p:nvPicPr>
         <p:blipFill>
-          <a:blip r:embed="rId2"/>
+          <a:blip r:embed="rId3"/>
           <a:stretch>
             <a:fillRect/>
           </a:stretch>
         </p:blipFill>
         <p:spPr>
           <a:xfrm>
-            <a:off x="2514600" y="2057400"/>
-            <a:ext cx="2057400" cy="2743200"/>
+            <a:off x="2514600" y="1885950"/>
+            <a:ext cx="2057400" cy="3086100"/>
           </a:xfrm>
           <a:prstGeom prst="rect">
             <a:avLst/>

--- a/output_ppt.pptx
+++ b/output_ppt.pptx
@@ -7038,7 +7038,7 @@
               </a:defRPr>
             </a:pPr>
             <a:r>
-              <a:t>Female 순응교합 20 2005-03-31</a:t>
+              <a:t>Male 순응교합 20 2005-03-31</a:t>
             </a:r>
           </a:p>
           <a:p>
@@ -7051,7 +7051,7 @@
               </a:defRPr>
             </a:pPr>
             <a:r>
-              <a:t> S1.B3.D3.C1-nbt(dbt)-RM(Rt)-Fx:Ex-Fx/1-Type IV</a:t>
+              <a:t> S1.B2.D2.C1-nbt(dbt)-RM(Rt)-Fx:Ex-Fx/1-Type IV</a:t>
             </a:r>
           </a:p>
         </p:txBody>
@@ -12040,7 +12040,7 @@
                         </a:defRPr>
                       </a:pPr>
                       <a:r>
-                        <a:t>-24</a:t>
+                        <a:t>13.3</a:t>
                       </a:r>
                     </a:p>
                   </a:txBody>
@@ -12198,7 +12198,7 @@
                         </a:defRPr>
                       </a:pPr>
                       <a:r>
-                        <a:t>79.6</a:t>
+                        <a:t>114.2</a:t>
                       </a:r>
                     </a:p>
                   </a:txBody>
@@ -12356,7 +12356,7 @@
                         </a:defRPr>
                       </a:pPr>
                       <a:r>
-                        <a:t>103.6</a:t>
+                        <a:t>100.9</a:t>
                       </a:r>
                     </a:p>
                   </a:txBody>
@@ -12514,7 +12514,7 @@
                         </a:defRPr>
                       </a:pPr>
                       <a:r>
-                        <a:t>89.2</a:t>
+                        <a:t>101.3</a:t>
                       </a:r>
                     </a:p>
                   </a:txBody>
@@ -12672,7 +12672,7 @@
                         </a:defRPr>
                       </a:pPr>
                       <a:r>
-                        <a:t>155.3</a:t>
+                        <a:t>120.1</a:t>
                       </a:r>
                     </a:p>
                   </a:txBody>
@@ -12830,7 +12830,7 @@
                         </a:defRPr>
                       </a:pPr>
                       <a:r>
-                        <a:t>113.9</a:t>
+                        <a:t>161.2</a:t>
                       </a:r>
                     </a:p>
                   </a:txBody>
@@ -12988,7 +12988,7 @@
                         </a:defRPr>
                       </a:pPr>
                       <a:r>
-                        <a:t>113.9</a:t>
+                        <a:t>161.2</a:t>
                       </a:r>
                     </a:p>
                   </a:txBody>
@@ -13146,7 +13146,7 @@
                         </a:defRPr>
                       </a:pPr>
                       <a:r>
-                        <a:t>83.6</a:t>
+                        <a:t>34.8</a:t>
                       </a:r>
                     </a:p>
                   </a:txBody>
@@ -13304,7 +13304,7 @@
                         </a:defRPr>
                       </a:pPr>
                       <a:r>
-                        <a:t>128.3</a:t>
+                        <a:t>82.8</a:t>
                       </a:r>
                     </a:p>
                   </a:txBody>
@@ -13462,7 +13462,7 @@
                         </a:defRPr>
                       </a:pPr>
                       <a:r>
-                        <a:t>538.7</a:t>
+                        <a:t>-266.7</a:t>
                       </a:r>
                     </a:p>
                   </a:txBody>
@@ -13620,7 +13620,7 @@
                         </a:defRPr>
                       </a:pPr>
                       <a:r>
-                        <a:t>146.8</a:t>
+                        <a:t>5.7</a:t>
                       </a:r>
                     </a:p>
                   </a:txBody>
@@ -13778,7 +13778,7 @@
                         </a:defRPr>
                       </a:pPr>
                       <a:r>
-                        <a:t>149.8</a:t>
+                        <a:t>16.1</a:t>
                       </a:r>
                     </a:p>
                   </a:txBody>
@@ -13936,7 +13936,7 @@
                         </a:defRPr>
                       </a:pPr>
                       <a:r>
-                        <a:t>445.4</a:t>
+                        <a:t>129.2</a:t>
                       </a:r>
                     </a:p>
                   </a:txBody>
@@ -14094,7 +14094,7 @@
                         </a:defRPr>
                       </a:pPr>
                       <a:r>
-                        <a:t>127.1</a:t>
+                        <a:t>94.3</a:t>
                       </a:r>
                     </a:p>
                   </a:txBody>
@@ -14252,7 +14252,7 @@
                         </a:defRPr>
                       </a:pPr>
                       <a:r>
-                        <a:t>57.9</a:t>
+                        <a:t>35.9</a:t>
                       </a:r>
                     </a:p>
                   </a:txBody>
@@ -14410,7 +14410,7 @@
                         </a:defRPr>
                       </a:pPr>
                       <a:r>
-                        <a:t>7.9</a:t>
+                        <a:t>59.6</a:t>
                       </a:r>
                     </a:p>
                   </a:txBody>
@@ -14568,7 +14568,7 @@
                         </a:defRPr>
                       </a:pPr>
                       <a:r>
-                        <a:t>23.4</a:t>
+                        <a:t>8.2</a:t>
                       </a:r>
                     </a:p>
                   </a:txBody>
@@ -14884,7 +14884,7 @@
                         </a:defRPr>
                       </a:pPr>
                       <a:r>
-                        <a:t>140.1</a:t>
+                        <a:t>37.4</a:t>
                       </a:r>
                     </a:p>
                   </a:txBody>
@@ -15042,7 +15042,7 @@
                         </a:defRPr>
                       </a:pPr>
                       <a:r>
-                        <a:t>65.9</a:t>
+                        <a:t>42.2</a:t>
                       </a:r>
                     </a:p>
                   </a:txBody>
@@ -15200,7 +15200,7 @@
                         </a:defRPr>
                       </a:pPr>
                       <a:r>
-                        <a:t>98.7</a:t>
+                        <a:t>135.9</a:t>
                       </a:r>
                     </a:p>
                   </a:txBody>
@@ -15358,7 +15358,7 @@
                         </a:defRPr>
                       </a:pPr>
                       <a:r>
-                        <a:t>148.7</a:t>
+                        <a:t>112.2</a:t>
                       </a:r>
                     </a:p>
                   </a:txBody>
@@ -15519,7 +15519,7 @@
                         </a:defRPr>
                       </a:pPr>
                       <a:r>
-                        <a:t>487.4</a:t>
+                        <a:t>281.6</a:t>
                       </a:r>
                     </a:p>
                   </a:txBody>
@@ -15677,7 +15677,7 @@
                         </a:defRPr>
                       </a:pPr>
                       <a:r>
-                        <a:t>449.9</a:t>
+                        <a:t>281.8</a:t>
                       </a:r>
                     </a:p>
                   </a:txBody>
@@ -15835,7 +15835,7 @@
                         </a:defRPr>
                       </a:pPr>
                       <a:r>
-                        <a:t>1112.2</a:t>
+                        <a:t>203.9</a:t>
                       </a:r>
                     </a:p>
                   </a:txBody>
@@ -15993,7 +15993,7 @@
                         </a:defRPr>
                       </a:pPr>
                       <a:r>
-                        <a:t>51.4</a:t>
+                        <a:t>133</a:t>
                       </a:r>
                     </a:p>
                   </a:txBody>
@@ -16151,7 +16151,7 @@
                         </a:defRPr>
                       </a:pPr>
                       <a:r>
-                        <a:t>161.9</a:t>
+                        <a:t>7.3</a:t>
                       </a:r>
                     </a:p>
                   </a:txBody>
@@ -16309,7 +16309,7 @@
                         </a:defRPr>
                       </a:pPr>
                       <a:r>
-                        <a:t>137.9</a:t>
+                        <a:t>159.1</a:t>
                       </a:r>
                     </a:p>
                   </a:txBody>
@@ -16467,7 +16467,7 @@
                         </a:defRPr>
                       </a:pPr>
                       <a:r>
-                        <a:t>942.5</a:t>
+                        <a:t>167.6</a:t>
                       </a:r>
                     </a:p>
                   </a:txBody>
@@ -16625,7 +16625,7 @@
                         </a:defRPr>
                       </a:pPr>
                       <a:r>
-                        <a:t>780.6</a:t>
+                        <a:t>160.3</a:t>
                       </a:r>
                     </a:p>
                   </a:txBody>
@@ -16783,7 +16783,7 @@
                         </a:defRPr>
                       </a:pPr>
                       <a:r>
-                        <a:t>3.7</a:t>
+                        <a:t>91.5</a:t>
                       </a:r>
                     </a:p>
                   </a:txBody>
@@ -16941,7 +16941,7 @@
                         </a:defRPr>
                       </a:pPr>
                       <a:r>
-                        <a:t>71.2</a:t>
+                        <a:t>50.4</a:t>
                       </a:r>
                     </a:p>
                   </a:txBody>
@@ -17099,7 +17099,7 @@
                         </a:defRPr>
                       </a:pPr>
                       <a:r>
-                        <a:t>36.7</a:t>
+                        <a:t>27.6</a:t>
                       </a:r>
                     </a:p>
                   </a:txBody>
@@ -17257,7 +17257,7 @@
                         </a:defRPr>
                       </a:pPr>
                       <a:r>
-                        <a:t>102.7</a:t>
+                        <a:t>120.4</a:t>
                       </a:r>
                     </a:p>
                   </a:txBody>
@@ -17415,7 +17415,7 @@
                         </a:defRPr>
                       </a:pPr>
                       <a:r>
-                        <a:t>107.6</a:t>
+                        <a:t>104.3</a:t>
                       </a:r>
                     </a:p>
                   </a:txBody>
@@ -17573,7 +17573,7 @@
                         </a:defRPr>
                       </a:pPr>
                       <a:r>
-                        <a:t>201</a:t>
+                        <a:t>218</a:t>
                       </a:r>
                     </a:p>
                   </a:txBody>
@@ -17739,7 +17739,7 @@
                         </a:defRPr>
                       </a:pPr>
                       <a:r>
-                        <a:t>-241</a:t>
+                        <a:t>-177</a:t>
                       </a:r>
                     </a:p>
                   </a:txBody>
@@ -17897,7 +17897,7 @@
                         </a:defRPr>
                       </a:pPr>
                       <a:r>
-                        <a:t>149.8</a:t>
+                        <a:t>16.1</a:t>
                       </a:r>
                     </a:p>
                   </a:txBody>
@@ -18055,7 +18055,7 @@
                         </a:defRPr>
                       </a:pPr>
                       <a:r>
-                        <a:t>83.6</a:t>
+                        <a:t>34.8</a:t>
                       </a:r>
                     </a:p>
                   </a:txBody>
@@ -18339,7 +18339,7 @@
               </a:defRPr>
             </a:pPr>
             <a:r>
-              <a:t>HGI:311.45</a:t>
+              <a:t>HGI:77.24</a:t>
             </a:r>
           </a:p>
         </p:txBody>
@@ -18429,7 +18429,7 @@
               </a:defRPr>
             </a:pPr>
             <a:r>
-              <a:t>VGI:-1.04</a:t>
+              <a:t>VGI:34.24</a:t>
             </a:r>
           </a:p>
         </p:txBody>
@@ -18761,7 +18761,7 @@
               </a:defRPr>
             </a:pPr>
             <a:r>
-              <a:t>IAPDI:81</a:t>
+              <a:t>IAPDI:107.27</a:t>
             </a:r>
           </a:p>
         </p:txBody>
@@ -18981,7 +18981,7 @@
               </a:defRPr>
             </a:pPr>
             <a:r>
-              <a:t>2APDL:55.04</a:t>
+              <a:t>2APDL:-72.94</a:t>
             </a:r>
           </a:p>
         </p:txBody>
@@ -19020,7 +19020,7 @@
               </a:defRPr>
             </a:pPr>
             <a:r>
-              <a:t>IODI:55.27</a:t>
+              <a:t>IODI:-1.18</a:t>
             </a:r>
           </a:p>
         </p:txBody>
@@ -19102,7 +19102,7 @@
               </a:defRPr>
             </a:pPr>
             <a:r>
-              <a:t>VDL:13.74</a:t>
+              <a:t>VDL:17.45</a:t>
             </a:r>
           </a:p>
         </p:txBody>
@@ -19223,7 +19223,7 @@
               </a:defRPr>
             </a:pPr>
             <a:r>
-              <a:t>CFD:97.13</a:t>
+              <a:t>CFD:-55.19</a:t>
             </a:r>
           </a:p>
         </p:txBody>
@@ -28979,14 +28979,14 @@
       </p:pic>
       <p:pic>
         <p:nvPicPr>
-          <p:cNvPr id="4" name="Picture 3" descr="default_image.jpg"/>
+          <p:cNvPr id="4" name="Picture 3" descr="photo_3.jpg"/>
           <p:cNvPicPr>
             <a:picLocks noChangeAspect="1"/>
           </p:cNvPicPr>
           <p:nvPr/>
         </p:nvPicPr>
         <p:blipFill>
-          <a:blip r:embed="rId2"/>
+          <a:blip r:embed="rId3"/>
           <a:stretch>
             <a:fillRect/>
           </a:stretch>
@@ -29106,7 +29106,7 @@
           <p:nvPr/>
         </p:nvPicPr>
         <p:blipFill>
-          <a:blip r:embed="rId3"/>
+          <a:blip r:embed="rId4"/>
           <a:stretch>
             <a:fillRect/>
           </a:stretch>
@@ -29465,7 +29465,7 @@
       </p:grpSpPr>
       <p:pic>
         <p:nvPicPr>
-          <p:cNvPr id="2" name="Picture 1" descr="posture_default.jpg"/>
+          <p:cNvPr id="2" name="Picture 1" descr="posturePhoto_1.jpg"/>
           <p:cNvPicPr>
             <a:picLocks noChangeAspect="1"/>
           </p:cNvPicPr>
@@ -29479,8 +29479,8 @@
         </p:blipFill>
         <p:spPr>
           <a:xfrm>
-            <a:off x="457200" y="2057400"/>
-            <a:ext cx="2057400" cy="2743200"/>
+            <a:off x="457200" y="1885950"/>
+            <a:ext cx="2057400" cy="3086100"/>
           </a:xfrm>
           <a:prstGeom prst="rect">
             <a:avLst/>
@@ -29496,7 +29496,7 @@
           <p:nvPr/>
         </p:nvPicPr>
         <p:blipFill>
-          <a:blip r:embed="rId2"/>
+          <a:blip r:embed="rId3"/>
           <a:stretch>
             <a:fillRect/>
           </a:stretch>
@@ -29520,7 +29520,7 @@
           <p:nvPr/>
         </p:nvPicPr>
         <p:blipFill>
-          <a:blip r:embed="rId2"/>
+          <a:blip r:embed="rId3"/>
           <a:stretch>
             <a:fillRect/>
           </a:stretch>
@@ -29544,7 +29544,7 @@
           <p:nvPr/>
         </p:nvPicPr>
         <p:blipFill>
-          <a:blip r:embed="rId2"/>
+          <a:blip r:embed="rId3"/>
           <a:stretch>
             <a:fillRect/>
           </a:stretch>
@@ -29615,22 +29615,22 @@
       </p:pic>
       <p:pic>
         <p:nvPicPr>
-          <p:cNvPr id="3" name="Picture 2" descr="posturePhoto_6.jpg"/>
+          <p:cNvPr id="3" name="Picture 2" descr="posture_default.jpg"/>
           <p:cNvPicPr>
             <a:picLocks noChangeAspect="1"/>
           </p:cNvPicPr>
           <p:nvPr/>
         </p:nvPicPr>
         <p:blipFill>
-          <a:blip r:embed="rId3"/>
+          <a:blip r:embed="rId2"/>
           <a:stretch>
             <a:fillRect/>
           </a:stretch>
         </p:blipFill>
         <p:spPr>
           <a:xfrm>
-            <a:off x="2514600" y="1885950"/>
-            <a:ext cx="2057400" cy="3086100"/>
+            <a:off x="2514600" y="2057400"/>
+            <a:ext cx="2057400" cy="2743200"/>
           </a:xfrm>
           <a:prstGeom prst="rect">
             <a:avLst/>

--- a/output_ppt.pptx
+++ b/output_ppt.pptx
@@ -7029,29 +7029,108 @@
             </a:lvl9pPr>
           </a:lstStyle>
           <a:p>
-            <a:pPr algn="ctr">
-              <a:defRPr sz="1500" b="1">
+            <a:pPr eaLnBrk="1" hangingPunct="1"/>
+            <a:r>
+              <a:rPr lang="en-US" altLang="ko-KR" sz="1600" b="1" dirty="0">
                 <a:solidFill>
-                  <a:srgbClr val="445474"/>
+                  <a:schemeClr val="tx2"/>
                 </a:solidFill>
-                <a:latin typeface="맑은 고딕"/>
-              </a:defRPr>
-            </a:pPr>
-            <a:r>
-              <a:t>Male 순응교합 20 2005-03-31</a:t>
+                <a:latin typeface="+mj-ea"/>
+                <a:ea typeface="+mj-ea"/>
+                <a:cs typeface="Arial" panose="020B0604020202020204" pitchFamily="34" charset="0"/>
+              </a:rPr>
+              <a:t>  (F) </a:t>
+            </a:r>
+            <a:r>
+              <a:rPr lang="ko-KR" altLang="en-US" sz="1600" b="1" dirty="0">
+                <a:solidFill>
+                  <a:schemeClr val="tx2"/>
+                </a:solidFill>
+                <a:latin typeface="+mj-ea"/>
+                <a:ea typeface="+mj-ea"/>
+                <a:cs typeface="Arial" panose="020B0604020202020204" pitchFamily="34" charset="0"/>
+              </a:rPr>
+              <a:t>순응교합연구회 </a:t>
+            </a:r>
+            <a:r>
+              <a:rPr lang="en-US" altLang="ko-KR" sz="1600" b="1" dirty="0">
+                <a:solidFill>
+                  <a:schemeClr val="tx2"/>
+                </a:solidFill>
+                <a:latin typeface="+mj-ea"/>
+                <a:ea typeface="+mj-ea"/>
+                <a:cs typeface="Arial" panose="020B0604020202020204" pitchFamily="34" charset="0"/>
+              </a:rPr>
+              <a:t>8y since 2017</a:t>
             </a:r>
           </a:p>
           <a:p>
-            <a:pPr algn="ctr">
-              <a:defRPr sz="1500" b="1">
+            <a:pPr eaLnBrk="1" hangingPunct="1"/>
+            <a:r>
+              <a:rPr lang="en-US" altLang="ko-KR" sz="1600" b="1" dirty="0">
                 <a:solidFill>
-                  <a:srgbClr val="445474"/>
+                  <a:schemeClr val="tx2"/>
                 </a:solidFill>
-                <a:latin typeface="맑은 고딕"/>
-              </a:defRPr>
-            </a:pPr>
-            <a:r>
-              <a:t> S1.B2.D2.C1-nbt(dbt)-RM(Rt)-Fx:Ex-Fx/1-Type IV</a:t>
+                <a:latin typeface="+mj-ea"/>
+                <a:ea typeface="+mj-ea"/>
+                <a:cs typeface="Arial" panose="020B0604020202020204" pitchFamily="34" charset="0"/>
+              </a:rPr>
+              <a:t>S1.B1.D1.C1-nbt(</a:t>
+            </a:r>
+            <a:r>
+              <a:rPr lang="en-US" altLang="ko-KR" sz="1600" b="1" dirty="0" err="1">
+                <a:solidFill>
+                  <a:schemeClr val="tx2"/>
+                </a:solidFill>
+                <a:latin typeface="+mj-ea"/>
+                <a:ea typeface="+mj-ea"/>
+                <a:cs typeface="Arial" panose="020B0604020202020204" pitchFamily="34" charset="0"/>
+              </a:rPr>
+              <a:t>dbt</a:t>
+            </a:r>
+            <a:r>
+              <a:rPr lang="en-US" altLang="ko-KR" sz="1600" b="1" dirty="0">
+                <a:solidFill>
+                  <a:schemeClr val="tx2"/>
+                </a:solidFill>
+                <a:latin typeface="+mj-ea"/>
+                <a:ea typeface="+mj-ea"/>
+                <a:cs typeface="Arial" panose="020B0604020202020204" pitchFamily="34" charset="0"/>
+              </a:rPr>
+              <a:t>)-RM(Rt)-</a:t>
+            </a:r>
+            <a:r>
+              <a:rPr lang="en-US" altLang="ko-KR" sz="1600" b="1" dirty="0" err="1">
+                <a:solidFill>
+                  <a:schemeClr val="tx2"/>
+                </a:solidFill>
+                <a:latin typeface="+mj-ea"/>
+                <a:ea typeface="+mj-ea"/>
+                <a:cs typeface="Arial" panose="020B0604020202020204" pitchFamily="34" charset="0"/>
+              </a:rPr>
+              <a:t>Fx:Ex-Fx</a:t>
+            </a:r>
+            <a:r>
+              <a:rPr lang="en-US" altLang="ko-KR" sz="1600" b="1" dirty="0">
+                <a:solidFill>
+                  <a:schemeClr val="tx2"/>
+                </a:solidFill>
+                <a:latin typeface="+mj-ea"/>
+                <a:ea typeface="+mj-ea"/>
+                <a:cs typeface="Arial" panose="020B0604020202020204" pitchFamily="34" charset="0"/>
+              </a:rPr>
+              <a:t>/0-Type IV   </a:t>
+            </a:r>
+            <a:r>
+              <a:rPr lang="ko-KR" altLang="en-US" sz="1600" b="1" dirty="0">
+                <a:solidFill>
+                  <a:schemeClr val="tx2"/>
+                </a:solidFill>
+                <a:latin typeface="+mj-ea"/>
+                <a:ea typeface="+mj-ea"/>
+                <a:cs typeface="Arial" panose="020B0604020202020204" pitchFamily="34" charset="0"/>
+              </a:rPr>
+              <a:t> </a:t>
             </a:r>
           </a:p>
         </p:txBody>
@@ -12031,17 +12110,23 @@
                     <a:bodyPr/>
                     <a:lstStyle/>
                     <a:p>
-                      <a:pPr algn="ctr">
-                        <a:defRPr sz="700" b="0">
-                          <a:solidFill>
-                            <a:srgbClr val="445474"/>
-                          </a:solidFill>
-                          <a:latin typeface="맑은 고딕"/>
-                        </a:defRPr>
-                      </a:pPr>
+                      <a:pPr algn="ctr" fontAlgn="ctr"/>
                       <a:r>
-                        <a:t>13.3</a:t>
+                        <a:rPr lang="en-US" altLang="ko-KR" sz="600" u="none" strike="noStrike" dirty="0">
+                          <a:effectLst/>
+                          <a:latin typeface="+mn-ea"/>
+                          <a:ea typeface="+mn-ea"/>
+                        </a:rPr>
+                        <a:t>0</a:t>
                       </a:r>
+                      <a:endParaRPr lang="en-US" altLang="ko-KR" sz="600" b="0" i="0" u="none" strike="noStrike" dirty="0">
+                        <a:solidFill>
+                          <a:srgbClr val="000000"/>
+                        </a:solidFill>
+                        <a:effectLst/>
+                        <a:latin typeface="+mn-ea"/>
+                        <a:ea typeface="+mn-ea"/>
+                      </a:endParaRPr>
                     </a:p>
                   </a:txBody>
                   <a:tcPr marL="0" marR="0" marT="0" marB="0" anchor="ctr">
@@ -12189,17 +12274,23 @@
                     <a:bodyPr/>
                     <a:lstStyle/>
                     <a:p>
-                      <a:pPr algn="ctr">
-                        <a:defRPr sz="700" b="0">
-                          <a:solidFill>
-                            <a:srgbClr val="445474"/>
-                          </a:solidFill>
-                          <a:latin typeface="맑은 고딕"/>
-                        </a:defRPr>
-                      </a:pPr>
+                      <a:pPr algn="ctr" fontAlgn="ctr"/>
                       <a:r>
-                        <a:t>114.2</a:t>
+                        <a:rPr lang="en-US" altLang="ko-KR" sz="600" u="none" strike="noStrike" dirty="0">
+                          <a:effectLst/>
+                          <a:latin typeface="+mn-ea"/>
+                          <a:ea typeface="+mn-ea"/>
+                        </a:rPr>
+                        <a:t>0</a:t>
                       </a:r>
+                      <a:endParaRPr lang="en-US" altLang="ko-KR" sz="600" b="0" i="0" u="none" strike="noStrike" dirty="0">
+                        <a:solidFill>
+                          <a:srgbClr val="000000"/>
+                        </a:solidFill>
+                        <a:effectLst/>
+                        <a:latin typeface="+mn-ea"/>
+                        <a:ea typeface="+mn-ea"/>
+                      </a:endParaRPr>
                     </a:p>
                   </a:txBody>
                   <a:tcPr marL="0" marR="0" marT="0" marB="0" anchor="ctr">
@@ -12347,17 +12438,23 @@
                     <a:bodyPr/>
                     <a:lstStyle/>
                     <a:p>
-                      <a:pPr algn="ctr">
-                        <a:defRPr sz="700" b="0">
-                          <a:solidFill>
-                            <a:srgbClr val="445474"/>
-                          </a:solidFill>
-                          <a:latin typeface="맑은 고딕"/>
-                        </a:defRPr>
-                      </a:pPr>
+                      <a:pPr algn="ctr" fontAlgn="ctr"/>
                       <a:r>
-                        <a:t>100.9</a:t>
+                        <a:rPr lang="en-US" altLang="ko-KR" sz="600" u="none" strike="noStrike" dirty="0">
+                          <a:effectLst/>
+                          <a:latin typeface="+mn-ea"/>
+                          <a:ea typeface="+mn-ea"/>
+                        </a:rPr>
+                        <a:t>0</a:t>
                       </a:r>
+                      <a:endParaRPr lang="en-US" altLang="ko-KR" sz="600" b="0" i="0" u="none" strike="noStrike" dirty="0">
+                        <a:solidFill>
+                          <a:srgbClr val="000000"/>
+                        </a:solidFill>
+                        <a:effectLst/>
+                        <a:latin typeface="+mn-ea"/>
+                        <a:ea typeface="+mn-ea"/>
+                      </a:endParaRPr>
                     </a:p>
                   </a:txBody>
                   <a:tcPr marL="0" marR="0" marT="0" marB="0" anchor="ctr">
@@ -12505,17 +12602,23 @@
                     <a:bodyPr/>
                     <a:lstStyle/>
                     <a:p>
-                      <a:pPr algn="ctr">
-                        <a:defRPr sz="700" b="0">
-                          <a:solidFill>
-                            <a:srgbClr val="445474"/>
-                          </a:solidFill>
-                          <a:latin typeface="맑은 고딕"/>
-                        </a:defRPr>
-                      </a:pPr>
+                      <a:pPr algn="ctr" fontAlgn="ctr"/>
                       <a:r>
-                        <a:t>101.3</a:t>
+                        <a:rPr lang="en-US" altLang="ko-KR" sz="600" u="none" strike="noStrike">
+                          <a:effectLst/>
+                          <a:latin typeface="+mn-ea"/>
+                          <a:ea typeface="+mn-ea"/>
+                        </a:rPr>
+                        <a:t>0</a:t>
                       </a:r>
+                      <a:endParaRPr lang="en-US" altLang="ko-KR" sz="600" b="0" i="0" u="none" strike="noStrike">
+                        <a:solidFill>
+                          <a:srgbClr val="000000"/>
+                        </a:solidFill>
+                        <a:effectLst/>
+                        <a:latin typeface="+mn-ea"/>
+                        <a:ea typeface="+mn-ea"/>
+                      </a:endParaRPr>
                     </a:p>
                   </a:txBody>
                   <a:tcPr marL="0" marR="0" marT="0" marB="0" anchor="ctr">
@@ -12663,17 +12766,23 @@
                     <a:bodyPr/>
                     <a:lstStyle/>
                     <a:p>
-                      <a:pPr algn="ctr">
-                        <a:defRPr sz="700" b="0">
-                          <a:solidFill>
-                            <a:srgbClr val="445474"/>
-                          </a:solidFill>
-                          <a:latin typeface="맑은 고딕"/>
-                        </a:defRPr>
-                      </a:pPr>
+                      <a:pPr algn="ctr" fontAlgn="ctr"/>
                       <a:r>
-                        <a:t>120.1</a:t>
+                        <a:rPr lang="en-US" altLang="ko-KR" sz="600" u="none" strike="noStrike" dirty="0">
+                          <a:effectLst/>
+                          <a:latin typeface="+mn-ea"/>
+                          <a:ea typeface="+mn-ea"/>
+                        </a:rPr>
+                        <a:t>0</a:t>
                       </a:r>
+                      <a:endParaRPr lang="en-US" altLang="ko-KR" sz="600" b="0" i="0" u="none" strike="noStrike" dirty="0">
+                        <a:solidFill>
+                          <a:srgbClr val="000000"/>
+                        </a:solidFill>
+                        <a:effectLst/>
+                        <a:latin typeface="+mn-ea"/>
+                        <a:ea typeface="+mn-ea"/>
+                      </a:endParaRPr>
                     </a:p>
                   </a:txBody>
                   <a:tcPr marL="0" marR="0" marT="0" marB="0" anchor="ctr">
@@ -12821,17 +12930,23 @@
                     <a:bodyPr/>
                     <a:lstStyle/>
                     <a:p>
-                      <a:pPr algn="ctr">
-                        <a:defRPr sz="700" b="0">
-                          <a:solidFill>
-                            <a:srgbClr val="445474"/>
-                          </a:solidFill>
-                          <a:latin typeface="맑은 고딕"/>
-                        </a:defRPr>
-                      </a:pPr>
+                      <a:pPr algn="ctr" fontAlgn="ctr"/>
                       <a:r>
-                        <a:t>161.2</a:t>
+                        <a:rPr lang="en-US" altLang="ko-KR" sz="600" u="none" strike="noStrike">
+                          <a:effectLst/>
+                          <a:latin typeface="+mn-ea"/>
+                          <a:ea typeface="+mn-ea"/>
+                        </a:rPr>
+                        <a:t>0</a:t>
                       </a:r>
+                      <a:endParaRPr lang="en-US" altLang="ko-KR" sz="600" b="0" i="0" u="none" strike="noStrike">
+                        <a:solidFill>
+                          <a:srgbClr val="000000"/>
+                        </a:solidFill>
+                        <a:effectLst/>
+                        <a:latin typeface="+mn-ea"/>
+                        <a:ea typeface="+mn-ea"/>
+                      </a:endParaRPr>
                     </a:p>
                   </a:txBody>
                   <a:tcPr marL="0" marR="0" marT="0" marB="0" anchor="ctr">
@@ -12979,17 +13094,23 @@
                     <a:bodyPr/>
                     <a:lstStyle/>
                     <a:p>
-                      <a:pPr algn="ctr">
-                        <a:defRPr sz="700" b="0">
-                          <a:solidFill>
-                            <a:srgbClr val="445474"/>
-                          </a:solidFill>
-                          <a:latin typeface="맑은 고딕"/>
-                        </a:defRPr>
-                      </a:pPr>
+                      <a:pPr algn="ctr" fontAlgn="ctr"/>
                       <a:r>
-                        <a:t>161.2</a:t>
+                        <a:rPr lang="en-US" altLang="ko-KR" sz="600" u="none" strike="noStrike" dirty="0">
+                          <a:effectLst/>
+                          <a:latin typeface="+mn-ea"/>
+                          <a:ea typeface="+mn-ea"/>
+                        </a:rPr>
+                        <a:t>0</a:t>
                       </a:r>
+                      <a:endParaRPr lang="en-US" altLang="ko-KR" sz="600" b="0" i="0" u="none" strike="noStrike" dirty="0">
+                        <a:solidFill>
+                          <a:srgbClr val="000000"/>
+                        </a:solidFill>
+                        <a:effectLst/>
+                        <a:latin typeface="+mn-ea"/>
+                        <a:ea typeface="+mn-ea"/>
+                      </a:endParaRPr>
                     </a:p>
                   </a:txBody>
                   <a:tcPr marL="0" marR="0" marT="0" marB="0" anchor="ctr">
@@ -13137,17 +13258,23 @@
                     <a:bodyPr/>
                     <a:lstStyle/>
                     <a:p>
-                      <a:pPr algn="ctr">
-                        <a:defRPr sz="700" b="0">
-                          <a:solidFill>
-                            <a:srgbClr val="445474"/>
-                          </a:solidFill>
-                          <a:latin typeface="맑은 고딕"/>
-                        </a:defRPr>
-                      </a:pPr>
+                      <a:pPr algn="ctr" fontAlgn="ctr"/>
                       <a:r>
-                        <a:t>34.8</a:t>
+                        <a:rPr lang="en-US" altLang="ko-KR" sz="600" u="none" strike="noStrike">
+                          <a:effectLst/>
+                          <a:latin typeface="+mn-ea"/>
+                          <a:ea typeface="+mn-ea"/>
+                        </a:rPr>
+                        <a:t>0</a:t>
                       </a:r>
+                      <a:endParaRPr lang="en-US" altLang="ko-KR" sz="600" b="0" i="0" u="none" strike="noStrike">
+                        <a:solidFill>
+                          <a:srgbClr val="000000"/>
+                        </a:solidFill>
+                        <a:effectLst/>
+                        <a:latin typeface="+mn-ea"/>
+                        <a:ea typeface="+mn-ea"/>
+                      </a:endParaRPr>
                     </a:p>
                   </a:txBody>
                   <a:tcPr marL="0" marR="0" marT="0" marB="0" anchor="ctr">
@@ -13295,17 +13422,23 @@
                     <a:bodyPr/>
                     <a:lstStyle/>
                     <a:p>
-                      <a:pPr algn="ctr">
-                        <a:defRPr sz="700" b="0">
-                          <a:solidFill>
-                            <a:srgbClr val="445474"/>
-                          </a:solidFill>
-                          <a:latin typeface="맑은 고딕"/>
-                        </a:defRPr>
-                      </a:pPr>
+                      <a:pPr algn="ctr" fontAlgn="ctr"/>
                       <a:r>
-                        <a:t>82.8</a:t>
+                        <a:rPr lang="en-US" altLang="ko-KR" sz="600" u="none" strike="noStrike" dirty="0">
+                          <a:effectLst/>
+                          <a:latin typeface="+mn-ea"/>
+                          <a:ea typeface="+mn-ea"/>
+                        </a:rPr>
+                        <a:t>0</a:t>
                       </a:r>
+                      <a:endParaRPr lang="en-US" altLang="ko-KR" sz="600" b="0" i="0" u="none" strike="noStrike" dirty="0">
+                        <a:solidFill>
+                          <a:srgbClr val="000000"/>
+                        </a:solidFill>
+                        <a:effectLst/>
+                        <a:latin typeface="+mn-ea"/>
+                        <a:ea typeface="+mn-ea"/>
+                      </a:endParaRPr>
                     </a:p>
                   </a:txBody>
                   <a:tcPr marL="0" marR="0" marT="0" marB="0" anchor="ctr">
@@ -13453,17 +13586,23 @@
                     <a:bodyPr/>
                     <a:lstStyle/>
                     <a:p>
-                      <a:pPr algn="ctr">
-                        <a:defRPr sz="700" b="0">
-                          <a:solidFill>
-                            <a:srgbClr val="445474"/>
-                          </a:solidFill>
-                          <a:latin typeface="맑은 고딕"/>
-                        </a:defRPr>
-                      </a:pPr>
+                      <a:pPr algn="ctr" fontAlgn="ctr"/>
                       <a:r>
-                        <a:t>-266.7</a:t>
+                        <a:rPr lang="en-US" altLang="ko-KR" sz="600" u="none" strike="noStrike" dirty="0">
+                          <a:effectLst/>
+                          <a:latin typeface="+mn-ea"/>
+                          <a:ea typeface="+mn-ea"/>
+                        </a:rPr>
+                        <a:t>0</a:t>
                       </a:r>
+                      <a:endParaRPr lang="en-US" altLang="ko-KR" sz="600" b="0" i="0" u="none" strike="noStrike" dirty="0">
+                        <a:solidFill>
+                          <a:srgbClr val="000000"/>
+                        </a:solidFill>
+                        <a:effectLst/>
+                        <a:latin typeface="+mn-ea"/>
+                        <a:ea typeface="+mn-ea"/>
+                      </a:endParaRPr>
                     </a:p>
                   </a:txBody>
                   <a:tcPr marL="0" marR="0" marT="0" marB="0" anchor="ctr">
@@ -13611,17 +13750,23 @@
                     <a:bodyPr/>
                     <a:lstStyle/>
                     <a:p>
-                      <a:pPr algn="ctr">
-                        <a:defRPr sz="700" b="0">
-                          <a:solidFill>
-                            <a:srgbClr val="445474"/>
-                          </a:solidFill>
-                          <a:latin typeface="맑은 고딕"/>
-                        </a:defRPr>
-                      </a:pPr>
+                      <a:pPr algn="ctr" fontAlgn="ctr"/>
                       <a:r>
-                        <a:t>5.7</a:t>
+                        <a:rPr lang="en-US" altLang="ko-KR" sz="600" u="none" strike="noStrike" dirty="0">
+                          <a:effectLst/>
+                          <a:latin typeface="+mn-ea"/>
+                          <a:ea typeface="+mn-ea"/>
+                        </a:rPr>
+                        <a:t>0</a:t>
                       </a:r>
+                      <a:endParaRPr lang="en-US" altLang="ko-KR" sz="600" b="0" i="0" u="none" strike="noStrike" dirty="0">
+                        <a:solidFill>
+                          <a:srgbClr val="000000"/>
+                        </a:solidFill>
+                        <a:effectLst/>
+                        <a:latin typeface="+mn-ea"/>
+                        <a:ea typeface="+mn-ea"/>
+                      </a:endParaRPr>
                     </a:p>
                   </a:txBody>
                   <a:tcPr marL="0" marR="0" marT="0" marB="0" anchor="ctr">
@@ -13769,17 +13914,23 @@
                     <a:bodyPr/>
                     <a:lstStyle/>
                     <a:p>
-                      <a:pPr algn="ctr">
-                        <a:defRPr sz="700" b="0">
-                          <a:solidFill>
-                            <a:srgbClr val="445474"/>
-                          </a:solidFill>
-                          <a:latin typeface="맑은 고딕"/>
-                        </a:defRPr>
-                      </a:pPr>
+                      <a:pPr algn="ctr" fontAlgn="ctr"/>
                       <a:r>
-                        <a:t>16.1</a:t>
+                        <a:rPr lang="en-US" altLang="ko-KR" sz="600" u="none" strike="noStrike" dirty="0">
+                          <a:effectLst/>
+                          <a:latin typeface="+mn-ea"/>
+                          <a:ea typeface="+mn-ea"/>
+                        </a:rPr>
+                        <a:t>0</a:t>
                       </a:r>
+                      <a:endParaRPr lang="en-US" altLang="ko-KR" sz="600" b="0" i="0" u="none" strike="noStrike" dirty="0">
+                        <a:solidFill>
+                          <a:srgbClr val="000000"/>
+                        </a:solidFill>
+                        <a:effectLst/>
+                        <a:latin typeface="+mn-ea"/>
+                        <a:ea typeface="+mn-ea"/>
+                      </a:endParaRPr>
                     </a:p>
                   </a:txBody>
                   <a:tcPr marL="0" marR="0" marT="0" marB="0" anchor="ctr">
@@ -13927,17 +14078,23 @@
                     <a:bodyPr/>
                     <a:lstStyle/>
                     <a:p>
-                      <a:pPr algn="ctr">
-                        <a:defRPr sz="700" b="0">
-                          <a:solidFill>
-                            <a:srgbClr val="445474"/>
-                          </a:solidFill>
-                          <a:latin typeface="맑은 고딕"/>
-                        </a:defRPr>
-                      </a:pPr>
+                      <a:pPr algn="ctr" fontAlgn="ctr"/>
                       <a:r>
-                        <a:t>129.2</a:t>
+                        <a:rPr lang="en-US" altLang="ko-KR" sz="600" u="none" strike="noStrike">
+                          <a:effectLst/>
+                          <a:latin typeface="+mn-ea"/>
+                          <a:ea typeface="+mn-ea"/>
+                        </a:rPr>
+                        <a:t>0</a:t>
                       </a:r>
+                      <a:endParaRPr lang="en-US" altLang="ko-KR" sz="600" b="0" i="0" u="none" strike="noStrike">
+                        <a:solidFill>
+                          <a:srgbClr val="000000"/>
+                        </a:solidFill>
+                        <a:effectLst/>
+                        <a:latin typeface="+mn-ea"/>
+                        <a:ea typeface="+mn-ea"/>
+                      </a:endParaRPr>
                     </a:p>
                   </a:txBody>
                   <a:tcPr marL="0" marR="0" marT="0" marB="0" anchor="ctr">
@@ -14085,17 +14242,23 @@
                     <a:bodyPr/>
                     <a:lstStyle/>
                     <a:p>
-                      <a:pPr algn="ctr">
-                        <a:defRPr sz="700" b="0">
-                          <a:solidFill>
-                            <a:srgbClr val="445474"/>
-                          </a:solidFill>
-                          <a:latin typeface="맑은 고딕"/>
-                        </a:defRPr>
-                      </a:pPr>
+                      <a:pPr algn="ctr" fontAlgn="ctr"/>
                       <a:r>
-                        <a:t>94.3</a:t>
+                        <a:rPr lang="en-US" altLang="ko-KR" sz="600" u="none" strike="noStrike" dirty="0">
+                          <a:effectLst/>
+                          <a:latin typeface="+mn-ea"/>
+                          <a:ea typeface="+mn-ea"/>
+                        </a:rPr>
+                        <a:t>0</a:t>
                       </a:r>
+                      <a:endParaRPr lang="en-US" altLang="ko-KR" sz="600" b="0" i="0" u="none" strike="noStrike" dirty="0">
+                        <a:solidFill>
+                          <a:srgbClr val="000000"/>
+                        </a:solidFill>
+                        <a:effectLst/>
+                        <a:latin typeface="+mn-ea"/>
+                        <a:ea typeface="+mn-ea"/>
+                      </a:endParaRPr>
                     </a:p>
                   </a:txBody>
                   <a:tcPr marL="0" marR="0" marT="0" marB="0" anchor="ctr">
@@ -14243,17 +14406,23 @@
                     <a:bodyPr/>
                     <a:lstStyle/>
                     <a:p>
-                      <a:pPr algn="ctr">
-                        <a:defRPr sz="700" b="0">
-                          <a:solidFill>
-                            <a:srgbClr val="445474"/>
-                          </a:solidFill>
-                          <a:latin typeface="맑은 고딕"/>
-                        </a:defRPr>
-                      </a:pPr>
+                      <a:pPr algn="ctr" fontAlgn="ctr"/>
                       <a:r>
-                        <a:t>35.9</a:t>
+                        <a:rPr lang="en-US" altLang="ko-KR" sz="600" u="none" strike="noStrike" dirty="0">
+                          <a:effectLst/>
+                          <a:latin typeface="+mn-ea"/>
+                          <a:ea typeface="+mn-ea"/>
+                        </a:rPr>
+                        <a:t>0</a:t>
                       </a:r>
+                      <a:endParaRPr lang="en-US" altLang="ko-KR" sz="600" b="0" i="0" u="none" strike="noStrike" dirty="0">
+                        <a:solidFill>
+                          <a:srgbClr val="000000"/>
+                        </a:solidFill>
+                        <a:effectLst/>
+                        <a:latin typeface="+mn-ea"/>
+                        <a:ea typeface="+mn-ea"/>
+                      </a:endParaRPr>
                     </a:p>
                   </a:txBody>
                   <a:tcPr marL="0" marR="0" marT="0" marB="0" anchor="ctr">
@@ -14401,17 +14570,23 @@
                     <a:bodyPr/>
                     <a:lstStyle/>
                     <a:p>
-                      <a:pPr algn="ctr">
-                        <a:defRPr sz="700" b="0">
-                          <a:solidFill>
-                            <a:srgbClr val="445474"/>
-                          </a:solidFill>
-                          <a:latin typeface="맑은 고딕"/>
-                        </a:defRPr>
-                      </a:pPr>
+                      <a:pPr algn="ctr" fontAlgn="ctr"/>
                       <a:r>
-                        <a:t>59.6</a:t>
+                        <a:rPr lang="en-US" altLang="ko-KR" sz="600" u="none" strike="noStrike" dirty="0">
+                          <a:effectLst/>
+                          <a:latin typeface="+mn-ea"/>
+                          <a:ea typeface="+mn-ea"/>
+                        </a:rPr>
+                        <a:t>0</a:t>
                       </a:r>
+                      <a:endParaRPr lang="en-US" altLang="ko-KR" sz="600" b="0" i="0" u="none" strike="noStrike" dirty="0">
+                        <a:solidFill>
+                          <a:srgbClr val="000000"/>
+                        </a:solidFill>
+                        <a:effectLst/>
+                        <a:latin typeface="+mn-ea"/>
+                        <a:ea typeface="+mn-ea"/>
+                      </a:endParaRPr>
                     </a:p>
                   </a:txBody>
                   <a:tcPr marL="0" marR="0" marT="0" marB="0" anchor="ctr">
@@ -14559,17 +14734,23 @@
                     <a:bodyPr/>
                     <a:lstStyle/>
                     <a:p>
-                      <a:pPr algn="ctr">
-                        <a:defRPr sz="700" b="0">
-                          <a:solidFill>
-                            <a:srgbClr val="445474"/>
-                          </a:solidFill>
-                          <a:latin typeface="맑은 고딕"/>
-                        </a:defRPr>
-                      </a:pPr>
+                      <a:pPr algn="ctr" fontAlgn="ctr"/>
                       <a:r>
-                        <a:t>8.2</a:t>
+                        <a:rPr lang="en-US" altLang="ko-KR" sz="600" u="none" strike="noStrike" dirty="0">
+                          <a:effectLst/>
+                          <a:latin typeface="+mn-ea"/>
+                          <a:ea typeface="+mn-ea"/>
+                        </a:rPr>
+                        <a:t>0</a:t>
                       </a:r>
+                      <a:endParaRPr lang="en-US" altLang="ko-KR" sz="600" b="0" i="0" u="none" strike="noStrike" dirty="0">
+                        <a:solidFill>
+                          <a:srgbClr val="000000"/>
+                        </a:solidFill>
+                        <a:effectLst/>
+                        <a:latin typeface="+mn-ea"/>
+                        <a:ea typeface="+mn-ea"/>
+                      </a:endParaRPr>
                     </a:p>
                   </a:txBody>
                   <a:tcPr marL="0" marR="0" marT="0" marB="0" anchor="ctr">
@@ -14717,17 +14898,23 @@
                     <a:bodyPr/>
                     <a:lstStyle/>
                     <a:p>
-                      <a:pPr algn="ctr">
-                        <a:defRPr sz="700" b="0">
-                          <a:solidFill>
-                            <a:srgbClr val="445474"/>
-                          </a:solidFill>
-                          <a:latin typeface="맑은 고딕"/>
-                        </a:defRPr>
-                      </a:pPr>
+                      <a:pPr algn="ctr" fontAlgn="ctr"/>
                       <a:r>
+                        <a:rPr lang="en-US" altLang="ko-KR" sz="600" u="none" strike="noStrike" dirty="0">
+                          <a:effectLst/>
+                          <a:latin typeface="+mn-ea"/>
+                          <a:ea typeface="+mn-ea"/>
+                        </a:rPr>
                         <a:t>0</a:t>
                       </a:r>
+                      <a:endParaRPr lang="en-US" altLang="ko-KR" sz="600" b="0" i="0" u="none" strike="noStrike" dirty="0">
+                        <a:solidFill>
+                          <a:srgbClr val="000000"/>
+                        </a:solidFill>
+                        <a:effectLst/>
+                        <a:latin typeface="+mn-ea"/>
+                        <a:ea typeface="+mn-ea"/>
+                      </a:endParaRPr>
                     </a:p>
                   </a:txBody>
                   <a:tcPr marL="0" marR="0" marT="0" marB="0" anchor="ctr">
@@ -14875,17 +15062,23 @@
                     <a:bodyPr/>
                     <a:lstStyle/>
                     <a:p>
-                      <a:pPr algn="ctr">
-                        <a:defRPr sz="700" b="0">
-                          <a:solidFill>
-                            <a:srgbClr val="445474"/>
-                          </a:solidFill>
-                          <a:latin typeface="맑은 고딕"/>
-                        </a:defRPr>
-                      </a:pPr>
+                      <a:pPr algn="ctr" fontAlgn="ctr"/>
                       <a:r>
-                        <a:t>37.4</a:t>
+                        <a:rPr lang="en-US" altLang="ko-KR" sz="600" u="none" strike="noStrike" dirty="0">
+                          <a:effectLst/>
+                          <a:latin typeface="+mn-ea"/>
+                          <a:ea typeface="+mn-ea"/>
+                        </a:rPr>
+                        <a:t>0</a:t>
                       </a:r>
+                      <a:endParaRPr lang="en-US" altLang="ko-KR" sz="600" b="0" i="0" u="none" strike="noStrike" dirty="0">
+                        <a:solidFill>
+                          <a:srgbClr val="000000"/>
+                        </a:solidFill>
+                        <a:effectLst/>
+                        <a:latin typeface="+mn-ea"/>
+                        <a:ea typeface="+mn-ea"/>
+                      </a:endParaRPr>
                     </a:p>
                   </a:txBody>
                   <a:tcPr marL="0" marR="0" marT="0" marB="0" anchor="ctr">
@@ -15033,17 +15226,23 @@
                     <a:bodyPr/>
                     <a:lstStyle/>
                     <a:p>
-                      <a:pPr algn="ctr">
-                        <a:defRPr sz="700" b="0">
-                          <a:solidFill>
-                            <a:srgbClr val="445474"/>
-                          </a:solidFill>
-                          <a:latin typeface="맑은 고딕"/>
-                        </a:defRPr>
-                      </a:pPr>
+                      <a:pPr algn="ctr" fontAlgn="ctr"/>
                       <a:r>
-                        <a:t>42.2</a:t>
+                        <a:rPr lang="en-US" altLang="ko-KR" sz="600" u="none" strike="noStrike" dirty="0">
+                          <a:effectLst/>
+                          <a:latin typeface="+mn-ea"/>
+                          <a:ea typeface="+mn-ea"/>
+                        </a:rPr>
+                        <a:t>0</a:t>
                       </a:r>
+                      <a:endParaRPr lang="en-US" altLang="ko-KR" sz="600" b="0" i="0" u="none" strike="noStrike" dirty="0">
+                        <a:solidFill>
+                          <a:srgbClr val="000000"/>
+                        </a:solidFill>
+                        <a:effectLst/>
+                        <a:latin typeface="+mn-ea"/>
+                        <a:ea typeface="+mn-ea"/>
+                      </a:endParaRPr>
                     </a:p>
                   </a:txBody>
                   <a:tcPr marL="0" marR="0" marT="0" marB="0" anchor="ctr">
@@ -15191,17 +15390,23 @@
                     <a:bodyPr/>
                     <a:lstStyle/>
                     <a:p>
-                      <a:pPr algn="ctr">
-                        <a:defRPr sz="700" b="0">
-                          <a:solidFill>
-                            <a:srgbClr val="445474"/>
-                          </a:solidFill>
-                          <a:latin typeface="맑은 고딕"/>
-                        </a:defRPr>
-                      </a:pPr>
+                      <a:pPr algn="ctr" fontAlgn="ctr"/>
                       <a:r>
-                        <a:t>135.9</a:t>
+                        <a:rPr lang="en-US" altLang="ko-KR" sz="600" u="none" strike="noStrike" dirty="0">
+                          <a:effectLst/>
+                          <a:latin typeface="+mn-ea"/>
+                          <a:ea typeface="+mn-ea"/>
+                        </a:rPr>
+                        <a:t>0</a:t>
                       </a:r>
+                      <a:endParaRPr lang="en-US" altLang="ko-KR" sz="600" b="0" i="0" u="none" strike="noStrike" dirty="0">
+                        <a:solidFill>
+                          <a:srgbClr val="000000"/>
+                        </a:solidFill>
+                        <a:effectLst/>
+                        <a:latin typeface="+mn-ea"/>
+                        <a:ea typeface="+mn-ea"/>
+                      </a:endParaRPr>
                     </a:p>
                   </a:txBody>
                   <a:tcPr marL="0" marR="0" marT="0" marB="0" anchor="ctr">
@@ -15349,17 +15554,23 @@
                     <a:bodyPr/>
                     <a:lstStyle/>
                     <a:p>
-                      <a:pPr algn="ctr">
-                        <a:defRPr sz="700" b="0">
-                          <a:solidFill>
-                            <a:srgbClr val="445474"/>
-                          </a:solidFill>
-                          <a:latin typeface="맑은 고딕"/>
-                        </a:defRPr>
-                      </a:pPr>
+                      <a:pPr algn="ctr" fontAlgn="ctr"/>
                       <a:r>
-                        <a:t>112.2</a:t>
+                        <a:rPr lang="en-US" altLang="ko-KR" sz="600" u="none" strike="noStrike" dirty="0">
+                          <a:effectLst/>
+                          <a:latin typeface="+mn-ea"/>
+                          <a:ea typeface="+mn-ea"/>
+                        </a:rPr>
+                        <a:t>0</a:t>
                       </a:r>
+                      <a:endParaRPr lang="en-US" altLang="ko-KR" sz="600" b="0" i="0" u="none" strike="noStrike" dirty="0">
+                        <a:solidFill>
+                          <a:srgbClr val="000000"/>
+                        </a:solidFill>
+                        <a:effectLst/>
+                        <a:latin typeface="+mn-ea"/>
+                        <a:ea typeface="+mn-ea"/>
+                      </a:endParaRPr>
                     </a:p>
                   </a:txBody>
                   <a:tcPr marL="0" marR="0" marT="0" marB="0" anchor="ctr">
@@ -15510,17 +15721,23 @@
                     <a:bodyPr/>
                     <a:lstStyle/>
                     <a:p>
-                      <a:pPr algn="ctr">
-                        <a:defRPr sz="700" b="0">
-                          <a:solidFill>
-                            <a:srgbClr val="445474"/>
-                          </a:solidFill>
-                          <a:latin typeface="맑은 고딕"/>
-                        </a:defRPr>
-                      </a:pPr>
+                      <a:pPr algn="ctr" fontAlgn="ctr"/>
                       <a:r>
-                        <a:t>281.6</a:t>
+                        <a:rPr lang="en-US" altLang="ko-KR" sz="600" u="none" strike="noStrike" dirty="0">
+                          <a:effectLst/>
+                          <a:latin typeface="+mn-ea"/>
+                          <a:ea typeface="+mn-ea"/>
+                        </a:rPr>
+                        <a:t>0</a:t>
                       </a:r>
+                      <a:endParaRPr lang="en-US" altLang="ko-KR" sz="600" b="0" i="0" u="none" strike="noStrike" dirty="0">
+                        <a:solidFill>
+                          <a:srgbClr val="000000"/>
+                        </a:solidFill>
+                        <a:effectLst/>
+                        <a:latin typeface="+mn-ea"/>
+                        <a:ea typeface="+mn-ea"/>
+                      </a:endParaRPr>
                     </a:p>
                   </a:txBody>
                   <a:tcPr marL="0" marR="0" marT="0" marB="0" anchor="ctr">
@@ -15668,17 +15885,23 @@
                     <a:bodyPr/>
                     <a:lstStyle/>
                     <a:p>
-                      <a:pPr algn="ctr">
-                        <a:defRPr sz="700" b="0">
-                          <a:solidFill>
-                            <a:srgbClr val="445474"/>
-                          </a:solidFill>
-                          <a:latin typeface="맑은 고딕"/>
-                        </a:defRPr>
-                      </a:pPr>
+                      <a:pPr algn="ctr" fontAlgn="ctr"/>
                       <a:r>
-                        <a:t>281.8</a:t>
+                        <a:rPr lang="en-US" altLang="ko-KR" sz="600" u="none" strike="noStrike" dirty="0">
+                          <a:effectLst/>
+                          <a:latin typeface="+mn-ea"/>
+                          <a:ea typeface="+mn-ea"/>
+                        </a:rPr>
+                        <a:t>0</a:t>
                       </a:r>
+                      <a:endParaRPr lang="en-US" altLang="ko-KR" sz="600" b="0" i="0" u="none" strike="noStrike" dirty="0">
+                        <a:solidFill>
+                          <a:srgbClr val="000000"/>
+                        </a:solidFill>
+                        <a:effectLst/>
+                        <a:latin typeface="+mn-ea"/>
+                        <a:ea typeface="+mn-ea"/>
+                      </a:endParaRPr>
                     </a:p>
                   </a:txBody>
                   <a:tcPr marL="0" marR="0" marT="0" marB="0" anchor="ctr">
@@ -15826,17 +16049,23 @@
                     <a:bodyPr/>
                     <a:lstStyle/>
                     <a:p>
-                      <a:pPr algn="ctr">
-                        <a:defRPr sz="700" b="0">
-                          <a:solidFill>
-                            <a:srgbClr val="445474"/>
-                          </a:solidFill>
-                          <a:latin typeface="맑은 고딕"/>
-                        </a:defRPr>
-                      </a:pPr>
+                      <a:pPr algn="ctr" fontAlgn="ctr"/>
                       <a:r>
-                        <a:t>203.9</a:t>
+                        <a:rPr lang="en-US" altLang="ko-KR" sz="600" u="none" strike="noStrike">
+                          <a:effectLst/>
+                          <a:latin typeface="+mn-ea"/>
+                          <a:ea typeface="+mn-ea"/>
+                        </a:rPr>
+                        <a:t>0</a:t>
                       </a:r>
+                      <a:endParaRPr lang="en-US" altLang="ko-KR" sz="600" b="0" i="0" u="none" strike="noStrike">
+                        <a:solidFill>
+                          <a:srgbClr val="000000"/>
+                        </a:solidFill>
+                        <a:effectLst/>
+                        <a:latin typeface="+mn-ea"/>
+                        <a:ea typeface="+mn-ea"/>
+                      </a:endParaRPr>
                     </a:p>
                   </a:txBody>
                   <a:tcPr marL="0" marR="0" marT="0" marB="0" anchor="ctr">
@@ -15984,17 +16213,23 @@
                     <a:bodyPr/>
                     <a:lstStyle/>
                     <a:p>
-                      <a:pPr algn="ctr">
-                        <a:defRPr sz="700" b="0">
-                          <a:solidFill>
-                            <a:srgbClr val="445474"/>
-                          </a:solidFill>
-                          <a:latin typeface="맑은 고딕"/>
-                        </a:defRPr>
-                      </a:pPr>
+                      <a:pPr algn="ctr" fontAlgn="ctr"/>
                       <a:r>
-                        <a:t>133</a:t>
+                        <a:rPr lang="en-US" altLang="ko-KR" sz="600" u="none" strike="noStrike" dirty="0">
+                          <a:effectLst/>
+                          <a:latin typeface="+mn-ea"/>
+                          <a:ea typeface="+mn-ea"/>
+                        </a:rPr>
+                        <a:t>0</a:t>
                       </a:r>
+                      <a:endParaRPr lang="en-US" altLang="ko-KR" sz="600" b="0" i="0" u="none" strike="noStrike" dirty="0">
+                        <a:solidFill>
+                          <a:srgbClr val="000000"/>
+                        </a:solidFill>
+                        <a:effectLst/>
+                        <a:latin typeface="+mn-ea"/>
+                        <a:ea typeface="+mn-ea"/>
+                      </a:endParaRPr>
                     </a:p>
                   </a:txBody>
                   <a:tcPr marL="0" marR="0" marT="0" marB="0" anchor="ctr">
@@ -16142,17 +16377,23 @@
                     <a:bodyPr/>
                     <a:lstStyle/>
                     <a:p>
-                      <a:pPr algn="ctr">
-                        <a:defRPr sz="700" b="0">
-                          <a:solidFill>
-                            <a:srgbClr val="445474"/>
-                          </a:solidFill>
-                          <a:latin typeface="맑은 고딕"/>
-                        </a:defRPr>
-                      </a:pPr>
+                      <a:pPr algn="ctr" fontAlgn="ctr"/>
                       <a:r>
-                        <a:t>7.3</a:t>
+                        <a:rPr lang="en-US" altLang="ko-KR" sz="600" u="none" strike="noStrike" dirty="0">
+                          <a:effectLst/>
+                          <a:latin typeface="+mn-ea"/>
+                          <a:ea typeface="+mn-ea"/>
+                        </a:rPr>
+                        <a:t>0</a:t>
                       </a:r>
+                      <a:endParaRPr lang="en-US" altLang="ko-KR" sz="600" b="0" i="0" u="none" strike="noStrike" dirty="0">
+                        <a:solidFill>
+                          <a:srgbClr val="000000"/>
+                        </a:solidFill>
+                        <a:effectLst/>
+                        <a:latin typeface="+mn-ea"/>
+                        <a:ea typeface="+mn-ea"/>
+                      </a:endParaRPr>
                     </a:p>
                   </a:txBody>
                   <a:tcPr marL="0" marR="0" marT="0" marB="0" anchor="ctr">
@@ -16300,17 +16541,23 @@
                     <a:bodyPr/>
                     <a:lstStyle/>
                     <a:p>
-                      <a:pPr algn="ctr">
-                        <a:defRPr sz="700" b="0">
-                          <a:solidFill>
-                            <a:srgbClr val="445474"/>
-                          </a:solidFill>
-                          <a:latin typeface="맑은 고딕"/>
-                        </a:defRPr>
-                      </a:pPr>
+                      <a:pPr algn="ctr" fontAlgn="ctr"/>
                       <a:r>
-                        <a:t>159.1</a:t>
+                        <a:rPr lang="en-US" altLang="ko-KR" sz="600" u="none" strike="noStrike" dirty="0">
+                          <a:effectLst/>
+                          <a:latin typeface="+mn-ea"/>
+                          <a:ea typeface="+mn-ea"/>
+                        </a:rPr>
+                        <a:t>0</a:t>
                       </a:r>
+                      <a:endParaRPr lang="en-US" altLang="ko-KR" sz="600" b="0" i="0" u="none" strike="noStrike" dirty="0">
+                        <a:solidFill>
+                          <a:srgbClr val="000000"/>
+                        </a:solidFill>
+                        <a:effectLst/>
+                        <a:latin typeface="+mn-ea"/>
+                        <a:ea typeface="+mn-ea"/>
+                      </a:endParaRPr>
                     </a:p>
                   </a:txBody>
                   <a:tcPr marL="0" marR="0" marT="0" marB="0" anchor="ctr">
@@ -16458,17 +16705,23 @@
                     <a:bodyPr/>
                     <a:lstStyle/>
                     <a:p>
-                      <a:pPr algn="ctr">
-                        <a:defRPr sz="700" b="0">
-                          <a:solidFill>
-                            <a:srgbClr val="445474"/>
-                          </a:solidFill>
-                          <a:latin typeface="맑은 고딕"/>
-                        </a:defRPr>
-                      </a:pPr>
+                      <a:pPr algn="ctr" fontAlgn="ctr"/>
                       <a:r>
-                        <a:t>167.6</a:t>
+                        <a:rPr lang="en-US" altLang="ko-KR" sz="600" u="none" strike="noStrike">
+                          <a:effectLst/>
+                          <a:latin typeface="+mn-ea"/>
+                          <a:ea typeface="+mn-ea"/>
+                        </a:rPr>
+                        <a:t>0</a:t>
                       </a:r>
+                      <a:endParaRPr lang="en-US" altLang="ko-KR" sz="600" b="0" i="0" u="none" strike="noStrike">
+                        <a:solidFill>
+                          <a:srgbClr val="000000"/>
+                        </a:solidFill>
+                        <a:effectLst/>
+                        <a:latin typeface="+mn-ea"/>
+                        <a:ea typeface="+mn-ea"/>
+                      </a:endParaRPr>
                     </a:p>
                   </a:txBody>
                   <a:tcPr marL="0" marR="0" marT="0" marB="0" anchor="ctr">
@@ -16616,17 +16869,23 @@
                     <a:bodyPr/>
                     <a:lstStyle/>
                     <a:p>
-                      <a:pPr algn="ctr">
-                        <a:defRPr sz="700" b="0">
-                          <a:solidFill>
-                            <a:srgbClr val="445474"/>
-                          </a:solidFill>
-                          <a:latin typeface="맑은 고딕"/>
-                        </a:defRPr>
-                      </a:pPr>
+                      <a:pPr algn="ctr" fontAlgn="ctr"/>
                       <a:r>
-                        <a:t>160.3</a:t>
+                        <a:rPr lang="en-US" altLang="ko-KR" sz="600" u="none" strike="noStrike" dirty="0">
+                          <a:effectLst/>
+                          <a:latin typeface="+mn-ea"/>
+                          <a:ea typeface="+mn-ea"/>
+                        </a:rPr>
+                        <a:t>0</a:t>
                       </a:r>
+                      <a:endParaRPr lang="en-US" altLang="ko-KR" sz="600" b="0" i="0" u="none" strike="noStrike" dirty="0">
+                        <a:solidFill>
+                          <a:srgbClr val="000000"/>
+                        </a:solidFill>
+                        <a:effectLst/>
+                        <a:latin typeface="+mn-ea"/>
+                        <a:ea typeface="+mn-ea"/>
+                      </a:endParaRPr>
                     </a:p>
                   </a:txBody>
                   <a:tcPr marL="0" marR="0" marT="0" marB="0" anchor="ctr">
@@ -16774,17 +17033,23 @@
                     <a:bodyPr/>
                     <a:lstStyle/>
                     <a:p>
-                      <a:pPr algn="ctr">
-                        <a:defRPr sz="700" b="0">
-                          <a:solidFill>
-                            <a:srgbClr val="445474"/>
-                          </a:solidFill>
-                          <a:latin typeface="맑은 고딕"/>
-                        </a:defRPr>
-                      </a:pPr>
+                      <a:pPr algn="ctr" fontAlgn="ctr"/>
                       <a:r>
-                        <a:t>91.5</a:t>
+                        <a:rPr lang="en-US" altLang="ko-KR" sz="600" u="none" strike="noStrike">
+                          <a:effectLst/>
+                          <a:latin typeface="+mn-ea"/>
+                          <a:ea typeface="+mn-ea"/>
+                        </a:rPr>
+                        <a:t>0</a:t>
                       </a:r>
+                      <a:endParaRPr lang="en-US" altLang="ko-KR" sz="600" b="0" i="0" u="none" strike="noStrike">
+                        <a:solidFill>
+                          <a:srgbClr val="000000"/>
+                        </a:solidFill>
+                        <a:effectLst/>
+                        <a:latin typeface="+mn-ea"/>
+                        <a:ea typeface="+mn-ea"/>
+                      </a:endParaRPr>
                     </a:p>
                   </a:txBody>
                   <a:tcPr marL="0" marR="0" marT="0" marB="0" anchor="ctr">
@@ -16932,17 +17197,23 @@
                     <a:bodyPr/>
                     <a:lstStyle/>
                     <a:p>
-                      <a:pPr algn="ctr">
-                        <a:defRPr sz="700" b="0">
-                          <a:solidFill>
-                            <a:srgbClr val="445474"/>
-                          </a:solidFill>
-                          <a:latin typeface="맑은 고딕"/>
-                        </a:defRPr>
-                      </a:pPr>
+                      <a:pPr algn="ctr" fontAlgn="ctr"/>
                       <a:r>
-                        <a:t>50.4</a:t>
+                        <a:rPr lang="en-US" altLang="ko-KR" sz="600" u="none" strike="noStrike">
+                          <a:effectLst/>
+                          <a:latin typeface="+mn-ea"/>
+                          <a:ea typeface="+mn-ea"/>
+                        </a:rPr>
+                        <a:t>0</a:t>
                       </a:r>
+                      <a:endParaRPr lang="en-US" altLang="ko-KR" sz="600" b="0" i="0" u="none" strike="noStrike">
+                        <a:solidFill>
+                          <a:srgbClr val="000000"/>
+                        </a:solidFill>
+                        <a:effectLst/>
+                        <a:latin typeface="+mn-ea"/>
+                        <a:ea typeface="+mn-ea"/>
+                      </a:endParaRPr>
                     </a:p>
                   </a:txBody>
                   <a:tcPr marL="0" marR="0" marT="0" marB="0" anchor="ctr">
@@ -17090,17 +17361,23 @@
                     <a:bodyPr/>
                     <a:lstStyle/>
                     <a:p>
-                      <a:pPr algn="ctr">
-                        <a:defRPr sz="700" b="0">
-                          <a:solidFill>
-                            <a:srgbClr val="445474"/>
-                          </a:solidFill>
-                          <a:latin typeface="맑은 고딕"/>
-                        </a:defRPr>
-                      </a:pPr>
+                      <a:pPr algn="ctr" fontAlgn="ctr"/>
                       <a:r>
-                        <a:t>27.6</a:t>
+                        <a:rPr lang="en-US" altLang="ko-KR" sz="600" u="none" strike="noStrike" dirty="0">
+                          <a:effectLst/>
+                          <a:latin typeface="+mn-ea"/>
+                          <a:ea typeface="+mn-ea"/>
+                        </a:rPr>
+                        <a:t>0</a:t>
                       </a:r>
+                      <a:endParaRPr lang="en-US" altLang="ko-KR" sz="600" b="0" i="0" u="none" strike="noStrike" dirty="0">
+                        <a:solidFill>
+                          <a:srgbClr val="000000"/>
+                        </a:solidFill>
+                        <a:effectLst/>
+                        <a:latin typeface="+mn-ea"/>
+                        <a:ea typeface="+mn-ea"/>
+                      </a:endParaRPr>
                     </a:p>
                   </a:txBody>
                   <a:tcPr marL="0" marR="0" marT="0" marB="0" anchor="ctr">
@@ -17248,17 +17525,23 @@
                     <a:bodyPr/>
                     <a:lstStyle/>
                     <a:p>
-                      <a:pPr algn="ctr">
-                        <a:defRPr sz="700" b="0">
-                          <a:solidFill>
-                            <a:srgbClr val="445474"/>
-                          </a:solidFill>
-                          <a:latin typeface="맑은 고딕"/>
-                        </a:defRPr>
-                      </a:pPr>
+                      <a:pPr algn="ctr" fontAlgn="ctr"/>
                       <a:r>
-                        <a:t>120.4</a:t>
+                        <a:rPr lang="en-US" altLang="ko-KR" sz="600" u="none" strike="noStrike" dirty="0">
+                          <a:effectLst/>
+                          <a:latin typeface="+mn-ea"/>
+                          <a:ea typeface="+mn-ea"/>
+                        </a:rPr>
+                        <a:t>0</a:t>
                       </a:r>
+                      <a:endParaRPr lang="en-US" altLang="ko-KR" sz="600" b="0" i="0" u="none" strike="noStrike" dirty="0">
+                        <a:solidFill>
+                          <a:srgbClr val="000000"/>
+                        </a:solidFill>
+                        <a:effectLst/>
+                        <a:latin typeface="+mn-ea"/>
+                        <a:ea typeface="+mn-ea"/>
+                      </a:endParaRPr>
                     </a:p>
                   </a:txBody>
                   <a:tcPr marL="0" marR="0" marT="0" marB="0" anchor="ctr">
@@ -17406,17 +17689,23 @@
                     <a:bodyPr/>
                     <a:lstStyle/>
                     <a:p>
-                      <a:pPr algn="ctr">
-                        <a:defRPr sz="700" b="0">
-                          <a:solidFill>
-                            <a:srgbClr val="445474"/>
-                          </a:solidFill>
-                          <a:latin typeface="맑은 고딕"/>
-                        </a:defRPr>
-                      </a:pPr>
+                      <a:pPr algn="ctr" fontAlgn="ctr"/>
                       <a:r>
-                        <a:t>104.3</a:t>
+                        <a:rPr lang="en-US" altLang="ko-KR" sz="600" u="none" strike="noStrike" dirty="0">
+                          <a:effectLst/>
+                          <a:latin typeface="+mn-ea"/>
+                          <a:ea typeface="+mn-ea"/>
+                        </a:rPr>
+                        <a:t>0</a:t>
                       </a:r>
+                      <a:endParaRPr lang="en-US" altLang="ko-KR" sz="600" b="0" i="0" u="none" strike="noStrike" dirty="0">
+                        <a:solidFill>
+                          <a:srgbClr val="000000"/>
+                        </a:solidFill>
+                        <a:effectLst/>
+                        <a:latin typeface="+mn-ea"/>
+                        <a:ea typeface="+mn-ea"/>
+                      </a:endParaRPr>
                     </a:p>
                   </a:txBody>
                   <a:tcPr marL="0" marR="0" marT="0" marB="0" anchor="ctr">
@@ -17564,17 +17853,23 @@
                     <a:bodyPr/>
                     <a:lstStyle/>
                     <a:p>
-                      <a:pPr algn="ctr">
-                        <a:defRPr sz="700" b="0">
-                          <a:solidFill>
-                            <a:srgbClr val="445474"/>
-                          </a:solidFill>
-                          <a:latin typeface="맑은 고딕"/>
-                        </a:defRPr>
-                      </a:pPr>
+                      <a:pPr algn="ctr" fontAlgn="ctr"/>
                       <a:r>
-                        <a:t>218</a:t>
+                        <a:rPr lang="en-US" altLang="ko-KR" sz="600" u="none" strike="noStrike">
+                          <a:effectLst/>
+                          <a:latin typeface="+mn-ea"/>
+                          <a:ea typeface="+mn-ea"/>
+                        </a:rPr>
+                        <a:t>0</a:t>
                       </a:r>
+                      <a:endParaRPr lang="en-US" altLang="ko-KR" sz="600" b="0" i="0" u="none" strike="noStrike">
+                        <a:solidFill>
+                          <a:srgbClr val="000000"/>
+                        </a:solidFill>
+                        <a:effectLst/>
+                        <a:latin typeface="+mn-ea"/>
+                        <a:ea typeface="+mn-ea"/>
+                      </a:endParaRPr>
                     </a:p>
                   </a:txBody>
                   <a:tcPr marL="0" marR="0" marT="0" marB="0" anchor="ctr">
@@ -17730,17 +18025,23 @@
                     <a:bodyPr/>
                     <a:lstStyle/>
                     <a:p>
-                      <a:pPr algn="ctr">
-                        <a:defRPr sz="700" b="0">
-                          <a:solidFill>
-                            <a:srgbClr val="445474"/>
-                          </a:solidFill>
-                          <a:latin typeface="맑은 고딕"/>
-                        </a:defRPr>
-                      </a:pPr>
+                      <a:pPr algn="ctr" fontAlgn="ctr"/>
                       <a:r>
-                        <a:t>-177</a:t>
+                        <a:rPr lang="en-US" altLang="ko-KR" sz="600" u="none" strike="noStrike" dirty="0">
+                          <a:effectLst/>
+                          <a:latin typeface="+mn-ea"/>
+                          <a:ea typeface="+mn-ea"/>
+                        </a:rPr>
+                        <a:t>0</a:t>
                       </a:r>
+                      <a:endParaRPr lang="en-US" altLang="ko-KR" sz="600" b="0" i="0" u="none" strike="noStrike" dirty="0">
+                        <a:solidFill>
+                          <a:srgbClr val="000000"/>
+                        </a:solidFill>
+                        <a:effectLst/>
+                        <a:latin typeface="+mn-ea"/>
+                        <a:ea typeface="+mn-ea"/>
+                      </a:endParaRPr>
                     </a:p>
                   </a:txBody>
                   <a:tcPr marL="0" marR="0" marT="0" marB="0" anchor="ctr">
@@ -17888,17 +18189,23 @@
                     <a:bodyPr/>
                     <a:lstStyle/>
                     <a:p>
-                      <a:pPr algn="ctr">
-                        <a:defRPr sz="700" b="0">
-                          <a:solidFill>
-                            <a:srgbClr val="445474"/>
-                          </a:solidFill>
-                          <a:latin typeface="맑은 고딕"/>
-                        </a:defRPr>
-                      </a:pPr>
+                      <a:pPr algn="ctr" fontAlgn="ctr"/>
                       <a:r>
-                        <a:t>16.1</a:t>
+                        <a:rPr lang="en-US" altLang="ko-KR" sz="600" u="none" strike="noStrike" dirty="0">
+                          <a:effectLst/>
+                          <a:latin typeface="+mn-ea"/>
+                          <a:ea typeface="+mn-ea"/>
+                        </a:rPr>
+                        <a:t>0</a:t>
                       </a:r>
+                      <a:endParaRPr lang="en-US" altLang="ko-KR" sz="600" b="0" i="0" u="none" strike="noStrike" dirty="0">
+                        <a:solidFill>
+                          <a:srgbClr val="000000"/>
+                        </a:solidFill>
+                        <a:effectLst/>
+                        <a:latin typeface="+mn-ea"/>
+                        <a:ea typeface="+mn-ea"/>
+                      </a:endParaRPr>
                     </a:p>
                   </a:txBody>
                   <a:tcPr marL="0" marR="0" marT="0" marB="0" anchor="ctr">
@@ -18046,17 +18353,23 @@
                     <a:bodyPr/>
                     <a:lstStyle/>
                     <a:p>
-                      <a:pPr algn="ctr">
-                        <a:defRPr sz="700" b="0">
-                          <a:solidFill>
-                            <a:srgbClr val="445474"/>
-                          </a:solidFill>
-                          <a:latin typeface="맑은 고딕"/>
-                        </a:defRPr>
-                      </a:pPr>
+                      <a:pPr algn="ctr" fontAlgn="ctr"/>
                       <a:r>
-                        <a:t>34.8</a:t>
+                        <a:rPr lang="en-US" altLang="ko-KR" sz="600" u="none" strike="noStrike" dirty="0">
+                          <a:effectLst/>
+                          <a:latin typeface="+mn-ea"/>
+                          <a:ea typeface="+mn-ea"/>
+                        </a:rPr>
+                        <a:t>0</a:t>
                       </a:r>
+                      <a:endParaRPr lang="en-US" altLang="ko-KR" sz="600" b="0" i="0" u="none" strike="noStrike" dirty="0">
+                        <a:solidFill>
+                          <a:srgbClr val="000000"/>
+                        </a:solidFill>
+                        <a:effectLst/>
+                        <a:latin typeface="+mn-ea"/>
+                        <a:ea typeface="+mn-ea"/>
+                      </a:endParaRPr>
                     </a:p>
                   </a:txBody>
                   <a:tcPr marL="0" marR="0" marT="0" marB="0" anchor="ctr">
@@ -18174,12 +18487,11 @@
           <a:bodyPr rtlCol="0" anchor="ctr"/>
           <a:lstStyle/>
           <a:p>
-            <a:pPr algn="ctr">
-              <a:defRPr sz="1300" b="1">
-                <a:latin typeface="맑은 고딕"/>
-              </a:defRPr>
-            </a:pPr>
-            <a:r>
+            <a:r>
+              <a:rPr lang="en-US" altLang="ko-KR" sz="1400" b="1" dirty="0">
+                <a:latin typeface="+mj-ea"/>
+                <a:ea typeface="+mj-ea"/>
+              </a:rPr>
               <a:t>C/C &amp; Main problem</a:t>
             </a:r>
           </a:p>
@@ -18234,12 +18546,11 @@
           <a:bodyPr rtlCol="0" anchor="ctr"/>
           <a:lstStyle/>
           <a:p>
-            <a:pPr algn="ctr">
-              <a:defRPr sz="1300" b="1">
-                <a:latin typeface="맑은 고딕"/>
-              </a:defRPr>
-            </a:pPr>
-            <a:r>
+            <a:r>
+              <a:rPr lang="en-US" altLang="ko-KR" sz="1200" b="1" dirty="0">
+                <a:latin typeface="+mj-ea"/>
+                <a:ea typeface="+mj-ea"/>
+              </a:rPr>
               <a:t>MPH:</a:t>
             </a:r>
           </a:p>
@@ -18333,13 +18644,16 @@
           </a:bodyPr>
           <a:lstStyle/>
           <a:p>
-            <a:pPr algn="ctr">
-              <a:defRPr sz="1300" b="1">
-                <a:latin typeface="맑은 고딕"/>
-              </a:defRPr>
-            </a:pPr>
-            <a:r>
-              <a:t>HGI:77.24</a:t>
+            <a:pPr eaLnBrk="1" hangingPunct="1"/>
+            <a:r>
+              <a:rPr lang="en-US" altLang="ko-KR" sz="1400" b="1" dirty="0">
+                <a:solidFill>
+                  <a:srgbClr val="000000"/>
+                </a:solidFill>
+                <a:latin typeface="+mn-ea"/>
+                <a:cs typeface="Times New Roman Bold" panose="02020803070505020304" pitchFamily="18" charset="0"/>
+              </a:rPr>
+              <a:t>HGI:+</a:t>
             </a:r>
           </a:p>
         </p:txBody>
@@ -18423,13 +18737,16 @@
           </a:bodyPr>
           <a:lstStyle/>
           <a:p>
-            <a:pPr algn="ctr">
-              <a:defRPr sz="1300" b="1">
-                <a:latin typeface="맑은 고딕"/>
-              </a:defRPr>
-            </a:pPr>
-            <a:r>
-              <a:t>VGI:34.24</a:t>
+            <a:pPr eaLnBrk="1" hangingPunct="1"/>
+            <a:r>
+              <a:rPr lang="en-US" altLang="ko-KR" sz="1400" b="1" dirty="0">
+                <a:solidFill>
+                  <a:srgbClr val="000000"/>
+                </a:solidFill>
+                <a:latin typeface="+mn-ea"/>
+                <a:cs typeface="Times New Roman Bold" panose="02020803070505020304" pitchFamily="18" charset="0"/>
+              </a:rPr>
+              <a:t>VGI:+</a:t>
             </a:r>
           </a:p>
         </p:txBody>
@@ -18755,13 +19072,16 @@
           </a:bodyPr>
           <a:lstStyle/>
           <a:p>
-            <a:pPr algn="ctr">
-              <a:defRPr sz="1300" b="1">
-                <a:latin typeface="맑은 고딕"/>
-              </a:defRPr>
-            </a:pPr>
-            <a:r>
-              <a:t>IAPDI:107.27</a:t>
+            <a:pPr algn="ctr" eaLnBrk="1" hangingPunct="1"/>
+            <a:r>
+              <a:rPr lang="en-US" altLang="ko-KR" sz="1300" b="1" dirty="0">
+                <a:solidFill>
+                  <a:srgbClr val="000000"/>
+                </a:solidFill>
+                <a:latin typeface="+mn-ea"/>
+                <a:cs typeface="Times New Roman Bold" panose="02020803070505020304" pitchFamily="18" charset="0"/>
+              </a:rPr>
+              <a:t>IAPDI:</a:t>
             </a:r>
           </a:p>
         </p:txBody>
@@ -18975,13 +19295,16 @@
           </a:bodyPr>
           <a:lstStyle/>
           <a:p>
-            <a:pPr algn="ctr">
-              <a:defRPr sz="1300" b="1">
-                <a:latin typeface="맑은 고딕"/>
-              </a:defRPr>
-            </a:pPr>
-            <a:r>
-              <a:t>2APDL:-72.94</a:t>
+            <a:pPr eaLnBrk="1" hangingPunct="1"/>
+            <a:r>
+              <a:rPr lang="en-US" altLang="ko-KR" sz="1300" b="1" dirty="0">
+                <a:solidFill>
+                  <a:srgbClr val="000000"/>
+                </a:solidFill>
+                <a:latin typeface="+mn-ea"/>
+                <a:cs typeface="Times New Roman Bold" panose="02020803070505020304" pitchFamily="18" charset="0"/>
+              </a:rPr>
+              <a:t>2APDL:</a:t>
             </a:r>
           </a:p>
         </p:txBody>
@@ -19014,13 +19337,16 @@
           </a:bodyPr>
           <a:lstStyle/>
           <a:p>
-            <a:pPr algn="ctr">
-              <a:defRPr sz="1300" b="1">
-                <a:latin typeface="맑은 고딕"/>
-              </a:defRPr>
-            </a:pPr>
-            <a:r>
-              <a:t>IODI:-1.18</a:t>
+            <a:pPr eaLnBrk="1" hangingPunct="1"/>
+            <a:r>
+              <a:rPr lang="en-US" altLang="ko-KR" sz="1300" b="1" dirty="0">
+                <a:solidFill>
+                  <a:srgbClr val="000000"/>
+                </a:solidFill>
+                <a:latin typeface="+mn-ea"/>
+                <a:cs typeface="Times New Roman Bold" panose="02020803070505020304" pitchFamily="18" charset="0"/>
+              </a:rPr>
+              <a:t>IODI:</a:t>
             </a:r>
           </a:p>
         </p:txBody>
@@ -19096,13 +19422,16 @@
           </a:bodyPr>
           <a:lstStyle/>
           <a:p>
-            <a:pPr algn="ctr">
-              <a:defRPr sz="1300" b="1">
-                <a:latin typeface="맑은 고딕"/>
-              </a:defRPr>
-            </a:pPr>
-            <a:r>
-              <a:t>VDL:17.45</a:t>
+            <a:pPr eaLnBrk="1" hangingPunct="1"/>
+            <a:r>
+              <a:rPr lang="en-US" altLang="ko-KR" sz="1300" b="1" dirty="0">
+                <a:solidFill>
+                  <a:srgbClr val="000000"/>
+                </a:solidFill>
+                <a:latin typeface="+mn-ea"/>
+                <a:cs typeface="Times New Roman Bold" panose="02020803070505020304" pitchFamily="18" charset="0"/>
+              </a:rPr>
+              <a:t>VDL:</a:t>
             </a:r>
           </a:p>
         </p:txBody>
@@ -19178,14 +19507,34 @@
           </a:bodyPr>
           <a:lstStyle/>
           <a:p>
-            <a:pPr algn="ctr">
-              <a:defRPr sz="1300" b="1">
-                <a:latin typeface="맑은 고딕"/>
-              </a:defRPr>
-            </a:pPr>
-            <a:r>
-              <a:t>CEPH RESULT</a:t>
-            </a:r>
+            <a:pPr eaLnBrk="1" hangingPunct="1"/>
+            <a:r>
+              <a:rPr lang="en-US" altLang="ko-KR" sz="1400" b="1" dirty="0">
+                <a:solidFill>
+                  <a:srgbClr val="000000"/>
+                </a:solidFill>
+                <a:latin typeface="+mn-ea"/>
+                <a:cs typeface="Times New Roman Bold" panose="02020803070505020304" pitchFamily="18" charset="0"/>
+              </a:rPr>
+              <a:t>CEPH </a:t>
+            </a:r>
+            <a:r>
+              <a:rPr lang="ko-KR" altLang="en-US" sz="1400" b="1" dirty="0">
+                <a:solidFill>
+                  <a:srgbClr val="000000"/>
+                </a:solidFill>
+                <a:latin typeface="+mn-ea"/>
+                <a:cs typeface="Times New Roman Bold" panose="02020803070505020304" pitchFamily="18" charset="0"/>
+              </a:rPr>
+              <a:t>데이터</a:t>
+            </a:r>
+            <a:endParaRPr lang="en-US" altLang="ko-KR" sz="1400" b="1" dirty="0">
+              <a:solidFill>
+                <a:srgbClr val="000000"/>
+              </a:solidFill>
+              <a:latin typeface="+mn-ea"/>
+              <a:cs typeface="Times New Roman Bold" panose="02020803070505020304" pitchFamily="18" charset="0"/>
+            </a:endParaRPr>
           </a:p>
         </p:txBody>
       </p:sp>
@@ -19217,13 +19566,16 @@
           </a:bodyPr>
           <a:lstStyle/>
           <a:p>
-            <a:pPr algn="ctr">
-              <a:defRPr sz="1300" b="1">
-                <a:latin typeface="맑은 고딕"/>
-              </a:defRPr>
-            </a:pPr>
-            <a:r>
-              <a:t>CFD:-55.19</a:t>
+            <a:pPr eaLnBrk="1" hangingPunct="1"/>
+            <a:r>
+              <a:rPr lang="en-US" altLang="ko-KR" sz="1400" b="1" dirty="0">
+                <a:solidFill>
+                  <a:srgbClr val="000000"/>
+                </a:solidFill>
+                <a:latin typeface="+mn-ea"/>
+                <a:cs typeface="Times New Roman Bold" panose="02020803070505020304" pitchFamily="18" charset="0"/>
+              </a:rPr>
+              <a:t>CFD:</a:t>
             </a:r>
           </a:p>
         </p:txBody>
@@ -19256,12 +19608,15 @@
           </a:bodyPr>
           <a:lstStyle/>
           <a:p>
-            <a:pPr algn="ctr">
-              <a:defRPr sz="1300" b="1">
-                <a:latin typeface="맑은 고딕"/>
-              </a:defRPr>
-            </a:pPr>
-            <a:r>
+            <a:pPr eaLnBrk="1" hangingPunct="1"/>
+            <a:r>
+              <a:rPr lang="en-US" altLang="ko-KR" sz="1600" b="1" dirty="0">
+                <a:solidFill>
+                  <a:srgbClr val="000000"/>
+                </a:solidFill>
+                <a:latin typeface="+mn-ea"/>
+                <a:cs typeface="Times New Roman Bold" panose="02020803070505020304" pitchFamily="18" charset="0"/>
+              </a:rPr>
               <a:t>Extraction:</a:t>
             </a:r>
           </a:p>
@@ -19314,30 +19669,6 @@
           </a:p>
         </p:txBody>
       </p:sp>
-      <p:pic>
-        <p:nvPicPr>
-          <p:cNvPr id="3170" name="Picture 3169" descr="oral_default.jpg"/>
-          <p:cNvPicPr>
-            <a:picLocks noChangeAspect="1"/>
-          </p:cNvPicPr>
-          <p:nvPr/>
-        </p:nvPicPr>
-        <p:blipFill>
-          <a:blip r:embed="rId2"/>
-          <a:stretch>
-            <a:fillRect/>
-          </a:stretch>
-        </p:blipFill>
-        <p:spPr>
-          <a:xfrm>
-            <a:off x="2468880" y="502920"/>
-            <a:ext cx="1463040" cy="1005840"/>
-          </a:xfrm>
-          <a:prstGeom prst="rect">
-            <a:avLst/>
-          </a:prstGeom>
-        </p:spPr>
-      </p:pic>
     </p:spTree>
     <p:extLst>
       <p:ext uri="{BB962C8B-B14F-4D97-AF65-F5344CB8AC3E}">
@@ -28891,8 +29222,8 @@
         </p:blipFill>
         <p:spPr>
           <a:xfrm>
-            <a:off x="305335" y="0"/>
-            <a:ext cx="8533328" cy="6858000"/>
+            <a:off x="1588201" y="0"/>
+            <a:ext cx="5967596" cy="6858000"/>
           </a:xfrm>
           <a:prstGeom prst="rect">
             <a:avLst/>
@@ -28979,14 +29310,14 @@
       </p:pic>
       <p:pic>
         <p:nvPicPr>
-          <p:cNvPr id="4" name="Picture 3" descr="photo_3.jpg"/>
+          <p:cNvPr id="4" name="Picture 3" descr="default_image.jpg"/>
           <p:cNvPicPr>
             <a:picLocks noChangeAspect="1"/>
           </p:cNvPicPr>
           <p:nvPr/>
         </p:nvPicPr>
         <p:blipFill>
-          <a:blip r:embed="rId3"/>
+          <a:blip r:embed="rId2"/>
           <a:stretch>
             <a:fillRect/>
           </a:stretch>
@@ -29099,14 +29430,14 @@
       </p:pic>
       <p:pic>
         <p:nvPicPr>
-          <p:cNvPr id="9" name="Picture 8" descr="photo_8.jpg"/>
+          <p:cNvPr id="9" name="Picture 8" descr="default_image.jpg"/>
           <p:cNvPicPr>
             <a:picLocks noChangeAspect="1"/>
           </p:cNvPicPr>
           <p:nvPr/>
         </p:nvPicPr>
         <p:blipFill>
-          <a:blip r:embed="rId4"/>
+          <a:blip r:embed="rId2"/>
           <a:stretch>
             <a:fillRect/>
           </a:stretch>
@@ -29225,14 +29556,14 @@
       </p:pic>
       <p:pic>
         <p:nvPicPr>
-          <p:cNvPr id="5" name="Picture 4" descr="oralPhoto_4.jpg"/>
+          <p:cNvPr id="5" name="Picture 4" descr="oral_default.jpg"/>
           <p:cNvPicPr>
             <a:picLocks noChangeAspect="1"/>
           </p:cNvPicPr>
           <p:nvPr/>
         </p:nvPicPr>
         <p:blipFill>
-          <a:blip r:embed="rId3"/>
+          <a:blip r:embed="rId2"/>
           <a:stretch>
             <a:fillRect/>
           </a:stretch>
@@ -29371,8 +29702,8 @@
         </p:blipFill>
         <p:spPr>
           <a:xfrm>
-            <a:off x="311348" y="0"/>
-            <a:ext cx="8521302" cy="6858000"/>
+            <a:off x="1585837" y="0"/>
+            <a:ext cx="5972324" cy="6858000"/>
           </a:xfrm>
           <a:prstGeom prst="rect">
             <a:avLst/>
@@ -29465,7 +29796,7 @@
       </p:grpSpPr>
       <p:pic>
         <p:nvPicPr>
-          <p:cNvPr id="2" name="Picture 1" descr="posturePhoto_1.jpg"/>
+          <p:cNvPr id="2" name="Picture 1" descr="posture_default.jpg"/>
           <p:cNvPicPr>
             <a:picLocks noChangeAspect="1"/>
           </p:cNvPicPr>
@@ -29479,8 +29810,8 @@
         </p:blipFill>
         <p:spPr>
           <a:xfrm>
-            <a:off x="457200" y="1885950"/>
-            <a:ext cx="2057400" cy="3086100"/>
+            <a:off x="457200" y="2057400"/>
+            <a:ext cx="2057400" cy="2743200"/>
           </a:xfrm>
           <a:prstGeom prst="rect">
             <a:avLst/>
@@ -29496,7 +29827,7 @@
           <p:nvPr/>
         </p:nvPicPr>
         <p:blipFill>
-          <a:blip r:embed="rId3"/>
+          <a:blip r:embed="rId2"/>
           <a:stretch>
             <a:fillRect/>
           </a:stretch>
@@ -29520,7 +29851,7 @@
           <p:nvPr/>
         </p:nvPicPr>
         <p:blipFill>
-          <a:blip r:embed="rId3"/>
+          <a:blip r:embed="rId2"/>
           <a:stretch>
             <a:fillRect/>
           </a:stretch>
@@ -29544,7 +29875,7 @@
           <p:nvPr/>
         </p:nvPicPr>
         <p:blipFill>
-          <a:blip r:embed="rId3"/>
+          <a:blip r:embed="rId2"/>
           <a:stretch>
             <a:fillRect/>
           </a:stretch>

--- a/output_ppt.pptx
+++ b/output_ppt.pptx
@@ -29310,14 +29310,14 @@
       </p:pic>
       <p:pic>
         <p:nvPicPr>
-          <p:cNvPr id="4" name="Picture 3" descr="default_image.jpg"/>
+          <p:cNvPr id="4" name="Picture 3" descr="photo_3.jpg"/>
           <p:cNvPicPr>
             <a:picLocks noChangeAspect="1"/>
           </p:cNvPicPr>
           <p:nvPr/>
         </p:nvPicPr>
         <p:blipFill>
-          <a:blip r:embed="rId2"/>
+          <a:blip r:embed="rId3"/>
           <a:stretch>
             <a:fillRect/>
           </a:stretch>
@@ -29970,22 +29970,22 @@
       </p:pic>
       <p:pic>
         <p:nvPicPr>
-          <p:cNvPr id="4" name="Picture 3" descr="posture_default.jpg"/>
+          <p:cNvPr id="4" name="Picture 3" descr="posturePhoto_7.jpg"/>
           <p:cNvPicPr>
             <a:picLocks noChangeAspect="1"/>
           </p:cNvPicPr>
           <p:nvPr/>
         </p:nvPicPr>
         <p:blipFill>
-          <a:blip r:embed="rId2"/>
+          <a:blip r:embed="rId3"/>
           <a:stretch>
             <a:fillRect/>
           </a:stretch>
         </p:blipFill>
         <p:spPr>
           <a:xfrm>
-            <a:off x="4572000" y="2057400"/>
-            <a:ext cx="2057400" cy="2743200"/>
+            <a:off x="4572000" y="2602262"/>
+            <a:ext cx="2057400" cy="1653475"/>
           </a:xfrm>
           <a:prstGeom prst="rect">
             <a:avLst/>

--- a/output_ppt.pptx
+++ b/output_ppt.pptx
@@ -7029,108 +7029,29 @@
             </a:lvl9pPr>
           </a:lstStyle>
           <a:p>
-            <a:pPr eaLnBrk="1" hangingPunct="1"/>
-            <a:r>
-              <a:rPr lang="en-US" altLang="ko-KR" sz="1600" b="1" dirty="0">
+            <a:pPr algn="ctr">
+              <a:defRPr sz="1500" b="1">
                 <a:solidFill>
-                  <a:schemeClr val="tx2"/>
+                  <a:srgbClr val="445474"/>
                 </a:solidFill>
-                <a:latin typeface="+mj-ea"/>
-                <a:ea typeface="+mj-ea"/>
-                <a:cs typeface="Arial" panose="020B0604020202020204" pitchFamily="34" charset="0"/>
-              </a:rPr>
-              <a:t>  (F) </a:t>
-            </a:r>
-            <a:r>
-              <a:rPr lang="ko-KR" altLang="en-US" sz="1600" b="1" dirty="0">
-                <a:solidFill>
-                  <a:schemeClr val="tx2"/>
-                </a:solidFill>
-                <a:latin typeface="+mj-ea"/>
-                <a:ea typeface="+mj-ea"/>
-                <a:cs typeface="Arial" panose="020B0604020202020204" pitchFamily="34" charset="0"/>
-              </a:rPr>
-              <a:t>순응교합연구회 </a:t>
-            </a:r>
-            <a:r>
-              <a:rPr lang="en-US" altLang="ko-KR" sz="1600" b="1" dirty="0">
-                <a:solidFill>
-                  <a:schemeClr val="tx2"/>
-                </a:solidFill>
-                <a:latin typeface="+mj-ea"/>
-                <a:ea typeface="+mj-ea"/>
-                <a:cs typeface="Arial" panose="020B0604020202020204" pitchFamily="34" charset="0"/>
-              </a:rPr>
-              <a:t>8y since 2017</a:t>
+                <a:latin typeface="맑은 고딕"/>
+              </a:defRPr>
+            </a:pPr>
+            <a:r>
+              <a:t>Male 순응교합 20 2005-04-04</a:t>
             </a:r>
           </a:p>
           <a:p>
-            <a:pPr eaLnBrk="1" hangingPunct="1"/>
-            <a:r>
-              <a:rPr lang="en-US" altLang="ko-KR" sz="1600" b="1" dirty="0">
+            <a:pPr algn="ctr">
+              <a:defRPr sz="1500" b="1">
                 <a:solidFill>
-                  <a:schemeClr val="tx2"/>
+                  <a:srgbClr val="445474"/>
                 </a:solidFill>
-                <a:latin typeface="+mj-ea"/>
-                <a:ea typeface="+mj-ea"/>
-                <a:cs typeface="Arial" panose="020B0604020202020204" pitchFamily="34" charset="0"/>
-              </a:rPr>
-              <a:t>S1.B1.D1.C1-nbt(</a:t>
-            </a:r>
-            <a:r>
-              <a:rPr lang="en-US" altLang="ko-KR" sz="1600" b="1" dirty="0" err="1">
-                <a:solidFill>
-                  <a:schemeClr val="tx2"/>
-                </a:solidFill>
-                <a:latin typeface="+mj-ea"/>
-                <a:ea typeface="+mj-ea"/>
-                <a:cs typeface="Arial" panose="020B0604020202020204" pitchFamily="34" charset="0"/>
-              </a:rPr>
-              <a:t>dbt</a:t>
-            </a:r>
-            <a:r>
-              <a:rPr lang="en-US" altLang="ko-KR" sz="1600" b="1" dirty="0">
-                <a:solidFill>
-                  <a:schemeClr val="tx2"/>
-                </a:solidFill>
-                <a:latin typeface="+mj-ea"/>
-                <a:ea typeface="+mj-ea"/>
-                <a:cs typeface="Arial" panose="020B0604020202020204" pitchFamily="34" charset="0"/>
-              </a:rPr>
-              <a:t>)-RM(Rt)-</a:t>
-            </a:r>
-            <a:r>
-              <a:rPr lang="en-US" altLang="ko-KR" sz="1600" b="1" dirty="0" err="1">
-                <a:solidFill>
-                  <a:schemeClr val="tx2"/>
-                </a:solidFill>
-                <a:latin typeface="+mj-ea"/>
-                <a:ea typeface="+mj-ea"/>
-                <a:cs typeface="Arial" panose="020B0604020202020204" pitchFamily="34" charset="0"/>
-              </a:rPr>
-              <a:t>Fx:Ex-Fx</a:t>
-            </a:r>
-            <a:r>
-              <a:rPr lang="en-US" altLang="ko-KR" sz="1600" b="1" dirty="0">
-                <a:solidFill>
-                  <a:schemeClr val="tx2"/>
-                </a:solidFill>
-                <a:latin typeface="+mj-ea"/>
-                <a:ea typeface="+mj-ea"/>
-                <a:cs typeface="Arial" panose="020B0604020202020204" pitchFamily="34" charset="0"/>
-              </a:rPr>
-              <a:t>/0-Type IV   </a:t>
-            </a:r>
-            <a:r>
-              <a:rPr lang="ko-KR" altLang="en-US" sz="1600" b="1" dirty="0">
-                <a:solidFill>
-                  <a:schemeClr val="tx2"/>
-                </a:solidFill>
-                <a:latin typeface="+mj-ea"/>
-                <a:ea typeface="+mj-ea"/>
-                <a:cs typeface="Arial" panose="020B0604020202020204" pitchFamily="34" charset="0"/>
-              </a:rPr>
-              <a:t> </a:t>
+                <a:latin typeface="맑은 고딕"/>
+              </a:defRPr>
+            </a:pPr>
+            <a:r>
+              <a:t> S1.B3.D3.C1-nbt(dbt)-RM(Rt)-Fx:Ex-Fx/1-Type IV</a:t>
             </a:r>
           </a:p>
         </p:txBody>
@@ -12110,23 +12031,17 @@
                     <a:bodyPr/>
                     <a:lstStyle/>
                     <a:p>
-                      <a:pPr algn="ctr" fontAlgn="ctr"/>
+                      <a:pPr algn="ctr">
+                        <a:defRPr sz="700" b="0">
+                          <a:solidFill>
+                            <a:srgbClr val="445474"/>
+                          </a:solidFill>
+                          <a:latin typeface="맑은 고딕"/>
+                        </a:defRPr>
+                      </a:pPr>
                       <a:r>
-                        <a:rPr lang="en-US" altLang="ko-KR" sz="600" u="none" strike="noStrike" dirty="0">
-                          <a:effectLst/>
-                          <a:latin typeface="+mn-ea"/>
-                          <a:ea typeface="+mn-ea"/>
-                        </a:rPr>
-                        <a:t>0</a:t>
+                        <a:t>-30.1</a:t>
                       </a:r>
-                      <a:endParaRPr lang="en-US" altLang="ko-KR" sz="600" b="0" i="0" u="none" strike="noStrike" dirty="0">
-                        <a:solidFill>
-                          <a:srgbClr val="000000"/>
-                        </a:solidFill>
-                        <a:effectLst/>
-                        <a:latin typeface="+mn-ea"/>
-                        <a:ea typeface="+mn-ea"/>
-                      </a:endParaRPr>
                     </a:p>
                   </a:txBody>
                   <a:tcPr marL="0" marR="0" marT="0" marB="0" anchor="ctr">
@@ -12274,23 +12189,17 @@
                     <a:bodyPr/>
                     <a:lstStyle/>
                     <a:p>
-                      <a:pPr algn="ctr" fontAlgn="ctr"/>
+                      <a:pPr algn="ctr">
+                        <a:defRPr sz="700" b="0">
+                          <a:solidFill>
+                            <a:srgbClr val="445474"/>
+                          </a:solidFill>
+                          <a:latin typeface="맑은 고딕"/>
+                        </a:defRPr>
+                      </a:pPr>
                       <a:r>
-                        <a:rPr lang="en-US" altLang="ko-KR" sz="600" u="none" strike="noStrike" dirty="0">
-                          <a:effectLst/>
-                          <a:latin typeface="+mn-ea"/>
-                          <a:ea typeface="+mn-ea"/>
-                        </a:rPr>
-                        <a:t>0</a:t>
+                        <a:t>11.9</a:t>
                       </a:r>
-                      <a:endParaRPr lang="en-US" altLang="ko-KR" sz="600" b="0" i="0" u="none" strike="noStrike" dirty="0">
-                        <a:solidFill>
-                          <a:srgbClr val="000000"/>
-                        </a:solidFill>
-                        <a:effectLst/>
-                        <a:latin typeface="+mn-ea"/>
-                        <a:ea typeface="+mn-ea"/>
-                      </a:endParaRPr>
                     </a:p>
                   </a:txBody>
                   <a:tcPr marL="0" marR="0" marT="0" marB="0" anchor="ctr">
@@ -12438,23 +12347,17 @@
                     <a:bodyPr/>
                     <a:lstStyle/>
                     <a:p>
-                      <a:pPr algn="ctr" fontAlgn="ctr"/>
+                      <a:pPr algn="ctr">
+                        <a:defRPr sz="700" b="0">
+                          <a:solidFill>
+                            <a:srgbClr val="445474"/>
+                          </a:solidFill>
+                          <a:latin typeface="맑은 고딕"/>
+                        </a:defRPr>
+                      </a:pPr>
                       <a:r>
-                        <a:rPr lang="en-US" altLang="ko-KR" sz="600" u="none" strike="noStrike" dirty="0">
-                          <a:effectLst/>
-                          <a:latin typeface="+mn-ea"/>
-                          <a:ea typeface="+mn-ea"/>
-                        </a:rPr>
-                        <a:t>0</a:t>
+                        <a:t>42</a:t>
                       </a:r>
-                      <a:endParaRPr lang="en-US" altLang="ko-KR" sz="600" b="0" i="0" u="none" strike="noStrike" dirty="0">
-                        <a:solidFill>
-                          <a:srgbClr val="000000"/>
-                        </a:solidFill>
-                        <a:effectLst/>
-                        <a:latin typeface="+mn-ea"/>
-                        <a:ea typeface="+mn-ea"/>
-                      </a:endParaRPr>
                     </a:p>
                   </a:txBody>
                   <a:tcPr marL="0" marR="0" marT="0" marB="0" anchor="ctr">
@@ -12602,23 +12505,17 @@
                     <a:bodyPr/>
                     <a:lstStyle/>
                     <a:p>
-                      <a:pPr algn="ctr" fontAlgn="ctr"/>
+                      <a:pPr algn="ctr">
+                        <a:defRPr sz="700" b="0">
+                          <a:solidFill>
+                            <a:srgbClr val="445474"/>
+                          </a:solidFill>
+                          <a:latin typeface="맑은 고딕"/>
+                        </a:defRPr>
+                      </a:pPr>
                       <a:r>
-                        <a:rPr lang="en-US" altLang="ko-KR" sz="600" u="none" strike="noStrike">
-                          <a:effectLst/>
-                          <a:latin typeface="+mn-ea"/>
-                          <a:ea typeface="+mn-ea"/>
-                        </a:rPr>
-                        <a:t>0</a:t>
+                        <a:t>67.4</a:t>
                       </a:r>
-                      <a:endParaRPr lang="en-US" altLang="ko-KR" sz="600" b="0" i="0" u="none" strike="noStrike">
-                        <a:solidFill>
-                          <a:srgbClr val="000000"/>
-                        </a:solidFill>
-                        <a:effectLst/>
-                        <a:latin typeface="+mn-ea"/>
-                        <a:ea typeface="+mn-ea"/>
-                      </a:endParaRPr>
                     </a:p>
                   </a:txBody>
                   <a:tcPr marL="0" marR="0" marT="0" marB="0" anchor="ctr">
@@ -12766,23 +12663,17 @@
                     <a:bodyPr/>
                     <a:lstStyle/>
                     <a:p>
-                      <a:pPr algn="ctr" fontAlgn="ctr"/>
+                      <a:pPr algn="ctr">
+                        <a:defRPr sz="700" b="0">
+                          <a:solidFill>
+                            <a:srgbClr val="445474"/>
+                          </a:solidFill>
+                          <a:latin typeface="맑은 고딕"/>
+                        </a:defRPr>
+                      </a:pPr>
                       <a:r>
-                        <a:rPr lang="en-US" altLang="ko-KR" sz="600" u="none" strike="noStrike" dirty="0">
-                          <a:effectLst/>
-                          <a:latin typeface="+mn-ea"/>
-                          <a:ea typeface="+mn-ea"/>
-                        </a:rPr>
-                        <a:t>0</a:t>
+                        <a:t>39.9</a:t>
                       </a:r>
-                      <a:endParaRPr lang="en-US" altLang="ko-KR" sz="600" b="0" i="0" u="none" strike="noStrike" dirty="0">
-                        <a:solidFill>
-                          <a:srgbClr val="000000"/>
-                        </a:solidFill>
-                        <a:effectLst/>
-                        <a:latin typeface="+mn-ea"/>
-                        <a:ea typeface="+mn-ea"/>
-                      </a:endParaRPr>
                     </a:p>
                   </a:txBody>
                   <a:tcPr marL="0" marR="0" marT="0" marB="0" anchor="ctr">
@@ -12930,23 +12821,17 @@
                     <a:bodyPr/>
                     <a:lstStyle/>
                     <a:p>
-                      <a:pPr algn="ctr" fontAlgn="ctr"/>
+                      <a:pPr algn="ctr">
+                        <a:defRPr sz="700" b="0">
+                          <a:solidFill>
+                            <a:srgbClr val="445474"/>
+                          </a:solidFill>
+                          <a:latin typeface="맑은 고딕"/>
+                        </a:defRPr>
+                      </a:pPr>
                       <a:r>
-                        <a:rPr lang="en-US" altLang="ko-KR" sz="600" u="none" strike="noStrike">
-                          <a:effectLst/>
-                          <a:latin typeface="+mn-ea"/>
-                          <a:ea typeface="+mn-ea"/>
-                        </a:rPr>
-                        <a:t>0</a:t>
+                        <a:t>152.4</a:t>
                       </a:r>
-                      <a:endParaRPr lang="en-US" altLang="ko-KR" sz="600" b="0" i="0" u="none" strike="noStrike">
-                        <a:solidFill>
-                          <a:srgbClr val="000000"/>
-                        </a:solidFill>
-                        <a:effectLst/>
-                        <a:latin typeface="+mn-ea"/>
-                        <a:ea typeface="+mn-ea"/>
-                      </a:endParaRPr>
                     </a:p>
                   </a:txBody>
                   <a:tcPr marL="0" marR="0" marT="0" marB="0" anchor="ctr">
@@ -13094,23 +12979,17 @@
                     <a:bodyPr/>
                     <a:lstStyle/>
                     <a:p>
-                      <a:pPr algn="ctr" fontAlgn="ctr"/>
+                      <a:pPr algn="ctr">
+                        <a:defRPr sz="700" b="0">
+                          <a:solidFill>
+                            <a:srgbClr val="445474"/>
+                          </a:solidFill>
+                          <a:latin typeface="맑은 고딕"/>
+                        </a:defRPr>
+                      </a:pPr>
                       <a:r>
-                        <a:rPr lang="en-US" altLang="ko-KR" sz="600" u="none" strike="noStrike" dirty="0">
-                          <a:effectLst/>
-                          <a:latin typeface="+mn-ea"/>
-                          <a:ea typeface="+mn-ea"/>
-                        </a:rPr>
-                        <a:t>0</a:t>
+                        <a:t>178.8</a:t>
                       </a:r>
-                      <a:endParaRPr lang="en-US" altLang="ko-KR" sz="600" b="0" i="0" u="none" strike="noStrike" dirty="0">
-                        <a:solidFill>
-                          <a:srgbClr val="000000"/>
-                        </a:solidFill>
-                        <a:effectLst/>
-                        <a:latin typeface="+mn-ea"/>
-                        <a:ea typeface="+mn-ea"/>
-                      </a:endParaRPr>
                     </a:p>
                   </a:txBody>
                   <a:tcPr marL="0" marR="0" marT="0" marB="0" anchor="ctr">
@@ -13258,23 +13137,17 @@
                     <a:bodyPr/>
                     <a:lstStyle/>
                     <a:p>
-                      <a:pPr algn="ctr" fontAlgn="ctr"/>
+                      <a:pPr algn="ctr">
+                        <a:defRPr sz="700" b="0">
+                          <a:solidFill>
+                            <a:srgbClr val="445474"/>
+                          </a:solidFill>
+                          <a:latin typeface="맑은 고딕"/>
+                        </a:defRPr>
+                      </a:pPr>
                       <a:r>
-                        <a:rPr lang="en-US" altLang="ko-KR" sz="600" u="none" strike="noStrike">
-                          <a:effectLst/>
-                          <a:latin typeface="+mn-ea"/>
-                          <a:ea typeface="+mn-ea"/>
-                        </a:rPr>
-                        <a:t>0</a:t>
+                        <a:t>96.5</a:t>
                       </a:r>
-                      <a:endParaRPr lang="en-US" altLang="ko-KR" sz="600" b="0" i="0" u="none" strike="noStrike">
-                        <a:solidFill>
-                          <a:srgbClr val="000000"/>
-                        </a:solidFill>
-                        <a:effectLst/>
-                        <a:latin typeface="+mn-ea"/>
-                        <a:ea typeface="+mn-ea"/>
-                      </a:endParaRPr>
                     </a:p>
                   </a:txBody>
                   <a:tcPr marL="0" marR="0" marT="0" marB="0" anchor="ctr">
@@ -13422,23 +13295,17 @@
                     <a:bodyPr/>
                     <a:lstStyle/>
                     <a:p>
-                      <a:pPr algn="ctr" fontAlgn="ctr"/>
+                      <a:pPr algn="ctr">
+                        <a:defRPr sz="700" b="0">
+                          <a:solidFill>
+                            <a:srgbClr val="445474"/>
+                          </a:solidFill>
+                          <a:latin typeface="맑은 고딕"/>
+                        </a:defRPr>
+                      </a:pPr>
                       <a:r>
-                        <a:rPr lang="en-US" altLang="ko-KR" sz="600" u="none" strike="noStrike" dirty="0">
-                          <a:effectLst/>
-                          <a:latin typeface="+mn-ea"/>
-                          <a:ea typeface="+mn-ea"/>
-                        </a:rPr>
-                        <a:t>0</a:t>
+                        <a:t>106.8</a:t>
                       </a:r>
-                      <a:endParaRPr lang="en-US" altLang="ko-KR" sz="600" b="0" i="0" u="none" strike="noStrike" dirty="0">
-                        <a:solidFill>
-                          <a:srgbClr val="000000"/>
-                        </a:solidFill>
-                        <a:effectLst/>
-                        <a:latin typeface="+mn-ea"/>
-                        <a:ea typeface="+mn-ea"/>
-                      </a:endParaRPr>
                     </a:p>
                   </a:txBody>
                   <a:tcPr marL="0" marR="0" marT="0" marB="0" anchor="ctr">
@@ -13586,23 +13453,17 @@
                     <a:bodyPr/>
                     <a:lstStyle/>
                     <a:p>
-                      <a:pPr algn="ctr" fontAlgn="ctr"/>
+                      <a:pPr algn="ctr">
+                        <a:defRPr sz="700" b="0">
+                          <a:solidFill>
+                            <a:srgbClr val="445474"/>
+                          </a:solidFill>
+                          <a:latin typeface="맑은 고딕"/>
+                        </a:defRPr>
+                      </a:pPr>
                       <a:r>
-                        <a:rPr lang="en-US" altLang="ko-KR" sz="600" u="none" strike="noStrike" dirty="0">
-                          <a:effectLst/>
-                          <a:latin typeface="+mn-ea"/>
-                          <a:ea typeface="+mn-ea"/>
-                        </a:rPr>
-                        <a:t>0</a:t>
+                        <a:t>21.4</a:t>
                       </a:r>
-                      <a:endParaRPr lang="en-US" altLang="ko-KR" sz="600" b="0" i="0" u="none" strike="noStrike" dirty="0">
-                        <a:solidFill>
-                          <a:srgbClr val="000000"/>
-                        </a:solidFill>
-                        <a:effectLst/>
-                        <a:latin typeface="+mn-ea"/>
-                        <a:ea typeface="+mn-ea"/>
-                      </a:endParaRPr>
                     </a:p>
                   </a:txBody>
                   <a:tcPr marL="0" marR="0" marT="0" marB="0" anchor="ctr">
@@ -13750,23 +13611,17 @@
                     <a:bodyPr/>
                     <a:lstStyle/>
                     <a:p>
-                      <a:pPr algn="ctr" fontAlgn="ctr"/>
+                      <a:pPr algn="ctr">
+                        <a:defRPr sz="700" b="0">
+                          <a:solidFill>
+                            <a:srgbClr val="445474"/>
+                          </a:solidFill>
+                          <a:latin typeface="맑은 고딕"/>
+                        </a:defRPr>
+                      </a:pPr>
                       <a:r>
-                        <a:rPr lang="en-US" altLang="ko-KR" sz="600" u="none" strike="noStrike" dirty="0">
-                          <a:effectLst/>
-                          <a:latin typeface="+mn-ea"/>
-                          <a:ea typeface="+mn-ea"/>
-                        </a:rPr>
-                        <a:t>0</a:t>
+                        <a:t>63.5</a:t>
                       </a:r>
-                      <a:endParaRPr lang="en-US" altLang="ko-KR" sz="600" b="0" i="0" u="none" strike="noStrike" dirty="0">
-                        <a:solidFill>
-                          <a:srgbClr val="000000"/>
-                        </a:solidFill>
-                        <a:effectLst/>
-                        <a:latin typeface="+mn-ea"/>
-                        <a:ea typeface="+mn-ea"/>
-                      </a:endParaRPr>
                     </a:p>
                   </a:txBody>
                   <a:tcPr marL="0" marR="0" marT="0" marB="0" anchor="ctr">
@@ -13914,23 +13769,17 @@
                     <a:bodyPr/>
                     <a:lstStyle/>
                     <a:p>
-                      <a:pPr algn="ctr" fontAlgn="ctr"/>
+                      <a:pPr algn="ctr">
+                        <a:defRPr sz="700" b="0">
+                          <a:solidFill>
+                            <a:srgbClr val="445474"/>
+                          </a:solidFill>
+                          <a:latin typeface="맑은 고딕"/>
+                        </a:defRPr>
+                      </a:pPr>
                       <a:r>
-                        <a:rPr lang="en-US" altLang="ko-KR" sz="600" u="none" strike="noStrike" dirty="0">
-                          <a:effectLst/>
-                          <a:latin typeface="+mn-ea"/>
-                          <a:ea typeface="+mn-ea"/>
-                        </a:rPr>
-                        <a:t>0</a:t>
+                        <a:t>124</a:t>
                       </a:r>
-                      <a:endParaRPr lang="en-US" altLang="ko-KR" sz="600" b="0" i="0" u="none" strike="noStrike" dirty="0">
-                        <a:solidFill>
-                          <a:srgbClr val="000000"/>
-                        </a:solidFill>
-                        <a:effectLst/>
-                        <a:latin typeface="+mn-ea"/>
-                        <a:ea typeface="+mn-ea"/>
-                      </a:endParaRPr>
                     </a:p>
                   </a:txBody>
                   <a:tcPr marL="0" marR="0" marT="0" marB="0" anchor="ctr">
@@ -14078,23 +13927,17 @@
                     <a:bodyPr/>
                     <a:lstStyle/>
                     <a:p>
-                      <a:pPr algn="ctr" fontAlgn="ctr"/>
+                      <a:pPr algn="ctr">
+                        <a:defRPr sz="700" b="0">
+                          <a:solidFill>
+                            <a:srgbClr val="445474"/>
+                          </a:solidFill>
+                          <a:latin typeface="맑은 고딕"/>
+                        </a:defRPr>
+                      </a:pPr>
                       <a:r>
-                        <a:rPr lang="en-US" altLang="ko-KR" sz="600" u="none" strike="noStrike">
-                          <a:effectLst/>
-                          <a:latin typeface="+mn-ea"/>
-                          <a:ea typeface="+mn-ea"/>
-                        </a:rPr>
-                        <a:t>0</a:t>
+                        <a:t>36.7</a:t>
                       </a:r>
-                      <a:endParaRPr lang="en-US" altLang="ko-KR" sz="600" b="0" i="0" u="none" strike="noStrike">
-                        <a:solidFill>
-                          <a:srgbClr val="000000"/>
-                        </a:solidFill>
-                        <a:effectLst/>
-                        <a:latin typeface="+mn-ea"/>
-                        <a:ea typeface="+mn-ea"/>
-                      </a:endParaRPr>
                     </a:p>
                   </a:txBody>
                   <a:tcPr marL="0" marR="0" marT="0" marB="0" anchor="ctr">
@@ -14242,23 +14085,17 @@
                     <a:bodyPr/>
                     <a:lstStyle/>
                     <a:p>
-                      <a:pPr algn="ctr" fontAlgn="ctr"/>
+                      <a:pPr algn="ctr">
+                        <a:defRPr sz="700" b="0">
+                          <a:solidFill>
+                            <a:srgbClr val="445474"/>
+                          </a:solidFill>
+                          <a:latin typeface="맑은 고딕"/>
+                        </a:defRPr>
+                      </a:pPr>
                       <a:r>
-                        <a:rPr lang="en-US" altLang="ko-KR" sz="600" u="none" strike="noStrike" dirty="0">
-                          <a:effectLst/>
-                          <a:latin typeface="+mn-ea"/>
-                          <a:ea typeface="+mn-ea"/>
-                        </a:rPr>
-                        <a:t>0</a:t>
+                        <a:t>157.2</a:t>
                       </a:r>
-                      <a:endParaRPr lang="en-US" altLang="ko-KR" sz="600" b="0" i="0" u="none" strike="noStrike" dirty="0">
-                        <a:solidFill>
-                          <a:srgbClr val="000000"/>
-                        </a:solidFill>
-                        <a:effectLst/>
-                        <a:latin typeface="+mn-ea"/>
-                        <a:ea typeface="+mn-ea"/>
-                      </a:endParaRPr>
                     </a:p>
                   </a:txBody>
                   <a:tcPr marL="0" marR="0" marT="0" marB="0" anchor="ctr">
@@ -14406,23 +14243,17 @@
                     <a:bodyPr/>
                     <a:lstStyle/>
                     <a:p>
-                      <a:pPr algn="ctr" fontAlgn="ctr"/>
+                      <a:pPr algn="ctr">
+                        <a:defRPr sz="700" b="0">
+                          <a:solidFill>
+                            <a:srgbClr val="445474"/>
+                          </a:solidFill>
+                          <a:latin typeface="맑은 고딕"/>
+                        </a:defRPr>
+                      </a:pPr>
                       <a:r>
-                        <a:rPr lang="en-US" altLang="ko-KR" sz="600" u="none" strike="noStrike" dirty="0">
-                          <a:effectLst/>
-                          <a:latin typeface="+mn-ea"/>
-                          <a:ea typeface="+mn-ea"/>
-                        </a:rPr>
-                        <a:t>0</a:t>
+                        <a:t>64.5</a:t>
                       </a:r>
-                      <a:endParaRPr lang="en-US" altLang="ko-KR" sz="600" b="0" i="0" u="none" strike="noStrike" dirty="0">
-                        <a:solidFill>
-                          <a:srgbClr val="000000"/>
-                        </a:solidFill>
-                        <a:effectLst/>
-                        <a:latin typeface="+mn-ea"/>
-                        <a:ea typeface="+mn-ea"/>
-                      </a:endParaRPr>
                     </a:p>
                   </a:txBody>
                   <a:tcPr marL="0" marR="0" marT="0" marB="0" anchor="ctr">
@@ -14570,23 +14401,17 @@
                     <a:bodyPr/>
                     <a:lstStyle/>
                     <a:p>
-                      <a:pPr algn="ctr" fontAlgn="ctr"/>
+                      <a:pPr algn="ctr">
+                        <a:defRPr sz="700" b="0">
+                          <a:solidFill>
+                            <a:srgbClr val="445474"/>
+                          </a:solidFill>
+                          <a:latin typeface="맑은 고딕"/>
+                        </a:defRPr>
+                      </a:pPr>
                       <a:r>
-                        <a:rPr lang="en-US" altLang="ko-KR" sz="600" u="none" strike="noStrike" dirty="0">
-                          <a:effectLst/>
-                          <a:latin typeface="+mn-ea"/>
-                          <a:ea typeface="+mn-ea"/>
-                        </a:rPr>
-                        <a:t>0</a:t>
+                        <a:t>58.7</a:t>
                       </a:r>
-                      <a:endParaRPr lang="en-US" altLang="ko-KR" sz="600" b="0" i="0" u="none" strike="noStrike" dirty="0">
-                        <a:solidFill>
-                          <a:srgbClr val="000000"/>
-                        </a:solidFill>
-                        <a:effectLst/>
-                        <a:latin typeface="+mn-ea"/>
-                        <a:ea typeface="+mn-ea"/>
-                      </a:endParaRPr>
                     </a:p>
                   </a:txBody>
                   <a:tcPr marL="0" marR="0" marT="0" marB="0" anchor="ctr">
@@ -14734,23 +14559,17 @@
                     <a:bodyPr/>
                     <a:lstStyle/>
                     <a:p>
-                      <a:pPr algn="ctr" fontAlgn="ctr"/>
+                      <a:pPr algn="ctr">
+                        <a:defRPr sz="700" b="0">
+                          <a:solidFill>
+                            <a:srgbClr val="445474"/>
+                          </a:solidFill>
+                          <a:latin typeface="맑은 고딕"/>
+                        </a:defRPr>
+                      </a:pPr>
                       <a:r>
-                        <a:rPr lang="en-US" altLang="ko-KR" sz="600" u="none" strike="noStrike" dirty="0">
-                          <a:effectLst/>
-                          <a:latin typeface="+mn-ea"/>
-                          <a:ea typeface="+mn-ea"/>
-                        </a:rPr>
-                        <a:t>0</a:t>
+                        <a:t>50.4</a:t>
                       </a:r>
-                      <a:endParaRPr lang="en-US" altLang="ko-KR" sz="600" b="0" i="0" u="none" strike="noStrike" dirty="0">
-                        <a:solidFill>
-                          <a:srgbClr val="000000"/>
-                        </a:solidFill>
-                        <a:effectLst/>
-                        <a:latin typeface="+mn-ea"/>
-                        <a:ea typeface="+mn-ea"/>
-                      </a:endParaRPr>
                     </a:p>
                   </a:txBody>
                   <a:tcPr marL="0" marR="0" marT="0" marB="0" anchor="ctr">
@@ -14898,23 +14717,17 @@
                     <a:bodyPr/>
                     <a:lstStyle/>
                     <a:p>
-                      <a:pPr algn="ctr" fontAlgn="ctr"/>
+                      <a:pPr algn="ctr">
+                        <a:defRPr sz="700" b="0">
+                          <a:solidFill>
+                            <a:srgbClr val="445474"/>
+                          </a:solidFill>
+                          <a:latin typeface="맑은 고딕"/>
+                        </a:defRPr>
+                      </a:pPr>
                       <a:r>
-                        <a:rPr lang="en-US" altLang="ko-KR" sz="600" u="none" strike="noStrike" dirty="0">
-                          <a:effectLst/>
-                          <a:latin typeface="+mn-ea"/>
-                          <a:ea typeface="+mn-ea"/>
-                        </a:rPr>
-                        <a:t>0</a:t>
+                        <a:t>-26.4</a:t>
                       </a:r>
-                      <a:endParaRPr lang="en-US" altLang="ko-KR" sz="600" b="0" i="0" u="none" strike="noStrike" dirty="0">
-                        <a:solidFill>
-                          <a:srgbClr val="000000"/>
-                        </a:solidFill>
-                        <a:effectLst/>
-                        <a:latin typeface="+mn-ea"/>
-                        <a:ea typeface="+mn-ea"/>
-                      </a:endParaRPr>
                     </a:p>
                   </a:txBody>
                   <a:tcPr marL="0" marR="0" marT="0" marB="0" anchor="ctr">
@@ -15062,23 +14875,17 @@
                     <a:bodyPr/>
                     <a:lstStyle/>
                     <a:p>
-                      <a:pPr algn="ctr" fontAlgn="ctr"/>
+                      <a:pPr algn="ctr">
+                        <a:defRPr sz="700" b="0">
+                          <a:solidFill>
+                            <a:srgbClr val="445474"/>
+                          </a:solidFill>
+                          <a:latin typeface="맑은 고딕"/>
+                        </a:defRPr>
+                      </a:pPr>
                       <a:r>
-                        <a:rPr lang="en-US" altLang="ko-KR" sz="600" u="none" strike="noStrike" dirty="0">
-                          <a:effectLst/>
-                          <a:latin typeface="+mn-ea"/>
-                          <a:ea typeface="+mn-ea"/>
-                        </a:rPr>
-                        <a:t>0</a:t>
+                        <a:t>16.9</a:t>
                       </a:r>
-                      <a:endParaRPr lang="en-US" altLang="ko-KR" sz="600" b="0" i="0" u="none" strike="noStrike" dirty="0">
-                        <a:solidFill>
-                          <a:srgbClr val="000000"/>
-                        </a:solidFill>
-                        <a:effectLst/>
-                        <a:latin typeface="+mn-ea"/>
-                        <a:ea typeface="+mn-ea"/>
-                      </a:endParaRPr>
                     </a:p>
                   </a:txBody>
                   <a:tcPr marL="0" marR="0" marT="0" marB="0" anchor="ctr">
@@ -15226,23 +15033,17 @@
                     <a:bodyPr/>
                     <a:lstStyle/>
                     <a:p>
-                      <a:pPr algn="ctr" fontAlgn="ctr"/>
+                      <a:pPr algn="ctr">
+                        <a:defRPr sz="700" b="0">
+                          <a:solidFill>
+                            <a:srgbClr val="445474"/>
+                          </a:solidFill>
+                          <a:latin typeface="맑은 고딕"/>
+                        </a:defRPr>
+                      </a:pPr>
                       <a:r>
-                        <a:rPr lang="en-US" altLang="ko-KR" sz="600" u="none" strike="noStrike" dirty="0">
-                          <a:effectLst/>
-                          <a:latin typeface="+mn-ea"/>
-                          <a:ea typeface="+mn-ea"/>
-                        </a:rPr>
-                        <a:t>0</a:t>
+                        <a:t>107</a:t>
                       </a:r>
-                      <a:endParaRPr lang="en-US" altLang="ko-KR" sz="600" b="0" i="0" u="none" strike="noStrike" dirty="0">
-                        <a:solidFill>
-                          <a:srgbClr val="000000"/>
-                        </a:solidFill>
-                        <a:effectLst/>
-                        <a:latin typeface="+mn-ea"/>
-                        <a:ea typeface="+mn-ea"/>
-                      </a:endParaRPr>
                     </a:p>
                   </a:txBody>
                   <a:tcPr marL="0" marR="0" marT="0" marB="0" anchor="ctr">
@@ -15390,23 +15191,17 @@
                     <a:bodyPr/>
                     <a:lstStyle/>
                     <a:p>
-                      <a:pPr algn="ctr" fontAlgn="ctr"/>
+                      <a:pPr algn="ctr">
+                        <a:defRPr sz="700" b="0">
+                          <a:solidFill>
+                            <a:srgbClr val="445474"/>
+                          </a:solidFill>
+                          <a:latin typeface="맑은 고딕"/>
+                        </a:defRPr>
+                      </a:pPr>
                       <a:r>
-                        <a:rPr lang="en-US" altLang="ko-KR" sz="600" u="none" strike="noStrike" dirty="0">
-                          <a:effectLst/>
-                          <a:latin typeface="+mn-ea"/>
-                          <a:ea typeface="+mn-ea"/>
-                        </a:rPr>
-                        <a:t>0</a:t>
+                        <a:t>165.9</a:t>
                       </a:r>
-                      <a:endParaRPr lang="en-US" altLang="ko-KR" sz="600" b="0" i="0" u="none" strike="noStrike" dirty="0">
-                        <a:solidFill>
-                          <a:srgbClr val="000000"/>
-                        </a:solidFill>
-                        <a:effectLst/>
-                        <a:latin typeface="+mn-ea"/>
-                        <a:ea typeface="+mn-ea"/>
-                      </a:endParaRPr>
                     </a:p>
                   </a:txBody>
                   <a:tcPr marL="0" marR="0" marT="0" marB="0" anchor="ctr">
@@ -15554,23 +15349,17 @@
                     <a:bodyPr/>
                     <a:lstStyle/>
                     <a:p>
-                      <a:pPr algn="ctr" fontAlgn="ctr"/>
+                      <a:pPr algn="ctr">
+                        <a:defRPr sz="700" b="0">
+                          <a:solidFill>
+                            <a:srgbClr val="445474"/>
+                          </a:solidFill>
+                          <a:latin typeface="맑은 고딕"/>
+                        </a:defRPr>
+                      </a:pPr>
                       <a:r>
-                        <a:rPr lang="en-US" altLang="ko-KR" sz="600" u="none" strike="noStrike" dirty="0">
-                          <a:effectLst/>
-                          <a:latin typeface="+mn-ea"/>
-                          <a:ea typeface="+mn-ea"/>
-                        </a:rPr>
-                        <a:t>0</a:t>
+                        <a:t>171.7</a:t>
                       </a:r>
-                      <a:endParaRPr lang="en-US" altLang="ko-KR" sz="600" b="0" i="0" u="none" strike="noStrike" dirty="0">
-                        <a:solidFill>
-                          <a:srgbClr val="000000"/>
-                        </a:solidFill>
-                        <a:effectLst/>
-                        <a:latin typeface="+mn-ea"/>
-                        <a:ea typeface="+mn-ea"/>
-                      </a:endParaRPr>
                     </a:p>
                   </a:txBody>
                   <a:tcPr marL="0" marR="0" marT="0" marB="0" anchor="ctr">
@@ -15721,23 +15510,17 @@
                     <a:bodyPr/>
                     <a:lstStyle/>
                     <a:p>
-                      <a:pPr algn="ctr" fontAlgn="ctr"/>
+                      <a:pPr algn="ctr">
+                        <a:defRPr sz="700" b="0">
+                          <a:solidFill>
+                            <a:srgbClr val="445474"/>
+                          </a:solidFill>
+                          <a:latin typeface="맑은 고딕"/>
+                        </a:defRPr>
+                      </a:pPr>
                       <a:r>
-                        <a:rPr lang="en-US" altLang="ko-KR" sz="600" u="none" strike="noStrike" dirty="0">
-                          <a:effectLst/>
-                          <a:latin typeface="+mn-ea"/>
-                          <a:ea typeface="+mn-ea"/>
-                        </a:rPr>
-                        <a:t>0</a:t>
+                        <a:t>25.7</a:t>
                       </a:r>
-                      <a:endParaRPr lang="en-US" altLang="ko-KR" sz="600" b="0" i="0" u="none" strike="noStrike" dirty="0">
-                        <a:solidFill>
-                          <a:srgbClr val="000000"/>
-                        </a:solidFill>
-                        <a:effectLst/>
-                        <a:latin typeface="+mn-ea"/>
-                        <a:ea typeface="+mn-ea"/>
-                      </a:endParaRPr>
                     </a:p>
                   </a:txBody>
                   <a:tcPr marL="0" marR="0" marT="0" marB="0" anchor="ctr">
@@ -15885,23 +15668,17 @@
                     <a:bodyPr/>
                     <a:lstStyle/>
                     <a:p>
-                      <a:pPr algn="ctr" fontAlgn="ctr"/>
+                      <a:pPr algn="ctr">
+                        <a:defRPr sz="700" b="0">
+                          <a:solidFill>
+                            <a:srgbClr val="445474"/>
+                          </a:solidFill>
+                          <a:latin typeface="맑은 고딕"/>
+                        </a:defRPr>
+                      </a:pPr>
                       <a:r>
-                        <a:rPr lang="en-US" altLang="ko-KR" sz="600" u="none" strike="noStrike" dirty="0">
-                          <a:effectLst/>
-                          <a:latin typeface="+mn-ea"/>
-                          <a:ea typeface="+mn-ea"/>
-                        </a:rPr>
-                        <a:t>0</a:t>
+                        <a:t>35.5</a:t>
                       </a:r>
-                      <a:endParaRPr lang="en-US" altLang="ko-KR" sz="600" b="0" i="0" u="none" strike="noStrike" dirty="0">
-                        <a:solidFill>
-                          <a:srgbClr val="000000"/>
-                        </a:solidFill>
-                        <a:effectLst/>
-                        <a:latin typeface="+mn-ea"/>
-                        <a:ea typeface="+mn-ea"/>
-                      </a:endParaRPr>
                     </a:p>
                   </a:txBody>
                   <a:tcPr marL="0" marR="0" marT="0" marB="0" anchor="ctr">
@@ -16049,23 +15826,17 @@
                     <a:bodyPr/>
                     <a:lstStyle/>
                     <a:p>
-                      <a:pPr algn="ctr" fontAlgn="ctr"/>
+                      <a:pPr algn="ctr">
+                        <a:defRPr sz="700" b="0">
+                          <a:solidFill>
+                            <a:srgbClr val="445474"/>
+                          </a:solidFill>
+                          <a:latin typeface="맑은 고딕"/>
+                        </a:defRPr>
+                      </a:pPr>
                       <a:r>
-                        <a:rPr lang="en-US" altLang="ko-KR" sz="600" u="none" strike="noStrike">
-                          <a:effectLst/>
-                          <a:latin typeface="+mn-ea"/>
-                          <a:ea typeface="+mn-ea"/>
-                        </a:rPr>
-                        <a:t>0</a:t>
+                        <a:t>32.9</a:t>
                       </a:r>
-                      <a:endParaRPr lang="en-US" altLang="ko-KR" sz="600" b="0" i="0" u="none" strike="noStrike">
-                        <a:solidFill>
-                          <a:srgbClr val="000000"/>
-                        </a:solidFill>
-                        <a:effectLst/>
-                        <a:latin typeface="+mn-ea"/>
-                        <a:ea typeface="+mn-ea"/>
-                      </a:endParaRPr>
                     </a:p>
                   </a:txBody>
                   <a:tcPr marL="0" marR="0" marT="0" marB="0" anchor="ctr">
@@ -16213,23 +15984,17 @@
                     <a:bodyPr/>
                     <a:lstStyle/>
                     <a:p>
-                      <a:pPr algn="ctr" fontAlgn="ctr"/>
+                      <a:pPr algn="ctr">
+                        <a:defRPr sz="700" b="0">
+                          <a:solidFill>
+                            <a:srgbClr val="445474"/>
+                          </a:solidFill>
+                          <a:latin typeface="맑은 고딕"/>
+                        </a:defRPr>
+                      </a:pPr>
                       <a:r>
-                        <a:rPr lang="en-US" altLang="ko-KR" sz="600" u="none" strike="noStrike" dirty="0">
-                          <a:effectLst/>
-                          <a:latin typeface="+mn-ea"/>
-                          <a:ea typeface="+mn-ea"/>
-                        </a:rPr>
-                        <a:t>0</a:t>
+                        <a:t>198.5</a:t>
                       </a:r>
-                      <a:endParaRPr lang="en-US" altLang="ko-KR" sz="600" b="0" i="0" u="none" strike="noStrike" dirty="0">
-                        <a:solidFill>
-                          <a:srgbClr val="000000"/>
-                        </a:solidFill>
-                        <a:effectLst/>
-                        <a:latin typeface="+mn-ea"/>
-                        <a:ea typeface="+mn-ea"/>
-                      </a:endParaRPr>
                     </a:p>
                   </a:txBody>
                   <a:tcPr marL="0" marR="0" marT="0" marB="0" anchor="ctr">
@@ -16377,23 +16142,17 @@
                     <a:bodyPr/>
                     <a:lstStyle/>
                     <a:p>
-                      <a:pPr algn="ctr" fontAlgn="ctr"/>
+                      <a:pPr algn="ctr">
+                        <a:defRPr sz="700" b="0">
+                          <a:solidFill>
+                            <a:srgbClr val="445474"/>
+                          </a:solidFill>
+                          <a:latin typeface="맑은 고딕"/>
+                        </a:defRPr>
+                      </a:pPr>
                       <a:r>
-                        <a:rPr lang="en-US" altLang="ko-KR" sz="600" u="none" strike="noStrike" dirty="0">
-                          <a:effectLst/>
-                          <a:latin typeface="+mn-ea"/>
-                          <a:ea typeface="+mn-ea"/>
-                        </a:rPr>
-                        <a:t>0</a:t>
+                        <a:t>24.8</a:t>
                       </a:r>
-                      <a:endParaRPr lang="en-US" altLang="ko-KR" sz="600" b="0" i="0" u="none" strike="noStrike" dirty="0">
-                        <a:solidFill>
-                          <a:srgbClr val="000000"/>
-                        </a:solidFill>
-                        <a:effectLst/>
-                        <a:latin typeface="+mn-ea"/>
-                        <a:ea typeface="+mn-ea"/>
-                      </a:endParaRPr>
                     </a:p>
                   </a:txBody>
                   <a:tcPr marL="0" marR="0" marT="0" marB="0" anchor="ctr">
@@ -16541,23 +16300,17 @@
                     <a:bodyPr/>
                     <a:lstStyle/>
                     <a:p>
-                      <a:pPr algn="ctr" fontAlgn="ctr"/>
+                      <a:pPr algn="ctr">
+                        <a:defRPr sz="700" b="0">
+                          <a:solidFill>
+                            <a:srgbClr val="445474"/>
+                          </a:solidFill>
+                          <a:latin typeface="맑은 고딕"/>
+                        </a:defRPr>
+                      </a:pPr>
                       <a:r>
-                        <a:rPr lang="en-US" altLang="ko-KR" sz="600" u="none" strike="noStrike" dirty="0">
-                          <a:effectLst/>
-                          <a:latin typeface="+mn-ea"/>
-                          <a:ea typeface="+mn-ea"/>
-                        </a:rPr>
-                        <a:t>0</a:t>
+                        <a:t>10.6</a:t>
                       </a:r>
-                      <a:endParaRPr lang="en-US" altLang="ko-KR" sz="600" b="0" i="0" u="none" strike="noStrike" dirty="0">
-                        <a:solidFill>
-                          <a:srgbClr val="000000"/>
-                        </a:solidFill>
-                        <a:effectLst/>
-                        <a:latin typeface="+mn-ea"/>
-                        <a:ea typeface="+mn-ea"/>
-                      </a:endParaRPr>
                     </a:p>
                   </a:txBody>
                   <a:tcPr marL="0" marR="0" marT="0" marB="0" anchor="ctr">
@@ -16705,23 +16458,17 @@
                     <a:bodyPr/>
                     <a:lstStyle/>
                     <a:p>
-                      <a:pPr algn="ctr" fontAlgn="ctr"/>
+                      <a:pPr algn="ctr">
+                        <a:defRPr sz="700" b="0">
+                          <a:solidFill>
+                            <a:srgbClr val="445474"/>
+                          </a:solidFill>
+                          <a:latin typeface="맑은 고딕"/>
+                        </a:defRPr>
+                      </a:pPr>
                       <a:r>
-                        <a:rPr lang="en-US" altLang="ko-KR" sz="600" u="none" strike="noStrike">
-                          <a:effectLst/>
-                          <a:latin typeface="+mn-ea"/>
-                          <a:ea typeface="+mn-ea"/>
-                        </a:rPr>
-                        <a:t>0</a:t>
+                        <a:t>49.2</a:t>
                       </a:r>
-                      <a:endParaRPr lang="en-US" altLang="ko-KR" sz="600" b="0" i="0" u="none" strike="noStrike">
-                        <a:solidFill>
-                          <a:srgbClr val="000000"/>
-                        </a:solidFill>
-                        <a:effectLst/>
-                        <a:latin typeface="+mn-ea"/>
-                        <a:ea typeface="+mn-ea"/>
-                      </a:endParaRPr>
                     </a:p>
                   </a:txBody>
                   <a:tcPr marL="0" marR="0" marT="0" marB="0" anchor="ctr">
@@ -16869,23 +16616,17 @@
                     <a:bodyPr/>
                     <a:lstStyle/>
                     <a:p>
-                      <a:pPr algn="ctr" fontAlgn="ctr"/>
+                      <a:pPr algn="ctr">
+                        <a:defRPr sz="700" b="0">
+                          <a:solidFill>
+                            <a:srgbClr val="445474"/>
+                          </a:solidFill>
+                          <a:latin typeface="맑은 고딕"/>
+                        </a:defRPr>
+                      </a:pPr>
                       <a:r>
-                        <a:rPr lang="en-US" altLang="ko-KR" sz="600" u="none" strike="noStrike" dirty="0">
-                          <a:effectLst/>
-                          <a:latin typeface="+mn-ea"/>
-                          <a:ea typeface="+mn-ea"/>
-                        </a:rPr>
-                        <a:t>0</a:t>
+                        <a:t>24.4</a:t>
                       </a:r>
-                      <a:endParaRPr lang="en-US" altLang="ko-KR" sz="600" b="0" i="0" u="none" strike="noStrike" dirty="0">
-                        <a:solidFill>
-                          <a:srgbClr val="000000"/>
-                        </a:solidFill>
-                        <a:effectLst/>
-                        <a:latin typeface="+mn-ea"/>
-                        <a:ea typeface="+mn-ea"/>
-                      </a:endParaRPr>
                     </a:p>
                   </a:txBody>
                   <a:tcPr marL="0" marR="0" marT="0" marB="0" anchor="ctr">
@@ -17033,23 +16774,17 @@
                     <a:bodyPr/>
                     <a:lstStyle/>
                     <a:p>
-                      <a:pPr algn="ctr" fontAlgn="ctr"/>
+                      <a:pPr algn="ctr">
+                        <a:defRPr sz="700" b="0">
+                          <a:solidFill>
+                            <a:srgbClr val="445474"/>
+                          </a:solidFill>
+                          <a:latin typeface="맑은 고딕"/>
+                        </a:defRPr>
+                      </a:pPr>
                       <a:r>
-                        <a:rPr lang="en-US" altLang="ko-KR" sz="600" u="none" strike="noStrike">
-                          <a:effectLst/>
-                          <a:latin typeface="+mn-ea"/>
-                          <a:ea typeface="+mn-ea"/>
-                        </a:rPr>
-                        <a:t>0</a:t>
+                        <a:t>47.2</a:t>
                       </a:r>
-                      <a:endParaRPr lang="en-US" altLang="ko-KR" sz="600" b="0" i="0" u="none" strike="noStrike">
-                        <a:solidFill>
-                          <a:srgbClr val="000000"/>
-                        </a:solidFill>
-                        <a:effectLst/>
-                        <a:latin typeface="+mn-ea"/>
-                        <a:ea typeface="+mn-ea"/>
-                      </a:endParaRPr>
                     </a:p>
                   </a:txBody>
                   <a:tcPr marL="0" marR="0" marT="0" marB="0" anchor="ctr">
@@ -17197,23 +16932,17 @@
                     <a:bodyPr/>
                     <a:lstStyle/>
                     <a:p>
-                      <a:pPr algn="ctr" fontAlgn="ctr"/>
+                      <a:pPr algn="ctr">
+                        <a:defRPr sz="700" b="0">
+                          <a:solidFill>
+                            <a:srgbClr val="445474"/>
+                          </a:solidFill>
+                          <a:latin typeface="맑은 고딕"/>
+                        </a:defRPr>
+                      </a:pPr>
                       <a:r>
-                        <a:rPr lang="en-US" altLang="ko-KR" sz="600" u="none" strike="noStrike">
-                          <a:effectLst/>
-                          <a:latin typeface="+mn-ea"/>
-                          <a:ea typeface="+mn-ea"/>
-                        </a:rPr>
-                        <a:t>0</a:t>
+                        <a:t>23.1</a:t>
                       </a:r>
-                      <a:endParaRPr lang="en-US" altLang="ko-KR" sz="600" b="0" i="0" u="none" strike="noStrike">
-                        <a:solidFill>
-                          <a:srgbClr val="000000"/>
-                        </a:solidFill>
-                        <a:effectLst/>
-                        <a:latin typeface="+mn-ea"/>
-                        <a:ea typeface="+mn-ea"/>
-                      </a:endParaRPr>
                     </a:p>
                   </a:txBody>
                   <a:tcPr marL="0" marR="0" marT="0" marB="0" anchor="ctr">
@@ -17361,23 +17090,17 @@
                     <a:bodyPr/>
                     <a:lstStyle/>
                     <a:p>
-                      <a:pPr algn="ctr" fontAlgn="ctr"/>
+                      <a:pPr algn="ctr">
+                        <a:defRPr sz="700" b="0">
+                          <a:solidFill>
+                            <a:srgbClr val="445474"/>
+                          </a:solidFill>
+                          <a:latin typeface="맑은 고딕"/>
+                        </a:defRPr>
+                      </a:pPr>
                       <a:r>
-                        <a:rPr lang="en-US" altLang="ko-KR" sz="600" u="none" strike="noStrike" dirty="0">
-                          <a:effectLst/>
-                          <a:latin typeface="+mn-ea"/>
-                          <a:ea typeface="+mn-ea"/>
-                        </a:rPr>
-                        <a:t>0</a:t>
+                        <a:t>66.6</a:t>
                       </a:r>
-                      <a:endParaRPr lang="en-US" altLang="ko-KR" sz="600" b="0" i="0" u="none" strike="noStrike" dirty="0">
-                        <a:solidFill>
-                          <a:srgbClr val="000000"/>
-                        </a:solidFill>
-                        <a:effectLst/>
-                        <a:latin typeface="+mn-ea"/>
-                        <a:ea typeface="+mn-ea"/>
-                      </a:endParaRPr>
                     </a:p>
                   </a:txBody>
                   <a:tcPr marL="0" marR="0" marT="0" marB="0" anchor="ctr">
@@ -17525,23 +17248,17 @@
                     <a:bodyPr/>
                     <a:lstStyle/>
                     <a:p>
-                      <a:pPr algn="ctr" fontAlgn="ctr"/>
+                      <a:pPr algn="ctr">
+                        <a:defRPr sz="700" b="0">
+                          <a:solidFill>
+                            <a:srgbClr val="445474"/>
+                          </a:solidFill>
+                          <a:latin typeface="맑은 고딕"/>
+                        </a:defRPr>
+                      </a:pPr>
                       <a:r>
-                        <a:rPr lang="en-US" altLang="ko-KR" sz="600" u="none" strike="noStrike" dirty="0">
-                          <a:effectLst/>
-                          <a:latin typeface="+mn-ea"/>
-                          <a:ea typeface="+mn-ea"/>
-                        </a:rPr>
-                        <a:t>0</a:t>
+                        <a:t>-21.1</a:t>
                       </a:r>
-                      <a:endParaRPr lang="en-US" altLang="ko-KR" sz="600" b="0" i="0" u="none" strike="noStrike" dirty="0">
-                        <a:solidFill>
-                          <a:srgbClr val="000000"/>
-                        </a:solidFill>
-                        <a:effectLst/>
-                        <a:latin typeface="+mn-ea"/>
-                        <a:ea typeface="+mn-ea"/>
-                      </a:endParaRPr>
                     </a:p>
                   </a:txBody>
                   <a:tcPr marL="0" marR="0" marT="0" marB="0" anchor="ctr">
@@ -17689,23 +17406,17 @@
                     <a:bodyPr/>
                     <a:lstStyle/>
                     <a:p>
-                      <a:pPr algn="ctr" fontAlgn="ctr"/>
+                      <a:pPr algn="ctr">
+                        <a:defRPr sz="700" b="0">
+                          <a:solidFill>
+                            <a:srgbClr val="445474"/>
+                          </a:solidFill>
+                          <a:latin typeface="맑은 고딕"/>
+                        </a:defRPr>
+                      </a:pPr>
                       <a:r>
-                        <a:rPr lang="en-US" altLang="ko-KR" sz="600" u="none" strike="noStrike" dirty="0">
-                          <a:effectLst/>
-                          <a:latin typeface="+mn-ea"/>
-                          <a:ea typeface="+mn-ea"/>
-                        </a:rPr>
-                        <a:t>0</a:t>
+                        <a:t>90</a:t>
                       </a:r>
-                      <a:endParaRPr lang="en-US" altLang="ko-KR" sz="600" b="0" i="0" u="none" strike="noStrike" dirty="0">
-                        <a:solidFill>
-                          <a:srgbClr val="000000"/>
-                        </a:solidFill>
-                        <a:effectLst/>
-                        <a:latin typeface="+mn-ea"/>
-                        <a:ea typeface="+mn-ea"/>
-                      </a:endParaRPr>
                     </a:p>
                   </a:txBody>
                   <a:tcPr marL="0" marR="0" marT="0" marB="0" anchor="ctr">
@@ -17853,23 +17564,17 @@
                     <a:bodyPr/>
                     <a:lstStyle/>
                     <a:p>
-                      <a:pPr algn="ctr" fontAlgn="ctr"/>
+                      <a:pPr algn="ctr">
+                        <a:defRPr sz="700" b="0">
+                          <a:solidFill>
+                            <a:srgbClr val="445474"/>
+                          </a:solidFill>
+                          <a:latin typeface="맑은 고딕"/>
+                        </a:defRPr>
+                      </a:pPr>
                       <a:r>
-                        <a:rPr lang="en-US" altLang="ko-KR" sz="600" u="none" strike="noStrike">
-                          <a:effectLst/>
-                          <a:latin typeface="+mn-ea"/>
-                          <a:ea typeface="+mn-ea"/>
-                        </a:rPr>
-                        <a:t>0</a:t>
+                        <a:t>7</a:t>
                       </a:r>
-                      <a:endParaRPr lang="en-US" altLang="ko-KR" sz="600" b="0" i="0" u="none" strike="noStrike">
-                        <a:solidFill>
-                          <a:srgbClr val="000000"/>
-                        </a:solidFill>
-                        <a:effectLst/>
-                        <a:latin typeface="+mn-ea"/>
-                        <a:ea typeface="+mn-ea"/>
-                      </a:endParaRPr>
                     </a:p>
                   </a:txBody>
                   <a:tcPr marL="0" marR="0" marT="0" marB="0" anchor="ctr">
@@ -18025,23 +17730,17 @@
                     <a:bodyPr/>
                     <a:lstStyle/>
                     <a:p>
-                      <a:pPr algn="ctr" fontAlgn="ctr"/>
+                      <a:pPr algn="ctr">
+                        <a:defRPr sz="700" b="0">
+                          <a:solidFill>
+                            <a:srgbClr val="445474"/>
+                          </a:solidFill>
+                          <a:latin typeface="맑은 고딕"/>
+                        </a:defRPr>
+                      </a:pPr>
                       <a:r>
-                        <a:rPr lang="en-US" altLang="ko-KR" sz="600" u="none" strike="noStrike" dirty="0">
-                          <a:effectLst/>
-                          <a:latin typeface="+mn-ea"/>
-                          <a:ea typeface="+mn-ea"/>
-                        </a:rPr>
-                        <a:t>0</a:t>
+                        <a:t>-32</a:t>
                       </a:r>
-                      <a:endParaRPr lang="en-US" altLang="ko-KR" sz="600" b="0" i="0" u="none" strike="noStrike" dirty="0">
-                        <a:solidFill>
-                          <a:srgbClr val="000000"/>
-                        </a:solidFill>
-                        <a:effectLst/>
-                        <a:latin typeface="+mn-ea"/>
-                        <a:ea typeface="+mn-ea"/>
-                      </a:endParaRPr>
                     </a:p>
                   </a:txBody>
                   <a:tcPr marL="0" marR="0" marT="0" marB="0" anchor="ctr">
@@ -18189,23 +17888,17 @@
                     <a:bodyPr/>
                     <a:lstStyle/>
                     <a:p>
-                      <a:pPr algn="ctr" fontAlgn="ctr"/>
+                      <a:pPr algn="ctr">
+                        <a:defRPr sz="700" b="0">
+                          <a:solidFill>
+                            <a:srgbClr val="445474"/>
+                          </a:solidFill>
+                          <a:latin typeface="맑은 고딕"/>
+                        </a:defRPr>
+                      </a:pPr>
                       <a:r>
-                        <a:rPr lang="en-US" altLang="ko-KR" sz="600" u="none" strike="noStrike" dirty="0">
-                          <a:effectLst/>
-                          <a:latin typeface="+mn-ea"/>
-                          <a:ea typeface="+mn-ea"/>
-                        </a:rPr>
-                        <a:t>0</a:t>
+                        <a:t>97.6</a:t>
                       </a:r>
-                      <a:endParaRPr lang="en-US" altLang="ko-KR" sz="600" b="0" i="0" u="none" strike="noStrike" dirty="0">
-                        <a:solidFill>
-                          <a:srgbClr val="000000"/>
-                        </a:solidFill>
-                        <a:effectLst/>
-                        <a:latin typeface="+mn-ea"/>
-                        <a:ea typeface="+mn-ea"/>
-                      </a:endParaRPr>
                     </a:p>
                   </a:txBody>
                   <a:tcPr marL="0" marR="0" marT="0" marB="0" anchor="ctr">
@@ -18353,23 +18046,17 @@
                     <a:bodyPr/>
                     <a:lstStyle/>
                     <a:p>
-                      <a:pPr algn="ctr" fontAlgn="ctr"/>
+                      <a:pPr algn="ctr">
+                        <a:defRPr sz="700" b="0">
+                          <a:solidFill>
+                            <a:srgbClr val="445474"/>
+                          </a:solidFill>
+                          <a:latin typeface="맑은 고딕"/>
+                        </a:defRPr>
+                      </a:pPr>
                       <a:r>
-                        <a:rPr lang="en-US" altLang="ko-KR" sz="600" u="none" strike="noStrike" dirty="0">
-                          <a:effectLst/>
-                          <a:latin typeface="+mn-ea"/>
-                          <a:ea typeface="+mn-ea"/>
-                        </a:rPr>
-                        <a:t>0</a:t>
+                        <a:t>70.1</a:t>
                       </a:r>
-                      <a:endParaRPr lang="en-US" altLang="ko-KR" sz="600" b="0" i="0" u="none" strike="noStrike" dirty="0">
-                        <a:solidFill>
-                          <a:srgbClr val="000000"/>
-                        </a:solidFill>
-                        <a:effectLst/>
-                        <a:latin typeface="+mn-ea"/>
-                        <a:ea typeface="+mn-ea"/>
-                      </a:endParaRPr>
                     </a:p>
                   </a:txBody>
                   <a:tcPr marL="0" marR="0" marT="0" marB="0" anchor="ctr">
@@ -18487,11 +18174,12 @@
           <a:bodyPr rtlCol="0" anchor="ctr"/>
           <a:lstStyle/>
           <a:p>
-            <a:r>
-              <a:rPr lang="en-US" altLang="ko-KR" sz="1400" b="1" dirty="0">
-                <a:latin typeface="+mj-ea"/>
-                <a:ea typeface="+mj-ea"/>
-              </a:rPr>
+            <a:pPr algn="ctr">
+              <a:defRPr sz="1300" b="1">
+                <a:latin typeface="맑은 고딕"/>
+              </a:defRPr>
+            </a:pPr>
+            <a:r>
               <a:t>C/C &amp; Main problem</a:t>
             </a:r>
           </a:p>
@@ -18546,11 +18234,12 @@
           <a:bodyPr rtlCol="0" anchor="ctr"/>
           <a:lstStyle/>
           <a:p>
-            <a:r>
-              <a:rPr lang="en-US" altLang="ko-KR" sz="1200" b="1" dirty="0">
-                <a:latin typeface="+mj-ea"/>
-                <a:ea typeface="+mj-ea"/>
-              </a:rPr>
+            <a:pPr algn="ctr">
+              <a:defRPr sz="1300" b="1">
+                <a:latin typeface="맑은 고딕"/>
+              </a:defRPr>
+            </a:pPr>
+            <a:r>
               <a:t>MPH:</a:t>
             </a:r>
           </a:p>
@@ -18644,16 +18333,13 @@
           </a:bodyPr>
           <a:lstStyle/>
           <a:p>
-            <a:pPr eaLnBrk="1" hangingPunct="1"/>
-            <a:r>
-              <a:rPr lang="en-US" altLang="ko-KR" sz="1400" b="1" dirty="0">
-                <a:solidFill>
-                  <a:srgbClr val="000000"/>
-                </a:solidFill>
-                <a:latin typeface="+mn-ea"/>
-                <a:cs typeface="Times New Roman Bold" panose="02020803070505020304" pitchFamily="18" charset="0"/>
-              </a:rPr>
-              <a:t>HGI:+</a:t>
+            <a:pPr algn="ctr">
+              <a:defRPr sz="1300" b="1">
+                <a:latin typeface="맑은 고딕"/>
+              </a:defRPr>
+            </a:pPr>
+            <a:r>
+              <a:t>HGI:20</a:t>
             </a:r>
           </a:p>
         </p:txBody>
@@ -18737,16 +18423,13 @@
           </a:bodyPr>
           <a:lstStyle/>
           <a:p>
-            <a:pPr eaLnBrk="1" hangingPunct="1"/>
-            <a:r>
-              <a:rPr lang="en-US" altLang="ko-KR" sz="1400" b="1" dirty="0">
-                <a:solidFill>
-                  <a:srgbClr val="000000"/>
-                </a:solidFill>
-                <a:latin typeface="+mn-ea"/>
-                <a:cs typeface="Times New Roman Bold" panose="02020803070505020304" pitchFamily="18" charset="0"/>
-              </a:rPr>
-              <a:t>VGI:+</a:t>
+            <a:pPr algn="ctr">
+              <a:defRPr sz="1300" b="1">
+                <a:latin typeface="맑은 고딕"/>
+              </a:defRPr>
+            </a:pPr>
+            <a:r>
+              <a:t>VGI:70.1</a:t>
             </a:r>
           </a:p>
         </p:txBody>
@@ -19072,16 +18755,13 @@
           </a:bodyPr>
           <a:lstStyle/>
           <a:p>
-            <a:pPr algn="ctr" eaLnBrk="1" hangingPunct="1"/>
-            <a:r>
-              <a:rPr lang="en-US" altLang="ko-KR" sz="1300" b="1" dirty="0">
-                <a:solidFill>
-                  <a:srgbClr val="000000"/>
-                </a:solidFill>
-                <a:latin typeface="+mn-ea"/>
-                <a:cs typeface="Times New Roman Bold" panose="02020803070505020304" pitchFamily="18" charset="0"/>
-              </a:rPr>
-              <a:t>IAPDI:</a:t>
+            <a:pPr algn="ctr">
+              <a:defRPr sz="1300" b="1">
+                <a:latin typeface="맑은 고딕"/>
+              </a:defRPr>
+            </a:pPr>
+            <a:r>
+              <a:t>IAPDI:81</a:t>
             </a:r>
           </a:p>
         </p:txBody>
@@ -19295,16 +18975,13 @@
           </a:bodyPr>
           <a:lstStyle/>
           <a:p>
-            <a:pPr eaLnBrk="1" hangingPunct="1"/>
-            <a:r>
-              <a:rPr lang="en-US" altLang="ko-KR" sz="1300" b="1" dirty="0">
-                <a:solidFill>
-                  <a:srgbClr val="000000"/>
-                </a:solidFill>
-                <a:latin typeface="+mn-ea"/>
-                <a:cs typeface="Times New Roman Bold" panose="02020803070505020304" pitchFamily="18" charset="0"/>
-              </a:rPr>
-              <a:t>2APDL:</a:t>
+            <a:pPr algn="ctr">
+              <a:defRPr sz="1300" b="1">
+                <a:latin typeface="맑은 고딕"/>
+              </a:defRPr>
+            </a:pPr>
+            <a:r>
+              <a:t>2APDL:13.3</a:t>
             </a:r>
           </a:p>
         </p:txBody>
@@ -19337,16 +19014,13 @@
           </a:bodyPr>
           <a:lstStyle/>
           <a:p>
-            <a:pPr eaLnBrk="1" hangingPunct="1"/>
-            <a:r>
-              <a:rPr lang="en-US" altLang="ko-KR" sz="1300" b="1" dirty="0">
-                <a:solidFill>
-                  <a:srgbClr val="000000"/>
-                </a:solidFill>
-                <a:latin typeface="+mn-ea"/>
-                <a:cs typeface="Times New Roman Bold" panose="02020803070505020304" pitchFamily="18" charset="0"/>
-              </a:rPr>
-              <a:t>IODI:</a:t>
+            <a:pPr algn="ctr">
+              <a:defRPr sz="1300" b="1">
+                <a:latin typeface="맑은 고딕"/>
+              </a:defRPr>
+            </a:pPr>
+            <a:r>
+              <a:t>IODI:45.9</a:t>
             </a:r>
           </a:p>
         </p:txBody>
@@ -19422,16 +19096,13 @@
           </a:bodyPr>
           <a:lstStyle/>
           <a:p>
-            <a:pPr eaLnBrk="1" hangingPunct="1"/>
-            <a:r>
-              <a:rPr lang="en-US" altLang="ko-KR" sz="1300" b="1" dirty="0">
-                <a:solidFill>
-                  <a:srgbClr val="000000"/>
-                </a:solidFill>
-                <a:latin typeface="+mn-ea"/>
-                <a:cs typeface="Times New Roman Bold" panose="02020803070505020304" pitchFamily="18" charset="0"/>
-              </a:rPr>
-              <a:t>VDL:</a:t>
+            <a:pPr algn="ctr">
+              <a:defRPr sz="1300" b="1">
+                <a:latin typeface="맑은 고딕"/>
+              </a:defRPr>
+            </a:pPr>
+            <a:r>
+              <a:t>VDL:11.7</a:t>
             </a:r>
           </a:p>
         </p:txBody>
@@ -19507,34 +19178,14 @@
           </a:bodyPr>
           <a:lstStyle/>
           <a:p>
-            <a:pPr eaLnBrk="1" hangingPunct="1"/>
-            <a:r>
-              <a:rPr lang="en-US" altLang="ko-KR" sz="1400" b="1" dirty="0">
-                <a:solidFill>
-                  <a:srgbClr val="000000"/>
-                </a:solidFill>
-                <a:latin typeface="+mn-ea"/>
-                <a:cs typeface="Times New Roman Bold" panose="02020803070505020304" pitchFamily="18" charset="0"/>
-              </a:rPr>
-              <a:t>CEPH </a:t>
-            </a:r>
-            <a:r>
-              <a:rPr lang="ko-KR" altLang="en-US" sz="1400" b="1" dirty="0">
-                <a:solidFill>
-                  <a:srgbClr val="000000"/>
-                </a:solidFill>
-                <a:latin typeface="+mn-ea"/>
-                <a:cs typeface="Times New Roman Bold" panose="02020803070505020304" pitchFamily="18" charset="0"/>
-              </a:rPr>
-              <a:t>데이터</a:t>
-            </a:r>
-            <a:endParaRPr lang="en-US" altLang="ko-KR" sz="1400" b="1" dirty="0">
-              <a:solidFill>
-                <a:srgbClr val="000000"/>
-              </a:solidFill>
-              <a:latin typeface="+mn-ea"/>
-              <a:cs typeface="Times New Roman Bold" panose="02020803070505020304" pitchFamily="18" charset="0"/>
-            </a:endParaRPr>
+            <a:pPr algn="ctr">
+              <a:defRPr sz="1300" b="1">
+                <a:latin typeface="맑은 고딕"/>
+              </a:defRPr>
+            </a:pPr>
+            <a:r>
+              <a:t>CEPH RESULT</a:t>
+            </a:r>
           </a:p>
         </p:txBody>
       </p:sp>
@@ -19566,16 +19217,13 @@
           </a:bodyPr>
           <a:lstStyle/>
           <a:p>
-            <a:pPr eaLnBrk="1" hangingPunct="1"/>
-            <a:r>
-              <a:rPr lang="en-US" altLang="ko-KR" sz="1400" b="1" dirty="0">
-                <a:solidFill>
-                  <a:srgbClr val="000000"/>
-                </a:solidFill>
-                <a:latin typeface="+mn-ea"/>
-                <a:cs typeface="Times New Roman Bold" panose="02020803070505020304" pitchFamily="18" charset="0"/>
-              </a:rPr>
-              <a:t>CFD:</a:t>
+            <a:pPr algn="ctr">
+              <a:defRPr sz="1300" b="1">
+                <a:latin typeface="맑은 고딕"/>
+              </a:defRPr>
+            </a:pPr>
+            <a:r>
+              <a:t>CFD:40.8</a:t>
             </a:r>
           </a:p>
         </p:txBody>
@@ -19608,15 +19256,12 @@
           </a:bodyPr>
           <a:lstStyle/>
           <a:p>
-            <a:pPr eaLnBrk="1" hangingPunct="1"/>
-            <a:r>
-              <a:rPr lang="en-US" altLang="ko-KR" sz="1600" b="1" dirty="0">
-                <a:solidFill>
-                  <a:srgbClr val="000000"/>
-                </a:solidFill>
-                <a:latin typeface="+mn-ea"/>
-                <a:cs typeface="Times New Roman Bold" panose="02020803070505020304" pitchFamily="18" charset="0"/>
-              </a:rPr>
+            <a:pPr algn="ctr">
+              <a:defRPr sz="1300" b="1">
+                <a:latin typeface="맑은 고딕"/>
+              </a:defRPr>
+            </a:pPr>
+            <a:r>
               <a:t>Extraction:</a:t>
             </a:r>
           </a:p>
@@ -19669,6 +19314,30 @@
           </a:p>
         </p:txBody>
       </p:sp>
+      <p:pic>
+        <p:nvPicPr>
+          <p:cNvPr id="3170" name="Picture 3169" descr="oral_default.jpg"/>
+          <p:cNvPicPr>
+            <a:picLocks noChangeAspect="1"/>
+          </p:cNvPicPr>
+          <p:nvPr/>
+        </p:nvPicPr>
+        <p:blipFill>
+          <a:blip r:embed="rId2"/>
+          <a:stretch>
+            <a:fillRect/>
+          </a:stretch>
+        </p:blipFill>
+        <p:spPr>
+          <a:xfrm>
+            <a:off x="2468880" y="502920"/>
+            <a:ext cx="1463040" cy="1005840"/>
+          </a:xfrm>
+          <a:prstGeom prst="rect">
+            <a:avLst/>
+          </a:prstGeom>
+        </p:spPr>
+      </p:pic>
     </p:spTree>
     <p:extLst>
       <p:ext uri="{BB962C8B-B14F-4D97-AF65-F5344CB8AC3E}">
@@ -29222,8 +28891,8 @@
         </p:blipFill>
         <p:spPr>
           <a:xfrm>
-            <a:off x="1588201" y="0"/>
-            <a:ext cx="5967596" cy="6858000"/>
+            <a:off x="305335" y="0"/>
+            <a:ext cx="8533328" cy="6858000"/>
           </a:xfrm>
           <a:prstGeom prst="rect">
             <a:avLst/>
@@ -29310,14 +28979,14 @@
       </p:pic>
       <p:pic>
         <p:nvPicPr>
-          <p:cNvPr id="4" name="Picture 3" descr="photo_3.jpg"/>
+          <p:cNvPr id="4" name="Picture 3" descr="default_image.jpg"/>
           <p:cNvPicPr>
             <a:picLocks noChangeAspect="1"/>
           </p:cNvPicPr>
           <p:nvPr/>
         </p:nvPicPr>
         <p:blipFill>
-          <a:blip r:embed="rId3"/>
+          <a:blip r:embed="rId2"/>
           <a:stretch>
             <a:fillRect/>
           </a:stretch>
@@ -29702,8 +29371,8 @@
         </p:blipFill>
         <p:spPr>
           <a:xfrm>
-            <a:off x="1585837" y="0"/>
-            <a:ext cx="5972324" cy="6858000"/>
+            <a:off x="311348" y="0"/>
+            <a:ext cx="8521302" cy="6858000"/>
           </a:xfrm>
           <a:prstGeom prst="rect">
             <a:avLst/>
@@ -29970,22 +29639,22 @@
       </p:pic>
       <p:pic>
         <p:nvPicPr>
-          <p:cNvPr id="4" name="Picture 3" descr="posturePhoto_7.jpg"/>
+          <p:cNvPr id="4" name="Picture 3" descr="posture_default.jpg"/>
           <p:cNvPicPr>
             <a:picLocks noChangeAspect="1"/>
           </p:cNvPicPr>
           <p:nvPr/>
         </p:nvPicPr>
         <p:blipFill>
-          <a:blip r:embed="rId3"/>
+          <a:blip r:embed="rId2"/>
           <a:stretch>
             <a:fillRect/>
           </a:stretch>
         </p:blipFill>
         <p:spPr>
           <a:xfrm>
-            <a:off x="4572000" y="2602262"/>
-            <a:ext cx="2057400" cy="1653475"/>
+            <a:off x="4572000" y="2057400"/>
+            <a:ext cx="2057400" cy="2743200"/>
           </a:xfrm>
           <a:prstGeom prst="rect">
             <a:avLst/>

--- a/output_ppt.pptx
+++ b/output_ppt.pptx
@@ -7038,7 +7038,7 @@
               </a:defRPr>
             </a:pPr>
             <a:r>
-              <a:t>Male 순응교합 20 2005-04-04</a:t>
+              <a:t>Male 순응교합 20 2005-04-05</a:t>
             </a:r>
           </a:p>
           <a:p>
@@ -7051,7 +7051,7 @@
               </a:defRPr>
             </a:pPr>
             <a:r>
-              <a:t> S1.B3.D3.C1-nbt(dbt)-RM(Rt)-Fx:Ex-Fx/1-Type IV</a:t>
+              <a:t> S1.B1.D3.C1-nbt(dbt)-RM(Rt)-Fx:Ex-Fx/1-Type IV</a:t>
             </a:r>
           </a:p>
         </p:txBody>
@@ -12040,7 +12040,7 @@
                         </a:defRPr>
                       </a:pPr>
                       <a:r>
-                        <a:t>-30.1</a:t>
+                        <a:t>38.5</a:t>
                       </a:r>
                     </a:p>
                   </a:txBody>
@@ -12198,7 +12198,7 @@
                         </a:defRPr>
                       </a:pPr>
                       <a:r>
-                        <a:t>11.9</a:t>
+                        <a:t>50.3</a:t>
                       </a:r>
                     </a:p>
                   </a:txBody>
@@ -12356,7 +12356,7 @@
                         </a:defRPr>
                       </a:pPr>
                       <a:r>
-                        <a:t>42</a:t>
+                        <a:t>11.8</a:t>
                       </a:r>
                     </a:p>
                   </a:txBody>
@@ -12514,7 +12514,7 @@
                         </a:defRPr>
                       </a:pPr>
                       <a:r>
-                        <a:t>67.4</a:t>
+                        <a:t>133.4</a:t>
                       </a:r>
                     </a:p>
                   </a:txBody>
@@ -12672,7 +12672,7 @@
                         </a:defRPr>
                       </a:pPr>
                       <a:r>
-                        <a:t>39.9</a:t>
+                        <a:t>84.7</a:t>
                       </a:r>
                     </a:p>
                   </a:txBody>
@@ -12830,7 +12830,7 @@
                         </a:defRPr>
                       </a:pPr>
                       <a:r>
-                        <a:t>152.4</a:t>
+                        <a:t>131.3</a:t>
                       </a:r>
                     </a:p>
                   </a:txBody>
@@ -12988,7 +12988,7 @@
                         </a:defRPr>
                       </a:pPr>
                       <a:r>
-                        <a:t>178.8</a:t>
+                        <a:t>106.3</a:t>
                       </a:r>
                     </a:p>
                   </a:txBody>
@@ -13146,7 +13146,7 @@
                         </a:defRPr>
                       </a:pPr>
                       <a:r>
-                        <a:t>96.5</a:t>
+                        <a:t>32.9</a:t>
                       </a:r>
                     </a:p>
                   </a:txBody>
@@ -13304,7 +13304,7 @@
                         </a:defRPr>
                       </a:pPr>
                       <a:r>
-                        <a:t>106.8</a:t>
+                        <a:t>122.6</a:t>
                       </a:r>
                     </a:p>
                   </a:txBody>
@@ -13462,7 +13462,7 @@
                         </a:defRPr>
                       </a:pPr>
                       <a:r>
-                        <a:t>21.4</a:t>
+                        <a:t>24</a:t>
                       </a:r>
                     </a:p>
                   </a:txBody>
@@ -13620,7 +13620,7 @@
                         </a:defRPr>
                       </a:pPr>
                       <a:r>
-                        <a:t>63.5</a:t>
+                        <a:t>27.8</a:t>
                       </a:r>
                     </a:p>
                   </a:txBody>
@@ -13778,7 +13778,7 @@
                         </a:defRPr>
                       </a:pPr>
                       <a:r>
-                        <a:t>124</a:t>
+                        <a:t>81.7</a:t>
                       </a:r>
                     </a:p>
                   </a:txBody>
@@ -13936,7 +13936,7 @@
                         </a:defRPr>
                       </a:pPr>
                       <a:r>
-                        <a:t>36.7</a:t>
+                        <a:t>13.4</a:t>
                       </a:r>
                     </a:p>
                   </a:txBody>
@@ -14094,7 +14094,7 @@
                         </a:defRPr>
                       </a:pPr>
                       <a:r>
-                        <a:t>157.2</a:t>
+                        <a:t>74</a:t>
                       </a:r>
                     </a:p>
                   </a:txBody>
@@ -14252,7 +14252,7 @@
                         </a:defRPr>
                       </a:pPr>
                       <a:r>
-                        <a:t>64.5</a:t>
+                        <a:t>69.1</a:t>
                       </a:r>
                     </a:p>
                   </a:txBody>
@@ -14410,7 +14410,7 @@
                         </a:defRPr>
                       </a:pPr>
                       <a:r>
-                        <a:t>58.7</a:t>
+                        <a:t>6.8</a:t>
                       </a:r>
                     </a:p>
                   </a:txBody>
@@ -14568,7 +14568,7 @@
                         </a:defRPr>
                       </a:pPr>
                       <a:r>
-                        <a:t>50.4</a:t>
+                        <a:t>75.4</a:t>
                       </a:r>
                     </a:p>
                   </a:txBody>
@@ -14726,7 +14726,7 @@
                         </a:defRPr>
                       </a:pPr>
                       <a:r>
-                        <a:t>-26.4</a:t>
+                        <a:t>25</a:t>
                       </a:r>
                     </a:p>
                   </a:txBody>
@@ -14884,7 +14884,7 @@
                         </a:defRPr>
                       </a:pPr>
                       <a:r>
-                        <a:t>16.9</a:t>
+                        <a:t>23.8</a:t>
                       </a:r>
                     </a:p>
                   </a:txBody>
@@ -15042,7 +15042,7 @@
                         </a:defRPr>
                       </a:pPr>
                       <a:r>
-                        <a:t>107</a:t>
+                        <a:t>131.1</a:t>
                       </a:r>
                     </a:p>
                   </a:txBody>
@@ -15200,7 +15200,7 @@
                         </a:defRPr>
                       </a:pPr>
                       <a:r>
-                        <a:t>165.9</a:t>
+                        <a:t>173.7</a:t>
                       </a:r>
                     </a:p>
                   </a:txBody>
@@ -15358,7 +15358,7 @@
                         </a:defRPr>
                       </a:pPr>
                       <a:r>
-                        <a:t>171.7</a:t>
+                        <a:t>97.7</a:t>
                       </a:r>
                     </a:p>
                   </a:txBody>
@@ -15519,7 +15519,7 @@
                         </a:defRPr>
                       </a:pPr>
                       <a:r>
-                        <a:t>25.7</a:t>
+                        <a:t>10.5</a:t>
                       </a:r>
                     </a:p>
                   </a:txBody>
@@ -15677,7 +15677,7 @@
                         </a:defRPr>
                       </a:pPr>
                       <a:r>
-                        <a:t>35.5</a:t>
+                        <a:t>44.7</a:t>
                       </a:r>
                     </a:p>
                   </a:txBody>
@@ -15835,7 +15835,7 @@
                         </a:defRPr>
                       </a:pPr>
                       <a:r>
-                        <a:t>32.9</a:t>
+                        <a:t>64.7</a:t>
                       </a:r>
                     </a:p>
                   </a:txBody>
@@ -15993,7 +15993,7 @@
                         </a:defRPr>
                       </a:pPr>
                       <a:r>
-                        <a:t>198.5</a:t>
+                        <a:t>122.7</a:t>
                       </a:r>
                     </a:p>
                   </a:txBody>
@@ -16151,7 +16151,7 @@
                         </a:defRPr>
                       </a:pPr>
                       <a:r>
-                        <a:t>24.8</a:t>
+                        <a:t>31.9</a:t>
                       </a:r>
                     </a:p>
                   </a:txBody>
@@ -16309,7 +16309,7 @@
                         </a:defRPr>
                       </a:pPr>
                       <a:r>
-                        <a:t>10.6</a:t>
+                        <a:t>26.4</a:t>
                       </a:r>
                     </a:p>
                   </a:txBody>
@@ -16467,7 +16467,7 @@
                         </a:defRPr>
                       </a:pPr>
                       <a:r>
-                        <a:t>49.2</a:t>
+                        <a:t>24.9</a:t>
                       </a:r>
                     </a:p>
                   </a:txBody>
@@ -16625,7 +16625,7 @@
                         </a:defRPr>
                       </a:pPr>
                       <a:r>
-                        <a:t>24.4</a:t>
+                        <a:t>-7</a:t>
                       </a:r>
                     </a:p>
                   </a:txBody>
@@ -16783,7 +16783,7 @@
                         </a:defRPr>
                       </a:pPr>
                       <a:r>
-                        <a:t>47.2</a:t>
+                        <a:t>30.9</a:t>
                       </a:r>
                     </a:p>
                   </a:txBody>
@@ -16941,7 +16941,7 @@
                         </a:defRPr>
                       </a:pPr>
                       <a:r>
-                        <a:t>23.1</a:t>
+                        <a:t>69</a:t>
                       </a:r>
                     </a:p>
                   </a:txBody>
@@ -17099,7 +17099,7 @@
                         </a:defRPr>
                       </a:pPr>
                       <a:r>
-                        <a:t>66.6</a:t>
+                        <a:t>32.1</a:t>
                       </a:r>
                     </a:p>
                   </a:txBody>
@@ -17257,7 +17257,7 @@
                         </a:defRPr>
                       </a:pPr>
                       <a:r>
-                        <a:t>-21.1</a:t>
+                        <a:t>47.3</a:t>
                       </a:r>
                     </a:p>
                   </a:txBody>
@@ -17415,7 +17415,7 @@
                         </a:defRPr>
                       </a:pPr>
                       <a:r>
-                        <a:t>90</a:t>
+                        <a:t>63.1</a:t>
                       </a:r>
                     </a:p>
                   </a:txBody>
@@ -17573,7 +17573,7 @@
                         </a:defRPr>
                       </a:pPr>
                       <a:r>
-                        <a:t>7</a:t>
+                        <a:t>-47</a:t>
                       </a:r>
                     </a:p>
                   </a:txBody>
@@ -17739,7 +17739,7 @@
                         </a:defRPr>
                       </a:pPr>
                       <a:r>
-                        <a:t>-32</a:t>
+                        <a:t>39</a:t>
                       </a:r>
                     </a:p>
                   </a:txBody>
@@ -17897,7 +17897,7 @@
                         </a:defRPr>
                       </a:pPr>
                       <a:r>
-                        <a:t>97.6</a:t>
+                        <a:t>106.7</a:t>
                       </a:r>
                     </a:p>
                   </a:txBody>
@@ -18055,7 +18055,7 @@
                         </a:defRPr>
                       </a:pPr>
                       <a:r>
-                        <a:t>70.1</a:t>
+                        <a:t>57.9</a:t>
                       </a:r>
                     </a:p>
                   </a:txBody>
@@ -18339,7 +18339,7 @@
               </a:defRPr>
             </a:pPr>
             <a:r>
-              <a:t>HGI:20</a:t>
+              <a:t>HGI:-3.2</a:t>
             </a:r>
           </a:p>
         </p:txBody>
@@ -18429,7 +18429,7 @@
               </a:defRPr>
             </a:pPr>
             <a:r>
-              <a:t>VGI:70.1</a:t>
+              <a:t>VGI:33.1</a:t>
             </a:r>
           </a:p>
         </p:txBody>
@@ -18981,7 +18981,7 @@
               </a:defRPr>
             </a:pPr>
             <a:r>
-              <a:t>2APDL:13.3</a:t>
+              <a:t>2APDL:20.6</a:t>
             </a:r>
           </a:p>
         </p:txBody>
@@ -19020,7 +19020,7 @@
               </a:defRPr>
             </a:pPr>
             <a:r>
-              <a:t>IODI:45.9</a:t>
+              <a:t>IODI:48.6</a:t>
             </a:r>
           </a:p>
         </p:txBody>
@@ -19102,7 +19102,7 @@
               </a:defRPr>
             </a:pPr>
             <a:r>
-              <a:t>VDL:11.7</a:t>
+              <a:t>VDL:4.5</a:t>
             </a:r>
           </a:p>
         </p:txBody>
@@ -19223,7 +19223,7 @@
               </a:defRPr>
             </a:pPr>
             <a:r>
-              <a:t>CFD:40.8</a:t>
+              <a:t>CFD:35</a:t>
             </a:r>
           </a:p>
         </p:txBody>
@@ -28891,8 +28891,8 @@
         </p:blipFill>
         <p:spPr>
           <a:xfrm>
-            <a:off x="305335" y="0"/>
-            <a:ext cx="8533328" cy="6858000"/>
+            <a:off x="1588201" y="0"/>
+            <a:ext cx="5967596" cy="6858000"/>
           </a:xfrm>
           <a:prstGeom prst="rect">
             <a:avLst/>
@@ -29177,14 +29177,14 @@
       </p:pic>
       <p:pic>
         <p:nvPicPr>
-          <p:cNvPr id="3" name="Picture 2" descr="oral_default.jpg"/>
+          <p:cNvPr id="3" name="Picture 2" descr="oralPhoto_2.jpg"/>
           <p:cNvPicPr>
             <a:picLocks noChangeAspect="1"/>
           </p:cNvPicPr>
           <p:nvPr/>
         </p:nvPicPr>
         <p:blipFill>
-          <a:blip r:embed="rId2"/>
+          <a:blip r:embed="rId3"/>
           <a:stretch>
             <a:fillRect/>
           </a:stretch>
@@ -29371,8 +29371,8 @@
         </p:blipFill>
         <p:spPr>
           <a:xfrm>
-            <a:off x="311348" y="0"/>
-            <a:ext cx="8521302" cy="6858000"/>
+            <a:off x="1585837" y="0"/>
+            <a:ext cx="5972324" cy="6858000"/>
           </a:xfrm>
           <a:prstGeom prst="rect">
             <a:avLst/>

--- a/output_ppt.pptx
+++ b/output_ppt.pptx
@@ -7029,29 +7029,108 @@
             </a:lvl9pPr>
           </a:lstStyle>
           <a:p>
-            <a:pPr algn="ctr">
-              <a:defRPr sz="1500" b="1">
+            <a:pPr eaLnBrk="1" hangingPunct="1"/>
+            <a:r>
+              <a:rPr lang="en-US" altLang="ko-KR" sz="1600" b="1" dirty="0">
                 <a:solidFill>
-                  <a:srgbClr val="445474"/>
+                  <a:schemeClr val="tx2"/>
                 </a:solidFill>
-                <a:latin typeface="맑은 고딕"/>
-              </a:defRPr>
-            </a:pPr>
-            <a:r>
-              <a:t>Male 순응교합 20 2005-04-05</a:t>
+                <a:latin typeface="+mj-ea"/>
+                <a:ea typeface="+mj-ea"/>
+                <a:cs typeface="Arial" panose="020B0604020202020204" pitchFamily="34" charset="0"/>
+              </a:rPr>
+              <a:t>  (F) </a:t>
+            </a:r>
+            <a:r>
+              <a:rPr lang="ko-KR" altLang="en-US" sz="1600" b="1" dirty="0">
+                <a:solidFill>
+                  <a:schemeClr val="tx2"/>
+                </a:solidFill>
+                <a:latin typeface="+mj-ea"/>
+                <a:ea typeface="+mj-ea"/>
+                <a:cs typeface="Arial" panose="020B0604020202020204" pitchFamily="34" charset="0"/>
+              </a:rPr>
+              <a:t>순응교합연구회 </a:t>
+            </a:r>
+            <a:r>
+              <a:rPr lang="en-US" altLang="ko-KR" sz="1600" b="1" dirty="0">
+                <a:solidFill>
+                  <a:schemeClr val="tx2"/>
+                </a:solidFill>
+                <a:latin typeface="+mj-ea"/>
+                <a:ea typeface="+mj-ea"/>
+                <a:cs typeface="Arial" panose="020B0604020202020204" pitchFamily="34" charset="0"/>
+              </a:rPr>
+              <a:t>8y since 2017</a:t>
             </a:r>
           </a:p>
           <a:p>
-            <a:pPr algn="ctr">
-              <a:defRPr sz="1500" b="1">
+            <a:pPr eaLnBrk="1" hangingPunct="1"/>
+            <a:r>
+              <a:rPr lang="en-US" altLang="ko-KR" sz="1600" b="1" dirty="0">
                 <a:solidFill>
-                  <a:srgbClr val="445474"/>
+                  <a:schemeClr val="tx2"/>
                 </a:solidFill>
-                <a:latin typeface="맑은 고딕"/>
-              </a:defRPr>
-            </a:pPr>
-            <a:r>
-              <a:t> S1.B1.D3.C1-nbt(dbt)-RM(Rt)-Fx:Ex-Fx/1-Type IV</a:t>
+                <a:latin typeface="+mj-ea"/>
+                <a:ea typeface="+mj-ea"/>
+                <a:cs typeface="Arial" panose="020B0604020202020204" pitchFamily="34" charset="0"/>
+              </a:rPr>
+              <a:t>S1.B1.D1.C1-nbt(</a:t>
+            </a:r>
+            <a:r>
+              <a:rPr lang="en-US" altLang="ko-KR" sz="1600" b="1" dirty="0" err="1">
+                <a:solidFill>
+                  <a:schemeClr val="tx2"/>
+                </a:solidFill>
+                <a:latin typeface="+mj-ea"/>
+                <a:ea typeface="+mj-ea"/>
+                <a:cs typeface="Arial" panose="020B0604020202020204" pitchFamily="34" charset="0"/>
+              </a:rPr>
+              <a:t>dbt</a:t>
+            </a:r>
+            <a:r>
+              <a:rPr lang="en-US" altLang="ko-KR" sz="1600" b="1" dirty="0">
+                <a:solidFill>
+                  <a:schemeClr val="tx2"/>
+                </a:solidFill>
+                <a:latin typeface="+mj-ea"/>
+                <a:ea typeface="+mj-ea"/>
+                <a:cs typeface="Arial" panose="020B0604020202020204" pitchFamily="34" charset="0"/>
+              </a:rPr>
+              <a:t>)-RM(Rt)-</a:t>
+            </a:r>
+            <a:r>
+              <a:rPr lang="en-US" altLang="ko-KR" sz="1600" b="1" dirty="0" err="1">
+                <a:solidFill>
+                  <a:schemeClr val="tx2"/>
+                </a:solidFill>
+                <a:latin typeface="+mj-ea"/>
+                <a:ea typeface="+mj-ea"/>
+                <a:cs typeface="Arial" panose="020B0604020202020204" pitchFamily="34" charset="0"/>
+              </a:rPr>
+              <a:t>Fx:Ex-Fx</a:t>
+            </a:r>
+            <a:r>
+              <a:rPr lang="en-US" altLang="ko-KR" sz="1600" b="1" dirty="0">
+                <a:solidFill>
+                  <a:schemeClr val="tx2"/>
+                </a:solidFill>
+                <a:latin typeface="+mj-ea"/>
+                <a:ea typeface="+mj-ea"/>
+                <a:cs typeface="Arial" panose="020B0604020202020204" pitchFamily="34" charset="0"/>
+              </a:rPr>
+              <a:t>/0-Type IV   </a:t>
+            </a:r>
+            <a:r>
+              <a:rPr lang="ko-KR" altLang="en-US" sz="1600" b="1" dirty="0">
+                <a:solidFill>
+                  <a:schemeClr val="tx2"/>
+                </a:solidFill>
+                <a:latin typeface="+mj-ea"/>
+                <a:ea typeface="+mj-ea"/>
+                <a:cs typeface="Arial" panose="020B0604020202020204" pitchFamily="34" charset="0"/>
+              </a:rPr>
+              <a:t> </a:t>
             </a:r>
           </a:p>
         </p:txBody>
@@ -12031,17 +12110,23 @@
                     <a:bodyPr/>
                     <a:lstStyle/>
                     <a:p>
-                      <a:pPr algn="ctr">
-                        <a:defRPr sz="700" b="0">
-                          <a:solidFill>
-                            <a:srgbClr val="445474"/>
-                          </a:solidFill>
-                          <a:latin typeface="맑은 고딕"/>
-                        </a:defRPr>
-                      </a:pPr>
+                      <a:pPr algn="ctr" fontAlgn="ctr"/>
                       <a:r>
-                        <a:t>38.5</a:t>
+                        <a:rPr lang="en-US" altLang="ko-KR" sz="600" u="none" strike="noStrike" dirty="0">
+                          <a:effectLst/>
+                          <a:latin typeface="+mn-ea"/>
+                          <a:ea typeface="+mn-ea"/>
+                        </a:rPr>
+                        <a:t>0</a:t>
                       </a:r>
+                      <a:endParaRPr lang="en-US" altLang="ko-KR" sz="600" b="0" i="0" u="none" strike="noStrike" dirty="0">
+                        <a:solidFill>
+                          <a:srgbClr val="000000"/>
+                        </a:solidFill>
+                        <a:effectLst/>
+                        <a:latin typeface="+mn-ea"/>
+                        <a:ea typeface="+mn-ea"/>
+                      </a:endParaRPr>
                     </a:p>
                   </a:txBody>
                   <a:tcPr marL="0" marR="0" marT="0" marB="0" anchor="ctr">
@@ -12189,17 +12274,23 @@
                     <a:bodyPr/>
                     <a:lstStyle/>
                     <a:p>
-                      <a:pPr algn="ctr">
-                        <a:defRPr sz="700" b="0">
-                          <a:solidFill>
-                            <a:srgbClr val="445474"/>
-                          </a:solidFill>
-                          <a:latin typeface="맑은 고딕"/>
-                        </a:defRPr>
-                      </a:pPr>
+                      <a:pPr algn="ctr" fontAlgn="ctr"/>
                       <a:r>
-                        <a:t>50.3</a:t>
+                        <a:rPr lang="en-US" altLang="ko-KR" sz="600" u="none" strike="noStrike" dirty="0">
+                          <a:effectLst/>
+                          <a:latin typeface="+mn-ea"/>
+                          <a:ea typeface="+mn-ea"/>
+                        </a:rPr>
+                        <a:t>0</a:t>
                       </a:r>
+                      <a:endParaRPr lang="en-US" altLang="ko-KR" sz="600" b="0" i="0" u="none" strike="noStrike" dirty="0">
+                        <a:solidFill>
+                          <a:srgbClr val="000000"/>
+                        </a:solidFill>
+                        <a:effectLst/>
+                        <a:latin typeface="+mn-ea"/>
+                        <a:ea typeface="+mn-ea"/>
+                      </a:endParaRPr>
                     </a:p>
                   </a:txBody>
                   <a:tcPr marL="0" marR="0" marT="0" marB="0" anchor="ctr">
@@ -12347,17 +12438,23 @@
                     <a:bodyPr/>
                     <a:lstStyle/>
                     <a:p>
-                      <a:pPr algn="ctr">
-                        <a:defRPr sz="700" b="0">
-                          <a:solidFill>
-                            <a:srgbClr val="445474"/>
-                          </a:solidFill>
-                          <a:latin typeface="맑은 고딕"/>
-                        </a:defRPr>
-                      </a:pPr>
+                      <a:pPr algn="ctr" fontAlgn="ctr"/>
                       <a:r>
-                        <a:t>11.8</a:t>
+                        <a:rPr lang="en-US" altLang="ko-KR" sz="600" u="none" strike="noStrike" dirty="0">
+                          <a:effectLst/>
+                          <a:latin typeface="+mn-ea"/>
+                          <a:ea typeface="+mn-ea"/>
+                        </a:rPr>
+                        <a:t>0</a:t>
                       </a:r>
+                      <a:endParaRPr lang="en-US" altLang="ko-KR" sz="600" b="0" i="0" u="none" strike="noStrike" dirty="0">
+                        <a:solidFill>
+                          <a:srgbClr val="000000"/>
+                        </a:solidFill>
+                        <a:effectLst/>
+                        <a:latin typeface="+mn-ea"/>
+                        <a:ea typeface="+mn-ea"/>
+                      </a:endParaRPr>
                     </a:p>
                   </a:txBody>
                   <a:tcPr marL="0" marR="0" marT="0" marB="0" anchor="ctr">
@@ -12505,17 +12602,23 @@
                     <a:bodyPr/>
                     <a:lstStyle/>
                     <a:p>
-                      <a:pPr algn="ctr">
-                        <a:defRPr sz="700" b="0">
-                          <a:solidFill>
-                            <a:srgbClr val="445474"/>
-                          </a:solidFill>
-                          <a:latin typeface="맑은 고딕"/>
-                        </a:defRPr>
-                      </a:pPr>
+                      <a:pPr algn="ctr" fontAlgn="ctr"/>
                       <a:r>
-                        <a:t>133.4</a:t>
+                        <a:rPr lang="en-US" altLang="ko-KR" sz="600" u="none" strike="noStrike">
+                          <a:effectLst/>
+                          <a:latin typeface="+mn-ea"/>
+                          <a:ea typeface="+mn-ea"/>
+                        </a:rPr>
+                        <a:t>0</a:t>
                       </a:r>
+                      <a:endParaRPr lang="en-US" altLang="ko-KR" sz="600" b="0" i="0" u="none" strike="noStrike">
+                        <a:solidFill>
+                          <a:srgbClr val="000000"/>
+                        </a:solidFill>
+                        <a:effectLst/>
+                        <a:latin typeface="+mn-ea"/>
+                        <a:ea typeface="+mn-ea"/>
+                      </a:endParaRPr>
                     </a:p>
                   </a:txBody>
                   <a:tcPr marL="0" marR="0" marT="0" marB="0" anchor="ctr">
@@ -12663,17 +12766,23 @@
                     <a:bodyPr/>
                     <a:lstStyle/>
                     <a:p>
-                      <a:pPr algn="ctr">
-                        <a:defRPr sz="700" b="0">
-                          <a:solidFill>
-                            <a:srgbClr val="445474"/>
-                          </a:solidFill>
-                          <a:latin typeface="맑은 고딕"/>
-                        </a:defRPr>
-                      </a:pPr>
+                      <a:pPr algn="ctr" fontAlgn="ctr"/>
                       <a:r>
-                        <a:t>84.7</a:t>
+                        <a:rPr lang="en-US" altLang="ko-KR" sz="600" u="none" strike="noStrike" dirty="0">
+                          <a:effectLst/>
+                          <a:latin typeface="+mn-ea"/>
+                          <a:ea typeface="+mn-ea"/>
+                        </a:rPr>
+                        <a:t>0</a:t>
                       </a:r>
+                      <a:endParaRPr lang="en-US" altLang="ko-KR" sz="600" b="0" i="0" u="none" strike="noStrike" dirty="0">
+                        <a:solidFill>
+                          <a:srgbClr val="000000"/>
+                        </a:solidFill>
+                        <a:effectLst/>
+                        <a:latin typeface="+mn-ea"/>
+                        <a:ea typeface="+mn-ea"/>
+                      </a:endParaRPr>
                     </a:p>
                   </a:txBody>
                   <a:tcPr marL="0" marR="0" marT="0" marB="0" anchor="ctr">
@@ -12821,17 +12930,23 @@
                     <a:bodyPr/>
                     <a:lstStyle/>
                     <a:p>
-                      <a:pPr algn="ctr">
-                        <a:defRPr sz="700" b="0">
-                          <a:solidFill>
-                            <a:srgbClr val="445474"/>
-                          </a:solidFill>
-                          <a:latin typeface="맑은 고딕"/>
-                        </a:defRPr>
-                      </a:pPr>
+                      <a:pPr algn="ctr" fontAlgn="ctr"/>
                       <a:r>
-                        <a:t>131.3</a:t>
+                        <a:rPr lang="en-US" altLang="ko-KR" sz="600" u="none" strike="noStrike">
+                          <a:effectLst/>
+                          <a:latin typeface="+mn-ea"/>
+                          <a:ea typeface="+mn-ea"/>
+                        </a:rPr>
+                        <a:t>0</a:t>
                       </a:r>
+                      <a:endParaRPr lang="en-US" altLang="ko-KR" sz="600" b="0" i="0" u="none" strike="noStrike">
+                        <a:solidFill>
+                          <a:srgbClr val="000000"/>
+                        </a:solidFill>
+                        <a:effectLst/>
+                        <a:latin typeface="+mn-ea"/>
+                        <a:ea typeface="+mn-ea"/>
+                      </a:endParaRPr>
                     </a:p>
                   </a:txBody>
                   <a:tcPr marL="0" marR="0" marT="0" marB="0" anchor="ctr">
@@ -12979,17 +13094,23 @@
                     <a:bodyPr/>
                     <a:lstStyle/>
                     <a:p>
-                      <a:pPr algn="ctr">
-                        <a:defRPr sz="700" b="0">
-                          <a:solidFill>
-                            <a:srgbClr val="445474"/>
-                          </a:solidFill>
-                          <a:latin typeface="맑은 고딕"/>
-                        </a:defRPr>
-                      </a:pPr>
+                      <a:pPr algn="ctr" fontAlgn="ctr"/>
                       <a:r>
-                        <a:t>106.3</a:t>
+                        <a:rPr lang="en-US" altLang="ko-KR" sz="600" u="none" strike="noStrike" dirty="0">
+                          <a:effectLst/>
+                          <a:latin typeface="+mn-ea"/>
+                          <a:ea typeface="+mn-ea"/>
+                        </a:rPr>
+                        <a:t>0</a:t>
                       </a:r>
+                      <a:endParaRPr lang="en-US" altLang="ko-KR" sz="600" b="0" i="0" u="none" strike="noStrike" dirty="0">
+                        <a:solidFill>
+                          <a:srgbClr val="000000"/>
+                        </a:solidFill>
+                        <a:effectLst/>
+                        <a:latin typeface="+mn-ea"/>
+                        <a:ea typeface="+mn-ea"/>
+                      </a:endParaRPr>
                     </a:p>
                   </a:txBody>
                   <a:tcPr marL="0" marR="0" marT="0" marB="0" anchor="ctr">
@@ -13137,17 +13258,23 @@
                     <a:bodyPr/>
                     <a:lstStyle/>
                     <a:p>
-                      <a:pPr algn="ctr">
-                        <a:defRPr sz="700" b="0">
-                          <a:solidFill>
-                            <a:srgbClr val="445474"/>
-                          </a:solidFill>
-                          <a:latin typeface="맑은 고딕"/>
-                        </a:defRPr>
-                      </a:pPr>
+                      <a:pPr algn="ctr" fontAlgn="ctr"/>
                       <a:r>
-                        <a:t>32.9</a:t>
+                        <a:rPr lang="en-US" altLang="ko-KR" sz="600" u="none" strike="noStrike">
+                          <a:effectLst/>
+                          <a:latin typeface="+mn-ea"/>
+                          <a:ea typeface="+mn-ea"/>
+                        </a:rPr>
+                        <a:t>0</a:t>
                       </a:r>
+                      <a:endParaRPr lang="en-US" altLang="ko-KR" sz="600" b="0" i="0" u="none" strike="noStrike">
+                        <a:solidFill>
+                          <a:srgbClr val="000000"/>
+                        </a:solidFill>
+                        <a:effectLst/>
+                        <a:latin typeface="+mn-ea"/>
+                        <a:ea typeface="+mn-ea"/>
+                      </a:endParaRPr>
                     </a:p>
                   </a:txBody>
                   <a:tcPr marL="0" marR="0" marT="0" marB="0" anchor="ctr">
@@ -13295,17 +13422,23 @@
                     <a:bodyPr/>
                     <a:lstStyle/>
                     <a:p>
-                      <a:pPr algn="ctr">
-                        <a:defRPr sz="700" b="0">
-                          <a:solidFill>
-                            <a:srgbClr val="445474"/>
-                          </a:solidFill>
-                          <a:latin typeface="맑은 고딕"/>
-                        </a:defRPr>
-                      </a:pPr>
+                      <a:pPr algn="ctr" fontAlgn="ctr"/>
                       <a:r>
-                        <a:t>122.6</a:t>
+                        <a:rPr lang="en-US" altLang="ko-KR" sz="600" u="none" strike="noStrike" dirty="0">
+                          <a:effectLst/>
+                          <a:latin typeface="+mn-ea"/>
+                          <a:ea typeface="+mn-ea"/>
+                        </a:rPr>
+                        <a:t>0</a:t>
                       </a:r>
+                      <a:endParaRPr lang="en-US" altLang="ko-KR" sz="600" b="0" i="0" u="none" strike="noStrike" dirty="0">
+                        <a:solidFill>
+                          <a:srgbClr val="000000"/>
+                        </a:solidFill>
+                        <a:effectLst/>
+                        <a:latin typeface="+mn-ea"/>
+                        <a:ea typeface="+mn-ea"/>
+                      </a:endParaRPr>
                     </a:p>
                   </a:txBody>
                   <a:tcPr marL="0" marR="0" marT="0" marB="0" anchor="ctr">
@@ -13453,17 +13586,23 @@
                     <a:bodyPr/>
                     <a:lstStyle/>
                     <a:p>
-                      <a:pPr algn="ctr">
-                        <a:defRPr sz="700" b="0">
-                          <a:solidFill>
-                            <a:srgbClr val="445474"/>
-                          </a:solidFill>
-                          <a:latin typeface="맑은 고딕"/>
-                        </a:defRPr>
-                      </a:pPr>
+                      <a:pPr algn="ctr" fontAlgn="ctr"/>
                       <a:r>
-                        <a:t>24</a:t>
+                        <a:rPr lang="en-US" altLang="ko-KR" sz="600" u="none" strike="noStrike" dirty="0">
+                          <a:effectLst/>
+                          <a:latin typeface="+mn-ea"/>
+                          <a:ea typeface="+mn-ea"/>
+                        </a:rPr>
+                        <a:t>0</a:t>
                       </a:r>
+                      <a:endParaRPr lang="en-US" altLang="ko-KR" sz="600" b="0" i="0" u="none" strike="noStrike" dirty="0">
+                        <a:solidFill>
+                          <a:srgbClr val="000000"/>
+                        </a:solidFill>
+                        <a:effectLst/>
+                        <a:latin typeface="+mn-ea"/>
+                        <a:ea typeface="+mn-ea"/>
+                      </a:endParaRPr>
                     </a:p>
                   </a:txBody>
                   <a:tcPr marL="0" marR="0" marT="0" marB="0" anchor="ctr">
@@ -13611,17 +13750,23 @@
                     <a:bodyPr/>
                     <a:lstStyle/>
                     <a:p>
-                      <a:pPr algn="ctr">
-                        <a:defRPr sz="700" b="0">
-                          <a:solidFill>
-                            <a:srgbClr val="445474"/>
-                          </a:solidFill>
-                          <a:latin typeface="맑은 고딕"/>
-                        </a:defRPr>
-                      </a:pPr>
+                      <a:pPr algn="ctr" fontAlgn="ctr"/>
                       <a:r>
-                        <a:t>27.8</a:t>
+                        <a:rPr lang="en-US" altLang="ko-KR" sz="600" u="none" strike="noStrike" dirty="0">
+                          <a:effectLst/>
+                          <a:latin typeface="+mn-ea"/>
+                          <a:ea typeface="+mn-ea"/>
+                        </a:rPr>
+                        <a:t>0</a:t>
                       </a:r>
+                      <a:endParaRPr lang="en-US" altLang="ko-KR" sz="600" b="0" i="0" u="none" strike="noStrike" dirty="0">
+                        <a:solidFill>
+                          <a:srgbClr val="000000"/>
+                        </a:solidFill>
+                        <a:effectLst/>
+                        <a:latin typeface="+mn-ea"/>
+                        <a:ea typeface="+mn-ea"/>
+                      </a:endParaRPr>
                     </a:p>
                   </a:txBody>
                   <a:tcPr marL="0" marR="0" marT="0" marB="0" anchor="ctr">
@@ -13769,17 +13914,23 @@
                     <a:bodyPr/>
                     <a:lstStyle/>
                     <a:p>
-                      <a:pPr algn="ctr">
-                        <a:defRPr sz="700" b="0">
-                          <a:solidFill>
-                            <a:srgbClr val="445474"/>
-                          </a:solidFill>
-                          <a:latin typeface="맑은 고딕"/>
-                        </a:defRPr>
-                      </a:pPr>
+                      <a:pPr algn="ctr" fontAlgn="ctr"/>
                       <a:r>
-                        <a:t>81.7</a:t>
+                        <a:rPr lang="en-US" altLang="ko-KR" sz="600" u="none" strike="noStrike" dirty="0">
+                          <a:effectLst/>
+                          <a:latin typeface="+mn-ea"/>
+                          <a:ea typeface="+mn-ea"/>
+                        </a:rPr>
+                        <a:t>0</a:t>
                       </a:r>
+                      <a:endParaRPr lang="en-US" altLang="ko-KR" sz="600" b="0" i="0" u="none" strike="noStrike" dirty="0">
+                        <a:solidFill>
+                          <a:srgbClr val="000000"/>
+                        </a:solidFill>
+                        <a:effectLst/>
+                        <a:latin typeface="+mn-ea"/>
+                        <a:ea typeface="+mn-ea"/>
+                      </a:endParaRPr>
                     </a:p>
                   </a:txBody>
                   <a:tcPr marL="0" marR="0" marT="0" marB="0" anchor="ctr">
@@ -13927,17 +14078,23 @@
                     <a:bodyPr/>
                     <a:lstStyle/>
                     <a:p>
-                      <a:pPr algn="ctr">
-                        <a:defRPr sz="700" b="0">
-                          <a:solidFill>
-                            <a:srgbClr val="445474"/>
-                          </a:solidFill>
-                          <a:latin typeface="맑은 고딕"/>
-                        </a:defRPr>
-                      </a:pPr>
+                      <a:pPr algn="ctr" fontAlgn="ctr"/>
                       <a:r>
-                        <a:t>13.4</a:t>
+                        <a:rPr lang="en-US" altLang="ko-KR" sz="600" u="none" strike="noStrike">
+                          <a:effectLst/>
+                          <a:latin typeface="+mn-ea"/>
+                          <a:ea typeface="+mn-ea"/>
+                        </a:rPr>
+                        <a:t>0</a:t>
                       </a:r>
+                      <a:endParaRPr lang="en-US" altLang="ko-KR" sz="600" b="0" i="0" u="none" strike="noStrike">
+                        <a:solidFill>
+                          <a:srgbClr val="000000"/>
+                        </a:solidFill>
+                        <a:effectLst/>
+                        <a:latin typeface="+mn-ea"/>
+                        <a:ea typeface="+mn-ea"/>
+                      </a:endParaRPr>
                     </a:p>
                   </a:txBody>
                   <a:tcPr marL="0" marR="0" marT="0" marB="0" anchor="ctr">
@@ -14085,17 +14242,23 @@
                     <a:bodyPr/>
                     <a:lstStyle/>
                     <a:p>
-                      <a:pPr algn="ctr">
-                        <a:defRPr sz="700" b="0">
-                          <a:solidFill>
-                            <a:srgbClr val="445474"/>
-                          </a:solidFill>
-                          <a:latin typeface="맑은 고딕"/>
-                        </a:defRPr>
-                      </a:pPr>
+                      <a:pPr algn="ctr" fontAlgn="ctr"/>
                       <a:r>
-                        <a:t>74</a:t>
+                        <a:rPr lang="en-US" altLang="ko-KR" sz="600" u="none" strike="noStrike" dirty="0">
+                          <a:effectLst/>
+                          <a:latin typeface="+mn-ea"/>
+                          <a:ea typeface="+mn-ea"/>
+                        </a:rPr>
+                        <a:t>0</a:t>
                       </a:r>
+                      <a:endParaRPr lang="en-US" altLang="ko-KR" sz="600" b="0" i="0" u="none" strike="noStrike" dirty="0">
+                        <a:solidFill>
+                          <a:srgbClr val="000000"/>
+                        </a:solidFill>
+                        <a:effectLst/>
+                        <a:latin typeface="+mn-ea"/>
+                        <a:ea typeface="+mn-ea"/>
+                      </a:endParaRPr>
                     </a:p>
                   </a:txBody>
                   <a:tcPr marL="0" marR="0" marT="0" marB="0" anchor="ctr">
@@ -14243,17 +14406,23 @@
                     <a:bodyPr/>
                     <a:lstStyle/>
                     <a:p>
-                      <a:pPr algn="ctr">
-                        <a:defRPr sz="700" b="0">
-                          <a:solidFill>
-                            <a:srgbClr val="445474"/>
-                          </a:solidFill>
-                          <a:latin typeface="맑은 고딕"/>
-                        </a:defRPr>
-                      </a:pPr>
+                      <a:pPr algn="ctr" fontAlgn="ctr"/>
                       <a:r>
-                        <a:t>69.1</a:t>
+                        <a:rPr lang="en-US" altLang="ko-KR" sz="600" u="none" strike="noStrike" dirty="0">
+                          <a:effectLst/>
+                          <a:latin typeface="+mn-ea"/>
+                          <a:ea typeface="+mn-ea"/>
+                        </a:rPr>
+                        <a:t>0</a:t>
                       </a:r>
+                      <a:endParaRPr lang="en-US" altLang="ko-KR" sz="600" b="0" i="0" u="none" strike="noStrike" dirty="0">
+                        <a:solidFill>
+                          <a:srgbClr val="000000"/>
+                        </a:solidFill>
+                        <a:effectLst/>
+                        <a:latin typeface="+mn-ea"/>
+                        <a:ea typeface="+mn-ea"/>
+                      </a:endParaRPr>
                     </a:p>
                   </a:txBody>
                   <a:tcPr marL="0" marR="0" marT="0" marB="0" anchor="ctr">
@@ -14401,17 +14570,23 @@
                     <a:bodyPr/>
                     <a:lstStyle/>
                     <a:p>
-                      <a:pPr algn="ctr">
-                        <a:defRPr sz="700" b="0">
-                          <a:solidFill>
-                            <a:srgbClr val="445474"/>
-                          </a:solidFill>
-                          <a:latin typeface="맑은 고딕"/>
-                        </a:defRPr>
-                      </a:pPr>
+                      <a:pPr algn="ctr" fontAlgn="ctr"/>
                       <a:r>
-                        <a:t>6.8</a:t>
+                        <a:rPr lang="en-US" altLang="ko-KR" sz="600" u="none" strike="noStrike" dirty="0">
+                          <a:effectLst/>
+                          <a:latin typeface="+mn-ea"/>
+                          <a:ea typeface="+mn-ea"/>
+                        </a:rPr>
+                        <a:t>0</a:t>
                       </a:r>
+                      <a:endParaRPr lang="en-US" altLang="ko-KR" sz="600" b="0" i="0" u="none" strike="noStrike" dirty="0">
+                        <a:solidFill>
+                          <a:srgbClr val="000000"/>
+                        </a:solidFill>
+                        <a:effectLst/>
+                        <a:latin typeface="+mn-ea"/>
+                        <a:ea typeface="+mn-ea"/>
+                      </a:endParaRPr>
                     </a:p>
                   </a:txBody>
                   <a:tcPr marL="0" marR="0" marT="0" marB="0" anchor="ctr">
@@ -14559,17 +14734,23 @@
                     <a:bodyPr/>
                     <a:lstStyle/>
                     <a:p>
-                      <a:pPr algn="ctr">
-                        <a:defRPr sz="700" b="0">
-                          <a:solidFill>
-                            <a:srgbClr val="445474"/>
-                          </a:solidFill>
-                          <a:latin typeface="맑은 고딕"/>
-                        </a:defRPr>
-                      </a:pPr>
+                      <a:pPr algn="ctr" fontAlgn="ctr"/>
                       <a:r>
-                        <a:t>75.4</a:t>
+                        <a:rPr lang="en-US" altLang="ko-KR" sz="600" u="none" strike="noStrike" dirty="0">
+                          <a:effectLst/>
+                          <a:latin typeface="+mn-ea"/>
+                          <a:ea typeface="+mn-ea"/>
+                        </a:rPr>
+                        <a:t>0</a:t>
                       </a:r>
+                      <a:endParaRPr lang="en-US" altLang="ko-KR" sz="600" b="0" i="0" u="none" strike="noStrike" dirty="0">
+                        <a:solidFill>
+                          <a:srgbClr val="000000"/>
+                        </a:solidFill>
+                        <a:effectLst/>
+                        <a:latin typeface="+mn-ea"/>
+                        <a:ea typeface="+mn-ea"/>
+                      </a:endParaRPr>
                     </a:p>
                   </a:txBody>
                   <a:tcPr marL="0" marR="0" marT="0" marB="0" anchor="ctr">
@@ -14717,17 +14898,23 @@
                     <a:bodyPr/>
                     <a:lstStyle/>
                     <a:p>
-                      <a:pPr algn="ctr">
-                        <a:defRPr sz="700" b="0">
-                          <a:solidFill>
-                            <a:srgbClr val="445474"/>
-                          </a:solidFill>
-                          <a:latin typeface="맑은 고딕"/>
-                        </a:defRPr>
-                      </a:pPr>
+                      <a:pPr algn="ctr" fontAlgn="ctr"/>
                       <a:r>
-                        <a:t>25</a:t>
+                        <a:rPr lang="en-US" altLang="ko-KR" sz="600" u="none" strike="noStrike" dirty="0">
+                          <a:effectLst/>
+                          <a:latin typeface="+mn-ea"/>
+                          <a:ea typeface="+mn-ea"/>
+                        </a:rPr>
+                        <a:t>0</a:t>
                       </a:r>
+                      <a:endParaRPr lang="en-US" altLang="ko-KR" sz="600" b="0" i="0" u="none" strike="noStrike" dirty="0">
+                        <a:solidFill>
+                          <a:srgbClr val="000000"/>
+                        </a:solidFill>
+                        <a:effectLst/>
+                        <a:latin typeface="+mn-ea"/>
+                        <a:ea typeface="+mn-ea"/>
+                      </a:endParaRPr>
                     </a:p>
                   </a:txBody>
                   <a:tcPr marL="0" marR="0" marT="0" marB="0" anchor="ctr">
@@ -14875,17 +15062,23 @@
                     <a:bodyPr/>
                     <a:lstStyle/>
                     <a:p>
-                      <a:pPr algn="ctr">
-                        <a:defRPr sz="700" b="0">
-                          <a:solidFill>
-                            <a:srgbClr val="445474"/>
-                          </a:solidFill>
-                          <a:latin typeface="맑은 고딕"/>
-                        </a:defRPr>
-                      </a:pPr>
+                      <a:pPr algn="ctr" fontAlgn="ctr"/>
                       <a:r>
-                        <a:t>23.8</a:t>
+                        <a:rPr lang="en-US" altLang="ko-KR" sz="600" u="none" strike="noStrike" dirty="0">
+                          <a:effectLst/>
+                          <a:latin typeface="+mn-ea"/>
+                          <a:ea typeface="+mn-ea"/>
+                        </a:rPr>
+                        <a:t>0</a:t>
                       </a:r>
+                      <a:endParaRPr lang="en-US" altLang="ko-KR" sz="600" b="0" i="0" u="none" strike="noStrike" dirty="0">
+                        <a:solidFill>
+                          <a:srgbClr val="000000"/>
+                        </a:solidFill>
+                        <a:effectLst/>
+                        <a:latin typeface="+mn-ea"/>
+                        <a:ea typeface="+mn-ea"/>
+                      </a:endParaRPr>
                     </a:p>
                   </a:txBody>
                   <a:tcPr marL="0" marR="0" marT="0" marB="0" anchor="ctr">
@@ -15033,17 +15226,23 @@
                     <a:bodyPr/>
                     <a:lstStyle/>
                     <a:p>
-                      <a:pPr algn="ctr">
-                        <a:defRPr sz="700" b="0">
-                          <a:solidFill>
-                            <a:srgbClr val="445474"/>
-                          </a:solidFill>
-                          <a:latin typeface="맑은 고딕"/>
-                        </a:defRPr>
-                      </a:pPr>
+                      <a:pPr algn="ctr" fontAlgn="ctr"/>
                       <a:r>
-                        <a:t>131.1</a:t>
+                        <a:rPr lang="en-US" altLang="ko-KR" sz="600" u="none" strike="noStrike" dirty="0">
+                          <a:effectLst/>
+                          <a:latin typeface="+mn-ea"/>
+                          <a:ea typeface="+mn-ea"/>
+                        </a:rPr>
+                        <a:t>0</a:t>
                       </a:r>
+                      <a:endParaRPr lang="en-US" altLang="ko-KR" sz="600" b="0" i="0" u="none" strike="noStrike" dirty="0">
+                        <a:solidFill>
+                          <a:srgbClr val="000000"/>
+                        </a:solidFill>
+                        <a:effectLst/>
+                        <a:latin typeface="+mn-ea"/>
+                        <a:ea typeface="+mn-ea"/>
+                      </a:endParaRPr>
                     </a:p>
                   </a:txBody>
                   <a:tcPr marL="0" marR="0" marT="0" marB="0" anchor="ctr">
@@ -15191,17 +15390,23 @@
                     <a:bodyPr/>
                     <a:lstStyle/>
                     <a:p>
-                      <a:pPr algn="ctr">
-                        <a:defRPr sz="700" b="0">
-                          <a:solidFill>
-                            <a:srgbClr val="445474"/>
-                          </a:solidFill>
-                          <a:latin typeface="맑은 고딕"/>
-                        </a:defRPr>
-                      </a:pPr>
+                      <a:pPr algn="ctr" fontAlgn="ctr"/>
                       <a:r>
-                        <a:t>173.7</a:t>
+                        <a:rPr lang="en-US" altLang="ko-KR" sz="600" u="none" strike="noStrike" dirty="0">
+                          <a:effectLst/>
+                          <a:latin typeface="+mn-ea"/>
+                          <a:ea typeface="+mn-ea"/>
+                        </a:rPr>
+                        <a:t>0</a:t>
                       </a:r>
+                      <a:endParaRPr lang="en-US" altLang="ko-KR" sz="600" b="0" i="0" u="none" strike="noStrike" dirty="0">
+                        <a:solidFill>
+                          <a:srgbClr val="000000"/>
+                        </a:solidFill>
+                        <a:effectLst/>
+                        <a:latin typeface="+mn-ea"/>
+                        <a:ea typeface="+mn-ea"/>
+                      </a:endParaRPr>
                     </a:p>
                   </a:txBody>
                   <a:tcPr marL="0" marR="0" marT="0" marB="0" anchor="ctr">
@@ -15349,17 +15554,23 @@
                     <a:bodyPr/>
                     <a:lstStyle/>
                     <a:p>
-                      <a:pPr algn="ctr">
-                        <a:defRPr sz="700" b="0">
-                          <a:solidFill>
-                            <a:srgbClr val="445474"/>
-                          </a:solidFill>
-                          <a:latin typeface="맑은 고딕"/>
-                        </a:defRPr>
-                      </a:pPr>
+                      <a:pPr algn="ctr" fontAlgn="ctr"/>
                       <a:r>
-                        <a:t>97.7</a:t>
+                        <a:rPr lang="en-US" altLang="ko-KR" sz="600" u="none" strike="noStrike" dirty="0">
+                          <a:effectLst/>
+                          <a:latin typeface="+mn-ea"/>
+                          <a:ea typeface="+mn-ea"/>
+                        </a:rPr>
+                        <a:t>0</a:t>
                       </a:r>
+                      <a:endParaRPr lang="en-US" altLang="ko-KR" sz="600" b="0" i="0" u="none" strike="noStrike" dirty="0">
+                        <a:solidFill>
+                          <a:srgbClr val="000000"/>
+                        </a:solidFill>
+                        <a:effectLst/>
+                        <a:latin typeface="+mn-ea"/>
+                        <a:ea typeface="+mn-ea"/>
+                      </a:endParaRPr>
                     </a:p>
                   </a:txBody>
                   <a:tcPr marL="0" marR="0" marT="0" marB="0" anchor="ctr">
@@ -15510,17 +15721,23 @@
                     <a:bodyPr/>
                     <a:lstStyle/>
                     <a:p>
-                      <a:pPr algn="ctr">
-                        <a:defRPr sz="700" b="0">
-                          <a:solidFill>
-                            <a:srgbClr val="445474"/>
-                          </a:solidFill>
-                          <a:latin typeface="맑은 고딕"/>
-                        </a:defRPr>
-                      </a:pPr>
+                      <a:pPr algn="ctr" fontAlgn="ctr"/>
                       <a:r>
-                        <a:t>10.5</a:t>
+                        <a:rPr lang="en-US" altLang="ko-KR" sz="600" u="none" strike="noStrike" dirty="0">
+                          <a:effectLst/>
+                          <a:latin typeface="+mn-ea"/>
+                          <a:ea typeface="+mn-ea"/>
+                        </a:rPr>
+                        <a:t>0</a:t>
                       </a:r>
+                      <a:endParaRPr lang="en-US" altLang="ko-KR" sz="600" b="0" i="0" u="none" strike="noStrike" dirty="0">
+                        <a:solidFill>
+                          <a:srgbClr val="000000"/>
+                        </a:solidFill>
+                        <a:effectLst/>
+                        <a:latin typeface="+mn-ea"/>
+                        <a:ea typeface="+mn-ea"/>
+                      </a:endParaRPr>
                     </a:p>
                   </a:txBody>
                   <a:tcPr marL="0" marR="0" marT="0" marB="0" anchor="ctr">
@@ -15668,17 +15885,23 @@
                     <a:bodyPr/>
                     <a:lstStyle/>
                     <a:p>
-                      <a:pPr algn="ctr">
-                        <a:defRPr sz="700" b="0">
-                          <a:solidFill>
-                            <a:srgbClr val="445474"/>
-                          </a:solidFill>
-                          <a:latin typeface="맑은 고딕"/>
-                        </a:defRPr>
-                      </a:pPr>
+                      <a:pPr algn="ctr" fontAlgn="ctr"/>
                       <a:r>
-                        <a:t>44.7</a:t>
+                        <a:rPr lang="en-US" altLang="ko-KR" sz="600" u="none" strike="noStrike" dirty="0">
+                          <a:effectLst/>
+                          <a:latin typeface="+mn-ea"/>
+                          <a:ea typeface="+mn-ea"/>
+                        </a:rPr>
+                        <a:t>0</a:t>
                       </a:r>
+                      <a:endParaRPr lang="en-US" altLang="ko-KR" sz="600" b="0" i="0" u="none" strike="noStrike" dirty="0">
+                        <a:solidFill>
+                          <a:srgbClr val="000000"/>
+                        </a:solidFill>
+                        <a:effectLst/>
+                        <a:latin typeface="+mn-ea"/>
+                        <a:ea typeface="+mn-ea"/>
+                      </a:endParaRPr>
                     </a:p>
                   </a:txBody>
                   <a:tcPr marL="0" marR="0" marT="0" marB="0" anchor="ctr">
@@ -15826,17 +16049,23 @@
                     <a:bodyPr/>
                     <a:lstStyle/>
                     <a:p>
-                      <a:pPr algn="ctr">
-                        <a:defRPr sz="700" b="0">
-                          <a:solidFill>
-                            <a:srgbClr val="445474"/>
-                          </a:solidFill>
-                          <a:latin typeface="맑은 고딕"/>
-                        </a:defRPr>
-                      </a:pPr>
+                      <a:pPr algn="ctr" fontAlgn="ctr"/>
                       <a:r>
-                        <a:t>64.7</a:t>
+                        <a:rPr lang="en-US" altLang="ko-KR" sz="600" u="none" strike="noStrike">
+                          <a:effectLst/>
+                          <a:latin typeface="+mn-ea"/>
+                          <a:ea typeface="+mn-ea"/>
+                        </a:rPr>
+                        <a:t>0</a:t>
                       </a:r>
+                      <a:endParaRPr lang="en-US" altLang="ko-KR" sz="600" b="0" i="0" u="none" strike="noStrike">
+                        <a:solidFill>
+                          <a:srgbClr val="000000"/>
+                        </a:solidFill>
+                        <a:effectLst/>
+                        <a:latin typeface="+mn-ea"/>
+                        <a:ea typeface="+mn-ea"/>
+                      </a:endParaRPr>
                     </a:p>
                   </a:txBody>
                   <a:tcPr marL="0" marR="0" marT="0" marB="0" anchor="ctr">
@@ -15984,17 +16213,23 @@
                     <a:bodyPr/>
                     <a:lstStyle/>
                     <a:p>
-                      <a:pPr algn="ctr">
-                        <a:defRPr sz="700" b="0">
-                          <a:solidFill>
-                            <a:srgbClr val="445474"/>
-                          </a:solidFill>
-                          <a:latin typeface="맑은 고딕"/>
-                        </a:defRPr>
-                      </a:pPr>
+                      <a:pPr algn="ctr" fontAlgn="ctr"/>
                       <a:r>
-                        <a:t>122.7</a:t>
+                        <a:rPr lang="en-US" altLang="ko-KR" sz="600" u="none" strike="noStrike" dirty="0">
+                          <a:effectLst/>
+                          <a:latin typeface="+mn-ea"/>
+                          <a:ea typeface="+mn-ea"/>
+                        </a:rPr>
+                        <a:t>0</a:t>
                       </a:r>
+                      <a:endParaRPr lang="en-US" altLang="ko-KR" sz="600" b="0" i="0" u="none" strike="noStrike" dirty="0">
+                        <a:solidFill>
+                          <a:srgbClr val="000000"/>
+                        </a:solidFill>
+                        <a:effectLst/>
+                        <a:latin typeface="+mn-ea"/>
+                        <a:ea typeface="+mn-ea"/>
+                      </a:endParaRPr>
                     </a:p>
                   </a:txBody>
                   <a:tcPr marL="0" marR="0" marT="0" marB="0" anchor="ctr">
@@ -16142,17 +16377,23 @@
                     <a:bodyPr/>
                     <a:lstStyle/>
                     <a:p>
-                      <a:pPr algn="ctr">
-                        <a:defRPr sz="700" b="0">
-                          <a:solidFill>
-                            <a:srgbClr val="445474"/>
-                          </a:solidFill>
-                          <a:latin typeface="맑은 고딕"/>
-                        </a:defRPr>
-                      </a:pPr>
+                      <a:pPr algn="ctr" fontAlgn="ctr"/>
                       <a:r>
-                        <a:t>31.9</a:t>
+                        <a:rPr lang="en-US" altLang="ko-KR" sz="600" u="none" strike="noStrike" dirty="0">
+                          <a:effectLst/>
+                          <a:latin typeface="+mn-ea"/>
+                          <a:ea typeface="+mn-ea"/>
+                        </a:rPr>
+                        <a:t>0</a:t>
                       </a:r>
+                      <a:endParaRPr lang="en-US" altLang="ko-KR" sz="600" b="0" i="0" u="none" strike="noStrike" dirty="0">
+                        <a:solidFill>
+                          <a:srgbClr val="000000"/>
+                        </a:solidFill>
+                        <a:effectLst/>
+                        <a:latin typeface="+mn-ea"/>
+                        <a:ea typeface="+mn-ea"/>
+                      </a:endParaRPr>
                     </a:p>
                   </a:txBody>
                   <a:tcPr marL="0" marR="0" marT="0" marB="0" anchor="ctr">
@@ -16300,17 +16541,23 @@
                     <a:bodyPr/>
                     <a:lstStyle/>
                     <a:p>
-                      <a:pPr algn="ctr">
-                        <a:defRPr sz="700" b="0">
-                          <a:solidFill>
-                            <a:srgbClr val="445474"/>
-                          </a:solidFill>
-                          <a:latin typeface="맑은 고딕"/>
-                        </a:defRPr>
-                      </a:pPr>
+                      <a:pPr algn="ctr" fontAlgn="ctr"/>
                       <a:r>
-                        <a:t>26.4</a:t>
+                        <a:rPr lang="en-US" altLang="ko-KR" sz="600" u="none" strike="noStrike" dirty="0">
+                          <a:effectLst/>
+                          <a:latin typeface="+mn-ea"/>
+                          <a:ea typeface="+mn-ea"/>
+                        </a:rPr>
+                        <a:t>0</a:t>
                       </a:r>
+                      <a:endParaRPr lang="en-US" altLang="ko-KR" sz="600" b="0" i="0" u="none" strike="noStrike" dirty="0">
+                        <a:solidFill>
+                          <a:srgbClr val="000000"/>
+                        </a:solidFill>
+                        <a:effectLst/>
+                        <a:latin typeface="+mn-ea"/>
+                        <a:ea typeface="+mn-ea"/>
+                      </a:endParaRPr>
                     </a:p>
                   </a:txBody>
                   <a:tcPr marL="0" marR="0" marT="0" marB="0" anchor="ctr">
@@ -16458,17 +16705,23 @@
                     <a:bodyPr/>
                     <a:lstStyle/>
                     <a:p>
-                      <a:pPr algn="ctr">
-                        <a:defRPr sz="700" b="0">
-                          <a:solidFill>
-                            <a:srgbClr val="445474"/>
-                          </a:solidFill>
-                          <a:latin typeface="맑은 고딕"/>
-                        </a:defRPr>
-                      </a:pPr>
+                      <a:pPr algn="ctr" fontAlgn="ctr"/>
                       <a:r>
-                        <a:t>24.9</a:t>
+                        <a:rPr lang="en-US" altLang="ko-KR" sz="600" u="none" strike="noStrike">
+                          <a:effectLst/>
+                          <a:latin typeface="+mn-ea"/>
+                          <a:ea typeface="+mn-ea"/>
+                        </a:rPr>
+                        <a:t>0</a:t>
                       </a:r>
+                      <a:endParaRPr lang="en-US" altLang="ko-KR" sz="600" b="0" i="0" u="none" strike="noStrike">
+                        <a:solidFill>
+                          <a:srgbClr val="000000"/>
+                        </a:solidFill>
+                        <a:effectLst/>
+                        <a:latin typeface="+mn-ea"/>
+                        <a:ea typeface="+mn-ea"/>
+                      </a:endParaRPr>
                     </a:p>
                   </a:txBody>
                   <a:tcPr marL="0" marR="0" marT="0" marB="0" anchor="ctr">
@@ -16616,17 +16869,23 @@
                     <a:bodyPr/>
                     <a:lstStyle/>
                     <a:p>
-                      <a:pPr algn="ctr">
-                        <a:defRPr sz="700" b="0">
-                          <a:solidFill>
-                            <a:srgbClr val="445474"/>
-                          </a:solidFill>
-                          <a:latin typeface="맑은 고딕"/>
-                        </a:defRPr>
-                      </a:pPr>
+                      <a:pPr algn="ctr" fontAlgn="ctr"/>
                       <a:r>
-                        <a:t>-7</a:t>
+                        <a:rPr lang="en-US" altLang="ko-KR" sz="600" u="none" strike="noStrike" dirty="0">
+                          <a:effectLst/>
+                          <a:latin typeface="+mn-ea"/>
+                          <a:ea typeface="+mn-ea"/>
+                        </a:rPr>
+                        <a:t>0</a:t>
                       </a:r>
+                      <a:endParaRPr lang="en-US" altLang="ko-KR" sz="600" b="0" i="0" u="none" strike="noStrike" dirty="0">
+                        <a:solidFill>
+                          <a:srgbClr val="000000"/>
+                        </a:solidFill>
+                        <a:effectLst/>
+                        <a:latin typeface="+mn-ea"/>
+                        <a:ea typeface="+mn-ea"/>
+                      </a:endParaRPr>
                     </a:p>
                   </a:txBody>
                   <a:tcPr marL="0" marR="0" marT="0" marB="0" anchor="ctr">
@@ -16774,17 +17033,23 @@
                     <a:bodyPr/>
                     <a:lstStyle/>
                     <a:p>
-                      <a:pPr algn="ctr">
-                        <a:defRPr sz="700" b="0">
-                          <a:solidFill>
-                            <a:srgbClr val="445474"/>
-                          </a:solidFill>
-                          <a:latin typeface="맑은 고딕"/>
-                        </a:defRPr>
-                      </a:pPr>
+                      <a:pPr algn="ctr" fontAlgn="ctr"/>
                       <a:r>
-                        <a:t>30.9</a:t>
+                        <a:rPr lang="en-US" altLang="ko-KR" sz="600" u="none" strike="noStrike">
+                          <a:effectLst/>
+                          <a:latin typeface="+mn-ea"/>
+                          <a:ea typeface="+mn-ea"/>
+                        </a:rPr>
+                        <a:t>0</a:t>
                       </a:r>
+                      <a:endParaRPr lang="en-US" altLang="ko-KR" sz="600" b="0" i="0" u="none" strike="noStrike">
+                        <a:solidFill>
+                          <a:srgbClr val="000000"/>
+                        </a:solidFill>
+                        <a:effectLst/>
+                        <a:latin typeface="+mn-ea"/>
+                        <a:ea typeface="+mn-ea"/>
+                      </a:endParaRPr>
                     </a:p>
                   </a:txBody>
                   <a:tcPr marL="0" marR="0" marT="0" marB="0" anchor="ctr">
@@ -16932,17 +17197,23 @@
                     <a:bodyPr/>
                     <a:lstStyle/>
                     <a:p>
-                      <a:pPr algn="ctr">
-                        <a:defRPr sz="700" b="0">
-                          <a:solidFill>
-                            <a:srgbClr val="445474"/>
-                          </a:solidFill>
-                          <a:latin typeface="맑은 고딕"/>
-                        </a:defRPr>
-                      </a:pPr>
+                      <a:pPr algn="ctr" fontAlgn="ctr"/>
                       <a:r>
-                        <a:t>69</a:t>
+                        <a:rPr lang="en-US" altLang="ko-KR" sz="600" u="none" strike="noStrike">
+                          <a:effectLst/>
+                          <a:latin typeface="+mn-ea"/>
+                          <a:ea typeface="+mn-ea"/>
+                        </a:rPr>
+                        <a:t>0</a:t>
                       </a:r>
+                      <a:endParaRPr lang="en-US" altLang="ko-KR" sz="600" b="0" i="0" u="none" strike="noStrike">
+                        <a:solidFill>
+                          <a:srgbClr val="000000"/>
+                        </a:solidFill>
+                        <a:effectLst/>
+                        <a:latin typeface="+mn-ea"/>
+                        <a:ea typeface="+mn-ea"/>
+                      </a:endParaRPr>
                     </a:p>
                   </a:txBody>
                   <a:tcPr marL="0" marR="0" marT="0" marB="0" anchor="ctr">
@@ -17090,17 +17361,23 @@
                     <a:bodyPr/>
                     <a:lstStyle/>
                     <a:p>
-                      <a:pPr algn="ctr">
-                        <a:defRPr sz="700" b="0">
-                          <a:solidFill>
-                            <a:srgbClr val="445474"/>
-                          </a:solidFill>
-                          <a:latin typeface="맑은 고딕"/>
-                        </a:defRPr>
-                      </a:pPr>
+                      <a:pPr algn="ctr" fontAlgn="ctr"/>
                       <a:r>
-                        <a:t>32.1</a:t>
+                        <a:rPr lang="en-US" altLang="ko-KR" sz="600" u="none" strike="noStrike" dirty="0">
+                          <a:effectLst/>
+                          <a:latin typeface="+mn-ea"/>
+                          <a:ea typeface="+mn-ea"/>
+                        </a:rPr>
+                        <a:t>0</a:t>
                       </a:r>
+                      <a:endParaRPr lang="en-US" altLang="ko-KR" sz="600" b="0" i="0" u="none" strike="noStrike" dirty="0">
+                        <a:solidFill>
+                          <a:srgbClr val="000000"/>
+                        </a:solidFill>
+                        <a:effectLst/>
+                        <a:latin typeface="+mn-ea"/>
+                        <a:ea typeface="+mn-ea"/>
+                      </a:endParaRPr>
                     </a:p>
                   </a:txBody>
                   <a:tcPr marL="0" marR="0" marT="0" marB="0" anchor="ctr">
@@ -17248,17 +17525,23 @@
                     <a:bodyPr/>
                     <a:lstStyle/>
                     <a:p>
-                      <a:pPr algn="ctr">
-                        <a:defRPr sz="700" b="0">
-                          <a:solidFill>
-                            <a:srgbClr val="445474"/>
-                          </a:solidFill>
-                          <a:latin typeface="맑은 고딕"/>
-                        </a:defRPr>
-                      </a:pPr>
+                      <a:pPr algn="ctr" fontAlgn="ctr"/>
                       <a:r>
-                        <a:t>47.3</a:t>
+                        <a:rPr lang="en-US" altLang="ko-KR" sz="600" u="none" strike="noStrike" dirty="0">
+                          <a:effectLst/>
+                          <a:latin typeface="+mn-ea"/>
+                          <a:ea typeface="+mn-ea"/>
+                        </a:rPr>
+                        <a:t>0</a:t>
                       </a:r>
+                      <a:endParaRPr lang="en-US" altLang="ko-KR" sz="600" b="0" i="0" u="none" strike="noStrike" dirty="0">
+                        <a:solidFill>
+                          <a:srgbClr val="000000"/>
+                        </a:solidFill>
+                        <a:effectLst/>
+                        <a:latin typeface="+mn-ea"/>
+                        <a:ea typeface="+mn-ea"/>
+                      </a:endParaRPr>
                     </a:p>
                   </a:txBody>
                   <a:tcPr marL="0" marR="0" marT="0" marB="0" anchor="ctr">
@@ -17406,17 +17689,23 @@
                     <a:bodyPr/>
                     <a:lstStyle/>
                     <a:p>
-                      <a:pPr algn="ctr">
-                        <a:defRPr sz="700" b="0">
-                          <a:solidFill>
-                            <a:srgbClr val="445474"/>
-                          </a:solidFill>
-                          <a:latin typeface="맑은 고딕"/>
-                        </a:defRPr>
-                      </a:pPr>
+                      <a:pPr algn="ctr" fontAlgn="ctr"/>
                       <a:r>
-                        <a:t>63.1</a:t>
+                        <a:rPr lang="en-US" altLang="ko-KR" sz="600" u="none" strike="noStrike" dirty="0">
+                          <a:effectLst/>
+                          <a:latin typeface="+mn-ea"/>
+                          <a:ea typeface="+mn-ea"/>
+                        </a:rPr>
+                        <a:t>0</a:t>
                       </a:r>
+                      <a:endParaRPr lang="en-US" altLang="ko-KR" sz="600" b="0" i="0" u="none" strike="noStrike" dirty="0">
+                        <a:solidFill>
+                          <a:srgbClr val="000000"/>
+                        </a:solidFill>
+                        <a:effectLst/>
+                        <a:latin typeface="+mn-ea"/>
+                        <a:ea typeface="+mn-ea"/>
+                      </a:endParaRPr>
                     </a:p>
                   </a:txBody>
                   <a:tcPr marL="0" marR="0" marT="0" marB="0" anchor="ctr">
@@ -17564,17 +17853,23 @@
                     <a:bodyPr/>
                     <a:lstStyle/>
                     <a:p>
-                      <a:pPr algn="ctr">
-                        <a:defRPr sz="700" b="0">
-                          <a:solidFill>
-                            <a:srgbClr val="445474"/>
-                          </a:solidFill>
-                          <a:latin typeface="맑은 고딕"/>
-                        </a:defRPr>
-                      </a:pPr>
+                      <a:pPr algn="ctr" fontAlgn="ctr"/>
                       <a:r>
-                        <a:t>-47</a:t>
+                        <a:rPr lang="en-US" altLang="ko-KR" sz="600" u="none" strike="noStrike">
+                          <a:effectLst/>
+                          <a:latin typeface="+mn-ea"/>
+                          <a:ea typeface="+mn-ea"/>
+                        </a:rPr>
+                        <a:t>0</a:t>
                       </a:r>
+                      <a:endParaRPr lang="en-US" altLang="ko-KR" sz="600" b="0" i="0" u="none" strike="noStrike">
+                        <a:solidFill>
+                          <a:srgbClr val="000000"/>
+                        </a:solidFill>
+                        <a:effectLst/>
+                        <a:latin typeface="+mn-ea"/>
+                        <a:ea typeface="+mn-ea"/>
+                      </a:endParaRPr>
                     </a:p>
                   </a:txBody>
                   <a:tcPr marL="0" marR="0" marT="0" marB="0" anchor="ctr">
@@ -17730,17 +18025,23 @@
                     <a:bodyPr/>
                     <a:lstStyle/>
                     <a:p>
-                      <a:pPr algn="ctr">
-                        <a:defRPr sz="700" b="0">
-                          <a:solidFill>
-                            <a:srgbClr val="445474"/>
-                          </a:solidFill>
-                          <a:latin typeface="맑은 고딕"/>
-                        </a:defRPr>
-                      </a:pPr>
+                      <a:pPr algn="ctr" fontAlgn="ctr"/>
                       <a:r>
-                        <a:t>39</a:t>
+                        <a:rPr lang="en-US" altLang="ko-KR" sz="600" u="none" strike="noStrike" dirty="0">
+                          <a:effectLst/>
+                          <a:latin typeface="+mn-ea"/>
+                          <a:ea typeface="+mn-ea"/>
+                        </a:rPr>
+                        <a:t>0</a:t>
                       </a:r>
+                      <a:endParaRPr lang="en-US" altLang="ko-KR" sz="600" b="0" i="0" u="none" strike="noStrike" dirty="0">
+                        <a:solidFill>
+                          <a:srgbClr val="000000"/>
+                        </a:solidFill>
+                        <a:effectLst/>
+                        <a:latin typeface="+mn-ea"/>
+                        <a:ea typeface="+mn-ea"/>
+                      </a:endParaRPr>
                     </a:p>
                   </a:txBody>
                   <a:tcPr marL="0" marR="0" marT="0" marB="0" anchor="ctr">
@@ -17888,17 +18189,23 @@
                     <a:bodyPr/>
                     <a:lstStyle/>
                     <a:p>
-                      <a:pPr algn="ctr">
-                        <a:defRPr sz="700" b="0">
-                          <a:solidFill>
-                            <a:srgbClr val="445474"/>
-                          </a:solidFill>
-                          <a:latin typeface="맑은 고딕"/>
-                        </a:defRPr>
-                      </a:pPr>
+                      <a:pPr algn="ctr" fontAlgn="ctr"/>
                       <a:r>
-                        <a:t>106.7</a:t>
+                        <a:rPr lang="en-US" altLang="ko-KR" sz="600" u="none" strike="noStrike" dirty="0">
+                          <a:effectLst/>
+                          <a:latin typeface="+mn-ea"/>
+                          <a:ea typeface="+mn-ea"/>
+                        </a:rPr>
+                        <a:t>0</a:t>
                       </a:r>
+                      <a:endParaRPr lang="en-US" altLang="ko-KR" sz="600" b="0" i="0" u="none" strike="noStrike" dirty="0">
+                        <a:solidFill>
+                          <a:srgbClr val="000000"/>
+                        </a:solidFill>
+                        <a:effectLst/>
+                        <a:latin typeface="+mn-ea"/>
+                        <a:ea typeface="+mn-ea"/>
+                      </a:endParaRPr>
                     </a:p>
                   </a:txBody>
                   <a:tcPr marL="0" marR="0" marT="0" marB="0" anchor="ctr">
@@ -18046,17 +18353,23 @@
                     <a:bodyPr/>
                     <a:lstStyle/>
                     <a:p>
-                      <a:pPr algn="ctr">
-                        <a:defRPr sz="700" b="0">
-                          <a:solidFill>
-                            <a:srgbClr val="445474"/>
-                          </a:solidFill>
-                          <a:latin typeface="맑은 고딕"/>
-                        </a:defRPr>
-                      </a:pPr>
+                      <a:pPr algn="ctr" fontAlgn="ctr"/>
                       <a:r>
-                        <a:t>57.9</a:t>
+                        <a:rPr lang="en-US" altLang="ko-KR" sz="600" u="none" strike="noStrike" dirty="0">
+                          <a:effectLst/>
+                          <a:latin typeface="+mn-ea"/>
+                          <a:ea typeface="+mn-ea"/>
+                        </a:rPr>
+                        <a:t>0</a:t>
                       </a:r>
+                      <a:endParaRPr lang="en-US" altLang="ko-KR" sz="600" b="0" i="0" u="none" strike="noStrike" dirty="0">
+                        <a:solidFill>
+                          <a:srgbClr val="000000"/>
+                        </a:solidFill>
+                        <a:effectLst/>
+                        <a:latin typeface="+mn-ea"/>
+                        <a:ea typeface="+mn-ea"/>
+                      </a:endParaRPr>
                     </a:p>
                   </a:txBody>
                   <a:tcPr marL="0" marR="0" marT="0" marB="0" anchor="ctr">
@@ -18174,12 +18487,11 @@
           <a:bodyPr rtlCol="0" anchor="ctr"/>
           <a:lstStyle/>
           <a:p>
-            <a:pPr algn="ctr">
-              <a:defRPr sz="1300" b="1">
-                <a:latin typeface="맑은 고딕"/>
-              </a:defRPr>
-            </a:pPr>
-            <a:r>
+            <a:r>
+              <a:rPr lang="en-US" altLang="ko-KR" sz="1400" b="1" dirty="0">
+                <a:latin typeface="+mj-ea"/>
+                <a:ea typeface="+mj-ea"/>
+              </a:rPr>
               <a:t>C/C &amp; Main problem</a:t>
             </a:r>
           </a:p>
@@ -18234,12 +18546,11 @@
           <a:bodyPr rtlCol="0" anchor="ctr"/>
           <a:lstStyle/>
           <a:p>
-            <a:pPr algn="ctr">
-              <a:defRPr sz="1300" b="1">
-                <a:latin typeface="맑은 고딕"/>
-              </a:defRPr>
-            </a:pPr>
-            <a:r>
+            <a:r>
+              <a:rPr lang="en-US" altLang="ko-KR" sz="1200" b="1" dirty="0">
+                <a:latin typeface="+mj-ea"/>
+                <a:ea typeface="+mj-ea"/>
+              </a:rPr>
               <a:t>MPH:</a:t>
             </a:r>
           </a:p>
@@ -18333,13 +18644,16 @@
           </a:bodyPr>
           <a:lstStyle/>
           <a:p>
-            <a:pPr algn="ctr">
-              <a:defRPr sz="1300" b="1">
-                <a:latin typeface="맑은 고딕"/>
-              </a:defRPr>
-            </a:pPr>
-            <a:r>
-              <a:t>HGI:-3.2</a:t>
+            <a:pPr eaLnBrk="1" hangingPunct="1"/>
+            <a:r>
+              <a:rPr lang="en-US" altLang="ko-KR" sz="1400" b="1" dirty="0">
+                <a:solidFill>
+                  <a:srgbClr val="000000"/>
+                </a:solidFill>
+                <a:latin typeface="+mn-ea"/>
+                <a:cs typeface="Times New Roman Bold" panose="02020803070505020304" pitchFamily="18" charset="0"/>
+              </a:rPr>
+              <a:t>HGI:+</a:t>
             </a:r>
           </a:p>
         </p:txBody>
@@ -18423,13 +18737,16 @@
           </a:bodyPr>
           <a:lstStyle/>
           <a:p>
-            <a:pPr algn="ctr">
-              <a:defRPr sz="1300" b="1">
-                <a:latin typeface="맑은 고딕"/>
-              </a:defRPr>
-            </a:pPr>
-            <a:r>
-              <a:t>VGI:33.1</a:t>
+            <a:pPr eaLnBrk="1" hangingPunct="1"/>
+            <a:r>
+              <a:rPr lang="en-US" altLang="ko-KR" sz="1400" b="1" dirty="0">
+                <a:solidFill>
+                  <a:srgbClr val="000000"/>
+                </a:solidFill>
+                <a:latin typeface="+mn-ea"/>
+                <a:cs typeface="Times New Roman Bold" panose="02020803070505020304" pitchFamily="18" charset="0"/>
+              </a:rPr>
+              <a:t>VGI:+</a:t>
             </a:r>
           </a:p>
         </p:txBody>
@@ -18755,13 +19072,16 @@
           </a:bodyPr>
           <a:lstStyle/>
           <a:p>
-            <a:pPr algn="ctr">
-              <a:defRPr sz="1300" b="1">
-                <a:latin typeface="맑은 고딕"/>
-              </a:defRPr>
-            </a:pPr>
-            <a:r>
-              <a:t>IAPDI:81</a:t>
+            <a:pPr algn="ctr" eaLnBrk="1" hangingPunct="1"/>
+            <a:r>
+              <a:rPr lang="en-US" altLang="ko-KR" sz="1300" b="1" dirty="0">
+                <a:solidFill>
+                  <a:srgbClr val="000000"/>
+                </a:solidFill>
+                <a:latin typeface="+mn-ea"/>
+                <a:cs typeface="Times New Roman Bold" panose="02020803070505020304" pitchFamily="18" charset="0"/>
+              </a:rPr>
+              <a:t>IAPDI:</a:t>
             </a:r>
           </a:p>
         </p:txBody>
@@ -18975,13 +19295,16 @@
           </a:bodyPr>
           <a:lstStyle/>
           <a:p>
-            <a:pPr algn="ctr">
-              <a:defRPr sz="1300" b="1">
-                <a:latin typeface="맑은 고딕"/>
-              </a:defRPr>
-            </a:pPr>
-            <a:r>
-              <a:t>2APDL:20.6</a:t>
+            <a:pPr eaLnBrk="1" hangingPunct="1"/>
+            <a:r>
+              <a:rPr lang="en-US" altLang="ko-KR" sz="1300" b="1" dirty="0">
+                <a:solidFill>
+                  <a:srgbClr val="000000"/>
+                </a:solidFill>
+                <a:latin typeface="+mn-ea"/>
+                <a:cs typeface="Times New Roman Bold" panose="02020803070505020304" pitchFamily="18" charset="0"/>
+              </a:rPr>
+              <a:t>2APDL:</a:t>
             </a:r>
           </a:p>
         </p:txBody>
@@ -19014,13 +19337,16 @@
           </a:bodyPr>
           <a:lstStyle/>
           <a:p>
-            <a:pPr algn="ctr">
-              <a:defRPr sz="1300" b="1">
-                <a:latin typeface="맑은 고딕"/>
-              </a:defRPr>
-            </a:pPr>
-            <a:r>
-              <a:t>IODI:48.6</a:t>
+            <a:pPr eaLnBrk="1" hangingPunct="1"/>
+            <a:r>
+              <a:rPr lang="en-US" altLang="ko-KR" sz="1300" b="1" dirty="0">
+                <a:solidFill>
+                  <a:srgbClr val="000000"/>
+                </a:solidFill>
+                <a:latin typeface="+mn-ea"/>
+                <a:cs typeface="Times New Roman Bold" panose="02020803070505020304" pitchFamily="18" charset="0"/>
+              </a:rPr>
+              <a:t>IODI:</a:t>
             </a:r>
           </a:p>
         </p:txBody>
@@ -19096,13 +19422,16 @@
           </a:bodyPr>
           <a:lstStyle/>
           <a:p>
-            <a:pPr algn="ctr">
-              <a:defRPr sz="1300" b="1">
-                <a:latin typeface="맑은 고딕"/>
-              </a:defRPr>
-            </a:pPr>
-            <a:r>
-              <a:t>VDL:4.5</a:t>
+            <a:pPr eaLnBrk="1" hangingPunct="1"/>
+            <a:r>
+              <a:rPr lang="en-US" altLang="ko-KR" sz="1300" b="1" dirty="0">
+                <a:solidFill>
+                  <a:srgbClr val="000000"/>
+                </a:solidFill>
+                <a:latin typeface="+mn-ea"/>
+                <a:cs typeface="Times New Roman Bold" panose="02020803070505020304" pitchFamily="18" charset="0"/>
+              </a:rPr>
+              <a:t>VDL:</a:t>
             </a:r>
           </a:p>
         </p:txBody>
@@ -19178,14 +19507,34 @@
           </a:bodyPr>
           <a:lstStyle/>
           <a:p>
-            <a:pPr algn="ctr">
-              <a:defRPr sz="1300" b="1">
-                <a:latin typeface="맑은 고딕"/>
-              </a:defRPr>
-            </a:pPr>
-            <a:r>
-              <a:t>CEPH RESULT</a:t>
-            </a:r>
+            <a:pPr eaLnBrk="1" hangingPunct="1"/>
+            <a:r>
+              <a:rPr lang="en-US" altLang="ko-KR" sz="1400" b="1" dirty="0">
+                <a:solidFill>
+                  <a:srgbClr val="000000"/>
+                </a:solidFill>
+                <a:latin typeface="+mn-ea"/>
+                <a:cs typeface="Times New Roman Bold" panose="02020803070505020304" pitchFamily="18" charset="0"/>
+              </a:rPr>
+              <a:t>CEPH </a:t>
+            </a:r>
+            <a:r>
+              <a:rPr lang="ko-KR" altLang="en-US" sz="1400" b="1" dirty="0">
+                <a:solidFill>
+                  <a:srgbClr val="000000"/>
+                </a:solidFill>
+                <a:latin typeface="+mn-ea"/>
+                <a:cs typeface="Times New Roman Bold" panose="02020803070505020304" pitchFamily="18" charset="0"/>
+              </a:rPr>
+              <a:t>데이터</a:t>
+            </a:r>
+            <a:endParaRPr lang="en-US" altLang="ko-KR" sz="1400" b="1" dirty="0">
+              <a:solidFill>
+                <a:srgbClr val="000000"/>
+              </a:solidFill>
+              <a:latin typeface="+mn-ea"/>
+              <a:cs typeface="Times New Roman Bold" panose="02020803070505020304" pitchFamily="18" charset="0"/>
+            </a:endParaRPr>
           </a:p>
         </p:txBody>
       </p:sp>
@@ -19217,13 +19566,16 @@
           </a:bodyPr>
           <a:lstStyle/>
           <a:p>
-            <a:pPr algn="ctr">
-              <a:defRPr sz="1300" b="1">
-                <a:latin typeface="맑은 고딕"/>
-              </a:defRPr>
-            </a:pPr>
-            <a:r>
-              <a:t>CFD:35</a:t>
+            <a:pPr eaLnBrk="1" hangingPunct="1"/>
+            <a:r>
+              <a:rPr lang="en-US" altLang="ko-KR" sz="1400" b="1" dirty="0">
+                <a:solidFill>
+                  <a:srgbClr val="000000"/>
+                </a:solidFill>
+                <a:latin typeface="+mn-ea"/>
+                <a:cs typeface="Times New Roman Bold" panose="02020803070505020304" pitchFamily="18" charset="0"/>
+              </a:rPr>
+              <a:t>CFD:</a:t>
             </a:r>
           </a:p>
         </p:txBody>
@@ -19256,12 +19608,15 @@
           </a:bodyPr>
           <a:lstStyle/>
           <a:p>
-            <a:pPr algn="ctr">
-              <a:defRPr sz="1300" b="1">
-                <a:latin typeface="맑은 고딕"/>
-              </a:defRPr>
-            </a:pPr>
-            <a:r>
+            <a:pPr eaLnBrk="1" hangingPunct="1"/>
+            <a:r>
+              <a:rPr lang="en-US" altLang="ko-KR" sz="1600" b="1" dirty="0">
+                <a:solidFill>
+                  <a:srgbClr val="000000"/>
+                </a:solidFill>
+                <a:latin typeface="+mn-ea"/>
+                <a:cs typeface="Times New Roman Bold" panose="02020803070505020304" pitchFamily="18" charset="0"/>
+              </a:rPr>
               <a:t>Extraction:</a:t>
             </a:r>
           </a:p>
@@ -19314,30 +19669,6 @@
           </a:p>
         </p:txBody>
       </p:sp>
-      <p:pic>
-        <p:nvPicPr>
-          <p:cNvPr id="3170" name="Picture 3169" descr="oral_default.jpg"/>
-          <p:cNvPicPr>
-            <a:picLocks noChangeAspect="1"/>
-          </p:cNvPicPr>
-          <p:nvPr/>
-        </p:nvPicPr>
-        <p:blipFill>
-          <a:blip r:embed="rId2"/>
-          <a:stretch>
-            <a:fillRect/>
-          </a:stretch>
-        </p:blipFill>
-        <p:spPr>
-          <a:xfrm>
-            <a:off x="2468880" y="502920"/>
-            <a:ext cx="1463040" cy="1005840"/>
-          </a:xfrm>
-          <a:prstGeom prst="rect">
-            <a:avLst/>
-          </a:prstGeom>
-        </p:spPr>
-      </p:pic>
     </p:spTree>
     <p:extLst>
       <p:ext uri="{BB962C8B-B14F-4D97-AF65-F5344CB8AC3E}">
@@ -19368,6 +19699,30 @@
           <a:chExt cx="0" cy="0"/>
         </a:xfrm>
       </p:grpSpPr>
+      <p:pic>
+        <p:nvPicPr>
+          <p:cNvPr id="2" name="Picture 1" descr="pso.jpg"/>
+          <p:cNvPicPr>
+            <a:picLocks noChangeAspect="1"/>
+          </p:cNvPicPr>
+          <p:nvPr/>
+        </p:nvPicPr>
+        <p:blipFill>
+          <a:blip r:embed="rId2"/>
+          <a:stretch>
+            <a:fillRect/>
+          </a:stretch>
+        </p:blipFill>
+        <p:spPr>
+          <a:xfrm>
+            <a:off x="305748" y="0"/>
+            <a:ext cx="8532503" cy="6858000"/>
+          </a:xfrm>
+          <a:prstGeom prst="rect">
+            <a:avLst/>
+          </a:prstGeom>
+        </p:spPr>
+      </p:pic>
     </p:spTree>
     <p:extLst>
       <p:ext uri="{BB962C8B-B14F-4D97-AF65-F5344CB8AC3E}">
@@ -28891,8 +29246,8 @@
         </p:blipFill>
         <p:spPr>
           <a:xfrm>
-            <a:off x="1588201" y="0"/>
-            <a:ext cx="5967596" cy="6858000"/>
+            <a:off x="305748" y="0"/>
+            <a:ext cx="8532503" cy="6858000"/>
           </a:xfrm>
           <a:prstGeom prst="rect">
             <a:avLst/>
@@ -29177,14 +29532,14 @@
       </p:pic>
       <p:pic>
         <p:nvPicPr>
-          <p:cNvPr id="3" name="Picture 2" descr="oralPhoto_2.jpg"/>
+          <p:cNvPr id="3" name="Picture 2" descr="oral_default.jpg"/>
           <p:cNvPicPr>
             <a:picLocks noChangeAspect="1"/>
           </p:cNvPicPr>
           <p:nvPr/>
         </p:nvPicPr>
         <p:blipFill>
-          <a:blip r:embed="rId3"/>
+          <a:blip r:embed="rId2"/>
           <a:stretch>
             <a:fillRect/>
           </a:stretch>
@@ -29371,8 +29726,8 @@
         </p:blipFill>
         <p:spPr>
           <a:xfrm>
-            <a:off x="1585837" y="0"/>
-            <a:ext cx="5972324" cy="6858000"/>
+            <a:off x="311348" y="0"/>
+            <a:ext cx="8521302" cy="6858000"/>
           </a:xfrm>
           <a:prstGeom prst="rect">
             <a:avLst/>

--- a/output_ppt.pptx
+++ b/output_ppt.pptx
@@ -19701,7 +19701,7 @@
       </p:grpSpPr>
       <p:pic>
         <p:nvPicPr>
-          <p:cNvPr id="2" name="Picture 1" descr="pso.jpg"/>
+          <p:cNvPr id="2" name="Picture 1" descr="default_image.jpg"/>
           <p:cNvPicPr>
             <a:picLocks noChangeAspect="1"/>
           </p:cNvPicPr>
@@ -19715,8 +19715,8 @@
         </p:blipFill>
         <p:spPr>
           <a:xfrm>
-            <a:off x="305748" y="0"/>
-            <a:ext cx="8532503" cy="6858000"/>
+            <a:off x="2275973" y="0"/>
+            <a:ext cx="4592052" cy="6858000"/>
           </a:xfrm>
           <a:prstGeom prst="rect">
             <a:avLst/>
@@ -19753,6 +19753,30 @@
           <a:chExt cx="0" cy="0"/>
         </a:xfrm>
       </p:grpSpPr>
+      <p:pic>
+        <p:nvPicPr>
+          <p:cNvPr id="2" name="Picture 1" descr="frontal_ax.jpg"/>
+          <p:cNvPicPr>
+            <a:picLocks noChangeAspect="1"/>
+          </p:cNvPicPr>
+          <p:nvPr/>
+        </p:nvPicPr>
+        <p:blipFill>
+          <a:blip r:embed="rId2"/>
+          <a:stretch>
+            <a:fillRect/>
+          </a:stretch>
+        </p:blipFill>
+        <p:spPr>
+          <a:xfrm>
+            <a:off x="312372" y="0"/>
+            <a:ext cx="8519254" cy="6858000"/>
+          </a:xfrm>
+          <a:prstGeom prst="rect">
+            <a:avLst/>
+          </a:prstGeom>
+        </p:spPr>
+      </p:pic>
     </p:spTree>
     <p:extLst>
       <p:ext uri="{BB962C8B-B14F-4D97-AF65-F5344CB8AC3E}">
@@ -29232,7 +29256,7 @@
       </p:grpSpPr>
       <p:pic>
         <p:nvPicPr>
-          <p:cNvPr id="2" name="Picture 1" descr="psa.jpg"/>
+          <p:cNvPr id="2" name="Picture 1" descr="default_image.jpg"/>
           <p:cNvPicPr>
             <a:picLocks noChangeAspect="1"/>
           </p:cNvPicPr>
@@ -29246,8 +29270,8 @@
         </p:blipFill>
         <p:spPr>
           <a:xfrm>
-            <a:off x="305748" y="0"/>
-            <a:ext cx="8532503" cy="6858000"/>
+            <a:off x="2275973" y="0"/>
+            <a:ext cx="4592052" cy="6858000"/>
           </a:xfrm>
           <a:prstGeom prst="rect">
             <a:avLst/>
@@ -29766,7 +29790,7 @@
       </p:grpSpPr>
       <p:pic>
         <p:nvPicPr>
-          <p:cNvPr id="2" name="Picture 1" descr="default_image.jpg"/>
+          <p:cNvPr id="2" name="Picture 1" descr="frontal_ceph.jpg"/>
           <p:cNvPicPr>
             <a:picLocks noChangeAspect="1"/>
           </p:cNvPicPr>
@@ -29780,8 +29804,8 @@
         </p:blipFill>
         <p:spPr>
           <a:xfrm>
-            <a:off x="2275973" y="0"/>
-            <a:ext cx="4592052" cy="6858000"/>
+            <a:off x="312558" y="0"/>
+            <a:ext cx="8518882" cy="6858000"/>
           </a:xfrm>
           <a:prstGeom prst="rect">
             <a:avLst/>

--- a/output_ppt.pptx
+++ b/output_ppt.pptx
@@ -19755,7 +19755,7 @@
       </p:grpSpPr>
       <p:pic>
         <p:nvPicPr>
-          <p:cNvPr id="2" name="Picture 1" descr="frontal_ax.jpg"/>
+          <p:cNvPr id="2" name="Picture 1" descr="default_image.jpg"/>
           <p:cNvPicPr>
             <a:picLocks noChangeAspect="1"/>
           </p:cNvPicPr>
@@ -19769,8 +19769,8 @@
         </p:blipFill>
         <p:spPr>
           <a:xfrm>
-            <a:off x="312372" y="0"/>
-            <a:ext cx="8519254" cy="6858000"/>
+            <a:off x="2275973" y="0"/>
+            <a:ext cx="4592052" cy="6858000"/>
           </a:xfrm>
           <a:prstGeom prst="rect">
             <a:avLst/>
@@ -29790,7 +29790,7 @@
       </p:grpSpPr>
       <p:pic>
         <p:nvPicPr>
-          <p:cNvPr id="2" name="Picture 1" descr="frontal_ceph.jpg"/>
+          <p:cNvPr id="2" name="Picture 1" descr="default_image.jpg"/>
           <p:cNvPicPr>
             <a:picLocks noChangeAspect="1"/>
           </p:cNvPicPr>
@@ -29804,8 +29804,8 @@
         </p:blipFill>
         <p:spPr>
           <a:xfrm>
-            <a:off x="312558" y="0"/>
-            <a:ext cx="8518882" cy="6858000"/>
+            <a:off x="2275973" y="0"/>
+            <a:ext cx="4592052" cy="6858000"/>
           </a:xfrm>
           <a:prstGeom prst="rect">
             <a:avLst/>
